--- a/presentacion/Claude_Code_Presentacion.pptx
+++ b/presentacion/Claude_Code_Presentacion.pptx
@@ -9869,7 +9869,7 @@
                 </a:solidFill>
                 <a:latin typeface="Segoe UI"/>
               </a:rPr>
-              <a:t>usa Serena antes de abrir ficheros de 4–6k líneas · find_referencing_symbols SIEMPRE antes de renombrar. </a:t>
+              <a:t>codegraph_explore PRIMERO (survey en 1 llamada) · Serena find_referencing_symbols para el chequeo preciso antes de renombrar. </a:t>
             </a:r>
             <a:r>
               <a:rPr sz="1200" b="0">
@@ -9891,7 +9891,7 @@
         </p:nvSpPr>
         <p:spPr>
           <a:xfrm>
-            <a:off x="640080" y="2331720"/>
+            <a:off x="640080" y="2286000"/>
             <a:ext cx="10927080" cy="457200"/>
           </a:xfrm>
           <a:prstGeom prst="roundRect">
@@ -9939,7 +9939,7 @@
         </p:nvSpPr>
         <p:spPr>
           <a:xfrm>
-            <a:off x="868680" y="2377439"/>
+            <a:off x="868680" y="2331720"/>
             <a:ext cx="2651760" cy="365760"/>
           </a:xfrm>
           <a:prstGeom prst="rect">
@@ -9984,7 +9984,7 @@
         </p:nvSpPr>
         <p:spPr>
           <a:xfrm>
-            <a:off x="3611880" y="2377439"/>
+            <a:off x="3611880" y="2331720"/>
             <a:ext cx="6400800" cy="365760"/>
           </a:xfrm>
           <a:prstGeom prst="rect">
@@ -10029,7 +10029,7 @@
         </p:nvSpPr>
         <p:spPr>
           <a:xfrm>
-            <a:off x="10149840" y="2377439"/>
+            <a:off x="10149840" y="2331720"/>
             <a:ext cx="1280160" cy="365760"/>
           </a:xfrm>
           <a:prstGeom prst="rect">
@@ -10074,7 +10074,7 @@
         </p:nvSpPr>
         <p:spPr>
           <a:xfrm>
-            <a:off x="640080" y="2880360"/>
+            <a:off x="640080" y="2834640"/>
             <a:ext cx="10927080" cy="457200"/>
           </a:xfrm>
           <a:prstGeom prst="roundRect">
@@ -10122,7 +10122,7 @@
         </p:nvSpPr>
         <p:spPr>
           <a:xfrm>
-            <a:off x="868680" y="2926079"/>
+            <a:off x="868680" y="2880360"/>
             <a:ext cx="2651760" cy="365760"/>
           </a:xfrm>
           <a:prstGeom prst="rect">
@@ -10154,7 +10154,7 @@
                 </a:solidFill>
                 <a:latin typeface="Segoe UI"/>
               </a:rPr>
-              <a:t>Navegar código</a:t>
+              <a:t>Navegar (survey)</a:t>
             </a:r>
           </a:p>
         </p:txBody>
@@ -10167,7 +10167,7 @@
         </p:nvSpPr>
         <p:spPr>
           <a:xfrm>
-            <a:off x="3611880" y="2926079"/>
+            <a:off x="3611880" y="2880360"/>
             <a:ext cx="6400800" cy="365760"/>
           </a:xfrm>
           <a:prstGeom prst="rect">
@@ -10199,7 +10199,7 @@
                 </a:solidFill>
                 <a:latin typeface="Segoe UI"/>
               </a:rPr>
-              <a:t>Serena (símbolos) · CodeGraph (rutas + blast radius)</a:t>
+              <a:t>CodeGraph codegraph_explore — fuente + rutas + blast radius + cobertura</a:t>
             </a:r>
           </a:p>
         </p:txBody>
@@ -10212,7 +10212,7 @@
         </p:nvSpPr>
         <p:spPr>
           <a:xfrm>
-            <a:off x="10149840" y="2926079"/>
+            <a:off x="10149840" y="2880360"/>
             <a:ext cx="1280160" cy="365760"/>
           </a:xfrm>
           <a:prstGeom prst="rect">
@@ -10244,7 +10244,7 @@
                 </a:solidFill>
                 <a:latin typeface="Segoe UI"/>
               </a:rPr>
-              <a:t>determinista</a:t>
+              <a:t>1 llamada</a:t>
             </a:r>
           </a:p>
         </p:txBody>
@@ -10257,7 +10257,7 @@
         </p:nvSpPr>
         <p:spPr>
           <a:xfrm>
-            <a:off x="640080" y="3429000"/>
+            <a:off x="640080" y="3383280"/>
             <a:ext cx="10927080" cy="457200"/>
           </a:xfrm>
           <a:prstGeom prst="roundRect">
@@ -10305,7 +10305,7 @@
         </p:nvSpPr>
         <p:spPr>
           <a:xfrm>
-            <a:off x="868680" y="3474720"/>
+            <a:off x="868680" y="3429000"/>
             <a:ext cx="2651760" cy="365760"/>
           </a:xfrm>
           <a:prstGeom prst="rect">
@@ -10337,7 +10337,7 @@
                 </a:solidFill>
                 <a:latin typeface="Segoe UI"/>
               </a:rPr>
-              <a:t>Diagnosticar</a:t>
+              <a:t>Refactor-check</a:t>
             </a:r>
           </a:p>
         </p:txBody>
@@ -10350,7 +10350,7 @@
         </p:nvSpPr>
         <p:spPr>
           <a:xfrm>
-            <a:off x="3611880" y="3474720"/>
+            <a:off x="3611880" y="3429000"/>
             <a:ext cx="6400800" cy="365760"/>
           </a:xfrm>
           <a:prstGeom prst="rect">
@@ -10382,7 +10382,7 @@
                 </a:solidFill>
                 <a:latin typeface="Segoe UI"/>
               </a:rPr>
-              <a:t>Oráculo determinista: parser / validador / _diag_*.py</a:t>
+              <a:t>Serena find_referencing_symbols — desambigua por clase (antes de renombrar)</a:t>
             </a:r>
           </a:p>
         </p:txBody>
@@ -10395,7 +10395,7 @@
         </p:nvSpPr>
         <p:spPr>
           <a:xfrm>
-            <a:off x="10149840" y="3474720"/>
+            <a:off x="10149840" y="3429000"/>
             <a:ext cx="1280160" cy="365760"/>
           </a:xfrm>
           <a:prstGeom prst="rect">
@@ -10427,7 +10427,7 @@
                 </a:solidFill>
                 <a:latin typeface="Segoe UI"/>
               </a:rPr>
-              <a:t>coste 0</a:t>
+              <a:t>preciso</a:t>
             </a:r>
           </a:p>
         </p:txBody>
@@ -10440,7 +10440,7 @@
         </p:nvSpPr>
         <p:spPr>
           <a:xfrm>
-            <a:off x="640080" y="3977639"/>
+            <a:off x="640080" y="3931920"/>
             <a:ext cx="10927080" cy="457200"/>
           </a:xfrm>
           <a:prstGeom prst="roundRect">
@@ -10488,7 +10488,7 @@
         </p:nvSpPr>
         <p:spPr>
           <a:xfrm>
-            <a:off x="868680" y="4023359"/>
+            <a:off x="868680" y="3977639"/>
             <a:ext cx="2651760" cy="365760"/>
           </a:xfrm>
           <a:prstGeom prst="rect">
@@ -10520,7 +10520,7 @@
                 </a:solidFill>
                 <a:latin typeface="Segoe UI"/>
               </a:rPr>
-              <a:t>Entorno (logs, config)</a:t>
+              <a:t>Diagnosticar</a:t>
             </a:r>
           </a:p>
         </p:txBody>
@@ -10533,7 +10533,7 @@
         </p:nvSpPr>
         <p:spPr>
           <a:xfrm>
-            <a:off x="3611880" y="4023359"/>
+            <a:off x="3611880" y="3977639"/>
             <a:ext cx="6400800" cy="365760"/>
           </a:xfrm>
           <a:prstGeom prst="rect">
@@ -10565,7 +10565,7 @@
                 </a:solidFill>
                 <a:latin typeface="Segoe UI"/>
               </a:rPr>
-              <a:t>AWS CLI — CloudWatch · lambda get-function · SQS/DLQ</a:t>
+              <a:t>Oráculo determinista: parser / validador / _diag_*.py</a:t>
             </a:r>
           </a:p>
         </p:txBody>
@@ -10578,7 +10578,7 @@
         </p:nvSpPr>
         <p:spPr>
           <a:xfrm>
-            <a:off x="10149840" y="4023359"/>
+            <a:off x="10149840" y="3977639"/>
             <a:ext cx="1280160" cy="365760"/>
           </a:xfrm>
           <a:prstGeom prst="rect">
@@ -10610,7 +10610,7 @@
                 </a:solidFill>
                 <a:latin typeface="Segoe UI"/>
               </a:rPr>
-              <a:t>read-only</a:t>
+              <a:t>coste 0</a:t>
             </a:r>
           </a:p>
         </p:txBody>
@@ -10623,7 +10623,7 @@
         </p:nvSpPr>
         <p:spPr>
           <a:xfrm>
-            <a:off x="640080" y="4526279"/>
+            <a:off x="640080" y="4480560"/>
             <a:ext cx="10927080" cy="457200"/>
           </a:xfrm>
           <a:prstGeom prst="roundRect">
@@ -10671,7 +10671,7 @@
         </p:nvSpPr>
         <p:spPr>
           <a:xfrm>
-            <a:off x="868680" y="4571999"/>
+            <a:off x="868680" y="4526280"/>
             <a:ext cx="2651760" cy="365760"/>
           </a:xfrm>
           <a:prstGeom prst="rect">
@@ -10703,7 +10703,7 @@
                 </a:solidFill>
                 <a:latin typeface="Segoe UI"/>
               </a:rPr>
-              <a:t>Contrato de salida</a:t>
+              <a:t>Entorno (logs, config)</a:t>
             </a:r>
           </a:p>
         </p:txBody>
@@ -10716,7 +10716,7 @@
         </p:nvSpPr>
         <p:spPr>
           <a:xfrm>
-            <a:off x="3611880" y="4571999"/>
+            <a:off x="3611880" y="4526280"/>
             <a:ext cx="6400800" cy="365760"/>
           </a:xfrm>
           <a:prstGeom prst="rect">
@@ -10748,7 +10748,7 @@
                 </a:solidFill>
                 <a:latin typeface="Segoe UI"/>
               </a:rPr>
-              <a:t>Playwright / F12 sobre el endpoint que ve el consumidor</a:t>
+              <a:t>AWS CLI — CloudWatch · lambda get-function · SQS/DLQ</a:t>
             </a:r>
           </a:p>
         </p:txBody>
@@ -10761,7 +10761,7 @@
         </p:nvSpPr>
         <p:spPr>
           <a:xfrm>
-            <a:off x="10149840" y="4571999"/>
+            <a:off x="10149840" y="4526280"/>
             <a:ext cx="1280160" cy="365760"/>
           </a:xfrm>
           <a:prstGeom prst="rect">
@@ -10793,7 +10793,7 @@
                 </a:solidFill>
                 <a:latin typeface="Segoe UI"/>
               </a:rPr>
-              <a:t>reproducir</a:t>
+              <a:t>read-only</a:t>
             </a:r>
           </a:p>
         </p:txBody>
@@ -10806,7 +10806,190 @@
         </p:nvSpPr>
         <p:spPr>
           <a:xfrm>
-            <a:off x="640080" y="5074920"/>
+            <a:off x="640080" y="5029200"/>
+            <a:ext cx="10927080" cy="457200"/>
+          </a:xfrm>
+          <a:prstGeom prst="roundRect">
+            <a:avLst>
+              <a:gd name="adj" fmla="val 12000"/>
+            </a:avLst>
+          </a:prstGeom>
+          <a:solidFill>
+            <a:srgbClr val="1A212B"/>
+          </a:solidFill>
+          <a:ln w="9525">
+            <a:solidFill>
+              <a:srgbClr val="2E3948"/>
+            </a:solidFill>
+          </a:ln>
+          <a:effectLst/>
+        </p:spPr>
+        <p:style>
+          <a:lnRef idx="1">
+            <a:schemeClr val="accent1"/>
+          </a:lnRef>
+          <a:fillRef idx="3">
+            <a:schemeClr val="accent1"/>
+          </a:fillRef>
+          <a:effectRef idx="2">
+            <a:schemeClr val="accent1"/>
+          </a:effectRef>
+          <a:fontRef idx="minor">
+            <a:schemeClr val="lt1"/>
+          </a:fontRef>
+        </p:style>
+        <p:txBody>
+          <a:bodyPr rtlCol="0" anchor="ctr"/>
+          <a:lstStyle/>
+          <a:p>
+            <a:pPr algn="ctr"/>
+          </a:p>
+        </p:txBody>
+      </p:sp>
+      <p:sp>
+        <p:nvSpPr>
+          <p:cNvPr id="31" name="TextBox 30"/>
+          <p:cNvSpPr txBox="1"/>
+          <p:nvPr/>
+        </p:nvSpPr>
+        <p:spPr>
+          <a:xfrm>
+            <a:off x="868680" y="5074920"/>
+            <a:ext cx="2651760" cy="365760"/>
+          </a:xfrm>
+          <a:prstGeom prst="rect">
+            <a:avLst/>
+          </a:prstGeom>
+          <a:noFill/>
+        </p:spPr>
+        <p:txBody>
+          <a:bodyPr wrap="square" anchor="ctr" lIns="0" rIns="0" tIns="0" bIns="0">
+            <a:spAutoFit/>
+          </a:bodyPr>
+          <a:lstStyle/>
+          <a:p>
+            <a:pPr algn="l">
+              <a:lnSpc>
+                <a:spcPct val="100000"/>
+              </a:lnSpc>
+              <a:spcBef>
+                <a:spcPts val="0"/>
+              </a:spcBef>
+              <a:spcAft>
+                <a:spcPts val="400"/>
+              </a:spcAft>
+            </a:pPr>
+            <a:r>
+              <a:rPr sz="1150" b="1">
+                <a:solidFill>
+                  <a:srgbClr val="7AA2C7"/>
+                </a:solidFill>
+                <a:latin typeface="Segoe UI"/>
+              </a:rPr>
+              <a:t>Contrato de salida</a:t>
+            </a:r>
+          </a:p>
+        </p:txBody>
+      </p:sp>
+      <p:sp>
+        <p:nvSpPr>
+          <p:cNvPr id="32" name="TextBox 31"/>
+          <p:cNvSpPr txBox="1"/>
+          <p:nvPr/>
+        </p:nvSpPr>
+        <p:spPr>
+          <a:xfrm>
+            <a:off x="3611880" y="5074920"/>
+            <a:ext cx="6400800" cy="365760"/>
+          </a:xfrm>
+          <a:prstGeom prst="rect">
+            <a:avLst/>
+          </a:prstGeom>
+          <a:noFill/>
+        </p:spPr>
+        <p:txBody>
+          <a:bodyPr wrap="square" anchor="ctr" lIns="0" rIns="0" tIns="0" bIns="0">
+            <a:spAutoFit/>
+          </a:bodyPr>
+          <a:lstStyle/>
+          <a:p>
+            <a:pPr algn="l">
+              <a:lnSpc>
+                <a:spcPct val="100000"/>
+              </a:lnSpc>
+              <a:spcBef>
+                <a:spcPts val="0"/>
+              </a:spcBef>
+              <a:spcAft>
+                <a:spcPts val="400"/>
+              </a:spcAft>
+            </a:pPr>
+            <a:r>
+              <a:rPr sz="1150" b="0">
+                <a:solidFill>
+                  <a:srgbClr val="E8EAED"/>
+                </a:solidFill>
+                <a:latin typeface="Segoe UI"/>
+              </a:rPr>
+              <a:t>Playwright / F12 sobre el endpoint que ve el consumidor</a:t>
+            </a:r>
+          </a:p>
+        </p:txBody>
+      </p:sp>
+      <p:sp>
+        <p:nvSpPr>
+          <p:cNvPr id="33" name="TextBox 32"/>
+          <p:cNvSpPr txBox="1"/>
+          <p:nvPr/>
+        </p:nvSpPr>
+        <p:spPr>
+          <a:xfrm>
+            <a:off x="10149840" y="5074920"/>
+            <a:ext cx="1280160" cy="365760"/>
+          </a:xfrm>
+          <a:prstGeom prst="rect">
+            <a:avLst/>
+          </a:prstGeom>
+          <a:noFill/>
+        </p:spPr>
+        <p:txBody>
+          <a:bodyPr wrap="square" anchor="ctr" lIns="0" rIns="0" tIns="0" bIns="0">
+            <a:spAutoFit/>
+          </a:bodyPr>
+          <a:lstStyle/>
+          <a:p>
+            <a:pPr algn="r">
+              <a:lnSpc>
+                <a:spcPct val="100000"/>
+              </a:lnSpc>
+              <a:spcBef>
+                <a:spcPts val="0"/>
+              </a:spcBef>
+              <a:spcAft>
+                <a:spcPts val="400"/>
+              </a:spcAft>
+            </a:pPr>
+            <a:r>
+              <a:rPr sz="950" b="0">
+                <a:solidFill>
+                  <a:srgbClr val="9AA4B2"/>
+                </a:solidFill>
+                <a:latin typeface="Segoe UI"/>
+              </a:rPr>
+              <a:t>reproducir</a:t>
+            </a:r>
+          </a:p>
+        </p:txBody>
+      </p:sp>
+      <p:sp>
+        <p:nvSpPr>
+          <p:cNvPr id="34" name="Rounded Rectangle 33"/>
+          <p:cNvSpPr/>
+          <p:nvPr/>
+        </p:nvSpPr>
+        <p:spPr>
+          <a:xfrm>
+            <a:off x="640080" y="5577840"/>
             <a:ext cx="10927080" cy="457200"/>
           </a:xfrm>
           <a:prstGeom prst="roundRect">
@@ -10848,13 +11031,13 @@
       </p:sp>
       <p:sp>
         <p:nvSpPr>
-          <p:cNvPr id="31" name="TextBox 30"/>
-          <p:cNvSpPr txBox="1"/>
-          <p:nvPr/>
-        </p:nvSpPr>
-        <p:spPr>
-          <a:xfrm>
-            <a:off x="868680" y="5120640"/>
+          <p:cNvPr id="35" name="TextBox 34"/>
+          <p:cNvSpPr txBox="1"/>
+          <p:nvPr/>
+        </p:nvSpPr>
+        <p:spPr>
+          <a:xfrm>
+            <a:off x="868680" y="5623559"/>
             <a:ext cx="2651760" cy="365760"/>
           </a:xfrm>
           <a:prstGeom prst="rect">
@@ -10893,13 +11076,13 @@
       </p:sp>
       <p:sp>
         <p:nvSpPr>
-          <p:cNvPr id="32" name="TextBox 31"/>
-          <p:cNvSpPr txBox="1"/>
-          <p:nvPr/>
-        </p:nvSpPr>
-        <p:spPr>
-          <a:xfrm>
-            <a:off x="3611880" y="5120640"/>
+          <p:cNvPr id="36" name="TextBox 35"/>
+          <p:cNvSpPr txBox="1"/>
+          <p:nvPr/>
+        </p:nvSpPr>
+        <p:spPr>
+          <a:xfrm>
+            <a:off x="3611880" y="5623559"/>
             <a:ext cx="6400800" cy="365760"/>
           </a:xfrm>
           <a:prstGeom prst="rect">
@@ -10938,13 +11121,13 @@
       </p:sp>
       <p:sp>
         <p:nvSpPr>
-          <p:cNvPr id="33" name="TextBox 32"/>
-          <p:cNvSpPr txBox="1"/>
-          <p:nvPr/>
-        </p:nvSpPr>
-        <p:spPr>
-          <a:xfrm>
-            <a:off x="10149840" y="5120640"/>
+          <p:cNvPr id="37" name="TextBox 36"/>
+          <p:cNvSpPr txBox="1"/>
+          <p:nvPr/>
+        </p:nvSpPr>
+        <p:spPr>
+          <a:xfrm>
+            <a:off x="10149840" y="5623559"/>
             <a:ext cx="1280160" cy="365760"/>
           </a:xfrm>
           <a:prstGeom prst="rect">
@@ -13208,7 +13391,7 @@
                 </a:solidFill>
                 <a:latin typeface="Segoe UI"/>
               </a:rPr>
-              <a:t>Excluye venvs / node_modules / caches</a:t>
+              <a:t>Excluye venvs / node_modules / caches / .codegraph</a:t>
             </a:r>
           </a:p>
           <a:p>
@@ -13239,7 +13422,7 @@
                 </a:solidFill>
                 <a:latin typeface="Segoe UI"/>
               </a:rPr>
-              <a:t>El binario del AWS CLI se reinstala en destino</a:t>
+              <a:t>AWS CLI + CodeGraph + índice: se rehacen en destino (target-setup.sh)</a:t>
             </a:r>
           </a:p>
         </p:txBody>
@@ -15434,7 +15617,7 @@
                 </a:solidFill>
                 <a:latin typeface="Segoe UI"/>
               </a:rPr>
-              <a:t>Devuelve: fuente + rutas de llamada + blast radius</a:t>
+              <a:t>Devuelve: fuente + rutas + blast radius + cobertura</a:t>
             </a:r>
           </a:p>
         </p:txBody>
@@ -15479,7 +15662,7 @@
                 </a:solidFill>
                 <a:latin typeface="Segoe UI"/>
               </a:rPr>
-              <a:t>CLI</a:t>
+              <a:t>CLI  (install --location=global escribe el MCP)</a:t>
             </a:r>
           </a:p>
         </p:txBody>
@@ -15594,7 +15777,7 @@
                 </a:solidFill>
                 <a:latin typeface="Consolas"/>
               </a:rPr>
-              <a:t>codegraph watch     # re-indexa en vivo</a:t>
+              <a:t>codegraph sync      # incremental tras editar</a:t>
             </a:r>
           </a:p>
           <a:p>
@@ -15638,7 +15821,7 @@
                 </a:solidFill>
                 <a:latin typeface="Consolas"/>
               </a:rPr>
-              <a:t>codegraph mcp       # server para Claude</a:t>
+              <a:t>codegraph serve --path &lt;repo&gt; --mcp</a:t>
             </a:r>
           </a:p>
         </p:txBody>
@@ -15699,8 +15882,8 @@
         </p:nvSpPr>
         <p:spPr>
           <a:xfrm>
-            <a:off x="6446520" y="3931920"/>
-            <a:ext cx="4937760" cy="914400"/>
+            <a:off x="6446520" y="3913632"/>
+            <a:ext cx="4937760" cy="960120"/>
           </a:xfrm>
           <a:prstGeom prst="rect">
             <a:avLst/>
@@ -15715,7 +15898,7 @@
           <a:p>
             <a:pPr algn="l">
               <a:lnSpc>
-                <a:spcPct val="105000"/>
+                <a:spcPct val="103000"/>
               </a:lnSpc>
               <a:spcBef>
                 <a:spcPts val="0"/>
@@ -15731,7 +15914,7 @@
                 </a:solidFill>
                 <a:latin typeface="Segoe UI"/>
               </a:rPr>
-              <a:t>vs. Serena/grep:  </a:t>
+              <a:t>Primero para navegar:  </a:t>
             </a:r>
             <a:r>
               <a:rPr sz="1100" b="0">
@@ -15740,7 +15923,7 @@
                 </a:solidFill>
                 <a:latin typeface="Segoe UI"/>
               </a:rPr>
-              <a:t>CodeGraph = fuente + callers + blast radius en 1 consulta. Serena = overview/símbolos. grep = texto plano.</a:t>
+              <a:t>fuente + callers + blast radius + cobertura en 1 consulta (trátala como YA leída). Serena find_referencing_symbols = chequeo preciso (desambigua por clase). --path fija el repo por defecto.</a:t>
             </a:r>
           </a:p>
         </p:txBody>

--- a/presentacion/Claude_Code_Presentacion.pptx
+++ b/presentacion/Claude_Code_Presentacion.pptx
@@ -24,6 +24,7 @@
     <p:sldId id="272" r:id="rId18"/>
     <p:sldId id="273" r:id="rId19"/>
     <p:sldId id="274" r:id="rId20"/>
+    <p:sldId id="275" r:id="rId21"/>
   </p:sldIdLst>
   <p:sldSz cx="12192000" cy="6858000"/>
   <p:notesSz cx="6858000" cy="9144000"/>
@@ -320,7 +321,7 @@
           <a:p>
             <a:fld id="{5BCAD085-E8A6-8845-BD4E-CB4CCA059FC4}" type="datetimeFigureOut">
               <a:rPr lang="en-US" smtClean="0"/>
-              <a:t>7/6/2026</a:t>
+              <a:t>7/9/2026</a:t>
             </a:fld>
             <a:endParaRPr lang="en-US"/>
           </a:p>
@@ -488,7 +489,7 @@
           <a:p>
             <a:fld id="{5BCAD085-E8A6-8845-BD4E-CB4CCA059FC4}" type="datetimeFigureOut">
               <a:rPr lang="en-US" smtClean="0"/>
-              <a:t>7/6/2026</a:t>
+              <a:t>7/9/2026</a:t>
             </a:fld>
             <a:endParaRPr lang="en-US"/>
           </a:p>
@@ -666,7 +667,7 @@
           <a:p>
             <a:fld id="{5BCAD085-E8A6-8845-BD4E-CB4CCA059FC4}" type="datetimeFigureOut">
               <a:rPr lang="en-US" smtClean="0"/>
-              <a:t>7/6/2026</a:t>
+              <a:t>7/9/2026</a:t>
             </a:fld>
             <a:endParaRPr lang="en-US"/>
           </a:p>
@@ -834,7 +835,7 @@
           <a:p>
             <a:fld id="{5BCAD085-E8A6-8845-BD4E-CB4CCA059FC4}" type="datetimeFigureOut">
               <a:rPr lang="en-US" smtClean="0"/>
-              <a:t>7/6/2026</a:t>
+              <a:t>7/9/2026</a:t>
             </a:fld>
             <a:endParaRPr lang="en-US"/>
           </a:p>
@@ -1079,7 +1080,7 @@
           <a:p>
             <a:fld id="{5BCAD085-E8A6-8845-BD4E-CB4CCA059FC4}" type="datetimeFigureOut">
               <a:rPr lang="en-US" smtClean="0"/>
-              <a:t>7/6/2026</a:t>
+              <a:t>7/9/2026</a:t>
             </a:fld>
             <a:endParaRPr lang="en-US"/>
           </a:p>
@@ -1364,7 +1365,7 @@
           <a:p>
             <a:fld id="{5BCAD085-E8A6-8845-BD4E-CB4CCA059FC4}" type="datetimeFigureOut">
               <a:rPr lang="en-US" smtClean="0"/>
-              <a:t>7/6/2026</a:t>
+              <a:t>7/9/2026</a:t>
             </a:fld>
             <a:endParaRPr lang="en-US"/>
           </a:p>
@@ -1783,7 +1784,7 @@
           <a:p>
             <a:fld id="{5BCAD085-E8A6-8845-BD4E-CB4CCA059FC4}" type="datetimeFigureOut">
               <a:rPr lang="en-US" smtClean="0"/>
-              <a:t>7/6/2026</a:t>
+              <a:t>7/9/2026</a:t>
             </a:fld>
             <a:endParaRPr lang="en-US"/>
           </a:p>
@@ -1900,7 +1901,7 @@
           <a:p>
             <a:fld id="{5BCAD085-E8A6-8845-BD4E-CB4CCA059FC4}" type="datetimeFigureOut">
               <a:rPr lang="en-US" smtClean="0"/>
-              <a:t>7/6/2026</a:t>
+              <a:t>7/9/2026</a:t>
             </a:fld>
             <a:endParaRPr lang="en-US"/>
           </a:p>
@@ -1995,7 +1996,7 @@
           <a:p>
             <a:fld id="{5BCAD085-E8A6-8845-BD4E-CB4CCA059FC4}" type="datetimeFigureOut">
               <a:rPr lang="en-US" smtClean="0"/>
-              <a:t>7/6/2026</a:t>
+              <a:t>7/9/2026</a:t>
             </a:fld>
             <a:endParaRPr lang="en-US"/>
           </a:p>
@@ -2270,7 +2271,7 @@
           <a:p>
             <a:fld id="{5BCAD085-E8A6-8845-BD4E-CB4CCA059FC4}" type="datetimeFigureOut">
               <a:rPr lang="en-US" smtClean="0"/>
-              <a:t>7/6/2026</a:t>
+              <a:t>7/9/2026</a:t>
             </a:fld>
             <a:endParaRPr lang="en-US"/>
           </a:p>
@@ -2522,7 +2523,7 @@
           <a:p>
             <a:fld id="{5BCAD085-E8A6-8845-BD4E-CB4CCA059FC4}" type="datetimeFigureOut">
               <a:rPr lang="en-US" smtClean="0"/>
-              <a:t>7/6/2026</a:t>
+              <a:t>7/9/2026</a:t>
             </a:fld>
             <a:endParaRPr lang="en-US"/>
           </a:p>
@@ -2733,7 +2734,7 @@
           <a:p>
             <a:fld id="{5BCAD085-E8A6-8845-BD4E-CB4CCA059FC4}" type="datetimeFigureOut">
               <a:rPr lang="en-US" smtClean="0"/>
-              <a:t>7/6/2026</a:t>
+              <a:t>7/9/2026</a:t>
             </a:fld>
             <a:endParaRPr lang="en-US"/>
           </a:p>
@@ -5785,6 +5786,51 @@
       </p:sp>
       <p:sp>
         <p:nvSpPr>
+          <p:cNvPr id="29" name="TextBox 28"/>
+          <p:cNvSpPr txBox="1"/>
+          <p:nvPr/>
+        </p:nvSpPr>
+        <p:spPr>
+          <a:xfrm>
+            <a:off x="640080" y="3803904"/>
+            <a:ext cx="10927080" cy="274320"/>
+          </a:xfrm>
+          <a:prstGeom prst="rect">
+            <a:avLst/>
+          </a:prstGeom>
+          <a:noFill/>
+        </p:spPr>
+        <p:txBody>
+          <a:bodyPr wrap="square" lIns="0" tIns="0" rIns="0" bIns="0" anchor="t">
+            <a:spAutoFit/>
+          </a:bodyPr>
+          <a:lstStyle/>
+          <a:p>
+            <a:pPr algn="l">
+              <a:lnSpc>
+                <a:spcPct val="100000"/>
+              </a:lnSpc>
+              <a:spcBef>
+                <a:spcPts val="0"/>
+              </a:spcBef>
+              <a:spcAft>
+                <a:spcPts val="400"/>
+              </a:spcAft>
+            </a:pPr>
+            <a:r>
+              <a:rPr sz="1100" b="1">
+                <a:solidFill>
+                  <a:srgbClr val="7AA2C7"/>
+                </a:solidFill>
+                <a:latin typeface="Segoe UI"/>
+              </a:rPr>
+              <a:t>Agent SDK — workflows a medida (menor privilegio)</a:t>
+            </a:r>
+          </a:p>
+        </p:txBody>
+      </p:sp>
+      <p:sp>
+        <p:nvSpPr>
           <p:cNvPr id="30" name="Rounded Rectangle 29"/>
           <p:cNvSpPr/>
           <p:nvPr/>
@@ -5841,7 +5887,7 @@
         <p:spPr>
           <a:xfrm>
             <a:off x="896112" y="4297680"/>
-            <a:ext cx="10469880" cy="858120"/>
+            <a:ext cx="10469880" cy="822960"/>
           </a:xfrm>
           <a:prstGeom prst="rect">
             <a:avLst/>
@@ -5865,12 +5911,15 @@
                 <a:spcPts val="200"/>
               </a:spcAft>
             </a:pPr>
-            <a:endParaRPr lang="en-US" sz="1150" b="0" dirty="0">
-              <a:solidFill>
-                <a:srgbClr val="E8EAED"/>
-              </a:solidFill>
-              <a:latin typeface="Consolas"/>
-            </a:endParaRPr>
+            <a:r>
+              <a:rPr sz="1150" b="0">
+                <a:solidFill>
+                  <a:srgbClr val="E8EAED"/>
+                </a:solidFill>
+                <a:latin typeface="Consolas"/>
+              </a:rPr>
+              <a:t>import { query } from "@anthropic-ai/claude-agent-sdk";</a:t>
+            </a:r>
           </a:p>
           <a:p>
             <a:pPr algn="l">
@@ -5885,228 +5934,35 @@
               </a:spcAft>
             </a:pPr>
             <a:r>
-              <a:rPr sz="1150" b="0" dirty="0">
+              <a:rPr sz="1150" b="0">
                 <a:solidFill>
                   <a:srgbClr val="E8EAED"/>
                 </a:solidFill>
                 <a:latin typeface="Consolas"/>
               </a:rPr>
-              <a:t>import { query } from "@anthropic-ai/</a:t>
-            </a:r>
-            <a:r>
-              <a:rPr sz="1150" b="0" dirty="0" err="1">
+              <a:t>for await (const m of query({ prompt, options: { allowedTools: ["Edit"] } }))</a:t>
+            </a:r>
+          </a:p>
+          <a:p>
+            <a:pPr algn="l">
+              <a:lnSpc>
+                <a:spcPct val="112000"/>
+              </a:lnSpc>
+              <a:spcBef>
+                <a:spcPts val="0"/>
+              </a:spcBef>
+              <a:spcAft>
+                <a:spcPts val="200"/>
+              </a:spcAft>
+            </a:pPr>
+            <a:r>
+              <a:rPr sz="1150" b="0">
                 <a:solidFill>
                   <a:srgbClr val="E8EAED"/>
                 </a:solidFill>
                 <a:latin typeface="Consolas"/>
               </a:rPr>
-              <a:t>claude</a:t>
-            </a:r>
-            <a:r>
-              <a:rPr sz="1150" b="0" dirty="0">
-                <a:solidFill>
-                  <a:srgbClr val="E8EAED"/>
-                </a:solidFill>
-                <a:latin typeface="Consolas"/>
-              </a:rPr>
-              <a:t>-agent-</a:t>
-            </a:r>
-            <a:r>
-              <a:rPr sz="1150" b="0" dirty="0" err="1">
-                <a:solidFill>
-                  <a:srgbClr val="E8EAED"/>
-                </a:solidFill>
-                <a:latin typeface="Consolas"/>
-              </a:rPr>
-              <a:t>sdk</a:t>
-            </a:r>
-            <a:r>
-              <a:rPr sz="1150" b="0" dirty="0">
-                <a:solidFill>
-                  <a:srgbClr val="E8EAED"/>
-                </a:solidFill>
-                <a:latin typeface="Consolas"/>
-              </a:rPr>
-              <a:t>";</a:t>
-            </a:r>
-          </a:p>
-          <a:p>
-            <a:pPr algn="l">
-              <a:lnSpc>
-                <a:spcPct val="112000"/>
-              </a:lnSpc>
-              <a:spcBef>
-                <a:spcPts val="0"/>
-              </a:spcBef>
-              <a:spcAft>
-                <a:spcPts val="200"/>
-              </a:spcAft>
-            </a:pPr>
-            <a:r>
-              <a:rPr sz="1150" b="0" dirty="0">
-                <a:solidFill>
-                  <a:srgbClr val="E8EAED"/>
-                </a:solidFill>
-                <a:latin typeface="Consolas"/>
-              </a:rPr>
-              <a:t>for await (const m of query({ prompt, options: { </a:t>
-            </a:r>
-            <a:r>
-              <a:rPr sz="1150" b="0" dirty="0" err="1">
-                <a:solidFill>
-                  <a:srgbClr val="E8EAED"/>
-                </a:solidFill>
-                <a:latin typeface="Consolas"/>
-              </a:rPr>
-              <a:t>allowedTools</a:t>
-            </a:r>
-            <a:r>
-              <a:rPr sz="1150" b="0" dirty="0">
-                <a:solidFill>
-                  <a:srgbClr val="E8EAED"/>
-                </a:solidFill>
-                <a:latin typeface="Consolas"/>
-              </a:rPr>
-              <a:t>: ["Edit"] } }))</a:t>
-            </a:r>
-          </a:p>
-          <a:p>
-            <a:pPr algn="l">
-              <a:lnSpc>
-                <a:spcPct val="112000"/>
-              </a:lnSpc>
-              <a:spcBef>
-                <a:spcPts val="0"/>
-              </a:spcBef>
-              <a:spcAft>
-                <a:spcPts val="200"/>
-              </a:spcAft>
-            </a:pPr>
-            <a:r>
-              <a:rPr sz="1150" b="0" dirty="0">
-                <a:solidFill>
-                  <a:srgbClr val="E8EAED"/>
-                </a:solidFill>
-                <a:latin typeface="Consolas"/>
-              </a:rPr>
-              <a:t>  if (</a:t>
-            </a:r>
-            <a:r>
-              <a:rPr sz="1150" b="0" dirty="0" err="1">
-                <a:solidFill>
-                  <a:srgbClr val="E8EAED"/>
-                </a:solidFill>
-                <a:latin typeface="Consolas"/>
-              </a:rPr>
-              <a:t>m.type</a:t>
-            </a:r>
-            <a:r>
-              <a:rPr sz="1150" b="0" dirty="0">
-                <a:solidFill>
-                  <a:srgbClr val="E8EAED"/>
-                </a:solidFill>
-                <a:latin typeface="Consolas"/>
-              </a:rPr>
-              <a:t> === "result") console.log(</a:t>
-            </a:r>
-            <a:r>
-              <a:rPr sz="1150" b="0" dirty="0" err="1">
-                <a:solidFill>
-                  <a:srgbClr val="E8EAED"/>
-                </a:solidFill>
-                <a:latin typeface="Consolas"/>
-              </a:rPr>
-              <a:t>m.result</a:t>
-            </a:r>
-            <a:r>
-              <a:rPr sz="1150" b="0" dirty="0">
-                <a:solidFill>
-                  <a:srgbClr val="E8EAED"/>
-                </a:solidFill>
-                <a:latin typeface="Consolas"/>
-              </a:rPr>
-              <a:t>);</a:t>
-            </a:r>
-          </a:p>
-        </p:txBody>
-      </p:sp>
-      <p:sp>
-        <p:nvSpPr>
-          <p:cNvPr id="29" name="TextBox 28"/>
-          <p:cNvSpPr txBox="1"/>
-          <p:nvPr/>
-        </p:nvSpPr>
-        <p:spPr>
-          <a:xfrm>
-            <a:off x="896112" y="4251960"/>
-            <a:ext cx="10927080" cy="274320"/>
-          </a:xfrm>
-          <a:prstGeom prst="rect">
-            <a:avLst/>
-          </a:prstGeom>
-          <a:noFill/>
-        </p:spPr>
-        <p:txBody>
-          <a:bodyPr wrap="square" lIns="0" tIns="0" rIns="0" bIns="0" anchor="t">
-            <a:spAutoFit/>
-          </a:bodyPr>
-          <a:lstStyle/>
-          <a:p>
-            <a:pPr algn="l">
-              <a:lnSpc>
-                <a:spcPct val="100000"/>
-              </a:lnSpc>
-              <a:spcBef>
-                <a:spcPts val="0"/>
-              </a:spcBef>
-              <a:spcAft>
-                <a:spcPts val="400"/>
-              </a:spcAft>
-            </a:pPr>
-            <a:r>
-              <a:rPr sz="1100" b="1" dirty="0">
-                <a:solidFill>
-                  <a:srgbClr val="7AA2C7"/>
-                </a:solidFill>
-                <a:latin typeface="Segoe UI"/>
-              </a:rPr>
-              <a:t>Agent SDK — workflows a </a:t>
-            </a:r>
-            <a:r>
-              <a:rPr sz="1100" b="1" dirty="0" err="1">
-                <a:solidFill>
-                  <a:srgbClr val="7AA2C7"/>
-                </a:solidFill>
-                <a:latin typeface="Segoe UI"/>
-              </a:rPr>
-              <a:t>medida</a:t>
-            </a:r>
-            <a:r>
-              <a:rPr sz="1100" b="1" dirty="0">
-                <a:solidFill>
-                  <a:srgbClr val="7AA2C7"/>
-                </a:solidFill>
-                <a:latin typeface="Segoe UI"/>
-              </a:rPr>
-              <a:t> (</a:t>
-            </a:r>
-            <a:r>
-              <a:rPr sz="1100" b="1" dirty="0" err="1">
-                <a:solidFill>
-                  <a:srgbClr val="7AA2C7"/>
-                </a:solidFill>
-                <a:latin typeface="Segoe UI"/>
-              </a:rPr>
-              <a:t>menor</a:t>
-            </a:r>
-            <a:r>
-              <a:rPr sz="1100" b="1" dirty="0">
-                <a:solidFill>
-                  <a:srgbClr val="7AA2C7"/>
-                </a:solidFill>
-                <a:latin typeface="Segoe UI"/>
-              </a:rPr>
-              <a:t> privilegio)</a:t>
+              <a:t>  if (m.type === "result") console.log(m.result);</a:t>
             </a:r>
           </a:p>
         </p:txBody>
@@ -12032,103 +11888,13 @@
               </a:spcAft>
             </a:pPr>
             <a:r>
-              <a:rPr sz="1100" b="0" dirty="0">
+              <a:rPr sz="1100" b="0">
                 <a:solidFill>
                   <a:srgbClr val="E8EAED"/>
                 </a:solidFill>
                 <a:latin typeface="Segoe UI"/>
               </a:rPr>
-              <a:t>STATUS.md </a:t>
-            </a:r>
-            <a:r>
-              <a:rPr sz="1100" b="0" dirty="0" err="1">
-                <a:solidFill>
-                  <a:srgbClr val="E8EAED"/>
-                </a:solidFill>
-                <a:latin typeface="Segoe UI"/>
-              </a:rPr>
-              <a:t>revela</a:t>
-            </a:r>
-            <a:r>
-              <a:rPr sz="1100" b="0" dirty="0">
-                <a:solidFill>
-                  <a:srgbClr val="E8EAED"/>
-                </a:solidFill>
-                <a:latin typeface="Segoe UI"/>
-              </a:rPr>
-              <a:t> un SHARP_EDGE </a:t>
-            </a:r>
-            <a:r>
-              <a:rPr sz="1100" b="0" dirty="0" err="1">
-                <a:solidFill>
-                  <a:srgbClr val="E8EAED"/>
-                </a:solidFill>
-                <a:latin typeface="Segoe UI"/>
-              </a:rPr>
-              <a:t>que</a:t>
-            </a:r>
-            <a:r>
-              <a:rPr sz="1100" b="0" dirty="0">
-                <a:solidFill>
-                  <a:srgbClr val="E8EAED"/>
-                </a:solidFill>
-                <a:latin typeface="Segoe UI"/>
-              </a:rPr>
-              <a:t> </a:t>
-            </a:r>
-            <a:r>
-              <a:rPr sz="1100" b="0" dirty="0" err="1">
-                <a:solidFill>
-                  <a:srgbClr val="E8EAED"/>
-                </a:solidFill>
-                <a:latin typeface="Segoe UI"/>
-              </a:rPr>
-              <a:t>restringe</a:t>
-            </a:r>
-            <a:r>
-              <a:rPr sz="1100" b="0" dirty="0">
-                <a:solidFill>
-                  <a:srgbClr val="E8EAED"/>
-                </a:solidFill>
-                <a:latin typeface="Segoe UI"/>
-              </a:rPr>
-              <a:t> el fix; git/</a:t>
-            </a:r>
-            <a:r>
-              <a:rPr sz="1100" b="0" dirty="0" err="1">
-                <a:solidFill>
-                  <a:srgbClr val="E8EAED"/>
-                </a:solidFill>
-                <a:latin typeface="Segoe UI"/>
-              </a:rPr>
-              <a:t>gh</a:t>
-            </a:r>
-            <a:r>
-              <a:rPr sz="1100" b="0" dirty="0">
-                <a:solidFill>
-                  <a:srgbClr val="E8EAED"/>
-                </a:solidFill>
-                <a:latin typeface="Segoe UI"/>
-              </a:rPr>
-              <a:t> dan la base </a:t>
-            </a:r>
-            <a:r>
-              <a:rPr sz="1100" b="0" dirty="0" err="1">
-                <a:solidFill>
-                  <a:srgbClr val="E8EAED"/>
-                </a:solidFill>
-                <a:latin typeface="Segoe UI"/>
-              </a:rPr>
-              <a:t>correcta</a:t>
-            </a:r>
-            <a:r>
-              <a:rPr sz="1100" b="0" dirty="0">
-                <a:solidFill>
-                  <a:srgbClr val="E8EAED"/>
-                </a:solidFill>
-                <a:latin typeface="Segoe UI"/>
-              </a:rPr>
-              <a:t>.</a:t>
+              <a:t>STATUS.md revela un SHARP_EDGE que restringe el fix; git/gh dan la base correcta.</a:t>
             </a:r>
           </a:p>
         </p:txBody>
@@ -13798,7 +13564,7 @@
                 </a:solidFill>
                 <a:latin typeface="Segoe UI"/>
               </a:rPr>
-              <a:t>AWS CLI + CodeGraph + índice: se rehacen en destino (target-setup.sh)</a:t>
+              <a:t>En destino: bootstrap (/kg) + target-setup.sh rehacen el tooling</a:t>
             </a:r>
           </a:p>
         </p:txBody>
@@ -13977,7 +13743,7 @@
                 </a:solidFill>
                 <a:latin typeface="Segoe UI"/>
               </a:rPr>
-              <a:t>Solo los docs gitignored de data/ (unos MB) viajan</a:t>
+              <a:t>Docs gitignored de data/ + memoria (snapshot-memory) viajan</a:t>
             </a:r>
           </a:p>
           <a:p>
@@ -14008,38 +13774,38 @@
                 </a:solidFill>
                 <a:latin typeface="Segoe UI"/>
               </a:rPr>
+              <a:t>En la principal: restore-memory → /kg-refresh reconstruye</a:t>
+            </a:r>
+          </a:p>
+          <a:p>
+            <a:pPr algn="l">
+              <a:lnSpc>
+                <a:spcPct val="105000"/>
+              </a:lnSpc>
+              <a:spcBef>
+                <a:spcPts val="0"/>
+              </a:spcBef>
+              <a:spcAft>
+                <a:spcPts val="600"/>
+              </a:spcAft>
+            </a:pPr>
+            <a:r>
+              <a:rPr sz="1150" b="1">
+                <a:solidFill>
+                  <a:srgbClr val="8CC28C"/>
+                </a:solidFill>
+                <a:latin typeface="Segoe UI"/>
+              </a:rPr>
+              <a:t>▸  </a:t>
+            </a:r>
+            <a:r>
+              <a:rPr sz="1150" b="0">
+                <a:solidFill>
+                  <a:srgbClr val="E8EAED"/>
+                </a:solidFill>
+                <a:latin typeface="Segoe UI"/>
+              </a:rPr>
               <a:t>backup + diff de STATUS.md; STOP si hubo ediciones propias</a:t>
-            </a:r>
-          </a:p>
-          <a:p>
-            <a:pPr algn="l">
-              <a:lnSpc>
-                <a:spcPct val="105000"/>
-              </a:lnSpc>
-              <a:spcBef>
-                <a:spcPts val="0"/>
-              </a:spcBef>
-              <a:spcAft>
-                <a:spcPts val="600"/>
-              </a:spcAft>
-            </a:pPr>
-            <a:r>
-              <a:rPr sz="1150" b="1">
-                <a:solidFill>
-                  <a:srgbClr val="8CC28C"/>
-                </a:solidFill>
-                <a:latin typeface="Segoe UI"/>
-              </a:rPr>
-              <a:t>▸  </a:t>
-            </a:r>
-            <a:r>
-              <a:rPr sz="1150" b="0">
-                <a:solidFill>
-                  <a:srgbClr val="E8EAED"/>
-                </a:solidFill>
-                <a:latin typeface="Segoe UI"/>
-              </a:rPr>
-              <a:t>“Descubre, no asumas”: deriva la raíz (ls -d /mnt/*/ILS)</a:t>
             </a:r>
           </a:p>
         </p:txBody>
@@ -16713,7 +16479,7 @@
                 </a:solidFill>
                 <a:latin typeface="Segoe UI"/>
               </a:rPr>
-              <a:t>CIERRE</a:t>
+              <a:t>06 · HERRAMIENTAS</a:t>
             </a:r>
           </a:p>
         </p:txBody>
@@ -16758,7 +16524,7 @@
                 </a:solidFill>
                 <a:latin typeface="Segoe UI"/>
               </a:rPr>
-              <a:t>De asistente a sistema</a:t>
+              <a:t>Grafo de tickets: CodeGraph, pero para tickets</a:t>
             </a:r>
           </a:p>
         </p:txBody>
@@ -16906,12 +16672,12 @@
         </p:nvSpPr>
         <p:spPr>
           <a:xfrm>
-            <a:off x="640080" y="1783080"/>
-            <a:ext cx="5335524" cy="841248"/>
+            <a:off x="640080" y="1828800"/>
+            <a:ext cx="5349240" cy="2194560"/>
           </a:xfrm>
           <a:prstGeom prst="roundRect">
             <a:avLst>
-              <a:gd name="adj" fmla="val 9000"/>
+              <a:gd name="adj" fmla="val 6000"/>
             </a:avLst>
           </a:prstGeom>
           <a:solidFill>
@@ -16949,25 +16715,264 @@
       </p:sp>
       <p:sp>
         <p:nvSpPr>
-          <p:cNvPr id="10" name="Rounded Rectangle 9"/>
+          <p:cNvPr id="10" name="TextBox 9"/>
+          <p:cNvSpPr txBox="1"/>
+          <p:nvPr/>
+        </p:nvSpPr>
+        <p:spPr>
+          <a:xfrm>
+            <a:off x="914400" y="2029968"/>
+            <a:ext cx="4892040" cy="365760"/>
+          </a:xfrm>
+          <a:prstGeom prst="rect">
+            <a:avLst/>
+          </a:prstGeom>
+          <a:noFill/>
+        </p:spPr>
+        <p:txBody>
+          <a:bodyPr wrap="square" lIns="0" tIns="0" rIns="0" bIns="0" anchor="t">
+            <a:spAutoFit/>
+          </a:bodyPr>
+          <a:lstStyle/>
+          <a:p>
+            <a:pPr algn="l">
+              <a:lnSpc>
+                <a:spcPct val="100000"/>
+              </a:lnSpc>
+              <a:spcBef>
+                <a:spcPts val="0"/>
+              </a:spcBef>
+              <a:spcAft>
+                <a:spcPts val="400"/>
+              </a:spcAft>
+            </a:pPr>
+            <a:r>
+              <a:rPr sz="1400" b="1">
+                <a:solidFill>
+                  <a:srgbClr val="7AA2C7"/>
+                </a:solidFill>
+                <a:latin typeface="Segoe UI"/>
+              </a:rPr>
+              <a:t>Grafo sobre los .md del proyecto (data/, interno)</a:t>
+            </a:r>
+          </a:p>
+        </p:txBody>
+      </p:sp>
+      <p:sp>
+        <p:nvSpPr>
+          <p:cNvPr id="11" name="TextBox 10"/>
+          <p:cNvSpPr txBox="1"/>
+          <p:nvPr/>
+        </p:nvSpPr>
+        <p:spPr>
+          <a:xfrm>
+            <a:off x="914400" y="2487168"/>
+            <a:ext cx="4846320" cy="1371600"/>
+          </a:xfrm>
+          <a:prstGeom prst="rect">
+            <a:avLst/>
+          </a:prstGeom>
+          <a:noFill/>
+        </p:spPr>
+        <p:txBody>
+          <a:bodyPr wrap="square" lIns="0" tIns="0" rIns="0" bIns="0" anchor="t">
+            <a:spAutoFit/>
+          </a:bodyPr>
+          <a:lstStyle/>
+          <a:p>
+            <a:pPr algn="l">
+              <a:lnSpc>
+                <a:spcPct val="105000"/>
+              </a:lnSpc>
+              <a:spcBef>
+                <a:spcPts val="0"/>
+              </a:spcBef>
+              <a:spcAft>
+                <a:spcPts val="600"/>
+              </a:spcAft>
+            </a:pPr>
+            <a:r>
+              <a:rPr sz="1150" b="1">
+                <a:solidFill>
+                  <a:srgbClr val="7AA2C7"/>
+                </a:solidFill>
+                <a:latin typeface="Segoe UI"/>
+              </a:rPr>
+              <a:t>▸  </a:t>
+            </a:r>
+            <a:r>
+              <a:rPr sz="1150" b="0">
+                <a:solidFill>
+                  <a:srgbClr val="E8EAED"/>
+                </a:solidFill>
+                <a:latin typeface="Segoe UI"/>
+              </a:rPr>
+              <a:t>Nodos: tickets + símbolos + invariantes + lecciones</a:t>
+            </a:r>
+          </a:p>
+          <a:p>
+            <a:pPr algn="l">
+              <a:lnSpc>
+                <a:spcPct val="105000"/>
+              </a:lnSpc>
+              <a:spcBef>
+                <a:spcPts val="0"/>
+              </a:spcBef>
+              <a:spcAft>
+                <a:spcPts val="600"/>
+              </a:spcAft>
+            </a:pPr>
+            <a:r>
+              <a:rPr sz="1150" b="1">
+                <a:solidFill>
+                  <a:srgbClr val="7AA2C7"/>
+                </a:solidFill>
+                <a:latin typeface="Segoe UI"/>
+              </a:rPr>
+              <a:t>▸  </a:t>
+            </a:r>
+            <a:r>
+              <a:rPr sz="1150" b="0">
+                <a:solidFill>
+                  <a:srgbClr val="E8EAED"/>
+                </a:solidFill>
+                <a:latin typeface="Segoe UI"/>
+              </a:rPr>
+              <a:t>Aristas tipadas: references / supersedes / relacionado</a:t>
+            </a:r>
+          </a:p>
+          <a:p>
+            <a:pPr algn="l">
+              <a:lnSpc>
+                <a:spcPct val="105000"/>
+              </a:lnSpc>
+              <a:spcBef>
+                <a:spcPts val="0"/>
+              </a:spcBef>
+              <a:spcAft>
+                <a:spcPts val="600"/>
+              </a:spcAft>
+            </a:pPr>
+            <a:r>
+              <a:rPr sz="1150" b="1">
+                <a:solidFill>
+                  <a:srgbClr val="7AA2C7"/>
+                </a:solidFill>
+                <a:latin typeface="Segoe UI"/>
+              </a:rPr>
+              <a:t>▸  </a:t>
+            </a:r>
+            <a:r>
+              <a:rPr sz="1150" b="0">
+                <a:solidFill>
+                  <a:srgbClr val="E8EAED"/>
+                </a:solidFill>
+                <a:latin typeface="Segoe UI"/>
+              </a:rPr>
+              <a:t>Comunidades = zonas de peligro (fin-de-carta, títulos…)</a:t>
+            </a:r>
+          </a:p>
+          <a:p>
+            <a:pPr algn="l">
+              <a:lnSpc>
+                <a:spcPct val="105000"/>
+              </a:lnSpc>
+              <a:spcBef>
+                <a:spcPts val="0"/>
+              </a:spcBef>
+              <a:spcAft>
+                <a:spcPts val="600"/>
+              </a:spcAft>
+            </a:pPr>
+            <a:r>
+              <a:rPr sz="1150" b="1">
+                <a:solidFill>
+                  <a:srgbClr val="7AA2C7"/>
+                </a:solidFill>
+                <a:latin typeface="Segoe UI"/>
+              </a:rPr>
+              <a:t>▸  </a:t>
+            </a:r>
+            <a:r>
+              <a:rPr sz="1150" b="0">
+                <a:solidFill>
+                  <a:srgbClr val="E8EAED"/>
+                </a:solidFill>
+                <a:latin typeface="Segoe UI"/>
+              </a:rPr>
+              <a:t>Determinista, sin LLM en la consulta (lee graph.json)</a:t>
+            </a:r>
+          </a:p>
+        </p:txBody>
+      </p:sp>
+      <p:sp>
+        <p:nvSpPr>
+          <p:cNvPr id="12" name="TextBox 11"/>
+          <p:cNvSpPr txBox="1"/>
+          <p:nvPr/>
+        </p:nvSpPr>
+        <p:spPr>
+          <a:xfrm>
+            <a:off x="6217920" y="1700784"/>
+            <a:ext cx="5349240" cy="274320"/>
+          </a:xfrm>
+          <a:prstGeom prst="rect">
+            <a:avLst/>
+          </a:prstGeom>
+          <a:noFill/>
+        </p:spPr>
+        <p:txBody>
+          <a:bodyPr wrap="square" lIns="0" tIns="0" rIns="0" bIns="0" anchor="t">
+            <a:spAutoFit/>
+          </a:bodyPr>
+          <a:lstStyle/>
+          <a:p>
+            <a:pPr algn="l">
+              <a:lnSpc>
+                <a:spcPct val="100000"/>
+              </a:lnSpc>
+              <a:spcBef>
+                <a:spcPts val="0"/>
+              </a:spcBef>
+              <a:spcAft>
+                <a:spcPts val="400"/>
+              </a:spcAft>
+            </a:pPr>
+            <a:r>
+              <a:rPr sz="1100" b="1">
+                <a:solidFill>
+                  <a:srgbClr val="7AA2C7"/>
+                </a:solidFill>
+                <a:latin typeface="Segoe UI"/>
+              </a:rPr>
+              <a:t>Skill /kg  (envuelve graphify explain/path)</a:t>
+            </a:r>
+          </a:p>
+        </p:txBody>
+      </p:sp>
+      <p:sp>
+        <p:nvSpPr>
+          <p:cNvPr id="13" name="Rounded Rectangle 12"/>
           <p:cNvSpPr/>
           <p:nvPr/>
         </p:nvSpPr>
         <p:spPr>
           <a:xfrm>
-            <a:off x="841247" y="1984248"/>
-            <a:ext cx="457200" cy="457200"/>
+            <a:off x="6217920" y="2011680"/>
+            <a:ext cx="5349240" cy="1737360"/>
           </a:xfrm>
           <a:prstGeom prst="roundRect">
             <a:avLst>
-              <a:gd name="adj" fmla="val 32000"/>
+              <a:gd name="adj" fmla="val 5000"/>
             </a:avLst>
           </a:prstGeom>
           <a:solidFill>
-            <a:srgbClr val="D97757"/>
+            <a:srgbClr val="0A0E13"/>
           </a:solidFill>
-          <a:ln>
-            <a:noFill/>
+          <a:ln w="9525">
+            <a:solidFill>
+              <a:srgbClr val="2E3948"/>
+            </a:solidFill>
           </a:ln>
           <a:effectLst/>
         </p:spPr>
@@ -16996,59 +17001,14 @@
       </p:sp>
       <p:sp>
         <p:nvSpPr>
-          <p:cNvPr id="11" name="TextBox 10"/>
+          <p:cNvPr id="14" name="TextBox 13"/>
           <p:cNvSpPr txBox="1"/>
           <p:nvPr/>
         </p:nvSpPr>
         <p:spPr>
           <a:xfrm>
-            <a:off x="841247" y="2002536"/>
-            <a:ext cx="457200" cy="420624"/>
-          </a:xfrm>
-          <a:prstGeom prst="rect">
-            <a:avLst/>
-          </a:prstGeom>
-          <a:noFill/>
-        </p:spPr>
-        <p:txBody>
-          <a:bodyPr wrap="square" lIns="0" tIns="0" rIns="0" bIns="0" anchor="ctr">
-            <a:spAutoFit/>
-          </a:bodyPr>
-          <a:lstStyle/>
-          <a:p>
-            <a:pPr algn="ctr">
-              <a:lnSpc>
-                <a:spcPct val="100000"/>
-              </a:lnSpc>
-              <a:spcBef>
-                <a:spcPts val="0"/>
-              </a:spcBef>
-              <a:spcAft>
-                <a:spcPts val="400"/>
-              </a:spcAft>
-            </a:pPr>
-            <a:r>
-              <a:rPr sz="1500" b="1">
-                <a:solidFill>
-                  <a:srgbClr val="0F141A"/>
-                </a:solidFill>
-                <a:latin typeface="Segoe UI"/>
-              </a:rPr>
-              <a:t>1</a:t>
-            </a:r>
-          </a:p>
-        </p:txBody>
-      </p:sp>
-      <p:sp>
-        <p:nvSpPr>
-          <p:cNvPr id="12" name="TextBox 11"/>
-          <p:cNvSpPr txBox="1"/>
-          <p:nvPr/>
-        </p:nvSpPr>
-        <p:spPr>
-          <a:xfrm>
-            <a:off x="1463040" y="1929384"/>
-            <a:ext cx="4375404" cy="365760"/>
+            <a:off x="6473952" y="2194560"/>
+            <a:ext cx="4892040" cy="1417319"/>
           </a:xfrm>
           <a:prstGeom prst="rect">
             <a:avLst/>
@@ -17063,86 +17023,107 @@
           <a:p>
             <a:pPr algn="l">
               <a:lnSpc>
-                <a:spcPct val="100000"/>
-              </a:lnSpc>
-              <a:spcBef>
-                <a:spcPts val="0"/>
-              </a:spcBef>
-              <a:spcAft>
-                <a:spcPts val="400"/>
-              </a:spcAft>
-            </a:pPr>
-            <a:r>
-              <a:rPr sz="1450" b="1">
+                <a:spcPct val="112000"/>
+              </a:lnSpc>
+              <a:spcBef>
+                <a:spcPts val="0"/>
+              </a:spcBef>
+              <a:spcAft>
+                <a:spcPts val="200"/>
+              </a:spcAft>
+            </a:pPr>
+            <a:r>
+              <a:rPr sz="1150" b="0">
                 <a:solidFill>
                   <a:srgbClr val="E8EAED"/>
                 </a:solidFill>
-                <a:latin typeface="Segoe UI"/>
-              </a:rPr>
-              <a:t>Instalar</a:t>
-            </a:r>
-          </a:p>
-        </p:txBody>
-      </p:sp>
-      <p:sp>
-        <p:nvSpPr>
-          <p:cNvPr id="13" name="TextBox 12"/>
-          <p:cNvSpPr txBox="1"/>
-          <p:nvPr/>
-        </p:nvSpPr>
-        <p:spPr>
-          <a:xfrm>
-            <a:off x="1463040" y="2240280"/>
-            <a:ext cx="4375404" cy="338328"/>
-          </a:xfrm>
-          <a:prstGeom prst="rect">
-            <a:avLst/>
-          </a:prstGeom>
-          <a:noFill/>
-        </p:spPr>
-        <p:txBody>
-          <a:bodyPr wrap="square" lIns="0" tIns="0" rIns="0" bIns="0" anchor="t">
-            <a:spAutoFit/>
-          </a:bodyPr>
-          <a:lstStyle/>
-          <a:p>
-            <a:pPr algn="l">
-              <a:lnSpc>
-                <a:spcPct val="102000"/>
-              </a:lnSpc>
-              <a:spcBef>
-                <a:spcPts val="0"/>
-              </a:spcBef>
-              <a:spcAft>
-                <a:spcPts val="400"/>
-              </a:spcAft>
-            </a:pPr>
-            <a:r>
-              <a:rPr sz="1100" b="0">
-                <a:solidFill>
-                  <a:srgbClr val="9AA4B2"/>
-                </a:solidFill>
-                <a:latin typeface="Segoe UI"/>
-              </a:rPr>
-              <a:t>Una línea; interactivo para pensar, -p para automatizar.</a:t>
-            </a:r>
-          </a:p>
-        </p:txBody>
-      </p:sp>
-      <p:sp>
-        <p:nvSpPr>
-          <p:cNvPr id="14" name="Rounded Rectangle 13"/>
+                <a:latin typeface="Consolas"/>
+              </a:rPr>
+              <a:t>/kg &lt;ticket|tema&gt;   # vecinos  (explain)</a:t>
+            </a:r>
+          </a:p>
+          <a:p>
+            <a:pPr algn="l">
+              <a:lnSpc>
+                <a:spcPct val="112000"/>
+              </a:lnSpc>
+              <a:spcBef>
+                <a:spcPts val="0"/>
+              </a:spcBef>
+              <a:spcAft>
+                <a:spcPts val="200"/>
+              </a:spcAft>
+            </a:pPr>
+            <a:r>
+              <a:rPr sz="1150" b="0">
+                <a:solidFill>
+                  <a:srgbClr val="E8EAED"/>
+                </a:solidFill>
+                <a:latin typeface="Consolas"/>
+              </a:rPr>
+              <a:t>/kg &lt;A&gt; &lt;B&gt;         # camino    (path)</a:t>
+            </a:r>
+          </a:p>
+          <a:p>
+            <a:pPr algn="l">
+              <a:lnSpc>
+                <a:spcPct val="112000"/>
+              </a:lnSpc>
+              <a:spcBef>
+                <a:spcPts val="0"/>
+              </a:spcBef>
+              <a:spcAft>
+                <a:spcPts val="200"/>
+              </a:spcAft>
+            </a:pPr>
+            <a:r>
+              <a:rPr sz="1150" b="0">
+                <a:solidFill>
+                  <a:srgbClr val="E8EAED"/>
+                </a:solidFill>
+                <a:latin typeface="Consolas"/>
+              </a:rPr>
+              <a:t>/kg find &lt;substr&gt;   # nombre de nodo</a:t>
+            </a:r>
+          </a:p>
+          <a:p>
+            <a:pPr algn="l">
+              <a:lnSpc>
+                <a:spcPct val="112000"/>
+              </a:lnSpc>
+              <a:spcBef>
+                <a:spcPts val="0"/>
+              </a:spcBef>
+              <a:spcAft>
+                <a:spcPts val="200"/>
+              </a:spcAft>
+            </a:pPr>
+            <a:r>
+              <a:rPr sz="1150" b="0">
+                <a:solidFill>
+                  <a:srgbClr val="E8EAED"/>
+                </a:solidFill>
+                <a:latin typeface="Consolas"/>
+              </a:rPr>
+              <a:t>/kg-refresh         # reconstruir el grafo</a:t>
+            </a:r>
+          </a:p>
+        </p:txBody>
+      </p:sp>
+      <p:sp>
+        <p:nvSpPr>
+          <p:cNvPr id="15" name="Rounded Rectangle 14"/>
           <p:cNvSpPr/>
           <p:nvPr/>
         </p:nvSpPr>
         <p:spPr>
           <a:xfrm>
-            <a:off x="6231636" y="1783080"/>
-            <a:ext cx="5335524" cy="841248"/>
+            <a:off x="6217920" y="3913632"/>
+            <a:ext cx="5349240" cy="1024128"/>
           </a:xfrm>
           <a:prstGeom prst="roundRect">
             <a:avLst>
-              <a:gd name="adj" fmla="val 9000"/>
+              <a:gd name="adj" fmla="val 6000"/>
             </a:avLst>
           </a:prstGeom>
           <a:solidFill>
@@ -17180,18 +17161,188 @@
       </p:sp>
       <p:sp>
         <p:nvSpPr>
-          <p:cNvPr id="15" name="Rounded Rectangle 14"/>
+          <p:cNvPr id="16" name="TextBox 15"/>
+          <p:cNvSpPr txBox="1"/>
+          <p:nvPr/>
+        </p:nvSpPr>
+        <p:spPr>
+          <a:xfrm>
+            <a:off x="6446520" y="4023360"/>
+            <a:ext cx="4937760" cy="868680"/>
+          </a:xfrm>
+          <a:prstGeom prst="rect">
+            <a:avLst/>
+          </a:prstGeom>
+          <a:noFill/>
+        </p:spPr>
+        <p:txBody>
+          <a:bodyPr wrap="square" lIns="0" tIns="0" rIns="0" bIns="0" anchor="t">
+            <a:spAutoFit/>
+          </a:bodyPr>
+          <a:lstStyle/>
+          <a:p>
+            <a:pPr algn="l">
+              <a:lnSpc>
+                <a:spcPct val="103000"/>
+              </a:lnSpc>
+              <a:spcBef>
+                <a:spcPts val="0"/>
+              </a:spcBef>
+              <a:spcAft>
+                <a:spcPts val="400"/>
+              </a:spcAft>
+            </a:pPr>
+            <a:r>
+              <a:rPr sz="1100" b="1">
+                <a:solidFill>
+                  <a:srgbClr val="D97757"/>
+                </a:solidFill>
+                <a:latin typeface="Segoe UI"/>
+              </a:rPr>
+              <a:t>Primero la historia:  </a:t>
+            </a:r>
+            <a:r>
+              <a:rPr sz="1100" b="0">
+                <a:solidFill>
+                  <a:srgbClr val="E8EAED"/>
+                </a:solidFill>
+                <a:latin typeface="Segoe UI"/>
+              </a:rPr>
+              <a:t>corre /kg &lt;ticket|tema&gt; ANTES de grep — saca los tickets relacionados + la zona de peligro a leer. Apunta a qué leer, no lo sustituye.</a:t>
+            </a:r>
+          </a:p>
+        </p:txBody>
+      </p:sp>
+      <p:sp>
+        <p:nvSpPr>
+          <p:cNvPr id="17" name="TextBox 16"/>
+          <p:cNvSpPr txBox="1"/>
+          <p:nvPr/>
+        </p:nvSpPr>
+        <p:spPr>
+          <a:xfrm>
+            <a:off x="640080" y="4206240"/>
+            <a:ext cx="5349240" cy="1280160"/>
+          </a:xfrm>
+          <a:prstGeom prst="rect">
+            <a:avLst/>
+          </a:prstGeom>
+          <a:noFill/>
+        </p:spPr>
+        <p:txBody>
+          <a:bodyPr wrap="square" lIns="0" tIns="0" rIns="0" bIns="0" anchor="t">
+            <a:spAutoFit/>
+          </a:bodyPr>
+          <a:lstStyle/>
+          <a:p>
+            <a:pPr algn="l">
+              <a:lnSpc>
+                <a:spcPct val="100000"/>
+              </a:lnSpc>
+              <a:spcBef>
+                <a:spcPts val="0"/>
+              </a:spcBef>
+              <a:spcAft>
+                <a:spcPts val="400"/>
+              </a:spcAft>
+            </a:pPr>
+            <a:r>
+              <a:rPr sz="1300" b="1">
+                <a:solidFill>
+                  <a:srgbClr val="8CC28C"/>
+                </a:solidFill>
+                <a:latin typeface="Segoe UI"/>
+              </a:rPr>
+              <a:t>Reconstruible · consultable en 1 llamada</a:t>
+            </a:r>
+          </a:p>
+          <a:p>
+            <a:pPr algn="l">
+              <a:lnSpc>
+                <a:spcPct val="100000"/>
+              </a:lnSpc>
+              <a:spcBef>
+                <a:spcPts val="0"/>
+              </a:spcBef>
+              <a:spcAft>
+                <a:spcPts val="400"/>
+              </a:spcAft>
+            </a:pPr>
+            <a:r>
+              <a:rPr sz="1050" b="0">
+                <a:solidFill>
+                  <a:srgbClr val="9AA4B2"/>
+                </a:solidFill>
+                <a:latin typeface="Segoe UI"/>
+              </a:rPr>
+              <a:t>(enganchado a la regla history-first del CLAUDE.md)</a:t>
+            </a:r>
+          </a:p>
+        </p:txBody>
+      </p:sp>
+      <p:sp>
+        <p:nvSpPr>
+          <p:cNvPr id="18" name="Rounded Rectangle 17"/>
           <p:cNvSpPr/>
           <p:nvPr/>
         </p:nvSpPr>
         <p:spPr>
           <a:xfrm>
-            <a:off x="6432804" y="1984248"/>
-            <a:ext cx="457200" cy="457200"/>
+            <a:off x="640080" y="5806440"/>
+            <a:ext cx="10927080" cy="475488"/>
           </a:xfrm>
           <a:prstGeom prst="roundRect">
             <a:avLst>
-              <a:gd name="adj" fmla="val 32000"/>
+              <a:gd name="adj" fmla="val 28000"/>
+            </a:avLst>
+          </a:prstGeom>
+          <a:solidFill>
+            <a:srgbClr val="222B38"/>
+          </a:solidFill>
+          <a:ln w="9525">
+            <a:solidFill>
+              <a:srgbClr val="2E3948"/>
+            </a:solidFill>
+          </a:ln>
+          <a:effectLst/>
+        </p:spPr>
+        <p:style>
+          <a:lnRef idx="1">
+            <a:schemeClr val="accent1"/>
+          </a:lnRef>
+          <a:fillRef idx="3">
+            <a:schemeClr val="accent1"/>
+          </a:fillRef>
+          <a:effectRef idx="2">
+            <a:schemeClr val="accent1"/>
+          </a:effectRef>
+          <a:fontRef idx="minor">
+            <a:schemeClr val="lt1"/>
+          </a:fontRef>
+        </p:style>
+        <p:txBody>
+          <a:bodyPr rtlCol="0" anchor="ctr"/>
+          <a:lstStyle/>
+          <a:p>
+            <a:pPr algn="ctr"/>
+            <a:endParaRPr/>
+          </a:p>
+        </p:txBody>
+      </p:sp>
+      <p:sp>
+        <p:nvSpPr>
+          <p:cNvPr id="19" name="Rounded Rectangle 18"/>
+          <p:cNvSpPr/>
+          <p:nvPr/>
+        </p:nvSpPr>
+        <p:spPr>
+          <a:xfrm>
+            <a:off x="640080" y="5806440"/>
+            <a:ext cx="82296" cy="475488"/>
+          </a:xfrm>
+          <a:prstGeom prst="roundRect">
+            <a:avLst>
+              <a:gd name="adj" fmla="val 50000"/>
             </a:avLst>
           </a:prstGeom>
           <a:solidFill>
@@ -17227,14 +17378,14 @@
       </p:sp>
       <p:sp>
         <p:nvSpPr>
-          <p:cNvPr id="16" name="TextBox 15"/>
+          <p:cNvPr id="20" name="TextBox 19"/>
           <p:cNvSpPr txBox="1"/>
           <p:nvPr/>
         </p:nvSpPr>
         <p:spPr>
           <a:xfrm>
-            <a:off x="6432804" y="2002536"/>
-            <a:ext cx="457200" cy="420624"/>
+            <a:off x="868680" y="5833872"/>
+            <a:ext cx="10607040" cy="420624"/>
           </a:xfrm>
           <a:prstGeom prst="rect">
             <a:avLst/>
@@ -17247,7 +17398,7 @@
           </a:bodyPr>
           <a:lstStyle/>
           <a:p>
-            <a:pPr algn="ctr">
+            <a:pPr algn="l">
               <a:lnSpc>
                 <a:spcPct val="100000"/>
               </a:lnSpc>
@@ -17259,1072 +17410,31 @@
               </a:spcAft>
             </a:pPr>
             <a:r>
-              <a:rPr sz="1500" b="1">
-                <a:solidFill>
-                  <a:srgbClr val="0F141A"/>
-                </a:solidFill>
-                <a:latin typeface="Segoe UI"/>
-              </a:rPr>
-              <a:t>2</a:t>
-            </a:r>
-          </a:p>
-        </p:txBody>
-      </p:sp>
-      <p:sp>
-        <p:nvSpPr>
-          <p:cNvPr id="17" name="TextBox 16"/>
-          <p:cNvSpPr txBox="1"/>
-          <p:nvPr/>
-        </p:nvSpPr>
-        <p:spPr>
-          <a:xfrm>
-            <a:off x="7054596" y="1929384"/>
-            <a:ext cx="4375404" cy="365760"/>
-          </a:xfrm>
-          <a:prstGeom prst="rect">
-            <a:avLst/>
-          </a:prstGeom>
-          <a:noFill/>
-        </p:spPr>
-        <p:txBody>
-          <a:bodyPr wrap="square" lIns="0" tIns="0" rIns="0" bIns="0" anchor="t">
-            <a:spAutoFit/>
-          </a:bodyPr>
-          <a:lstStyle/>
-          <a:p>
-            <a:pPr algn="l">
-              <a:lnSpc>
-                <a:spcPct val="100000"/>
-              </a:lnSpc>
-              <a:spcBef>
-                <a:spcPts val="0"/>
-              </a:spcBef>
-              <a:spcAft>
-                <a:spcPts val="400"/>
-              </a:spcAft>
-            </a:pPr>
-            <a:r>
-              <a:rPr sz="1450" b="1">
+              <a:rPr sz="1300" b="1">
+                <a:solidFill>
+                  <a:srgbClr val="D97757"/>
+                </a:solidFill>
+                <a:latin typeface="Segoe UI"/>
+              </a:rPr>
+              <a:t>“ </a:t>
+            </a:r>
+            <a:r>
+              <a:rPr sz="1250" b="0">
                 <a:solidFill>
                   <a:srgbClr val="E8EAED"/>
                 </a:solidFill>
                 <a:latin typeface="Segoe UI"/>
               </a:rPr>
-              <a:t>Memoria &amp; sesiones</a:t>
-            </a:r>
-          </a:p>
-        </p:txBody>
-      </p:sp>
-      <p:sp>
-        <p:nvSpPr>
-          <p:cNvPr id="18" name="TextBox 17"/>
-          <p:cNvSpPr txBox="1"/>
-          <p:nvPr/>
-        </p:nvSpPr>
-        <p:spPr>
-          <a:xfrm>
-            <a:off x="7054596" y="2240280"/>
-            <a:ext cx="4375404" cy="338328"/>
-          </a:xfrm>
-          <a:prstGeom prst="rect">
-            <a:avLst/>
-          </a:prstGeom>
-          <a:noFill/>
-        </p:spPr>
-        <p:txBody>
-          <a:bodyPr wrap="square" lIns="0" tIns="0" rIns="0" bIns="0" anchor="t">
-            <a:spAutoFit/>
-          </a:bodyPr>
-          <a:lstStyle/>
-          <a:p>
-            <a:pPr algn="l">
-              <a:lnSpc>
-                <a:spcPct val="102000"/>
-              </a:lnSpc>
-              <a:spcBef>
-                <a:spcPts val="0"/>
-              </a:spcBef>
-              <a:spcAft>
-                <a:spcPts val="400"/>
-              </a:spcAft>
-            </a:pPr>
-            <a:r>
-              <a:rPr sz="1100" b="0">
-                <a:solidFill>
-                  <a:srgbClr val="9AA4B2"/>
-                </a:solidFill>
-                <a:latin typeface="Segoe UI"/>
-              </a:rPr>
-              <a:t>Contexto lean de dos niveles; sesiones que viajan.</a:t>
-            </a:r>
-          </a:p>
-        </p:txBody>
-      </p:sp>
-      <p:sp>
-        <p:nvSpPr>
-          <p:cNvPr id="19" name="Rounded Rectangle 18"/>
-          <p:cNvSpPr/>
-          <p:nvPr/>
-        </p:nvSpPr>
-        <p:spPr>
-          <a:xfrm>
-            <a:off x="640080" y="2880360"/>
-            <a:ext cx="5335524" cy="841248"/>
-          </a:xfrm>
-          <a:prstGeom prst="roundRect">
-            <a:avLst>
-              <a:gd name="adj" fmla="val 9000"/>
-            </a:avLst>
-          </a:prstGeom>
-          <a:solidFill>
-            <a:srgbClr val="1A212B"/>
-          </a:solidFill>
-          <a:ln w="9525">
-            <a:solidFill>
-              <a:srgbClr val="2E3948"/>
-            </a:solidFill>
-          </a:ln>
-          <a:effectLst/>
-        </p:spPr>
-        <p:style>
-          <a:lnRef idx="1">
-            <a:schemeClr val="accent1"/>
-          </a:lnRef>
-          <a:fillRef idx="3">
-            <a:schemeClr val="accent1"/>
-          </a:fillRef>
-          <a:effectRef idx="2">
-            <a:schemeClr val="accent1"/>
-          </a:effectRef>
-          <a:fontRef idx="minor">
-            <a:schemeClr val="lt1"/>
-          </a:fontRef>
-        </p:style>
-        <p:txBody>
-          <a:bodyPr rtlCol="0" anchor="ctr"/>
-          <a:lstStyle/>
-          <a:p>
-            <a:pPr algn="ctr"/>
-            <a:endParaRPr/>
-          </a:p>
-        </p:txBody>
-      </p:sp>
-      <p:sp>
-        <p:nvSpPr>
-          <p:cNvPr id="20" name="Rounded Rectangle 19"/>
-          <p:cNvSpPr/>
-          <p:nvPr/>
-        </p:nvSpPr>
-        <p:spPr>
-          <a:xfrm>
-            <a:off x="841247" y="3081528"/>
-            <a:ext cx="457200" cy="457200"/>
-          </a:xfrm>
-          <a:prstGeom prst="roundRect">
-            <a:avLst>
-              <a:gd name="adj" fmla="val 32000"/>
-            </a:avLst>
-          </a:prstGeom>
-          <a:solidFill>
-            <a:srgbClr val="D97757"/>
-          </a:solidFill>
-          <a:ln>
-            <a:noFill/>
-          </a:ln>
-          <a:effectLst/>
-        </p:spPr>
-        <p:style>
-          <a:lnRef idx="1">
-            <a:schemeClr val="accent1"/>
-          </a:lnRef>
-          <a:fillRef idx="3">
-            <a:schemeClr val="accent1"/>
-          </a:fillRef>
-          <a:effectRef idx="2">
-            <a:schemeClr val="accent1"/>
-          </a:effectRef>
-          <a:fontRef idx="minor">
-            <a:schemeClr val="lt1"/>
-          </a:fontRef>
-        </p:style>
-        <p:txBody>
-          <a:bodyPr rtlCol="0" anchor="ctr"/>
-          <a:lstStyle/>
-          <a:p>
-            <a:pPr algn="ctr"/>
-            <a:endParaRPr/>
-          </a:p>
-        </p:txBody>
-      </p:sp>
-      <p:sp>
-        <p:nvSpPr>
-          <p:cNvPr id="21" name="TextBox 20"/>
-          <p:cNvSpPr txBox="1"/>
-          <p:nvPr/>
-        </p:nvSpPr>
-        <p:spPr>
-          <a:xfrm>
-            <a:off x="841247" y="3099816"/>
-            <a:ext cx="457200" cy="420624"/>
-          </a:xfrm>
-          <a:prstGeom prst="rect">
-            <a:avLst/>
-          </a:prstGeom>
-          <a:noFill/>
-        </p:spPr>
-        <p:txBody>
-          <a:bodyPr wrap="square" lIns="0" tIns="0" rIns="0" bIns="0" anchor="ctr">
-            <a:spAutoFit/>
-          </a:bodyPr>
-          <a:lstStyle/>
-          <a:p>
-            <a:pPr algn="ctr">
-              <a:lnSpc>
-                <a:spcPct val="100000"/>
-              </a:lnSpc>
-              <a:spcBef>
-                <a:spcPts val="0"/>
-              </a:spcBef>
-              <a:spcAft>
-                <a:spcPts val="400"/>
-              </a:spcAft>
-            </a:pPr>
-            <a:r>
-              <a:rPr sz="1500" b="1">
-                <a:solidFill>
-                  <a:srgbClr val="0F141A"/>
-                </a:solidFill>
-                <a:latin typeface="Segoe UI"/>
-              </a:rPr>
-              <a:t>3</a:t>
-            </a:r>
-          </a:p>
-        </p:txBody>
-      </p:sp>
-      <p:sp>
-        <p:nvSpPr>
-          <p:cNvPr id="22" name="TextBox 21"/>
-          <p:cNvSpPr txBox="1"/>
-          <p:nvPr/>
-        </p:nvSpPr>
-        <p:spPr>
-          <a:xfrm>
-            <a:off x="1463040" y="3026664"/>
-            <a:ext cx="4375404" cy="365760"/>
-          </a:xfrm>
-          <a:prstGeom prst="rect">
-            <a:avLst/>
-          </a:prstGeom>
-          <a:noFill/>
-        </p:spPr>
-        <p:txBody>
-          <a:bodyPr wrap="square" lIns="0" tIns="0" rIns="0" bIns="0" anchor="t">
-            <a:spAutoFit/>
-          </a:bodyPr>
-          <a:lstStyle/>
-          <a:p>
-            <a:pPr algn="l">
-              <a:lnSpc>
-                <a:spcPct val="100000"/>
-              </a:lnSpc>
-              <a:spcBef>
-                <a:spcPts val="0"/>
-              </a:spcBef>
-              <a:spcAft>
-                <a:spcPts val="400"/>
-              </a:spcAft>
-            </a:pPr>
-            <a:r>
-              <a:rPr sz="1450" b="1">
-                <a:solidFill>
-                  <a:srgbClr val="E8EAED"/>
-                </a:solidFill>
-                <a:latin typeface="Segoe UI"/>
-              </a:rPr>
-              <a:t>MCP</a:t>
-            </a:r>
-          </a:p>
-        </p:txBody>
-      </p:sp>
-      <p:sp>
-        <p:nvSpPr>
-          <p:cNvPr id="23" name="TextBox 22"/>
-          <p:cNvSpPr txBox="1"/>
-          <p:nvPr/>
-        </p:nvSpPr>
-        <p:spPr>
-          <a:xfrm>
-            <a:off x="1463040" y="3337560"/>
-            <a:ext cx="4375404" cy="338328"/>
-          </a:xfrm>
-          <a:prstGeom prst="rect">
-            <a:avLst/>
-          </a:prstGeom>
-          <a:noFill/>
-        </p:spPr>
-        <p:txBody>
-          <a:bodyPr wrap="square" lIns="0" tIns="0" rIns="0" bIns="0" anchor="t">
-            <a:spAutoFit/>
-          </a:bodyPr>
-          <a:lstStyle/>
-          <a:p>
-            <a:pPr algn="l">
-              <a:lnSpc>
-                <a:spcPct val="102000"/>
-              </a:lnSpc>
-              <a:spcBef>
-                <a:spcPts val="0"/>
-              </a:spcBef>
-              <a:spcAft>
-                <a:spcPts val="400"/>
-              </a:spcAft>
-            </a:pPr>
-            <a:r>
-              <a:rPr sz="1100" b="0">
-                <a:solidFill>
-                  <a:srgbClr val="9AA4B2"/>
-                </a:solidFill>
-                <a:latin typeface="Segoe UI"/>
-              </a:rPr>
-              <a:t>Conecta tus datos, docs, navegador y tooling.</a:t>
-            </a:r>
-          </a:p>
-        </p:txBody>
-      </p:sp>
-      <p:sp>
-        <p:nvSpPr>
-          <p:cNvPr id="24" name="Rounded Rectangle 23"/>
-          <p:cNvSpPr/>
-          <p:nvPr/>
-        </p:nvSpPr>
-        <p:spPr>
-          <a:xfrm>
-            <a:off x="6231636" y="2880360"/>
-            <a:ext cx="5335524" cy="841248"/>
-          </a:xfrm>
-          <a:prstGeom prst="roundRect">
-            <a:avLst>
-              <a:gd name="adj" fmla="val 9000"/>
-            </a:avLst>
-          </a:prstGeom>
-          <a:solidFill>
-            <a:srgbClr val="1A212B"/>
-          </a:solidFill>
-          <a:ln w="9525">
-            <a:solidFill>
-              <a:srgbClr val="2E3948"/>
-            </a:solidFill>
-          </a:ln>
-          <a:effectLst/>
-        </p:spPr>
-        <p:style>
-          <a:lnRef idx="1">
-            <a:schemeClr val="accent1"/>
-          </a:lnRef>
-          <a:fillRef idx="3">
-            <a:schemeClr val="accent1"/>
-          </a:fillRef>
-          <a:effectRef idx="2">
-            <a:schemeClr val="accent1"/>
-          </a:effectRef>
-          <a:fontRef idx="minor">
-            <a:schemeClr val="lt1"/>
-          </a:fontRef>
-        </p:style>
-        <p:txBody>
-          <a:bodyPr rtlCol="0" anchor="ctr"/>
-          <a:lstStyle/>
-          <a:p>
-            <a:pPr algn="ctr"/>
-            <a:endParaRPr/>
-          </a:p>
-        </p:txBody>
-      </p:sp>
-      <p:sp>
-        <p:nvSpPr>
-          <p:cNvPr id="25" name="Rounded Rectangle 24"/>
-          <p:cNvSpPr/>
-          <p:nvPr/>
-        </p:nvSpPr>
-        <p:spPr>
-          <a:xfrm>
-            <a:off x="6432804" y="3081528"/>
-            <a:ext cx="457200" cy="457200"/>
-          </a:xfrm>
-          <a:prstGeom prst="roundRect">
-            <a:avLst>
-              <a:gd name="adj" fmla="val 32000"/>
-            </a:avLst>
-          </a:prstGeom>
-          <a:solidFill>
-            <a:srgbClr val="D97757"/>
-          </a:solidFill>
-          <a:ln>
-            <a:noFill/>
-          </a:ln>
-          <a:effectLst/>
-        </p:spPr>
-        <p:style>
-          <a:lnRef idx="1">
-            <a:schemeClr val="accent1"/>
-          </a:lnRef>
-          <a:fillRef idx="3">
-            <a:schemeClr val="accent1"/>
-          </a:fillRef>
-          <a:effectRef idx="2">
-            <a:schemeClr val="accent1"/>
-          </a:effectRef>
-          <a:fontRef idx="minor">
-            <a:schemeClr val="lt1"/>
-          </a:fontRef>
-        </p:style>
-        <p:txBody>
-          <a:bodyPr rtlCol="0" anchor="ctr"/>
-          <a:lstStyle/>
-          <a:p>
-            <a:pPr algn="ctr"/>
-            <a:endParaRPr/>
-          </a:p>
-        </p:txBody>
-      </p:sp>
-      <p:sp>
-        <p:nvSpPr>
-          <p:cNvPr id="26" name="TextBox 25"/>
-          <p:cNvSpPr txBox="1"/>
-          <p:nvPr/>
-        </p:nvSpPr>
-        <p:spPr>
-          <a:xfrm>
-            <a:off x="6432804" y="3099816"/>
-            <a:ext cx="457200" cy="420624"/>
-          </a:xfrm>
-          <a:prstGeom prst="rect">
-            <a:avLst/>
-          </a:prstGeom>
-          <a:noFill/>
-        </p:spPr>
-        <p:txBody>
-          <a:bodyPr wrap="square" lIns="0" tIns="0" rIns="0" bIns="0" anchor="ctr">
-            <a:spAutoFit/>
-          </a:bodyPr>
-          <a:lstStyle/>
-          <a:p>
-            <a:pPr algn="ctr">
-              <a:lnSpc>
-                <a:spcPct val="100000"/>
-              </a:lnSpc>
-              <a:spcBef>
-                <a:spcPts val="0"/>
-              </a:spcBef>
-              <a:spcAft>
-                <a:spcPts val="400"/>
-              </a:spcAft>
-            </a:pPr>
-            <a:r>
-              <a:rPr sz="1500" b="1">
-                <a:solidFill>
-                  <a:srgbClr val="0F141A"/>
-                </a:solidFill>
-                <a:latin typeface="Segoe UI"/>
-              </a:rPr>
-              <a:t>4</a:t>
-            </a:r>
-          </a:p>
-        </p:txBody>
-      </p:sp>
-      <p:sp>
-        <p:nvSpPr>
-          <p:cNvPr id="27" name="TextBox 26"/>
-          <p:cNvSpPr txBox="1"/>
-          <p:nvPr/>
-        </p:nvSpPr>
-        <p:spPr>
-          <a:xfrm>
-            <a:off x="7054596" y="3026664"/>
-            <a:ext cx="4375404" cy="365760"/>
-          </a:xfrm>
-          <a:prstGeom prst="rect">
-            <a:avLst/>
-          </a:prstGeom>
-          <a:noFill/>
-        </p:spPr>
-        <p:txBody>
-          <a:bodyPr wrap="square" lIns="0" tIns="0" rIns="0" bIns="0" anchor="t">
-            <a:spAutoFit/>
-          </a:bodyPr>
-          <a:lstStyle/>
-          <a:p>
-            <a:pPr algn="l">
-              <a:lnSpc>
-                <a:spcPct val="100000"/>
-              </a:lnSpc>
-              <a:spcBef>
-                <a:spcPts val="0"/>
-              </a:spcBef>
-              <a:spcAft>
-                <a:spcPts val="400"/>
-              </a:spcAft>
-            </a:pPr>
-            <a:r>
-              <a:rPr sz="1450" b="1">
-                <a:solidFill>
-                  <a:srgbClr val="E8EAED"/>
-                </a:solidFill>
-                <a:latin typeface="Segoe UI"/>
-              </a:rPr>
-              <a:t>Skills &amp; plugins</a:t>
-            </a:r>
-          </a:p>
-        </p:txBody>
-      </p:sp>
-      <p:sp>
-        <p:nvSpPr>
-          <p:cNvPr id="28" name="TextBox 27"/>
-          <p:cNvSpPr txBox="1"/>
-          <p:nvPr/>
-        </p:nvSpPr>
-        <p:spPr>
-          <a:xfrm>
-            <a:off x="7054596" y="3337560"/>
-            <a:ext cx="4375404" cy="338328"/>
-          </a:xfrm>
-          <a:prstGeom prst="rect">
-            <a:avLst/>
-          </a:prstGeom>
-          <a:noFill/>
-        </p:spPr>
-        <p:txBody>
-          <a:bodyPr wrap="square" lIns="0" tIns="0" rIns="0" bIns="0" anchor="t">
-            <a:spAutoFit/>
-          </a:bodyPr>
-          <a:lstStyle/>
-          <a:p>
-            <a:pPr algn="l">
-              <a:lnSpc>
-                <a:spcPct val="102000"/>
-              </a:lnSpc>
-              <a:spcBef>
-                <a:spcPts val="0"/>
-              </a:spcBef>
-              <a:spcAft>
-                <a:spcPts val="400"/>
-              </a:spcAft>
-            </a:pPr>
-            <a:r>
-              <a:rPr sz="1100" b="0">
-                <a:solidFill>
-                  <a:srgbClr val="9AA4B2"/>
-                </a:solidFill>
-                <a:latin typeface="Segoe UI"/>
-              </a:rPr>
-              <a:t>Empaqueta y distribuye flujos repetibles.</a:t>
-            </a:r>
-          </a:p>
-        </p:txBody>
-      </p:sp>
-      <p:sp>
-        <p:nvSpPr>
-          <p:cNvPr id="29" name="Rounded Rectangle 28"/>
-          <p:cNvSpPr/>
-          <p:nvPr/>
-        </p:nvSpPr>
-        <p:spPr>
-          <a:xfrm>
-            <a:off x="640080" y="3977640"/>
-            <a:ext cx="5335524" cy="841248"/>
-          </a:xfrm>
-          <a:prstGeom prst="roundRect">
-            <a:avLst>
-              <a:gd name="adj" fmla="val 9000"/>
-            </a:avLst>
-          </a:prstGeom>
-          <a:solidFill>
-            <a:srgbClr val="1A212B"/>
-          </a:solidFill>
-          <a:ln w="9525">
-            <a:solidFill>
-              <a:srgbClr val="2E3948"/>
-            </a:solidFill>
-          </a:ln>
-          <a:effectLst/>
-        </p:spPr>
-        <p:style>
-          <a:lnRef idx="1">
-            <a:schemeClr val="accent1"/>
-          </a:lnRef>
-          <a:fillRef idx="3">
-            <a:schemeClr val="accent1"/>
-          </a:fillRef>
-          <a:effectRef idx="2">
-            <a:schemeClr val="accent1"/>
-          </a:effectRef>
-          <a:fontRef idx="minor">
-            <a:schemeClr val="lt1"/>
-          </a:fontRef>
-        </p:style>
-        <p:txBody>
-          <a:bodyPr rtlCol="0" anchor="ctr"/>
-          <a:lstStyle/>
-          <a:p>
-            <a:pPr algn="ctr"/>
-            <a:endParaRPr/>
-          </a:p>
-        </p:txBody>
-      </p:sp>
-      <p:sp>
-        <p:nvSpPr>
-          <p:cNvPr id="30" name="Rounded Rectangle 29"/>
-          <p:cNvSpPr/>
-          <p:nvPr/>
-        </p:nvSpPr>
-        <p:spPr>
-          <a:xfrm>
-            <a:off x="841247" y="4178808"/>
-            <a:ext cx="457200" cy="457200"/>
-          </a:xfrm>
-          <a:prstGeom prst="roundRect">
-            <a:avLst>
-              <a:gd name="adj" fmla="val 32000"/>
-            </a:avLst>
-          </a:prstGeom>
-          <a:solidFill>
-            <a:srgbClr val="D97757"/>
-          </a:solidFill>
-          <a:ln>
-            <a:noFill/>
-          </a:ln>
-          <a:effectLst/>
-        </p:spPr>
-        <p:style>
-          <a:lnRef idx="1">
-            <a:schemeClr val="accent1"/>
-          </a:lnRef>
-          <a:fillRef idx="3">
-            <a:schemeClr val="accent1"/>
-          </a:fillRef>
-          <a:effectRef idx="2">
-            <a:schemeClr val="accent1"/>
-          </a:effectRef>
-          <a:fontRef idx="minor">
-            <a:schemeClr val="lt1"/>
-          </a:fontRef>
-        </p:style>
-        <p:txBody>
-          <a:bodyPr rtlCol="0" anchor="ctr"/>
-          <a:lstStyle/>
-          <a:p>
-            <a:pPr algn="ctr"/>
-            <a:endParaRPr/>
-          </a:p>
-        </p:txBody>
-      </p:sp>
-      <p:sp>
-        <p:nvSpPr>
-          <p:cNvPr id="31" name="TextBox 30"/>
-          <p:cNvSpPr txBox="1"/>
-          <p:nvPr/>
-        </p:nvSpPr>
-        <p:spPr>
-          <a:xfrm>
-            <a:off x="841247" y="4197096"/>
-            <a:ext cx="457200" cy="420624"/>
-          </a:xfrm>
-          <a:prstGeom prst="rect">
-            <a:avLst/>
-          </a:prstGeom>
-          <a:noFill/>
-        </p:spPr>
-        <p:txBody>
-          <a:bodyPr wrap="square" lIns="0" tIns="0" rIns="0" bIns="0" anchor="ctr">
-            <a:spAutoFit/>
-          </a:bodyPr>
-          <a:lstStyle/>
-          <a:p>
-            <a:pPr algn="ctr">
-              <a:lnSpc>
-                <a:spcPct val="100000"/>
-              </a:lnSpc>
-              <a:spcBef>
-                <a:spcPts val="0"/>
-              </a:spcBef>
-              <a:spcAft>
-                <a:spcPts val="400"/>
-              </a:spcAft>
-            </a:pPr>
-            <a:r>
-              <a:rPr sz="1500" b="1">
-                <a:solidFill>
-                  <a:srgbClr val="0F141A"/>
-                </a:solidFill>
-                <a:latin typeface="Segoe UI"/>
-              </a:rPr>
-              <a:t>5</a:t>
-            </a:r>
-          </a:p>
-        </p:txBody>
-      </p:sp>
-      <p:sp>
-        <p:nvSpPr>
-          <p:cNvPr id="32" name="TextBox 31"/>
-          <p:cNvSpPr txBox="1"/>
-          <p:nvPr/>
-        </p:nvSpPr>
-        <p:spPr>
-          <a:xfrm>
-            <a:off x="1463040" y="4123944"/>
-            <a:ext cx="4375404" cy="365760"/>
-          </a:xfrm>
-          <a:prstGeom prst="rect">
-            <a:avLst/>
-          </a:prstGeom>
-          <a:noFill/>
-        </p:spPr>
-        <p:txBody>
-          <a:bodyPr wrap="square" lIns="0" tIns="0" rIns="0" bIns="0" anchor="t">
-            <a:spAutoFit/>
-          </a:bodyPr>
-          <a:lstStyle/>
-          <a:p>
-            <a:pPr algn="l">
-              <a:lnSpc>
-                <a:spcPct val="100000"/>
-              </a:lnSpc>
-              <a:spcBef>
-                <a:spcPts val="0"/>
-              </a:spcBef>
-              <a:spcAft>
-                <a:spcPts val="400"/>
-              </a:spcAft>
-            </a:pPr>
-            <a:r>
-              <a:rPr sz="1450" b="1">
-                <a:solidFill>
-                  <a:srgbClr val="E8EAED"/>
-                </a:solidFill>
-                <a:latin typeface="Segoe UI"/>
-              </a:rPr>
-              <a:t>Automatización</a:t>
-            </a:r>
-          </a:p>
-        </p:txBody>
-      </p:sp>
-      <p:sp>
-        <p:nvSpPr>
-          <p:cNvPr id="33" name="TextBox 32"/>
-          <p:cNvSpPr txBox="1"/>
-          <p:nvPr/>
-        </p:nvSpPr>
-        <p:spPr>
-          <a:xfrm>
-            <a:off x="1463040" y="4434840"/>
-            <a:ext cx="4375404" cy="338328"/>
-          </a:xfrm>
-          <a:prstGeom prst="rect">
-            <a:avLst/>
-          </a:prstGeom>
-          <a:noFill/>
-        </p:spPr>
-        <p:txBody>
-          <a:bodyPr wrap="square" lIns="0" tIns="0" rIns="0" bIns="0" anchor="t">
-            <a:spAutoFit/>
-          </a:bodyPr>
-          <a:lstStyle/>
-          <a:p>
-            <a:pPr algn="l">
-              <a:lnSpc>
-                <a:spcPct val="102000"/>
-              </a:lnSpc>
-              <a:spcBef>
-                <a:spcPts val="0"/>
-              </a:spcBef>
-              <a:spcAft>
-                <a:spcPts val="400"/>
-              </a:spcAft>
-            </a:pPr>
-            <a:r>
-              <a:rPr sz="1100" b="0">
-                <a:solidFill>
-                  <a:srgbClr val="9AA4B2"/>
-                </a:solidFill>
-                <a:latin typeface="Segoe UI"/>
-              </a:rPr>
-              <a:t>Hooks que garantizan calidad; CI; scheduling; SDK.</a:t>
-            </a:r>
-          </a:p>
-        </p:txBody>
-      </p:sp>
-      <p:sp>
-        <p:nvSpPr>
-          <p:cNvPr id="34" name="Rounded Rectangle 33"/>
-          <p:cNvSpPr/>
-          <p:nvPr/>
-        </p:nvSpPr>
-        <p:spPr>
-          <a:xfrm>
-            <a:off x="6231636" y="3977640"/>
-            <a:ext cx="5335524" cy="841248"/>
-          </a:xfrm>
-          <a:prstGeom prst="roundRect">
-            <a:avLst>
-              <a:gd name="adj" fmla="val 9000"/>
-            </a:avLst>
-          </a:prstGeom>
-          <a:solidFill>
-            <a:srgbClr val="1A212B"/>
-          </a:solidFill>
-          <a:ln w="9525">
-            <a:solidFill>
-              <a:srgbClr val="2E3948"/>
-            </a:solidFill>
-          </a:ln>
-          <a:effectLst/>
-        </p:spPr>
-        <p:style>
-          <a:lnRef idx="1">
-            <a:schemeClr val="accent1"/>
-          </a:lnRef>
-          <a:fillRef idx="3">
-            <a:schemeClr val="accent1"/>
-          </a:fillRef>
-          <a:effectRef idx="2">
-            <a:schemeClr val="accent1"/>
-          </a:effectRef>
-          <a:fontRef idx="minor">
-            <a:schemeClr val="lt1"/>
-          </a:fontRef>
-        </p:style>
-        <p:txBody>
-          <a:bodyPr rtlCol="0" anchor="ctr"/>
-          <a:lstStyle/>
-          <a:p>
-            <a:pPr algn="ctr"/>
-            <a:endParaRPr/>
-          </a:p>
-        </p:txBody>
-      </p:sp>
-      <p:sp>
-        <p:nvSpPr>
-          <p:cNvPr id="35" name="Rounded Rectangle 34"/>
-          <p:cNvSpPr/>
-          <p:nvPr/>
-        </p:nvSpPr>
-        <p:spPr>
-          <a:xfrm>
-            <a:off x="6432804" y="4178808"/>
-            <a:ext cx="457200" cy="457200"/>
-          </a:xfrm>
-          <a:prstGeom prst="roundRect">
-            <a:avLst>
-              <a:gd name="adj" fmla="val 32000"/>
-            </a:avLst>
-          </a:prstGeom>
-          <a:solidFill>
-            <a:srgbClr val="D97757"/>
-          </a:solidFill>
-          <a:ln>
-            <a:noFill/>
-          </a:ln>
-          <a:effectLst/>
-        </p:spPr>
-        <p:style>
-          <a:lnRef idx="1">
-            <a:schemeClr val="accent1"/>
-          </a:lnRef>
-          <a:fillRef idx="3">
-            <a:schemeClr val="accent1"/>
-          </a:fillRef>
-          <a:effectRef idx="2">
-            <a:schemeClr val="accent1"/>
-          </a:effectRef>
-          <a:fontRef idx="minor">
-            <a:schemeClr val="lt1"/>
-          </a:fontRef>
-        </p:style>
-        <p:txBody>
-          <a:bodyPr rtlCol="0" anchor="ctr"/>
-          <a:lstStyle/>
-          <a:p>
-            <a:pPr algn="ctr"/>
-            <a:endParaRPr/>
-          </a:p>
-        </p:txBody>
-      </p:sp>
-      <p:sp>
-        <p:nvSpPr>
-          <p:cNvPr id="36" name="TextBox 35"/>
-          <p:cNvSpPr txBox="1"/>
-          <p:nvPr/>
-        </p:nvSpPr>
-        <p:spPr>
-          <a:xfrm>
-            <a:off x="6432804" y="4197096"/>
-            <a:ext cx="457200" cy="420624"/>
-          </a:xfrm>
-          <a:prstGeom prst="rect">
-            <a:avLst/>
-          </a:prstGeom>
-          <a:noFill/>
-        </p:spPr>
-        <p:txBody>
-          <a:bodyPr wrap="square" lIns="0" tIns="0" rIns="0" bIns="0" anchor="ctr">
-            <a:spAutoFit/>
-          </a:bodyPr>
-          <a:lstStyle/>
-          <a:p>
-            <a:pPr algn="ctr">
-              <a:lnSpc>
-                <a:spcPct val="100000"/>
-              </a:lnSpc>
-              <a:spcBef>
-                <a:spcPts val="0"/>
-              </a:spcBef>
-              <a:spcAft>
-                <a:spcPts val="400"/>
-              </a:spcAft>
-            </a:pPr>
-            <a:r>
-              <a:rPr sz="1500" b="1">
-                <a:solidFill>
-                  <a:srgbClr val="0F141A"/>
-                </a:solidFill>
-                <a:latin typeface="Segoe UI"/>
-              </a:rPr>
-              <a:t>6</a:t>
-            </a:r>
-          </a:p>
-        </p:txBody>
-      </p:sp>
-      <p:sp>
-        <p:nvSpPr>
-          <p:cNvPr id="37" name="TextBox 36"/>
-          <p:cNvSpPr txBox="1"/>
-          <p:nvPr/>
-        </p:nvSpPr>
-        <p:spPr>
-          <a:xfrm>
-            <a:off x="7054596" y="4123944"/>
-            <a:ext cx="4375404" cy="365760"/>
-          </a:xfrm>
-          <a:prstGeom prst="rect">
-            <a:avLst/>
-          </a:prstGeom>
-          <a:noFill/>
-        </p:spPr>
-        <p:txBody>
-          <a:bodyPr wrap="square" lIns="0" tIns="0" rIns="0" bIns="0" anchor="t">
-            <a:spAutoFit/>
-          </a:bodyPr>
-          <a:lstStyle/>
-          <a:p>
-            <a:pPr algn="l">
-              <a:lnSpc>
-                <a:spcPct val="100000"/>
-              </a:lnSpc>
-              <a:spcBef>
-                <a:spcPts val="0"/>
-              </a:spcBef>
-              <a:spcAft>
-                <a:spcPts val="400"/>
-              </a:spcAft>
-            </a:pPr>
-            <a:r>
-              <a:rPr sz="1450" b="1">
-                <a:solidFill>
-                  <a:srgbClr val="E8EAED"/>
-                </a:solidFill>
-                <a:latin typeface="Segoe UI"/>
-              </a:rPr>
-              <a:t>Metodología</a:t>
-            </a:r>
-          </a:p>
-        </p:txBody>
-      </p:sp>
-      <p:sp>
-        <p:nvSpPr>
-          <p:cNvPr id="38" name="TextBox 37"/>
-          <p:cNvSpPr txBox="1"/>
-          <p:nvPr/>
-        </p:nvSpPr>
-        <p:spPr>
-          <a:xfrm>
-            <a:off x="7054596" y="4434840"/>
-            <a:ext cx="4375404" cy="338328"/>
-          </a:xfrm>
-          <a:prstGeom prst="rect">
-            <a:avLst/>
-          </a:prstGeom>
-          <a:noFill/>
-        </p:spPr>
-        <p:txBody>
-          <a:bodyPr wrap="square" lIns="0" tIns="0" rIns="0" bIns="0" anchor="t">
-            <a:spAutoFit/>
-          </a:bodyPr>
-          <a:lstStyle/>
-          <a:p>
-            <a:pPr algn="l">
-              <a:lnSpc>
-                <a:spcPct val="102000"/>
-              </a:lnSpc>
-              <a:spcBef>
-                <a:spcPts val="0"/>
-              </a:spcBef>
-              <a:spcAft>
-                <a:spcPts val="400"/>
-              </a:spcAft>
-            </a:pPr>
-            <a:r>
-              <a:rPr sz="1100" b="0">
-                <a:solidFill>
-                  <a:srgbClr val="9AA4B2"/>
-                </a:solidFill>
-                <a:latin typeface="Segoe UI"/>
-              </a:rPr>
-              <a:t>Agente disciplinado: 11 etapas, gates, tools reales.</a:t>
-            </a:r>
-          </a:p>
-        </p:txBody>
-      </p:sp>
-      <p:sp>
-        <p:nvSpPr>
-          <p:cNvPr id="39" name="TextBox 38"/>
-          <p:cNvSpPr txBox="1"/>
-          <p:nvPr/>
-        </p:nvSpPr>
-        <p:spPr>
-          <a:xfrm>
-            <a:off x="640080" y="6126480"/>
-            <a:ext cx="10972800" cy="365760"/>
-          </a:xfrm>
-          <a:prstGeom prst="rect">
-            <a:avLst/>
-          </a:prstGeom>
-          <a:noFill/>
-        </p:spPr>
-        <p:txBody>
-          <a:bodyPr wrap="square" lIns="0" tIns="0" rIns="0" bIns="0" anchor="t">
-            <a:spAutoFit/>
-          </a:bodyPr>
-          <a:lstStyle/>
-          <a:p>
-            <a:pPr algn="l">
-              <a:lnSpc>
-                <a:spcPct val="100000"/>
-              </a:lnSpc>
-              <a:spcBef>
-                <a:spcPts val="0"/>
-              </a:spcBef>
-              <a:spcAft>
-                <a:spcPts val="400"/>
-              </a:spcAft>
-            </a:pPr>
-            <a:r>
-              <a:rPr sz="1100" b="0">
-                <a:solidFill>
-                  <a:srgbClr val="66707E"/>
-                </a:solidFill>
-                <a:latin typeface="Segoe UI"/>
-              </a:rPr>
-              <a:t>Referencias:  code.claude.com/docs  ·  github.com/tomascortereal/claude-code-setup  ·  colbymchenry.github.io/codegraph</a:t>
+              <a:t>El grafo es el mapa; el agente, el guía. Recall de zonas de peligro que si no tendrías que recordar.</a:t>
+            </a:r>
+            <a:r>
+              <a:rPr sz="1300" b="1">
+                <a:solidFill>
+                  <a:srgbClr val="D97757"/>
+                </a:solidFill>
+                <a:latin typeface="Segoe UI"/>
+              </a:rPr>
+              <a:t> ”</a:t>
             </a:r>
           </a:p>
         </p:txBody>
@@ -19781,6 +18891,1777 @@
 </p:sld>
 </file>
 
+<file path=ppt/slides/slide20.xml><?xml version="1.0" encoding="utf-8"?>
+<p:sld xmlns:a="http://schemas.openxmlformats.org/drawingml/2006/main" xmlns:r="http://schemas.openxmlformats.org/officeDocument/2006/relationships" xmlns:p="http://schemas.openxmlformats.org/presentationml/2006/main">
+  <p:cSld>
+    <p:spTree>
+      <p:nvGrpSpPr>
+        <p:cNvPr id="1" name=""/>
+        <p:cNvGrpSpPr/>
+        <p:nvPr/>
+      </p:nvGrpSpPr>
+      <p:grpSpPr>
+        <a:xfrm>
+          <a:off x="0" y="0"/>
+          <a:ext cx="0" cy="0"/>
+          <a:chOff x="0" y="0"/>
+          <a:chExt cx="0" cy="0"/>
+        </a:xfrm>
+      </p:grpSpPr>
+      <p:sp>
+        <p:nvSpPr>
+          <p:cNvPr id="2" name="Rectangle 1"/>
+          <p:cNvSpPr/>
+          <p:nvPr/>
+        </p:nvSpPr>
+        <p:spPr>
+          <a:xfrm>
+            <a:off x="-91440" y="-91440"/>
+            <a:ext cx="12371832" cy="7040880"/>
+          </a:xfrm>
+          <a:prstGeom prst="rect">
+            <a:avLst/>
+          </a:prstGeom>
+          <a:solidFill>
+            <a:srgbClr val="0F141A"/>
+          </a:solidFill>
+          <a:ln>
+            <a:noFill/>
+          </a:ln>
+          <a:effectLst/>
+        </p:spPr>
+        <p:style>
+          <a:lnRef idx="1">
+            <a:schemeClr val="accent1"/>
+          </a:lnRef>
+          <a:fillRef idx="3">
+            <a:schemeClr val="accent1"/>
+          </a:fillRef>
+          <a:effectRef idx="2">
+            <a:schemeClr val="accent1"/>
+          </a:effectRef>
+          <a:fontRef idx="minor">
+            <a:schemeClr val="lt1"/>
+          </a:fontRef>
+        </p:style>
+        <p:txBody>
+          <a:bodyPr rtlCol="0" anchor="ctr"/>
+          <a:lstStyle/>
+          <a:p>
+            <a:pPr algn="ctr"/>
+            <a:endParaRPr/>
+          </a:p>
+        </p:txBody>
+      </p:sp>
+      <p:sp>
+        <p:nvSpPr>
+          <p:cNvPr id="3" name="Rectangle 2"/>
+          <p:cNvSpPr/>
+          <p:nvPr/>
+        </p:nvSpPr>
+        <p:spPr>
+          <a:xfrm>
+            <a:off x="0" y="0"/>
+            <a:ext cx="201168" cy="6858000"/>
+          </a:xfrm>
+          <a:prstGeom prst="rect">
+            <a:avLst/>
+          </a:prstGeom>
+          <a:solidFill>
+            <a:srgbClr val="D97757"/>
+          </a:solidFill>
+          <a:ln>
+            <a:noFill/>
+          </a:ln>
+          <a:effectLst/>
+        </p:spPr>
+        <p:style>
+          <a:lnRef idx="1">
+            <a:schemeClr val="accent1"/>
+          </a:lnRef>
+          <a:fillRef idx="3">
+            <a:schemeClr val="accent1"/>
+          </a:fillRef>
+          <a:effectRef idx="2">
+            <a:schemeClr val="accent1"/>
+          </a:effectRef>
+          <a:fontRef idx="minor">
+            <a:schemeClr val="lt1"/>
+          </a:fontRef>
+        </p:style>
+        <p:txBody>
+          <a:bodyPr rtlCol="0" anchor="ctr"/>
+          <a:lstStyle/>
+          <a:p>
+            <a:pPr algn="ctr"/>
+            <a:endParaRPr/>
+          </a:p>
+        </p:txBody>
+      </p:sp>
+      <p:sp>
+        <p:nvSpPr>
+          <p:cNvPr id="4" name="TextBox 3"/>
+          <p:cNvSpPr txBox="1"/>
+          <p:nvPr/>
+        </p:nvSpPr>
+        <p:spPr>
+          <a:xfrm>
+            <a:off x="640080" y="502920"/>
+            <a:ext cx="10058400" cy="365760"/>
+          </a:xfrm>
+          <a:prstGeom prst="rect">
+            <a:avLst/>
+          </a:prstGeom>
+          <a:noFill/>
+        </p:spPr>
+        <p:txBody>
+          <a:bodyPr wrap="square" lIns="0" tIns="0" rIns="0" bIns="0" anchor="t">
+            <a:spAutoFit/>
+          </a:bodyPr>
+          <a:lstStyle/>
+          <a:p>
+            <a:pPr algn="l">
+              <a:lnSpc>
+                <a:spcPct val="100000"/>
+              </a:lnSpc>
+              <a:spcBef>
+                <a:spcPts val="0"/>
+              </a:spcBef>
+              <a:spcAft>
+                <a:spcPts val="400"/>
+              </a:spcAft>
+            </a:pPr>
+            <a:r>
+              <a:rPr sz="1200" b="1">
+                <a:solidFill>
+                  <a:srgbClr val="D97757"/>
+                </a:solidFill>
+                <a:latin typeface="Segoe UI"/>
+              </a:rPr>
+              <a:t>CIERRE</a:t>
+            </a:r>
+          </a:p>
+        </p:txBody>
+      </p:sp>
+      <p:sp>
+        <p:nvSpPr>
+          <p:cNvPr id="5" name="TextBox 4"/>
+          <p:cNvSpPr txBox="1"/>
+          <p:nvPr/>
+        </p:nvSpPr>
+        <p:spPr>
+          <a:xfrm>
+            <a:off x="621792" y="841248"/>
+            <a:ext cx="10972800" cy="1005840"/>
+          </a:xfrm>
+          <a:prstGeom prst="rect">
+            <a:avLst/>
+          </a:prstGeom>
+          <a:noFill/>
+        </p:spPr>
+        <p:txBody>
+          <a:bodyPr wrap="square" lIns="0" tIns="0" rIns="0" bIns="0" anchor="t">
+            <a:spAutoFit/>
+          </a:bodyPr>
+          <a:lstStyle/>
+          <a:p>
+            <a:pPr algn="l">
+              <a:lnSpc>
+                <a:spcPct val="100000"/>
+              </a:lnSpc>
+              <a:spcBef>
+                <a:spcPts val="0"/>
+              </a:spcBef>
+              <a:spcAft>
+                <a:spcPts val="400"/>
+              </a:spcAft>
+            </a:pPr>
+            <a:r>
+              <a:rPr sz="3000" b="1">
+                <a:solidFill>
+                  <a:srgbClr val="E8EAED"/>
+                </a:solidFill>
+                <a:latin typeface="Segoe UI"/>
+              </a:rPr>
+              <a:t>De asistente a sistema</a:t>
+            </a:r>
+          </a:p>
+        </p:txBody>
+      </p:sp>
+      <p:sp>
+        <p:nvSpPr>
+          <p:cNvPr id="6" name="Rectangle 5"/>
+          <p:cNvSpPr/>
+          <p:nvPr/>
+        </p:nvSpPr>
+        <p:spPr>
+          <a:xfrm>
+            <a:off x="658368" y="1572768"/>
+            <a:ext cx="1005840" cy="41148"/>
+          </a:xfrm>
+          <a:prstGeom prst="rect">
+            <a:avLst/>
+          </a:prstGeom>
+          <a:solidFill>
+            <a:srgbClr val="D97757"/>
+          </a:solidFill>
+          <a:ln>
+            <a:noFill/>
+          </a:ln>
+          <a:effectLst/>
+        </p:spPr>
+        <p:style>
+          <a:lnRef idx="1">
+            <a:schemeClr val="accent1"/>
+          </a:lnRef>
+          <a:fillRef idx="3">
+            <a:schemeClr val="accent1"/>
+          </a:fillRef>
+          <a:effectRef idx="2">
+            <a:schemeClr val="accent1"/>
+          </a:effectRef>
+          <a:fontRef idx="minor">
+            <a:schemeClr val="lt1"/>
+          </a:fontRef>
+        </p:style>
+        <p:txBody>
+          <a:bodyPr rtlCol="0" anchor="ctr"/>
+          <a:lstStyle/>
+          <a:p>
+            <a:pPr algn="ctr"/>
+            <a:endParaRPr/>
+          </a:p>
+        </p:txBody>
+      </p:sp>
+      <p:sp>
+        <p:nvSpPr>
+          <p:cNvPr id="7" name="TextBox 6"/>
+          <p:cNvSpPr txBox="1"/>
+          <p:nvPr/>
+        </p:nvSpPr>
+        <p:spPr>
+          <a:xfrm>
+            <a:off x="640080" y="6419088"/>
+            <a:ext cx="7315200" cy="320040"/>
+          </a:xfrm>
+          <a:prstGeom prst="rect">
+            <a:avLst/>
+          </a:prstGeom>
+          <a:noFill/>
+        </p:spPr>
+        <p:txBody>
+          <a:bodyPr wrap="square" lIns="0" tIns="0" rIns="0" bIns="0" anchor="t">
+            <a:spAutoFit/>
+          </a:bodyPr>
+          <a:lstStyle/>
+          <a:p>
+            <a:pPr algn="l">
+              <a:lnSpc>
+                <a:spcPct val="100000"/>
+              </a:lnSpc>
+              <a:spcBef>
+                <a:spcPts val="0"/>
+              </a:spcBef>
+              <a:spcAft>
+                <a:spcPts val="400"/>
+              </a:spcAft>
+            </a:pPr>
+            <a:r>
+              <a:rPr sz="950" b="0">
+                <a:solidFill>
+                  <a:srgbClr val="66707E"/>
+                </a:solidFill>
+                <a:latin typeface="Segoe UI"/>
+              </a:rPr>
+              <a:t>Claude Code · Sesión técnica</a:t>
+            </a:r>
+          </a:p>
+        </p:txBody>
+      </p:sp>
+      <p:sp>
+        <p:nvSpPr>
+          <p:cNvPr id="8" name="TextBox 7"/>
+          <p:cNvSpPr txBox="1"/>
+          <p:nvPr/>
+        </p:nvSpPr>
+        <p:spPr>
+          <a:xfrm>
+            <a:off x="10789920" y="6419088"/>
+            <a:ext cx="1097280" cy="320040"/>
+          </a:xfrm>
+          <a:prstGeom prst="rect">
+            <a:avLst/>
+          </a:prstGeom>
+          <a:noFill/>
+        </p:spPr>
+        <p:txBody>
+          <a:bodyPr wrap="square" lIns="0" tIns="0" rIns="0" bIns="0" anchor="t">
+            <a:spAutoFit/>
+          </a:bodyPr>
+          <a:lstStyle/>
+          <a:p>
+            <a:pPr algn="r">
+              <a:lnSpc>
+                <a:spcPct val="100000"/>
+              </a:lnSpc>
+              <a:spcBef>
+                <a:spcPts val="0"/>
+              </a:spcBef>
+              <a:spcAft>
+                <a:spcPts val="400"/>
+              </a:spcAft>
+            </a:pPr>
+            <a:r>
+              <a:rPr sz="950" b="1">
+                <a:solidFill>
+                  <a:srgbClr val="66707E"/>
+                </a:solidFill>
+                <a:latin typeface="Segoe UI"/>
+              </a:rPr>
+              <a:t>20</a:t>
+            </a:r>
+          </a:p>
+        </p:txBody>
+      </p:sp>
+      <p:sp>
+        <p:nvSpPr>
+          <p:cNvPr id="9" name="Rounded Rectangle 8"/>
+          <p:cNvSpPr/>
+          <p:nvPr/>
+        </p:nvSpPr>
+        <p:spPr>
+          <a:xfrm>
+            <a:off x="640080" y="1783080"/>
+            <a:ext cx="5335524" cy="841248"/>
+          </a:xfrm>
+          <a:prstGeom prst="roundRect">
+            <a:avLst>
+              <a:gd name="adj" fmla="val 9000"/>
+            </a:avLst>
+          </a:prstGeom>
+          <a:solidFill>
+            <a:srgbClr val="1A212B"/>
+          </a:solidFill>
+          <a:ln w="9525">
+            <a:solidFill>
+              <a:srgbClr val="2E3948"/>
+            </a:solidFill>
+          </a:ln>
+          <a:effectLst/>
+        </p:spPr>
+        <p:style>
+          <a:lnRef idx="1">
+            <a:schemeClr val="accent1"/>
+          </a:lnRef>
+          <a:fillRef idx="3">
+            <a:schemeClr val="accent1"/>
+          </a:fillRef>
+          <a:effectRef idx="2">
+            <a:schemeClr val="accent1"/>
+          </a:effectRef>
+          <a:fontRef idx="minor">
+            <a:schemeClr val="lt1"/>
+          </a:fontRef>
+        </p:style>
+        <p:txBody>
+          <a:bodyPr rtlCol="0" anchor="ctr"/>
+          <a:lstStyle/>
+          <a:p>
+            <a:pPr algn="ctr"/>
+            <a:endParaRPr/>
+          </a:p>
+        </p:txBody>
+      </p:sp>
+      <p:sp>
+        <p:nvSpPr>
+          <p:cNvPr id="10" name="Rounded Rectangle 9"/>
+          <p:cNvSpPr/>
+          <p:nvPr/>
+        </p:nvSpPr>
+        <p:spPr>
+          <a:xfrm>
+            <a:off x="841247" y="1984248"/>
+            <a:ext cx="457200" cy="457200"/>
+          </a:xfrm>
+          <a:prstGeom prst="roundRect">
+            <a:avLst>
+              <a:gd name="adj" fmla="val 32000"/>
+            </a:avLst>
+          </a:prstGeom>
+          <a:solidFill>
+            <a:srgbClr val="D97757"/>
+          </a:solidFill>
+          <a:ln>
+            <a:noFill/>
+          </a:ln>
+          <a:effectLst/>
+        </p:spPr>
+        <p:style>
+          <a:lnRef idx="1">
+            <a:schemeClr val="accent1"/>
+          </a:lnRef>
+          <a:fillRef idx="3">
+            <a:schemeClr val="accent1"/>
+          </a:fillRef>
+          <a:effectRef idx="2">
+            <a:schemeClr val="accent1"/>
+          </a:effectRef>
+          <a:fontRef idx="minor">
+            <a:schemeClr val="lt1"/>
+          </a:fontRef>
+        </p:style>
+        <p:txBody>
+          <a:bodyPr rtlCol="0" anchor="ctr"/>
+          <a:lstStyle/>
+          <a:p>
+            <a:pPr algn="ctr"/>
+            <a:endParaRPr/>
+          </a:p>
+        </p:txBody>
+      </p:sp>
+      <p:sp>
+        <p:nvSpPr>
+          <p:cNvPr id="11" name="TextBox 10"/>
+          <p:cNvSpPr txBox="1"/>
+          <p:nvPr/>
+        </p:nvSpPr>
+        <p:spPr>
+          <a:xfrm>
+            <a:off x="841247" y="2002536"/>
+            <a:ext cx="457200" cy="420624"/>
+          </a:xfrm>
+          <a:prstGeom prst="rect">
+            <a:avLst/>
+          </a:prstGeom>
+          <a:noFill/>
+        </p:spPr>
+        <p:txBody>
+          <a:bodyPr wrap="square" lIns="0" tIns="0" rIns="0" bIns="0" anchor="ctr">
+            <a:spAutoFit/>
+          </a:bodyPr>
+          <a:lstStyle/>
+          <a:p>
+            <a:pPr algn="ctr">
+              <a:lnSpc>
+                <a:spcPct val="100000"/>
+              </a:lnSpc>
+              <a:spcBef>
+                <a:spcPts val="0"/>
+              </a:spcBef>
+              <a:spcAft>
+                <a:spcPts val="400"/>
+              </a:spcAft>
+            </a:pPr>
+            <a:r>
+              <a:rPr sz="1500" b="1">
+                <a:solidFill>
+                  <a:srgbClr val="0F141A"/>
+                </a:solidFill>
+                <a:latin typeface="Segoe UI"/>
+              </a:rPr>
+              <a:t>1</a:t>
+            </a:r>
+          </a:p>
+        </p:txBody>
+      </p:sp>
+      <p:sp>
+        <p:nvSpPr>
+          <p:cNvPr id="12" name="TextBox 11"/>
+          <p:cNvSpPr txBox="1"/>
+          <p:nvPr/>
+        </p:nvSpPr>
+        <p:spPr>
+          <a:xfrm>
+            <a:off x="1463040" y="1929384"/>
+            <a:ext cx="4375404" cy="365760"/>
+          </a:xfrm>
+          <a:prstGeom prst="rect">
+            <a:avLst/>
+          </a:prstGeom>
+          <a:noFill/>
+        </p:spPr>
+        <p:txBody>
+          <a:bodyPr wrap="square" lIns="0" tIns="0" rIns="0" bIns="0" anchor="t">
+            <a:spAutoFit/>
+          </a:bodyPr>
+          <a:lstStyle/>
+          <a:p>
+            <a:pPr algn="l">
+              <a:lnSpc>
+                <a:spcPct val="100000"/>
+              </a:lnSpc>
+              <a:spcBef>
+                <a:spcPts val="0"/>
+              </a:spcBef>
+              <a:spcAft>
+                <a:spcPts val="400"/>
+              </a:spcAft>
+            </a:pPr>
+            <a:r>
+              <a:rPr sz="1450" b="1">
+                <a:solidFill>
+                  <a:srgbClr val="E8EAED"/>
+                </a:solidFill>
+                <a:latin typeface="Segoe UI"/>
+              </a:rPr>
+              <a:t>Instalar</a:t>
+            </a:r>
+          </a:p>
+        </p:txBody>
+      </p:sp>
+      <p:sp>
+        <p:nvSpPr>
+          <p:cNvPr id="13" name="TextBox 12"/>
+          <p:cNvSpPr txBox="1"/>
+          <p:nvPr/>
+        </p:nvSpPr>
+        <p:spPr>
+          <a:xfrm>
+            <a:off x="1463040" y="2240280"/>
+            <a:ext cx="4375404" cy="338328"/>
+          </a:xfrm>
+          <a:prstGeom prst="rect">
+            <a:avLst/>
+          </a:prstGeom>
+          <a:noFill/>
+        </p:spPr>
+        <p:txBody>
+          <a:bodyPr wrap="square" lIns="0" tIns="0" rIns="0" bIns="0" anchor="t">
+            <a:spAutoFit/>
+          </a:bodyPr>
+          <a:lstStyle/>
+          <a:p>
+            <a:pPr algn="l">
+              <a:lnSpc>
+                <a:spcPct val="102000"/>
+              </a:lnSpc>
+              <a:spcBef>
+                <a:spcPts val="0"/>
+              </a:spcBef>
+              <a:spcAft>
+                <a:spcPts val="400"/>
+              </a:spcAft>
+            </a:pPr>
+            <a:r>
+              <a:rPr sz="1100" b="0">
+                <a:solidFill>
+                  <a:srgbClr val="9AA4B2"/>
+                </a:solidFill>
+                <a:latin typeface="Segoe UI"/>
+              </a:rPr>
+              <a:t>Una línea; interactivo para pensar, -p para automatizar.</a:t>
+            </a:r>
+          </a:p>
+        </p:txBody>
+      </p:sp>
+      <p:sp>
+        <p:nvSpPr>
+          <p:cNvPr id="14" name="Rounded Rectangle 13"/>
+          <p:cNvSpPr/>
+          <p:nvPr/>
+        </p:nvSpPr>
+        <p:spPr>
+          <a:xfrm>
+            <a:off x="6231636" y="1783080"/>
+            <a:ext cx="5335524" cy="841248"/>
+          </a:xfrm>
+          <a:prstGeom prst="roundRect">
+            <a:avLst>
+              <a:gd name="adj" fmla="val 9000"/>
+            </a:avLst>
+          </a:prstGeom>
+          <a:solidFill>
+            <a:srgbClr val="1A212B"/>
+          </a:solidFill>
+          <a:ln w="9525">
+            <a:solidFill>
+              <a:srgbClr val="2E3948"/>
+            </a:solidFill>
+          </a:ln>
+          <a:effectLst/>
+        </p:spPr>
+        <p:style>
+          <a:lnRef idx="1">
+            <a:schemeClr val="accent1"/>
+          </a:lnRef>
+          <a:fillRef idx="3">
+            <a:schemeClr val="accent1"/>
+          </a:fillRef>
+          <a:effectRef idx="2">
+            <a:schemeClr val="accent1"/>
+          </a:effectRef>
+          <a:fontRef idx="minor">
+            <a:schemeClr val="lt1"/>
+          </a:fontRef>
+        </p:style>
+        <p:txBody>
+          <a:bodyPr rtlCol="0" anchor="ctr"/>
+          <a:lstStyle/>
+          <a:p>
+            <a:pPr algn="ctr"/>
+            <a:endParaRPr/>
+          </a:p>
+        </p:txBody>
+      </p:sp>
+      <p:sp>
+        <p:nvSpPr>
+          <p:cNvPr id="15" name="Rounded Rectangle 14"/>
+          <p:cNvSpPr/>
+          <p:nvPr/>
+        </p:nvSpPr>
+        <p:spPr>
+          <a:xfrm>
+            <a:off x="6432804" y="1984248"/>
+            <a:ext cx="457200" cy="457200"/>
+          </a:xfrm>
+          <a:prstGeom prst="roundRect">
+            <a:avLst>
+              <a:gd name="adj" fmla="val 32000"/>
+            </a:avLst>
+          </a:prstGeom>
+          <a:solidFill>
+            <a:srgbClr val="D97757"/>
+          </a:solidFill>
+          <a:ln>
+            <a:noFill/>
+          </a:ln>
+          <a:effectLst/>
+        </p:spPr>
+        <p:style>
+          <a:lnRef idx="1">
+            <a:schemeClr val="accent1"/>
+          </a:lnRef>
+          <a:fillRef idx="3">
+            <a:schemeClr val="accent1"/>
+          </a:fillRef>
+          <a:effectRef idx="2">
+            <a:schemeClr val="accent1"/>
+          </a:effectRef>
+          <a:fontRef idx="minor">
+            <a:schemeClr val="lt1"/>
+          </a:fontRef>
+        </p:style>
+        <p:txBody>
+          <a:bodyPr rtlCol="0" anchor="ctr"/>
+          <a:lstStyle/>
+          <a:p>
+            <a:pPr algn="ctr"/>
+            <a:endParaRPr/>
+          </a:p>
+        </p:txBody>
+      </p:sp>
+      <p:sp>
+        <p:nvSpPr>
+          <p:cNvPr id="16" name="TextBox 15"/>
+          <p:cNvSpPr txBox="1"/>
+          <p:nvPr/>
+        </p:nvSpPr>
+        <p:spPr>
+          <a:xfrm>
+            <a:off x="6432804" y="2002536"/>
+            <a:ext cx="457200" cy="420624"/>
+          </a:xfrm>
+          <a:prstGeom prst="rect">
+            <a:avLst/>
+          </a:prstGeom>
+          <a:noFill/>
+        </p:spPr>
+        <p:txBody>
+          <a:bodyPr wrap="square" lIns="0" tIns="0" rIns="0" bIns="0" anchor="ctr">
+            <a:spAutoFit/>
+          </a:bodyPr>
+          <a:lstStyle/>
+          <a:p>
+            <a:pPr algn="ctr">
+              <a:lnSpc>
+                <a:spcPct val="100000"/>
+              </a:lnSpc>
+              <a:spcBef>
+                <a:spcPts val="0"/>
+              </a:spcBef>
+              <a:spcAft>
+                <a:spcPts val="400"/>
+              </a:spcAft>
+            </a:pPr>
+            <a:r>
+              <a:rPr sz="1500" b="1">
+                <a:solidFill>
+                  <a:srgbClr val="0F141A"/>
+                </a:solidFill>
+                <a:latin typeface="Segoe UI"/>
+              </a:rPr>
+              <a:t>2</a:t>
+            </a:r>
+          </a:p>
+        </p:txBody>
+      </p:sp>
+      <p:sp>
+        <p:nvSpPr>
+          <p:cNvPr id="17" name="TextBox 16"/>
+          <p:cNvSpPr txBox="1"/>
+          <p:nvPr/>
+        </p:nvSpPr>
+        <p:spPr>
+          <a:xfrm>
+            <a:off x="7054596" y="1929384"/>
+            <a:ext cx="4375404" cy="365760"/>
+          </a:xfrm>
+          <a:prstGeom prst="rect">
+            <a:avLst/>
+          </a:prstGeom>
+          <a:noFill/>
+        </p:spPr>
+        <p:txBody>
+          <a:bodyPr wrap="square" lIns="0" tIns="0" rIns="0" bIns="0" anchor="t">
+            <a:spAutoFit/>
+          </a:bodyPr>
+          <a:lstStyle/>
+          <a:p>
+            <a:pPr algn="l">
+              <a:lnSpc>
+                <a:spcPct val="100000"/>
+              </a:lnSpc>
+              <a:spcBef>
+                <a:spcPts val="0"/>
+              </a:spcBef>
+              <a:spcAft>
+                <a:spcPts val="400"/>
+              </a:spcAft>
+            </a:pPr>
+            <a:r>
+              <a:rPr sz="1450" b="1">
+                <a:solidFill>
+                  <a:srgbClr val="E8EAED"/>
+                </a:solidFill>
+                <a:latin typeface="Segoe UI"/>
+              </a:rPr>
+              <a:t>Memoria &amp; sesiones</a:t>
+            </a:r>
+          </a:p>
+        </p:txBody>
+      </p:sp>
+      <p:sp>
+        <p:nvSpPr>
+          <p:cNvPr id="18" name="TextBox 17"/>
+          <p:cNvSpPr txBox="1"/>
+          <p:nvPr/>
+        </p:nvSpPr>
+        <p:spPr>
+          <a:xfrm>
+            <a:off x="7054596" y="2240280"/>
+            <a:ext cx="4375404" cy="338328"/>
+          </a:xfrm>
+          <a:prstGeom prst="rect">
+            <a:avLst/>
+          </a:prstGeom>
+          <a:noFill/>
+        </p:spPr>
+        <p:txBody>
+          <a:bodyPr wrap="square" lIns="0" tIns="0" rIns="0" bIns="0" anchor="t">
+            <a:spAutoFit/>
+          </a:bodyPr>
+          <a:lstStyle/>
+          <a:p>
+            <a:pPr algn="l">
+              <a:lnSpc>
+                <a:spcPct val="102000"/>
+              </a:lnSpc>
+              <a:spcBef>
+                <a:spcPts val="0"/>
+              </a:spcBef>
+              <a:spcAft>
+                <a:spcPts val="400"/>
+              </a:spcAft>
+            </a:pPr>
+            <a:r>
+              <a:rPr sz="1100" b="0">
+                <a:solidFill>
+                  <a:srgbClr val="9AA4B2"/>
+                </a:solidFill>
+                <a:latin typeface="Segoe UI"/>
+              </a:rPr>
+              <a:t>Contexto lean de dos niveles; sesiones que viajan.</a:t>
+            </a:r>
+          </a:p>
+        </p:txBody>
+      </p:sp>
+      <p:sp>
+        <p:nvSpPr>
+          <p:cNvPr id="19" name="Rounded Rectangle 18"/>
+          <p:cNvSpPr/>
+          <p:nvPr/>
+        </p:nvSpPr>
+        <p:spPr>
+          <a:xfrm>
+            <a:off x="640080" y="2880360"/>
+            <a:ext cx="5335524" cy="841248"/>
+          </a:xfrm>
+          <a:prstGeom prst="roundRect">
+            <a:avLst>
+              <a:gd name="adj" fmla="val 9000"/>
+            </a:avLst>
+          </a:prstGeom>
+          <a:solidFill>
+            <a:srgbClr val="1A212B"/>
+          </a:solidFill>
+          <a:ln w="9525">
+            <a:solidFill>
+              <a:srgbClr val="2E3948"/>
+            </a:solidFill>
+          </a:ln>
+          <a:effectLst/>
+        </p:spPr>
+        <p:style>
+          <a:lnRef idx="1">
+            <a:schemeClr val="accent1"/>
+          </a:lnRef>
+          <a:fillRef idx="3">
+            <a:schemeClr val="accent1"/>
+          </a:fillRef>
+          <a:effectRef idx="2">
+            <a:schemeClr val="accent1"/>
+          </a:effectRef>
+          <a:fontRef idx="minor">
+            <a:schemeClr val="lt1"/>
+          </a:fontRef>
+        </p:style>
+        <p:txBody>
+          <a:bodyPr rtlCol="0" anchor="ctr"/>
+          <a:lstStyle/>
+          <a:p>
+            <a:pPr algn="ctr"/>
+            <a:endParaRPr/>
+          </a:p>
+        </p:txBody>
+      </p:sp>
+      <p:sp>
+        <p:nvSpPr>
+          <p:cNvPr id="20" name="Rounded Rectangle 19"/>
+          <p:cNvSpPr/>
+          <p:nvPr/>
+        </p:nvSpPr>
+        <p:spPr>
+          <a:xfrm>
+            <a:off x="841247" y="3081528"/>
+            <a:ext cx="457200" cy="457200"/>
+          </a:xfrm>
+          <a:prstGeom prst="roundRect">
+            <a:avLst>
+              <a:gd name="adj" fmla="val 32000"/>
+            </a:avLst>
+          </a:prstGeom>
+          <a:solidFill>
+            <a:srgbClr val="D97757"/>
+          </a:solidFill>
+          <a:ln>
+            <a:noFill/>
+          </a:ln>
+          <a:effectLst/>
+        </p:spPr>
+        <p:style>
+          <a:lnRef idx="1">
+            <a:schemeClr val="accent1"/>
+          </a:lnRef>
+          <a:fillRef idx="3">
+            <a:schemeClr val="accent1"/>
+          </a:fillRef>
+          <a:effectRef idx="2">
+            <a:schemeClr val="accent1"/>
+          </a:effectRef>
+          <a:fontRef idx="minor">
+            <a:schemeClr val="lt1"/>
+          </a:fontRef>
+        </p:style>
+        <p:txBody>
+          <a:bodyPr rtlCol="0" anchor="ctr"/>
+          <a:lstStyle/>
+          <a:p>
+            <a:pPr algn="ctr"/>
+            <a:endParaRPr/>
+          </a:p>
+        </p:txBody>
+      </p:sp>
+      <p:sp>
+        <p:nvSpPr>
+          <p:cNvPr id="21" name="TextBox 20"/>
+          <p:cNvSpPr txBox="1"/>
+          <p:nvPr/>
+        </p:nvSpPr>
+        <p:spPr>
+          <a:xfrm>
+            <a:off x="841247" y="3099816"/>
+            <a:ext cx="457200" cy="420624"/>
+          </a:xfrm>
+          <a:prstGeom prst="rect">
+            <a:avLst/>
+          </a:prstGeom>
+          <a:noFill/>
+        </p:spPr>
+        <p:txBody>
+          <a:bodyPr wrap="square" lIns="0" tIns="0" rIns="0" bIns="0" anchor="ctr">
+            <a:spAutoFit/>
+          </a:bodyPr>
+          <a:lstStyle/>
+          <a:p>
+            <a:pPr algn="ctr">
+              <a:lnSpc>
+                <a:spcPct val="100000"/>
+              </a:lnSpc>
+              <a:spcBef>
+                <a:spcPts val="0"/>
+              </a:spcBef>
+              <a:spcAft>
+                <a:spcPts val="400"/>
+              </a:spcAft>
+            </a:pPr>
+            <a:r>
+              <a:rPr sz="1500" b="1">
+                <a:solidFill>
+                  <a:srgbClr val="0F141A"/>
+                </a:solidFill>
+                <a:latin typeface="Segoe UI"/>
+              </a:rPr>
+              <a:t>3</a:t>
+            </a:r>
+          </a:p>
+        </p:txBody>
+      </p:sp>
+      <p:sp>
+        <p:nvSpPr>
+          <p:cNvPr id="22" name="TextBox 21"/>
+          <p:cNvSpPr txBox="1"/>
+          <p:nvPr/>
+        </p:nvSpPr>
+        <p:spPr>
+          <a:xfrm>
+            <a:off x="1463040" y="3026664"/>
+            <a:ext cx="4375404" cy="365760"/>
+          </a:xfrm>
+          <a:prstGeom prst="rect">
+            <a:avLst/>
+          </a:prstGeom>
+          <a:noFill/>
+        </p:spPr>
+        <p:txBody>
+          <a:bodyPr wrap="square" lIns="0" tIns="0" rIns="0" bIns="0" anchor="t">
+            <a:spAutoFit/>
+          </a:bodyPr>
+          <a:lstStyle/>
+          <a:p>
+            <a:pPr algn="l">
+              <a:lnSpc>
+                <a:spcPct val="100000"/>
+              </a:lnSpc>
+              <a:spcBef>
+                <a:spcPts val="0"/>
+              </a:spcBef>
+              <a:spcAft>
+                <a:spcPts val="400"/>
+              </a:spcAft>
+            </a:pPr>
+            <a:r>
+              <a:rPr sz="1450" b="1">
+                <a:solidFill>
+                  <a:srgbClr val="E8EAED"/>
+                </a:solidFill>
+                <a:latin typeface="Segoe UI"/>
+              </a:rPr>
+              <a:t>MCP</a:t>
+            </a:r>
+          </a:p>
+        </p:txBody>
+      </p:sp>
+      <p:sp>
+        <p:nvSpPr>
+          <p:cNvPr id="23" name="TextBox 22"/>
+          <p:cNvSpPr txBox="1"/>
+          <p:nvPr/>
+        </p:nvSpPr>
+        <p:spPr>
+          <a:xfrm>
+            <a:off x="1463040" y="3337560"/>
+            <a:ext cx="4375404" cy="338328"/>
+          </a:xfrm>
+          <a:prstGeom prst="rect">
+            <a:avLst/>
+          </a:prstGeom>
+          <a:noFill/>
+        </p:spPr>
+        <p:txBody>
+          <a:bodyPr wrap="square" lIns="0" tIns="0" rIns="0" bIns="0" anchor="t">
+            <a:spAutoFit/>
+          </a:bodyPr>
+          <a:lstStyle/>
+          <a:p>
+            <a:pPr algn="l">
+              <a:lnSpc>
+                <a:spcPct val="102000"/>
+              </a:lnSpc>
+              <a:spcBef>
+                <a:spcPts val="0"/>
+              </a:spcBef>
+              <a:spcAft>
+                <a:spcPts val="400"/>
+              </a:spcAft>
+            </a:pPr>
+            <a:r>
+              <a:rPr sz="1100" b="0">
+                <a:solidFill>
+                  <a:srgbClr val="9AA4B2"/>
+                </a:solidFill>
+                <a:latin typeface="Segoe UI"/>
+              </a:rPr>
+              <a:t>Conecta tus datos, docs, navegador y tooling.</a:t>
+            </a:r>
+          </a:p>
+        </p:txBody>
+      </p:sp>
+      <p:sp>
+        <p:nvSpPr>
+          <p:cNvPr id="24" name="Rounded Rectangle 23"/>
+          <p:cNvSpPr/>
+          <p:nvPr/>
+        </p:nvSpPr>
+        <p:spPr>
+          <a:xfrm>
+            <a:off x="6231636" y="2880360"/>
+            <a:ext cx="5335524" cy="841248"/>
+          </a:xfrm>
+          <a:prstGeom prst="roundRect">
+            <a:avLst>
+              <a:gd name="adj" fmla="val 9000"/>
+            </a:avLst>
+          </a:prstGeom>
+          <a:solidFill>
+            <a:srgbClr val="1A212B"/>
+          </a:solidFill>
+          <a:ln w="9525">
+            <a:solidFill>
+              <a:srgbClr val="2E3948"/>
+            </a:solidFill>
+          </a:ln>
+          <a:effectLst/>
+        </p:spPr>
+        <p:style>
+          <a:lnRef idx="1">
+            <a:schemeClr val="accent1"/>
+          </a:lnRef>
+          <a:fillRef idx="3">
+            <a:schemeClr val="accent1"/>
+          </a:fillRef>
+          <a:effectRef idx="2">
+            <a:schemeClr val="accent1"/>
+          </a:effectRef>
+          <a:fontRef idx="minor">
+            <a:schemeClr val="lt1"/>
+          </a:fontRef>
+        </p:style>
+        <p:txBody>
+          <a:bodyPr rtlCol="0" anchor="ctr"/>
+          <a:lstStyle/>
+          <a:p>
+            <a:pPr algn="ctr"/>
+            <a:endParaRPr/>
+          </a:p>
+        </p:txBody>
+      </p:sp>
+      <p:sp>
+        <p:nvSpPr>
+          <p:cNvPr id="25" name="Rounded Rectangle 24"/>
+          <p:cNvSpPr/>
+          <p:nvPr/>
+        </p:nvSpPr>
+        <p:spPr>
+          <a:xfrm>
+            <a:off x="6432804" y="3081528"/>
+            <a:ext cx="457200" cy="457200"/>
+          </a:xfrm>
+          <a:prstGeom prst="roundRect">
+            <a:avLst>
+              <a:gd name="adj" fmla="val 32000"/>
+            </a:avLst>
+          </a:prstGeom>
+          <a:solidFill>
+            <a:srgbClr val="D97757"/>
+          </a:solidFill>
+          <a:ln>
+            <a:noFill/>
+          </a:ln>
+          <a:effectLst/>
+        </p:spPr>
+        <p:style>
+          <a:lnRef idx="1">
+            <a:schemeClr val="accent1"/>
+          </a:lnRef>
+          <a:fillRef idx="3">
+            <a:schemeClr val="accent1"/>
+          </a:fillRef>
+          <a:effectRef idx="2">
+            <a:schemeClr val="accent1"/>
+          </a:effectRef>
+          <a:fontRef idx="minor">
+            <a:schemeClr val="lt1"/>
+          </a:fontRef>
+        </p:style>
+        <p:txBody>
+          <a:bodyPr rtlCol="0" anchor="ctr"/>
+          <a:lstStyle/>
+          <a:p>
+            <a:pPr algn="ctr"/>
+            <a:endParaRPr/>
+          </a:p>
+        </p:txBody>
+      </p:sp>
+      <p:sp>
+        <p:nvSpPr>
+          <p:cNvPr id="26" name="TextBox 25"/>
+          <p:cNvSpPr txBox="1"/>
+          <p:nvPr/>
+        </p:nvSpPr>
+        <p:spPr>
+          <a:xfrm>
+            <a:off x="6432804" y="3099816"/>
+            <a:ext cx="457200" cy="420624"/>
+          </a:xfrm>
+          <a:prstGeom prst="rect">
+            <a:avLst/>
+          </a:prstGeom>
+          <a:noFill/>
+        </p:spPr>
+        <p:txBody>
+          <a:bodyPr wrap="square" lIns="0" tIns="0" rIns="0" bIns="0" anchor="ctr">
+            <a:spAutoFit/>
+          </a:bodyPr>
+          <a:lstStyle/>
+          <a:p>
+            <a:pPr algn="ctr">
+              <a:lnSpc>
+                <a:spcPct val="100000"/>
+              </a:lnSpc>
+              <a:spcBef>
+                <a:spcPts val="0"/>
+              </a:spcBef>
+              <a:spcAft>
+                <a:spcPts val="400"/>
+              </a:spcAft>
+            </a:pPr>
+            <a:r>
+              <a:rPr sz="1500" b="1">
+                <a:solidFill>
+                  <a:srgbClr val="0F141A"/>
+                </a:solidFill>
+                <a:latin typeface="Segoe UI"/>
+              </a:rPr>
+              <a:t>4</a:t>
+            </a:r>
+          </a:p>
+        </p:txBody>
+      </p:sp>
+      <p:sp>
+        <p:nvSpPr>
+          <p:cNvPr id="27" name="TextBox 26"/>
+          <p:cNvSpPr txBox="1"/>
+          <p:nvPr/>
+        </p:nvSpPr>
+        <p:spPr>
+          <a:xfrm>
+            <a:off x="7054596" y="3026664"/>
+            <a:ext cx="4375404" cy="365760"/>
+          </a:xfrm>
+          <a:prstGeom prst="rect">
+            <a:avLst/>
+          </a:prstGeom>
+          <a:noFill/>
+        </p:spPr>
+        <p:txBody>
+          <a:bodyPr wrap="square" lIns="0" tIns="0" rIns="0" bIns="0" anchor="t">
+            <a:spAutoFit/>
+          </a:bodyPr>
+          <a:lstStyle/>
+          <a:p>
+            <a:pPr algn="l">
+              <a:lnSpc>
+                <a:spcPct val="100000"/>
+              </a:lnSpc>
+              <a:spcBef>
+                <a:spcPts val="0"/>
+              </a:spcBef>
+              <a:spcAft>
+                <a:spcPts val="400"/>
+              </a:spcAft>
+            </a:pPr>
+            <a:r>
+              <a:rPr sz="1450" b="1">
+                <a:solidFill>
+                  <a:srgbClr val="E8EAED"/>
+                </a:solidFill>
+                <a:latin typeface="Segoe UI"/>
+              </a:rPr>
+              <a:t>Skills &amp; plugins</a:t>
+            </a:r>
+          </a:p>
+        </p:txBody>
+      </p:sp>
+      <p:sp>
+        <p:nvSpPr>
+          <p:cNvPr id="28" name="TextBox 27"/>
+          <p:cNvSpPr txBox="1"/>
+          <p:nvPr/>
+        </p:nvSpPr>
+        <p:spPr>
+          <a:xfrm>
+            <a:off x="7054596" y="3337560"/>
+            <a:ext cx="4375404" cy="338328"/>
+          </a:xfrm>
+          <a:prstGeom prst="rect">
+            <a:avLst/>
+          </a:prstGeom>
+          <a:noFill/>
+        </p:spPr>
+        <p:txBody>
+          <a:bodyPr wrap="square" lIns="0" tIns="0" rIns="0" bIns="0" anchor="t">
+            <a:spAutoFit/>
+          </a:bodyPr>
+          <a:lstStyle/>
+          <a:p>
+            <a:pPr algn="l">
+              <a:lnSpc>
+                <a:spcPct val="102000"/>
+              </a:lnSpc>
+              <a:spcBef>
+                <a:spcPts val="0"/>
+              </a:spcBef>
+              <a:spcAft>
+                <a:spcPts val="400"/>
+              </a:spcAft>
+            </a:pPr>
+            <a:r>
+              <a:rPr sz="1100" b="0">
+                <a:solidFill>
+                  <a:srgbClr val="9AA4B2"/>
+                </a:solidFill>
+                <a:latin typeface="Segoe UI"/>
+              </a:rPr>
+              <a:t>Empaqueta y distribuye flujos repetibles.</a:t>
+            </a:r>
+          </a:p>
+        </p:txBody>
+      </p:sp>
+      <p:sp>
+        <p:nvSpPr>
+          <p:cNvPr id="29" name="Rounded Rectangle 28"/>
+          <p:cNvSpPr/>
+          <p:nvPr/>
+        </p:nvSpPr>
+        <p:spPr>
+          <a:xfrm>
+            <a:off x="640080" y="3977640"/>
+            <a:ext cx="5335524" cy="841248"/>
+          </a:xfrm>
+          <a:prstGeom prst="roundRect">
+            <a:avLst>
+              <a:gd name="adj" fmla="val 9000"/>
+            </a:avLst>
+          </a:prstGeom>
+          <a:solidFill>
+            <a:srgbClr val="1A212B"/>
+          </a:solidFill>
+          <a:ln w="9525">
+            <a:solidFill>
+              <a:srgbClr val="2E3948"/>
+            </a:solidFill>
+          </a:ln>
+          <a:effectLst/>
+        </p:spPr>
+        <p:style>
+          <a:lnRef idx="1">
+            <a:schemeClr val="accent1"/>
+          </a:lnRef>
+          <a:fillRef idx="3">
+            <a:schemeClr val="accent1"/>
+          </a:fillRef>
+          <a:effectRef idx="2">
+            <a:schemeClr val="accent1"/>
+          </a:effectRef>
+          <a:fontRef idx="minor">
+            <a:schemeClr val="lt1"/>
+          </a:fontRef>
+        </p:style>
+        <p:txBody>
+          <a:bodyPr rtlCol="0" anchor="ctr"/>
+          <a:lstStyle/>
+          <a:p>
+            <a:pPr algn="ctr"/>
+            <a:endParaRPr/>
+          </a:p>
+        </p:txBody>
+      </p:sp>
+      <p:sp>
+        <p:nvSpPr>
+          <p:cNvPr id="30" name="Rounded Rectangle 29"/>
+          <p:cNvSpPr/>
+          <p:nvPr/>
+        </p:nvSpPr>
+        <p:spPr>
+          <a:xfrm>
+            <a:off x="841247" y="4178808"/>
+            <a:ext cx="457200" cy="457200"/>
+          </a:xfrm>
+          <a:prstGeom prst="roundRect">
+            <a:avLst>
+              <a:gd name="adj" fmla="val 32000"/>
+            </a:avLst>
+          </a:prstGeom>
+          <a:solidFill>
+            <a:srgbClr val="D97757"/>
+          </a:solidFill>
+          <a:ln>
+            <a:noFill/>
+          </a:ln>
+          <a:effectLst/>
+        </p:spPr>
+        <p:style>
+          <a:lnRef idx="1">
+            <a:schemeClr val="accent1"/>
+          </a:lnRef>
+          <a:fillRef idx="3">
+            <a:schemeClr val="accent1"/>
+          </a:fillRef>
+          <a:effectRef idx="2">
+            <a:schemeClr val="accent1"/>
+          </a:effectRef>
+          <a:fontRef idx="minor">
+            <a:schemeClr val="lt1"/>
+          </a:fontRef>
+        </p:style>
+        <p:txBody>
+          <a:bodyPr rtlCol="0" anchor="ctr"/>
+          <a:lstStyle/>
+          <a:p>
+            <a:pPr algn="ctr"/>
+            <a:endParaRPr/>
+          </a:p>
+        </p:txBody>
+      </p:sp>
+      <p:sp>
+        <p:nvSpPr>
+          <p:cNvPr id="31" name="TextBox 30"/>
+          <p:cNvSpPr txBox="1"/>
+          <p:nvPr/>
+        </p:nvSpPr>
+        <p:spPr>
+          <a:xfrm>
+            <a:off x="841247" y="4197096"/>
+            <a:ext cx="457200" cy="420624"/>
+          </a:xfrm>
+          <a:prstGeom prst="rect">
+            <a:avLst/>
+          </a:prstGeom>
+          <a:noFill/>
+        </p:spPr>
+        <p:txBody>
+          <a:bodyPr wrap="square" lIns="0" tIns="0" rIns="0" bIns="0" anchor="ctr">
+            <a:spAutoFit/>
+          </a:bodyPr>
+          <a:lstStyle/>
+          <a:p>
+            <a:pPr algn="ctr">
+              <a:lnSpc>
+                <a:spcPct val="100000"/>
+              </a:lnSpc>
+              <a:spcBef>
+                <a:spcPts val="0"/>
+              </a:spcBef>
+              <a:spcAft>
+                <a:spcPts val="400"/>
+              </a:spcAft>
+            </a:pPr>
+            <a:r>
+              <a:rPr sz="1500" b="1">
+                <a:solidFill>
+                  <a:srgbClr val="0F141A"/>
+                </a:solidFill>
+                <a:latin typeface="Segoe UI"/>
+              </a:rPr>
+              <a:t>5</a:t>
+            </a:r>
+          </a:p>
+        </p:txBody>
+      </p:sp>
+      <p:sp>
+        <p:nvSpPr>
+          <p:cNvPr id="32" name="TextBox 31"/>
+          <p:cNvSpPr txBox="1"/>
+          <p:nvPr/>
+        </p:nvSpPr>
+        <p:spPr>
+          <a:xfrm>
+            <a:off x="1463040" y="4123944"/>
+            <a:ext cx="4375404" cy="365760"/>
+          </a:xfrm>
+          <a:prstGeom prst="rect">
+            <a:avLst/>
+          </a:prstGeom>
+          <a:noFill/>
+        </p:spPr>
+        <p:txBody>
+          <a:bodyPr wrap="square" lIns="0" tIns="0" rIns="0" bIns="0" anchor="t">
+            <a:spAutoFit/>
+          </a:bodyPr>
+          <a:lstStyle/>
+          <a:p>
+            <a:pPr algn="l">
+              <a:lnSpc>
+                <a:spcPct val="100000"/>
+              </a:lnSpc>
+              <a:spcBef>
+                <a:spcPts val="0"/>
+              </a:spcBef>
+              <a:spcAft>
+                <a:spcPts val="400"/>
+              </a:spcAft>
+            </a:pPr>
+            <a:r>
+              <a:rPr sz="1450" b="1">
+                <a:solidFill>
+                  <a:srgbClr val="E8EAED"/>
+                </a:solidFill>
+                <a:latin typeface="Segoe UI"/>
+              </a:rPr>
+              <a:t>Automatización</a:t>
+            </a:r>
+          </a:p>
+        </p:txBody>
+      </p:sp>
+      <p:sp>
+        <p:nvSpPr>
+          <p:cNvPr id="33" name="TextBox 32"/>
+          <p:cNvSpPr txBox="1"/>
+          <p:nvPr/>
+        </p:nvSpPr>
+        <p:spPr>
+          <a:xfrm>
+            <a:off x="1463040" y="4434840"/>
+            <a:ext cx="4375404" cy="338328"/>
+          </a:xfrm>
+          <a:prstGeom prst="rect">
+            <a:avLst/>
+          </a:prstGeom>
+          <a:noFill/>
+        </p:spPr>
+        <p:txBody>
+          <a:bodyPr wrap="square" lIns="0" tIns="0" rIns="0" bIns="0" anchor="t">
+            <a:spAutoFit/>
+          </a:bodyPr>
+          <a:lstStyle/>
+          <a:p>
+            <a:pPr algn="l">
+              <a:lnSpc>
+                <a:spcPct val="102000"/>
+              </a:lnSpc>
+              <a:spcBef>
+                <a:spcPts val="0"/>
+              </a:spcBef>
+              <a:spcAft>
+                <a:spcPts val="400"/>
+              </a:spcAft>
+            </a:pPr>
+            <a:r>
+              <a:rPr sz="1100" b="0">
+                <a:solidFill>
+                  <a:srgbClr val="9AA4B2"/>
+                </a:solidFill>
+                <a:latin typeface="Segoe UI"/>
+              </a:rPr>
+              <a:t>Hooks que garantizan calidad; CI; scheduling; SDK.</a:t>
+            </a:r>
+          </a:p>
+        </p:txBody>
+      </p:sp>
+      <p:sp>
+        <p:nvSpPr>
+          <p:cNvPr id="34" name="Rounded Rectangle 33"/>
+          <p:cNvSpPr/>
+          <p:nvPr/>
+        </p:nvSpPr>
+        <p:spPr>
+          <a:xfrm>
+            <a:off x="6231636" y="3977640"/>
+            <a:ext cx="5335524" cy="841248"/>
+          </a:xfrm>
+          <a:prstGeom prst="roundRect">
+            <a:avLst>
+              <a:gd name="adj" fmla="val 9000"/>
+            </a:avLst>
+          </a:prstGeom>
+          <a:solidFill>
+            <a:srgbClr val="1A212B"/>
+          </a:solidFill>
+          <a:ln w="9525">
+            <a:solidFill>
+              <a:srgbClr val="2E3948"/>
+            </a:solidFill>
+          </a:ln>
+          <a:effectLst/>
+        </p:spPr>
+        <p:style>
+          <a:lnRef idx="1">
+            <a:schemeClr val="accent1"/>
+          </a:lnRef>
+          <a:fillRef idx="3">
+            <a:schemeClr val="accent1"/>
+          </a:fillRef>
+          <a:effectRef idx="2">
+            <a:schemeClr val="accent1"/>
+          </a:effectRef>
+          <a:fontRef idx="minor">
+            <a:schemeClr val="lt1"/>
+          </a:fontRef>
+        </p:style>
+        <p:txBody>
+          <a:bodyPr rtlCol="0" anchor="ctr"/>
+          <a:lstStyle/>
+          <a:p>
+            <a:pPr algn="ctr"/>
+            <a:endParaRPr/>
+          </a:p>
+        </p:txBody>
+      </p:sp>
+      <p:sp>
+        <p:nvSpPr>
+          <p:cNvPr id="35" name="Rounded Rectangle 34"/>
+          <p:cNvSpPr/>
+          <p:nvPr/>
+        </p:nvSpPr>
+        <p:spPr>
+          <a:xfrm>
+            <a:off x="6432804" y="4178808"/>
+            <a:ext cx="457200" cy="457200"/>
+          </a:xfrm>
+          <a:prstGeom prst="roundRect">
+            <a:avLst>
+              <a:gd name="adj" fmla="val 32000"/>
+            </a:avLst>
+          </a:prstGeom>
+          <a:solidFill>
+            <a:srgbClr val="D97757"/>
+          </a:solidFill>
+          <a:ln>
+            <a:noFill/>
+          </a:ln>
+          <a:effectLst/>
+        </p:spPr>
+        <p:style>
+          <a:lnRef idx="1">
+            <a:schemeClr val="accent1"/>
+          </a:lnRef>
+          <a:fillRef idx="3">
+            <a:schemeClr val="accent1"/>
+          </a:fillRef>
+          <a:effectRef idx="2">
+            <a:schemeClr val="accent1"/>
+          </a:effectRef>
+          <a:fontRef idx="minor">
+            <a:schemeClr val="lt1"/>
+          </a:fontRef>
+        </p:style>
+        <p:txBody>
+          <a:bodyPr rtlCol="0" anchor="ctr"/>
+          <a:lstStyle/>
+          <a:p>
+            <a:pPr algn="ctr"/>
+            <a:endParaRPr/>
+          </a:p>
+        </p:txBody>
+      </p:sp>
+      <p:sp>
+        <p:nvSpPr>
+          <p:cNvPr id="36" name="TextBox 35"/>
+          <p:cNvSpPr txBox="1"/>
+          <p:nvPr/>
+        </p:nvSpPr>
+        <p:spPr>
+          <a:xfrm>
+            <a:off x="6432804" y="4197096"/>
+            <a:ext cx="457200" cy="420624"/>
+          </a:xfrm>
+          <a:prstGeom prst="rect">
+            <a:avLst/>
+          </a:prstGeom>
+          <a:noFill/>
+        </p:spPr>
+        <p:txBody>
+          <a:bodyPr wrap="square" lIns="0" tIns="0" rIns="0" bIns="0" anchor="ctr">
+            <a:spAutoFit/>
+          </a:bodyPr>
+          <a:lstStyle/>
+          <a:p>
+            <a:pPr algn="ctr">
+              <a:lnSpc>
+                <a:spcPct val="100000"/>
+              </a:lnSpc>
+              <a:spcBef>
+                <a:spcPts val="0"/>
+              </a:spcBef>
+              <a:spcAft>
+                <a:spcPts val="400"/>
+              </a:spcAft>
+            </a:pPr>
+            <a:r>
+              <a:rPr sz="1500" b="1">
+                <a:solidFill>
+                  <a:srgbClr val="0F141A"/>
+                </a:solidFill>
+                <a:latin typeface="Segoe UI"/>
+              </a:rPr>
+              <a:t>6</a:t>
+            </a:r>
+          </a:p>
+        </p:txBody>
+      </p:sp>
+      <p:sp>
+        <p:nvSpPr>
+          <p:cNvPr id="37" name="TextBox 36"/>
+          <p:cNvSpPr txBox="1"/>
+          <p:nvPr/>
+        </p:nvSpPr>
+        <p:spPr>
+          <a:xfrm>
+            <a:off x="7054596" y="4123944"/>
+            <a:ext cx="4375404" cy="365760"/>
+          </a:xfrm>
+          <a:prstGeom prst="rect">
+            <a:avLst/>
+          </a:prstGeom>
+          <a:noFill/>
+        </p:spPr>
+        <p:txBody>
+          <a:bodyPr wrap="square" lIns="0" tIns="0" rIns="0" bIns="0" anchor="t">
+            <a:spAutoFit/>
+          </a:bodyPr>
+          <a:lstStyle/>
+          <a:p>
+            <a:pPr algn="l">
+              <a:lnSpc>
+                <a:spcPct val="100000"/>
+              </a:lnSpc>
+              <a:spcBef>
+                <a:spcPts val="0"/>
+              </a:spcBef>
+              <a:spcAft>
+                <a:spcPts val="400"/>
+              </a:spcAft>
+            </a:pPr>
+            <a:r>
+              <a:rPr sz="1450" b="1">
+                <a:solidFill>
+                  <a:srgbClr val="E8EAED"/>
+                </a:solidFill>
+                <a:latin typeface="Segoe UI"/>
+              </a:rPr>
+              <a:t>Metodología</a:t>
+            </a:r>
+          </a:p>
+        </p:txBody>
+      </p:sp>
+      <p:sp>
+        <p:nvSpPr>
+          <p:cNvPr id="38" name="TextBox 37"/>
+          <p:cNvSpPr txBox="1"/>
+          <p:nvPr/>
+        </p:nvSpPr>
+        <p:spPr>
+          <a:xfrm>
+            <a:off x="7054596" y="4434840"/>
+            <a:ext cx="4375404" cy="338328"/>
+          </a:xfrm>
+          <a:prstGeom prst="rect">
+            <a:avLst/>
+          </a:prstGeom>
+          <a:noFill/>
+        </p:spPr>
+        <p:txBody>
+          <a:bodyPr wrap="square" lIns="0" tIns="0" rIns="0" bIns="0" anchor="t">
+            <a:spAutoFit/>
+          </a:bodyPr>
+          <a:lstStyle/>
+          <a:p>
+            <a:pPr algn="l">
+              <a:lnSpc>
+                <a:spcPct val="102000"/>
+              </a:lnSpc>
+              <a:spcBef>
+                <a:spcPts val="0"/>
+              </a:spcBef>
+              <a:spcAft>
+                <a:spcPts val="400"/>
+              </a:spcAft>
+            </a:pPr>
+            <a:r>
+              <a:rPr sz="1100" b="0">
+                <a:solidFill>
+                  <a:srgbClr val="9AA4B2"/>
+                </a:solidFill>
+                <a:latin typeface="Segoe UI"/>
+              </a:rPr>
+              <a:t>Agente disciplinado: 11 etapas, gates, tools reales.</a:t>
+            </a:r>
+          </a:p>
+        </p:txBody>
+      </p:sp>
+      <p:sp>
+        <p:nvSpPr>
+          <p:cNvPr id="39" name="TextBox 38"/>
+          <p:cNvSpPr txBox="1"/>
+          <p:nvPr/>
+        </p:nvSpPr>
+        <p:spPr>
+          <a:xfrm>
+            <a:off x="640080" y="6126480"/>
+            <a:ext cx="10972800" cy="365760"/>
+          </a:xfrm>
+          <a:prstGeom prst="rect">
+            <a:avLst/>
+          </a:prstGeom>
+          <a:noFill/>
+        </p:spPr>
+        <p:txBody>
+          <a:bodyPr wrap="square" lIns="0" tIns="0" rIns="0" bIns="0" anchor="t">
+            <a:spAutoFit/>
+          </a:bodyPr>
+          <a:lstStyle/>
+          <a:p>
+            <a:pPr algn="l">
+              <a:lnSpc>
+                <a:spcPct val="100000"/>
+              </a:lnSpc>
+              <a:spcBef>
+                <a:spcPts val="0"/>
+              </a:spcBef>
+              <a:spcAft>
+                <a:spcPts val="400"/>
+              </a:spcAft>
+            </a:pPr>
+            <a:r>
+              <a:rPr sz="1100" b="0">
+                <a:solidFill>
+                  <a:srgbClr val="66707E"/>
+                </a:solidFill>
+                <a:latin typeface="Segoe UI"/>
+              </a:rPr>
+              <a:t>Referencias:  code.claude.com/docs  ·  github.com/tomascortereal/claude-code-setup  ·  colbymchenry.github.io/codegraph</a:t>
+            </a:r>
+          </a:p>
+        </p:txBody>
+      </p:sp>
+    </p:spTree>
+  </p:cSld>
+  <p:clrMapOvr>
+    <a:masterClrMapping/>
+  </p:clrMapOvr>
+</p:sld>
+</file>
+
 <file path=ppt/slides/slide3.xml><?xml version="1.0" encoding="utf-8"?>
 <p:sld xmlns:a="http://schemas.openxmlformats.org/drawingml/2006/main" xmlns:r="http://schemas.openxmlformats.org/officeDocument/2006/relationships" xmlns:p="http://schemas.openxmlformats.org/presentationml/2006/main">
   <p:cSld>
@@ -19800,13 +20681,1252 @@
       </p:grpSpPr>
       <p:sp>
         <p:nvSpPr>
+          <p:cNvPr id="2" name="Rectangle 1"/>
+          <p:cNvSpPr/>
+          <p:nvPr/>
+        </p:nvSpPr>
+        <p:spPr>
+          <a:xfrm>
+            <a:off x="-91440" y="-91440"/>
+            <a:ext cx="12371832" cy="7040880"/>
+          </a:xfrm>
+          <a:prstGeom prst="rect">
+            <a:avLst/>
+          </a:prstGeom>
+          <a:solidFill>
+            <a:srgbClr val="0F141A"/>
+          </a:solidFill>
+          <a:ln>
+            <a:noFill/>
+          </a:ln>
+          <a:effectLst/>
+        </p:spPr>
+        <p:style>
+          <a:lnRef idx="1">
+            <a:schemeClr val="accent1"/>
+          </a:lnRef>
+          <a:fillRef idx="3">
+            <a:schemeClr val="accent1"/>
+          </a:fillRef>
+          <a:effectRef idx="2">
+            <a:schemeClr val="accent1"/>
+          </a:effectRef>
+          <a:fontRef idx="minor">
+            <a:schemeClr val="lt1"/>
+          </a:fontRef>
+        </p:style>
+        <p:txBody>
+          <a:bodyPr rtlCol="0" anchor="ctr"/>
+          <a:lstStyle/>
+          <a:p>
+            <a:pPr algn="ctr"/>
+            <a:endParaRPr/>
+          </a:p>
+        </p:txBody>
+      </p:sp>
+      <p:sp>
+        <p:nvSpPr>
+          <p:cNvPr id="3" name="Rectangle 2"/>
+          <p:cNvSpPr/>
+          <p:nvPr/>
+        </p:nvSpPr>
+        <p:spPr>
+          <a:xfrm>
+            <a:off x="0" y="0"/>
+            <a:ext cx="201168" cy="6858000"/>
+          </a:xfrm>
+          <a:prstGeom prst="rect">
+            <a:avLst/>
+          </a:prstGeom>
+          <a:solidFill>
+            <a:srgbClr val="D97757"/>
+          </a:solidFill>
+          <a:ln>
+            <a:noFill/>
+          </a:ln>
+          <a:effectLst/>
+        </p:spPr>
+        <p:style>
+          <a:lnRef idx="1">
+            <a:schemeClr val="accent1"/>
+          </a:lnRef>
+          <a:fillRef idx="3">
+            <a:schemeClr val="accent1"/>
+          </a:fillRef>
+          <a:effectRef idx="2">
+            <a:schemeClr val="accent1"/>
+          </a:effectRef>
+          <a:fontRef idx="minor">
+            <a:schemeClr val="lt1"/>
+          </a:fontRef>
+        </p:style>
+        <p:txBody>
+          <a:bodyPr rtlCol="0" anchor="ctr"/>
+          <a:lstStyle/>
+          <a:p>
+            <a:pPr algn="ctr"/>
+            <a:endParaRPr/>
+          </a:p>
+        </p:txBody>
+      </p:sp>
+      <p:sp>
+        <p:nvSpPr>
+          <p:cNvPr id="4" name="TextBox 3"/>
+          <p:cNvSpPr txBox="1"/>
+          <p:nvPr/>
+        </p:nvSpPr>
+        <p:spPr>
+          <a:xfrm>
+            <a:off x="640080" y="502920"/>
+            <a:ext cx="10058400" cy="365760"/>
+          </a:xfrm>
+          <a:prstGeom prst="rect">
+            <a:avLst/>
+          </a:prstGeom>
+          <a:noFill/>
+        </p:spPr>
+        <p:txBody>
+          <a:bodyPr wrap="square" lIns="0" tIns="0" rIns="0" bIns="0" anchor="t">
+            <a:spAutoFit/>
+          </a:bodyPr>
+          <a:lstStyle/>
+          <a:p>
+            <a:pPr algn="l">
+              <a:lnSpc>
+                <a:spcPct val="100000"/>
+              </a:lnSpc>
+              <a:spcBef>
+                <a:spcPts val="0"/>
+              </a:spcBef>
+              <a:spcAft>
+                <a:spcPts val="400"/>
+              </a:spcAft>
+            </a:pPr>
+            <a:r>
+              <a:rPr sz="1200" b="1">
+                <a:solidFill>
+                  <a:srgbClr val="D97757"/>
+                </a:solidFill>
+                <a:latin typeface="Segoe UI"/>
+              </a:rPr>
+              <a:t>01 · INSTALACIÓN Y USO BÁSICO</a:t>
+            </a:r>
+          </a:p>
+        </p:txBody>
+      </p:sp>
+      <p:sp>
+        <p:nvSpPr>
+          <p:cNvPr id="5" name="TextBox 4"/>
+          <p:cNvSpPr txBox="1"/>
+          <p:nvPr/>
+        </p:nvSpPr>
+        <p:spPr>
+          <a:xfrm>
+            <a:off x="621792" y="841248"/>
+            <a:ext cx="10972800" cy="1005840"/>
+          </a:xfrm>
+          <a:prstGeom prst="rect">
+            <a:avLst/>
+          </a:prstGeom>
+          <a:noFill/>
+        </p:spPr>
+        <p:txBody>
+          <a:bodyPr wrap="square" lIns="0" tIns="0" rIns="0" bIns="0" anchor="t">
+            <a:spAutoFit/>
+          </a:bodyPr>
+          <a:lstStyle/>
+          <a:p>
+            <a:pPr algn="l">
+              <a:lnSpc>
+                <a:spcPct val="100000"/>
+              </a:lnSpc>
+              <a:spcBef>
+                <a:spcPts val="0"/>
+              </a:spcBef>
+              <a:spcAft>
+                <a:spcPts val="400"/>
+              </a:spcAft>
+            </a:pPr>
+            <a:r>
+              <a:rPr sz="3000" b="1">
+                <a:solidFill>
+                  <a:srgbClr val="E8EAED"/>
+                </a:solidFill>
+                <a:latin typeface="Segoe UI"/>
+              </a:rPr>
+              <a:t>Instalar es una línea</a:t>
+            </a:r>
+          </a:p>
+        </p:txBody>
+      </p:sp>
+      <p:sp>
+        <p:nvSpPr>
+          <p:cNvPr id="6" name="Rectangle 5"/>
+          <p:cNvSpPr/>
+          <p:nvPr/>
+        </p:nvSpPr>
+        <p:spPr>
+          <a:xfrm>
+            <a:off x="658368" y="1572768"/>
+            <a:ext cx="1005840" cy="41148"/>
+          </a:xfrm>
+          <a:prstGeom prst="rect">
+            <a:avLst/>
+          </a:prstGeom>
+          <a:solidFill>
+            <a:srgbClr val="D97757"/>
+          </a:solidFill>
+          <a:ln>
+            <a:noFill/>
+          </a:ln>
+          <a:effectLst/>
+        </p:spPr>
+        <p:style>
+          <a:lnRef idx="1">
+            <a:schemeClr val="accent1"/>
+          </a:lnRef>
+          <a:fillRef idx="3">
+            <a:schemeClr val="accent1"/>
+          </a:fillRef>
+          <a:effectRef idx="2">
+            <a:schemeClr val="accent1"/>
+          </a:effectRef>
+          <a:fontRef idx="minor">
+            <a:schemeClr val="lt1"/>
+          </a:fontRef>
+        </p:style>
+        <p:txBody>
+          <a:bodyPr rtlCol="0" anchor="ctr"/>
+          <a:lstStyle/>
+          <a:p>
+            <a:pPr algn="ctr"/>
+            <a:endParaRPr/>
+          </a:p>
+        </p:txBody>
+      </p:sp>
+      <p:sp>
+        <p:nvSpPr>
+          <p:cNvPr id="7" name="TextBox 6"/>
+          <p:cNvSpPr txBox="1"/>
+          <p:nvPr/>
+        </p:nvSpPr>
+        <p:spPr>
+          <a:xfrm>
+            <a:off x="640080" y="6419088"/>
+            <a:ext cx="7315200" cy="320040"/>
+          </a:xfrm>
+          <a:prstGeom prst="rect">
+            <a:avLst/>
+          </a:prstGeom>
+          <a:noFill/>
+        </p:spPr>
+        <p:txBody>
+          <a:bodyPr wrap="square" lIns="0" tIns="0" rIns="0" bIns="0" anchor="t">
+            <a:spAutoFit/>
+          </a:bodyPr>
+          <a:lstStyle/>
+          <a:p>
+            <a:pPr algn="l">
+              <a:lnSpc>
+                <a:spcPct val="100000"/>
+              </a:lnSpc>
+              <a:spcBef>
+                <a:spcPts val="0"/>
+              </a:spcBef>
+              <a:spcAft>
+                <a:spcPts val="400"/>
+              </a:spcAft>
+            </a:pPr>
+            <a:r>
+              <a:rPr sz="950" b="0">
+                <a:solidFill>
+                  <a:srgbClr val="66707E"/>
+                </a:solidFill>
+                <a:latin typeface="Segoe UI"/>
+              </a:rPr>
+              <a:t>Claude Code · Sesión técnica</a:t>
+            </a:r>
+          </a:p>
+        </p:txBody>
+      </p:sp>
+      <p:sp>
+        <p:nvSpPr>
+          <p:cNvPr id="8" name="TextBox 7"/>
+          <p:cNvSpPr txBox="1"/>
+          <p:nvPr/>
+        </p:nvSpPr>
+        <p:spPr>
+          <a:xfrm>
+            <a:off x="10789920" y="6419088"/>
+            <a:ext cx="1097280" cy="320040"/>
+          </a:xfrm>
+          <a:prstGeom prst="rect">
+            <a:avLst/>
+          </a:prstGeom>
+          <a:noFill/>
+        </p:spPr>
+        <p:txBody>
+          <a:bodyPr wrap="square" lIns="0" tIns="0" rIns="0" bIns="0" anchor="t">
+            <a:spAutoFit/>
+          </a:bodyPr>
+          <a:lstStyle/>
+          <a:p>
+            <a:pPr algn="r">
+              <a:lnSpc>
+                <a:spcPct val="100000"/>
+              </a:lnSpc>
+              <a:spcBef>
+                <a:spcPts val="0"/>
+              </a:spcBef>
+              <a:spcAft>
+                <a:spcPts val="400"/>
+              </a:spcAft>
+            </a:pPr>
+            <a:r>
+              <a:rPr sz="950" b="1">
+                <a:solidFill>
+                  <a:srgbClr val="66707E"/>
+                </a:solidFill>
+                <a:latin typeface="Segoe UI"/>
+              </a:rPr>
+              <a:t>3</a:t>
+            </a:r>
+          </a:p>
+        </p:txBody>
+      </p:sp>
+      <p:sp>
+        <p:nvSpPr>
+          <p:cNvPr id="9" name="Rounded Rectangle 8"/>
+          <p:cNvSpPr/>
+          <p:nvPr/>
+        </p:nvSpPr>
+        <p:spPr>
+          <a:xfrm>
+            <a:off x="640080" y="1874519"/>
+            <a:ext cx="5335524" cy="914400"/>
+          </a:xfrm>
+          <a:prstGeom prst="roundRect">
+            <a:avLst>
+              <a:gd name="adj" fmla="val 9000"/>
+            </a:avLst>
+          </a:prstGeom>
+          <a:solidFill>
+            <a:srgbClr val="1A212B"/>
+          </a:solidFill>
+          <a:ln w="9525">
+            <a:solidFill>
+              <a:srgbClr val="2E3948"/>
+            </a:solidFill>
+          </a:ln>
+          <a:effectLst/>
+        </p:spPr>
+        <p:style>
+          <a:lnRef idx="1">
+            <a:schemeClr val="accent1"/>
+          </a:lnRef>
+          <a:fillRef idx="3">
+            <a:schemeClr val="accent1"/>
+          </a:fillRef>
+          <a:effectRef idx="2">
+            <a:schemeClr val="accent1"/>
+          </a:effectRef>
+          <a:fontRef idx="minor">
+            <a:schemeClr val="lt1"/>
+          </a:fontRef>
+        </p:style>
+        <p:txBody>
+          <a:bodyPr rtlCol="0" anchor="ctr"/>
+          <a:lstStyle/>
+          <a:p>
+            <a:pPr algn="ctr"/>
+            <a:endParaRPr/>
+          </a:p>
+        </p:txBody>
+      </p:sp>
+      <p:sp>
+        <p:nvSpPr>
+          <p:cNvPr id="10" name="Rounded Rectangle 9"/>
+          <p:cNvSpPr/>
+          <p:nvPr/>
+        </p:nvSpPr>
+        <p:spPr>
+          <a:xfrm>
+            <a:off x="841247" y="2075688"/>
+            <a:ext cx="457200" cy="457200"/>
+          </a:xfrm>
+          <a:prstGeom prst="roundRect">
+            <a:avLst>
+              <a:gd name="adj" fmla="val 32000"/>
+            </a:avLst>
+          </a:prstGeom>
+          <a:solidFill>
+            <a:srgbClr val="D97757"/>
+          </a:solidFill>
+          <a:ln>
+            <a:noFill/>
+          </a:ln>
+          <a:effectLst/>
+        </p:spPr>
+        <p:style>
+          <a:lnRef idx="1">
+            <a:schemeClr val="accent1"/>
+          </a:lnRef>
+          <a:fillRef idx="3">
+            <a:schemeClr val="accent1"/>
+          </a:fillRef>
+          <a:effectRef idx="2">
+            <a:schemeClr val="accent1"/>
+          </a:effectRef>
+          <a:fontRef idx="minor">
+            <a:schemeClr val="lt1"/>
+          </a:fontRef>
+        </p:style>
+        <p:txBody>
+          <a:bodyPr rtlCol="0" anchor="ctr"/>
+          <a:lstStyle/>
+          <a:p>
+            <a:pPr algn="ctr"/>
+            <a:endParaRPr/>
+          </a:p>
+        </p:txBody>
+      </p:sp>
+      <p:sp>
+        <p:nvSpPr>
+          <p:cNvPr id="11" name="TextBox 10"/>
+          <p:cNvSpPr txBox="1"/>
+          <p:nvPr/>
+        </p:nvSpPr>
+        <p:spPr>
+          <a:xfrm>
+            <a:off x="841247" y="2093976"/>
+            <a:ext cx="457200" cy="420624"/>
+          </a:xfrm>
+          <a:prstGeom prst="rect">
+            <a:avLst/>
+          </a:prstGeom>
+          <a:noFill/>
+        </p:spPr>
+        <p:txBody>
+          <a:bodyPr wrap="square" lIns="0" tIns="0" rIns="0" bIns="0" anchor="ctr">
+            <a:spAutoFit/>
+          </a:bodyPr>
+          <a:lstStyle/>
+          <a:p>
+            <a:pPr algn="ctr">
+              <a:lnSpc>
+                <a:spcPct val="100000"/>
+              </a:lnSpc>
+              <a:spcBef>
+                <a:spcPts val="0"/>
+              </a:spcBef>
+              <a:spcAft>
+                <a:spcPts val="400"/>
+              </a:spcAft>
+            </a:pPr>
+            <a:r>
+              <a:rPr sz="1500" b="1">
+                <a:solidFill>
+                  <a:srgbClr val="0F141A"/>
+                </a:solidFill>
+                <a:latin typeface="Segoe UI"/>
+              </a:rPr>
+              <a:t>1</a:t>
+            </a:r>
+          </a:p>
+        </p:txBody>
+      </p:sp>
+      <p:sp>
+        <p:nvSpPr>
+          <p:cNvPr id="12" name="TextBox 11"/>
+          <p:cNvSpPr txBox="1"/>
+          <p:nvPr/>
+        </p:nvSpPr>
+        <p:spPr>
+          <a:xfrm>
+            <a:off x="1463040" y="2020824"/>
+            <a:ext cx="4375404" cy="365760"/>
+          </a:xfrm>
+          <a:prstGeom prst="rect">
+            <a:avLst/>
+          </a:prstGeom>
+          <a:noFill/>
+        </p:spPr>
+        <p:txBody>
+          <a:bodyPr wrap="square" lIns="0" tIns="0" rIns="0" bIns="0" anchor="t">
+            <a:spAutoFit/>
+          </a:bodyPr>
+          <a:lstStyle/>
+          <a:p>
+            <a:pPr algn="l">
+              <a:lnSpc>
+                <a:spcPct val="100000"/>
+              </a:lnSpc>
+              <a:spcBef>
+                <a:spcPts val="0"/>
+              </a:spcBef>
+              <a:spcAft>
+                <a:spcPts val="400"/>
+              </a:spcAft>
+            </a:pPr>
+            <a:r>
+              <a:rPr sz="1450" b="1">
+                <a:solidFill>
+                  <a:srgbClr val="E8EAED"/>
+                </a:solidFill>
+                <a:latin typeface="Segoe UI"/>
+              </a:rPr>
+              <a:t>Native (recomendado)</a:t>
+            </a:r>
+          </a:p>
+        </p:txBody>
+      </p:sp>
+      <p:sp>
+        <p:nvSpPr>
+          <p:cNvPr id="13" name="TextBox 12"/>
+          <p:cNvSpPr txBox="1"/>
+          <p:nvPr/>
+        </p:nvSpPr>
+        <p:spPr>
+          <a:xfrm>
+            <a:off x="1463040" y="2331720"/>
+            <a:ext cx="4375404" cy="411479"/>
+          </a:xfrm>
+          <a:prstGeom prst="rect">
+            <a:avLst/>
+          </a:prstGeom>
+          <a:noFill/>
+        </p:spPr>
+        <p:txBody>
+          <a:bodyPr wrap="square" lIns="0" tIns="0" rIns="0" bIns="0" anchor="t">
+            <a:spAutoFit/>
+          </a:bodyPr>
+          <a:lstStyle/>
+          <a:p>
+            <a:pPr algn="l">
+              <a:lnSpc>
+                <a:spcPct val="102000"/>
+              </a:lnSpc>
+              <a:spcBef>
+                <a:spcPts val="0"/>
+              </a:spcBef>
+              <a:spcAft>
+                <a:spcPts val="400"/>
+              </a:spcAft>
+            </a:pPr>
+            <a:r>
+              <a:rPr sz="1100" b="0">
+                <a:solidFill>
+                  <a:srgbClr val="9AA4B2"/>
+                </a:solidFill>
+                <a:latin typeface="Segoe UI"/>
+              </a:rPr>
+              <a:t>curl -fsSL https://claude.ai/install.sh | bash — macOS/Linux/WSL, con auto-update.</a:t>
+            </a:r>
+          </a:p>
+        </p:txBody>
+      </p:sp>
+      <p:sp>
+        <p:nvSpPr>
+          <p:cNvPr id="14" name="Rounded Rectangle 13"/>
+          <p:cNvSpPr/>
+          <p:nvPr/>
+        </p:nvSpPr>
+        <p:spPr>
+          <a:xfrm>
+            <a:off x="6231636" y="1874519"/>
+            <a:ext cx="5335524" cy="914400"/>
+          </a:xfrm>
+          <a:prstGeom prst="roundRect">
+            <a:avLst>
+              <a:gd name="adj" fmla="val 9000"/>
+            </a:avLst>
+          </a:prstGeom>
+          <a:solidFill>
+            <a:srgbClr val="1A212B"/>
+          </a:solidFill>
+          <a:ln w="9525">
+            <a:solidFill>
+              <a:srgbClr val="2E3948"/>
+            </a:solidFill>
+          </a:ln>
+          <a:effectLst/>
+        </p:spPr>
+        <p:style>
+          <a:lnRef idx="1">
+            <a:schemeClr val="accent1"/>
+          </a:lnRef>
+          <a:fillRef idx="3">
+            <a:schemeClr val="accent1"/>
+          </a:fillRef>
+          <a:effectRef idx="2">
+            <a:schemeClr val="accent1"/>
+          </a:effectRef>
+          <a:fontRef idx="minor">
+            <a:schemeClr val="lt1"/>
+          </a:fontRef>
+        </p:style>
+        <p:txBody>
+          <a:bodyPr rtlCol="0" anchor="ctr"/>
+          <a:lstStyle/>
+          <a:p>
+            <a:pPr algn="ctr"/>
+            <a:endParaRPr/>
+          </a:p>
+        </p:txBody>
+      </p:sp>
+      <p:sp>
+        <p:nvSpPr>
+          <p:cNvPr id="15" name="Rounded Rectangle 14"/>
+          <p:cNvSpPr/>
+          <p:nvPr/>
+        </p:nvSpPr>
+        <p:spPr>
+          <a:xfrm>
+            <a:off x="6432804" y="2075688"/>
+            <a:ext cx="457200" cy="457200"/>
+          </a:xfrm>
+          <a:prstGeom prst="roundRect">
+            <a:avLst>
+              <a:gd name="adj" fmla="val 32000"/>
+            </a:avLst>
+          </a:prstGeom>
+          <a:solidFill>
+            <a:srgbClr val="D97757"/>
+          </a:solidFill>
+          <a:ln>
+            <a:noFill/>
+          </a:ln>
+          <a:effectLst/>
+        </p:spPr>
+        <p:style>
+          <a:lnRef idx="1">
+            <a:schemeClr val="accent1"/>
+          </a:lnRef>
+          <a:fillRef idx="3">
+            <a:schemeClr val="accent1"/>
+          </a:fillRef>
+          <a:effectRef idx="2">
+            <a:schemeClr val="accent1"/>
+          </a:effectRef>
+          <a:fontRef idx="minor">
+            <a:schemeClr val="lt1"/>
+          </a:fontRef>
+        </p:style>
+        <p:txBody>
+          <a:bodyPr rtlCol="0" anchor="ctr"/>
+          <a:lstStyle/>
+          <a:p>
+            <a:pPr algn="ctr"/>
+            <a:endParaRPr/>
+          </a:p>
+        </p:txBody>
+      </p:sp>
+      <p:sp>
+        <p:nvSpPr>
+          <p:cNvPr id="16" name="TextBox 15"/>
+          <p:cNvSpPr txBox="1"/>
+          <p:nvPr/>
+        </p:nvSpPr>
+        <p:spPr>
+          <a:xfrm>
+            <a:off x="6432804" y="2093976"/>
+            <a:ext cx="457200" cy="420624"/>
+          </a:xfrm>
+          <a:prstGeom prst="rect">
+            <a:avLst/>
+          </a:prstGeom>
+          <a:noFill/>
+        </p:spPr>
+        <p:txBody>
+          <a:bodyPr wrap="square" lIns="0" tIns="0" rIns="0" bIns="0" anchor="ctr">
+            <a:spAutoFit/>
+          </a:bodyPr>
+          <a:lstStyle/>
+          <a:p>
+            <a:pPr algn="ctr">
+              <a:lnSpc>
+                <a:spcPct val="100000"/>
+              </a:lnSpc>
+              <a:spcBef>
+                <a:spcPts val="0"/>
+              </a:spcBef>
+              <a:spcAft>
+                <a:spcPts val="400"/>
+              </a:spcAft>
+            </a:pPr>
+            <a:r>
+              <a:rPr sz="1500" b="1">
+                <a:solidFill>
+                  <a:srgbClr val="0F141A"/>
+                </a:solidFill>
+                <a:latin typeface="Segoe UI"/>
+              </a:rPr>
+              <a:t>2</a:t>
+            </a:r>
+          </a:p>
+        </p:txBody>
+      </p:sp>
+      <p:sp>
+        <p:nvSpPr>
+          <p:cNvPr id="17" name="TextBox 16"/>
+          <p:cNvSpPr txBox="1"/>
+          <p:nvPr/>
+        </p:nvSpPr>
+        <p:spPr>
+          <a:xfrm>
+            <a:off x="7054596" y="2020824"/>
+            <a:ext cx="4375404" cy="365760"/>
+          </a:xfrm>
+          <a:prstGeom prst="rect">
+            <a:avLst/>
+          </a:prstGeom>
+          <a:noFill/>
+        </p:spPr>
+        <p:txBody>
+          <a:bodyPr wrap="square" lIns="0" tIns="0" rIns="0" bIns="0" anchor="t">
+            <a:spAutoFit/>
+          </a:bodyPr>
+          <a:lstStyle/>
+          <a:p>
+            <a:pPr algn="l">
+              <a:lnSpc>
+                <a:spcPct val="100000"/>
+              </a:lnSpc>
+              <a:spcBef>
+                <a:spcPts val="0"/>
+              </a:spcBef>
+              <a:spcAft>
+                <a:spcPts val="400"/>
+              </a:spcAft>
+            </a:pPr>
+            <a:r>
+              <a:rPr sz="1450" b="1">
+                <a:solidFill>
+                  <a:srgbClr val="E8EAED"/>
+                </a:solidFill>
+                <a:latin typeface="Segoe UI"/>
+              </a:rPr>
+              <a:t>Homebrew</a:t>
+            </a:r>
+          </a:p>
+        </p:txBody>
+      </p:sp>
+      <p:sp>
+        <p:nvSpPr>
+          <p:cNvPr id="18" name="TextBox 17"/>
+          <p:cNvSpPr txBox="1"/>
+          <p:nvPr/>
+        </p:nvSpPr>
+        <p:spPr>
+          <a:xfrm>
+            <a:off x="7054596" y="2331720"/>
+            <a:ext cx="4375404" cy="411479"/>
+          </a:xfrm>
+          <a:prstGeom prst="rect">
+            <a:avLst/>
+          </a:prstGeom>
+          <a:noFill/>
+        </p:spPr>
+        <p:txBody>
+          <a:bodyPr wrap="square" lIns="0" tIns="0" rIns="0" bIns="0" anchor="t">
+            <a:spAutoFit/>
+          </a:bodyPr>
+          <a:lstStyle/>
+          <a:p>
+            <a:pPr algn="l">
+              <a:lnSpc>
+                <a:spcPct val="102000"/>
+              </a:lnSpc>
+              <a:spcBef>
+                <a:spcPts val="0"/>
+              </a:spcBef>
+              <a:spcAft>
+                <a:spcPts val="400"/>
+              </a:spcAft>
+            </a:pPr>
+            <a:r>
+              <a:rPr sz="1100" b="0">
+                <a:solidFill>
+                  <a:srgbClr val="9AA4B2"/>
+                </a:solidFill>
+                <a:latin typeface="Segoe UI"/>
+              </a:rPr>
+              <a:t>brew install --cask claude-code (brew upgrade para actualizar).</a:t>
+            </a:r>
+          </a:p>
+        </p:txBody>
+      </p:sp>
+      <p:sp>
+        <p:nvSpPr>
+          <p:cNvPr id="19" name="Rounded Rectangle 18"/>
+          <p:cNvSpPr/>
+          <p:nvPr/>
+        </p:nvSpPr>
+        <p:spPr>
+          <a:xfrm>
+            <a:off x="640080" y="3044952"/>
+            <a:ext cx="5335524" cy="914400"/>
+          </a:xfrm>
+          <a:prstGeom prst="roundRect">
+            <a:avLst>
+              <a:gd name="adj" fmla="val 9000"/>
+            </a:avLst>
+          </a:prstGeom>
+          <a:solidFill>
+            <a:srgbClr val="1A212B"/>
+          </a:solidFill>
+          <a:ln w="9525">
+            <a:solidFill>
+              <a:srgbClr val="2E3948"/>
+            </a:solidFill>
+          </a:ln>
+          <a:effectLst/>
+        </p:spPr>
+        <p:style>
+          <a:lnRef idx="1">
+            <a:schemeClr val="accent1"/>
+          </a:lnRef>
+          <a:fillRef idx="3">
+            <a:schemeClr val="accent1"/>
+          </a:fillRef>
+          <a:effectRef idx="2">
+            <a:schemeClr val="accent1"/>
+          </a:effectRef>
+          <a:fontRef idx="minor">
+            <a:schemeClr val="lt1"/>
+          </a:fontRef>
+        </p:style>
+        <p:txBody>
+          <a:bodyPr rtlCol="0" anchor="ctr"/>
+          <a:lstStyle/>
+          <a:p>
+            <a:pPr algn="ctr"/>
+            <a:endParaRPr/>
+          </a:p>
+        </p:txBody>
+      </p:sp>
+      <p:sp>
+        <p:nvSpPr>
+          <p:cNvPr id="20" name="Rounded Rectangle 19"/>
+          <p:cNvSpPr/>
+          <p:nvPr/>
+        </p:nvSpPr>
+        <p:spPr>
+          <a:xfrm>
+            <a:off x="841247" y="3246120"/>
+            <a:ext cx="457200" cy="457200"/>
+          </a:xfrm>
+          <a:prstGeom prst="roundRect">
+            <a:avLst>
+              <a:gd name="adj" fmla="val 32000"/>
+            </a:avLst>
+          </a:prstGeom>
+          <a:solidFill>
+            <a:srgbClr val="D97757"/>
+          </a:solidFill>
+          <a:ln>
+            <a:noFill/>
+          </a:ln>
+          <a:effectLst/>
+        </p:spPr>
+        <p:style>
+          <a:lnRef idx="1">
+            <a:schemeClr val="accent1"/>
+          </a:lnRef>
+          <a:fillRef idx="3">
+            <a:schemeClr val="accent1"/>
+          </a:fillRef>
+          <a:effectRef idx="2">
+            <a:schemeClr val="accent1"/>
+          </a:effectRef>
+          <a:fontRef idx="minor">
+            <a:schemeClr val="lt1"/>
+          </a:fontRef>
+        </p:style>
+        <p:txBody>
+          <a:bodyPr rtlCol="0" anchor="ctr"/>
+          <a:lstStyle/>
+          <a:p>
+            <a:pPr algn="ctr"/>
+            <a:endParaRPr/>
+          </a:p>
+        </p:txBody>
+      </p:sp>
+      <p:sp>
+        <p:nvSpPr>
+          <p:cNvPr id="21" name="TextBox 20"/>
+          <p:cNvSpPr txBox="1"/>
+          <p:nvPr/>
+        </p:nvSpPr>
+        <p:spPr>
+          <a:xfrm>
+            <a:off x="841247" y="3264408"/>
+            <a:ext cx="457200" cy="420624"/>
+          </a:xfrm>
+          <a:prstGeom prst="rect">
+            <a:avLst/>
+          </a:prstGeom>
+          <a:noFill/>
+        </p:spPr>
+        <p:txBody>
+          <a:bodyPr wrap="square" lIns="0" tIns="0" rIns="0" bIns="0" anchor="ctr">
+            <a:spAutoFit/>
+          </a:bodyPr>
+          <a:lstStyle/>
+          <a:p>
+            <a:pPr algn="ctr">
+              <a:lnSpc>
+                <a:spcPct val="100000"/>
+              </a:lnSpc>
+              <a:spcBef>
+                <a:spcPts val="0"/>
+              </a:spcBef>
+              <a:spcAft>
+                <a:spcPts val="400"/>
+              </a:spcAft>
+            </a:pPr>
+            <a:r>
+              <a:rPr sz="1500" b="1">
+                <a:solidFill>
+                  <a:srgbClr val="0F141A"/>
+                </a:solidFill>
+                <a:latin typeface="Segoe UI"/>
+              </a:rPr>
+              <a:t>3</a:t>
+            </a:r>
+          </a:p>
+        </p:txBody>
+      </p:sp>
+      <p:sp>
+        <p:nvSpPr>
+          <p:cNvPr id="22" name="TextBox 21"/>
+          <p:cNvSpPr txBox="1"/>
+          <p:nvPr/>
+        </p:nvSpPr>
+        <p:spPr>
+          <a:xfrm>
+            <a:off x="1463040" y="3191256"/>
+            <a:ext cx="4375404" cy="365760"/>
+          </a:xfrm>
+          <a:prstGeom prst="rect">
+            <a:avLst/>
+          </a:prstGeom>
+          <a:noFill/>
+        </p:spPr>
+        <p:txBody>
+          <a:bodyPr wrap="square" lIns="0" tIns="0" rIns="0" bIns="0" anchor="t">
+            <a:spAutoFit/>
+          </a:bodyPr>
+          <a:lstStyle/>
+          <a:p>
+            <a:pPr algn="l">
+              <a:lnSpc>
+                <a:spcPct val="100000"/>
+              </a:lnSpc>
+              <a:spcBef>
+                <a:spcPts val="0"/>
+              </a:spcBef>
+              <a:spcAft>
+                <a:spcPts val="400"/>
+              </a:spcAft>
+            </a:pPr>
+            <a:r>
+              <a:rPr sz="1450" b="1">
+                <a:solidFill>
+                  <a:srgbClr val="E8EAED"/>
+                </a:solidFill>
+                <a:latin typeface="Segoe UI"/>
+              </a:rPr>
+              <a:t>Windows</a:t>
+            </a:r>
+          </a:p>
+        </p:txBody>
+      </p:sp>
+      <p:sp>
+        <p:nvSpPr>
+          <p:cNvPr id="23" name="TextBox 22"/>
+          <p:cNvSpPr txBox="1"/>
+          <p:nvPr/>
+        </p:nvSpPr>
+        <p:spPr>
+          <a:xfrm>
+            <a:off x="1463040" y="3502152"/>
+            <a:ext cx="4375404" cy="411479"/>
+          </a:xfrm>
+          <a:prstGeom prst="rect">
+            <a:avLst/>
+          </a:prstGeom>
+          <a:noFill/>
+        </p:spPr>
+        <p:txBody>
+          <a:bodyPr wrap="square" lIns="0" tIns="0" rIns="0" bIns="0" anchor="t">
+            <a:spAutoFit/>
+          </a:bodyPr>
+          <a:lstStyle/>
+          <a:p>
+            <a:pPr algn="l">
+              <a:lnSpc>
+                <a:spcPct val="102000"/>
+              </a:lnSpc>
+              <a:spcBef>
+                <a:spcPts val="0"/>
+              </a:spcBef>
+              <a:spcAft>
+                <a:spcPts val="400"/>
+              </a:spcAft>
+            </a:pPr>
+            <a:r>
+              <a:rPr sz="1100" b="0">
+                <a:solidFill>
+                  <a:srgbClr val="9AA4B2"/>
+                </a:solidFill>
+                <a:latin typeface="Segoe UI"/>
+              </a:rPr>
+              <a:t>winget install Anthropic.ClaudeCode · o el instalador PowerShell.</a:t>
+            </a:r>
+          </a:p>
+        </p:txBody>
+      </p:sp>
+      <p:sp>
+        <p:nvSpPr>
+          <p:cNvPr id="24" name="Rounded Rectangle 23"/>
+          <p:cNvSpPr/>
+          <p:nvPr/>
+        </p:nvSpPr>
+        <p:spPr>
+          <a:xfrm>
+            <a:off x="6231636" y="3044952"/>
+            <a:ext cx="5335524" cy="914400"/>
+          </a:xfrm>
+          <a:prstGeom prst="roundRect">
+            <a:avLst>
+              <a:gd name="adj" fmla="val 9000"/>
+            </a:avLst>
+          </a:prstGeom>
+          <a:solidFill>
+            <a:srgbClr val="1A212B"/>
+          </a:solidFill>
+          <a:ln w="9525">
+            <a:solidFill>
+              <a:srgbClr val="2E3948"/>
+            </a:solidFill>
+          </a:ln>
+          <a:effectLst/>
+        </p:spPr>
+        <p:style>
+          <a:lnRef idx="1">
+            <a:schemeClr val="accent1"/>
+          </a:lnRef>
+          <a:fillRef idx="3">
+            <a:schemeClr val="accent1"/>
+          </a:fillRef>
+          <a:effectRef idx="2">
+            <a:schemeClr val="accent1"/>
+          </a:effectRef>
+          <a:fontRef idx="minor">
+            <a:schemeClr val="lt1"/>
+          </a:fontRef>
+        </p:style>
+        <p:txBody>
+          <a:bodyPr rtlCol="0" anchor="ctr"/>
+          <a:lstStyle/>
+          <a:p>
+            <a:pPr algn="ctr"/>
+            <a:endParaRPr/>
+          </a:p>
+        </p:txBody>
+      </p:sp>
+      <p:sp>
+        <p:nvSpPr>
+          <p:cNvPr id="25" name="Rounded Rectangle 24"/>
+          <p:cNvSpPr/>
+          <p:nvPr/>
+        </p:nvSpPr>
+        <p:spPr>
+          <a:xfrm>
+            <a:off x="6432804" y="3246120"/>
+            <a:ext cx="457200" cy="457200"/>
+          </a:xfrm>
+          <a:prstGeom prst="roundRect">
+            <a:avLst>
+              <a:gd name="adj" fmla="val 32000"/>
+            </a:avLst>
+          </a:prstGeom>
+          <a:solidFill>
+            <a:srgbClr val="D97757"/>
+          </a:solidFill>
+          <a:ln>
+            <a:noFill/>
+          </a:ln>
+          <a:effectLst/>
+        </p:spPr>
+        <p:style>
+          <a:lnRef idx="1">
+            <a:schemeClr val="accent1"/>
+          </a:lnRef>
+          <a:fillRef idx="3">
+            <a:schemeClr val="accent1"/>
+          </a:fillRef>
+          <a:effectRef idx="2">
+            <a:schemeClr val="accent1"/>
+          </a:effectRef>
+          <a:fontRef idx="minor">
+            <a:schemeClr val="lt1"/>
+          </a:fontRef>
+        </p:style>
+        <p:txBody>
+          <a:bodyPr rtlCol="0" anchor="ctr"/>
+          <a:lstStyle/>
+          <a:p>
+            <a:pPr algn="ctr"/>
+            <a:endParaRPr/>
+          </a:p>
+        </p:txBody>
+      </p:sp>
+      <p:sp>
+        <p:nvSpPr>
+          <p:cNvPr id="26" name="TextBox 25"/>
+          <p:cNvSpPr txBox="1"/>
+          <p:nvPr/>
+        </p:nvSpPr>
+        <p:spPr>
+          <a:xfrm>
+            <a:off x="6432804" y="3264408"/>
+            <a:ext cx="457200" cy="420624"/>
+          </a:xfrm>
+          <a:prstGeom prst="rect">
+            <a:avLst/>
+          </a:prstGeom>
+          <a:noFill/>
+        </p:spPr>
+        <p:txBody>
+          <a:bodyPr wrap="square" lIns="0" tIns="0" rIns="0" bIns="0" anchor="ctr">
+            <a:spAutoFit/>
+          </a:bodyPr>
+          <a:lstStyle/>
+          <a:p>
+            <a:pPr algn="ctr">
+              <a:lnSpc>
+                <a:spcPct val="100000"/>
+              </a:lnSpc>
+              <a:spcBef>
+                <a:spcPts val="0"/>
+              </a:spcBef>
+              <a:spcAft>
+                <a:spcPts val="400"/>
+              </a:spcAft>
+            </a:pPr>
+            <a:r>
+              <a:rPr sz="1500" b="1">
+                <a:solidFill>
+                  <a:srgbClr val="0F141A"/>
+                </a:solidFill>
+                <a:latin typeface="Segoe UI"/>
+              </a:rPr>
+              <a:t>4</a:t>
+            </a:r>
+          </a:p>
+        </p:txBody>
+      </p:sp>
+      <p:sp>
+        <p:nvSpPr>
+          <p:cNvPr id="27" name="TextBox 26"/>
+          <p:cNvSpPr txBox="1"/>
+          <p:nvPr/>
+        </p:nvSpPr>
+        <p:spPr>
+          <a:xfrm>
+            <a:off x="7054596" y="3191256"/>
+            <a:ext cx="4375404" cy="365760"/>
+          </a:xfrm>
+          <a:prstGeom prst="rect">
+            <a:avLst/>
+          </a:prstGeom>
+          <a:noFill/>
+        </p:spPr>
+        <p:txBody>
+          <a:bodyPr wrap="square" lIns="0" tIns="0" rIns="0" bIns="0" anchor="t">
+            <a:spAutoFit/>
+          </a:bodyPr>
+          <a:lstStyle/>
+          <a:p>
+            <a:pPr algn="l">
+              <a:lnSpc>
+                <a:spcPct val="100000"/>
+              </a:lnSpc>
+              <a:spcBef>
+                <a:spcPts val="0"/>
+              </a:spcBef>
+              <a:spcAft>
+                <a:spcPts val="400"/>
+              </a:spcAft>
+            </a:pPr>
+            <a:r>
+              <a:rPr sz="1450" b="1">
+                <a:solidFill>
+                  <a:srgbClr val="E8EAED"/>
+                </a:solidFill>
+                <a:latin typeface="Segoe UI"/>
+              </a:rPr>
+              <a:t>Linux pkg</a:t>
+            </a:r>
+          </a:p>
+        </p:txBody>
+      </p:sp>
+      <p:sp>
+        <p:nvSpPr>
+          <p:cNvPr id="28" name="TextBox 27"/>
+          <p:cNvSpPr txBox="1"/>
+          <p:nvPr/>
+        </p:nvSpPr>
+        <p:spPr>
+          <a:xfrm>
+            <a:off x="7054596" y="3502152"/>
+            <a:ext cx="4375404" cy="411479"/>
+          </a:xfrm>
+          <a:prstGeom prst="rect">
+            <a:avLst/>
+          </a:prstGeom>
+          <a:noFill/>
+        </p:spPr>
+        <p:txBody>
+          <a:bodyPr wrap="square" lIns="0" tIns="0" rIns="0" bIns="0" anchor="t">
+            <a:spAutoFit/>
+          </a:bodyPr>
+          <a:lstStyle/>
+          <a:p>
+            <a:pPr algn="l">
+              <a:lnSpc>
+                <a:spcPct val="102000"/>
+              </a:lnSpc>
+              <a:spcBef>
+                <a:spcPts val="0"/>
+              </a:spcBef>
+              <a:spcAft>
+                <a:spcPts val="400"/>
+              </a:spcAft>
+            </a:pPr>
+            <a:r>
+              <a:rPr sz="1100" b="0">
+                <a:solidFill>
+                  <a:srgbClr val="9AA4B2"/>
+                </a:solidFill>
+                <a:latin typeface="Segoe UI"/>
+              </a:rPr>
+              <a:t>apt / dnf / apk en Debian, Fedora, RHEL, Alpine.</a:t>
+            </a:r>
+          </a:p>
+        </p:txBody>
+      </p:sp>
+      <p:sp>
+        <p:nvSpPr>
           <p:cNvPr id="30" name="Rounded Rectangle 29"/>
           <p:cNvSpPr/>
           <p:nvPr/>
         </p:nvSpPr>
         <p:spPr>
           <a:xfrm>
-            <a:off x="640080" y="3941064"/>
+            <a:off x="640080" y="3977639"/>
             <a:ext cx="5394960" cy="1234440"/>
           </a:xfrm>
           <a:prstGeom prst="roundRect">
@@ -19849,104 +21969,14 @@
       </p:sp>
       <p:sp>
         <p:nvSpPr>
-          <p:cNvPr id="2" name="Rectangle 1"/>
-          <p:cNvSpPr/>
-          <p:nvPr/>
-        </p:nvSpPr>
-        <p:spPr>
-          <a:xfrm>
-            <a:off x="-91440" y="-91440"/>
-            <a:ext cx="12371832" cy="7040880"/>
-          </a:xfrm>
-          <a:prstGeom prst="rect">
-            <a:avLst/>
-          </a:prstGeom>
-          <a:solidFill>
-            <a:srgbClr val="0F141A"/>
-          </a:solidFill>
-          <a:ln>
-            <a:noFill/>
-          </a:ln>
-          <a:effectLst/>
-        </p:spPr>
-        <p:style>
-          <a:lnRef idx="1">
-            <a:schemeClr val="accent1"/>
-          </a:lnRef>
-          <a:fillRef idx="3">
-            <a:schemeClr val="accent1"/>
-          </a:fillRef>
-          <a:effectRef idx="2">
-            <a:schemeClr val="accent1"/>
-          </a:effectRef>
-          <a:fontRef idx="minor">
-            <a:schemeClr val="lt1"/>
-          </a:fontRef>
-        </p:style>
-        <p:txBody>
-          <a:bodyPr rtlCol="0" anchor="ctr"/>
-          <a:lstStyle/>
-          <a:p>
-            <a:pPr algn="ctr"/>
-            <a:endParaRPr/>
-          </a:p>
-        </p:txBody>
-      </p:sp>
-      <p:sp>
-        <p:nvSpPr>
-          <p:cNvPr id="3" name="Rectangle 2"/>
-          <p:cNvSpPr/>
-          <p:nvPr/>
-        </p:nvSpPr>
-        <p:spPr>
-          <a:xfrm>
-            <a:off x="0" y="0"/>
-            <a:ext cx="201168" cy="6858000"/>
-          </a:xfrm>
-          <a:prstGeom prst="rect">
-            <a:avLst/>
-          </a:prstGeom>
-          <a:solidFill>
-            <a:srgbClr val="D97757"/>
-          </a:solidFill>
-          <a:ln>
-            <a:noFill/>
-          </a:ln>
-          <a:effectLst/>
-        </p:spPr>
-        <p:style>
-          <a:lnRef idx="1">
-            <a:schemeClr val="accent1"/>
-          </a:lnRef>
-          <a:fillRef idx="3">
-            <a:schemeClr val="accent1"/>
-          </a:fillRef>
-          <a:effectRef idx="2">
-            <a:schemeClr val="accent1"/>
-          </a:effectRef>
-          <a:fontRef idx="minor">
-            <a:schemeClr val="lt1"/>
-          </a:fontRef>
-        </p:style>
-        <p:txBody>
-          <a:bodyPr rtlCol="0" anchor="ctr"/>
-          <a:lstStyle/>
-          <a:p>
-            <a:pPr algn="ctr"/>
-            <a:endParaRPr/>
-          </a:p>
-        </p:txBody>
-      </p:sp>
-      <p:sp>
-        <p:nvSpPr>
-          <p:cNvPr id="4" name="TextBox 3"/>
+          <p:cNvPr id="31" name="TextBox 30"/>
           <p:cNvSpPr txBox="1"/>
           <p:nvPr/>
         </p:nvSpPr>
         <p:spPr>
           <a:xfrm>
-            <a:off x="640080" y="502920"/>
-            <a:ext cx="10058400" cy="365760"/>
+            <a:off x="896112" y="4160520"/>
+            <a:ext cx="4937760" cy="634276"/>
           </a:xfrm>
           <a:prstGeom prst="rect">
             <a:avLst/>
@@ -19961,221 +21991,121 @@
           <a:p>
             <a:pPr algn="l">
               <a:lnSpc>
-                <a:spcPct val="100000"/>
-              </a:lnSpc>
-              <a:spcBef>
-                <a:spcPts val="0"/>
-              </a:spcBef>
-              <a:spcAft>
-                <a:spcPts val="400"/>
-              </a:spcAft>
-            </a:pPr>
-            <a:r>
-              <a:rPr sz="1200" b="1">
-                <a:solidFill>
-                  <a:srgbClr val="D97757"/>
-                </a:solidFill>
-                <a:latin typeface="Segoe UI"/>
-              </a:rPr>
-              <a:t>01 · INSTALACIÓN Y USO BÁSICO</a:t>
-            </a:r>
-          </a:p>
-        </p:txBody>
-      </p:sp>
-      <p:sp>
-        <p:nvSpPr>
-          <p:cNvPr id="5" name="TextBox 4"/>
-          <p:cNvSpPr txBox="1"/>
-          <p:nvPr/>
-        </p:nvSpPr>
-        <p:spPr>
-          <a:xfrm>
-            <a:off x="621792" y="841248"/>
-            <a:ext cx="10972800" cy="1005840"/>
-          </a:xfrm>
-          <a:prstGeom prst="rect">
-            <a:avLst/>
-          </a:prstGeom>
-          <a:noFill/>
-        </p:spPr>
-        <p:txBody>
-          <a:bodyPr wrap="square" lIns="0" tIns="0" rIns="0" bIns="0" anchor="t">
-            <a:spAutoFit/>
-          </a:bodyPr>
-          <a:lstStyle/>
-          <a:p>
-            <a:pPr algn="l">
-              <a:lnSpc>
-                <a:spcPct val="100000"/>
-              </a:lnSpc>
-              <a:spcBef>
-                <a:spcPts val="0"/>
-              </a:spcBef>
-              <a:spcAft>
-                <a:spcPts val="400"/>
-              </a:spcAft>
-            </a:pPr>
-            <a:r>
-              <a:rPr sz="3000" b="1">
+                <a:spcPct val="112000"/>
+              </a:lnSpc>
+              <a:spcBef>
+                <a:spcPts val="0"/>
+              </a:spcBef>
+              <a:spcAft>
+                <a:spcPts val="200"/>
+              </a:spcAft>
+            </a:pPr>
+            <a:endParaRPr lang="en-GB" sz="1150" b="0" dirty="0">
+              <a:solidFill>
+                <a:srgbClr val="E8EAED"/>
+              </a:solidFill>
+              <a:latin typeface="Consolas"/>
+            </a:endParaRPr>
+          </a:p>
+          <a:p>
+            <a:pPr algn="l">
+              <a:lnSpc>
+                <a:spcPct val="112000"/>
+              </a:lnSpc>
+              <a:spcBef>
+                <a:spcPts val="0"/>
+              </a:spcBef>
+              <a:spcAft>
+                <a:spcPts val="200"/>
+              </a:spcAft>
+            </a:pPr>
+            <a:r>
+              <a:rPr sz="1150" b="0" dirty="0">
                 <a:solidFill>
                   <a:srgbClr val="E8EAED"/>
                 </a:solidFill>
-                <a:latin typeface="Segoe UI"/>
-              </a:rPr>
-              <a:t>Instalar es una línea</a:t>
-            </a:r>
-          </a:p>
-        </p:txBody>
-      </p:sp>
-      <p:sp>
-        <p:nvSpPr>
-          <p:cNvPr id="6" name="Rectangle 5"/>
+                <a:latin typeface="Consolas"/>
+              </a:rPr>
+              <a:t>cd </a:t>
+            </a:r>
+            <a:r>
+              <a:rPr sz="1150" b="0" dirty="0" err="1">
+                <a:solidFill>
+                  <a:srgbClr val="E8EAED"/>
+                </a:solidFill>
+                <a:latin typeface="Consolas"/>
+              </a:rPr>
+              <a:t>tu-proyecto</a:t>
+            </a:r>
+            <a:endParaRPr sz="1150" b="0" dirty="0">
+              <a:solidFill>
+                <a:srgbClr val="E8EAED"/>
+              </a:solidFill>
+              <a:latin typeface="Consolas"/>
+            </a:endParaRPr>
+          </a:p>
+          <a:p>
+            <a:pPr algn="l">
+              <a:lnSpc>
+                <a:spcPct val="112000"/>
+              </a:lnSpc>
+              <a:spcBef>
+                <a:spcPts val="0"/>
+              </a:spcBef>
+              <a:spcAft>
+                <a:spcPts val="200"/>
+              </a:spcAft>
+            </a:pPr>
+            <a:r>
+              <a:rPr sz="1150" b="0" dirty="0" err="1">
+                <a:solidFill>
+                  <a:srgbClr val="E8EAED"/>
+                </a:solidFill>
+                <a:latin typeface="Consolas"/>
+              </a:rPr>
+              <a:t>claude</a:t>
+            </a:r>
+            <a:r>
+              <a:rPr sz="1150" b="0" dirty="0">
+                <a:solidFill>
+                  <a:srgbClr val="E8EAED"/>
+                </a:solidFill>
+                <a:latin typeface="Consolas"/>
+              </a:rPr>
+              <a:t>            # login la 1ª </a:t>
+            </a:r>
+            <a:r>
+              <a:rPr sz="1150" b="0" dirty="0" err="1">
+                <a:solidFill>
+                  <a:srgbClr val="E8EAED"/>
+                </a:solidFill>
+                <a:latin typeface="Consolas"/>
+              </a:rPr>
+              <a:t>vez</a:t>
+            </a:r>
+            <a:endParaRPr sz="1150" b="0" dirty="0">
+              <a:solidFill>
+                <a:srgbClr val="E8EAED"/>
+              </a:solidFill>
+              <a:latin typeface="Consolas"/>
+            </a:endParaRPr>
+          </a:p>
+        </p:txBody>
+      </p:sp>
+      <p:sp>
+        <p:nvSpPr>
+          <p:cNvPr id="32" name="Rounded Rectangle 31"/>
           <p:cNvSpPr/>
           <p:nvPr/>
         </p:nvSpPr>
         <p:spPr>
           <a:xfrm>
-            <a:off x="658368" y="1572768"/>
-            <a:ext cx="1005840" cy="41148"/>
-          </a:xfrm>
-          <a:prstGeom prst="rect">
-            <a:avLst/>
-          </a:prstGeom>
-          <a:solidFill>
-            <a:srgbClr val="D97757"/>
-          </a:solidFill>
-          <a:ln>
-            <a:noFill/>
-          </a:ln>
-          <a:effectLst/>
-        </p:spPr>
-        <p:style>
-          <a:lnRef idx="1">
-            <a:schemeClr val="accent1"/>
-          </a:lnRef>
-          <a:fillRef idx="3">
-            <a:schemeClr val="accent1"/>
-          </a:fillRef>
-          <a:effectRef idx="2">
-            <a:schemeClr val="accent1"/>
-          </a:effectRef>
-          <a:fontRef idx="minor">
-            <a:schemeClr val="lt1"/>
-          </a:fontRef>
-        </p:style>
-        <p:txBody>
-          <a:bodyPr rtlCol="0" anchor="ctr"/>
-          <a:lstStyle/>
-          <a:p>
-            <a:pPr algn="ctr"/>
-            <a:endParaRPr/>
-          </a:p>
-        </p:txBody>
-      </p:sp>
-      <p:sp>
-        <p:nvSpPr>
-          <p:cNvPr id="7" name="TextBox 6"/>
-          <p:cNvSpPr txBox="1"/>
-          <p:nvPr/>
-        </p:nvSpPr>
-        <p:spPr>
-          <a:xfrm>
-            <a:off x="640080" y="6419088"/>
-            <a:ext cx="7315200" cy="320040"/>
-          </a:xfrm>
-          <a:prstGeom prst="rect">
-            <a:avLst/>
-          </a:prstGeom>
-          <a:noFill/>
-        </p:spPr>
-        <p:txBody>
-          <a:bodyPr wrap="square" lIns="0" tIns="0" rIns="0" bIns="0" anchor="t">
-            <a:spAutoFit/>
-          </a:bodyPr>
-          <a:lstStyle/>
-          <a:p>
-            <a:pPr algn="l">
-              <a:lnSpc>
-                <a:spcPct val="100000"/>
-              </a:lnSpc>
-              <a:spcBef>
-                <a:spcPts val="0"/>
-              </a:spcBef>
-              <a:spcAft>
-                <a:spcPts val="400"/>
-              </a:spcAft>
-            </a:pPr>
-            <a:r>
-              <a:rPr sz="950" b="0">
-                <a:solidFill>
-                  <a:srgbClr val="66707E"/>
-                </a:solidFill>
-                <a:latin typeface="Segoe UI"/>
-              </a:rPr>
-              <a:t>Claude Code · Sesión técnica</a:t>
-            </a:r>
-          </a:p>
-        </p:txBody>
-      </p:sp>
-      <p:sp>
-        <p:nvSpPr>
-          <p:cNvPr id="8" name="TextBox 7"/>
-          <p:cNvSpPr txBox="1"/>
-          <p:nvPr/>
-        </p:nvSpPr>
-        <p:spPr>
-          <a:xfrm>
-            <a:off x="10789920" y="6419088"/>
-            <a:ext cx="1097280" cy="320040"/>
-          </a:xfrm>
-          <a:prstGeom prst="rect">
-            <a:avLst/>
-          </a:prstGeom>
-          <a:noFill/>
-        </p:spPr>
-        <p:txBody>
-          <a:bodyPr wrap="square" lIns="0" tIns="0" rIns="0" bIns="0" anchor="t">
-            <a:spAutoFit/>
-          </a:bodyPr>
-          <a:lstStyle/>
-          <a:p>
-            <a:pPr algn="r">
-              <a:lnSpc>
-                <a:spcPct val="100000"/>
-              </a:lnSpc>
-              <a:spcBef>
-                <a:spcPts val="0"/>
-              </a:spcBef>
-              <a:spcAft>
-                <a:spcPts val="400"/>
-              </a:spcAft>
-            </a:pPr>
-            <a:r>
-              <a:rPr sz="950" b="1">
-                <a:solidFill>
-                  <a:srgbClr val="66707E"/>
-                </a:solidFill>
-                <a:latin typeface="Segoe UI"/>
-              </a:rPr>
-              <a:t>3</a:t>
-            </a:r>
-          </a:p>
-        </p:txBody>
-      </p:sp>
-      <p:sp>
-        <p:nvSpPr>
-          <p:cNvPr id="9" name="Rounded Rectangle 8"/>
-          <p:cNvSpPr/>
-          <p:nvPr/>
-        </p:nvSpPr>
-        <p:spPr>
-          <a:xfrm>
-            <a:off x="640080" y="1874519"/>
-            <a:ext cx="5335524" cy="914400"/>
+            <a:off x="6277356" y="3977640"/>
+            <a:ext cx="5257800" cy="1554480"/>
           </a:xfrm>
           <a:prstGeom prst="roundRect">
             <a:avLst>
-              <a:gd name="adj" fmla="val 9000"/>
+              <a:gd name="adj" fmla="val 6000"/>
             </a:avLst>
           </a:prstGeom>
           <a:solidFill>
@@ -20213,106 +22143,14 @@
       </p:sp>
       <p:sp>
         <p:nvSpPr>
-          <p:cNvPr id="10" name="Rounded Rectangle 9"/>
-          <p:cNvSpPr/>
-          <p:nvPr/>
-        </p:nvSpPr>
-        <p:spPr>
-          <a:xfrm>
-            <a:off x="841247" y="2075688"/>
-            <a:ext cx="457200" cy="457200"/>
-          </a:xfrm>
-          <a:prstGeom prst="roundRect">
-            <a:avLst>
-              <a:gd name="adj" fmla="val 32000"/>
-            </a:avLst>
-          </a:prstGeom>
-          <a:solidFill>
-            <a:srgbClr val="D97757"/>
-          </a:solidFill>
-          <a:ln>
-            <a:noFill/>
-          </a:ln>
-          <a:effectLst/>
-        </p:spPr>
-        <p:style>
-          <a:lnRef idx="1">
-            <a:schemeClr val="accent1"/>
-          </a:lnRef>
-          <a:fillRef idx="3">
-            <a:schemeClr val="accent1"/>
-          </a:fillRef>
-          <a:effectRef idx="2">
-            <a:schemeClr val="accent1"/>
-          </a:effectRef>
-          <a:fontRef idx="minor">
-            <a:schemeClr val="lt1"/>
-          </a:fontRef>
-        </p:style>
-        <p:txBody>
-          <a:bodyPr rtlCol="0" anchor="ctr"/>
-          <a:lstStyle/>
-          <a:p>
-            <a:pPr algn="ctr"/>
-            <a:endParaRPr/>
-          </a:p>
-        </p:txBody>
-      </p:sp>
-      <p:sp>
-        <p:nvSpPr>
-          <p:cNvPr id="11" name="TextBox 10"/>
+          <p:cNvPr id="33" name="TextBox 32"/>
           <p:cNvSpPr txBox="1"/>
           <p:nvPr/>
         </p:nvSpPr>
         <p:spPr>
           <a:xfrm>
-            <a:off x="841247" y="2093976"/>
-            <a:ext cx="457200" cy="420624"/>
-          </a:xfrm>
-          <a:prstGeom prst="rect">
-            <a:avLst/>
-          </a:prstGeom>
-          <a:noFill/>
-        </p:spPr>
-        <p:txBody>
-          <a:bodyPr wrap="square" lIns="0" tIns="0" rIns="0" bIns="0" anchor="ctr">
-            <a:spAutoFit/>
-          </a:bodyPr>
-          <a:lstStyle/>
-          <a:p>
-            <a:pPr algn="ctr">
-              <a:lnSpc>
-                <a:spcPct val="100000"/>
-              </a:lnSpc>
-              <a:spcBef>
-                <a:spcPts val="0"/>
-              </a:spcBef>
-              <a:spcAft>
-                <a:spcPts val="400"/>
-              </a:spcAft>
-            </a:pPr>
-            <a:r>
-              <a:rPr sz="1500" b="1">
-                <a:solidFill>
-                  <a:srgbClr val="0F141A"/>
-                </a:solidFill>
-                <a:latin typeface="Segoe UI"/>
-              </a:rPr>
-              <a:t>1</a:t>
-            </a:r>
-          </a:p>
-        </p:txBody>
-      </p:sp>
-      <p:sp>
-        <p:nvSpPr>
-          <p:cNvPr id="12" name="TextBox 11"/>
-          <p:cNvSpPr txBox="1"/>
-          <p:nvPr/>
-        </p:nvSpPr>
-        <p:spPr>
-          <a:xfrm>
-            <a:off x="1463040" y="2020824"/>
-            <a:ext cx="4375404" cy="365760"/>
+            <a:off x="6537960" y="4041647"/>
+            <a:ext cx="4800600" cy="365760"/>
           </a:xfrm>
           <a:prstGeom prst="rect">
             <a:avLst/>
@@ -20337,27 +22175,81 @@
               </a:spcAft>
             </a:pPr>
             <a:r>
-              <a:rPr sz="1450" b="1">
-                <a:solidFill>
-                  <a:srgbClr val="E8EAED"/>
-                </a:solidFill>
-                <a:latin typeface="Segoe UI"/>
-              </a:rPr>
-              <a:t>Native (recomendado)</a:t>
-            </a:r>
-          </a:p>
-        </p:txBody>
-      </p:sp>
-      <p:sp>
-        <p:nvSpPr>
-          <p:cNvPr id="13" name="TextBox 12"/>
+              <a:rPr sz="1400" b="1" dirty="0">
+                <a:solidFill>
+                  <a:srgbClr val="7AA2C7"/>
+                </a:solidFill>
+                <a:latin typeface="Segoe UI"/>
+              </a:rPr>
+              <a:t>El </a:t>
+            </a:r>
+            <a:r>
+              <a:rPr sz="1400" b="1" dirty="0" err="1">
+                <a:solidFill>
+                  <a:srgbClr val="7AA2C7"/>
+                </a:solidFill>
+                <a:latin typeface="Segoe UI"/>
+              </a:rPr>
+              <a:t>mismo</a:t>
+            </a:r>
+            <a:r>
+              <a:rPr sz="1400" b="1" dirty="0">
+                <a:solidFill>
+                  <a:srgbClr val="7AA2C7"/>
+                </a:solidFill>
+                <a:latin typeface="Segoe UI"/>
+              </a:rPr>
+              <a:t> motor </a:t>
+            </a:r>
+            <a:r>
+              <a:rPr sz="1400" b="1" dirty="0" err="1">
+                <a:solidFill>
+                  <a:srgbClr val="7AA2C7"/>
+                </a:solidFill>
+                <a:latin typeface="Segoe UI"/>
+              </a:rPr>
+              <a:t>en</a:t>
+            </a:r>
+            <a:r>
+              <a:rPr sz="1400" b="1" dirty="0">
+                <a:solidFill>
+                  <a:srgbClr val="7AA2C7"/>
+                </a:solidFill>
+                <a:latin typeface="Segoe UI"/>
+              </a:rPr>
+              <a:t> </a:t>
+            </a:r>
+            <a:r>
+              <a:rPr sz="1400" b="1" dirty="0" err="1">
+                <a:solidFill>
+                  <a:srgbClr val="7AA2C7"/>
+                </a:solidFill>
+                <a:latin typeface="Segoe UI"/>
+              </a:rPr>
+              <a:t>todas</a:t>
+            </a:r>
+            <a:r>
+              <a:rPr sz="1400" b="1" dirty="0">
+                <a:solidFill>
+                  <a:srgbClr val="7AA2C7"/>
+                </a:solidFill>
+                <a:latin typeface="Segoe UI"/>
+              </a:rPr>
+              <a:t> partes</a:t>
+            </a:r>
+          </a:p>
+        </p:txBody>
+      </p:sp>
+      <p:sp>
+        <p:nvSpPr>
+          <p:cNvPr id="34" name="TextBox 33"/>
           <p:cNvSpPr txBox="1"/>
           <p:nvPr/>
         </p:nvSpPr>
         <p:spPr>
           <a:xfrm>
-            <a:off x="1463040" y="2331720"/>
-            <a:ext cx="4375404" cy="411479"/>
+            <a:off x="6583680" y="4325112"/>
+            <a:ext cx="4754880" cy="731519"/>
           </a:xfrm>
           <a:prstGeom prst="rect">
             <a:avLst/>
@@ -20372,1210 +22264,184 @@
           <a:p>
             <a:pPr algn="l">
               <a:lnSpc>
-                <a:spcPct val="102000"/>
-              </a:lnSpc>
-              <a:spcBef>
-                <a:spcPts val="0"/>
-              </a:spcBef>
-              <a:spcAft>
-                <a:spcPts val="400"/>
-              </a:spcAft>
-            </a:pPr>
-            <a:r>
-              <a:rPr sz="1100" b="0">
-                <a:solidFill>
-                  <a:srgbClr val="9AA4B2"/>
-                </a:solidFill>
-                <a:latin typeface="Segoe UI"/>
-              </a:rPr>
-              <a:t>curl -fsSL https://claude.ai/install.sh | bash — macOS/Linux/WSL, con auto-update.</a:t>
-            </a:r>
-          </a:p>
-        </p:txBody>
-      </p:sp>
-      <p:sp>
-        <p:nvSpPr>
-          <p:cNvPr id="14" name="Rounded Rectangle 13"/>
-          <p:cNvSpPr/>
-          <p:nvPr/>
-        </p:nvSpPr>
-        <p:spPr>
-          <a:xfrm>
-            <a:off x="6231636" y="1874519"/>
-            <a:ext cx="5335524" cy="914400"/>
-          </a:xfrm>
-          <a:prstGeom prst="roundRect">
-            <a:avLst>
-              <a:gd name="adj" fmla="val 9000"/>
-            </a:avLst>
-          </a:prstGeom>
-          <a:solidFill>
-            <a:srgbClr val="1A212B"/>
-          </a:solidFill>
-          <a:ln w="9525">
-            <a:solidFill>
-              <a:srgbClr val="2E3948"/>
-            </a:solidFill>
-          </a:ln>
-          <a:effectLst/>
-        </p:spPr>
-        <p:style>
-          <a:lnRef idx="1">
-            <a:schemeClr val="accent1"/>
-          </a:lnRef>
-          <a:fillRef idx="3">
-            <a:schemeClr val="accent1"/>
-          </a:fillRef>
-          <a:effectRef idx="2">
-            <a:schemeClr val="accent1"/>
-          </a:effectRef>
-          <a:fontRef idx="minor">
-            <a:schemeClr val="lt1"/>
-          </a:fontRef>
-        </p:style>
-        <p:txBody>
-          <a:bodyPr rtlCol="0" anchor="ctr"/>
-          <a:lstStyle/>
-          <a:p>
-            <a:pPr algn="ctr"/>
-            <a:endParaRPr/>
-          </a:p>
-        </p:txBody>
-      </p:sp>
-      <p:sp>
-        <p:nvSpPr>
-          <p:cNvPr id="15" name="Rounded Rectangle 14"/>
-          <p:cNvSpPr/>
-          <p:nvPr/>
-        </p:nvSpPr>
-        <p:spPr>
-          <a:xfrm>
-            <a:off x="6432804" y="2075688"/>
-            <a:ext cx="457200" cy="457200"/>
-          </a:xfrm>
-          <a:prstGeom prst="roundRect">
-            <a:avLst>
-              <a:gd name="adj" fmla="val 32000"/>
-            </a:avLst>
-          </a:prstGeom>
-          <a:solidFill>
-            <a:srgbClr val="D97757"/>
-          </a:solidFill>
-          <a:ln>
-            <a:noFill/>
-          </a:ln>
-          <a:effectLst/>
-        </p:spPr>
-        <p:style>
-          <a:lnRef idx="1">
-            <a:schemeClr val="accent1"/>
-          </a:lnRef>
-          <a:fillRef idx="3">
-            <a:schemeClr val="accent1"/>
-          </a:fillRef>
-          <a:effectRef idx="2">
-            <a:schemeClr val="accent1"/>
-          </a:effectRef>
-          <a:fontRef idx="minor">
-            <a:schemeClr val="lt1"/>
-          </a:fontRef>
-        </p:style>
-        <p:txBody>
-          <a:bodyPr rtlCol="0" anchor="ctr"/>
-          <a:lstStyle/>
-          <a:p>
-            <a:pPr algn="ctr"/>
-            <a:endParaRPr/>
-          </a:p>
-        </p:txBody>
-      </p:sp>
-      <p:sp>
-        <p:nvSpPr>
-          <p:cNvPr id="16" name="TextBox 15"/>
-          <p:cNvSpPr txBox="1"/>
-          <p:nvPr/>
-        </p:nvSpPr>
-        <p:spPr>
-          <a:xfrm>
-            <a:off x="6432804" y="2093976"/>
-            <a:ext cx="457200" cy="420624"/>
-          </a:xfrm>
-          <a:prstGeom prst="rect">
-            <a:avLst/>
-          </a:prstGeom>
-          <a:noFill/>
-        </p:spPr>
-        <p:txBody>
-          <a:bodyPr wrap="square" lIns="0" tIns="0" rIns="0" bIns="0" anchor="ctr">
-            <a:spAutoFit/>
-          </a:bodyPr>
-          <a:lstStyle/>
-          <a:p>
-            <a:pPr algn="ctr">
-              <a:lnSpc>
-                <a:spcPct val="100000"/>
-              </a:lnSpc>
-              <a:spcBef>
-                <a:spcPts val="0"/>
-              </a:spcBef>
-              <a:spcAft>
-                <a:spcPts val="400"/>
-              </a:spcAft>
-            </a:pPr>
-            <a:r>
-              <a:rPr sz="1500" b="1">
-                <a:solidFill>
-                  <a:srgbClr val="0F141A"/>
-                </a:solidFill>
-                <a:latin typeface="Segoe UI"/>
-              </a:rPr>
-              <a:t>2</a:t>
-            </a:r>
-          </a:p>
-        </p:txBody>
-      </p:sp>
-      <p:sp>
-        <p:nvSpPr>
-          <p:cNvPr id="17" name="TextBox 16"/>
-          <p:cNvSpPr txBox="1"/>
-          <p:nvPr/>
-        </p:nvSpPr>
-        <p:spPr>
-          <a:xfrm>
-            <a:off x="7054596" y="2020824"/>
-            <a:ext cx="4375404" cy="365760"/>
-          </a:xfrm>
-          <a:prstGeom prst="rect">
-            <a:avLst/>
-          </a:prstGeom>
-          <a:noFill/>
-        </p:spPr>
-        <p:txBody>
-          <a:bodyPr wrap="square" lIns="0" tIns="0" rIns="0" bIns="0" anchor="t">
-            <a:spAutoFit/>
-          </a:bodyPr>
-          <a:lstStyle/>
-          <a:p>
-            <a:pPr algn="l">
-              <a:lnSpc>
-                <a:spcPct val="100000"/>
-              </a:lnSpc>
-              <a:spcBef>
-                <a:spcPts val="0"/>
-              </a:spcBef>
-              <a:spcAft>
-                <a:spcPts val="400"/>
-              </a:spcAft>
-            </a:pPr>
-            <a:r>
-              <a:rPr sz="1450" b="1">
+                <a:spcPct val="105000"/>
+              </a:lnSpc>
+              <a:spcBef>
+                <a:spcPts val="0"/>
+              </a:spcBef>
+              <a:spcAft>
+                <a:spcPts val="600"/>
+              </a:spcAft>
+            </a:pPr>
+            <a:r>
+              <a:rPr sz="1150" b="1" dirty="0">
+                <a:solidFill>
+                  <a:srgbClr val="7AA2C7"/>
+                </a:solidFill>
+                <a:latin typeface="Segoe UI"/>
+              </a:rPr>
+              <a:t>▸  </a:t>
+            </a:r>
+            <a:r>
+              <a:rPr sz="1150" b="0" dirty="0">
                 <a:solidFill>
                   <a:srgbClr val="E8EAED"/>
                 </a:solidFill>
                 <a:latin typeface="Segoe UI"/>
               </a:rPr>
-              <a:t>Homebrew</a:t>
-            </a:r>
-          </a:p>
-        </p:txBody>
-      </p:sp>
-      <p:sp>
-        <p:nvSpPr>
-          <p:cNvPr id="18" name="TextBox 17"/>
-          <p:cNvSpPr txBox="1"/>
-          <p:nvPr/>
-        </p:nvSpPr>
-        <p:spPr>
-          <a:xfrm>
-            <a:off x="7054596" y="2331720"/>
-            <a:ext cx="4375404" cy="411479"/>
-          </a:xfrm>
-          <a:prstGeom prst="rect">
-            <a:avLst/>
-          </a:prstGeom>
-          <a:noFill/>
-        </p:spPr>
-        <p:txBody>
-          <a:bodyPr wrap="square" lIns="0" tIns="0" rIns="0" bIns="0" anchor="t">
-            <a:spAutoFit/>
-          </a:bodyPr>
-          <a:lstStyle/>
-          <a:p>
-            <a:pPr algn="l">
-              <a:lnSpc>
-                <a:spcPct val="102000"/>
-              </a:lnSpc>
-              <a:spcBef>
-                <a:spcPts val="0"/>
-              </a:spcBef>
-              <a:spcAft>
-                <a:spcPts val="400"/>
-              </a:spcAft>
-            </a:pPr>
-            <a:r>
-              <a:rPr sz="1100" b="0">
-                <a:solidFill>
-                  <a:srgbClr val="9AA4B2"/>
-                </a:solidFill>
-                <a:latin typeface="Segoe UI"/>
-              </a:rPr>
-              <a:t>brew install --cask claude-code (brew upgrade para actualizar).</a:t>
-            </a:r>
-          </a:p>
-        </p:txBody>
-      </p:sp>
-      <p:sp>
-        <p:nvSpPr>
-          <p:cNvPr id="19" name="Rounded Rectangle 18"/>
-          <p:cNvSpPr/>
-          <p:nvPr/>
-        </p:nvSpPr>
-        <p:spPr>
-          <a:xfrm>
-            <a:off x="640080" y="3044952"/>
-            <a:ext cx="5335524" cy="914400"/>
-          </a:xfrm>
-          <a:prstGeom prst="roundRect">
-            <a:avLst>
-              <a:gd name="adj" fmla="val 9000"/>
-            </a:avLst>
-          </a:prstGeom>
-          <a:solidFill>
-            <a:srgbClr val="1A212B"/>
-          </a:solidFill>
-          <a:ln w="9525">
-            <a:solidFill>
-              <a:srgbClr val="2E3948"/>
-            </a:solidFill>
-          </a:ln>
-          <a:effectLst/>
-        </p:spPr>
-        <p:style>
-          <a:lnRef idx="1">
-            <a:schemeClr val="accent1"/>
-          </a:lnRef>
-          <a:fillRef idx="3">
-            <a:schemeClr val="accent1"/>
-          </a:fillRef>
-          <a:effectRef idx="2">
-            <a:schemeClr val="accent1"/>
-          </a:effectRef>
-          <a:fontRef idx="minor">
-            <a:schemeClr val="lt1"/>
-          </a:fontRef>
-        </p:style>
-        <p:txBody>
-          <a:bodyPr rtlCol="0" anchor="ctr"/>
-          <a:lstStyle/>
-          <a:p>
-            <a:pPr algn="ctr"/>
-            <a:endParaRPr/>
-          </a:p>
-        </p:txBody>
-      </p:sp>
-      <p:sp>
-        <p:nvSpPr>
-          <p:cNvPr id="20" name="Rounded Rectangle 19"/>
-          <p:cNvSpPr/>
-          <p:nvPr/>
-        </p:nvSpPr>
-        <p:spPr>
-          <a:xfrm>
-            <a:off x="841247" y="3246120"/>
-            <a:ext cx="457200" cy="457200"/>
-          </a:xfrm>
-          <a:prstGeom prst="roundRect">
-            <a:avLst>
-              <a:gd name="adj" fmla="val 32000"/>
-            </a:avLst>
-          </a:prstGeom>
-          <a:solidFill>
-            <a:srgbClr val="D97757"/>
-          </a:solidFill>
-          <a:ln>
-            <a:noFill/>
-          </a:ln>
-          <a:effectLst/>
-        </p:spPr>
-        <p:style>
-          <a:lnRef idx="1">
-            <a:schemeClr val="accent1"/>
-          </a:lnRef>
-          <a:fillRef idx="3">
-            <a:schemeClr val="accent1"/>
-          </a:fillRef>
-          <a:effectRef idx="2">
-            <a:schemeClr val="accent1"/>
-          </a:effectRef>
-          <a:fontRef idx="minor">
-            <a:schemeClr val="lt1"/>
-          </a:fontRef>
-        </p:style>
-        <p:txBody>
-          <a:bodyPr rtlCol="0" anchor="ctr"/>
-          <a:lstStyle/>
-          <a:p>
-            <a:pPr algn="ctr"/>
-            <a:endParaRPr/>
-          </a:p>
-        </p:txBody>
-      </p:sp>
-      <p:sp>
-        <p:nvSpPr>
-          <p:cNvPr id="21" name="TextBox 20"/>
-          <p:cNvSpPr txBox="1"/>
-          <p:nvPr/>
-        </p:nvSpPr>
-        <p:spPr>
-          <a:xfrm>
-            <a:off x="841247" y="3264408"/>
-            <a:ext cx="457200" cy="420624"/>
-          </a:xfrm>
-          <a:prstGeom prst="rect">
-            <a:avLst/>
-          </a:prstGeom>
-          <a:noFill/>
-        </p:spPr>
-        <p:txBody>
-          <a:bodyPr wrap="square" lIns="0" tIns="0" rIns="0" bIns="0" anchor="ctr">
-            <a:spAutoFit/>
-          </a:bodyPr>
-          <a:lstStyle/>
-          <a:p>
-            <a:pPr algn="ctr">
-              <a:lnSpc>
-                <a:spcPct val="100000"/>
-              </a:lnSpc>
-              <a:spcBef>
-                <a:spcPts val="0"/>
-              </a:spcBef>
-              <a:spcAft>
-                <a:spcPts val="400"/>
-              </a:spcAft>
-            </a:pPr>
-            <a:r>
-              <a:rPr sz="1500" b="1">
-                <a:solidFill>
-                  <a:srgbClr val="0F141A"/>
-                </a:solidFill>
-                <a:latin typeface="Segoe UI"/>
-              </a:rPr>
-              <a:t>3</a:t>
-            </a:r>
-          </a:p>
-        </p:txBody>
-      </p:sp>
-      <p:sp>
-        <p:nvSpPr>
-          <p:cNvPr id="22" name="TextBox 21"/>
-          <p:cNvSpPr txBox="1"/>
-          <p:nvPr/>
-        </p:nvSpPr>
-        <p:spPr>
-          <a:xfrm>
-            <a:off x="1463040" y="3191256"/>
-            <a:ext cx="4375404" cy="365760"/>
-          </a:xfrm>
-          <a:prstGeom prst="rect">
-            <a:avLst/>
-          </a:prstGeom>
-          <a:noFill/>
-        </p:spPr>
-        <p:txBody>
-          <a:bodyPr wrap="square" lIns="0" tIns="0" rIns="0" bIns="0" anchor="t">
-            <a:spAutoFit/>
-          </a:bodyPr>
-          <a:lstStyle/>
-          <a:p>
-            <a:pPr algn="l">
-              <a:lnSpc>
-                <a:spcPct val="100000"/>
-              </a:lnSpc>
-              <a:spcBef>
-                <a:spcPts val="0"/>
-              </a:spcBef>
-              <a:spcAft>
-                <a:spcPts val="400"/>
-              </a:spcAft>
-            </a:pPr>
-            <a:r>
-              <a:rPr sz="1450" b="1">
+              <a:t>Terminal · VS Code / Cursor · JetBrains</a:t>
+            </a:r>
+          </a:p>
+          <a:p>
+            <a:pPr algn="l">
+              <a:lnSpc>
+                <a:spcPct val="105000"/>
+              </a:lnSpc>
+              <a:spcBef>
+                <a:spcPts val="0"/>
+              </a:spcBef>
+              <a:spcAft>
+                <a:spcPts val="600"/>
+              </a:spcAft>
+            </a:pPr>
+            <a:r>
+              <a:rPr sz="1150" b="1" dirty="0">
+                <a:solidFill>
+                  <a:srgbClr val="7AA2C7"/>
+                </a:solidFill>
+                <a:latin typeface="Segoe UI"/>
+              </a:rPr>
+              <a:t>▸  </a:t>
+            </a:r>
+            <a:r>
+              <a:rPr sz="1150" b="0" dirty="0">
                 <a:solidFill>
                   <a:srgbClr val="E8EAED"/>
                 </a:solidFill>
                 <a:latin typeface="Segoe UI"/>
               </a:rPr>
-              <a:t>Windows</a:t>
-            </a:r>
-          </a:p>
-        </p:txBody>
-      </p:sp>
-      <p:sp>
-        <p:nvSpPr>
-          <p:cNvPr id="23" name="TextBox 22"/>
-          <p:cNvSpPr txBox="1"/>
-          <p:nvPr/>
-        </p:nvSpPr>
-        <p:spPr>
-          <a:xfrm>
-            <a:off x="1463040" y="3502152"/>
-            <a:ext cx="4375404" cy="411479"/>
-          </a:xfrm>
-          <a:prstGeom prst="rect">
-            <a:avLst/>
-          </a:prstGeom>
-          <a:noFill/>
-        </p:spPr>
-        <p:txBody>
-          <a:bodyPr wrap="square" lIns="0" tIns="0" rIns="0" bIns="0" anchor="t">
-            <a:spAutoFit/>
-          </a:bodyPr>
-          <a:lstStyle/>
-          <a:p>
-            <a:pPr algn="l">
-              <a:lnSpc>
-                <a:spcPct val="102000"/>
-              </a:lnSpc>
-              <a:spcBef>
-                <a:spcPts val="0"/>
-              </a:spcBef>
-              <a:spcAft>
-                <a:spcPts val="400"/>
-              </a:spcAft>
-            </a:pPr>
-            <a:r>
-              <a:rPr sz="1100" b="0">
-                <a:solidFill>
-                  <a:srgbClr val="9AA4B2"/>
-                </a:solidFill>
-                <a:latin typeface="Segoe UI"/>
-              </a:rPr>
-              <a:t>winget install Anthropic.ClaudeCode · o el instalador PowerShell.</a:t>
-            </a:r>
-          </a:p>
-        </p:txBody>
-      </p:sp>
-      <p:sp>
-        <p:nvSpPr>
-          <p:cNvPr id="24" name="Rounded Rectangle 23"/>
-          <p:cNvSpPr/>
-          <p:nvPr/>
-        </p:nvSpPr>
-        <p:spPr>
-          <a:xfrm>
-            <a:off x="6231636" y="3044952"/>
-            <a:ext cx="5335524" cy="914400"/>
-          </a:xfrm>
-          <a:prstGeom prst="roundRect">
-            <a:avLst>
-              <a:gd name="adj" fmla="val 9000"/>
-            </a:avLst>
-          </a:prstGeom>
-          <a:solidFill>
-            <a:srgbClr val="1A212B"/>
-          </a:solidFill>
-          <a:ln w="9525">
-            <a:solidFill>
-              <a:srgbClr val="2E3948"/>
-            </a:solidFill>
-          </a:ln>
-          <a:effectLst/>
-        </p:spPr>
-        <p:style>
-          <a:lnRef idx="1">
-            <a:schemeClr val="accent1"/>
-          </a:lnRef>
-          <a:fillRef idx="3">
-            <a:schemeClr val="accent1"/>
-          </a:fillRef>
-          <a:effectRef idx="2">
-            <a:schemeClr val="accent1"/>
-          </a:effectRef>
-          <a:fontRef idx="minor">
-            <a:schemeClr val="lt1"/>
-          </a:fontRef>
-        </p:style>
-        <p:txBody>
-          <a:bodyPr rtlCol="0" anchor="ctr"/>
-          <a:lstStyle/>
-          <a:p>
-            <a:pPr algn="ctr"/>
-            <a:endParaRPr/>
-          </a:p>
-        </p:txBody>
-      </p:sp>
-      <p:sp>
-        <p:nvSpPr>
-          <p:cNvPr id="25" name="Rounded Rectangle 24"/>
-          <p:cNvSpPr/>
-          <p:nvPr/>
-        </p:nvSpPr>
-        <p:spPr>
-          <a:xfrm>
-            <a:off x="6432804" y="3246120"/>
-            <a:ext cx="457200" cy="457200"/>
-          </a:xfrm>
-          <a:prstGeom prst="roundRect">
-            <a:avLst>
-              <a:gd name="adj" fmla="val 32000"/>
-            </a:avLst>
-          </a:prstGeom>
-          <a:solidFill>
-            <a:srgbClr val="D97757"/>
-          </a:solidFill>
-          <a:ln>
-            <a:noFill/>
-          </a:ln>
-          <a:effectLst/>
-        </p:spPr>
-        <p:style>
-          <a:lnRef idx="1">
-            <a:schemeClr val="accent1"/>
-          </a:lnRef>
-          <a:fillRef idx="3">
-            <a:schemeClr val="accent1"/>
-          </a:fillRef>
-          <a:effectRef idx="2">
-            <a:schemeClr val="accent1"/>
-          </a:effectRef>
-          <a:fontRef idx="minor">
-            <a:schemeClr val="lt1"/>
-          </a:fontRef>
-        </p:style>
-        <p:txBody>
-          <a:bodyPr rtlCol="0" anchor="ctr"/>
-          <a:lstStyle/>
-          <a:p>
-            <a:pPr algn="ctr"/>
-            <a:endParaRPr/>
-          </a:p>
-        </p:txBody>
-      </p:sp>
-      <p:sp>
-        <p:nvSpPr>
-          <p:cNvPr id="26" name="TextBox 25"/>
-          <p:cNvSpPr txBox="1"/>
-          <p:nvPr/>
-        </p:nvSpPr>
-        <p:spPr>
-          <a:xfrm>
-            <a:off x="6432804" y="3264408"/>
-            <a:ext cx="457200" cy="420624"/>
-          </a:xfrm>
-          <a:prstGeom prst="rect">
-            <a:avLst/>
-          </a:prstGeom>
-          <a:noFill/>
-        </p:spPr>
-        <p:txBody>
-          <a:bodyPr wrap="square" lIns="0" tIns="0" rIns="0" bIns="0" anchor="ctr">
-            <a:spAutoFit/>
-          </a:bodyPr>
-          <a:lstStyle/>
-          <a:p>
-            <a:pPr algn="ctr">
-              <a:lnSpc>
-                <a:spcPct val="100000"/>
-              </a:lnSpc>
-              <a:spcBef>
-                <a:spcPts val="0"/>
-              </a:spcBef>
-              <a:spcAft>
-                <a:spcPts val="400"/>
-              </a:spcAft>
-            </a:pPr>
-            <a:r>
-              <a:rPr sz="1500" b="1">
-                <a:solidFill>
-                  <a:srgbClr val="0F141A"/>
-                </a:solidFill>
-                <a:latin typeface="Segoe UI"/>
-              </a:rPr>
-              <a:t>4</a:t>
-            </a:r>
-          </a:p>
-        </p:txBody>
-      </p:sp>
-      <p:sp>
-        <p:nvSpPr>
-          <p:cNvPr id="27" name="TextBox 26"/>
-          <p:cNvSpPr txBox="1"/>
-          <p:nvPr/>
-        </p:nvSpPr>
-        <p:spPr>
-          <a:xfrm>
-            <a:off x="7054596" y="3191256"/>
-            <a:ext cx="4375404" cy="365760"/>
-          </a:xfrm>
-          <a:prstGeom prst="rect">
-            <a:avLst/>
-          </a:prstGeom>
-          <a:noFill/>
-        </p:spPr>
-        <p:txBody>
-          <a:bodyPr wrap="square" lIns="0" tIns="0" rIns="0" bIns="0" anchor="t">
-            <a:spAutoFit/>
-          </a:bodyPr>
-          <a:lstStyle/>
-          <a:p>
-            <a:pPr algn="l">
-              <a:lnSpc>
-                <a:spcPct val="100000"/>
-              </a:lnSpc>
-              <a:spcBef>
-                <a:spcPts val="0"/>
-              </a:spcBef>
-              <a:spcAft>
-                <a:spcPts val="400"/>
-              </a:spcAft>
-            </a:pPr>
-            <a:r>
-              <a:rPr sz="1450" b="1">
+              <a:t>Desktop (diffs, </a:t>
+            </a:r>
+            <a:r>
+              <a:rPr sz="1150" b="0" dirty="0" err="1">
                 <a:solidFill>
                   <a:srgbClr val="E8EAED"/>
                 </a:solidFill>
                 <a:latin typeface="Segoe UI"/>
               </a:rPr>
-              <a:t>Linux pkg</a:t>
-            </a:r>
-          </a:p>
-        </p:txBody>
-      </p:sp>
-      <p:sp>
-        <p:nvSpPr>
-          <p:cNvPr id="28" name="TextBox 27"/>
-          <p:cNvSpPr txBox="1"/>
-          <p:nvPr/>
-        </p:nvSpPr>
-        <p:spPr>
-          <a:xfrm>
-            <a:off x="7054596" y="3502152"/>
-            <a:ext cx="4375404" cy="411479"/>
-          </a:xfrm>
-          <a:prstGeom prst="rect">
-            <a:avLst/>
-          </a:prstGeom>
-          <a:noFill/>
-        </p:spPr>
-        <p:txBody>
-          <a:bodyPr wrap="square" lIns="0" tIns="0" rIns="0" bIns="0" anchor="t">
-            <a:spAutoFit/>
-          </a:bodyPr>
-          <a:lstStyle/>
-          <a:p>
-            <a:pPr algn="l">
-              <a:lnSpc>
-                <a:spcPct val="102000"/>
-              </a:lnSpc>
-              <a:spcBef>
-                <a:spcPts val="0"/>
-              </a:spcBef>
-              <a:spcAft>
-                <a:spcPts val="400"/>
-              </a:spcAft>
-            </a:pPr>
-            <a:r>
-              <a:rPr sz="1100" b="0">
-                <a:solidFill>
-                  <a:srgbClr val="9AA4B2"/>
-                </a:solidFill>
-                <a:latin typeface="Segoe UI"/>
-              </a:rPr>
-              <a:t>apt / dnf / apk en Debian, Fedora, RHEL, Alpine.</a:t>
-            </a:r>
-          </a:p>
-        </p:txBody>
-      </p:sp>
-      <p:sp>
-        <p:nvSpPr>
-          <p:cNvPr id="29" name="TextBox 28"/>
-          <p:cNvSpPr txBox="1"/>
-          <p:nvPr/>
-        </p:nvSpPr>
-        <p:spPr>
-          <a:xfrm>
-            <a:off x="762002" y="4133088"/>
-            <a:ext cx="5394960" cy="274320"/>
-          </a:xfrm>
-          <a:prstGeom prst="rect">
-            <a:avLst/>
-          </a:prstGeom>
-          <a:noFill/>
-        </p:spPr>
-        <p:txBody>
-          <a:bodyPr wrap="square" lIns="0" tIns="0" rIns="0" bIns="0" anchor="t">
-            <a:spAutoFit/>
-          </a:bodyPr>
-          <a:lstStyle/>
-          <a:p>
-            <a:pPr algn="l">
-              <a:lnSpc>
-                <a:spcPct val="100000"/>
-              </a:lnSpc>
-              <a:spcBef>
-                <a:spcPts val="0"/>
-              </a:spcBef>
-              <a:spcAft>
-                <a:spcPts val="400"/>
-              </a:spcAft>
-            </a:pPr>
-            <a:r>
-              <a:rPr sz="1100" b="1" dirty="0" err="1">
+              <a:t>sesiones</a:t>
+            </a:r>
+            <a:r>
+              <a:rPr sz="1150" b="0" dirty="0">
+                <a:solidFill>
+                  <a:srgbClr val="E8EAED"/>
+                </a:solidFill>
+                <a:latin typeface="Segoe UI"/>
+              </a:rPr>
+              <a:t> </a:t>
+            </a:r>
+            <a:r>
+              <a:rPr sz="1150" b="0" dirty="0" err="1">
+                <a:solidFill>
+                  <a:srgbClr val="E8EAED"/>
+                </a:solidFill>
+                <a:latin typeface="Segoe UI"/>
+              </a:rPr>
+              <a:t>en</a:t>
+            </a:r>
+            <a:r>
+              <a:rPr sz="1150" b="0" dirty="0">
+                <a:solidFill>
+                  <a:srgbClr val="E8EAED"/>
+                </a:solidFill>
+                <a:latin typeface="Segoe UI"/>
+              </a:rPr>
+              <a:t> </a:t>
+            </a:r>
+            <a:r>
+              <a:rPr sz="1150" b="0" dirty="0" err="1">
+                <a:solidFill>
+                  <a:srgbClr val="E8EAED"/>
+                </a:solidFill>
+                <a:latin typeface="Segoe UI"/>
+              </a:rPr>
+              <a:t>paralelo</a:t>
+            </a:r>
+            <a:r>
+              <a:rPr sz="1150" b="0" dirty="0">
+                <a:solidFill>
+                  <a:srgbClr val="E8EAED"/>
+                </a:solidFill>
+                <a:latin typeface="Segoe UI"/>
+              </a:rPr>
+              <a:t>)</a:t>
+            </a:r>
+          </a:p>
+          <a:p>
+            <a:pPr algn="l">
+              <a:lnSpc>
+                <a:spcPct val="105000"/>
+              </a:lnSpc>
+              <a:spcBef>
+                <a:spcPts val="0"/>
+              </a:spcBef>
+              <a:spcAft>
+                <a:spcPts val="600"/>
+              </a:spcAft>
+            </a:pPr>
+            <a:r>
+              <a:rPr sz="1150" b="1" dirty="0">
                 <a:solidFill>
                   <a:srgbClr val="7AA2C7"/>
                 </a:solidFill>
                 <a:latin typeface="Segoe UI"/>
               </a:rPr>
-              <a:t>Arrancar</a:t>
-            </a:r>
-            <a:r>
-              <a:rPr sz="1100" b="1" dirty="0">
-                <a:solidFill>
-                  <a:srgbClr val="7AA2C7"/>
+              <a:t>▸  </a:t>
+            </a:r>
+            <a:r>
+              <a:rPr sz="1150" b="0" dirty="0">
+                <a:solidFill>
+                  <a:srgbClr val="E8EAED"/>
+                </a:solidFill>
+                <a:latin typeface="Segoe UI"/>
+              </a:rPr>
+              <a:t>Web (claude.ai/code, </a:t>
+            </a:r>
+            <a:r>
+              <a:rPr sz="1150" b="0" dirty="0" err="1">
+                <a:solidFill>
+                  <a:srgbClr val="E8EAED"/>
+                </a:solidFill>
+                <a:latin typeface="Segoe UI"/>
+              </a:rPr>
+              <a:t>tareas</a:t>
+            </a:r>
+            <a:r>
+              <a:rPr sz="1150" b="0" dirty="0">
+                <a:solidFill>
+                  <a:srgbClr val="E8EAED"/>
                 </a:solidFill>
                 <a:latin typeface="Segoe UI"/>
               </a:rPr>
               <a:t> </a:t>
             </a:r>
             <a:r>
-              <a:rPr sz="1100" b="1" dirty="0" err="1">
-                <a:solidFill>
-                  <a:srgbClr val="7AA2C7"/>
-                </a:solidFill>
-                <a:latin typeface="Segoe UI"/>
-              </a:rPr>
-              <a:t>en</a:t>
-            </a:r>
-            <a:r>
-              <a:rPr sz="1100" b="1" dirty="0">
-                <a:solidFill>
-                  <a:srgbClr val="7AA2C7"/>
-                </a:solidFill>
-                <a:latin typeface="Segoe UI"/>
-              </a:rPr>
-              <a:t> </a:t>
-            </a:r>
-            <a:r>
-              <a:rPr sz="1100" b="1" dirty="0" err="1">
-                <a:solidFill>
-                  <a:srgbClr val="7AA2C7"/>
-                </a:solidFill>
-                <a:latin typeface="Segoe UI"/>
-              </a:rPr>
-              <a:t>cualquier</a:t>
-            </a:r>
-            <a:r>
-              <a:rPr sz="1100" b="1" dirty="0">
-                <a:solidFill>
-                  <a:srgbClr val="7AA2C7"/>
-                </a:solidFill>
-                <a:latin typeface="Segoe UI"/>
-              </a:rPr>
-              <a:t> </a:t>
-            </a:r>
-            <a:r>
-              <a:rPr sz="1100" b="1" dirty="0" err="1">
-                <a:solidFill>
-                  <a:srgbClr val="7AA2C7"/>
-                </a:solidFill>
-                <a:latin typeface="Segoe UI"/>
-              </a:rPr>
-              <a:t>proyecto</a:t>
-            </a:r>
-            <a:endParaRPr sz="1100" b="1" dirty="0">
-              <a:solidFill>
-                <a:srgbClr val="7AA2C7"/>
-              </a:solidFill>
-              <a:latin typeface="Segoe UI"/>
-            </a:endParaRPr>
-          </a:p>
-        </p:txBody>
-      </p:sp>
-      <p:sp>
-        <p:nvSpPr>
-          <p:cNvPr id="31" name="TextBox 30"/>
-          <p:cNvSpPr txBox="1"/>
-          <p:nvPr/>
-        </p:nvSpPr>
-        <p:spPr>
-          <a:xfrm>
-            <a:off x="838962" y="4343399"/>
-            <a:ext cx="4937760" cy="634276"/>
-          </a:xfrm>
-          <a:prstGeom prst="rect">
-            <a:avLst/>
-          </a:prstGeom>
-          <a:noFill/>
-        </p:spPr>
-        <p:txBody>
-          <a:bodyPr wrap="square" lIns="0" tIns="0" rIns="0" bIns="0" anchor="t">
-            <a:spAutoFit/>
-          </a:bodyPr>
-          <a:lstStyle/>
-          <a:p>
-            <a:pPr algn="l">
-              <a:lnSpc>
-                <a:spcPct val="112000"/>
-              </a:lnSpc>
-              <a:spcBef>
-                <a:spcPts val="0"/>
-              </a:spcBef>
-              <a:spcAft>
-                <a:spcPts val="200"/>
-              </a:spcAft>
-            </a:pPr>
-            <a:endParaRPr lang="en-US" sz="1150" b="0" dirty="0">
-              <a:solidFill>
-                <a:srgbClr val="E8EAED"/>
-              </a:solidFill>
-              <a:latin typeface="Consolas"/>
-            </a:endParaRPr>
-          </a:p>
-          <a:p>
-            <a:pPr algn="l">
-              <a:lnSpc>
-                <a:spcPct val="112000"/>
-              </a:lnSpc>
-              <a:spcBef>
-                <a:spcPts val="0"/>
-              </a:spcBef>
-              <a:spcAft>
-                <a:spcPts val="200"/>
-              </a:spcAft>
-            </a:pPr>
+              <a:rPr sz="1150" b="0" dirty="0" err="1">
+                <a:solidFill>
+                  <a:srgbClr val="E8EAED"/>
+                </a:solidFill>
+                <a:latin typeface="Segoe UI"/>
+              </a:rPr>
+              <a:t>largas</a:t>
+            </a:r>
             <a:r>
               <a:rPr sz="1150" b="0" dirty="0">
                 <a:solidFill>
                   <a:srgbClr val="E8EAED"/>
                 </a:solidFill>
-                <a:latin typeface="Consolas"/>
-              </a:rPr>
-              <a:t>cd </a:t>
-            </a:r>
-            <a:r>
-              <a:rPr sz="1150" b="0" dirty="0" err="1">
-                <a:solidFill>
-                  <a:srgbClr val="E8EAED"/>
-                </a:solidFill>
-                <a:latin typeface="Consolas"/>
-              </a:rPr>
-              <a:t>tu-proyecto</a:t>
-            </a:r>
-            <a:endParaRPr sz="1150" b="0" dirty="0">
-              <a:solidFill>
-                <a:srgbClr val="E8EAED"/>
-              </a:solidFill>
-              <a:latin typeface="Consolas"/>
-            </a:endParaRPr>
-          </a:p>
-          <a:p>
-            <a:pPr algn="l">
-              <a:lnSpc>
-                <a:spcPct val="112000"/>
-              </a:lnSpc>
-              <a:spcBef>
-                <a:spcPts val="0"/>
-              </a:spcBef>
-              <a:spcAft>
-                <a:spcPts val="200"/>
-              </a:spcAft>
-            </a:pPr>
-            <a:r>
-              <a:rPr sz="1150" b="0" dirty="0" err="1">
-                <a:solidFill>
-                  <a:srgbClr val="E8EAED"/>
-                </a:solidFill>
-                <a:latin typeface="Consolas"/>
-              </a:rPr>
-              <a:t>claude</a:t>
-            </a:r>
-            <a:r>
-              <a:rPr sz="1150" b="0" dirty="0">
-                <a:solidFill>
-                  <a:srgbClr val="E8EAED"/>
-                </a:solidFill>
-                <a:latin typeface="Consolas"/>
-              </a:rPr>
-              <a:t>            # login la 1ª </a:t>
-            </a:r>
-            <a:r>
-              <a:rPr sz="1150" b="0" dirty="0" err="1">
-                <a:solidFill>
-                  <a:srgbClr val="E8EAED"/>
-                </a:solidFill>
-                <a:latin typeface="Consolas"/>
-              </a:rPr>
-              <a:t>vez</a:t>
-            </a:r>
-            <a:endParaRPr sz="1150" b="0" dirty="0">
-              <a:solidFill>
-                <a:srgbClr val="E8EAED"/>
-              </a:solidFill>
-              <a:latin typeface="Consolas"/>
-            </a:endParaRPr>
-          </a:p>
-        </p:txBody>
-      </p:sp>
-      <p:sp>
-        <p:nvSpPr>
-          <p:cNvPr id="32" name="Rounded Rectangle 31"/>
-          <p:cNvSpPr/>
-          <p:nvPr/>
-        </p:nvSpPr>
-        <p:spPr>
-          <a:xfrm>
-            <a:off x="6217920" y="3995928"/>
-            <a:ext cx="5257800" cy="1554480"/>
-          </a:xfrm>
-          <a:prstGeom prst="roundRect">
-            <a:avLst>
-              <a:gd name="adj" fmla="val 6000"/>
-            </a:avLst>
-          </a:prstGeom>
-          <a:solidFill>
-            <a:srgbClr val="1A212B"/>
-          </a:solidFill>
-          <a:ln w="9525">
-            <a:solidFill>
-              <a:srgbClr val="2E3948"/>
-            </a:solidFill>
-          </a:ln>
-          <a:effectLst/>
-        </p:spPr>
-        <p:style>
-          <a:lnRef idx="1">
-            <a:schemeClr val="accent1"/>
-          </a:lnRef>
-          <a:fillRef idx="3">
-            <a:schemeClr val="accent1"/>
-          </a:fillRef>
-          <a:effectRef idx="2">
-            <a:schemeClr val="accent1"/>
-          </a:effectRef>
-          <a:fontRef idx="minor">
-            <a:schemeClr val="lt1"/>
-          </a:fontRef>
-        </p:style>
-        <p:txBody>
-          <a:bodyPr rtlCol="0" anchor="ctr"/>
-          <a:lstStyle/>
-          <a:p>
-            <a:pPr algn="ctr"/>
-            <a:endParaRPr/>
-          </a:p>
-        </p:txBody>
-      </p:sp>
-      <p:sp>
-        <p:nvSpPr>
-          <p:cNvPr id="33" name="TextBox 32"/>
-          <p:cNvSpPr txBox="1"/>
-          <p:nvPr/>
-        </p:nvSpPr>
-        <p:spPr>
-          <a:xfrm>
-            <a:off x="6583680" y="4041647"/>
-            <a:ext cx="4800600" cy="365760"/>
-          </a:xfrm>
-          <a:prstGeom prst="rect">
-            <a:avLst/>
-          </a:prstGeom>
-          <a:noFill/>
-        </p:spPr>
-        <p:txBody>
-          <a:bodyPr wrap="square" lIns="0" tIns="0" rIns="0" bIns="0" anchor="t">
-            <a:spAutoFit/>
-          </a:bodyPr>
-          <a:lstStyle/>
-          <a:p>
-            <a:pPr algn="l">
-              <a:lnSpc>
-                <a:spcPct val="100000"/>
-              </a:lnSpc>
-              <a:spcBef>
-                <a:spcPts val="0"/>
-              </a:spcBef>
-              <a:spcAft>
-                <a:spcPts val="400"/>
-              </a:spcAft>
-            </a:pPr>
-            <a:r>
-              <a:rPr sz="1400" b="1" dirty="0">
-                <a:solidFill>
-                  <a:srgbClr val="7AA2C7"/>
-                </a:solidFill>
-                <a:latin typeface="Segoe UI"/>
-              </a:rPr>
-              <a:t>El </a:t>
-            </a:r>
-            <a:r>
-              <a:rPr sz="1400" b="1" dirty="0" err="1">
-                <a:solidFill>
-                  <a:srgbClr val="7AA2C7"/>
-                </a:solidFill>
-                <a:latin typeface="Segoe UI"/>
-              </a:rPr>
-              <a:t>mismo</a:t>
-            </a:r>
-            <a:r>
-              <a:rPr sz="1400" b="1" dirty="0">
-                <a:solidFill>
-                  <a:srgbClr val="7AA2C7"/>
-                </a:solidFill>
-                <a:latin typeface="Segoe UI"/>
-              </a:rPr>
-              <a:t> motor </a:t>
-            </a:r>
-            <a:r>
-              <a:rPr sz="1400" b="1" dirty="0" err="1">
-                <a:solidFill>
-                  <a:srgbClr val="7AA2C7"/>
-                </a:solidFill>
-                <a:latin typeface="Segoe UI"/>
-              </a:rPr>
-              <a:t>en</a:t>
-            </a:r>
-            <a:r>
-              <a:rPr sz="1400" b="1" dirty="0">
-                <a:solidFill>
-                  <a:srgbClr val="7AA2C7"/>
-                </a:solidFill>
-                <a:latin typeface="Segoe UI"/>
-              </a:rPr>
-              <a:t> </a:t>
-            </a:r>
-            <a:r>
-              <a:rPr sz="1400" b="1" dirty="0" err="1">
-                <a:solidFill>
-                  <a:srgbClr val="7AA2C7"/>
-                </a:solidFill>
-                <a:latin typeface="Segoe UI"/>
-              </a:rPr>
-              <a:t>todas</a:t>
-            </a:r>
-            <a:r>
-              <a:rPr sz="1400" b="1" dirty="0">
-                <a:solidFill>
-                  <a:srgbClr val="7AA2C7"/>
-                </a:solidFill>
-                <a:latin typeface="Segoe UI"/>
-              </a:rPr>
-              <a:t> partes</a:t>
-            </a:r>
-          </a:p>
-        </p:txBody>
-      </p:sp>
-      <p:sp>
-        <p:nvSpPr>
-          <p:cNvPr id="34" name="TextBox 33"/>
-          <p:cNvSpPr txBox="1"/>
-          <p:nvPr/>
-        </p:nvSpPr>
-        <p:spPr>
-          <a:xfrm>
-            <a:off x="6583680" y="4325112"/>
-            <a:ext cx="4754880" cy="731519"/>
-          </a:xfrm>
-          <a:prstGeom prst="rect">
-            <a:avLst/>
-          </a:prstGeom>
-          <a:noFill/>
-        </p:spPr>
-        <p:txBody>
-          <a:bodyPr wrap="square" lIns="0" tIns="0" rIns="0" bIns="0" anchor="t">
-            <a:spAutoFit/>
-          </a:bodyPr>
-          <a:lstStyle/>
-          <a:p>
-            <a:pPr algn="l">
-              <a:lnSpc>
-                <a:spcPct val="105000"/>
-              </a:lnSpc>
-              <a:spcBef>
-                <a:spcPts val="0"/>
-              </a:spcBef>
-              <a:spcAft>
-                <a:spcPts val="600"/>
-              </a:spcAft>
-            </a:pPr>
-            <a:r>
-              <a:rPr sz="1150" b="1">
-                <a:solidFill>
-                  <a:srgbClr val="7AA2C7"/>
-                </a:solidFill>
-                <a:latin typeface="Segoe UI"/>
-              </a:rPr>
-              <a:t>▸  </a:t>
-            </a:r>
-            <a:r>
-              <a:rPr sz="1150" b="0">
-                <a:solidFill>
-                  <a:srgbClr val="E8EAED"/>
-                </a:solidFill>
-                <a:latin typeface="Segoe UI"/>
-              </a:rPr>
-              <a:t>Terminal · VS Code / Cursor · JetBrains</a:t>
-            </a:r>
-          </a:p>
-          <a:p>
-            <a:pPr algn="l">
-              <a:lnSpc>
-                <a:spcPct val="105000"/>
-              </a:lnSpc>
-              <a:spcBef>
-                <a:spcPts val="0"/>
-              </a:spcBef>
-              <a:spcAft>
-                <a:spcPts val="600"/>
-              </a:spcAft>
-            </a:pPr>
-            <a:r>
-              <a:rPr sz="1150" b="1">
-                <a:solidFill>
-                  <a:srgbClr val="7AA2C7"/>
-                </a:solidFill>
-                <a:latin typeface="Segoe UI"/>
-              </a:rPr>
-              <a:t>▸  </a:t>
-            </a:r>
-            <a:r>
-              <a:rPr sz="1150" b="0">
-                <a:solidFill>
-                  <a:srgbClr val="E8EAED"/>
-                </a:solidFill>
-                <a:latin typeface="Segoe UI"/>
-              </a:rPr>
-              <a:t>Desktop (diffs, sesiones en paralelo)</a:t>
-            </a:r>
-          </a:p>
-          <a:p>
-            <a:pPr algn="l">
-              <a:lnSpc>
-                <a:spcPct val="105000"/>
-              </a:lnSpc>
-              <a:spcBef>
-                <a:spcPts val="0"/>
-              </a:spcBef>
-              <a:spcAft>
-                <a:spcPts val="600"/>
-              </a:spcAft>
-            </a:pPr>
-            <a:r>
-              <a:rPr sz="1150" b="1">
-                <a:solidFill>
-                  <a:srgbClr val="7AA2C7"/>
-                </a:solidFill>
-                <a:latin typeface="Segoe UI"/>
-              </a:rPr>
-              <a:t>▸  </a:t>
-            </a:r>
-            <a:r>
-              <a:rPr sz="1150" b="0">
-                <a:solidFill>
-                  <a:srgbClr val="E8EAED"/>
-                </a:solidFill>
-                <a:latin typeface="Segoe UI"/>
-              </a:rPr>
-              <a:t>Web (claude.ai/code, tareas largas)</a:t>
+                <a:latin typeface="Segoe UI"/>
+              </a:rPr>
+              <a:t>)</a:t>
             </a:r>
           </a:p>
         </p:txBody>
@@ -21736,6 +22602,111 @@
               </a:rPr>
               <a:t> ”</a:t>
             </a:r>
+          </a:p>
+        </p:txBody>
+      </p:sp>
+      <p:sp>
+        <p:nvSpPr>
+          <p:cNvPr id="29" name="TextBox 28"/>
+          <p:cNvSpPr txBox="1"/>
+          <p:nvPr/>
+        </p:nvSpPr>
+        <p:spPr>
+          <a:xfrm>
+            <a:off x="882396" y="4087368"/>
+            <a:ext cx="5394960" cy="274320"/>
+          </a:xfrm>
+          <a:prstGeom prst="rect">
+            <a:avLst/>
+          </a:prstGeom>
+          <a:noFill/>
+        </p:spPr>
+        <p:txBody>
+          <a:bodyPr wrap="square" lIns="0" tIns="0" rIns="0" bIns="0" anchor="t">
+            <a:spAutoFit/>
+          </a:bodyPr>
+          <a:lstStyle/>
+          <a:p>
+            <a:pPr algn="l">
+              <a:lnSpc>
+                <a:spcPct val="100000"/>
+              </a:lnSpc>
+              <a:spcBef>
+                <a:spcPts val="0"/>
+              </a:spcBef>
+              <a:spcAft>
+                <a:spcPts val="400"/>
+              </a:spcAft>
+            </a:pPr>
+            <a:r>
+              <a:rPr sz="1100" b="1" dirty="0" err="1">
+                <a:solidFill>
+                  <a:srgbClr val="7AA2C7"/>
+                </a:solidFill>
+                <a:latin typeface="Segoe UI"/>
+              </a:rPr>
+              <a:t>Arrancar</a:t>
+            </a:r>
+            <a:r>
+              <a:rPr sz="1100" b="1" dirty="0">
+                <a:solidFill>
+                  <a:srgbClr val="7AA2C7"/>
+                </a:solidFill>
+                <a:latin typeface="Segoe UI"/>
+              </a:rPr>
+              <a:t> </a:t>
+            </a:r>
+            <a:r>
+              <a:rPr sz="1100" b="1" dirty="0" err="1">
+                <a:solidFill>
+                  <a:srgbClr val="7AA2C7"/>
+                </a:solidFill>
+                <a:latin typeface="Segoe UI"/>
+              </a:rPr>
+              <a:t>en</a:t>
+            </a:r>
+            <a:r>
+              <a:rPr sz="1100" b="1" dirty="0">
+                <a:solidFill>
+                  <a:srgbClr val="7AA2C7"/>
+                </a:solidFill>
+                <a:latin typeface="Segoe UI"/>
+              </a:rPr>
+              <a:t> </a:t>
+            </a:r>
+            <a:r>
+              <a:rPr sz="1100" b="1" dirty="0" err="1">
+                <a:solidFill>
+                  <a:srgbClr val="7AA2C7"/>
+                </a:solidFill>
+                <a:latin typeface="Segoe UI"/>
+              </a:rPr>
+              <a:t>cualquier</a:t>
+            </a:r>
+            <a:r>
+              <a:rPr sz="1100" b="1" dirty="0">
+                <a:solidFill>
+                  <a:srgbClr val="7AA2C7"/>
+                </a:solidFill>
+                <a:latin typeface="Segoe UI"/>
+              </a:rPr>
+              <a:t> </a:t>
+            </a:r>
+            <a:r>
+              <a:rPr sz="1100" b="1" dirty="0" err="1">
+                <a:solidFill>
+                  <a:srgbClr val="7AA2C7"/>
+                </a:solidFill>
+                <a:latin typeface="Segoe UI"/>
+              </a:rPr>
+              <a:t>proyecto</a:t>
+            </a:r>
+            <a:endParaRPr sz="1100" b="1" dirty="0">
+              <a:solidFill>
+                <a:srgbClr val="7AA2C7"/>
+              </a:solidFill>
+              <a:latin typeface="Segoe UI"/>
+            </a:endParaRPr>
           </a:p>
         </p:txBody>
       </p:sp>

--- a/presentacion/Claude_Code_Presentacion.pptx
+++ b/presentacion/Claude_Code_Presentacion.pptx
@@ -5,28 +5,28 @@
     <p:sldMasterId id="2147483648" r:id="rId1"/>
   </p:sldMasterIdLst>
   <p:sldIdLst>
-    <p:sldId id="256" r:id="rId2"/>
-    <p:sldId id="257" r:id="rId3"/>
-    <p:sldId id="258" r:id="rId4"/>
-    <p:sldId id="259" r:id="rId5"/>
-    <p:sldId id="260" r:id="rId6"/>
-    <p:sldId id="261" r:id="rId7"/>
-    <p:sldId id="262" r:id="rId8"/>
-    <p:sldId id="263" r:id="rId9"/>
-    <p:sldId id="264" r:id="rId10"/>
-    <p:sldId id="265" r:id="rId11"/>
-    <p:sldId id="266" r:id="rId12"/>
-    <p:sldId id="267" r:id="rId13"/>
-    <p:sldId id="268" r:id="rId14"/>
-    <p:sldId id="269" r:id="rId15"/>
-    <p:sldId id="270" r:id="rId16"/>
-    <p:sldId id="271" r:id="rId17"/>
-    <p:sldId id="272" r:id="rId18"/>
-    <p:sldId id="273" r:id="rId19"/>
-    <p:sldId id="274" r:id="rId20"/>
-    <p:sldId id="275" r:id="rId21"/>
+    <p:sldId id="256" r:id="rId7"/>
+    <p:sldId id="257" r:id="rId8"/>
+    <p:sldId id="258" r:id="rId9"/>
+    <p:sldId id="259" r:id="rId10"/>
+    <p:sldId id="260" r:id="rId11"/>
+    <p:sldId id="261" r:id="rId12"/>
+    <p:sldId id="262" r:id="rId13"/>
+    <p:sldId id="263" r:id="rId14"/>
+    <p:sldId id="264" r:id="rId15"/>
+    <p:sldId id="265" r:id="rId16"/>
+    <p:sldId id="266" r:id="rId17"/>
+    <p:sldId id="267" r:id="rId18"/>
+    <p:sldId id="268" r:id="rId19"/>
+    <p:sldId id="269" r:id="rId20"/>
+    <p:sldId id="270" r:id="rId21"/>
+    <p:sldId id="271" r:id="rId22"/>
+    <p:sldId id="272" r:id="rId23"/>
+    <p:sldId id="273" r:id="rId24"/>
+    <p:sldId id="274" r:id="rId25"/>
+    <p:sldId id="275" r:id="rId26"/>
   </p:sldIdLst>
-  <p:sldSz cx="12192000" cy="6858000"/>
+  <p:sldSz cx="12191695" cy="6858000" type="screen4x3"/>
   <p:notesSz cx="6858000" cy="9144000"/>
   <p:defaultTextStyle>
     <a:defPPr>
@@ -123,22 +123,6 @@
       </a:defRPr>
     </a:lvl9pPr>
   </p:defaultTextStyle>
-  <p:extLst>
-    <p:ext uri="{EFAFB233-063F-42B5-8137-9DF3F51BA10A}">
-      <p15:sldGuideLst xmlns:p15="http://schemas.microsoft.com/office/powerpoint/2012/main">
-        <p15:guide id="1" orient="horz" pos="2160">
-          <p15:clr>
-            <a:srgbClr val="A4A3A4"/>
-          </p15:clr>
-        </p15:guide>
-        <p15:guide id="2" pos="2880">
-          <p15:clr>
-            <a:srgbClr val="A4A3A4"/>
-          </p15:clr>
-        </p15:guide>
-      </p15:sldGuideLst>
-    </p:ext>
-  </p:extLst>
 </p:presentation>
 </file>
 
@@ -180,9 +164,10 @@
           <a:lstStyle/>
           <a:p>
             <a:r>
-              <a:rPr lang="en-US"/>
+              <a:rPr lang="en-US" smtClean="0"/>
               <a:t>Click to edit Master title style</a:t>
             </a:r>
+            <a:endParaRPr lang="en-US"/>
           </a:p>
         </p:txBody>
       </p:sp>
@@ -298,9 +283,10 @@
           </a:lstStyle>
           <a:p>
             <a:r>
-              <a:rPr lang="en-US"/>
+              <a:rPr lang="en-US" smtClean="0"/>
               <a:t>Click to edit Master subtitle style</a:t>
             </a:r>
+            <a:endParaRPr lang="en-US"/>
           </a:p>
         </p:txBody>
       </p:sp>
@@ -321,7 +307,7 @@
           <a:p>
             <a:fld id="{5BCAD085-E8A6-8845-BD4E-CB4CCA059FC4}" type="datetimeFigureOut">
               <a:rPr lang="en-US" smtClean="0"/>
-              <a:t>7/9/2026</a:t>
+              <a:t>1/27/13</a:t>
             </a:fld>
             <a:endParaRPr lang="en-US"/>
           </a:p>
@@ -415,9 +401,10 @@
           <a:lstStyle/>
           <a:p>
             <a:r>
-              <a:rPr lang="en-US"/>
+              <a:rPr lang="en-US" smtClean="0"/>
               <a:t>Click to edit Master title style</a:t>
             </a:r>
+            <a:endParaRPr lang="en-US"/>
           </a:p>
         </p:txBody>
       </p:sp>
@@ -438,37 +425,38 @@
           <a:p>
             <a:pPr lvl="0"/>
             <a:r>
-              <a:rPr lang="en-US"/>
+              <a:rPr lang="en-US" smtClean="0"/>
               <a:t>Click to edit Master text styles</a:t>
             </a:r>
           </a:p>
           <a:p>
             <a:pPr lvl="1"/>
             <a:r>
-              <a:rPr lang="en-US"/>
+              <a:rPr lang="en-US" smtClean="0"/>
               <a:t>Second level</a:t>
             </a:r>
           </a:p>
           <a:p>
             <a:pPr lvl="2"/>
             <a:r>
-              <a:rPr lang="en-US"/>
+              <a:rPr lang="en-US" smtClean="0"/>
               <a:t>Third level</a:t>
             </a:r>
           </a:p>
           <a:p>
             <a:pPr lvl="3"/>
             <a:r>
-              <a:rPr lang="en-US"/>
+              <a:rPr lang="en-US" smtClean="0"/>
               <a:t>Fourth level</a:t>
             </a:r>
           </a:p>
           <a:p>
             <a:pPr lvl="4"/>
             <a:r>
-              <a:rPr lang="en-US"/>
+              <a:rPr lang="en-US" smtClean="0"/>
               <a:t>Fifth level</a:t>
             </a:r>
+            <a:endParaRPr lang="en-US"/>
           </a:p>
         </p:txBody>
       </p:sp>
@@ -489,7 +477,7 @@
           <a:p>
             <a:fld id="{5BCAD085-E8A6-8845-BD4E-CB4CCA059FC4}" type="datetimeFigureOut">
               <a:rPr lang="en-US" smtClean="0"/>
-              <a:t>7/9/2026</a:t>
+              <a:t>1/27/13</a:t>
             </a:fld>
             <a:endParaRPr lang="en-US"/>
           </a:p>
@@ -588,9 +576,10 @@
           <a:lstStyle/>
           <a:p>
             <a:r>
-              <a:rPr lang="en-US"/>
+              <a:rPr lang="en-US" smtClean="0"/>
               <a:t>Click to edit Master title style</a:t>
             </a:r>
+            <a:endParaRPr lang="en-US"/>
           </a:p>
         </p:txBody>
       </p:sp>
@@ -616,37 +605,38 @@
           <a:p>
             <a:pPr lvl="0"/>
             <a:r>
-              <a:rPr lang="en-US"/>
+              <a:rPr lang="en-US" smtClean="0"/>
               <a:t>Click to edit Master text styles</a:t>
             </a:r>
           </a:p>
           <a:p>
             <a:pPr lvl="1"/>
             <a:r>
-              <a:rPr lang="en-US"/>
+              <a:rPr lang="en-US" smtClean="0"/>
               <a:t>Second level</a:t>
             </a:r>
           </a:p>
           <a:p>
             <a:pPr lvl="2"/>
             <a:r>
-              <a:rPr lang="en-US"/>
+              <a:rPr lang="en-US" smtClean="0"/>
               <a:t>Third level</a:t>
             </a:r>
           </a:p>
           <a:p>
             <a:pPr lvl="3"/>
             <a:r>
-              <a:rPr lang="en-US"/>
+              <a:rPr lang="en-US" smtClean="0"/>
               <a:t>Fourth level</a:t>
             </a:r>
           </a:p>
           <a:p>
             <a:pPr lvl="4"/>
             <a:r>
-              <a:rPr lang="en-US"/>
+              <a:rPr lang="en-US" smtClean="0"/>
               <a:t>Fifth level</a:t>
             </a:r>
+            <a:endParaRPr lang="en-US"/>
           </a:p>
         </p:txBody>
       </p:sp>
@@ -667,7 +657,7 @@
           <a:p>
             <a:fld id="{5BCAD085-E8A6-8845-BD4E-CB4CCA059FC4}" type="datetimeFigureOut">
               <a:rPr lang="en-US" smtClean="0"/>
-              <a:t>7/9/2026</a:t>
+              <a:t>1/27/13</a:t>
             </a:fld>
             <a:endParaRPr lang="en-US"/>
           </a:p>
@@ -761,9 +751,10 @@
           <a:lstStyle/>
           <a:p>
             <a:r>
-              <a:rPr lang="en-US"/>
+              <a:rPr lang="en-US" smtClean="0"/>
               <a:t>Click to edit Master title style</a:t>
             </a:r>
+            <a:endParaRPr lang="en-US"/>
           </a:p>
         </p:txBody>
       </p:sp>
@@ -784,37 +775,38 @@
           <a:p>
             <a:pPr lvl="0"/>
             <a:r>
-              <a:rPr lang="en-US"/>
+              <a:rPr lang="en-US" smtClean="0"/>
               <a:t>Click to edit Master text styles</a:t>
             </a:r>
           </a:p>
           <a:p>
             <a:pPr lvl="1"/>
             <a:r>
-              <a:rPr lang="en-US"/>
+              <a:rPr lang="en-US" smtClean="0"/>
               <a:t>Second level</a:t>
             </a:r>
           </a:p>
           <a:p>
             <a:pPr lvl="2"/>
             <a:r>
-              <a:rPr lang="en-US"/>
+              <a:rPr lang="en-US" smtClean="0"/>
               <a:t>Third level</a:t>
             </a:r>
           </a:p>
           <a:p>
             <a:pPr lvl="3"/>
             <a:r>
-              <a:rPr lang="en-US"/>
+              <a:rPr lang="en-US" smtClean="0"/>
               <a:t>Fourth level</a:t>
             </a:r>
           </a:p>
           <a:p>
             <a:pPr lvl="4"/>
             <a:r>
-              <a:rPr lang="en-US"/>
+              <a:rPr lang="en-US" smtClean="0"/>
               <a:t>Fifth level</a:t>
             </a:r>
+            <a:endParaRPr lang="en-US"/>
           </a:p>
         </p:txBody>
       </p:sp>
@@ -835,7 +827,7 @@
           <a:p>
             <a:fld id="{5BCAD085-E8A6-8845-BD4E-CB4CCA059FC4}" type="datetimeFigureOut">
               <a:rPr lang="en-US" smtClean="0"/>
-              <a:t>7/9/2026</a:t>
+              <a:t>1/27/13</a:t>
             </a:fld>
             <a:endParaRPr lang="en-US"/>
           </a:p>
@@ -938,9 +930,10 @@
           </a:lstStyle>
           <a:p>
             <a:r>
-              <a:rPr lang="en-US"/>
+              <a:rPr lang="en-US" smtClean="0"/>
               <a:t>Click to edit Master title style</a:t>
             </a:r>
+            <a:endParaRPr lang="en-US"/>
           </a:p>
         </p:txBody>
       </p:sp>
@@ -1057,7 +1050,7 @@
           <a:p>
             <a:pPr lvl="0"/>
             <a:r>
-              <a:rPr lang="en-US"/>
+              <a:rPr lang="en-US" smtClean="0"/>
               <a:t>Click to edit Master text styles</a:t>
             </a:r>
           </a:p>
@@ -1080,7 +1073,7 @@
           <a:p>
             <a:fld id="{5BCAD085-E8A6-8845-BD4E-CB4CCA059FC4}" type="datetimeFigureOut">
               <a:rPr lang="en-US" smtClean="0"/>
-              <a:t>7/9/2026</a:t>
+              <a:t>1/27/13</a:t>
             </a:fld>
             <a:endParaRPr lang="en-US"/>
           </a:p>
@@ -1174,9 +1167,10 @@
           <a:lstStyle/>
           <a:p>
             <a:r>
-              <a:rPr lang="en-US"/>
+              <a:rPr lang="en-US" smtClean="0"/>
               <a:t>Click to edit Master title style</a:t>
             </a:r>
+            <a:endParaRPr lang="en-US"/>
           </a:p>
         </p:txBody>
       </p:sp>
@@ -1230,37 +1224,38 @@
           <a:p>
             <a:pPr lvl="0"/>
             <a:r>
-              <a:rPr lang="en-US"/>
+              <a:rPr lang="en-US" smtClean="0"/>
               <a:t>Click to edit Master text styles</a:t>
             </a:r>
           </a:p>
           <a:p>
             <a:pPr lvl="1"/>
             <a:r>
-              <a:rPr lang="en-US"/>
+              <a:rPr lang="en-US" smtClean="0"/>
               <a:t>Second level</a:t>
             </a:r>
           </a:p>
           <a:p>
             <a:pPr lvl="2"/>
             <a:r>
-              <a:rPr lang="en-US"/>
+              <a:rPr lang="en-US" smtClean="0"/>
               <a:t>Third level</a:t>
             </a:r>
           </a:p>
           <a:p>
             <a:pPr lvl="3"/>
             <a:r>
-              <a:rPr lang="en-US"/>
+              <a:rPr lang="en-US" smtClean="0"/>
               <a:t>Fourth level</a:t>
             </a:r>
           </a:p>
           <a:p>
             <a:pPr lvl="4"/>
             <a:r>
-              <a:rPr lang="en-US"/>
+              <a:rPr lang="en-US" smtClean="0"/>
               <a:t>Fifth level</a:t>
             </a:r>
+            <a:endParaRPr lang="en-US"/>
           </a:p>
         </p:txBody>
       </p:sp>
@@ -1314,37 +1309,38 @@
           <a:p>
             <a:pPr lvl="0"/>
             <a:r>
-              <a:rPr lang="en-US"/>
+              <a:rPr lang="en-US" smtClean="0"/>
               <a:t>Click to edit Master text styles</a:t>
             </a:r>
           </a:p>
           <a:p>
             <a:pPr lvl="1"/>
             <a:r>
-              <a:rPr lang="en-US"/>
+              <a:rPr lang="en-US" smtClean="0"/>
               <a:t>Second level</a:t>
             </a:r>
           </a:p>
           <a:p>
             <a:pPr lvl="2"/>
             <a:r>
-              <a:rPr lang="en-US"/>
+              <a:rPr lang="en-US" smtClean="0"/>
               <a:t>Third level</a:t>
             </a:r>
           </a:p>
           <a:p>
             <a:pPr lvl="3"/>
             <a:r>
-              <a:rPr lang="en-US"/>
+              <a:rPr lang="en-US" smtClean="0"/>
               <a:t>Fourth level</a:t>
             </a:r>
           </a:p>
           <a:p>
             <a:pPr lvl="4"/>
             <a:r>
-              <a:rPr lang="en-US"/>
+              <a:rPr lang="en-US" smtClean="0"/>
               <a:t>Fifth level</a:t>
             </a:r>
+            <a:endParaRPr lang="en-US"/>
           </a:p>
         </p:txBody>
       </p:sp>
@@ -1365,7 +1361,7 @@
           <a:p>
             <a:fld id="{5BCAD085-E8A6-8845-BD4E-CB4CCA059FC4}" type="datetimeFigureOut">
               <a:rPr lang="en-US" smtClean="0"/>
-              <a:t>7/9/2026</a:t>
+              <a:t>1/27/13</a:t>
             </a:fld>
             <a:endParaRPr lang="en-US"/>
           </a:p>
@@ -1463,9 +1459,10 @@
           </a:lstStyle>
           <a:p>
             <a:r>
-              <a:rPr lang="en-US"/>
+              <a:rPr lang="en-US" smtClean="0"/>
               <a:t>Click to edit Master title style</a:t>
             </a:r>
+            <a:endParaRPr lang="en-US"/>
           </a:p>
         </p:txBody>
       </p:sp>
@@ -1528,7 +1525,7 @@
           <a:p>
             <a:pPr lvl="0"/>
             <a:r>
-              <a:rPr lang="en-US"/>
+              <a:rPr lang="en-US" smtClean="0"/>
               <a:t>Click to edit Master text styles</a:t>
             </a:r>
           </a:p>
@@ -1584,37 +1581,38 @@
           <a:p>
             <a:pPr lvl="0"/>
             <a:r>
-              <a:rPr lang="en-US"/>
+              <a:rPr lang="en-US" smtClean="0"/>
               <a:t>Click to edit Master text styles</a:t>
             </a:r>
           </a:p>
           <a:p>
             <a:pPr lvl="1"/>
             <a:r>
-              <a:rPr lang="en-US"/>
+              <a:rPr lang="en-US" smtClean="0"/>
               <a:t>Second level</a:t>
             </a:r>
           </a:p>
           <a:p>
             <a:pPr lvl="2"/>
             <a:r>
-              <a:rPr lang="en-US"/>
+              <a:rPr lang="en-US" smtClean="0"/>
               <a:t>Third level</a:t>
             </a:r>
           </a:p>
           <a:p>
             <a:pPr lvl="3"/>
             <a:r>
-              <a:rPr lang="en-US"/>
+              <a:rPr lang="en-US" smtClean="0"/>
               <a:t>Fourth level</a:t>
             </a:r>
           </a:p>
           <a:p>
             <a:pPr lvl="4"/>
             <a:r>
-              <a:rPr lang="en-US"/>
+              <a:rPr lang="en-US" smtClean="0"/>
               <a:t>Fifth level</a:t>
             </a:r>
+            <a:endParaRPr lang="en-US"/>
           </a:p>
         </p:txBody>
       </p:sp>
@@ -1677,7 +1675,7 @@
           <a:p>
             <a:pPr lvl="0"/>
             <a:r>
-              <a:rPr lang="en-US"/>
+              <a:rPr lang="en-US" smtClean="0"/>
               <a:t>Click to edit Master text styles</a:t>
             </a:r>
           </a:p>
@@ -1733,37 +1731,38 @@
           <a:p>
             <a:pPr lvl="0"/>
             <a:r>
-              <a:rPr lang="en-US"/>
+              <a:rPr lang="en-US" smtClean="0"/>
               <a:t>Click to edit Master text styles</a:t>
             </a:r>
           </a:p>
           <a:p>
             <a:pPr lvl="1"/>
             <a:r>
-              <a:rPr lang="en-US"/>
+              <a:rPr lang="en-US" smtClean="0"/>
               <a:t>Second level</a:t>
             </a:r>
           </a:p>
           <a:p>
             <a:pPr lvl="2"/>
             <a:r>
-              <a:rPr lang="en-US"/>
+              <a:rPr lang="en-US" smtClean="0"/>
               <a:t>Third level</a:t>
             </a:r>
           </a:p>
           <a:p>
             <a:pPr lvl="3"/>
             <a:r>
-              <a:rPr lang="en-US"/>
+              <a:rPr lang="en-US" smtClean="0"/>
               <a:t>Fourth level</a:t>
             </a:r>
           </a:p>
           <a:p>
             <a:pPr lvl="4"/>
             <a:r>
-              <a:rPr lang="en-US"/>
+              <a:rPr lang="en-US" smtClean="0"/>
               <a:t>Fifth level</a:t>
             </a:r>
+            <a:endParaRPr lang="en-US"/>
           </a:p>
         </p:txBody>
       </p:sp>
@@ -1784,7 +1783,7 @@
           <a:p>
             <a:fld id="{5BCAD085-E8A6-8845-BD4E-CB4CCA059FC4}" type="datetimeFigureOut">
               <a:rPr lang="en-US" smtClean="0"/>
-              <a:t>7/9/2026</a:t>
+              <a:t>1/27/13</a:t>
             </a:fld>
             <a:endParaRPr lang="en-US"/>
           </a:p>
@@ -1878,9 +1877,10 @@
           <a:lstStyle/>
           <a:p>
             <a:r>
-              <a:rPr lang="en-US"/>
+              <a:rPr lang="en-US" smtClean="0"/>
               <a:t>Click to edit Master title style</a:t>
             </a:r>
+            <a:endParaRPr lang="en-US"/>
           </a:p>
         </p:txBody>
       </p:sp>
@@ -1901,7 +1901,7 @@
           <a:p>
             <a:fld id="{5BCAD085-E8A6-8845-BD4E-CB4CCA059FC4}" type="datetimeFigureOut">
               <a:rPr lang="en-US" smtClean="0"/>
-              <a:t>7/9/2026</a:t>
+              <a:t>1/27/13</a:t>
             </a:fld>
             <a:endParaRPr lang="en-US"/>
           </a:p>
@@ -1996,7 +1996,7 @@
           <a:p>
             <a:fld id="{5BCAD085-E8A6-8845-BD4E-CB4CCA059FC4}" type="datetimeFigureOut">
               <a:rPr lang="en-US" smtClean="0"/>
-              <a:t>7/9/2026</a:t>
+              <a:t>1/27/13</a:t>
             </a:fld>
             <a:endParaRPr lang="en-US"/>
           </a:p>
@@ -2099,9 +2099,10 @@
           </a:lstStyle>
           <a:p>
             <a:r>
-              <a:rPr lang="en-US"/>
+              <a:rPr lang="en-US" smtClean="0"/>
               <a:t>Click to edit Master title style</a:t>
             </a:r>
+            <a:endParaRPr lang="en-US"/>
           </a:p>
         </p:txBody>
       </p:sp>
@@ -2155,37 +2156,38 @@
           <a:p>
             <a:pPr lvl="0"/>
             <a:r>
-              <a:rPr lang="en-US"/>
+              <a:rPr lang="en-US" smtClean="0"/>
               <a:t>Click to edit Master text styles</a:t>
             </a:r>
           </a:p>
           <a:p>
             <a:pPr lvl="1"/>
             <a:r>
-              <a:rPr lang="en-US"/>
+              <a:rPr lang="en-US" smtClean="0"/>
               <a:t>Second level</a:t>
             </a:r>
           </a:p>
           <a:p>
             <a:pPr lvl="2"/>
             <a:r>
-              <a:rPr lang="en-US"/>
+              <a:rPr lang="en-US" smtClean="0"/>
               <a:t>Third level</a:t>
             </a:r>
           </a:p>
           <a:p>
             <a:pPr lvl="3"/>
             <a:r>
-              <a:rPr lang="en-US"/>
+              <a:rPr lang="en-US" smtClean="0"/>
               <a:t>Fourth level</a:t>
             </a:r>
           </a:p>
           <a:p>
             <a:pPr lvl="4"/>
             <a:r>
-              <a:rPr lang="en-US"/>
+              <a:rPr lang="en-US" smtClean="0"/>
               <a:t>Fifth level</a:t>
             </a:r>
+            <a:endParaRPr lang="en-US"/>
           </a:p>
         </p:txBody>
       </p:sp>
@@ -2248,7 +2250,7 @@
           <a:p>
             <a:pPr lvl="0"/>
             <a:r>
-              <a:rPr lang="en-US"/>
+              <a:rPr lang="en-US" smtClean="0"/>
               <a:t>Click to edit Master text styles</a:t>
             </a:r>
           </a:p>
@@ -2271,7 +2273,7 @@
           <a:p>
             <a:fld id="{5BCAD085-E8A6-8845-BD4E-CB4CCA059FC4}" type="datetimeFigureOut">
               <a:rPr lang="en-US" smtClean="0"/>
-              <a:t>7/9/2026</a:t>
+              <a:t>1/27/13</a:t>
             </a:fld>
             <a:endParaRPr lang="en-US"/>
           </a:p>
@@ -2374,9 +2376,10 @@
           </a:lstStyle>
           <a:p>
             <a:r>
-              <a:rPr lang="en-US"/>
+              <a:rPr lang="en-US" smtClean="0"/>
               <a:t>Click to edit Master title style</a:t>
             </a:r>
+            <a:endParaRPr lang="en-US"/>
           </a:p>
         </p:txBody>
       </p:sp>
@@ -2500,7 +2503,7 @@
           <a:p>
             <a:pPr lvl="0"/>
             <a:r>
-              <a:rPr lang="en-US"/>
+              <a:rPr lang="en-US" smtClean="0"/>
               <a:t>Click to edit Master text styles</a:t>
             </a:r>
           </a:p>
@@ -2523,7 +2526,7 @@
           <a:p>
             <a:fld id="{5BCAD085-E8A6-8845-BD4E-CB4CCA059FC4}" type="datetimeFigureOut">
               <a:rPr lang="en-US" smtClean="0"/>
-              <a:t>7/9/2026</a:t>
+              <a:t>1/27/13</a:t>
             </a:fld>
             <a:endParaRPr lang="en-US"/>
           </a:p>
@@ -2632,9 +2635,10 @@
           <a:lstStyle/>
           <a:p>
             <a:r>
-              <a:rPr lang="en-US"/>
+              <a:rPr lang="en-US" smtClean="0"/>
               <a:t>Click to edit Master title style</a:t>
             </a:r>
+            <a:endParaRPr lang="en-US"/>
           </a:p>
         </p:txBody>
       </p:sp>
@@ -2665,37 +2669,38 @@
           <a:p>
             <a:pPr lvl="0"/>
             <a:r>
-              <a:rPr lang="en-US"/>
+              <a:rPr lang="en-US" smtClean="0"/>
               <a:t>Click to edit Master text styles</a:t>
             </a:r>
           </a:p>
           <a:p>
             <a:pPr lvl="1"/>
             <a:r>
-              <a:rPr lang="en-US"/>
+              <a:rPr lang="en-US" smtClean="0"/>
               <a:t>Second level</a:t>
             </a:r>
           </a:p>
           <a:p>
             <a:pPr lvl="2"/>
             <a:r>
-              <a:rPr lang="en-US"/>
+              <a:rPr lang="en-US" smtClean="0"/>
               <a:t>Third level</a:t>
             </a:r>
           </a:p>
           <a:p>
             <a:pPr lvl="3"/>
             <a:r>
-              <a:rPr lang="en-US"/>
+              <a:rPr lang="en-US" smtClean="0"/>
               <a:t>Fourth level</a:t>
             </a:r>
           </a:p>
           <a:p>
             <a:pPr lvl="4"/>
             <a:r>
-              <a:rPr lang="en-US"/>
+              <a:rPr lang="en-US" smtClean="0"/>
               <a:t>Fifth level</a:t>
             </a:r>
+            <a:endParaRPr lang="en-US"/>
           </a:p>
         </p:txBody>
       </p:sp>
@@ -2734,7 +2739,7 @@
           <a:p>
             <a:fld id="{5BCAD085-E8A6-8845-BD4E-CB4CCA059FC4}" type="datetimeFigureOut">
               <a:rPr lang="en-US" smtClean="0"/>
-              <a:t>7/9/2026</a:t>
+              <a:t>1/27/13</a:t>
             </a:fld>
             <a:endParaRPr lang="en-US"/>
           </a:p>
@@ -3093,7 +3098,7 @@
 </file>
 
 <file path=ppt/slides/slide1.xml><?xml version="1.0" encoding="utf-8"?>
-<p:sld xmlns:a="http://schemas.openxmlformats.org/drawingml/2006/main" xmlns:r="http://schemas.openxmlformats.org/officeDocument/2006/relationships" xmlns:p="http://schemas.openxmlformats.org/presentationml/2006/main">
+<p:sld xmlns:a="http://schemas.openxmlformats.org/drawingml/2006/main" xmlns:p="http://schemas.openxmlformats.org/presentationml/2006/main" xmlns:r="http://schemas.openxmlformats.org/officeDocument/2006/relationships">
   <p:cSld>
     <p:spTree>
       <p:nvGrpSpPr>
@@ -3101,14 +3106,7 @@
         <p:cNvGrpSpPr/>
         <p:nvPr/>
       </p:nvGrpSpPr>
-      <p:grpSpPr>
-        <a:xfrm>
-          <a:off x="0" y="0"/>
-          <a:ext cx="0" cy="0"/>
-          <a:chOff x="0" y="0"/>
-          <a:chExt cx="0" cy="0"/>
-        </a:xfrm>
-      </p:grpSpPr>
+      <p:grpSpPr/>
       <p:sp>
         <p:nvSpPr>
           <p:cNvPr id="2" name="Rectangle 1"/>
@@ -3150,7 +3148,6 @@
           <a:lstStyle/>
           <a:p>
             <a:pPr algn="ctr"/>
-            <a:endParaRPr/>
           </a:p>
         </p:txBody>
       </p:sp>
@@ -3195,7 +3192,6 @@
           <a:lstStyle/>
           <a:p>
             <a:pPr algn="ctr"/>
-            <a:endParaRPr/>
           </a:p>
         </p:txBody>
       </p:sp>
@@ -3240,7 +3236,6 @@
           <a:lstStyle/>
           <a:p>
             <a:pPr algn="ctr"/>
-            <a:endParaRPr/>
           </a:p>
         </p:txBody>
       </p:sp>
@@ -3261,7 +3256,7 @@
           <a:noFill/>
         </p:spPr>
         <p:txBody>
-          <a:bodyPr wrap="square" lIns="0" tIns="0" rIns="0" bIns="0" anchor="t">
+          <a:bodyPr wrap="square" anchor="t" lIns="0" rIns="0" tIns="0" bIns="0">
             <a:spAutoFit/>
           </a:bodyPr>
           <a:lstStyle/>
@@ -3306,7 +3301,7 @@
           <a:noFill/>
         </p:spPr>
         <p:txBody>
-          <a:bodyPr wrap="square" lIns="0" tIns="0" rIns="0" bIns="0" anchor="t">
+          <a:bodyPr wrap="square" anchor="t" lIns="0" rIns="0" tIns="0" bIns="0">
             <a:spAutoFit/>
           </a:bodyPr>
           <a:lstStyle/>
@@ -3406,7 +3401,6 @@
           <a:lstStyle/>
           <a:p>
             <a:pPr algn="ctr"/>
-            <a:endParaRPr/>
           </a:p>
         </p:txBody>
       </p:sp>
@@ -3427,7 +3421,7 @@
           <a:noFill/>
         </p:spPr>
         <p:txBody>
-          <a:bodyPr wrap="square" lIns="0" tIns="0" rIns="0" bIns="0" anchor="t">
+          <a:bodyPr wrap="square" anchor="t" lIns="0" rIns="0" tIns="0" bIns="0">
             <a:spAutoFit/>
           </a:bodyPr>
           <a:lstStyle/>
@@ -3472,7 +3466,7 @@
           <a:noFill/>
         </p:spPr>
         <p:txBody>
-          <a:bodyPr wrap="square" lIns="0" tIns="0" rIns="0" bIns="0" anchor="t">
+          <a:bodyPr wrap="square" anchor="t" lIns="0" rIns="0" tIns="0" bIns="0">
             <a:spAutoFit/>
           </a:bodyPr>
           <a:lstStyle/>
@@ -3509,7 +3503,7 @@
 </file>
 
 <file path=ppt/slides/slide10.xml><?xml version="1.0" encoding="utf-8"?>
-<p:sld xmlns:a="http://schemas.openxmlformats.org/drawingml/2006/main" xmlns:r="http://schemas.openxmlformats.org/officeDocument/2006/relationships" xmlns:p="http://schemas.openxmlformats.org/presentationml/2006/main">
+<p:sld xmlns:a="http://schemas.openxmlformats.org/drawingml/2006/main" xmlns:p="http://schemas.openxmlformats.org/presentationml/2006/main" xmlns:r="http://schemas.openxmlformats.org/officeDocument/2006/relationships">
   <p:cSld>
     <p:spTree>
       <p:nvGrpSpPr>
@@ -3517,14 +3511,7 @@
         <p:cNvGrpSpPr/>
         <p:nvPr/>
       </p:nvGrpSpPr>
-      <p:grpSpPr>
-        <a:xfrm>
-          <a:off x="0" y="0"/>
-          <a:ext cx="0" cy="0"/>
-          <a:chOff x="0" y="0"/>
-          <a:chExt cx="0" cy="0"/>
-        </a:xfrm>
-      </p:grpSpPr>
+      <p:grpSpPr/>
       <p:sp>
         <p:nvSpPr>
           <p:cNvPr id="2" name="Rectangle 1"/>
@@ -3566,7 +3553,6 @@
           <a:lstStyle/>
           <a:p>
             <a:pPr algn="ctr"/>
-            <a:endParaRPr/>
           </a:p>
         </p:txBody>
       </p:sp>
@@ -3611,7 +3597,6 @@
           <a:lstStyle/>
           <a:p>
             <a:pPr algn="ctr"/>
-            <a:endParaRPr/>
           </a:p>
         </p:txBody>
       </p:sp>
@@ -3632,7 +3617,7 @@
           <a:noFill/>
         </p:spPr>
         <p:txBody>
-          <a:bodyPr wrap="square" lIns="0" tIns="0" rIns="0" bIns="0" anchor="t">
+          <a:bodyPr wrap="square" anchor="t" lIns="0" rIns="0" tIns="0" bIns="0">
             <a:spAutoFit/>
           </a:bodyPr>
           <a:lstStyle/>
@@ -3677,7 +3662,7 @@
           <a:noFill/>
         </p:spPr>
         <p:txBody>
-          <a:bodyPr wrap="square" lIns="0" tIns="0" rIns="0" bIns="0" anchor="t">
+          <a:bodyPr wrap="square" anchor="t" lIns="0" rIns="0" tIns="0" bIns="0">
             <a:spAutoFit/>
           </a:bodyPr>
           <a:lstStyle/>
@@ -3746,7 +3731,6 @@
           <a:lstStyle/>
           <a:p>
             <a:pPr algn="ctr"/>
-            <a:endParaRPr/>
           </a:p>
         </p:txBody>
       </p:sp>
@@ -3767,7 +3751,7 @@
           <a:noFill/>
         </p:spPr>
         <p:txBody>
-          <a:bodyPr wrap="square" lIns="0" tIns="0" rIns="0" bIns="0" anchor="t">
+          <a:bodyPr wrap="square" anchor="t" lIns="0" rIns="0" tIns="0" bIns="0">
             <a:spAutoFit/>
           </a:bodyPr>
           <a:lstStyle/>
@@ -3812,7 +3796,7 @@
           <a:noFill/>
         </p:spPr>
         <p:txBody>
-          <a:bodyPr wrap="square" lIns="0" tIns="0" rIns="0" bIns="0" anchor="t">
+          <a:bodyPr wrap="square" anchor="t" lIns="0" rIns="0" tIns="0" bIns="0">
             <a:spAutoFit/>
           </a:bodyPr>
           <a:lstStyle/>
@@ -3885,7 +3869,6 @@
           <a:lstStyle/>
           <a:p>
             <a:pPr algn="ctr"/>
-            <a:endParaRPr/>
           </a:p>
         </p:txBody>
       </p:sp>
@@ -3906,7 +3889,7 @@
           <a:noFill/>
         </p:spPr>
         <p:txBody>
-          <a:bodyPr wrap="square" lIns="0" tIns="0" rIns="0" bIns="0" anchor="t">
+          <a:bodyPr wrap="square" anchor="t" lIns="0" rIns="0" tIns="0" bIns="0">
             <a:spAutoFit/>
           </a:bodyPr>
           <a:lstStyle/>
@@ -3951,7 +3934,7 @@
           <a:noFill/>
         </p:spPr>
         <p:txBody>
-          <a:bodyPr wrap="square" lIns="0" tIns="0" rIns="0" bIns="0" anchor="t">
+          <a:bodyPr wrap="square" anchor="t" lIns="0" rIns="0" tIns="0" bIns="0">
             <a:spAutoFit/>
           </a:bodyPr>
           <a:lstStyle/>
@@ -4129,7 +4112,7 @@
           <a:noFill/>
         </p:spPr>
         <p:txBody>
-          <a:bodyPr wrap="square" lIns="0" tIns="0" rIns="0" bIns="0" anchor="t">
+          <a:bodyPr wrap="square" anchor="t" lIns="0" rIns="0" tIns="0" bIns="0">
             <a:spAutoFit/>
           </a:bodyPr>
           <a:lstStyle/>
@@ -4202,7 +4185,6 @@
           <a:lstStyle/>
           <a:p>
             <a:pPr algn="ctr"/>
-            <a:endParaRPr/>
           </a:p>
         </p:txBody>
       </p:sp>
@@ -4223,7 +4205,7 @@
           <a:noFill/>
         </p:spPr>
         <p:txBody>
-          <a:bodyPr wrap="square" lIns="0" tIns="0" rIns="0" bIns="0" anchor="t">
+          <a:bodyPr wrap="square" anchor="t" lIns="0" rIns="0" tIns="0" bIns="0">
             <a:spAutoFit/>
           </a:bodyPr>
           <a:lstStyle/>
@@ -4406,7 +4388,6 @@
           <a:lstStyle/>
           <a:p>
             <a:pPr algn="ctr"/>
-            <a:endParaRPr/>
           </a:p>
         </p:txBody>
       </p:sp>
@@ -4453,7 +4434,6 @@
           <a:lstStyle/>
           <a:p>
             <a:pPr algn="ctr"/>
-            <a:endParaRPr/>
           </a:p>
         </p:txBody>
       </p:sp>
@@ -4474,7 +4454,7 @@
           <a:noFill/>
         </p:spPr>
         <p:txBody>
-          <a:bodyPr wrap="square" lIns="0" tIns="0" rIns="0" bIns="0" anchor="ctr">
+          <a:bodyPr wrap="square" anchor="ctr" lIns="0" rIns="0" tIns="0" bIns="0">
             <a:spAutoFit/>
           </a:bodyPr>
           <a:lstStyle/>
@@ -4529,7 +4509,7 @@
 </file>
 
 <file path=ppt/slides/slide11.xml><?xml version="1.0" encoding="utf-8"?>
-<p:sld xmlns:a="http://schemas.openxmlformats.org/drawingml/2006/main" xmlns:r="http://schemas.openxmlformats.org/officeDocument/2006/relationships" xmlns:p="http://schemas.openxmlformats.org/presentationml/2006/main">
+<p:sld xmlns:a="http://schemas.openxmlformats.org/drawingml/2006/main" xmlns:p="http://schemas.openxmlformats.org/presentationml/2006/main" xmlns:r="http://schemas.openxmlformats.org/officeDocument/2006/relationships">
   <p:cSld>
     <p:spTree>
       <p:nvGrpSpPr>
@@ -4537,14 +4517,7 @@
         <p:cNvGrpSpPr/>
         <p:nvPr/>
       </p:nvGrpSpPr>
-      <p:grpSpPr>
-        <a:xfrm>
-          <a:off x="0" y="0"/>
-          <a:ext cx="0" cy="0"/>
-          <a:chOff x="0" y="0"/>
-          <a:chExt cx="0" cy="0"/>
-        </a:xfrm>
-      </p:grpSpPr>
+      <p:grpSpPr/>
       <p:sp>
         <p:nvSpPr>
           <p:cNvPr id="2" name="Rectangle 1"/>
@@ -4586,7 +4559,6 @@
           <a:lstStyle/>
           <a:p>
             <a:pPr algn="ctr"/>
-            <a:endParaRPr/>
           </a:p>
         </p:txBody>
       </p:sp>
@@ -4631,7 +4603,6 @@
           <a:lstStyle/>
           <a:p>
             <a:pPr algn="ctr"/>
-            <a:endParaRPr/>
           </a:p>
         </p:txBody>
       </p:sp>
@@ -4652,7 +4623,7 @@
           <a:noFill/>
         </p:spPr>
         <p:txBody>
-          <a:bodyPr wrap="square" lIns="0" tIns="0" rIns="0" bIns="0" anchor="t">
+          <a:bodyPr wrap="square" anchor="t" lIns="0" rIns="0" tIns="0" bIns="0">
             <a:spAutoFit/>
           </a:bodyPr>
           <a:lstStyle/>
@@ -4697,7 +4668,7 @@
           <a:noFill/>
         </p:spPr>
         <p:txBody>
-          <a:bodyPr wrap="square" lIns="0" tIns="0" rIns="0" bIns="0" anchor="t">
+          <a:bodyPr wrap="square" anchor="t" lIns="0" rIns="0" tIns="0" bIns="0">
             <a:spAutoFit/>
           </a:bodyPr>
           <a:lstStyle/>
@@ -4766,7 +4737,6 @@
           <a:lstStyle/>
           <a:p>
             <a:pPr algn="ctr"/>
-            <a:endParaRPr/>
           </a:p>
         </p:txBody>
       </p:sp>
@@ -4787,7 +4757,7 @@
           <a:noFill/>
         </p:spPr>
         <p:txBody>
-          <a:bodyPr wrap="square" lIns="0" tIns="0" rIns="0" bIns="0" anchor="t">
+          <a:bodyPr wrap="square" anchor="t" lIns="0" rIns="0" tIns="0" bIns="0">
             <a:spAutoFit/>
           </a:bodyPr>
           <a:lstStyle/>
@@ -4832,7 +4802,7 @@
           <a:noFill/>
         </p:spPr>
         <p:txBody>
-          <a:bodyPr wrap="square" lIns="0" tIns="0" rIns="0" bIns="0" anchor="t">
+          <a:bodyPr wrap="square" anchor="t" lIns="0" rIns="0" tIns="0" bIns="0">
             <a:spAutoFit/>
           </a:bodyPr>
           <a:lstStyle/>
@@ -4905,7 +4875,6 @@
           <a:lstStyle/>
           <a:p>
             <a:pPr algn="ctr"/>
-            <a:endParaRPr/>
           </a:p>
         </p:txBody>
       </p:sp>
@@ -4952,7 +4921,6 @@
           <a:lstStyle/>
           <a:p>
             <a:pPr algn="ctr"/>
-            <a:endParaRPr/>
           </a:p>
         </p:txBody>
       </p:sp>
@@ -4973,7 +4941,7 @@
           <a:noFill/>
         </p:spPr>
         <p:txBody>
-          <a:bodyPr wrap="square" lIns="0" tIns="0" rIns="0" bIns="0" anchor="ctr">
+          <a:bodyPr wrap="square" anchor="ctr" lIns="0" rIns="0" tIns="0" bIns="0">
             <a:spAutoFit/>
           </a:bodyPr>
           <a:lstStyle/>
@@ -5018,7 +4986,7 @@
           <a:noFill/>
         </p:spPr>
         <p:txBody>
-          <a:bodyPr wrap="square" lIns="0" tIns="0" rIns="0" bIns="0" anchor="t">
+          <a:bodyPr wrap="square" anchor="t" lIns="0" rIns="0" tIns="0" bIns="0">
             <a:spAutoFit/>
           </a:bodyPr>
           <a:lstStyle/>
@@ -5063,7 +5031,7 @@
           <a:noFill/>
         </p:spPr>
         <p:txBody>
-          <a:bodyPr wrap="square" lIns="0" tIns="0" rIns="0" bIns="0" anchor="t">
+          <a:bodyPr wrap="square" anchor="t" lIns="0" rIns="0" tIns="0" bIns="0">
             <a:spAutoFit/>
           </a:bodyPr>
           <a:lstStyle/>
@@ -5136,7 +5104,6 @@
           <a:lstStyle/>
           <a:p>
             <a:pPr algn="ctr"/>
-            <a:endParaRPr/>
           </a:p>
         </p:txBody>
       </p:sp>
@@ -5183,7 +5150,6 @@
           <a:lstStyle/>
           <a:p>
             <a:pPr algn="ctr"/>
-            <a:endParaRPr/>
           </a:p>
         </p:txBody>
       </p:sp>
@@ -5204,7 +5170,7 @@
           <a:noFill/>
         </p:spPr>
         <p:txBody>
-          <a:bodyPr wrap="square" lIns="0" tIns="0" rIns="0" bIns="0" anchor="ctr">
+          <a:bodyPr wrap="square" anchor="ctr" lIns="0" rIns="0" tIns="0" bIns="0">
             <a:spAutoFit/>
           </a:bodyPr>
           <a:lstStyle/>
@@ -5249,7 +5215,7 @@
           <a:noFill/>
         </p:spPr>
         <p:txBody>
-          <a:bodyPr wrap="square" lIns="0" tIns="0" rIns="0" bIns="0" anchor="t">
+          <a:bodyPr wrap="square" anchor="t" lIns="0" rIns="0" tIns="0" bIns="0">
             <a:spAutoFit/>
           </a:bodyPr>
           <a:lstStyle/>
@@ -5294,7 +5260,7 @@
           <a:noFill/>
         </p:spPr>
         <p:txBody>
-          <a:bodyPr wrap="square" lIns="0" tIns="0" rIns="0" bIns="0" anchor="t">
+          <a:bodyPr wrap="square" anchor="t" lIns="0" rIns="0" tIns="0" bIns="0">
             <a:spAutoFit/>
           </a:bodyPr>
           <a:lstStyle/>
@@ -5367,7 +5333,6 @@
           <a:lstStyle/>
           <a:p>
             <a:pPr algn="ctr"/>
-            <a:endParaRPr/>
           </a:p>
         </p:txBody>
       </p:sp>
@@ -5414,7 +5379,6 @@
           <a:lstStyle/>
           <a:p>
             <a:pPr algn="ctr"/>
-            <a:endParaRPr/>
           </a:p>
         </p:txBody>
       </p:sp>
@@ -5435,7 +5399,7 @@
           <a:noFill/>
         </p:spPr>
         <p:txBody>
-          <a:bodyPr wrap="square" lIns="0" tIns="0" rIns="0" bIns="0" anchor="ctr">
+          <a:bodyPr wrap="square" anchor="ctr" lIns="0" rIns="0" tIns="0" bIns="0">
             <a:spAutoFit/>
           </a:bodyPr>
           <a:lstStyle/>
@@ -5480,7 +5444,7 @@
           <a:noFill/>
         </p:spPr>
         <p:txBody>
-          <a:bodyPr wrap="square" lIns="0" tIns="0" rIns="0" bIns="0" anchor="t">
+          <a:bodyPr wrap="square" anchor="t" lIns="0" rIns="0" tIns="0" bIns="0">
             <a:spAutoFit/>
           </a:bodyPr>
           <a:lstStyle/>
@@ -5525,7 +5489,7 @@
           <a:noFill/>
         </p:spPr>
         <p:txBody>
-          <a:bodyPr wrap="square" lIns="0" tIns="0" rIns="0" bIns="0" anchor="t">
+          <a:bodyPr wrap="square" anchor="t" lIns="0" rIns="0" tIns="0" bIns="0">
             <a:spAutoFit/>
           </a:bodyPr>
           <a:lstStyle/>
@@ -5598,7 +5562,6 @@
           <a:lstStyle/>
           <a:p>
             <a:pPr algn="ctr"/>
-            <a:endParaRPr/>
           </a:p>
         </p:txBody>
       </p:sp>
@@ -5645,7 +5608,6 @@
           <a:lstStyle/>
           <a:p>
             <a:pPr algn="ctr"/>
-            <a:endParaRPr/>
           </a:p>
         </p:txBody>
       </p:sp>
@@ -5666,7 +5628,7 @@
           <a:noFill/>
         </p:spPr>
         <p:txBody>
-          <a:bodyPr wrap="square" lIns="0" tIns="0" rIns="0" bIns="0" anchor="ctr">
+          <a:bodyPr wrap="square" anchor="ctr" lIns="0" rIns="0" tIns="0" bIns="0">
             <a:spAutoFit/>
           </a:bodyPr>
           <a:lstStyle/>
@@ -5711,7 +5673,7 @@
           <a:noFill/>
         </p:spPr>
         <p:txBody>
-          <a:bodyPr wrap="square" lIns="0" tIns="0" rIns="0" bIns="0" anchor="t">
+          <a:bodyPr wrap="square" anchor="t" lIns="0" rIns="0" tIns="0" bIns="0">
             <a:spAutoFit/>
           </a:bodyPr>
           <a:lstStyle/>
@@ -5756,7 +5718,7 @@
           <a:noFill/>
         </p:spPr>
         <p:txBody>
-          <a:bodyPr wrap="square" lIns="0" tIns="0" rIns="0" bIns="0" anchor="t">
+          <a:bodyPr wrap="square" anchor="t" lIns="0" rIns="0" tIns="0" bIns="0">
             <a:spAutoFit/>
           </a:bodyPr>
           <a:lstStyle/>
@@ -5801,7 +5763,7 @@
           <a:noFill/>
         </p:spPr>
         <p:txBody>
-          <a:bodyPr wrap="square" lIns="0" tIns="0" rIns="0" bIns="0" anchor="t">
+          <a:bodyPr wrap="square" anchor="t" lIns="0" rIns="0" tIns="0" bIns="0">
             <a:spAutoFit/>
           </a:bodyPr>
           <a:lstStyle/>
@@ -5874,7 +5836,6 @@
           <a:lstStyle/>
           <a:p>
             <a:pPr algn="ctr"/>
-            <a:endParaRPr/>
           </a:p>
         </p:txBody>
       </p:sp>
@@ -5895,7 +5856,7 @@
           <a:noFill/>
         </p:spPr>
         <p:txBody>
-          <a:bodyPr wrap="square" lIns="0" tIns="0" rIns="0" bIns="0" anchor="t">
+          <a:bodyPr wrap="square" anchor="t" lIns="0" rIns="0" tIns="0" bIns="0">
             <a:spAutoFit/>
           </a:bodyPr>
           <a:lstStyle/>
@@ -5976,7 +5937,7 @@
 </file>
 
 <file path=ppt/slides/slide12.xml><?xml version="1.0" encoding="utf-8"?>
-<p:sld xmlns:a="http://schemas.openxmlformats.org/drawingml/2006/main" xmlns:r="http://schemas.openxmlformats.org/officeDocument/2006/relationships" xmlns:p="http://schemas.openxmlformats.org/presentationml/2006/main">
+<p:sld xmlns:a="http://schemas.openxmlformats.org/drawingml/2006/main" xmlns:p="http://schemas.openxmlformats.org/presentationml/2006/main" xmlns:r="http://schemas.openxmlformats.org/officeDocument/2006/relationships">
   <p:cSld>
     <p:spTree>
       <p:nvGrpSpPr>
@@ -5984,14 +5945,7 @@
         <p:cNvGrpSpPr/>
         <p:nvPr/>
       </p:nvGrpSpPr>
-      <p:grpSpPr>
-        <a:xfrm>
-          <a:off x="0" y="0"/>
-          <a:ext cx="0" cy="0"/>
-          <a:chOff x="0" y="0"/>
-          <a:chExt cx="0" cy="0"/>
-        </a:xfrm>
-      </p:grpSpPr>
+      <p:grpSpPr/>
       <p:sp>
         <p:nvSpPr>
           <p:cNvPr id="2" name="Rectangle 1"/>
@@ -6033,7 +5987,6 @@
           <a:lstStyle/>
           <a:p>
             <a:pPr algn="ctr"/>
-            <a:endParaRPr/>
           </a:p>
         </p:txBody>
       </p:sp>
@@ -6078,7 +6031,6 @@
           <a:lstStyle/>
           <a:p>
             <a:pPr algn="ctr"/>
-            <a:endParaRPr/>
           </a:p>
         </p:txBody>
       </p:sp>
@@ -6099,7 +6051,7 @@
           <a:noFill/>
         </p:spPr>
         <p:txBody>
-          <a:bodyPr wrap="square" lIns="0" tIns="0" rIns="0" bIns="0" anchor="t">
+          <a:bodyPr wrap="square" anchor="t" lIns="0" rIns="0" tIns="0" bIns="0">
             <a:spAutoFit/>
           </a:bodyPr>
           <a:lstStyle/>
@@ -6144,7 +6096,7 @@
           <a:noFill/>
         </p:spPr>
         <p:txBody>
-          <a:bodyPr wrap="square" lIns="0" tIns="0" rIns="0" bIns="0" anchor="t">
+          <a:bodyPr wrap="square" anchor="t" lIns="0" rIns="0" tIns="0" bIns="0">
             <a:spAutoFit/>
           </a:bodyPr>
           <a:lstStyle/>
@@ -6213,7 +6165,6 @@
           <a:lstStyle/>
           <a:p>
             <a:pPr algn="ctr"/>
-            <a:endParaRPr/>
           </a:p>
         </p:txBody>
       </p:sp>
@@ -6234,7 +6185,7 @@
           <a:noFill/>
         </p:spPr>
         <p:txBody>
-          <a:bodyPr wrap="square" lIns="0" tIns="0" rIns="0" bIns="0" anchor="t">
+          <a:bodyPr wrap="square" anchor="t" lIns="0" rIns="0" tIns="0" bIns="0">
             <a:spAutoFit/>
           </a:bodyPr>
           <a:lstStyle/>
@@ -6279,7 +6230,7 @@
           <a:noFill/>
         </p:spPr>
         <p:txBody>
-          <a:bodyPr wrap="square" lIns="0" tIns="0" rIns="0" bIns="0" anchor="t">
+          <a:bodyPr wrap="square" anchor="t" lIns="0" rIns="0" tIns="0" bIns="0">
             <a:spAutoFit/>
           </a:bodyPr>
           <a:lstStyle/>
@@ -6352,7 +6303,6 @@
           <a:lstStyle/>
           <a:p>
             <a:pPr algn="ctr"/>
-            <a:endParaRPr/>
           </a:p>
         </p:txBody>
       </p:sp>
@@ -6373,7 +6323,7 @@
           <a:noFill/>
         </p:spPr>
         <p:txBody>
-          <a:bodyPr wrap="square" lIns="0" tIns="0" rIns="0" bIns="0" anchor="ctr">
+          <a:bodyPr wrap="square" anchor="ctr" lIns="0" rIns="0" tIns="0" bIns="0">
             <a:spAutoFit/>
           </a:bodyPr>
           <a:lstStyle/>
@@ -6446,7 +6396,6 @@
           <a:lstStyle/>
           <a:p>
             <a:pPr algn="ctr"/>
-            <a:endParaRPr/>
           </a:p>
         </p:txBody>
       </p:sp>
@@ -6467,7 +6416,7 @@
           <a:noFill/>
         </p:spPr>
         <p:txBody>
-          <a:bodyPr wrap="square" lIns="0" tIns="0" rIns="0" bIns="0" anchor="t">
+          <a:bodyPr wrap="square" anchor="t" lIns="0" rIns="0" tIns="0" bIns="0">
             <a:spAutoFit/>
           </a:bodyPr>
           <a:lstStyle/>
@@ -6512,7 +6461,7 @@
           <a:noFill/>
         </p:spPr>
         <p:txBody>
-          <a:bodyPr wrap="square" lIns="0" tIns="0" rIns="0" bIns="0" anchor="t">
+          <a:bodyPr wrap="square" anchor="t" lIns="0" rIns="0" tIns="0" bIns="0">
             <a:spAutoFit/>
           </a:bodyPr>
           <a:lstStyle/>
@@ -6656,7 +6605,6 @@
           <a:lstStyle/>
           <a:p>
             <a:pPr algn="ctr"/>
-            <a:endParaRPr/>
           </a:p>
         </p:txBody>
       </p:sp>
@@ -6677,7 +6625,7 @@
           <a:noFill/>
         </p:spPr>
         <p:txBody>
-          <a:bodyPr wrap="square" lIns="0" tIns="0" rIns="0" bIns="0" anchor="t">
+          <a:bodyPr wrap="square" anchor="t" lIns="0" rIns="0" tIns="0" bIns="0">
             <a:spAutoFit/>
           </a:bodyPr>
           <a:lstStyle/>
@@ -6722,7 +6670,7 @@
           <a:noFill/>
         </p:spPr>
         <p:txBody>
-          <a:bodyPr wrap="square" lIns="0" tIns="0" rIns="0" bIns="0" anchor="t">
+          <a:bodyPr wrap="square" anchor="t" lIns="0" rIns="0" tIns="0" bIns="0">
             <a:spAutoFit/>
           </a:bodyPr>
           <a:lstStyle/>
@@ -6866,7 +6814,6 @@
           <a:lstStyle/>
           <a:p>
             <a:pPr algn="ctr"/>
-            <a:endParaRPr/>
           </a:p>
         </p:txBody>
       </p:sp>
@@ -6913,7 +6860,6 @@
           <a:lstStyle/>
           <a:p>
             <a:pPr algn="ctr"/>
-            <a:endParaRPr/>
           </a:p>
         </p:txBody>
       </p:sp>
@@ -6934,7 +6880,7 @@
           <a:noFill/>
         </p:spPr>
         <p:txBody>
-          <a:bodyPr wrap="square" lIns="0" tIns="0" rIns="0" bIns="0" anchor="ctr">
+          <a:bodyPr wrap="square" anchor="ctr" lIns="0" rIns="0" tIns="0" bIns="0">
             <a:spAutoFit/>
           </a:bodyPr>
           <a:lstStyle/>
@@ -6989,7 +6935,7 @@
 </file>
 
 <file path=ppt/slides/slide13.xml><?xml version="1.0" encoding="utf-8"?>
-<p:sld xmlns:a="http://schemas.openxmlformats.org/drawingml/2006/main" xmlns:r="http://schemas.openxmlformats.org/officeDocument/2006/relationships" xmlns:p="http://schemas.openxmlformats.org/presentationml/2006/main">
+<p:sld xmlns:a="http://schemas.openxmlformats.org/drawingml/2006/main" xmlns:p="http://schemas.openxmlformats.org/presentationml/2006/main" xmlns:r="http://schemas.openxmlformats.org/officeDocument/2006/relationships">
   <p:cSld>
     <p:spTree>
       <p:nvGrpSpPr>
@@ -6997,14 +6943,7 @@
         <p:cNvGrpSpPr/>
         <p:nvPr/>
       </p:nvGrpSpPr>
-      <p:grpSpPr>
-        <a:xfrm>
-          <a:off x="0" y="0"/>
-          <a:ext cx="0" cy="0"/>
-          <a:chOff x="0" y="0"/>
-          <a:chExt cx="0" cy="0"/>
-        </a:xfrm>
-      </p:grpSpPr>
+      <p:grpSpPr/>
       <p:sp>
         <p:nvSpPr>
           <p:cNvPr id="2" name="Rectangle 1"/>
@@ -7046,7 +6985,6 @@
           <a:lstStyle/>
           <a:p>
             <a:pPr algn="ctr"/>
-            <a:endParaRPr/>
           </a:p>
         </p:txBody>
       </p:sp>
@@ -7091,7 +7029,6 @@
           <a:lstStyle/>
           <a:p>
             <a:pPr algn="ctr"/>
-            <a:endParaRPr/>
           </a:p>
         </p:txBody>
       </p:sp>
@@ -7112,7 +7049,7 @@
           <a:noFill/>
         </p:spPr>
         <p:txBody>
-          <a:bodyPr wrap="square" lIns="0" tIns="0" rIns="0" bIns="0" anchor="t">
+          <a:bodyPr wrap="square" anchor="t" lIns="0" rIns="0" tIns="0" bIns="0">
             <a:spAutoFit/>
           </a:bodyPr>
           <a:lstStyle/>
@@ -7157,7 +7094,7 @@
           <a:noFill/>
         </p:spPr>
         <p:txBody>
-          <a:bodyPr wrap="square" lIns="0" tIns="0" rIns="0" bIns="0" anchor="t">
+          <a:bodyPr wrap="square" anchor="t" lIns="0" rIns="0" tIns="0" bIns="0">
             <a:spAutoFit/>
           </a:bodyPr>
           <a:lstStyle/>
@@ -7226,7 +7163,6 @@
           <a:lstStyle/>
           <a:p>
             <a:pPr algn="ctr"/>
-            <a:endParaRPr/>
           </a:p>
         </p:txBody>
       </p:sp>
@@ -7247,7 +7183,7 @@
           <a:noFill/>
         </p:spPr>
         <p:txBody>
-          <a:bodyPr wrap="square" lIns="0" tIns="0" rIns="0" bIns="0" anchor="t">
+          <a:bodyPr wrap="square" anchor="t" lIns="0" rIns="0" tIns="0" bIns="0">
             <a:spAutoFit/>
           </a:bodyPr>
           <a:lstStyle/>
@@ -7292,7 +7228,7 @@
           <a:noFill/>
         </p:spPr>
         <p:txBody>
-          <a:bodyPr wrap="square" lIns="0" tIns="0" rIns="0" bIns="0" anchor="t">
+          <a:bodyPr wrap="square" anchor="t" lIns="0" rIns="0" tIns="0" bIns="0">
             <a:spAutoFit/>
           </a:bodyPr>
           <a:lstStyle/>
@@ -7365,7 +7301,6 @@
           <a:lstStyle/>
           <a:p>
             <a:pPr algn="ctr"/>
-            <a:endParaRPr/>
           </a:p>
         </p:txBody>
       </p:sp>
@@ -7412,7 +7347,6 @@
           <a:lstStyle/>
           <a:p>
             <a:pPr algn="ctr"/>
-            <a:endParaRPr/>
           </a:p>
         </p:txBody>
       </p:sp>
@@ -7433,7 +7367,7 @@
           <a:noFill/>
         </p:spPr>
         <p:txBody>
-          <a:bodyPr wrap="square" lIns="0" tIns="0" rIns="0" bIns="0" anchor="ctr">
+          <a:bodyPr wrap="square" anchor="ctr" lIns="0" rIns="0" tIns="0" bIns="0">
             <a:spAutoFit/>
           </a:bodyPr>
           <a:lstStyle/>
@@ -7478,7 +7412,7 @@
           <a:noFill/>
         </p:spPr>
         <p:txBody>
-          <a:bodyPr wrap="square" lIns="0" tIns="0" rIns="0" bIns="0" anchor="ctr">
+          <a:bodyPr wrap="square" anchor="ctr" lIns="0" rIns="0" tIns="0" bIns="0">
             <a:spAutoFit/>
           </a:bodyPr>
           <a:lstStyle/>
@@ -7501,7 +7435,7 @@
                 </a:solidFill>
                 <a:latin typeface="Segoe UI"/>
               </a:rPr>
-              <a:t>Orientar — history-first Y status-first</a:t>
+              <a:t>Orientar: /kg + history-first + status-first</a:t>
             </a:r>
           </a:p>
         </p:txBody>
@@ -7551,7 +7485,6 @@
           <a:lstStyle/>
           <a:p>
             <a:pPr algn="ctr"/>
-            <a:endParaRPr/>
           </a:p>
         </p:txBody>
       </p:sp>
@@ -7598,7 +7531,6 @@
           <a:lstStyle/>
           <a:p>
             <a:pPr algn="ctr"/>
-            <a:endParaRPr/>
           </a:p>
         </p:txBody>
       </p:sp>
@@ -7619,7 +7551,7 @@
           <a:noFill/>
         </p:spPr>
         <p:txBody>
-          <a:bodyPr wrap="square" lIns="0" tIns="0" rIns="0" bIns="0" anchor="ctr">
+          <a:bodyPr wrap="square" anchor="ctr" lIns="0" rIns="0" tIns="0" bIns="0">
             <a:spAutoFit/>
           </a:bodyPr>
           <a:lstStyle/>
@@ -7664,7 +7596,7 @@
           <a:noFill/>
         </p:spPr>
         <p:txBody>
-          <a:bodyPr wrap="square" lIns="0" tIns="0" rIns="0" bIns="0" anchor="ctr">
+          <a:bodyPr wrap="square" anchor="ctr" lIns="0" rIns="0" tIns="0" bIns="0">
             <a:spAutoFit/>
           </a:bodyPr>
           <a:lstStyle/>
@@ -7737,7 +7669,6 @@
           <a:lstStyle/>
           <a:p>
             <a:pPr algn="ctr"/>
-            <a:endParaRPr/>
           </a:p>
         </p:txBody>
       </p:sp>
@@ -7784,7 +7715,6 @@
           <a:lstStyle/>
           <a:p>
             <a:pPr algn="ctr"/>
-            <a:endParaRPr/>
           </a:p>
         </p:txBody>
       </p:sp>
@@ -7805,7 +7735,7 @@
           <a:noFill/>
         </p:spPr>
         <p:txBody>
-          <a:bodyPr wrap="square" lIns="0" tIns="0" rIns="0" bIns="0" anchor="ctr">
+          <a:bodyPr wrap="square" anchor="ctr" lIns="0" rIns="0" tIns="0" bIns="0">
             <a:spAutoFit/>
           </a:bodyPr>
           <a:lstStyle/>
@@ -7850,7 +7780,7 @@
           <a:noFill/>
         </p:spPr>
         <p:txBody>
-          <a:bodyPr wrap="square" lIns="0" tIns="0" rIns="0" bIns="0" anchor="ctr">
+          <a:bodyPr wrap="square" anchor="ctr" lIns="0" rIns="0" tIns="0" bIns="0">
             <a:spAutoFit/>
           </a:bodyPr>
           <a:lstStyle/>
@@ -7923,7 +7853,6 @@
           <a:lstStyle/>
           <a:p>
             <a:pPr algn="ctr"/>
-            <a:endParaRPr/>
           </a:p>
         </p:txBody>
       </p:sp>
@@ -7970,7 +7899,6 @@
           <a:lstStyle/>
           <a:p>
             <a:pPr algn="ctr"/>
-            <a:endParaRPr/>
           </a:p>
         </p:txBody>
       </p:sp>
@@ -7991,7 +7919,7 @@
           <a:noFill/>
         </p:spPr>
         <p:txBody>
-          <a:bodyPr wrap="square" lIns="0" tIns="0" rIns="0" bIns="0" anchor="ctr">
+          <a:bodyPr wrap="square" anchor="ctr" lIns="0" rIns="0" tIns="0" bIns="0">
             <a:spAutoFit/>
           </a:bodyPr>
           <a:lstStyle/>
@@ -8036,7 +7964,7 @@
           <a:noFill/>
         </p:spPr>
         <p:txBody>
-          <a:bodyPr wrap="square" lIns="0" tIns="0" rIns="0" bIns="0" anchor="ctr">
+          <a:bodyPr wrap="square" anchor="ctr" lIns="0" rIns="0" tIns="0" bIns="0">
             <a:spAutoFit/>
           </a:bodyPr>
           <a:lstStyle/>
@@ -8109,7 +8037,6 @@
           <a:lstStyle/>
           <a:p>
             <a:pPr algn="ctr"/>
-            <a:endParaRPr/>
           </a:p>
         </p:txBody>
       </p:sp>
@@ -8156,7 +8083,6 @@
           <a:lstStyle/>
           <a:p>
             <a:pPr algn="ctr"/>
-            <a:endParaRPr/>
           </a:p>
         </p:txBody>
       </p:sp>
@@ -8177,7 +8103,7 @@
           <a:noFill/>
         </p:spPr>
         <p:txBody>
-          <a:bodyPr wrap="square" lIns="0" tIns="0" rIns="0" bIns="0" anchor="ctr">
+          <a:bodyPr wrap="square" anchor="ctr" lIns="0" rIns="0" tIns="0" bIns="0">
             <a:spAutoFit/>
           </a:bodyPr>
           <a:lstStyle/>
@@ -8222,7 +8148,7 @@
           <a:noFill/>
         </p:spPr>
         <p:txBody>
-          <a:bodyPr wrap="square" lIns="0" tIns="0" rIns="0" bIns="0" anchor="ctr">
+          <a:bodyPr wrap="square" anchor="ctr" lIns="0" rIns="0" tIns="0" bIns="0">
             <a:spAutoFit/>
           </a:bodyPr>
           <a:lstStyle/>
@@ -8295,7 +8221,6 @@
           <a:lstStyle/>
           <a:p>
             <a:pPr algn="ctr"/>
-            <a:endParaRPr/>
           </a:p>
         </p:txBody>
       </p:sp>
@@ -8342,7 +8267,6 @@
           <a:lstStyle/>
           <a:p>
             <a:pPr algn="ctr"/>
-            <a:endParaRPr/>
           </a:p>
         </p:txBody>
       </p:sp>
@@ -8363,7 +8287,7 @@
           <a:noFill/>
         </p:spPr>
         <p:txBody>
-          <a:bodyPr wrap="square" lIns="0" tIns="0" rIns="0" bIns="0" anchor="ctr">
+          <a:bodyPr wrap="square" anchor="ctr" lIns="0" rIns="0" tIns="0" bIns="0">
             <a:spAutoFit/>
           </a:bodyPr>
           <a:lstStyle/>
@@ -8408,7 +8332,7 @@
           <a:noFill/>
         </p:spPr>
         <p:txBody>
-          <a:bodyPr wrap="square" lIns="0" tIns="0" rIns="0" bIns="0" anchor="ctr">
+          <a:bodyPr wrap="square" anchor="ctr" lIns="0" rIns="0" tIns="0" bIns="0">
             <a:spAutoFit/>
           </a:bodyPr>
           <a:lstStyle/>
@@ -8481,7 +8405,6 @@
           <a:lstStyle/>
           <a:p>
             <a:pPr algn="ctr"/>
-            <a:endParaRPr/>
           </a:p>
         </p:txBody>
       </p:sp>
@@ -8528,7 +8451,6 @@
           <a:lstStyle/>
           <a:p>
             <a:pPr algn="ctr"/>
-            <a:endParaRPr/>
           </a:p>
         </p:txBody>
       </p:sp>
@@ -8549,7 +8471,7 @@
           <a:noFill/>
         </p:spPr>
         <p:txBody>
-          <a:bodyPr wrap="square" lIns="0" tIns="0" rIns="0" bIns="0" anchor="ctr">
+          <a:bodyPr wrap="square" anchor="ctr" lIns="0" rIns="0" tIns="0" bIns="0">
             <a:spAutoFit/>
           </a:bodyPr>
           <a:lstStyle/>
@@ -8594,7 +8516,7 @@
           <a:noFill/>
         </p:spPr>
         <p:txBody>
-          <a:bodyPr wrap="square" lIns="0" tIns="0" rIns="0" bIns="0" anchor="ctr">
+          <a:bodyPr wrap="square" anchor="ctr" lIns="0" rIns="0" tIns="0" bIns="0">
             <a:spAutoFit/>
           </a:bodyPr>
           <a:lstStyle/>
@@ -8667,7 +8589,6 @@
           <a:lstStyle/>
           <a:p>
             <a:pPr algn="ctr"/>
-            <a:endParaRPr/>
           </a:p>
         </p:txBody>
       </p:sp>
@@ -8714,7 +8635,6 @@
           <a:lstStyle/>
           <a:p>
             <a:pPr algn="ctr"/>
-            <a:endParaRPr/>
           </a:p>
         </p:txBody>
       </p:sp>
@@ -8735,7 +8655,7 @@
           <a:noFill/>
         </p:spPr>
         <p:txBody>
-          <a:bodyPr wrap="square" lIns="0" tIns="0" rIns="0" bIns="0" anchor="ctr">
+          <a:bodyPr wrap="square" anchor="ctr" lIns="0" rIns="0" tIns="0" bIns="0">
             <a:spAutoFit/>
           </a:bodyPr>
           <a:lstStyle/>
@@ -8780,7 +8700,7 @@
           <a:noFill/>
         </p:spPr>
         <p:txBody>
-          <a:bodyPr wrap="square" lIns="0" tIns="0" rIns="0" bIns="0" anchor="ctr">
+          <a:bodyPr wrap="square" anchor="ctr" lIns="0" rIns="0" tIns="0" bIns="0">
             <a:spAutoFit/>
           </a:bodyPr>
           <a:lstStyle/>
@@ -8853,7 +8773,6 @@
           <a:lstStyle/>
           <a:p>
             <a:pPr algn="ctr"/>
-            <a:endParaRPr/>
           </a:p>
         </p:txBody>
       </p:sp>
@@ -8900,7 +8819,6 @@
           <a:lstStyle/>
           <a:p>
             <a:pPr algn="ctr"/>
-            <a:endParaRPr/>
           </a:p>
         </p:txBody>
       </p:sp>
@@ -8921,7 +8839,7 @@
           <a:noFill/>
         </p:spPr>
         <p:txBody>
-          <a:bodyPr wrap="square" lIns="0" tIns="0" rIns="0" bIns="0" anchor="ctr">
+          <a:bodyPr wrap="square" anchor="ctr" lIns="0" rIns="0" tIns="0" bIns="0">
             <a:spAutoFit/>
           </a:bodyPr>
           <a:lstStyle/>
@@ -8966,7 +8884,7 @@
           <a:noFill/>
         </p:spPr>
         <p:txBody>
-          <a:bodyPr wrap="square" lIns="0" tIns="0" rIns="0" bIns="0" anchor="ctr">
+          <a:bodyPr wrap="square" anchor="ctr" lIns="0" rIns="0" tIns="0" bIns="0">
             <a:spAutoFit/>
           </a:bodyPr>
           <a:lstStyle/>
@@ -9039,7 +8957,6 @@
           <a:lstStyle/>
           <a:p>
             <a:pPr algn="ctr"/>
-            <a:endParaRPr/>
           </a:p>
         </p:txBody>
       </p:sp>
@@ -9086,7 +9003,6 @@
           <a:lstStyle/>
           <a:p>
             <a:pPr algn="ctr"/>
-            <a:endParaRPr/>
           </a:p>
         </p:txBody>
       </p:sp>
@@ -9107,7 +9023,7 @@
           <a:noFill/>
         </p:spPr>
         <p:txBody>
-          <a:bodyPr wrap="square" lIns="0" tIns="0" rIns="0" bIns="0" anchor="ctr">
+          <a:bodyPr wrap="square" anchor="ctr" lIns="0" rIns="0" tIns="0" bIns="0">
             <a:spAutoFit/>
           </a:bodyPr>
           <a:lstStyle/>
@@ -9152,7 +9068,7 @@
           <a:noFill/>
         </p:spPr>
         <p:txBody>
-          <a:bodyPr wrap="square" lIns="0" tIns="0" rIns="0" bIns="0" anchor="ctr">
+          <a:bodyPr wrap="square" anchor="ctr" lIns="0" rIns="0" tIns="0" bIns="0">
             <a:spAutoFit/>
           </a:bodyPr>
           <a:lstStyle/>
@@ -9225,7 +9141,6 @@
           <a:lstStyle/>
           <a:p>
             <a:pPr algn="ctr"/>
-            <a:endParaRPr/>
           </a:p>
         </p:txBody>
       </p:sp>
@@ -9272,7 +9187,6 @@
           <a:lstStyle/>
           <a:p>
             <a:pPr algn="ctr"/>
-            <a:endParaRPr/>
           </a:p>
         </p:txBody>
       </p:sp>
@@ -9293,7 +9207,7 @@
           <a:noFill/>
         </p:spPr>
         <p:txBody>
-          <a:bodyPr wrap="square" lIns="0" tIns="0" rIns="0" bIns="0" anchor="ctr">
+          <a:bodyPr wrap="square" anchor="ctr" lIns="0" rIns="0" tIns="0" bIns="0">
             <a:spAutoFit/>
           </a:bodyPr>
           <a:lstStyle/>
@@ -9338,7 +9252,7 @@
           <a:noFill/>
         </p:spPr>
         <p:txBody>
-          <a:bodyPr wrap="square" lIns="0" tIns="0" rIns="0" bIns="0" anchor="ctr">
+          <a:bodyPr wrap="square" anchor="ctr" lIns="0" rIns="0" tIns="0" bIns="0">
             <a:spAutoFit/>
           </a:bodyPr>
           <a:lstStyle/>
@@ -9383,7 +9297,7 @@
           <a:noFill/>
         </p:spPr>
         <p:txBody>
-          <a:bodyPr wrap="square" lIns="0" tIns="0" rIns="0" bIns="0" anchor="t">
+          <a:bodyPr wrap="square" anchor="t" lIns="0" rIns="0" tIns="0" bIns="0">
             <a:spAutoFit/>
           </a:bodyPr>
           <a:lstStyle/>
@@ -9465,7 +9379,6 @@
           <a:lstStyle/>
           <a:p>
             <a:pPr algn="ctr"/>
-            <a:endParaRPr/>
           </a:p>
         </p:txBody>
       </p:sp>
@@ -9512,7 +9425,6 @@
           <a:lstStyle/>
           <a:p>
             <a:pPr algn="ctr"/>
-            <a:endParaRPr/>
           </a:p>
         </p:txBody>
       </p:sp>
@@ -9533,7 +9445,7 @@
           <a:noFill/>
         </p:spPr>
         <p:txBody>
-          <a:bodyPr wrap="square" lIns="0" tIns="0" rIns="0" bIns="0" anchor="ctr">
+          <a:bodyPr wrap="square" anchor="ctr" lIns="0" rIns="0" tIns="0" bIns="0">
             <a:spAutoFit/>
           </a:bodyPr>
           <a:lstStyle/>
@@ -9588,7 +9500,7 @@
 </file>
 
 <file path=ppt/slides/slide14.xml><?xml version="1.0" encoding="utf-8"?>
-<p:sld xmlns:a="http://schemas.openxmlformats.org/drawingml/2006/main" xmlns:r="http://schemas.openxmlformats.org/officeDocument/2006/relationships" xmlns:p="http://schemas.openxmlformats.org/presentationml/2006/main">
+<p:sld xmlns:a="http://schemas.openxmlformats.org/drawingml/2006/main" xmlns:p="http://schemas.openxmlformats.org/presentationml/2006/main" xmlns:r="http://schemas.openxmlformats.org/officeDocument/2006/relationships">
   <p:cSld>
     <p:spTree>
       <p:nvGrpSpPr>
@@ -9596,14 +9508,7 @@
         <p:cNvGrpSpPr/>
         <p:nvPr/>
       </p:nvGrpSpPr>
-      <p:grpSpPr>
-        <a:xfrm>
-          <a:off x="0" y="0"/>
-          <a:ext cx="0" cy="0"/>
-          <a:chOff x="0" y="0"/>
-          <a:chExt cx="0" cy="0"/>
-        </a:xfrm>
-      </p:grpSpPr>
+      <p:grpSpPr/>
       <p:sp>
         <p:nvSpPr>
           <p:cNvPr id="2" name="Rectangle 1"/>
@@ -9645,7 +9550,6 @@
           <a:lstStyle/>
           <a:p>
             <a:pPr algn="ctr"/>
-            <a:endParaRPr/>
           </a:p>
         </p:txBody>
       </p:sp>
@@ -9690,7 +9594,6 @@
           <a:lstStyle/>
           <a:p>
             <a:pPr algn="ctr"/>
-            <a:endParaRPr/>
           </a:p>
         </p:txBody>
       </p:sp>
@@ -9711,7 +9614,7 @@
           <a:noFill/>
         </p:spPr>
         <p:txBody>
-          <a:bodyPr wrap="square" lIns="0" tIns="0" rIns="0" bIns="0" anchor="t">
+          <a:bodyPr wrap="square" anchor="t" lIns="0" rIns="0" tIns="0" bIns="0">
             <a:spAutoFit/>
           </a:bodyPr>
           <a:lstStyle/>
@@ -9756,7 +9659,7 @@
           <a:noFill/>
         </p:spPr>
         <p:txBody>
-          <a:bodyPr wrap="square" lIns="0" tIns="0" rIns="0" bIns="0" anchor="t">
+          <a:bodyPr wrap="square" anchor="t" lIns="0" rIns="0" tIns="0" bIns="0">
             <a:spAutoFit/>
           </a:bodyPr>
           <a:lstStyle/>
@@ -9825,7 +9728,6 @@
           <a:lstStyle/>
           <a:p>
             <a:pPr algn="ctr"/>
-            <a:endParaRPr/>
           </a:p>
         </p:txBody>
       </p:sp>
@@ -9846,7 +9748,7 @@
           <a:noFill/>
         </p:spPr>
         <p:txBody>
-          <a:bodyPr wrap="square" lIns="0" tIns="0" rIns="0" bIns="0" anchor="t">
+          <a:bodyPr wrap="square" anchor="t" lIns="0" rIns="0" tIns="0" bIns="0">
             <a:spAutoFit/>
           </a:bodyPr>
           <a:lstStyle/>
@@ -9891,7 +9793,7 @@
           <a:noFill/>
         </p:spPr>
         <p:txBody>
-          <a:bodyPr wrap="square" lIns="0" tIns="0" rIns="0" bIns="0" anchor="t">
+          <a:bodyPr wrap="square" anchor="t" lIns="0" rIns="0" tIns="0" bIns="0">
             <a:spAutoFit/>
           </a:bodyPr>
           <a:lstStyle/>
@@ -9936,7 +9838,7 @@
           <a:noFill/>
         </p:spPr>
         <p:txBody>
-          <a:bodyPr wrap="square" lIns="0" tIns="0" rIns="0" bIns="0" anchor="t">
+          <a:bodyPr wrap="square" anchor="t" lIns="0" rIns="0" tIns="0" bIns="0">
             <a:spAutoFit/>
           </a:bodyPr>
           <a:lstStyle/>
@@ -10027,7 +9929,6 @@
           <a:lstStyle/>
           <a:p>
             <a:pPr algn="ctr"/>
-            <a:endParaRPr/>
           </a:p>
         </p:txBody>
       </p:sp>
@@ -10048,7 +9949,7 @@
           <a:noFill/>
         </p:spPr>
         <p:txBody>
-          <a:bodyPr wrap="square" lIns="0" tIns="0" rIns="0" bIns="0" anchor="ctr">
+          <a:bodyPr wrap="square" anchor="ctr" lIns="0" rIns="0" tIns="0" bIns="0">
             <a:spAutoFit/>
           </a:bodyPr>
           <a:lstStyle/>
@@ -10093,7 +9994,7 @@
           <a:noFill/>
         </p:spPr>
         <p:txBody>
-          <a:bodyPr wrap="square" lIns="0" tIns="0" rIns="0" bIns="0" anchor="ctr">
+          <a:bodyPr wrap="square" anchor="ctr" lIns="0" rIns="0" tIns="0" bIns="0">
             <a:spAutoFit/>
           </a:bodyPr>
           <a:lstStyle/>
@@ -10116,7 +10017,7 @@
                 </a:solidFill>
                 <a:latin typeface="Segoe UI"/>
               </a:rPr>
-              <a:t>STATUS.md / ledgers · git · gh</a:t>
+              <a:t>/kg (grafo de tickets → zona de peligro) · STATUS.md · git · gh</a:t>
             </a:r>
           </a:p>
         </p:txBody>
@@ -10138,7 +10039,7 @@
           <a:noFill/>
         </p:spPr>
         <p:txBody>
-          <a:bodyPr wrap="square" lIns="0" tIns="0" rIns="0" bIns="0" anchor="ctr">
+          <a:bodyPr wrap="square" anchor="ctr" lIns="0" rIns="0" tIns="0" bIns="0">
             <a:spAutoFit/>
           </a:bodyPr>
           <a:lstStyle/>
@@ -10211,7 +10112,6 @@
           <a:lstStyle/>
           <a:p>
             <a:pPr algn="ctr"/>
-            <a:endParaRPr/>
           </a:p>
         </p:txBody>
       </p:sp>
@@ -10232,7 +10132,7 @@
           <a:noFill/>
         </p:spPr>
         <p:txBody>
-          <a:bodyPr wrap="square" lIns="0" tIns="0" rIns="0" bIns="0" anchor="ctr">
+          <a:bodyPr wrap="square" anchor="ctr" lIns="0" rIns="0" tIns="0" bIns="0">
             <a:spAutoFit/>
           </a:bodyPr>
           <a:lstStyle/>
@@ -10277,7 +10177,7 @@
           <a:noFill/>
         </p:spPr>
         <p:txBody>
-          <a:bodyPr wrap="square" lIns="0" tIns="0" rIns="0" bIns="0" anchor="ctr">
+          <a:bodyPr wrap="square" anchor="ctr" lIns="0" rIns="0" tIns="0" bIns="0">
             <a:spAutoFit/>
           </a:bodyPr>
           <a:lstStyle/>
@@ -10322,7 +10222,7 @@
           <a:noFill/>
         </p:spPr>
         <p:txBody>
-          <a:bodyPr wrap="square" lIns="0" tIns="0" rIns="0" bIns="0" anchor="ctr">
+          <a:bodyPr wrap="square" anchor="ctr" lIns="0" rIns="0" tIns="0" bIns="0">
             <a:spAutoFit/>
           </a:bodyPr>
           <a:lstStyle/>
@@ -10395,7 +10295,6 @@
           <a:lstStyle/>
           <a:p>
             <a:pPr algn="ctr"/>
-            <a:endParaRPr/>
           </a:p>
         </p:txBody>
       </p:sp>
@@ -10416,7 +10315,7 @@
           <a:noFill/>
         </p:spPr>
         <p:txBody>
-          <a:bodyPr wrap="square" lIns="0" tIns="0" rIns="0" bIns="0" anchor="ctr">
+          <a:bodyPr wrap="square" anchor="ctr" lIns="0" rIns="0" tIns="0" bIns="0">
             <a:spAutoFit/>
           </a:bodyPr>
           <a:lstStyle/>
@@ -10461,7 +10360,7 @@
           <a:noFill/>
         </p:spPr>
         <p:txBody>
-          <a:bodyPr wrap="square" lIns="0" tIns="0" rIns="0" bIns="0" anchor="ctr">
+          <a:bodyPr wrap="square" anchor="ctr" lIns="0" rIns="0" tIns="0" bIns="0">
             <a:spAutoFit/>
           </a:bodyPr>
           <a:lstStyle/>
@@ -10506,7 +10405,7 @@
           <a:noFill/>
         </p:spPr>
         <p:txBody>
-          <a:bodyPr wrap="square" lIns="0" tIns="0" rIns="0" bIns="0" anchor="ctr">
+          <a:bodyPr wrap="square" anchor="ctr" lIns="0" rIns="0" tIns="0" bIns="0">
             <a:spAutoFit/>
           </a:bodyPr>
           <a:lstStyle/>
@@ -10579,7 +10478,6 @@
           <a:lstStyle/>
           <a:p>
             <a:pPr algn="ctr"/>
-            <a:endParaRPr/>
           </a:p>
         </p:txBody>
       </p:sp>
@@ -10600,7 +10498,7 @@
           <a:noFill/>
         </p:spPr>
         <p:txBody>
-          <a:bodyPr wrap="square" lIns="0" tIns="0" rIns="0" bIns="0" anchor="ctr">
+          <a:bodyPr wrap="square" anchor="ctr" lIns="0" rIns="0" tIns="0" bIns="0">
             <a:spAutoFit/>
           </a:bodyPr>
           <a:lstStyle/>
@@ -10645,7 +10543,7 @@
           <a:noFill/>
         </p:spPr>
         <p:txBody>
-          <a:bodyPr wrap="square" lIns="0" tIns="0" rIns="0" bIns="0" anchor="ctr">
+          <a:bodyPr wrap="square" anchor="ctr" lIns="0" rIns="0" tIns="0" bIns="0">
             <a:spAutoFit/>
           </a:bodyPr>
           <a:lstStyle/>
@@ -10690,7 +10588,7 @@
           <a:noFill/>
         </p:spPr>
         <p:txBody>
-          <a:bodyPr wrap="square" lIns="0" tIns="0" rIns="0" bIns="0" anchor="ctr">
+          <a:bodyPr wrap="square" anchor="ctr" lIns="0" rIns="0" tIns="0" bIns="0">
             <a:spAutoFit/>
           </a:bodyPr>
           <a:lstStyle/>
@@ -10763,7 +10661,6 @@
           <a:lstStyle/>
           <a:p>
             <a:pPr algn="ctr"/>
-            <a:endParaRPr/>
           </a:p>
         </p:txBody>
       </p:sp>
@@ -10784,7 +10681,7 @@
           <a:noFill/>
         </p:spPr>
         <p:txBody>
-          <a:bodyPr wrap="square" lIns="0" tIns="0" rIns="0" bIns="0" anchor="ctr">
+          <a:bodyPr wrap="square" anchor="ctr" lIns="0" rIns="0" tIns="0" bIns="0">
             <a:spAutoFit/>
           </a:bodyPr>
           <a:lstStyle/>
@@ -10829,7 +10726,7 @@
           <a:noFill/>
         </p:spPr>
         <p:txBody>
-          <a:bodyPr wrap="square" lIns="0" tIns="0" rIns="0" bIns="0" anchor="ctr">
+          <a:bodyPr wrap="square" anchor="ctr" lIns="0" rIns="0" tIns="0" bIns="0">
             <a:spAutoFit/>
           </a:bodyPr>
           <a:lstStyle/>
@@ -10874,7 +10771,7 @@
           <a:noFill/>
         </p:spPr>
         <p:txBody>
-          <a:bodyPr wrap="square" lIns="0" tIns="0" rIns="0" bIns="0" anchor="ctr">
+          <a:bodyPr wrap="square" anchor="ctr" lIns="0" rIns="0" tIns="0" bIns="0">
             <a:spAutoFit/>
           </a:bodyPr>
           <a:lstStyle/>
@@ -10947,7 +10844,6 @@
           <a:lstStyle/>
           <a:p>
             <a:pPr algn="ctr"/>
-            <a:endParaRPr/>
           </a:p>
         </p:txBody>
       </p:sp>
@@ -10968,7 +10864,7 @@
           <a:noFill/>
         </p:spPr>
         <p:txBody>
-          <a:bodyPr wrap="square" lIns="0" tIns="0" rIns="0" bIns="0" anchor="ctr">
+          <a:bodyPr wrap="square" anchor="ctr" lIns="0" rIns="0" tIns="0" bIns="0">
             <a:spAutoFit/>
           </a:bodyPr>
           <a:lstStyle/>
@@ -11013,7 +10909,7 @@
           <a:noFill/>
         </p:spPr>
         <p:txBody>
-          <a:bodyPr wrap="square" lIns="0" tIns="0" rIns="0" bIns="0" anchor="ctr">
+          <a:bodyPr wrap="square" anchor="ctr" lIns="0" rIns="0" tIns="0" bIns="0">
             <a:spAutoFit/>
           </a:bodyPr>
           <a:lstStyle/>
@@ -11058,7 +10954,7 @@
           <a:noFill/>
         </p:spPr>
         <p:txBody>
-          <a:bodyPr wrap="square" lIns="0" tIns="0" rIns="0" bIns="0" anchor="ctr">
+          <a:bodyPr wrap="square" anchor="ctr" lIns="0" rIns="0" tIns="0" bIns="0">
             <a:spAutoFit/>
           </a:bodyPr>
           <a:lstStyle/>
@@ -11131,7 +11027,6 @@
           <a:lstStyle/>
           <a:p>
             <a:pPr algn="ctr"/>
-            <a:endParaRPr/>
           </a:p>
         </p:txBody>
       </p:sp>
@@ -11152,7 +11047,7 @@
           <a:noFill/>
         </p:spPr>
         <p:txBody>
-          <a:bodyPr wrap="square" lIns="0" tIns="0" rIns="0" bIns="0" anchor="ctr">
+          <a:bodyPr wrap="square" anchor="ctr" lIns="0" rIns="0" tIns="0" bIns="0">
             <a:spAutoFit/>
           </a:bodyPr>
           <a:lstStyle/>
@@ -11197,7 +11092,7 @@
           <a:noFill/>
         </p:spPr>
         <p:txBody>
-          <a:bodyPr wrap="square" lIns="0" tIns="0" rIns="0" bIns="0" anchor="ctr">
+          <a:bodyPr wrap="square" anchor="ctr" lIns="0" rIns="0" tIns="0" bIns="0">
             <a:spAutoFit/>
           </a:bodyPr>
           <a:lstStyle/>
@@ -11242,7 +11137,7 @@
           <a:noFill/>
         </p:spPr>
         <p:txBody>
-          <a:bodyPr wrap="square" lIns="0" tIns="0" rIns="0" bIns="0" anchor="ctr">
+          <a:bodyPr wrap="square" anchor="ctr" lIns="0" rIns="0" tIns="0" bIns="0">
             <a:spAutoFit/>
           </a:bodyPr>
           <a:lstStyle/>
@@ -11279,7 +11174,7 @@
 </file>
 
 <file path=ppt/slides/slide15.xml><?xml version="1.0" encoding="utf-8"?>
-<p:sld xmlns:a="http://schemas.openxmlformats.org/drawingml/2006/main" xmlns:r="http://schemas.openxmlformats.org/officeDocument/2006/relationships" xmlns:p="http://schemas.openxmlformats.org/presentationml/2006/main">
+<p:sld xmlns:a="http://schemas.openxmlformats.org/drawingml/2006/main" xmlns:p="http://schemas.openxmlformats.org/presentationml/2006/main" xmlns:r="http://schemas.openxmlformats.org/officeDocument/2006/relationships">
   <p:cSld>
     <p:spTree>
       <p:nvGrpSpPr>
@@ -11287,14 +11182,7 @@
         <p:cNvGrpSpPr/>
         <p:nvPr/>
       </p:nvGrpSpPr>
-      <p:grpSpPr>
-        <a:xfrm>
-          <a:off x="0" y="0"/>
-          <a:ext cx="0" cy="0"/>
-          <a:chOff x="0" y="0"/>
-          <a:chExt cx="0" cy="0"/>
-        </a:xfrm>
-      </p:grpSpPr>
+      <p:grpSpPr/>
       <p:sp>
         <p:nvSpPr>
           <p:cNvPr id="2" name="Rectangle 1"/>
@@ -11336,7 +11224,6 @@
           <a:lstStyle/>
           <a:p>
             <a:pPr algn="ctr"/>
-            <a:endParaRPr/>
           </a:p>
         </p:txBody>
       </p:sp>
@@ -11381,7 +11268,6 @@
           <a:lstStyle/>
           <a:p>
             <a:pPr algn="ctr"/>
-            <a:endParaRPr/>
           </a:p>
         </p:txBody>
       </p:sp>
@@ -11402,7 +11288,7 @@
           <a:noFill/>
         </p:spPr>
         <p:txBody>
-          <a:bodyPr wrap="square" lIns="0" tIns="0" rIns="0" bIns="0" anchor="t">
+          <a:bodyPr wrap="square" anchor="t" lIns="0" rIns="0" tIns="0" bIns="0">
             <a:spAutoFit/>
           </a:bodyPr>
           <a:lstStyle/>
@@ -11447,7 +11333,7 @@
           <a:noFill/>
         </p:spPr>
         <p:txBody>
-          <a:bodyPr wrap="square" lIns="0" tIns="0" rIns="0" bIns="0" anchor="t">
+          <a:bodyPr wrap="square" anchor="t" lIns="0" rIns="0" tIns="0" bIns="0">
             <a:spAutoFit/>
           </a:bodyPr>
           <a:lstStyle/>
@@ -11516,7 +11402,6 @@
           <a:lstStyle/>
           <a:p>
             <a:pPr algn="ctr"/>
-            <a:endParaRPr/>
           </a:p>
         </p:txBody>
       </p:sp>
@@ -11537,7 +11422,7 @@
           <a:noFill/>
         </p:spPr>
         <p:txBody>
-          <a:bodyPr wrap="square" lIns="0" tIns="0" rIns="0" bIns="0" anchor="t">
+          <a:bodyPr wrap="square" anchor="t" lIns="0" rIns="0" tIns="0" bIns="0">
             <a:spAutoFit/>
           </a:bodyPr>
           <a:lstStyle/>
@@ -11582,7 +11467,7 @@
           <a:noFill/>
         </p:spPr>
         <p:txBody>
-          <a:bodyPr wrap="square" lIns="0" tIns="0" rIns="0" bIns="0" anchor="t">
+          <a:bodyPr wrap="square" anchor="t" lIns="0" rIns="0" tIns="0" bIns="0">
             <a:spAutoFit/>
           </a:bodyPr>
           <a:lstStyle/>
@@ -11655,7 +11540,6 @@
           <a:lstStyle/>
           <a:p>
             <a:pPr algn="ctr"/>
-            <a:endParaRPr/>
           </a:p>
         </p:txBody>
       </p:sp>
@@ -11676,7 +11560,7 @@
           <a:noFill/>
         </p:spPr>
         <p:txBody>
-          <a:bodyPr wrap="square" lIns="0" tIns="0" rIns="0" bIns="0" anchor="ctr">
+          <a:bodyPr wrap="square" anchor="ctr" lIns="0" rIns="0" tIns="0" bIns="0">
             <a:spAutoFit/>
           </a:bodyPr>
           <a:lstStyle/>
@@ -11758,7 +11642,6 @@
           <a:lstStyle/>
           <a:p>
             <a:pPr algn="ctr"/>
-            <a:endParaRPr/>
           </a:p>
         </p:txBody>
       </p:sp>
@@ -11805,7 +11688,6 @@
           <a:lstStyle/>
           <a:p>
             <a:pPr algn="ctr"/>
-            <a:endParaRPr/>
           </a:p>
         </p:txBody>
       </p:sp>
@@ -11826,7 +11708,7 @@
           <a:noFill/>
         </p:spPr>
         <p:txBody>
-          <a:bodyPr wrap="square" lIns="0" tIns="0" rIns="0" bIns="0" anchor="ctr">
+          <a:bodyPr wrap="square" anchor="ctr" lIns="0" rIns="0" tIns="0" bIns="0">
             <a:spAutoFit/>
           </a:bodyPr>
           <a:lstStyle/>
@@ -11871,7 +11753,7 @@
           <a:noFill/>
         </p:spPr>
         <p:txBody>
-          <a:bodyPr wrap="square" lIns="0" tIns="0" rIns="0" bIns="0" anchor="ctr">
+          <a:bodyPr wrap="square" anchor="ctr" lIns="0" rIns="0" tIns="0" bIns="0">
             <a:spAutoFit/>
           </a:bodyPr>
           <a:lstStyle/>
@@ -11894,7 +11776,7 @@
                 </a:solidFill>
                 <a:latin typeface="Segoe UI"/>
               </a:rPr>
-              <a:t>STATUS.md revela un SHARP_EDGE que restringe el fix; git/gh dan la base correcta.</a:t>
+              <a:t>/kg saca la zona de peligro (un SHARP_EDGE que restringe el fix); git/gh dan la base.</a:t>
             </a:r>
           </a:p>
         </p:txBody>
@@ -11944,7 +11826,6 @@
           <a:lstStyle/>
           <a:p>
             <a:pPr algn="ctr"/>
-            <a:endParaRPr/>
           </a:p>
         </p:txBody>
       </p:sp>
@@ -11991,7 +11872,6 @@
           <a:lstStyle/>
           <a:p>
             <a:pPr algn="ctr"/>
-            <a:endParaRPr/>
           </a:p>
         </p:txBody>
       </p:sp>
@@ -12012,7 +11892,7 @@
           <a:noFill/>
         </p:spPr>
         <p:txBody>
-          <a:bodyPr wrap="square" lIns="0" tIns="0" rIns="0" bIns="0" anchor="ctr">
+          <a:bodyPr wrap="square" anchor="ctr" lIns="0" rIns="0" tIns="0" bIns="0">
             <a:spAutoFit/>
           </a:bodyPr>
           <a:lstStyle/>
@@ -12057,7 +11937,7 @@
           <a:noFill/>
         </p:spPr>
         <p:txBody>
-          <a:bodyPr wrap="square" lIns="0" tIns="0" rIns="0" bIns="0" anchor="ctr">
+          <a:bodyPr wrap="square" anchor="ctr" lIns="0" rIns="0" tIns="0" bIns="0">
             <a:spAutoFit/>
           </a:bodyPr>
           <a:lstStyle/>
@@ -12130,7 +12010,6 @@
           <a:lstStyle/>
           <a:p>
             <a:pPr algn="ctr"/>
-            <a:endParaRPr/>
           </a:p>
         </p:txBody>
       </p:sp>
@@ -12177,7 +12056,6 @@
           <a:lstStyle/>
           <a:p>
             <a:pPr algn="ctr"/>
-            <a:endParaRPr/>
           </a:p>
         </p:txBody>
       </p:sp>
@@ -12198,7 +12076,7 @@
           <a:noFill/>
         </p:spPr>
         <p:txBody>
-          <a:bodyPr wrap="square" lIns="0" tIns="0" rIns="0" bIns="0" anchor="ctr">
+          <a:bodyPr wrap="square" anchor="ctr" lIns="0" rIns="0" tIns="0" bIns="0">
             <a:spAutoFit/>
           </a:bodyPr>
           <a:lstStyle/>
@@ -12243,7 +12121,7 @@
           <a:noFill/>
         </p:spPr>
         <p:txBody>
-          <a:bodyPr wrap="square" lIns="0" tIns="0" rIns="0" bIns="0" anchor="ctr">
+          <a:bodyPr wrap="square" anchor="ctr" lIns="0" rIns="0" tIns="0" bIns="0">
             <a:spAutoFit/>
           </a:bodyPr>
           <a:lstStyle/>
@@ -12316,7 +12194,6 @@
           <a:lstStyle/>
           <a:p>
             <a:pPr algn="ctr"/>
-            <a:endParaRPr/>
           </a:p>
         </p:txBody>
       </p:sp>
@@ -12363,7 +12240,6 @@
           <a:lstStyle/>
           <a:p>
             <a:pPr algn="ctr"/>
-            <a:endParaRPr/>
           </a:p>
         </p:txBody>
       </p:sp>
@@ -12384,7 +12260,7 @@
           <a:noFill/>
         </p:spPr>
         <p:txBody>
-          <a:bodyPr wrap="square" lIns="0" tIns="0" rIns="0" bIns="0" anchor="ctr">
+          <a:bodyPr wrap="square" anchor="ctr" lIns="0" rIns="0" tIns="0" bIns="0">
             <a:spAutoFit/>
           </a:bodyPr>
           <a:lstStyle/>
@@ -12429,7 +12305,7 @@
           <a:noFill/>
         </p:spPr>
         <p:txBody>
-          <a:bodyPr wrap="square" lIns="0" tIns="0" rIns="0" bIns="0" anchor="ctr">
+          <a:bodyPr wrap="square" anchor="ctr" lIns="0" rIns="0" tIns="0" bIns="0">
             <a:spAutoFit/>
           </a:bodyPr>
           <a:lstStyle/>
@@ -12502,7 +12378,6 @@
           <a:lstStyle/>
           <a:p>
             <a:pPr algn="ctr"/>
-            <a:endParaRPr/>
           </a:p>
         </p:txBody>
       </p:sp>
@@ -12549,7 +12424,6 @@
           <a:lstStyle/>
           <a:p>
             <a:pPr algn="ctr"/>
-            <a:endParaRPr/>
           </a:p>
         </p:txBody>
       </p:sp>
@@ -12570,7 +12444,7 @@
           <a:noFill/>
         </p:spPr>
         <p:txBody>
-          <a:bodyPr wrap="square" lIns="0" tIns="0" rIns="0" bIns="0" anchor="ctr">
+          <a:bodyPr wrap="square" anchor="ctr" lIns="0" rIns="0" tIns="0" bIns="0">
             <a:spAutoFit/>
           </a:bodyPr>
           <a:lstStyle/>
@@ -12615,7 +12489,7 @@
           <a:noFill/>
         </p:spPr>
         <p:txBody>
-          <a:bodyPr wrap="square" lIns="0" tIns="0" rIns="0" bIns="0" anchor="ctr">
+          <a:bodyPr wrap="square" anchor="ctr" lIns="0" rIns="0" tIns="0" bIns="0">
             <a:spAutoFit/>
           </a:bodyPr>
           <a:lstStyle/>
@@ -12688,7 +12562,6 @@
           <a:lstStyle/>
           <a:p>
             <a:pPr algn="ctr"/>
-            <a:endParaRPr/>
           </a:p>
         </p:txBody>
       </p:sp>
@@ -12735,7 +12608,6 @@
           <a:lstStyle/>
           <a:p>
             <a:pPr algn="ctr"/>
-            <a:endParaRPr/>
           </a:p>
         </p:txBody>
       </p:sp>
@@ -12756,7 +12628,7 @@
           <a:noFill/>
         </p:spPr>
         <p:txBody>
-          <a:bodyPr wrap="square" lIns="0" tIns="0" rIns="0" bIns="0" anchor="ctr">
+          <a:bodyPr wrap="square" anchor="ctr" lIns="0" rIns="0" tIns="0" bIns="0">
             <a:spAutoFit/>
           </a:bodyPr>
           <a:lstStyle/>
@@ -12801,7 +12673,7 @@
           <a:noFill/>
         </p:spPr>
         <p:txBody>
-          <a:bodyPr wrap="square" lIns="0" tIns="0" rIns="0" bIns="0" anchor="ctr">
+          <a:bodyPr wrap="square" anchor="ctr" lIns="0" rIns="0" tIns="0" bIns="0">
             <a:spAutoFit/>
           </a:bodyPr>
           <a:lstStyle/>
@@ -12874,7 +12746,6 @@
           <a:lstStyle/>
           <a:p>
             <a:pPr algn="ctr"/>
-            <a:endParaRPr/>
           </a:p>
         </p:txBody>
       </p:sp>
@@ -12921,7 +12792,6 @@
           <a:lstStyle/>
           <a:p>
             <a:pPr algn="ctr"/>
-            <a:endParaRPr/>
           </a:p>
         </p:txBody>
       </p:sp>
@@ -12942,7 +12812,7 @@
           <a:noFill/>
         </p:spPr>
         <p:txBody>
-          <a:bodyPr wrap="square" lIns="0" tIns="0" rIns="0" bIns="0" anchor="ctr">
+          <a:bodyPr wrap="square" anchor="ctr" lIns="0" rIns="0" tIns="0" bIns="0">
             <a:spAutoFit/>
           </a:bodyPr>
           <a:lstStyle/>
@@ -12997,7 +12867,7 @@
 </file>
 
 <file path=ppt/slides/slide16.xml><?xml version="1.0" encoding="utf-8"?>
-<p:sld xmlns:a="http://schemas.openxmlformats.org/drawingml/2006/main" xmlns:r="http://schemas.openxmlformats.org/officeDocument/2006/relationships" xmlns:p="http://schemas.openxmlformats.org/presentationml/2006/main">
+<p:sld xmlns:a="http://schemas.openxmlformats.org/drawingml/2006/main" xmlns:p="http://schemas.openxmlformats.org/presentationml/2006/main" xmlns:r="http://schemas.openxmlformats.org/officeDocument/2006/relationships">
   <p:cSld>
     <p:spTree>
       <p:nvGrpSpPr>
@@ -13005,14 +12875,7 @@
         <p:cNvGrpSpPr/>
         <p:nvPr/>
       </p:nvGrpSpPr>
-      <p:grpSpPr>
-        <a:xfrm>
-          <a:off x="0" y="0"/>
-          <a:ext cx="0" cy="0"/>
-          <a:chOff x="0" y="0"/>
-          <a:chExt cx="0" cy="0"/>
-        </a:xfrm>
-      </p:grpSpPr>
+      <p:grpSpPr/>
       <p:sp>
         <p:nvSpPr>
           <p:cNvPr id="2" name="Rectangle 1"/>
@@ -13054,7 +12917,6 @@
           <a:lstStyle/>
           <a:p>
             <a:pPr algn="ctr"/>
-            <a:endParaRPr/>
           </a:p>
         </p:txBody>
       </p:sp>
@@ -13099,7 +12961,6 @@
           <a:lstStyle/>
           <a:p>
             <a:pPr algn="ctr"/>
-            <a:endParaRPr/>
           </a:p>
         </p:txBody>
       </p:sp>
@@ -13120,7 +12981,7 @@
           <a:noFill/>
         </p:spPr>
         <p:txBody>
-          <a:bodyPr wrap="square" lIns="0" tIns="0" rIns="0" bIns="0" anchor="t">
+          <a:bodyPr wrap="square" anchor="t" lIns="0" rIns="0" tIns="0" bIns="0">
             <a:spAutoFit/>
           </a:bodyPr>
           <a:lstStyle/>
@@ -13165,7 +13026,7 @@
           <a:noFill/>
         </p:spPr>
         <p:txBody>
-          <a:bodyPr wrap="square" lIns="0" tIns="0" rIns="0" bIns="0" anchor="t">
+          <a:bodyPr wrap="square" anchor="t" lIns="0" rIns="0" tIns="0" bIns="0">
             <a:spAutoFit/>
           </a:bodyPr>
           <a:lstStyle/>
@@ -13234,7 +13095,6 @@
           <a:lstStyle/>
           <a:p>
             <a:pPr algn="ctr"/>
-            <a:endParaRPr/>
           </a:p>
         </p:txBody>
       </p:sp>
@@ -13255,7 +13115,7 @@
           <a:noFill/>
         </p:spPr>
         <p:txBody>
-          <a:bodyPr wrap="square" lIns="0" tIns="0" rIns="0" bIns="0" anchor="t">
+          <a:bodyPr wrap="square" anchor="t" lIns="0" rIns="0" tIns="0" bIns="0">
             <a:spAutoFit/>
           </a:bodyPr>
           <a:lstStyle/>
@@ -13300,7 +13160,7 @@
           <a:noFill/>
         </p:spPr>
         <p:txBody>
-          <a:bodyPr wrap="square" lIns="0" tIns="0" rIns="0" bIns="0" anchor="t">
+          <a:bodyPr wrap="square" anchor="t" lIns="0" rIns="0" tIns="0" bIns="0">
             <a:spAutoFit/>
           </a:bodyPr>
           <a:lstStyle/>
@@ -13373,7 +13233,6 @@
           <a:lstStyle/>
           <a:p>
             <a:pPr algn="ctr"/>
-            <a:endParaRPr/>
           </a:p>
         </p:txBody>
       </p:sp>
@@ -13394,7 +13253,7 @@
           <a:noFill/>
         </p:spPr>
         <p:txBody>
-          <a:bodyPr wrap="square" lIns="0" tIns="0" rIns="0" bIns="0" anchor="t">
+          <a:bodyPr wrap="square" anchor="t" lIns="0" rIns="0" tIns="0" bIns="0">
             <a:spAutoFit/>
           </a:bodyPr>
           <a:lstStyle/>
@@ -13439,7 +13298,7 @@
           <a:noFill/>
         </p:spPr>
         <p:txBody>
-          <a:bodyPr wrap="square" lIns="0" tIns="0" rIns="0" bIns="0" anchor="t">
+          <a:bodyPr wrap="square" anchor="t" lIns="0" rIns="0" tIns="0" bIns="0">
             <a:spAutoFit/>
           </a:bodyPr>
           <a:lstStyle/>
@@ -13614,7 +13473,6 @@
           <a:lstStyle/>
           <a:p>
             <a:pPr algn="ctr"/>
-            <a:endParaRPr/>
           </a:p>
         </p:txBody>
       </p:sp>
@@ -13635,7 +13493,7 @@
           <a:noFill/>
         </p:spPr>
         <p:txBody>
-          <a:bodyPr wrap="square" lIns="0" tIns="0" rIns="0" bIns="0" anchor="t">
+          <a:bodyPr wrap="square" anchor="t" lIns="0" rIns="0" tIns="0" bIns="0">
             <a:spAutoFit/>
           </a:bodyPr>
           <a:lstStyle/>
@@ -13680,7 +13538,7 @@
           <a:noFill/>
         </p:spPr>
         <p:txBody>
-          <a:bodyPr wrap="square" lIns="0" tIns="0" rIns="0" bIns="0" anchor="t">
+          <a:bodyPr wrap="square" anchor="t" lIns="0" rIns="0" tIns="0" bIns="0">
             <a:spAutoFit/>
           </a:bodyPr>
           <a:lstStyle/>
@@ -13855,7 +13713,6 @@
           <a:lstStyle/>
           <a:p>
             <a:pPr algn="ctr"/>
-            <a:endParaRPr/>
           </a:p>
         </p:txBody>
       </p:sp>
@@ -13876,7 +13733,7 @@
           <a:noFill/>
         </p:spPr>
         <p:txBody>
-          <a:bodyPr wrap="square" lIns="0" tIns="0" rIns="0" bIns="0" anchor="t">
+          <a:bodyPr wrap="square" anchor="t" lIns="0" rIns="0" tIns="0" bIns="0">
             <a:spAutoFit/>
           </a:bodyPr>
           <a:lstStyle/>
@@ -13921,7 +13778,7 @@
           <a:noFill/>
         </p:spPr>
         <p:txBody>
-          <a:bodyPr wrap="square" lIns="0" tIns="0" rIns="0" bIns="0" anchor="t">
+          <a:bodyPr wrap="square" anchor="t" lIns="0" rIns="0" tIns="0" bIns="0">
             <a:spAutoFit/>
           </a:bodyPr>
           <a:lstStyle/>
@@ -14034,7 +13891,6 @@
           <a:lstStyle/>
           <a:p>
             <a:pPr algn="ctr"/>
-            <a:endParaRPr/>
           </a:p>
         </p:txBody>
       </p:sp>
@@ -14081,7 +13937,6 @@
           <a:lstStyle/>
           <a:p>
             <a:pPr algn="ctr"/>
-            <a:endParaRPr/>
           </a:p>
         </p:txBody>
       </p:sp>
@@ -14102,7 +13957,7 @@
           <a:noFill/>
         </p:spPr>
         <p:txBody>
-          <a:bodyPr wrap="square" lIns="0" tIns="0" rIns="0" bIns="0" anchor="ctr">
+          <a:bodyPr wrap="square" anchor="ctr" lIns="0" rIns="0" tIns="0" bIns="0">
             <a:spAutoFit/>
           </a:bodyPr>
           <a:lstStyle/>
@@ -14157,7 +14012,7 @@
 </file>
 
 <file path=ppt/slides/slide17.xml><?xml version="1.0" encoding="utf-8"?>
-<p:sld xmlns:a="http://schemas.openxmlformats.org/drawingml/2006/main" xmlns:r="http://schemas.openxmlformats.org/officeDocument/2006/relationships" xmlns:p="http://schemas.openxmlformats.org/presentationml/2006/main">
+<p:sld xmlns:a="http://schemas.openxmlformats.org/drawingml/2006/main" xmlns:p="http://schemas.openxmlformats.org/presentationml/2006/main" xmlns:r="http://schemas.openxmlformats.org/officeDocument/2006/relationships">
   <p:cSld>
     <p:spTree>
       <p:nvGrpSpPr>
@@ -14165,14 +14020,7 @@
         <p:cNvGrpSpPr/>
         <p:nvPr/>
       </p:nvGrpSpPr>
-      <p:grpSpPr>
-        <a:xfrm>
-          <a:off x="0" y="0"/>
-          <a:ext cx="0" cy="0"/>
-          <a:chOff x="0" y="0"/>
-          <a:chExt cx="0" cy="0"/>
-        </a:xfrm>
-      </p:grpSpPr>
+      <p:grpSpPr/>
       <p:sp>
         <p:nvSpPr>
           <p:cNvPr id="2" name="Rectangle 1"/>
@@ -14214,7 +14062,6 @@
           <a:lstStyle/>
           <a:p>
             <a:pPr algn="ctr"/>
-            <a:endParaRPr/>
           </a:p>
         </p:txBody>
       </p:sp>
@@ -14259,7 +14106,6 @@
           <a:lstStyle/>
           <a:p>
             <a:pPr algn="ctr"/>
-            <a:endParaRPr/>
           </a:p>
         </p:txBody>
       </p:sp>
@@ -14280,7 +14126,7 @@
           <a:noFill/>
         </p:spPr>
         <p:txBody>
-          <a:bodyPr wrap="square" lIns="0" tIns="0" rIns="0" bIns="0" anchor="t">
+          <a:bodyPr wrap="square" anchor="t" lIns="0" rIns="0" tIns="0" bIns="0">
             <a:spAutoFit/>
           </a:bodyPr>
           <a:lstStyle/>
@@ -14325,7 +14171,7 @@
           <a:noFill/>
         </p:spPr>
         <p:txBody>
-          <a:bodyPr wrap="square" lIns="0" tIns="0" rIns="0" bIns="0" anchor="t">
+          <a:bodyPr wrap="square" anchor="t" lIns="0" rIns="0" tIns="0" bIns="0">
             <a:spAutoFit/>
           </a:bodyPr>
           <a:lstStyle/>
@@ -14394,7 +14240,6 @@
           <a:lstStyle/>
           <a:p>
             <a:pPr algn="ctr"/>
-            <a:endParaRPr/>
           </a:p>
         </p:txBody>
       </p:sp>
@@ -14415,7 +14260,7 @@
           <a:noFill/>
         </p:spPr>
         <p:txBody>
-          <a:bodyPr wrap="square" lIns="0" tIns="0" rIns="0" bIns="0" anchor="t">
+          <a:bodyPr wrap="square" anchor="t" lIns="0" rIns="0" tIns="0" bIns="0">
             <a:spAutoFit/>
           </a:bodyPr>
           <a:lstStyle/>
@@ -14460,7 +14305,7 @@
           <a:noFill/>
         </p:spPr>
         <p:txBody>
-          <a:bodyPr wrap="square" lIns="0" tIns="0" rIns="0" bIns="0" anchor="t">
+          <a:bodyPr wrap="square" anchor="t" lIns="0" rIns="0" tIns="0" bIns="0">
             <a:spAutoFit/>
           </a:bodyPr>
           <a:lstStyle/>
@@ -14505,7 +14350,7 @@
           <a:noFill/>
         </p:spPr>
         <p:txBody>
-          <a:bodyPr wrap="square" lIns="0" tIns="0" rIns="0" bIns="0" anchor="t">
+          <a:bodyPr wrap="square" anchor="t" lIns="0" rIns="0" tIns="0" bIns="0">
             <a:spAutoFit/>
           </a:bodyPr>
           <a:lstStyle/>
@@ -14578,7 +14423,6 @@
           <a:lstStyle/>
           <a:p>
             <a:pPr algn="ctr"/>
-            <a:endParaRPr/>
           </a:p>
         </p:txBody>
       </p:sp>
@@ -14599,7 +14443,7 @@
           <a:noFill/>
         </p:spPr>
         <p:txBody>
-          <a:bodyPr wrap="square" lIns="0" tIns="0" rIns="0" bIns="0" anchor="t">
+          <a:bodyPr wrap="square" anchor="t" lIns="0" rIns="0" tIns="0" bIns="0">
             <a:spAutoFit/>
           </a:bodyPr>
           <a:lstStyle/>
@@ -14747,12 +14591,15 @@
                 <a:spcPts val="200"/>
               </a:spcAft>
             </a:pPr>
-            <a:endParaRPr sz="1150" b="0">
-              <a:solidFill>
-                <a:srgbClr val="E8EAED"/>
-              </a:solidFill>
-              <a:latin typeface="Consolas"/>
-            </a:endParaRPr>
+            <a:r>
+              <a:rPr sz="1150" b="0">
+                <a:solidFill>
+                  <a:srgbClr val="E8EAED"/>
+                </a:solidFill>
+                <a:latin typeface="Consolas"/>
+              </a:rPr>
+              <a:t/>
+            </a:r>
           </a:p>
           <a:p>
             <a:pPr algn="l">
@@ -14823,7 +14670,6 @@
           <a:lstStyle/>
           <a:p>
             <a:pPr algn="ctr"/>
-            <a:endParaRPr/>
           </a:p>
         </p:txBody>
       </p:sp>
@@ -14844,7 +14690,7 @@
           <a:noFill/>
         </p:spPr>
         <p:txBody>
-          <a:bodyPr wrap="square" lIns="0" tIns="0" rIns="0" bIns="0" anchor="t">
+          <a:bodyPr wrap="square" anchor="t" lIns="0" rIns="0" tIns="0" bIns="0">
             <a:spAutoFit/>
           </a:bodyPr>
           <a:lstStyle/>
@@ -14889,7 +14735,7 @@
           <a:noFill/>
         </p:spPr>
         <p:txBody>
-          <a:bodyPr wrap="square" lIns="0" tIns="0" rIns="0" bIns="0" anchor="t">
+          <a:bodyPr wrap="square" anchor="t" lIns="0" rIns="0" tIns="0" bIns="0">
             <a:spAutoFit/>
           </a:bodyPr>
           <a:lstStyle/>
@@ -15095,7 +14941,6 @@
           <a:lstStyle/>
           <a:p>
             <a:pPr algn="ctr"/>
-            <a:endParaRPr/>
           </a:p>
         </p:txBody>
       </p:sp>
@@ -15142,7 +14987,6 @@
           <a:lstStyle/>
           <a:p>
             <a:pPr algn="ctr"/>
-            <a:endParaRPr/>
           </a:p>
         </p:txBody>
       </p:sp>
@@ -15163,7 +15007,7 @@
           <a:noFill/>
         </p:spPr>
         <p:txBody>
-          <a:bodyPr wrap="square" lIns="0" tIns="0" rIns="0" bIns="0" anchor="ctr">
+          <a:bodyPr wrap="square" anchor="ctr" lIns="0" rIns="0" tIns="0" bIns="0">
             <a:spAutoFit/>
           </a:bodyPr>
           <a:lstStyle/>
@@ -15218,7 +15062,7 @@
 </file>
 
 <file path=ppt/slides/slide18.xml><?xml version="1.0" encoding="utf-8"?>
-<p:sld xmlns:a="http://schemas.openxmlformats.org/drawingml/2006/main" xmlns:r="http://schemas.openxmlformats.org/officeDocument/2006/relationships" xmlns:p="http://schemas.openxmlformats.org/presentationml/2006/main">
+<p:sld xmlns:a="http://schemas.openxmlformats.org/drawingml/2006/main" xmlns:p="http://schemas.openxmlformats.org/presentationml/2006/main" xmlns:r="http://schemas.openxmlformats.org/officeDocument/2006/relationships">
   <p:cSld>
     <p:spTree>
       <p:nvGrpSpPr>
@@ -15226,14 +15070,7 @@
         <p:cNvGrpSpPr/>
         <p:nvPr/>
       </p:nvGrpSpPr>
-      <p:grpSpPr>
-        <a:xfrm>
-          <a:off x="0" y="0"/>
-          <a:ext cx="0" cy="0"/>
-          <a:chOff x="0" y="0"/>
-          <a:chExt cx="0" cy="0"/>
-        </a:xfrm>
-      </p:grpSpPr>
+      <p:grpSpPr/>
       <p:sp>
         <p:nvSpPr>
           <p:cNvPr id="2" name="Rectangle 1"/>
@@ -15275,7 +15112,6 @@
           <a:lstStyle/>
           <a:p>
             <a:pPr algn="ctr"/>
-            <a:endParaRPr/>
           </a:p>
         </p:txBody>
       </p:sp>
@@ -15320,7 +15156,6 @@
           <a:lstStyle/>
           <a:p>
             <a:pPr algn="ctr"/>
-            <a:endParaRPr/>
           </a:p>
         </p:txBody>
       </p:sp>
@@ -15341,7 +15176,7 @@
           <a:noFill/>
         </p:spPr>
         <p:txBody>
-          <a:bodyPr wrap="square" lIns="0" tIns="0" rIns="0" bIns="0" anchor="t">
+          <a:bodyPr wrap="square" anchor="t" lIns="0" rIns="0" tIns="0" bIns="0">
             <a:spAutoFit/>
           </a:bodyPr>
           <a:lstStyle/>
@@ -15386,7 +15221,7 @@
           <a:noFill/>
         </p:spPr>
         <p:txBody>
-          <a:bodyPr wrap="square" lIns="0" tIns="0" rIns="0" bIns="0" anchor="t">
+          <a:bodyPr wrap="square" anchor="t" lIns="0" rIns="0" tIns="0" bIns="0">
             <a:spAutoFit/>
           </a:bodyPr>
           <a:lstStyle/>
@@ -15455,7 +15290,6 @@
           <a:lstStyle/>
           <a:p>
             <a:pPr algn="ctr"/>
-            <a:endParaRPr/>
           </a:p>
         </p:txBody>
       </p:sp>
@@ -15476,7 +15310,7 @@
           <a:noFill/>
         </p:spPr>
         <p:txBody>
-          <a:bodyPr wrap="square" lIns="0" tIns="0" rIns="0" bIns="0" anchor="t">
+          <a:bodyPr wrap="square" anchor="t" lIns="0" rIns="0" tIns="0" bIns="0">
             <a:spAutoFit/>
           </a:bodyPr>
           <a:lstStyle/>
@@ -15521,7 +15355,7 @@
           <a:noFill/>
         </p:spPr>
         <p:txBody>
-          <a:bodyPr wrap="square" lIns="0" tIns="0" rIns="0" bIns="0" anchor="t">
+          <a:bodyPr wrap="square" anchor="t" lIns="0" rIns="0" tIns="0" bIns="0">
             <a:spAutoFit/>
           </a:bodyPr>
           <a:lstStyle/>
@@ -15594,7 +15428,6 @@
           <a:lstStyle/>
           <a:p>
             <a:pPr algn="ctr"/>
-            <a:endParaRPr/>
           </a:p>
         </p:txBody>
       </p:sp>
@@ -15615,7 +15448,7 @@
           <a:noFill/>
         </p:spPr>
         <p:txBody>
-          <a:bodyPr wrap="square" lIns="0" tIns="0" rIns="0" bIns="0" anchor="t">
+          <a:bodyPr wrap="square" anchor="t" lIns="0" rIns="0" tIns="0" bIns="0">
             <a:spAutoFit/>
           </a:bodyPr>
           <a:lstStyle/>
@@ -15660,7 +15493,7 @@
           <a:noFill/>
         </p:spPr>
         <p:txBody>
-          <a:bodyPr wrap="square" lIns="0" tIns="0" rIns="0" bIns="0" anchor="t">
+          <a:bodyPr wrap="square" anchor="t" lIns="0" rIns="0" tIns="0" bIns="0">
             <a:spAutoFit/>
           </a:bodyPr>
           <a:lstStyle/>
@@ -15807,7 +15640,7 @@
           <a:noFill/>
         </p:spPr>
         <p:txBody>
-          <a:bodyPr wrap="square" lIns="0" tIns="0" rIns="0" bIns="0" anchor="t">
+          <a:bodyPr wrap="square" anchor="t" lIns="0" rIns="0" tIns="0" bIns="0">
             <a:spAutoFit/>
           </a:bodyPr>
           <a:lstStyle/>
@@ -15880,7 +15713,6 @@
           <a:lstStyle/>
           <a:p>
             <a:pPr algn="ctr"/>
-            <a:endParaRPr/>
           </a:p>
         </p:txBody>
       </p:sp>
@@ -15901,7 +15733,7 @@
           <a:noFill/>
         </p:spPr>
         <p:txBody>
-          <a:bodyPr wrap="square" lIns="0" tIns="0" rIns="0" bIns="0" anchor="t">
+          <a:bodyPr wrap="square" anchor="t" lIns="0" rIns="0" tIns="0" bIns="0">
             <a:spAutoFit/>
           </a:bodyPr>
           <a:lstStyle/>
@@ -16040,7 +15872,6 @@
           <a:lstStyle/>
           <a:p>
             <a:pPr algn="ctr"/>
-            <a:endParaRPr/>
           </a:p>
         </p:txBody>
       </p:sp>
@@ -16061,7 +15892,7 @@
           <a:noFill/>
         </p:spPr>
         <p:txBody>
-          <a:bodyPr wrap="square" lIns="0" tIns="0" rIns="0" bIns="0" anchor="t">
+          <a:bodyPr wrap="square" anchor="t" lIns="0" rIns="0" tIns="0" bIns="0">
             <a:spAutoFit/>
           </a:bodyPr>
           <a:lstStyle/>
@@ -16115,7 +15946,7 @@
           <a:noFill/>
         </p:spPr>
         <p:txBody>
-          <a:bodyPr wrap="square" lIns="0" tIns="0" rIns="0" bIns="0" anchor="t">
+          <a:bodyPr wrap="square" anchor="t" lIns="0" rIns="0" tIns="0" bIns="0">
             <a:spAutoFit/>
           </a:bodyPr>
           <a:lstStyle/>
@@ -16210,7 +16041,6 @@
           <a:lstStyle/>
           <a:p>
             <a:pPr algn="ctr"/>
-            <a:endParaRPr/>
           </a:p>
         </p:txBody>
       </p:sp>
@@ -16257,7 +16087,6 @@
           <a:lstStyle/>
           <a:p>
             <a:pPr algn="ctr"/>
-            <a:endParaRPr/>
           </a:p>
         </p:txBody>
       </p:sp>
@@ -16278,7 +16107,7 @@
           <a:noFill/>
         </p:spPr>
         <p:txBody>
-          <a:bodyPr wrap="square" lIns="0" tIns="0" rIns="0" bIns="0" anchor="ctr">
+          <a:bodyPr wrap="square" anchor="ctr" lIns="0" rIns="0" tIns="0" bIns="0">
             <a:spAutoFit/>
           </a:bodyPr>
           <a:lstStyle/>
@@ -16333,7 +16162,7 @@
 </file>
 
 <file path=ppt/slides/slide19.xml><?xml version="1.0" encoding="utf-8"?>
-<p:sld xmlns:a="http://schemas.openxmlformats.org/drawingml/2006/main" xmlns:r="http://schemas.openxmlformats.org/officeDocument/2006/relationships" xmlns:p="http://schemas.openxmlformats.org/presentationml/2006/main">
+<p:sld xmlns:a="http://schemas.openxmlformats.org/drawingml/2006/main" xmlns:p="http://schemas.openxmlformats.org/presentationml/2006/main" xmlns:r="http://schemas.openxmlformats.org/officeDocument/2006/relationships">
   <p:cSld>
     <p:spTree>
       <p:nvGrpSpPr>
@@ -16341,14 +16170,7 @@
         <p:cNvGrpSpPr/>
         <p:nvPr/>
       </p:nvGrpSpPr>
-      <p:grpSpPr>
-        <a:xfrm>
-          <a:off x="0" y="0"/>
-          <a:ext cx="0" cy="0"/>
-          <a:chOff x="0" y="0"/>
-          <a:chExt cx="0" cy="0"/>
-        </a:xfrm>
-      </p:grpSpPr>
+      <p:grpSpPr/>
       <p:sp>
         <p:nvSpPr>
           <p:cNvPr id="2" name="Rectangle 1"/>
@@ -16390,7 +16212,6 @@
           <a:lstStyle/>
           <a:p>
             <a:pPr algn="ctr"/>
-            <a:endParaRPr/>
           </a:p>
         </p:txBody>
       </p:sp>
@@ -16435,7 +16256,6 @@
           <a:lstStyle/>
           <a:p>
             <a:pPr algn="ctr"/>
-            <a:endParaRPr/>
           </a:p>
         </p:txBody>
       </p:sp>
@@ -16456,7 +16276,7 @@
           <a:noFill/>
         </p:spPr>
         <p:txBody>
-          <a:bodyPr wrap="square" lIns="0" tIns="0" rIns="0" bIns="0" anchor="t">
+          <a:bodyPr wrap="square" anchor="t" lIns="0" rIns="0" tIns="0" bIns="0">
             <a:spAutoFit/>
           </a:bodyPr>
           <a:lstStyle/>
@@ -16501,7 +16321,7 @@
           <a:noFill/>
         </p:spPr>
         <p:txBody>
-          <a:bodyPr wrap="square" lIns="0" tIns="0" rIns="0" bIns="0" anchor="t">
+          <a:bodyPr wrap="square" anchor="t" lIns="0" rIns="0" tIns="0" bIns="0">
             <a:spAutoFit/>
           </a:bodyPr>
           <a:lstStyle/>
@@ -16570,7 +16390,6 @@
           <a:lstStyle/>
           <a:p>
             <a:pPr algn="ctr"/>
-            <a:endParaRPr/>
           </a:p>
         </p:txBody>
       </p:sp>
@@ -16591,7 +16410,7 @@
           <a:noFill/>
         </p:spPr>
         <p:txBody>
-          <a:bodyPr wrap="square" lIns="0" tIns="0" rIns="0" bIns="0" anchor="t">
+          <a:bodyPr wrap="square" anchor="t" lIns="0" rIns="0" tIns="0" bIns="0">
             <a:spAutoFit/>
           </a:bodyPr>
           <a:lstStyle/>
@@ -16636,7 +16455,7 @@
           <a:noFill/>
         </p:spPr>
         <p:txBody>
-          <a:bodyPr wrap="square" lIns="0" tIns="0" rIns="0" bIns="0" anchor="t">
+          <a:bodyPr wrap="square" anchor="t" lIns="0" rIns="0" tIns="0" bIns="0">
             <a:spAutoFit/>
           </a:bodyPr>
           <a:lstStyle/>
@@ -16709,7 +16528,6 @@
           <a:lstStyle/>
           <a:p>
             <a:pPr algn="ctr"/>
-            <a:endParaRPr/>
           </a:p>
         </p:txBody>
       </p:sp>
@@ -16730,7 +16548,7 @@
           <a:noFill/>
         </p:spPr>
         <p:txBody>
-          <a:bodyPr wrap="square" lIns="0" tIns="0" rIns="0" bIns="0" anchor="t">
+          <a:bodyPr wrap="square" anchor="t" lIns="0" rIns="0" tIns="0" bIns="0">
             <a:spAutoFit/>
           </a:bodyPr>
           <a:lstStyle/>
@@ -16775,7 +16593,7 @@
           <a:noFill/>
         </p:spPr>
         <p:txBody>
-          <a:bodyPr wrap="square" lIns="0" tIns="0" rIns="0" bIns="0" anchor="t">
+          <a:bodyPr wrap="square" anchor="t" lIns="0" rIns="0" tIns="0" bIns="0">
             <a:spAutoFit/>
           </a:bodyPr>
           <a:lstStyle/>
@@ -16922,7 +16740,7 @@
           <a:noFill/>
         </p:spPr>
         <p:txBody>
-          <a:bodyPr wrap="square" lIns="0" tIns="0" rIns="0" bIns="0" anchor="t">
+          <a:bodyPr wrap="square" anchor="t" lIns="0" rIns="0" tIns="0" bIns="0">
             <a:spAutoFit/>
           </a:bodyPr>
           <a:lstStyle/>
@@ -16995,7 +16813,6 @@
           <a:lstStyle/>
           <a:p>
             <a:pPr algn="ctr"/>
-            <a:endParaRPr/>
           </a:p>
         </p:txBody>
       </p:sp>
@@ -17016,7 +16833,7 @@
           <a:noFill/>
         </p:spPr>
         <p:txBody>
-          <a:bodyPr wrap="square" lIns="0" tIns="0" rIns="0" bIns="0" anchor="t">
+          <a:bodyPr wrap="square" anchor="t" lIns="0" rIns="0" tIns="0" bIns="0">
             <a:spAutoFit/>
           </a:bodyPr>
           <a:lstStyle/>
@@ -17155,7 +16972,6 @@
           <a:lstStyle/>
           <a:p>
             <a:pPr algn="ctr"/>
-            <a:endParaRPr/>
           </a:p>
         </p:txBody>
       </p:sp>
@@ -17176,7 +16992,7 @@
           <a:noFill/>
         </p:spPr>
         <p:txBody>
-          <a:bodyPr wrap="square" lIns="0" tIns="0" rIns="0" bIns="0" anchor="t">
+          <a:bodyPr wrap="square" anchor="t" lIns="0" rIns="0" tIns="0" bIns="0">
             <a:spAutoFit/>
           </a:bodyPr>
           <a:lstStyle/>
@@ -17230,7 +17046,7 @@
           <a:noFill/>
         </p:spPr>
         <p:txBody>
-          <a:bodyPr wrap="square" lIns="0" tIns="0" rIns="0" bIns="0" anchor="t">
+          <a:bodyPr wrap="square" anchor="t" lIns="0" rIns="0" tIns="0" bIns="0">
             <a:spAutoFit/>
           </a:bodyPr>
           <a:lstStyle/>
@@ -17325,7 +17141,6 @@
           <a:lstStyle/>
           <a:p>
             <a:pPr algn="ctr"/>
-            <a:endParaRPr/>
           </a:p>
         </p:txBody>
       </p:sp>
@@ -17372,7 +17187,6 @@
           <a:lstStyle/>
           <a:p>
             <a:pPr algn="ctr"/>
-            <a:endParaRPr/>
           </a:p>
         </p:txBody>
       </p:sp>
@@ -17393,7 +17207,7 @@
           <a:noFill/>
         </p:spPr>
         <p:txBody>
-          <a:bodyPr wrap="square" lIns="0" tIns="0" rIns="0" bIns="0" anchor="ctr">
+          <a:bodyPr wrap="square" anchor="ctr" lIns="0" rIns="0" tIns="0" bIns="0">
             <a:spAutoFit/>
           </a:bodyPr>
           <a:lstStyle/>
@@ -17448,7 +17262,7 @@
 </file>
 
 <file path=ppt/slides/slide2.xml><?xml version="1.0" encoding="utf-8"?>
-<p:sld xmlns:a="http://schemas.openxmlformats.org/drawingml/2006/main" xmlns:r="http://schemas.openxmlformats.org/officeDocument/2006/relationships" xmlns:p="http://schemas.openxmlformats.org/presentationml/2006/main">
+<p:sld xmlns:a="http://schemas.openxmlformats.org/drawingml/2006/main" xmlns:p="http://schemas.openxmlformats.org/presentationml/2006/main" xmlns:r="http://schemas.openxmlformats.org/officeDocument/2006/relationships">
   <p:cSld>
     <p:spTree>
       <p:nvGrpSpPr>
@@ -17456,14 +17270,7 @@
         <p:cNvGrpSpPr/>
         <p:nvPr/>
       </p:nvGrpSpPr>
-      <p:grpSpPr>
-        <a:xfrm>
-          <a:off x="0" y="0"/>
-          <a:ext cx="0" cy="0"/>
-          <a:chOff x="0" y="0"/>
-          <a:chExt cx="0" cy="0"/>
-        </a:xfrm>
-      </p:grpSpPr>
+      <p:grpSpPr/>
       <p:sp>
         <p:nvSpPr>
           <p:cNvPr id="2" name="Rectangle 1"/>
@@ -17505,7 +17312,6 @@
           <a:lstStyle/>
           <a:p>
             <a:pPr algn="ctr"/>
-            <a:endParaRPr/>
           </a:p>
         </p:txBody>
       </p:sp>
@@ -17550,7 +17356,6 @@
           <a:lstStyle/>
           <a:p>
             <a:pPr algn="ctr"/>
-            <a:endParaRPr/>
           </a:p>
         </p:txBody>
       </p:sp>
@@ -17571,7 +17376,7 @@
           <a:noFill/>
         </p:spPr>
         <p:txBody>
-          <a:bodyPr wrap="square" lIns="0" tIns="0" rIns="0" bIns="0" anchor="t">
+          <a:bodyPr wrap="square" anchor="t" lIns="0" rIns="0" tIns="0" bIns="0">
             <a:spAutoFit/>
           </a:bodyPr>
           <a:lstStyle/>
@@ -17616,7 +17421,7 @@
           <a:noFill/>
         </p:spPr>
         <p:txBody>
-          <a:bodyPr wrap="square" lIns="0" tIns="0" rIns="0" bIns="0" anchor="t">
+          <a:bodyPr wrap="square" anchor="t" lIns="0" rIns="0" tIns="0" bIns="0">
             <a:spAutoFit/>
           </a:bodyPr>
           <a:lstStyle/>
@@ -17685,7 +17490,6 @@
           <a:lstStyle/>
           <a:p>
             <a:pPr algn="ctr"/>
-            <a:endParaRPr/>
           </a:p>
         </p:txBody>
       </p:sp>
@@ -17706,7 +17510,7 @@
           <a:noFill/>
         </p:spPr>
         <p:txBody>
-          <a:bodyPr wrap="square" lIns="0" tIns="0" rIns="0" bIns="0" anchor="t">
+          <a:bodyPr wrap="square" anchor="t" lIns="0" rIns="0" tIns="0" bIns="0">
             <a:spAutoFit/>
           </a:bodyPr>
           <a:lstStyle/>
@@ -17751,7 +17555,7 @@
           <a:noFill/>
         </p:spPr>
         <p:txBody>
-          <a:bodyPr wrap="square" lIns="0" tIns="0" rIns="0" bIns="0" anchor="t">
+          <a:bodyPr wrap="square" anchor="t" lIns="0" rIns="0" tIns="0" bIns="0">
             <a:spAutoFit/>
           </a:bodyPr>
           <a:lstStyle/>
@@ -17824,7 +17628,6 @@
           <a:lstStyle/>
           <a:p>
             <a:pPr algn="ctr"/>
-            <a:endParaRPr/>
           </a:p>
         </p:txBody>
       </p:sp>
@@ -17845,7 +17648,7 @@
           <a:noFill/>
         </p:spPr>
         <p:txBody>
-          <a:bodyPr wrap="square" lIns="0" tIns="0" rIns="0" bIns="0" anchor="ctr">
+          <a:bodyPr wrap="square" anchor="ctr" lIns="0" rIns="0" tIns="0" bIns="0">
             <a:spAutoFit/>
           </a:bodyPr>
           <a:lstStyle/>
@@ -17890,7 +17693,7 @@
           <a:noFill/>
         </p:spPr>
         <p:txBody>
-          <a:bodyPr wrap="square" lIns="0" tIns="0" rIns="0" bIns="0" anchor="t">
+          <a:bodyPr wrap="square" anchor="t" lIns="0" rIns="0" tIns="0" bIns="0">
             <a:spAutoFit/>
           </a:bodyPr>
           <a:lstStyle/>
@@ -17935,7 +17738,7 @@
           <a:noFill/>
         </p:spPr>
         <p:txBody>
-          <a:bodyPr wrap="square" lIns="0" tIns="0" rIns="0" bIns="0" anchor="t">
+          <a:bodyPr wrap="square" anchor="t" lIns="0" rIns="0" tIns="0" bIns="0">
             <a:spAutoFit/>
           </a:bodyPr>
           <a:lstStyle/>
@@ -18008,7 +17811,6 @@
           <a:lstStyle/>
           <a:p>
             <a:pPr algn="ctr"/>
-            <a:endParaRPr/>
           </a:p>
         </p:txBody>
       </p:sp>
@@ -18029,7 +17831,7 @@
           <a:noFill/>
         </p:spPr>
         <p:txBody>
-          <a:bodyPr wrap="square" lIns="0" tIns="0" rIns="0" bIns="0" anchor="ctr">
+          <a:bodyPr wrap="square" anchor="ctr" lIns="0" rIns="0" tIns="0" bIns="0">
             <a:spAutoFit/>
           </a:bodyPr>
           <a:lstStyle/>
@@ -18074,7 +17876,7 @@
           <a:noFill/>
         </p:spPr>
         <p:txBody>
-          <a:bodyPr wrap="square" lIns="0" tIns="0" rIns="0" bIns="0" anchor="t">
+          <a:bodyPr wrap="square" anchor="t" lIns="0" rIns="0" tIns="0" bIns="0">
             <a:spAutoFit/>
           </a:bodyPr>
           <a:lstStyle/>
@@ -18119,7 +17921,7 @@
           <a:noFill/>
         </p:spPr>
         <p:txBody>
-          <a:bodyPr wrap="square" lIns="0" tIns="0" rIns="0" bIns="0" anchor="t">
+          <a:bodyPr wrap="square" anchor="t" lIns="0" rIns="0" tIns="0" bIns="0">
             <a:spAutoFit/>
           </a:bodyPr>
           <a:lstStyle/>
@@ -18192,7 +17994,6 @@
           <a:lstStyle/>
           <a:p>
             <a:pPr algn="ctr"/>
-            <a:endParaRPr/>
           </a:p>
         </p:txBody>
       </p:sp>
@@ -18213,7 +18014,7 @@
           <a:noFill/>
         </p:spPr>
         <p:txBody>
-          <a:bodyPr wrap="square" lIns="0" tIns="0" rIns="0" bIns="0" anchor="ctr">
+          <a:bodyPr wrap="square" anchor="ctr" lIns="0" rIns="0" tIns="0" bIns="0">
             <a:spAutoFit/>
           </a:bodyPr>
           <a:lstStyle/>
@@ -18258,7 +18059,7 @@
           <a:noFill/>
         </p:spPr>
         <p:txBody>
-          <a:bodyPr wrap="square" lIns="0" tIns="0" rIns="0" bIns="0" anchor="t">
+          <a:bodyPr wrap="square" anchor="t" lIns="0" rIns="0" tIns="0" bIns="0">
             <a:spAutoFit/>
           </a:bodyPr>
           <a:lstStyle/>
@@ -18303,7 +18104,7 @@
           <a:noFill/>
         </p:spPr>
         <p:txBody>
-          <a:bodyPr wrap="square" lIns="0" tIns="0" rIns="0" bIns="0" anchor="t">
+          <a:bodyPr wrap="square" anchor="t" lIns="0" rIns="0" tIns="0" bIns="0">
             <a:spAutoFit/>
           </a:bodyPr>
           <a:lstStyle/>
@@ -18376,7 +18177,6 @@
           <a:lstStyle/>
           <a:p>
             <a:pPr algn="ctr"/>
-            <a:endParaRPr/>
           </a:p>
         </p:txBody>
       </p:sp>
@@ -18397,7 +18197,7 @@
           <a:noFill/>
         </p:spPr>
         <p:txBody>
-          <a:bodyPr wrap="square" lIns="0" tIns="0" rIns="0" bIns="0" anchor="ctr">
+          <a:bodyPr wrap="square" anchor="ctr" lIns="0" rIns="0" tIns="0" bIns="0">
             <a:spAutoFit/>
           </a:bodyPr>
           <a:lstStyle/>
@@ -18442,7 +18242,7 @@
           <a:noFill/>
         </p:spPr>
         <p:txBody>
-          <a:bodyPr wrap="square" lIns="0" tIns="0" rIns="0" bIns="0" anchor="t">
+          <a:bodyPr wrap="square" anchor="t" lIns="0" rIns="0" tIns="0" bIns="0">
             <a:spAutoFit/>
           </a:bodyPr>
           <a:lstStyle/>
@@ -18487,7 +18287,7 @@
           <a:noFill/>
         </p:spPr>
         <p:txBody>
-          <a:bodyPr wrap="square" lIns="0" tIns="0" rIns="0" bIns="0" anchor="t">
+          <a:bodyPr wrap="square" anchor="t" lIns="0" rIns="0" tIns="0" bIns="0">
             <a:spAutoFit/>
           </a:bodyPr>
           <a:lstStyle/>
@@ -18560,7 +18360,6 @@
           <a:lstStyle/>
           <a:p>
             <a:pPr algn="ctr"/>
-            <a:endParaRPr/>
           </a:p>
         </p:txBody>
       </p:sp>
@@ -18581,7 +18380,7 @@
           <a:noFill/>
         </p:spPr>
         <p:txBody>
-          <a:bodyPr wrap="square" lIns="0" tIns="0" rIns="0" bIns="0" anchor="ctr">
+          <a:bodyPr wrap="square" anchor="ctr" lIns="0" rIns="0" tIns="0" bIns="0">
             <a:spAutoFit/>
           </a:bodyPr>
           <a:lstStyle/>
@@ -18626,7 +18425,7 @@
           <a:noFill/>
         </p:spPr>
         <p:txBody>
-          <a:bodyPr wrap="square" lIns="0" tIns="0" rIns="0" bIns="0" anchor="t">
+          <a:bodyPr wrap="square" anchor="t" lIns="0" rIns="0" tIns="0" bIns="0">
             <a:spAutoFit/>
           </a:bodyPr>
           <a:lstStyle/>
@@ -18671,7 +18470,7 @@
           <a:noFill/>
         </p:spPr>
         <p:txBody>
-          <a:bodyPr wrap="square" lIns="0" tIns="0" rIns="0" bIns="0" anchor="t">
+          <a:bodyPr wrap="square" anchor="t" lIns="0" rIns="0" tIns="0" bIns="0">
             <a:spAutoFit/>
           </a:bodyPr>
           <a:lstStyle/>
@@ -18744,7 +18543,6 @@
           <a:lstStyle/>
           <a:p>
             <a:pPr algn="ctr"/>
-            <a:endParaRPr/>
           </a:p>
         </p:txBody>
       </p:sp>
@@ -18765,7 +18563,7 @@
           <a:noFill/>
         </p:spPr>
         <p:txBody>
-          <a:bodyPr wrap="square" lIns="0" tIns="0" rIns="0" bIns="0" anchor="ctr">
+          <a:bodyPr wrap="square" anchor="ctr" lIns="0" rIns="0" tIns="0" bIns="0">
             <a:spAutoFit/>
           </a:bodyPr>
           <a:lstStyle/>
@@ -18810,7 +18608,7 @@
           <a:noFill/>
         </p:spPr>
         <p:txBody>
-          <a:bodyPr wrap="square" lIns="0" tIns="0" rIns="0" bIns="0" anchor="t">
+          <a:bodyPr wrap="square" anchor="t" lIns="0" rIns="0" tIns="0" bIns="0">
             <a:spAutoFit/>
           </a:bodyPr>
           <a:lstStyle/>
@@ -18855,7 +18653,7 @@
           <a:noFill/>
         </p:spPr>
         <p:txBody>
-          <a:bodyPr wrap="square" lIns="0" tIns="0" rIns="0" bIns="0" anchor="t">
+          <a:bodyPr wrap="square" anchor="t" lIns="0" rIns="0" tIns="0" bIns="0">
             <a:spAutoFit/>
           </a:bodyPr>
           <a:lstStyle/>
@@ -18892,7 +18690,7 @@
 </file>
 
 <file path=ppt/slides/slide20.xml><?xml version="1.0" encoding="utf-8"?>
-<p:sld xmlns:a="http://schemas.openxmlformats.org/drawingml/2006/main" xmlns:r="http://schemas.openxmlformats.org/officeDocument/2006/relationships" xmlns:p="http://schemas.openxmlformats.org/presentationml/2006/main">
+<p:sld xmlns:a="http://schemas.openxmlformats.org/drawingml/2006/main" xmlns:p="http://schemas.openxmlformats.org/presentationml/2006/main" xmlns:r="http://schemas.openxmlformats.org/officeDocument/2006/relationships">
   <p:cSld>
     <p:spTree>
       <p:nvGrpSpPr>
@@ -18900,14 +18698,7 @@
         <p:cNvGrpSpPr/>
         <p:nvPr/>
       </p:nvGrpSpPr>
-      <p:grpSpPr>
-        <a:xfrm>
-          <a:off x="0" y="0"/>
-          <a:ext cx="0" cy="0"/>
-          <a:chOff x="0" y="0"/>
-          <a:chExt cx="0" cy="0"/>
-        </a:xfrm>
-      </p:grpSpPr>
+      <p:grpSpPr/>
       <p:sp>
         <p:nvSpPr>
           <p:cNvPr id="2" name="Rectangle 1"/>
@@ -18949,7 +18740,6 @@
           <a:lstStyle/>
           <a:p>
             <a:pPr algn="ctr"/>
-            <a:endParaRPr/>
           </a:p>
         </p:txBody>
       </p:sp>
@@ -18994,7 +18784,6 @@
           <a:lstStyle/>
           <a:p>
             <a:pPr algn="ctr"/>
-            <a:endParaRPr/>
           </a:p>
         </p:txBody>
       </p:sp>
@@ -19015,7 +18804,7 @@
           <a:noFill/>
         </p:spPr>
         <p:txBody>
-          <a:bodyPr wrap="square" lIns="0" tIns="0" rIns="0" bIns="0" anchor="t">
+          <a:bodyPr wrap="square" anchor="t" lIns="0" rIns="0" tIns="0" bIns="0">
             <a:spAutoFit/>
           </a:bodyPr>
           <a:lstStyle/>
@@ -19060,7 +18849,7 @@
           <a:noFill/>
         </p:spPr>
         <p:txBody>
-          <a:bodyPr wrap="square" lIns="0" tIns="0" rIns="0" bIns="0" anchor="t">
+          <a:bodyPr wrap="square" anchor="t" lIns="0" rIns="0" tIns="0" bIns="0">
             <a:spAutoFit/>
           </a:bodyPr>
           <a:lstStyle/>
@@ -19129,7 +18918,6 @@
           <a:lstStyle/>
           <a:p>
             <a:pPr algn="ctr"/>
-            <a:endParaRPr/>
           </a:p>
         </p:txBody>
       </p:sp>
@@ -19150,7 +18938,7 @@
           <a:noFill/>
         </p:spPr>
         <p:txBody>
-          <a:bodyPr wrap="square" lIns="0" tIns="0" rIns="0" bIns="0" anchor="t">
+          <a:bodyPr wrap="square" anchor="t" lIns="0" rIns="0" tIns="0" bIns="0">
             <a:spAutoFit/>
           </a:bodyPr>
           <a:lstStyle/>
@@ -19195,7 +18983,7 @@
           <a:noFill/>
         </p:spPr>
         <p:txBody>
-          <a:bodyPr wrap="square" lIns="0" tIns="0" rIns="0" bIns="0" anchor="t">
+          <a:bodyPr wrap="square" anchor="t" lIns="0" rIns="0" tIns="0" bIns="0">
             <a:spAutoFit/>
           </a:bodyPr>
           <a:lstStyle/>
@@ -19268,7 +19056,6 @@
           <a:lstStyle/>
           <a:p>
             <a:pPr algn="ctr"/>
-            <a:endParaRPr/>
           </a:p>
         </p:txBody>
       </p:sp>
@@ -19315,7 +19102,6 @@
           <a:lstStyle/>
           <a:p>
             <a:pPr algn="ctr"/>
-            <a:endParaRPr/>
           </a:p>
         </p:txBody>
       </p:sp>
@@ -19336,7 +19122,7 @@
           <a:noFill/>
         </p:spPr>
         <p:txBody>
-          <a:bodyPr wrap="square" lIns="0" tIns="0" rIns="0" bIns="0" anchor="ctr">
+          <a:bodyPr wrap="square" anchor="ctr" lIns="0" rIns="0" tIns="0" bIns="0">
             <a:spAutoFit/>
           </a:bodyPr>
           <a:lstStyle/>
@@ -19381,7 +19167,7 @@
           <a:noFill/>
         </p:spPr>
         <p:txBody>
-          <a:bodyPr wrap="square" lIns="0" tIns="0" rIns="0" bIns="0" anchor="t">
+          <a:bodyPr wrap="square" anchor="t" lIns="0" rIns="0" tIns="0" bIns="0">
             <a:spAutoFit/>
           </a:bodyPr>
           <a:lstStyle/>
@@ -19426,7 +19212,7 @@
           <a:noFill/>
         </p:spPr>
         <p:txBody>
-          <a:bodyPr wrap="square" lIns="0" tIns="0" rIns="0" bIns="0" anchor="t">
+          <a:bodyPr wrap="square" anchor="t" lIns="0" rIns="0" tIns="0" bIns="0">
             <a:spAutoFit/>
           </a:bodyPr>
           <a:lstStyle/>
@@ -19499,7 +19285,6 @@
           <a:lstStyle/>
           <a:p>
             <a:pPr algn="ctr"/>
-            <a:endParaRPr/>
           </a:p>
         </p:txBody>
       </p:sp>
@@ -19546,7 +19331,6 @@
           <a:lstStyle/>
           <a:p>
             <a:pPr algn="ctr"/>
-            <a:endParaRPr/>
           </a:p>
         </p:txBody>
       </p:sp>
@@ -19567,7 +19351,7 @@
           <a:noFill/>
         </p:spPr>
         <p:txBody>
-          <a:bodyPr wrap="square" lIns="0" tIns="0" rIns="0" bIns="0" anchor="ctr">
+          <a:bodyPr wrap="square" anchor="ctr" lIns="0" rIns="0" tIns="0" bIns="0">
             <a:spAutoFit/>
           </a:bodyPr>
           <a:lstStyle/>
@@ -19612,7 +19396,7 @@
           <a:noFill/>
         </p:spPr>
         <p:txBody>
-          <a:bodyPr wrap="square" lIns="0" tIns="0" rIns="0" bIns="0" anchor="t">
+          <a:bodyPr wrap="square" anchor="t" lIns="0" rIns="0" tIns="0" bIns="0">
             <a:spAutoFit/>
           </a:bodyPr>
           <a:lstStyle/>
@@ -19657,7 +19441,7 @@
           <a:noFill/>
         </p:spPr>
         <p:txBody>
-          <a:bodyPr wrap="square" lIns="0" tIns="0" rIns="0" bIns="0" anchor="t">
+          <a:bodyPr wrap="square" anchor="t" lIns="0" rIns="0" tIns="0" bIns="0">
             <a:spAutoFit/>
           </a:bodyPr>
           <a:lstStyle/>
@@ -19730,7 +19514,6 @@
           <a:lstStyle/>
           <a:p>
             <a:pPr algn="ctr"/>
-            <a:endParaRPr/>
           </a:p>
         </p:txBody>
       </p:sp>
@@ -19777,7 +19560,6 @@
           <a:lstStyle/>
           <a:p>
             <a:pPr algn="ctr"/>
-            <a:endParaRPr/>
           </a:p>
         </p:txBody>
       </p:sp>
@@ -19798,7 +19580,7 @@
           <a:noFill/>
         </p:spPr>
         <p:txBody>
-          <a:bodyPr wrap="square" lIns="0" tIns="0" rIns="0" bIns="0" anchor="ctr">
+          <a:bodyPr wrap="square" anchor="ctr" lIns="0" rIns="0" tIns="0" bIns="0">
             <a:spAutoFit/>
           </a:bodyPr>
           <a:lstStyle/>
@@ -19843,7 +19625,7 @@
           <a:noFill/>
         </p:spPr>
         <p:txBody>
-          <a:bodyPr wrap="square" lIns="0" tIns="0" rIns="0" bIns="0" anchor="t">
+          <a:bodyPr wrap="square" anchor="t" lIns="0" rIns="0" tIns="0" bIns="0">
             <a:spAutoFit/>
           </a:bodyPr>
           <a:lstStyle/>
@@ -19888,7 +19670,7 @@
           <a:noFill/>
         </p:spPr>
         <p:txBody>
-          <a:bodyPr wrap="square" lIns="0" tIns="0" rIns="0" bIns="0" anchor="t">
+          <a:bodyPr wrap="square" anchor="t" lIns="0" rIns="0" tIns="0" bIns="0">
             <a:spAutoFit/>
           </a:bodyPr>
           <a:lstStyle/>
@@ -19961,7 +19743,6 @@
           <a:lstStyle/>
           <a:p>
             <a:pPr algn="ctr"/>
-            <a:endParaRPr/>
           </a:p>
         </p:txBody>
       </p:sp>
@@ -20008,7 +19789,6 @@
           <a:lstStyle/>
           <a:p>
             <a:pPr algn="ctr"/>
-            <a:endParaRPr/>
           </a:p>
         </p:txBody>
       </p:sp>
@@ -20029,7 +19809,7 @@
           <a:noFill/>
         </p:spPr>
         <p:txBody>
-          <a:bodyPr wrap="square" lIns="0" tIns="0" rIns="0" bIns="0" anchor="ctr">
+          <a:bodyPr wrap="square" anchor="ctr" lIns="0" rIns="0" tIns="0" bIns="0">
             <a:spAutoFit/>
           </a:bodyPr>
           <a:lstStyle/>
@@ -20074,7 +19854,7 @@
           <a:noFill/>
         </p:spPr>
         <p:txBody>
-          <a:bodyPr wrap="square" lIns="0" tIns="0" rIns="0" bIns="0" anchor="t">
+          <a:bodyPr wrap="square" anchor="t" lIns="0" rIns="0" tIns="0" bIns="0">
             <a:spAutoFit/>
           </a:bodyPr>
           <a:lstStyle/>
@@ -20119,7 +19899,7 @@
           <a:noFill/>
         </p:spPr>
         <p:txBody>
-          <a:bodyPr wrap="square" lIns="0" tIns="0" rIns="0" bIns="0" anchor="t">
+          <a:bodyPr wrap="square" anchor="t" lIns="0" rIns="0" tIns="0" bIns="0">
             <a:spAutoFit/>
           </a:bodyPr>
           <a:lstStyle/>
@@ -20192,7 +19972,6 @@
           <a:lstStyle/>
           <a:p>
             <a:pPr algn="ctr"/>
-            <a:endParaRPr/>
           </a:p>
         </p:txBody>
       </p:sp>
@@ -20239,7 +20018,6 @@
           <a:lstStyle/>
           <a:p>
             <a:pPr algn="ctr"/>
-            <a:endParaRPr/>
           </a:p>
         </p:txBody>
       </p:sp>
@@ -20260,7 +20038,7 @@
           <a:noFill/>
         </p:spPr>
         <p:txBody>
-          <a:bodyPr wrap="square" lIns="0" tIns="0" rIns="0" bIns="0" anchor="ctr">
+          <a:bodyPr wrap="square" anchor="ctr" lIns="0" rIns="0" tIns="0" bIns="0">
             <a:spAutoFit/>
           </a:bodyPr>
           <a:lstStyle/>
@@ -20305,7 +20083,7 @@
           <a:noFill/>
         </p:spPr>
         <p:txBody>
-          <a:bodyPr wrap="square" lIns="0" tIns="0" rIns="0" bIns="0" anchor="t">
+          <a:bodyPr wrap="square" anchor="t" lIns="0" rIns="0" tIns="0" bIns="0">
             <a:spAutoFit/>
           </a:bodyPr>
           <a:lstStyle/>
@@ -20350,7 +20128,7 @@
           <a:noFill/>
         </p:spPr>
         <p:txBody>
-          <a:bodyPr wrap="square" lIns="0" tIns="0" rIns="0" bIns="0" anchor="t">
+          <a:bodyPr wrap="square" anchor="t" lIns="0" rIns="0" tIns="0" bIns="0">
             <a:spAutoFit/>
           </a:bodyPr>
           <a:lstStyle/>
@@ -20423,7 +20201,6 @@
           <a:lstStyle/>
           <a:p>
             <a:pPr algn="ctr"/>
-            <a:endParaRPr/>
           </a:p>
         </p:txBody>
       </p:sp>
@@ -20470,7 +20247,6 @@
           <a:lstStyle/>
           <a:p>
             <a:pPr algn="ctr"/>
-            <a:endParaRPr/>
           </a:p>
         </p:txBody>
       </p:sp>
@@ -20491,7 +20267,7 @@
           <a:noFill/>
         </p:spPr>
         <p:txBody>
-          <a:bodyPr wrap="square" lIns="0" tIns="0" rIns="0" bIns="0" anchor="ctr">
+          <a:bodyPr wrap="square" anchor="ctr" lIns="0" rIns="0" tIns="0" bIns="0">
             <a:spAutoFit/>
           </a:bodyPr>
           <a:lstStyle/>
@@ -20536,7 +20312,7 @@
           <a:noFill/>
         </p:spPr>
         <p:txBody>
-          <a:bodyPr wrap="square" lIns="0" tIns="0" rIns="0" bIns="0" anchor="t">
+          <a:bodyPr wrap="square" anchor="t" lIns="0" rIns="0" tIns="0" bIns="0">
             <a:spAutoFit/>
           </a:bodyPr>
           <a:lstStyle/>
@@ -20581,7 +20357,7 @@
           <a:noFill/>
         </p:spPr>
         <p:txBody>
-          <a:bodyPr wrap="square" lIns="0" tIns="0" rIns="0" bIns="0" anchor="t">
+          <a:bodyPr wrap="square" anchor="t" lIns="0" rIns="0" tIns="0" bIns="0">
             <a:spAutoFit/>
           </a:bodyPr>
           <a:lstStyle/>
@@ -20626,7 +20402,7 @@
           <a:noFill/>
         </p:spPr>
         <p:txBody>
-          <a:bodyPr wrap="square" lIns="0" tIns="0" rIns="0" bIns="0" anchor="t">
+          <a:bodyPr wrap="square" anchor="t" lIns="0" rIns="0" tIns="0" bIns="0">
             <a:spAutoFit/>
           </a:bodyPr>
           <a:lstStyle/>
@@ -20663,7 +20439,7 @@
 </file>
 
 <file path=ppt/slides/slide3.xml><?xml version="1.0" encoding="utf-8"?>
-<p:sld xmlns:a="http://schemas.openxmlformats.org/drawingml/2006/main" xmlns:r="http://schemas.openxmlformats.org/officeDocument/2006/relationships" xmlns:p="http://schemas.openxmlformats.org/presentationml/2006/main">
+<p:sld xmlns:a="http://schemas.openxmlformats.org/drawingml/2006/main" xmlns:p="http://schemas.openxmlformats.org/presentationml/2006/main" xmlns:r="http://schemas.openxmlformats.org/officeDocument/2006/relationships">
   <p:cSld>
     <p:spTree>
       <p:nvGrpSpPr>
@@ -20671,14 +20447,7 @@
         <p:cNvGrpSpPr/>
         <p:nvPr/>
       </p:nvGrpSpPr>
-      <p:grpSpPr>
-        <a:xfrm>
-          <a:off x="0" y="0"/>
-          <a:ext cx="0" cy="0"/>
-          <a:chOff x="0" y="0"/>
-          <a:chExt cx="0" cy="0"/>
-        </a:xfrm>
-      </p:grpSpPr>
+      <p:grpSpPr/>
       <p:sp>
         <p:nvSpPr>
           <p:cNvPr id="2" name="Rectangle 1"/>
@@ -20720,7 +20489,6 @@
           <a:lstStyle/>
           <a:p>
             <a:pPr algn="ctr"/>
-            <a:endParaRPr/>
           </a:p>
         </p:txBody>
       </p:sp>
@@ -20765,7 +20533,6 @@
           <a:lstStyle/>
           <a:p>
             <a:pPr algn="ctr"/>
-            <a:endParaRPr/>
           </a:p>
         </p:txBody>
       </p:sp>
@@ -20786,7 +20553,7 @@
           <a:noFill/>
         </p:spPr>
         <p:txBody>
-          <a:bodyPr wrap="square" lIns="0" tIns="0" rIns="0" bIns="0" anchor="t">
+          <a:bodyPr wrap="square" anchor="t" lIns="0" rIns="0" tIns="0" bIns="0">
             <a:spAutoFit/>
           </a:bodyPr>
           <a:lstStyle/>
@@ -20831,7 +20598,7 @@
           <a:noFill/>
         </p:spPr>
         <p:txBody>
-          <a:bodyPr wrap="square" lIns="0" tIns="0" rIns="0" bIns="0" anchor="t">
+          <a:bodyPr wrap="square" anchor="t" lIns="0" rIns="0" tIns="0" bIns="0">
             <a:spAutoFit/>
           </a:bodyPr>
           <a:lstStyle/>
@@ -20900,7 +20667,6 @@
           <a:lstStyle/>
           <a:p>
             <a:pPr algn="ctr"/>
-            <a:endParaRPr/>
           </a:p>
         </p:txBody>
       </p:sp>
@@ -20921,7 +20687,7 @@
           <a:noFill/>
         </p:spPr>
         <p:txBody>
-          <a:bodyPr wrap="square" lIns="0" tIns="0" rIns="0" bIns="0" anchor="t">
+          <a:bodyPr wrap="square" anchor="t" lIns="0" rIns="0" tIns="0" bIns="0">
             <a:spAutoFit/>
           </a:bodyPr>
           <a:lstStyle/>
@@ -20966,7 +20732,7 @@
           <a:noFill/>
         </p:spPr>
         <p:txBody>
-          <a:bodyPr wrap="square" lIns="0" tIns="0" rIns="0" bIns="0" anchor="t">
+          <a:bodyPr wrap="square" anchor="t" lIns="0" rIns="0" tIns="0" bIns="0">
             <a:spAutoFit/>
           </a:bodyPr>
           <a:lstStyle/>
@@ -21039,7 +20805,6 @@
           <a:lstStyle/>
           <a:p>
             <a:pPr algn="ctr"/>
-            <a:endParaRPr/>
           </a:p>
         </p:txBody>
       </p:sp>
@@ -21086,7 +20851,6 @@
           <a:lstStyle/>
           <a:p>
             <a:pPr algn="ctr"/>
-            <a:endParaRPr/>
           </a:p>
         </p:txBody>
       </p:sp>
@@ -21107,7 +20871,7 @@
           <a:noFill/>
         </p:spPr>
         <p:txBody>
-          <a:bodyPr wrap="square" lIns="0" tIns="0" rIns="0" bIns="0" anchor="ctr">
+          <a:bodyPr wrap="square" anchor="ctr" lIns="0" rIns="0" tIns="0" bIns="0">
             <a:spAutoFit/>
           </a:bodyPr>
           <a:lstStyle/>
@@ -21152,7 +20916,7 @@
           <a:noFill/>
         </p:spPr>
         <p:txBody>
-          <a:bodyPr wrap="square" lIns="0" tIns="0" rIns="0" bIns="0" anchor="t">
+          <a:bodyPr wrap="square" anchor="t" lIns="0" rIns="0" tIns="0" bIns="0">
             <a:spAutoFit/>
           </a:bodyPr>
           <a:lstStyle/>
@@ -21197,7 +20961,7 @@
           <a:noFill/>
         </p:spPr>
         <p:txBody>
-          <a:bodyPr wrap="square" lIns="0" tIns="0" rIns="0" bIns="0" anchor="t">
+          <a:bodyPr wrap="square" anchor="t" lIns="0" rIns="0" tIns="0" bIns="0">
             <a:spAutoFit/>
           </a:bodyPr>
           <a:lstStyle/>
@@ -21270,7 +21034,6 @@
           <a:lstStyle/>
           <a:p>
             <a:pPr algn="ctr"/>
-            <a:endParaRPr/>
           </a:p>
         </p:txBody>
       </p:sp>
@@ -21317,7 +21080,6 @@
           <a:lstStyle/>
           <a:p>
             <a:pPr algn="ctr"/>
-            <a:endParaRPr/>
           </a:p>
         </p:txBody>
       </p:sp>
@@ -21338,7 +21100,7 @@
           <a:noFill/>
         </p:spPr>
         <p:txBody>
-          <a:bodyPr wrap="square" lIns="0" tIns="0" rIns="0" bIns="0" anchor="ctr">
+          <a:bodyPr wrap="square" anchor="ctr" lIns="0" rIns="0" tIns="0" bIns="0">
             <a:spAutoFit/>
           </a:bodyPr>
           <a:lstStyle/>
@@ -21383,7 +21145,7 @@
           <a:noFill/>
         </p:spPr>
         <p:txBody>
-          <a:bodyPr wrap="square" lIns="0" tIns="0" rIns="0" bIns="0" anchor="t">
+          <a:bodyPr wrap="square" anchor="t" lIns="0" rIns="0" tIns="0" bIns="0">
             <a:spAutoFit/>
           </a:bodyPr>
           <a:lstStyle/>
@@ -21428,7 +21190,7 @@
           <a:noFill/>
         </p:spPr>
         <p:txBody>
-          <a:bodyPr wrap="square" lIns="0" tIns="0" rIns="0" bIns="0" anchor="t">
+          <a:bodyPr wrap="square" anchor="t" lIns="0" rIns="0" tIns="0" bIns="0">
             <a:spAutoFit/>
           </a:bodyPr>
           <a:lstStyle/>
@@ -21501,7 +21263,6 @@
           <a:lstStyle/>
           <a:p>
             <a:pPr algn="ctr"/>
-            <a:endParaRPr/>
           </a:p>
         </p:txBody>
       </p:sp>
@@ -21548,7 +21309,6 @@
           <a:lstStyle/>
           <a:p>
             <a:pPr algn="ctr"/>
-            <a:endParaRPr/>
           </a:p>
         </p:txBody>
       </p:sp>
@@ -21569,7 +21329,7 @@
           <a:noFill/>
         </p:spPr>
         <p:txBody>
-          <a:bodyPr wrap="square" lIns="0" tIns="0" rIns="0" bIns="0" anchor="ctr">
+          <a:bodyPr wrap="square" anchor="ctr" lIns="0" rIns="0" tIns="0" bIns="0">
             <a:spAutoFit/>
           </a:bodyPr>
           <a:lstStyle/>
@@ -21614,7 +21374,7 @@
           <a:noFill/>
         </p:spPr>
         <p:txBody>
-          <a:bodyPr wrap="square" lIns="0" tIns="0" rIns="0" bIns="0" anchor="t">
+          <a:bodyPr wrap="square" anchor="t" lIns="0" rIns="0" tIns="0" bIns="0">
             <a:spAutoFit/>
           </a:bodyPr>
           <a:lstStyle/>
@@ -21659,7 +21419,7 @@
           <a:noFill/>
         </p:spPr>
         <p:txBody>
-          <a:bodyPr wrap="square" lIns="0" tIns="0" rIns="0" bIns="0" anchor="t">
+          <a:bodyPr wrap="square" anchor="t" lIns="0" rIns="0" tIns="0" bIns="0">
             <a:spAutoFit/>
           </a:bodyPr>
           <a:lstStyle/>
@@ -21732,7 +21492,6 @@
           <a:lstStyle/>
           <a:p>
             <a:pPr algn="ctr"/>
-            <a:endParaRPr/>
           </a:p>
         </p:txBody>
       </p:sp>
@@ -21779,7 +21538,6 @@
           <a:lstStyle/>
           <a:p>
             <a:pPr algn="ctr"/>
-            <a:endParaRPr/>
           </a:p>
         </p:txBody>
       </p:sp>
@@ -21800,7 +21558,7 @@
           <a:noFill/>
         </p:spPr>
         <p:txBody>
-          <a:bodyPr wrap="square" lIns="0" tIns="0" rIns="0" bIns="0" anchor="ctr">
+          <a:bodyPr wrap="square" anchor="ctr" lIns="0" rIns="0" tIns="0" bIns="0">
             <a:spAutoFit/>
           </a:bodyPr>
           <a:lstStyle/>
@@ -21845,7 +21603,7 @@
           <a:noFill/>
         </p:spPr>
         <p:txBody>
-          <a:bodyPr wrap="square" lIns="0" tIns="0" rIns="0" bIns="0" anchor="t">
+          <a:bodyPr wrap="square" anchor="t" lIns="0" rIns="0" tIns="0" bIns="0">
             <a:spAutoFit/>
           </a:bodyPr>
           <a:lstStyle/>
@@ -21890,7 +21648,7 @@
           <a:noFill/>
         </p:spPr>
         <p:txBody>
-          <a:bodyPr wrap="square" lIns="0" tIns="0" rIns="0" bIns="0" anchor="t">
+          <a:bodyPr wrap="square" anchor="t" lIns="0" rIns="0" tIns="0" bIns="0">
             <a:spAutoFit/>
           </a:bodyPr>
           <a:lstStyle/>
@@ -21914,6 +21672,51 @@
                 <a:latin typeface="Segoe UI"/>
               </a:rPr>
               <a:t>apt / dnf / apk en Debian, Fedora, RHEL, Alpine.</a:t>
+            </a:r>
+          </a:p>
+        </p:txBody>
+      </p:sp>
+      <p:sp>
+        <p:nvSpPr>
+          <p:cNvPr id="29" name="TextBox 28"/>
+          <p:cNvSpPr txBox="1"/>
+          <p:nvPr/>
+        </p:nvSpPr>
+        <p:spPr>
+          <a:xfrm>
+            <a:off x="640080" y="3666744"/>
+            <a:ext cx="5394960" cy="274320"/>
+          </a:xfrm>
+          <a:prstGeom prst="rect">
+            <a:avLst/>
+          </a:prstGeom>
+          <a:noFill/>
+        </p:spPr>
+        <p:txBody>
+          <a:bodyPr wrap="square" anchor="t" lIns="0" rIns="0" tIns="0" bIns="0">
+            <a:spAutoFit/>
+          </a:bodyPr>
+          <a:lstStyle/>
+          <a:p>
+            <a:pPr algn="l">
+              <a:lnSpc>
+                <a:spcPct val="100000"/>
+              </a:lnSpc>
+              <a:spcBef>
+                <a:spcPts val="0"/>
+              </a:spcBef>
+              <a:spcAft>
+                <a:spcPts val="400"/>
+              </a:spcAft>
+            </a:pPr>
+            <a:r>
+              <a:rPr sz="1100" b="1">
+                <a:solidFill>
+                  <a:srgbClr val="7AA2C7"/>
+                </a:solidFill>
+                <a:latin typeface="Segoe UI"/>
+              </a:rPr>
+              <a:t>Arrancar en cualquier proyecto</a:t>
             </a:r>
           </a:p>
         </p:txBody>
@@ -21963,7 +21766,6 @@
           <a:lstStyle/>
           <a:p>
             <a:pPr algn="ctr"/>
-            <a:endParaRPr/>
           </a:p>
         </p:txBody>
       </p:sp>
@@ -21976,15 +21778,15 @@
         <p:spPr>
           <a:xfrm>
             <a:off x="896112" y="4160520"/>
-            <a:ext cx="4937760" cy="634276"/>
-          </a:xfrm>
-          <a:prstGeom prst="rect">
-            <a:avLst/>
-          </a:prstGeom>
-          <a:noFill/>
-        </p:spPr>
-        <p:txBody>
-          <a:bodyPr wrap="square" lIns="0" tIns="0" rIns="0" bIns="0" anchor="t">
+            <a:ext cx="4937760" cy="914400"/>
+          </a:xfrm>
+          <a:prstGeom prst="rect">
+            <a:avLst/>
+          </a:prstGeom>
+          <a:noFill/>
+        </p:spPr>
+        <p:txBody>
+          <a:bodyPr wrap="square" anchor="t" lIns="0" rIns="0" tIns="0" bIns="0">
             <a:spAutoFit/>
           </a:bodyPr>
           <a:lstStyle/>
@@ -22000,12 +21802,15 @@
                 <a:spcPts val="200"/>
               </a:spcAft>
             </a:pPr>
-            <a:endParaRPr lang="en-GB" sz="1150" b="0" dirty="0">
-              <a:solidFill>
-                <a:srgbClr val="E8EAED"/>
-              </a:solidFill>
-              <a:latin typeface="Consolas"/>
-            </a:endParaRPr>
+            <a:r>
+              <a:rPr sz="1150" b="0">
+                <a:solidFill>
+                  <a:srgbClr val="E8EAED"/>
+                </a:solidFill>
+                <a:latin typeface="Consolas"/>
+              </a:rPr>
+              <a:t>cd tu-proyecto</a:t>
+            </a:r>
           </a:p>
           <a:p>
             <a:pPr algn="l">
@@ -22020,75 +21825,14 @@
               </a:spcAft>
             </a:pPr>
             <a:r>
-              <a:rPr sz="1150" b="0" dirty="0">
+              <a:rPr sz="1150" b="0">
                 <a:solidFill>
                   <a:srgbClr val="E8EAED"/>
                 </a:solidFill>
                 <a:latin typeface="Consolas"/>
               </a:rPr>
-              <a:t>cd </a:t>
-            </a:r>
-            <a:r>
-              <a:rPr sz="1150" b="0" dirty="0" err="1">
-                <a:solidFill>
-                  <a:srgbClr val="E8EAED"/>
-                </a:solidFill>
-                <a:latin typeface="Consolas"/>
-              </a:rPr>
-              <a:t>tu-proyecto</a:t>
-            </a:r>
-            <a:endParaRPr sz="1150" b="0" dirty="0">
-              <a:solidFill>
-                <a:srgbClr val="E8EAED"/>
-              </a:solidFill>
-              <a:latin typeface="Consolas"/>
-            </a:endParaRPr>
-          </a:p>
-          <a:p>
-            <a:pPr algn="l">
-              <a:lnSpc>
-                <a:spcPct val="112000"/>
-              </a:lnSpc>
-              <a:spcBef>
-                <a:spcPts val="0"/>
-              </a:spcBef>
-              <a:spcAft>
-                <a:spcPts val="200"/>
-              </a:spcAft>
-            </a:pPr>
-            <a:r>
-              <a:rPr sz="1150" b="0" dirty="0" err="1">
-                <a:solidFill>
-                  <a:srgbClr val="E8EAED"/>
-                </a:solidFill>
-                <a:latin typeface="Consolas"/>
-              </a:rPr>
-              <a:t>claude</a:t>
-            </a:r>
-            <a:r>
-              <a:rPr sz="1150" b="0" dirty="0">
-                <a:solidFill>
-                  <a:srgbClr val="E8EAED"/>
-                </a:solidFill>
-                <a:latin typeface="Consolas"/>
-              </a:rPr>
-              <a:t>            # login la 1ª </a:t>
-            </a:r>
-            <a:r>
-              <a:rPr sz="1150" b="0" dirty="0" err="1">
-                <a:solidFill>
-                  <a:srgbClr val="E8EAED"/>
-                </a:solidFill>
-                <a:latin typeface="Consolas"/>
-              </a:rPr>
-              <a:t>vez</a:t>
-            </a:r>
-            <a:endParaRPr sz="1150" b="0" dirty="0">
-              <a:solidFill>
-                <a:srgbClr val="E8EAED"/>
-              </a:solidFill>
-              <a:latin typeface="Consolas"/>
-            </a:endParaRPr>
+              <a:t>claude            # login la 1ª vez</a:t>
+            </a:r>
           </a:p>
         </p:txBody>
       </p:sp>
@@ -22100,7 +21844,7 @@
         </p:nvSpPr>
         <p:spPr>
           <a:xfrm>
-            <a:off x="6277356" y="3977640"/>
+            <a:off x="6309360" y="3666744"/>
             <a:ext cx="5257800" cy="1554480"/>
           </a:xfrm>
           <a:prstGeom prst="roundRect">
@@ -22137,7 +21881,6 @@
           <a:lstStyle/>
           <a:p>
             <a:pPr algn="ctr"/>
-            <a:endParaRPr/>
           </a:p>
         </p:txBody>
       </p:sp>
@@ -22149,7 +21892,7 @@
         </p:nvSpPr>
         <p:spPr>
           <a:xfrm>
-            <a:off x="6537960" y="4041647"/>
+            <a:off x="6583680" y="3867911"/>
             <a:ext cx="4800600" cy="365760"/>
           </a:xfrm>
           <a:prstGeom prst="rect">
@@ -22158,7 +21901,7 @@
           <a:noFill/>
         </p:spPr>
         <p:txBody>
-          <a:bodyPr wrap="square" lIns="0" tIns="0" rIns="0" bIns="0" anchor="t">
+          <a:bodyPr wrap="square" anchor="t" lIns="0" rIns="0" tIns="0" bIns="0">
             <a:spAutoFit/>
           </a:bodyPr>
           <a:lstStyle/>
@@ -22175,67 +21918,13 @@
               </a:spcAft>
             </a:pPr>
             <a:r>
-              <a:rPr sz="1400" b="1" dirty="0">
+              <a:rPr sz="1400" b="1">
                 <a:solidFill>
                   <a:srgbClr val="7AA2C7"/>
                 </a:solidFill>
                 <a:latin typeface="Segoe UI"/>
               </a:rPr>
-              <a:t>El </a:t>
-            </a:r>
-            <a:r>
-              <a:rPr sz="1400" b="1" dirty="0" err="1">
-                <a:solidFill>
-                  <a:srgbClr val="7AA2C7"/>
-                </a:solidFill>
-                <a:latin typeface="Segoe UI"/>
-              </a:rPr>
-              <a:t>mismo</a:t>
-            </a:r>
-            <a:r>
-              <a:rPr sz="1400" b="1" dirty="0">
-                <a:solidFill>
-                  <a:srgbClr val="7AA2C7"/>
-                </a:solidFill>
-                <a:latin typeface="Segoe UI"/>
-              </a:rPr>
-              <a:t> motor </a:t>
-            </a:r>
-            <a:r>
-              <a:rPr sz="1400" b="1" dirty="0" err="1">
-                <a:solidFill>
-                  <a:srgbClr val="7AA2C7"/>
-                </a:solidFill>
-                <a:latin typeface="Segoe UI"/>
-              </a:rPr>
-              <a:t>en</a:t>
-            </a:r>
-            <a:r>
-              <a:rPr sz="1400" b="1" dirty="0">
-                <a:solidFill>
-                  <a:srgbClr val="7AA2C7"/>
-                </a:solidFill>
-                <a:latin typeface="Segoe UI"/>
-              </a:rPr>
-              <a:t> </a:t>
-            </a:r>
-            <a:r>
-              <a:rPr sz="1400" b="1" dirty="0" err="1">
-                <a:solidFill>
-                  <a:srgbClr val="7AA2C7"/>
-                </a:solidFill>
-                <a:latin typeface="Segoe UI"/>
-              </a:rPr>
-              <a:t>todas</a:t>
-            </a:r>
-            <a:r>
-              <a:rPr sz="1400" b="1" dirty="0">
-                <a:solidFill>
-                  <a:srgbClr val="7AA2C7"/>
-                </a:solidFill>
-                <a:latin typeface="Segoe UI"/>
-              </a:rPr>
-              <a:t> partes</a:t>
+              <a:t>El mismo motor en todas partes</a:t>
             </a:r>
           </a:p>
         </p:txBody>
@@ -22257,7 +21946,7 @@
           <a:noFill/>
         </p:spPr>
         <p:txBody>
-          <a:bodyPr wrap="square" lIns="0" tIns="0" rIns="0" bIns="0" anchor="t">
+          <a:bodyPr wrap="square" anchor="t" lIns="0" rIns="0" tIns="0" bIns="0">
             <a:spAutoFit/>
           </a:bodyPr>
           <a:lstStyle/>
@@ -22274,7 +21963,7 @@
               </a:spcAft>
             </a:pPr>
             <a:r>
-              <a:rPr sz="1150" b="1" dirty="0">
+              <a:rPr sz="1150" b="1">
                 <a:solidFill>
                   <a:srgbClr val="7AA2C7"/>
                 </a:solidFill>
@@ -22283,7 +21972,7 @@
               <a:t>▸  </a:t>
             </a:r>
             <a:r>
-              <a:rPr sz="1150" b="0" dirty="0">
+              <a:rPr sz="1150" b="0">
                 <a:solidFill>
                   <a:srgbClr val="E8EAED"/>
                 </a:solidFill>
@@ -22305,7 +21994,7 @@
               </a:spcAft>
             </a:pPr>
             <a:r>
-              <a:rPr sz="1150" b="1" dirty="0">
+              <a:rPr sz="1150" b="1">
                 <a:solidFill>
                   <a:srgbClr val="7AA2C7"/>
                 </a:solidFill>
@@ -22314,134 +22003,44 @@
               <a:t>▸  </a:t>
             </a:r>
             <a:r>
-              <a:rPr sz="1150" b="0" dirty="0">
+              <a:rPr sz="1150" b="0">
                 <a:solidFill>
                   <a:srgbClr val="E8EAED"/>
                 </a:solidFill>
                 <a:latin typeface="Segoe UI"/>
               </a:rPr>
-              <a:t>Desktop (diffs, </a:t>
-            </a:r>
-            <a:r>
-              <a:rPr sz="1150" b="0" dirty="0" err="1">
+              <a:t>Desktop (diffs, sesiones en paralelo)</a:t>
+            </a:r>
+          </a:p>
+          <a:p>
+            <a:pPr algn="l">
+              <a:lnSpc>
+                <a:spcPct val="105000"/>
+              </a:lnSpc>
+              <a:spcBef>
+                <a:spcPts val="0"/>
+              </a:spcBef>
+              <a:spcAft>
+                <a:spcPts val="600"/>
+              </a:spcAft>
+            </a:pPr>
+            <a:r>
+              <a:rPr sz="1150" b="1">
+                <a:solidFill>
+                  <a:srgbClr val="7AA2C7"/>
+                </a:solidFill>
+                <a:latin typeface="Segoe UI"/>
+              </a:rPr>
+              <a:t>▸  </a:t>
+            </a:r>
+            <a:r>
+              <a:rPr sz="1150" b="0">
                 <a:solidFill>
                   <a:srgbClr val="E8EAED"/>
                 </a:solidFill>
                 <a:latin typeface="Segoe UI"/>
               </a:rPr>
-              <a:t>sesiones</a:t>
-            </a:r>
-            <a:r>
-              <a:rPr sz="1150" b="0" dirty="0">
-                <a:solidFill>
-                  <a:srgbClr val="E8EAED"/>
-                </a:solidFill>
-                <a:latin typeface="Segoe UI"/>
-              </a:rPr>
-              <a:t> </a:t>
-            </a:r>
-            <a:r>
-              <a:rPr sz="1150" b="0" dirty="0" err="1">
-                <a:solidFill>
-                  <a:srgbClr val="E8EAED"/>
-                </a:solidFill>
-                <a:latin typeface="Segoe UI"/>
-              </a:rPr>
-              <a:t>en</a:t>
-            </a:r>
-            <a:r>
-              <a:rPr sz="1150" b="0" dirty="0">
-                <a:solidFill>
-                  <a:srgbClr val="E8EAED"/>
-                </a:solidFill>
-                <a:latin typeface="Segoe UI"/>
-              </a:rPr>
-              <a:t> </a:t>
-            </a:r>
-            <a:r>
-              <a:rPr sz="1150" b="0" dirty="0" err="1">
-                <a:solidFill>
-                  <a:srgbClr val="E8EAED"/>
-                </a:solidFill>
-                <a:latin typeface="Segoe UI"/>
-              </a:rPr>
-              <a:t>paralelo</a:t>
-            </a:r>
-            <a:r>
-              <a:rPr sz="1150" b="0" dirty="0">
-                <a:solidFill>
-                  <a:srgbClr val="E8EAED"/>
-                </a:solidFill>
-                <a:latin typeface="Segoe UI"/>
-              </a:rPr>
-              <a:t>)</a:t>
-            </a:r>
-          </a:p>
-          <a:p>
-            <a:pPr algn="l">
-              <a:lnSpc>
-                <a:spcPct val="105000"/>
-              </a:lnSpc>
-              <a:spcBef>
-                <a:spcPts val="0"/>
-              </a:spcBef>
-              <a:spcAft>
-                <a:spcPts val="600"/>
-              </a:spcAft>
-            </a:pPr>
-            <a:r>
-              <a:rPr sz="1150" b="1" dirty="0">
-                <a:solidFill>
-                  <a:srgbClr val="7AA2C7"/>
-                </a:solidFill>
-                <a:latin typeface="Segoe UI"/>
-              </a:rPr>
-              <a:t>▸  </a:t>
-            </a:r>
-            <a:r>
-              <a:rPr sz="1150" b="0" dirty="0">
-                <a:solidFill>
-                  <a:srgbClr val="E8EAED"/>
-                </a:solidFill>
-                <a:latin typeface="Segoe UI"/>
-              </a:rPr>
-              <a:t>Web (claude.ai/code, </a:t>
-            </a:r>
-            <a:r>
-              <a:rPr sz="1150" b="0" dirty="0" err="1">
-                <a:solidFill>
-                  <a:srgbClr val="E8EAED"/>
-                </a:solidFill>
-                <a:latin typeface="Segoe UI"/>
-              </a:rPr>
-              <a:t>tareas</a:t>
-            </a:r>
-            <a:r>
-              <a:rPr sz="1150" b="0" dirty="0">
-                <a:solidFill>
-                  <a:srgbClr val="E8EAED"/>
-                </a:solidFill>
-                <a:latin typeface="Segoe UI"/>
-              </a:rPr>
-              <a:t> </a:t>
-            </a:r>
-            <a:r>
-              <a:rPr sz="1150" b="0" dirty="0" err="1">
-                <a:solidFill>
-                  <a:srgbClr val="E8EAED"/>
-                </a:solidFill>
-                <a:latin typeface="Segoe UI"/>
-              </a:rPr>
-              <a:t>largas</a:t>
-            </a:r>
-            <a:r>
-              <a:rPr sz="1150" b="0" dirty="0">
-                <a:solidFill>
-                  <a:srgbClr val="E8EAED"/>
-                </a:solidFill>
-                <a:latin typeface="Segoe UI"/>
-              </a:rPr>
-              <a:t>)</a:t>
+              <a:t>Web (claude.ai/code, tareas largas)</a:t>
             </a:r>
           </a:p>
         </p:txBody>
@@ -22491,7 +22090,6 @@
           <a:lstStyle/>
           <a:p>
             <a:pPr algn="ctr"/>
-            <a:endParaRPr/>
           </a:p>
         </p:txBody>
       </p:sp>
@@ -22538,7 +22136,6 @@
           <a:lstStyle/>
           <a:p>
             <a:pPr algn="ctr"/>
-            <a:endParaRPr/>
           </a:p>
         </p:txBody>
       </p:sp>
@@ -22559,7 +22156,7 @@
           <a:noFill/>
         </p:spPr>
         <p:txBody>
-          <a:bodyPr wrap="square" lIns="0" tIns="0" rIns="0" bIns="0" anchor="ctr">
+          <a:bodyPr wrap="square" anchor="ctr" lIns="0" rIns="0" tIns="0" bIns="0">
             <a:spAutoFit/>
           </a:bodyPr>
           <a:lstStyle/>
@@ -22602,111 +22199,6 @@
               </a:rPr>
               <a:t> ”</a:t>
             </a:r>
-          </a:p>
-        </p:txBody>
-      </p:sp>
-      <p:sp>
-        <p:nvSpPr>
-          <p:cNvPr id="29" name="TextBox 28"/>
-          <p:cNvSpPr txBox="1"/>
-          <p:nvPr/>
-        </p:nvSpPr>
-        <p:spPr>
-          <a:xfrm>
-            <a:off x="882396" y="4087368"/>
-            <a:ext cx="5394960" cy="274320"/>
-          </a:xfrm>
-          <a:prstGeom prst="rect">
-            <a:avLst/>
-          </a:prstGeom>
-          <a:noFill/>
-        </p:spPr>
-        <p:txBody>
-          <a:bodyPr wrap="square" lIns="0" tIns="0" rIns="0" bIns="0" anchor="t">
-            <a:spAutoFit/>
-          </a:bodyPr>
-          <a:lstStyle/>
-          <a:p>
-            <a:pPr algn="l">
-              <a:lnSpc>
-                <a:spcPct val="100000"/>
-              </a:lnSpc>
-              <a:spcBef>
-                <a:spcPts val="0"/>
-              </a:spcBef>
-              <a:spcAft>
-                <a:spcPts val="400"/>
-              </a:spcAft>
-            </a:pPr>
-            <a:r>
-              <a:rPr sz="1100" b="1" dirty="0" err="1">
-                <a:solidFill>
-                  <a:srgbClr val="7AA2C7"/>
-                </a:solidFill>
-                <a:latin typeface="Segoe UI"/>
-              </a:rPr>
-              <a:t>Arrancar</a:t>
-            </a:r>
-            <a:r>
-              <a:rPr sz="1100" b="1" dirty="0">
-                <a:solidFill>
-                  <a:srgbClr val="7AA2C7"/>
-                </a:solidFill>
-                <a:latin typeface="Segoe UI"/>
-              </a:rPr>
-              <a:t> </a:t>
-            </a:r>
-            <a:r>
-              <a:rPr sz="1100" b="1" dirty="0" err="1">
-                <a:solidFill>
-                  <a:srgbClr val="7AA2C7"/>
-                </a:solidFill>
-                <a:latin typeface="Segoe UI"/>
-              </a:rPr>
-              <a:t>en</a:t>
-            </a:r>
-            <a:r>
-              <a:rPr sz="1100" b="1" dirty="0">
-                <a:solidFill>
-                  <a:srgbClr val="7AA2C7"/>
-                </a:solidFill>
-                <a:latin typeface="Segoe UI"/>
-              </a:rPr>
-              <a:t> </a:t>
-            </a:r>
-            <a:r>
-              <a:rPr sz="1100" b="1" dirty="0" err="1">
-                <a:solidFill>
-                  <a:srgbClr val="7AA2C7"/>
-                </a:solidFill>
-                <a:latin typeface="Segoe UI"/>
-              </a:rPr>
-              <a:t>cualquier</a:t>
-            </a:r>
-            <a:r>
-              <a:rPr sz="1100" b="1" dirty="0">
-                <a:solidFill>
-                  <a:srgbClr val="7AA2C7"/>
-                </a:solidFill>
-                <a:latin typeface="Segoe UI"/>
-              </a:rPr>
-              <a:t> </a:t>
-            </a:r>
-            <a:r>
-              <a:rPr sz="1100" b="1" dirty="0" err="1">
-                <a:solidFill>
-                  <a:srgbClr val="7AA2C7"/>
-                </a:solidFill>
-                <a:latin typeface="Segoe UI"/>
-              </a:rPr>
-              <a:t>proyecto</a:t>
-            </a:r>
-            <a:endParaRPr sz="1100" b="1" dirty="0">
-              <a:solidFill>
-                <a:srgbClr val="7AA2C7"/>
-              </a:solidFill>
-              <a:latin typeface="Segoe UI"/>
-            </a:endParaRPr>
           </a:p>
         </p:txBody>
       </p:sp>
@@ -22719,7 +22211,7 @@
 </file>
 
 <file path=ppt/slides/slide4.xml><?xml version="1.0" encoding="utf-8"?>
-<p:sld xmlns:a="http://schemas.openxmlformats.org/drawingml/2006/main" xmlns:r="http://schemas.openxmlformats.org/officeDocument/2006/relationships" xmlns:p="http://schemas.openxmlformats.org/presentationml/2006/main">
+<p:sld xmlns:a="http://schemas.openxmlformats.org/drawingml/2006/main" xmlns:p="http://schemas.openxmlformats.org/presentationml/2006/main" xmlns:r="http://schemas.openxmlformats.org/officeDocument/2006/relationships">
   <p:cSld>
     <p:spTree>
       <p:nvGrpSpPr>
@@ -22727,14 +22219,7 @@
         <p:cNvGrpSpPr/>
         <p:nvPr/>
       </p:nvGrpSpPr>
-      <p:grpSpPr>
-        <a:xfrm>
-          <a:off x="0" y="0"/>
-          <a:ext cx="0" cy="0"/>
-          <a:chOff x="0" y="0"/>
-          <a:chExt cx="0" cy="0"/>
-        </a:xfrm>
-      </p:grpSpPr>
+      <p:grpSpPr/>
       <p:sp>
         <p:nvSpPr>
           <p:cNvPr id="2" name="Rectangle 1"/>
@@ -22776,7 +22261,6 @@
           <a:lstStyle/>
           <a:p>
             <a:pPr algn="ctr"/>
-            <a:endParaRPr/>
           </a:p>
         </p:txBody>
       </p:sp>
@@ -22821,7 +22305,6 @@
           <a:lstStyle/>
           <a:p>
             <a:pPr algn="ctr"/>
-            <a:endParaRPr/>
           </a:p>
         </p:txBody>
       </p:sp>
@@ -22842,7 +22325,7 @@
           <a:noFill/>
         </p:spPr>
         <p:txBody>
-          <a:bodyPr wrap="square" lIns="0" tIns="0" rIns="0" bIns="0" anchor="t">
+          <a:bodyPr wrap="square" anchor="t" lIns="0" rIns="0" tIns="0" bIns="0">
             <a:spAutoFit/>
           </a:bodyPr>
           <a:lstStyle/>
@@ -22887,7 +22370,7 @@
           <a:noFill/>
         </p:spPr>
         <p:txBody>
-          <a:bodyPr wrap="square" lIns="0" tIns="0" rIns="0" bIns="0" anchor="t">
+          <a:bodyPr wrap="square" anchor="t" lIns="0" rIns="0" tIns="0" bIns="0">
             <a:spAutoFit/>
           </a:bodyPr>
           <a:lstStyle/>
@@ -22956,7 +22439,6 @@
           <a:lstStyle/>
           <a:p>
             <a:pPr algn="ctr"/>
-            <a:endParaRPr/>
           </a:p>
         </p:txBody>
       </p:sp>
@@ -22977,7 +22459,7 @@
           <a:noFill/>
         </p:spPr>
         <p:txBody>
-          <a:bodyPr wrap="square" lIns="0" tIns="0" rIns="0" bIns="0" anchor="t">
+          <a:bodyPr wrap="square" anchor="t" lIns="0" rIns="0" tIns="0" bIns="0">
             <a:spAutoFit/>
           </a:bodyPr>
           <a:lstStyle/>
@@ -23022,7 +22504,7 @@
           <a:noFill/>
         </p:spPr>
         <p:txBody>
-          <a:bodyPr wrap="square" lIns="0" tIns="0" rIns="0" bIns="0" anchor="t">
+          <a:bodyPr wrap="square" anchor="t" lIns="0" rIns="0" tIns="0" bIns="0">
             <a:spAutoFit/>
           </a:bodyPr>
           <a:lstStyle/>
@@ -23095,7 +22577,6 @@
           <a:lstStyle/>
           <a:p>
             <a:pPr algn="ctr"/>
-            <a:endParaRPr/>
           </a:p>
         </p:txBody>
       </p:sp>
@@ -23116,7 +22597,7 @@
           <a:noFill/>
         </p:spPr>
         <p:txBody>
-          <a:bodyPr wrap="square" lIns="0" tIns="0" rIns="0" bIns="0" anchor="t">
+          <a:bodyPr wrap="square" anchor="t" lIns="0" rIns="0" tIns="0" bIns="0">
             <a:spAutoFit/>
           </a:bodyPr>
           <a:lstStyle/>
@@ -23161,7 +22642,7 @@
           <a:noFill/>
         </p:spPr>
         <p:txBody>
-          <a:bodyPr wrap="square" lIns="0" tIns="0" rIns="0" bIns="0" anchor="t">
+          <a:bodyPr wrap="square" anchor="t" lIns="0" rIns="0" tIns="0" bIns="0">
             <a:spAutoFit/>
           </a:bodyPr>
           <a:lstStyle/>
@@ -23305,7 +22786,6 @@
           <a:lstStyle/>
           <a:p>
             <a:pPr algn="ctr"/>
-            <a:endParaRPr/>
           </a:p>
         </p:txBody>
       </p:sp>
@@ -23326,7 +22806,7 @@
           <a:noFill/>
         </p:spPr>
         <p:txBody>
-          <a:bodyPr wrap="square" lIns="0" tIns="0" rIns="0" bIns="0" anchor="t">
+          <a:bodyPr wrap="square" anchor="t" lIns="0" rIns="0" tIns="0" bIns="0">
             <a:spAutoFit/>
           </a:bodyPr>
           <a:lstStyle/>
@@ -23371,7 +22851,7 @@
           <a:noFill/>
         </p:spPr>
         <p:txBody>
-          <a:bodyPr wrap="square" lIns="0" tIns="0" rIns="0" bIns="0" anchor="t">
+          <a:bodyPr wrap="square" anchor="t" lIns="0" rIns="0" tIns="0" bIns="0">
             <a:spAutoFit/>
           </a:bodyPr>
           <a:lstStyle/>
@@ -23487,7 +22967,7 @@
           <a:noFill/>
         </p:spPr>
         <p:txBody>
-          <a:bodyPr wrap="square" lIns="0" tIns="0" rIns="0" bIns="0" anchor="t">
+          <a:bodyPr wrap="square" anchor="t" lIns="0" rIns="0" tIns="0" bIns="0">
             <a:spAutoFit/>
           </a:bodyPr>
           <a:lstStyle/>
@@ -23560,7 +23040,6 @@
           <a:lstStyle/>
           <a:p>
             <a:pPr algn="ctr"/>
-            <a:endParaRPr/>
           </a:p>
         </p:txBody>
       </p:sp>
@@ -23581,7 +23060,7 @@
           <a:noFill/>
         </p:spPr>
         <p:txBody>
-          <a:bodyPr wrap="square" lIns="0" tIns="0" rIns="0" bIns="0" anchor="t">
+          <a:bodyPr wrap="square" anchor="t" lIns="0" rIns="0" tIns="0" bIns="0">
             <a:spAutoFit/>
           </a:bodyPr>
           <a:lstStyle/>
@@ -23640,7 +23119,7 @@
 </file>
 
 <file path=ppt/slides/slide5.xml><?xml version="1.0" encoding="utf-8"?>
-<p:sld xmlns:a="http://schemas.openxmlformats.org/drawingml/2006/main" xmlns:r="http://schemas.openxmlformats.org/officeDocument/2006/relationships" xmlns:p="http://schemas.openxmlformats.org/presentationml/2006/main">
+<p:sld xmlns:a="http://schemas.openxmlformats.org/drawingml/2006/main" xmlns:p="http://schemas.openxmlformats.org/presentationml/2006/main" xmlns:r="http://schemas.openxmlformats.org/officeDocument/2006/relationships">
   <p:cSld>
     <p:spTree>
       <p:nvGrpSpPr>
@@ -23648,14 +23127,7 @@
         <p:cNvGrpSpPr/>
         <p:nvPr/>
       </p:nvGrpSpPr>
-      <p:grpSpPr>
-        <a:xfrm>
-          <a:off x="0" y="0"/>
-          <a:ext cx="0" cy="0"/>
-          <a:chOff x="0" y="0"/>
-          <a:chExt cx="0" cy="0"/>
-        </a:xfrm>
-      </p:grpSpPr>
+      <p:grpSpPr/>
       <p:sp>
         <p:nvSpPr>
           <p:cNvPr id="2" name="Rectangle 1"/>
@@ -23697,7 +23169,6 @@
           <a:lstStyle/>
           <a:p>
             <a:pPr algn="ctr"/>
-            <a:endParaRPr/>
           </a:p>
         </p:txBody>
       </p:sp>
@@ -23742,7 +23213,6 @@
           <a:lstStyle/>
           <a:p>
             <a:pPr algn="ctr"/>
-            <a:endParaRPr/>
           </a:p>
         </p:txBody>
       </p:sp>
@@ -23763,7 +23233,7 @@
           <a:noFill/>
         </p:spPr>
         <p:txBody>
-          <a:bodyPr wrap="square" lIns="0" tIns="0" rIns="0" bIns="0" anchor="t">
+          <a:bodyPr wrap="square" anchor="t" lIns="0" rIns="0" tIns="0" bIns="0">
             <a:spAutoFit/>
           </a:bodyPr>
           <a:lstStyle/>
@@ -23808,7 +23278,7 @@
           <a:noFill/>
         </p:spPr>
         <p:txBody>
-          <a:bodyPr wrap="square" lIns="0" tIns="0" rIns="0" bIns="0" anchor="t">
+          <a:bodyPr wrap="square" anchor="t" lIns="0" rIns="0" tIns="0" bIns="0">
             <a:spAutoFit/>
           </a:bodyPr>
           <a:lstStyle/>
@@ -23877,7 +23347,6 @@
           <a:lstStyle/>
           <a:p>
             <a:pPr algn="ctr"/>
-            <a:endParaRPr/>
           </a:p>
         </p:txBody>
       </p:sp>
@@ -23898,7 +23367,7 @@
           <a:noFill/>
         </p:spPr>
         <p:txBody>
-          <a:bodyPr wrap="square" lIns="0" tIns="0" rIns="0" bIns="0" anchor="t">
+          <a:bodyPr wrap="square" anchor="t" lIns="0" rIns="0" tIns="0" bIns="0">
             <a:spAutoFit/>
           </a:bodyPr>
           <a:lstStyle/>
@@ -23943,7 +23412,7 @@
           <a:noFill/>
         </p:spPr>
         <p:txBody>
-          <a:bodyPr wrap="square" lIns="0" tIns="0" rIns="0" bIns="0" anchor="t">
+          <a:bodyPr wrap="square" anchor="t" lIns="0" rIns="0" tIns="0" bIns="0">
             <a:spAutoFit/>
           </a:bodyPr>
           <a:lstStyle/>
@@ -24016,7 +23485,6 @@
           <a:lstStyle/>
           <a:p>
             <a:pPr algn="ctr"/>
-            <a:endParaRPr/>
           </a:p>
         </p:txBody>
       </p:sp>
@@ -24037,7 +23505,7 @@
           <a:noFill/>
         </p:spPr>
         <p:txBody>
-          <a:bodyPr wrap="square" lIns="0" tIns="0" rIns="0" bIns="0" anchor="t">
+          <a:bodyPr wrap="square" anchor="t" lIns="0" rIns="0" tIns="0" bIns="0">
             <a:spAutoFit/>
           </a:bodyPr>
           <a:lstStyle/>
@@ -24082,7 +23550,7 @@
           <a:noFill/>
         </p:spPr>
         <p:txBody>
-          <a:bodyPr wrap="square" lIns="0" tIns="0" rIns="0" bIns="0" anchor="t">
+          <a:bodyPr wrap="square" anchor="t" lIns="0" rIns="0" tIns="0" bIns="0">
             <a:spAutoFit/>
           </a:bodyPr>
           <a:lstStyle/>
@@ -24257,7 +23725,6 @@
           <a:lstStyle/>
           <a:p>
             <a:pPr algn="ctr"/>
-            <a:endParaRPr/>
           </a:p>
         </p:txBody>
       </p:sp>
@@ -24278,7 +23745,7 @@
           <a:noFill/>
         </p:spPr>
         <p:txBody>
-          <a:bodyPr wrap="square" lIns="0" tIns="0" rIns="0" bIns="0" anchor="t">
+          <a:bodyPr wrap="square" anchor="t" lIns="0" rIns="0" tIns="0" bIns="0">
             <a:spAutoFit/>
           </a:bodyPr>
           <a:lstStyle/>
@@ -24323,7 +23790,7 @@
           <a:noFill/>
         </p:spPr>
         <p:txBody>
-          <a:bodyPr wrap="square" lIns="0" tIns="0" rIns="0" bIns="0" anchor="t">
+          <a:bodyPr wrap="square" anchor="t" lIns="0" rIns="0" tIns="0" bIns="0">
             <a:spAutoFit/>
           </a:bodyPr>
           <a:lstStyle/>
@@ -24498,7 +23965,6 @@
           <a:lstStyle/>
           <a:p>
             <a:pPr algn="ctr"/>
-            <a:endParaRPr/>
           </a:p>
         </p:txBody>
       </p:sp>
@@ -24545,7 +24011,6 @@
           <a:lstStyle/>
           <a:p>
             <a:pPr algn="ctr"/>
-            <a:endParaRPr/>
           </a:p>
         </p:txBody>
       </p:sp>
@@ -24566,7 +24031,7 @@
           <a:noFill/>
         </p:spPr>
         <p:txBody>
-          <a:bodyPr wrap="square" lIns="0" tIns="0" rIns="0" bIns="0" anchor="ctr">
+          <a:bodyPr wrap="square" anchor="ctr" lIns="0" rIns="0" tIns="0" bIns="0">
             <a:spAutoFit/>
           </a:bodyPr>
           <a:lstStyle/>
@@ -24621,7 +24086,7 @@
 </file>
 
 <file path=ppt/slides/slide6.xml><?xml version="1.0" encoding="utf-8"?>
-<p:sld xmlns:a="http://schemas.openxmlformats.org/drawingml/2006/main" xmlns:r="http://schemas.openxmlformats.org/officeDocument/2006/relationships" xmlns:p="http://schemas.openxmlformats.org/presentationml/2006/main">
+<p:sld xmlns:a="http://schemas.openxmlformats.org/drawingml/2006/main" xmlns:p="http://schemas.openxmlformats.org/presentationml/2006/main" xmlns:r="http://schemas.openxmlformats.org/officeDocument/2006/relationships">
   <p:cSld>
     <p:spTree>
       <p:nvGrpSpPr>
@@ -24629,14 +24094,7 @@
         <p:cNvGrpSpPr/>
         <p:nvPr/>
       </p:nvGrpSpPr>
-      <p:grpSpPr>
-        <a:xfrm>
-          <a:off x="0" y="0"/>
-          <a:ext cx="0" cy="0"/>
-          <a:chOff x="0" y="0"/>
-          <a:chExt cx="0" cy="0"/>
-        </a:xfrm>
-      </p:grpSpPr>
+      <p:grpSpPr/>
       <p:sp>
         <p:nvSpPr>
           <p:cNvPr id="2" name="Rectangle 1"/>
@@ -24678,7 +24136,6 @@
           <a:lstStyle/>
           <a:p>
             <a:pPr algn="ctr"/>
-            <a:endParaRPr/>
           </a:p>
         </p:txBody>
       </p:sp>
@@ -24723,7 +24180,6 @@
           <a:lstStyle/>
           <a:p>
             <a:pPr algn="ctr"/>
-            <a:endParaRPr/>
           </a:p>
         </p:txBody>
       </p:sp>
@@ -24744,7 +24200,7 @@
           <a:noFill/>
         </p:spPr>
         <p:txBody>
-          <a:bodyPr wrap="square" lIns="0" tIns="0" rIns="0" bIns="0" anchor="t">
+          <a:bodyPr wrap="square" anchor="t" lIns="0" rIns="0" tIns="0" bIns="0">
             <a:spAutoFit/>
           </a:bodyPr>
           <a:lstStyle/>
@@ -24789,7 +24245,7 @@
           <a:noFill/>
         </p:spPr>
         <p:txBody>
-          <a:bodyPr wrap="square" lIns="0" tIns="0" rIns="0" bIns="0" anchor="t">
+          <a:bodyPr wrap="square" anchor="t" lIns="0" rIns="0" tIns="0" bIns="0">
             <a:spAutoFit/>
           </a:bodyPr>
           <a:lstStyle/>
@@ -24858,7 +24314,6 @@
           <a:lstStyle/>
           <a:p>
             <a:pPr algn="ctr"/>
-            <a:endParaRPr/>
           </a:p>
         </p:txBody>
       </p:sp>
@@ -24879,7 +24334,7 @@
           <a:noFill/>
         </p:spPr>
         <p:txBody>
-          <a:bodyPr wrap="square" lIns="0" tIns="0" rIns="0" bIns="0" anchor="t">
+          <a:bodyPr wrap="square" anchor="t" lIns="0" rIns="0" tIns="0" bIns="0">
             <a:spAutoFit/>
           </a:bodyPr>
           <a:lstStyle/>
@@ -24924,7 +24379,7 @@
           <a:noFill/>
         </p:spPr>
         <p:txBody>
-          <a:bodyPr wrap="square" lIns="0" tIns="0" rIns="0" bIns="0" anchor="t">
+          <a:bodyPr wrap="square" anchor="t" lIns="0" rIns="0" tIns="0" bIns="0">
             <a:spAutoFit/>
           </a:bodyPr>
           <a:lstStyle/>
@@ -24969,7 +24424,7 @@
           <a:noFill/>
         </p:spPr>
         <p:txBody>
-          <a:bodyPr wrap="square" lIns="0" tIns="0" rIns="0" bIns="0" anchor="t">
+          <a:bodyPr wrap="square" anchor="t" lIns="0" rIns="0" tIns="0" bIns="0">
             <a:spAutoFit/>
           </a:bodyPr>
           <a:lstStyle/>
@@ -25042,7 +24497,6 @@
           <a:lstStyle/>
           <a:p>
             <a:pPr algn="ctr"/>
-            <a:endParaRPr/>
           </a:p>
         </p:txBody>
       </p:sp>
@@ -25063,7 +24517,7 @@
           <a:noFill/>
         </p:spPr>
         <p:txBody>
-          <a:bodyPr wrap="square" lIns="0" tIns="0" rIns="0" bIns="0" anchor="t">
+          <a:bodyPr wrap="square" anchor="t" lIns="0" rIns="0" tIns="0" bIns="0">
             <a:spAutoFit/>
           </a:bodyPr>
           <a:lstStyle/>
@@ -25202,7 +24656,6 @@
           <a:lstStyle/>
           <a:p>
             <a:pPr algn="ctr"/>
-            <a:endParaRPr/>
           </a:p>
         </p:txBody>
       </p:sp>
@@ -25223,7 +24676,7 @@
           <a:noFill/>
         </p:spPr>
         <p:txBody>
-          <a:bodyPr wrap="square" lIns="0" tIns="0" rIns="0" bIns="0" anchor="t">
+          <a:bodyPr wrap="square" anchor="t" lIns="0" rIns="0" tIns="0" bIns="0">
             <a:spAutoFit/>
           </a:bodyPr>
           <a:lstStyle/>
@@ -25268,7 +24721,7 @@
           <a:noFill/>
         </p:spPr>
         <p:txBody>
-          <a:bodyPr wrap="square" lIns="0" tIns="0" rIns="0" bIns="0" anchor="t">
+          <a:bodyPr wrap="square" anchor="t" lIns="0" rIns="0" tIns="0" bIns="0">
             <a:spAutoFit/>
           </a:bodyPr>
           <a:lstStyle/>
@@ -25443,7 +24896,6 @@
           <a:lstStyle/>
           <a:p>
             <a:pPr algn="ctr"/>
-            <a:endParaRPr/>
           </a:p>
         </p:txBody>
       </p:sp>
@@ -25464,7 +24916,7 @@
           <a:noFill/>
         </p:spPr>
         <p:txBody>
-          <a:bodyPr wrap="square" lIns="0" tIns="0" rIns="0" bIns="0" anchor="t">
+          <a:bodyPr wrap="square" anchor="t" lIns="0" rIns="0" tIns="0" bIns="0">
             <a:spAutoFit/>
           </a:bodyPr>
           <a:lstStyle/>
@@ -25509,7 +24961,7 @@
           <a:noFill/>
         </p:spPr>
         <p:txBody>
-          <a:bodyPr wrap="square" lIns="0" tIns="0" rIns="0" bIns="0" anchor="t">
+          <a:bodyPr wrap="square" anchor="t" lIns="0" rIns="0" tIns="0" bIns="0">
             <a:spAutoFit/>
           </a:bodyPr>
           <a:lstStyle/>
@@ -25555,7 +25007,7 @@
 </file>
 
 <file path=ppt/slides/slide7.xml><?xml version="1.0" encoding="utf-8"?>
-<p:sld xmlns:a="http://schemas.openxmlformats.org/drawingml/2006/main" xmlns:r="http://schemas.openxmlformats.org/officeDocument/2006/relationships" xmlns:p="http://schemas.openxmlformats.org/presentationml/2006/main">
+<p:sld xmlns:a="http://schemas.openxmlformats.org/drawingml/2006/main" xmlns:p="http://schemas.openxmlformats.org/presentationml/2006/main" xmlns:r="http://schemas.openxmlformats.org/officeDocument/2006/relationships">
   <p:cSld>
     <p:spTree>
       <p:nvGrpSpPr>
@@ -25563,14 +25015,7 @@
         <p:cNvGrpSpPr/>
         <p:nvPr/>
       </p:nvGrpSpPr>
-      <p:grpSpPr>
-        <a:xfrm>
-          <a:off x="0" y="0"/>
-          <a:ext cx="0" cy="0"/>
-          <a:chOff x="0" y="0"/>
-          <a:chExt cx="0" cy="0"/>
-        </a:xfrm>
-      </p:grpSpPr>
+      <p:grpSpPr/>
       <p:sp>
         <p:nvSpPr>
           <p:cNvPr id="2" name="Rectangle 1"/>
@@ -25612,7 +25057,6 @@
           <a:lstStyle/>
           <a:p>
             <a:pPr algn="ctr"/>
-            <a:endParaRPr/>
           </a:p>
         </p:txBody>
       </p:sp>
@@ -25657,7 +25101,6 @@
           <a:lstStyle/>
           <a:p>
             <a:pPr algn="ctr"/>
-            <a:endParaRPr/>
           </a:p>
         </p:txBody>
       </p:sp>
@@ -25678,7 +25121,7 @@
           <a:noFill/>
         </p:spPr>
         <p:txBody>
-          <a:bodyPr wrap="square" lIns="0" tIns="0" rIns="0" bIns="0" anchor="t">
+          <a:bodyPr wrap="square" anchor="t" lIns="0" rIns="0" tIns="0" bIns="0">
             <a:spAutoFit/>
           </a:bodyPr>
           <a:lstStyle/>
@@ -25723,7 +25166,7 @@
           <a:noFill/>
         </p:spPr>
         <p:txBody>
-          <a:bodyPr wrap="square" lIns="0" tIns="0" rIns="0" bIns="0" anchor="t">
+          <a:bodyPr wrap="square" anchor="t" lIns="0" rIns="0" tIns="0" bIns="0">
             <a:spAutoFit/>
           </a:bodyPr>
           <a:lstStyle/>
@@ -25792,7 +25235,6 @@
           <a:lstStyle/>
           <a:p>
             <a:pPr algn="ctr"/>
-            <a:endParaRPr/>
           </a:p>
         </p:txBody>
       </p:sp>
@@ -25813,7 +25255,7 @@
           <a:noFill/>
         </p:spPr>
         <p:txBody>
-          <a:bodyPr wrap="square" lIns="0" tIns="0" rIns="0" bIns="0" anchor="t">
+          <a:bodyPr wrap="square" anchor="t" lIns="0" rIns="0" tIns="0" bIns="0">
             <a:spAutoFit/>
           </a:bodyPr>
           <a:lstStyle/>
@@ -25858,7 +25300,7 @@
           <a:noFill/>
         </p:spPr>
         <p:txBody>
-          <a:bodyPr wrap="square" lIns="0" tIns="0" rIns="0" bIns="0" anchor="t">
+          <a:bodyPr wrap="square" anchor="t" lIns="0" rIns="0" tIns="0" bIns="0">
             <a:spAutoFit/>
           </a:bodyPr>
           <a:lstStyle/>
@@ -25931,7 +25373,6 @@
           <a:lstStyle/>
           <a:p>
             <a:pPr algn="ctr"/>
-            <a:endParaRPr/>
           </a:p>
         </p:txBody>
       </p:sp>
@@ -25978,7 +25419,6 @@
           <a:lstStyle/>
           <a:p>
             <a:pPr algn="ctr"/>
-            <a:endParaRPr/>
           </a:p>
         </p:txBody>
       </p:sp>
@@ -25999,7 +25439,7 @@
           <a:noFill/>
         </p:spPr>
         <p:txBody>
-          <a:bodyPr wrap="square" lIns="0" tIns="0" rIns="0" bIns="0" anchor="ctr">
+          <a:bodyPr wrap="square" anchor="ctr" lIns="0" rIns="0" tIns="0" bIns="0">
             <a:spAutoFit/>
           </a:bodyPr>
           <a:lstStyle/>
@@ -26044,7 +25484,7 @@
           <a:noFill/>
         </p:spPr>
         <p:txBody>
-          <a:bodyPr wrap="square" lIns="0" tIns="0" rIns="0" bIns="0" anchor="t">
+          <a:bodyPr wrap="square" anchor="t" lIns="0" rIns="0" tIns="0" bIns="0">
             <a:spAutoFit/>
           </a:bodyPr>
           <a:lstStyle/>
@@ -26089,7 +25529,7 @@
           <a:noFill/>
         </p:spPr>
         <p:txBody>
-          <a:bodyPr wrap="square" lIns="0" tIns="0" rIns="0" bIns="0" anchor="t">
+          <a:bodyPr wrap="square" anchor="t" lIns="0" rIns="0" tIns="0" bIns="0">
             <a:spAutoFit/>
           </a:bodyPr>
           <a:lstStyle/>
@@ -26162,7 +25602,6 @@
           <a:lstStyle/>
           <a:p>
             <a:pPr algn="ctr"/>
-            <a:endParaRPr/>
           </a:p>
         </p:txBody>
       </p:sp>
@@ -26209,7 +25648,6 @@
           <a:lstStyle/>
           <a:p>
             <a:pPr algn="ctr"/>
-            <a:endParaRPr/>
           </a:p>
         </p:txBody>
       </p:sp>
@@ -26230,7 +25668,7 @@
           <a:noFill/>
         </p:spPr>
         <p:txBody>
-          <a:bodyPr wrap="square" lIns="0" tIns="0" rIns="0" bIns="0" anchor="ctr">
+          <a:bodyPr wrap="square" anchor="ctr" lIns="0" rIns="0" tIns="0" bIns="0">
             <a:spAutoFit/>
           </a:bodyPr>
           <a:lstStyle/>
@@ -26275,7 +25713,7 @@
           <a:noFill/>
         </p:spPr>
         <p:txBody>
-          <a:bodyPr wrap="square" lIns="0" tIns="0" rIns="0" bIns="0" anchor="t">
+          <a:bodyPr wrap="square" anchor="t" lIns="0" rIns="0" tIns="0" bIns="0">
             <a:spAutoFit/>
           </a:bodyPr>
           <a:lstStyle/>
@@ -26320,7 +25758,7 @@
           <a:noFill/>
         </p:spPr>
         <p:txBody>
-          <a:bodyPr wrap="square" lIns="0" tIns="0" rIns="0" bIns="0" anchor="t">
+          <a:bodyPr wrap="square" anchor="t" lIns="0" rIns="0" tIns="0" bIns="0">
             <a:spAutoFit/>
           </a:bodyPr>
           <a:lstStyle/>
@@ -26393,7 +25831,6 @@
           <a:lstStyle/>
           <a:p>
             <a:pPr algn="ctr"/>
-            <a:endParaRPr/>
           </a:p>
         </p:txBody>
       </p:sp>
@@ -26440,7 +25877,6 @@
           <a:lstStyle/>
           <a:p>
             <a:pPr algn="ctr"/>
-            <a:endParaRPr/>
           </a:p>
         </p:txBody>
       </p:sp>
@@ -26461,7 +25897,7 @@
           <a:noFill/>
         </p:spPr>
         <p:txBody>
-          <a:bodyPr wrap="square" lIns="0" tIns="0" rIns="0" bIns="0" anchor="ctr">
+          <a:bodyPr wrap="square" anchor="ctr" lIns="0" rIns="0" tIns="0" bIns="0">
             <a:spAutoFit/>
           </a:bodyPr>
           <a:lstStyle/>
@@ -26506,7 +25942,7 @@
           <a:noFill/>
         </p:spPr>
         <p:txBody>
-          <a:bodyPr wrap="square" lIns="0" tIns="0" rIns="0" bIns="0" anchor="t">
+          <a:bodyPr wrap="square" anchor="t" lIns="0" rIns="0" tIns="0" bIns="0">
             <a:spAutoFit/>
           </a:bodyPr>
           <a:lstStyle/>
@@ -26551,7 +25987,7 @@
           <a:noFill/>
         </p:spPr>
         <p:txBody>
-          <a:bodyPr wrap="square" lIns="0" tIns="0" rIns="0" bIns="0" anchor="t">
+          <a:bodyPr wrap="square" anchor="t" lIns="0" rIns="0" tIns="0" bIns="0">
             <a:spAutoFit/>
           </a:bodyPr>
           <a:lstStyle/>
@@ -26624,7 +26060,6 @@
           <a:lstStyle/>
           <a:p>
             <a:pPr algn="ctr"/>
-            <a:endParaRPr/>
           </a:p>
         </p:txBody>
       </p:sp>
@@ -26671,7 +26106,6 @@
           <a:lstStyle/>
           <a:p>
             <a:pPr algn="ctr"/>
-            <a:endParaRPr/>
           </a:p>
         </p:txBody>
       </p:sp>
@@ -26692,7 +26126,7 @@
           <a:noFill/>
         </p:spPr>
         <p:txBody>
-          <a:bodyPr wrap="square" lIns="0" tIns="0" rIns="0" bIns="0" anchor="ctr">
+          <a:bodyPr wrap="square" anchor="ctr" lIns="0" rIns="0" tIns="0" bIns="0">
             <a:spAutoFit/>
           </a:bodyPr>
           <a:lstStyle/>
@@ -26737,7 +26171,7 @@
           <a:noFill/>
         </p:spPr>
         <p:txBody>
-          <a:bodyPr wrap="square" lIns="0" tIns="0" rIns="0" bIns="0" anchor="t">
+          <a:bodyPr wrap="square" anchor="t" lIns="0" rIns="0" tIns="0" bIns="0">
             <a:spAutoFit/>
           </a:bodyPr>
           <a:lstStyle/>
@@ -26782,7 +26216,7 @@
           <a:noFill/>
         </p:spPr>
         <p:txBody>
-          <a:bodyPr wrap="square" lIns="0" tIns="0" rIns="0" bIns="0" anchor="t">
+          <a:bodyPr wrap="square" anchor="t" lIns="0" rIns="0" tIns="0" bIns="0">
             <a:spAutoFit/>
           </a:bodyPr>
           <a:lstStyle/>
@@ -26855,7 +26289,6 @@
           <a:lstStyle/>
           <a:p>
             <a:pPr algn="ctr"/>
-            <a:endParaRPr/>
           </a:p>
         </p:txBody>
       </p:sp>
@@ -26902,7 +26335,6 @@
           <a:lstStyle/>
           <a:p>
             <a:pPr algn="ctr"/>
-            <a:endParaRPr/>
           </a:p>
         </p:txBody>
       </p:sp>
@@ -26923,7 +26355,7 @@
           <a:noFill/>
         </p:spPr>
         <p:txBody>
-          <a:bodyPr wrap="square" lIns="0" tIns="0" rIns="0" bIns="0" anchor="ctr">
+          <a:bodyPr wrap="square" anchor="ctr" lIns="0" rIns="0" tIns="0" bIns="0">
             <a:spAutoFit/>
           </a:bodyPr>
           <a:lstStyle/>
@@ -26978,7 +26410,7 @@
 </file>
 
 <file path=ppt/slides/slide8.xml><?xml version="1.0" encoding="utf-8"?>
-<p:sld xmlns:a="http://schemas.openxmlformats.org/drawingml/2006/main" xmlns:r="http://schemas.openxmlformats.org/officeDocument/2006/relationships" xmlns:p="http://schemas.openxmlformats.org/presentationml/2006/main">
+<p:sld xmlns:a="http://schemas.openxmlformats.org/drawingml/2006/main" xmlns:p="http://schemas.openxmlformats.org/presentationml/2006/main" xmlns:r="http://schemas.openxmlformats.org/officeDocument/2006/relationships">
   <p:cSld>
     <p:spTree>
       <p:nvGrpSpPr>
@@ -26986,14 +26418,7 @@
         <p:cNvGrpSpPr/>
         <p:nvPr/>
       </p:nvGrpSpPr>
-      <p:grpSpPr>
-        <a:xfrm>
-          <a:off x="0" y="0"/>
-          <a:ext cx="0" cy="0"/>
-          <a:chOff x="0" y="0"/>
-          <a:chExt cx="0" cy="0"/>
-        </a:xfrm>
-      </p:grpSpPr>
+      <p:grpSpPr/>
       <p:sp>
         <p:nvSpPr>
           <p:cNvPr id="2" name="Rectangle 1"/>
@@ -27035,7 +26460,6 @@
           <a:lstStyle/>
           <a:p>
             <a:pPr algn="ctr"/>
-            <a:endParaRPr/>
           </a:p>
         </p:txBody>
       </p:sp>
@@ -27080,7 +26504,6 @@
           <a:lstStyle/>
           <a:p>
             <a:pPr algn="ctr"/>
-            <a:endParaRPr/>
           </a:p>
         </p:txBody>
       </p:sp>
@@ -27101,7 +26524,7 @@
           <a:noFill/>
         </p:spPr>
         <p:txBody>
-          <a:bodyPr wrap="square" lIns="0" tIns="0" rIns="0" bIns="0" anchor="t">
+          <a:bodyPr wrap="square" anchor="t" lIns="0" rIns="0" tIns="0" bIns="0">
             <a:spAutoFit/>
           </a:bodyPr>
           <a:lstStyle/>
@@ -27146,7 +26569,7 @@
           <a:noFill/>
         </p:spPr>
         <p:txBody>
-          <a:bodyPr wrap="square" lIns="0" tIns="0" rIns="0" bIns="0" anchor="t">
+          <a:bodyPr wrap="square" anchor="t" lIns="0" rIns="0" tIns="0" bIns="0">
             <a:spAutoFit/>
           </a:bodyPr>
           <a:lstStyle/>
@@ -27215,7 +26638,6 @@
           <a:lstStyle/>
           <a:p>
             <a:pPr algn="ctr"/>
-            <a:endParaRPr/>
           </a:p>
         </p:txBody>
       </p:sp>
@@ -27236,7 +26658,7 @@
           <a:noFill/>
         </p:spPr>
         <p:txBody>
-          <a:bodyPr wrap="square" lIns="0" tIns="0" rIns="0" bIns="0" anchor="t">
+          <a:bodyPr wrap="square" anchor="t" lIns="0" rIns="0" tIns="0" bIns="0">
             <a:spAutoFit/>
           </a:bodyPr>
           <a:lstStyle/>
@@ -27281,7 +26703,7 @@
           <a:noFill/>
         </p:spPr>
         <p:txBody>
-          <a:bodyPr wrap="square" lIns="0" tIns="0" rIns="0" bIns="0" anchor="t">
+          <a:bodyPr wrap="square" anchor="t" lIns="0" rIns="0" tIns="0" bIns="0">
             <a:spAutoFit/>
           </a:bodyPr>
           <a:lstStyle/>
@@ -27326,7 +26748,7 @@
           <a:noFill/>
         </p:spPr>
         <p:txBody>
-          <a:bodyPr wrap="square" lIns="0" tIns="0" rIns="0" bIns="0" anchor="t">
+          <a:bodyPr wrap="square" anchor="t" lIns="0" rIns="0" tIns="0" bIns="0">
             <a:spAutoFit/>
           </a:bodyPr>
           <a:lstStyle/>
@@ -27417,7 +26839,6 @@
           <a:lstStyle/>
           <a:p>
             <a:pPr algn="ctr"/>
-            <a:endParaRPr/>
           </a:p>
         </p:txBody>
       </p:sp>
@@ -27464,7 +26885,6 @@
           <a:lstStyle/>
           <a:p>
             <a:pPr algn="ctr"/>
-            <a:endParaRPr/>
           </a:p>
         </p:txBody>
       </p:sp>
@@ -27485,7 +26905,7 @@
           <a:noFill/>
         </p:spPr>
         <p:txBody>
-          <a:bodyPr wrap="square" lIns="0" tIns="0" rIns="0" bIns="0" anchor="ctr">
+          <a:bodyPr wrap="square" anchor="ctr" lIns="0" rIns="0" tIns="0" bIns="0">
             <a:spAutoFit/>
           </a:bodyPr>
           <a:lstStyle/>
@@ -27530,7 +26950,7 @@
           <a:noFill/>
         </p:spPr>
         <p:txBody>
-          <a:bodyPr wrap="square" lIns="0" tIns="0" rIns="0" bIns="0" anchor="t">
+          <a:bodyPr wrap="square" anchor="t" lIns="0" rIns="0" tIns="0" bIns="0">
             <a:spAutoFit/>
           </a:bodyPr>
           <a:lstStyle/>
@@ -27575,7 +26995,7 @@
           <a:noFill/>
         </p:spPr>
         <p:txBody>
-          <a:bodyPr wrap="square" lIns="0" tIns="0" rIns="0" bIns="0" anchor="t">
+          <a:bodyPr wrap="square" anchor="t" lIns="0" rIns="0" tIns="0" bIns="0">
             <a:spAutoFit/>
           </a:bodyPr>
           <a:lstStyle/>
@@ -27648,7 +27068,6 @@
           <a:lstStyle/>
           <a:p>
             <a:pPr algn="ctr"/>
-            <a:endParaRPr/>
           </a:p>
         </p:txBody>
       </p:sp>
@@ -27695,7 +27114,6 @@
           <a:lstStyle/>
           <a:p>
             <a:pPr algn="ctr"/>
-            <a:endParaRPr/>
           </a:p>
         </p:txBody>
       </p:sp>
@@ -27716,7 +27134,7 @@
           <a:noFill/>
         </p:spPr>
         <p:txBody>
-          <a:bodyPr wrap="square" lIns="0" tIns="0" rIns="0" bIns="0" anchor="ctr">
+          <a:bodyPr wrap="square" anchor="ctr" lIns="0" rIns="0" tIns="0" bIns="0">
             <a:spAutoFit/>
           </a:bodyPr>
           <a:lstStyle/>
@@ -27761,7 +27179,7 @@
           <a:noFill/>
         </p:spPr>
         <p:txBody>
-          <a:bodyPr wrap="square" lIns="0" tIns="0" rIns="0" bIns="0" anchor="t">
+          <a:bodyPr wrap="square" anchor="t" lIns="0" rIns="0" tIns="0" bIns="0">
             <a:spAutoFit/>
           </a:bodyPr>
           <a:lstStyle/>
@@ -27806,7 +27224,7 @@
           <a:noFill/>
         </p:spPr>
         <p:txBody>
-          <a:bodyPr wrap="square" lIns="0" tIns="0" rIns="0" bIns="0" anchor="t">
+          <a:bodyPr wrap="square" anchor="t" lIns="0" rIns="0" tIns="0" bIns="0">
             <a:spAutoFit/>
           </a:bodyPr>
           <a:lstStyle/>
@@ -27879,7 +27297,6 @@
           <a:lstStyle/>
           <a:p>
             <a:pPr algn="ctr"/>
-            <a:endParaRPr/>
           </a:p>
         </p:txBody>
       </p:sp>
@@ -27926,7 +27343,6 @@
           <a:lstStyle/>
           <a:p>
             <a:pPr algn="ctr"/>
-            <a:endParaRPr/>
           </a:p>
         </p:txBody>
       </p:sp>
@@ -27947,7 +27363,7 @@
           <a:noFill/>
         </p:spPr>
         <p:txBody>
-          <a:bodyPr wrap="square" lIns="0" tIns="0" rIns="0" bIns="0" anchor="ctr">
+          <a:bodyPr wrap="square" anchor="ctr" lIns="0" rIns="0" tIns="0" bIns="0">
             <a:spAutoFit/>
           </a:bodyPr>
           <a:lstStyle/>
@@ -27992,7 +27408,7 @@
           <a:noFill/>
         </p:spPr>
         <p:txBody>
-          <a:bodyPr wrap="square" lIns="0" tIns="0" rIns="0" bIns="0" anchor="t">
+          <a:bodyPr wrap="square" anchor="t" lIns="0" rIns="0" tIns="0" bIns="0">
             <a:spAutoFit/>
           </a:bodyPr>
           <a:lstStyle/>
@@ -28037,7 +27453,7 @@
           <a:noFill/>
         </p:spPr>
         <p:txBody>
-          <a:bodyPr wrap="square" lIns="0" tIns="0" rIns="0" bIns="0" anchor="t">
+          <a:bodyPr wrap="square" anchor="t" lIns="0" rIns="0" tIns="0" bIns="0">
             <a:spAutoFit/>
           </a:bodyPr>
           <a:lstStyle/>
@@ -28110,7 +27526,6 @@
           <a:lstStyle/>
           <a:p>
             <a:pPr algn="ctr"/>
-            <a:endParaRPr/>
           </a:p>
         </p:txBody>
       </p:sp>
@@ -28157,7 +27572,6 @@
           <a:lstStyle/>
           <a:p>
             <a:pPr algn="ctr"/>
-            <a:endParaRPr/>
           </a:p>
         </p:txBody>
       </p:sp>
@@ -28178,7 +27592,7 @@
           <a:noFill/>
         </p:spPr>
         <p:txBody>
-          <a:bodyPr wrap="square" lIns="0" tIns="0" rIns="0" bIns="0" anchor="ctr">
+          <a:bodyPr wrap="square" anchor="ctr" lIns="0" rIns="0" tIns="0" bIns="0">
             <a:spAutoFit/>
           </a:bodyPr>
           <a:lstStyle/>
@@ -28223,7 +27637,7 @@
           <a:noFill/>
         </p:spPr>
         <p:txBody>
-          <a:bodyPr wrap="square" lIns="0" tIns="0" rIns="0" bIns="0" anchor="t">
+          <a:bodyPr wrap="square" anchor="t" lIns="0" rIns="0" tIns="0" bIns="0">
             <a:spAutoFit/>
           </a:bodyPr>
           <a:lstStyle/>
@@ -28268,7 +27682,7 @@
           <a:noFill/>
         </p:spPr>
         <p:txBody>
-          <a:bodyPr wrap="square" lIns="0" tIns="0" rIns="0" bIns="0" anchor="t">
+          <a:bodyPr wrap="square" anchor="t" lIns="0" rIns="0" tIns="0" bIns="0">
             <a:spAutoFit/>
           </a:bodyPr>
           <a:lstStyle/>
@@ -28313,7 +27727,7 @@
           <a:noFill/>
         </p:spPr>
         <p:txBody>
-          <a:bodyPr wrap="square" lIns="0" tIns="0" rIns="0" bIns="0" anchor="t">
+          <a:bodyPr wrap="square" anchor="t" lIns="0" rIns="0" tIns="0" bIns="0">
             <a:spAutoFit/>
           </a:bodyPr>
           <a:lstStyle/>
@@ -28386,7 +27800,6 @@
           <a:lstStyle/>
           <a:p>
             <a:pPr algn="ctr"/>
-            <a:endParaRPr/>
           </a:p>
         </p:txBody>
       </p:sp>
@@ -28407,7 +27820,7 @@
           <a:noFill/>
         </p:spPr>
         <p:txBody>
-          <a:bodyPr wrap="square" lIns="0" tIns="0" rIns="0" bIns="0" anchor="t">
+          <a:bodyPr wrap="square" anchor="t" lIns="0" rIns="0" tIns="0" bIns="0">
             <a:spAutoFit/>
           </a:bodyPr>
           <a:lstStyle/>
@@ -28466,7 +27879,7 @@
 </file>
 
 <file path=ppt/slides/slide9.xml><?xml version="1.0" encoding="utf-8"?>
-<p:sld xmlns:a="http://schemas.openxmlformats.org/drawingml/2006/main" xmlns:r="http://schemas.openxmlformats.org/officeDocument/2006/relationships" xmlns:p="http://schemas.openxmlformats.org/presentationml/2006/main">
+<p:sld xmlns:a="http://schemas.openxmlformats.org/drawingml/2006/main" xmlns:p="http://schemas.openxmlformats.org/presentationml/2006/main" xmlns:r="http://schemas.openxmlformats.org/officeDocument/2006/relationships">
   <p:cSld>
     <p:spTree>
       <p:nvGrpSpPr>
@@ -28474,14 +27887,7 @@
         <p:cNvGrpSpPr/>
         <p:nvPr/>
       </p:nvGrpSpPr>
-      <p:grpSpPr>
-        <a:xfrm>
-          <a:off x="0" y="0"/>
-          <a:ext cx="0" cy="0"/>
-          <a:chOff x="0" y="0"/>
-          <a:chExt cx="0" cy="0"/>
-        </a:xfrm>
-      </p:grpSpPr>
+      <p:grpSpPr/>
       <p:sp>
         <p:nvSpPr>
           <p:cNvPr id="2" name="Rectangle 1"/>
@@ -28523,7 +27929,6 @@
           <a:lstStyle/>
           <a:p>
             <a:pPr algn="ctr"/>
-            <a:endParaRPr/>
           </a:p>
         </p:txBody>
       </p:sp>
@@ -28568,7 +27973,6 @@
           <a:lstStyle/>
           <a:p>
             <a:pPr algn="ctr"/>
-            <a:endParaRPr/>
           </a:p>
         </p:txBody>
       </p:sp>
@@ -28589,7 +27993,7 @@
           <a:noFill/>
         </p:spPr>
         <p:txBody>
-          <a:bodyPr wrap="square" lIns="0" tIns="0" rIns="0" bIns="0" anchor="t">
+          <a:bodyPr wrap="square" anchor="t" lIns="0" rIns="0" tIns="0" bIns="0">
             <a:spAutoFit/>
           </a:bodyPr>
           <a:lstStyle/>
@@ -28634,7 +28038,7 @@
           <a:noFill/>
         </p:spPr>
         <p:txBody>
-          <a:bodyPr wrap="square" lIns="0" tIns="0" rIns="0" bIns="0" anchor="t">
+          <a:bodyPr wrap="square" anchor="t" lIns="0" rIns="0" tIns="0" bIns="0">
             <a:spAutoFit/>
           </a:bodyPr>
           <a:lstStyle/>
@@ -28703,7 +28107,6 @@
           <a:lstStyle/>
           <a:p>
             <a:pPr algn="ctr"/>
-            <a:endParaRPr/>
           </a:p>
         </p:txBody>
       </p:sp>
@@ -28724,7 +28127,7 @@
           <a:noFill/>
         </p:spPr>
         <p:txBody>
-          <a:bodyPr wrap="square" lIns="0" tIns="0" rIns="0" bIns="0" anchor="t">
+          <a:bodyPr wrap="square" anchor="t" lIns="0" rIns="0" tIns="0" bIns="0">
             <a:spAutoFit/>
           </a:bodyPr>
           <a:lstStyle/>
@@ -28769,7 +28172,7 @@
           <a:noFill/>
         </p:spPr>
         <p:txBody>
-          <a:bodyPr wrap="square" lIns="0" tIns="0" rIns="0" bIns="0" anchor="t">
+          <a:bodyPr wrap="square" anchor="t" lIns="0" rIns="0" tIns="0" bIns="0">
             <a:spAutoFit/>
           </a:bodyPr>
           <a:lstStyle/>
@@ -28842,7 +28245,6 @@
           <a:lstStyle/>
           <a:p>
             <a:pPr algn="ctr"/>
-            <a:endParaRPr/>
           </a:p>
         </p:txBody>
       </p:sp>
@@ -28889,7 +28291,6 @@
           <a:lstStyle/>
           <a:p>
             <a:pPr algn="ctr"/>
-            <a:endParaRPr/>
           </a:p>
         </p:txBody>
       </p:sp>
@@ -28910,7 +28311,7 @@
           <a:noFill/>
         </p:spPr>
         <p:txBody>
-          <a:bodyPr wrap="square" lIns="0" tIns="0" rIns="0" bIns="0" anchor="ctr">
+          <a:bodyPr wrap="square" anchor="ctr" lIns="0" rIns="0" tIns="0" bIns="0">
             <a:spAutoFit/>
           </a:bodyPr>
           <a:lstStyle/>
@@ -28955,7 +28356,7 @@
           <a:noFill/>
         </p:spPr>
         <p:txBody>
-          <a:bodyPr wrap="square" lIns="0" tIns="0" rIns="0" bIns="0" anchor="t">
+          <a:bodyPr wrap="square" anchor="t" lIns="0" rIns="0" tIns="0" bIns="0">
             <a:spAutoFit/>
           </a:bodyPr>
           <a:lstStyle/>
@@ -29000,7 +28401,7 @@
           <a:noFill/>
         </p:spPr>
         <p:txBody>
-          <a:bodyPr wrap="square" lIns="0" tIns="0" rIns="0" bIns="0" anchor="t">
+          <a:bodyPr wrap="square" anchor="t" lIns="0" rIns="0" tIns="0" bIns="0">
             <a:spAutoFit/>
           </a:bodyPr>
           <a:lstStyle/>
@@ -29073,7 +28474,6 @@
           <a:lstStyle/>
           <a:p>
             <a:pPr algn="ctr"/>
-            <a:endParaRPr/>
           </a:p>
         </p:txBody>
       </p:sp>
@@ -29120,7 +28520,6 @@
           <a:lstStyle/>
           <a:p>
             <a:pPr algn="ctr"/>
-            <a:endParaRPr/>
           </a:p>
         </p:txBody>
       </p:sp>
@@ -29141,7 +28540,7 @@
           <a:noFill/>
         </p:spPr>
         <p:txBody>
-          <a:bodyPr wrap="square" lIns="0" tIns="0" rIns="0" bIns="0" anchor="ctr">
+          <a:bodyPr wrap="square" anchor="ctr" lIns="0" rIns="0" tIns="0" bIns="0">
             <a:spAutoFit/>
           </a:bodyPr>
           <a:lstStyle/>
@@ -29186,7 +28585,7 @@
           <a:noFill/>
         </p:spPr>
         <p:txBody>
-          <a:bodyPr wrap="square" lIns="0" tIns="0" rIns="0" bIns="0" anchor="t">
+          <a:bodyPr wrap="square" anchor="t" lIns="0" rIns="0" tIns="0" bIns="0">
             <a:spAutoFit/>
           </a:bodyPr>
           <a:lstStyle/>
@@ -29231,7 +28630,7 @@
           <a:noFill/>
         </p:spPr>
         <p:txBody>
-          <a:bodyPr wrap="square" lIns="0" tIns="0" rIns="0" bIns="0" anchor="t">
+          <a:bodyPr wrap="square" anchor="t" lIns="0" rIns="0" tIns="0" bIns="0">
             <a:spAutoFit/>
           </a:bodyPr>
           <a:lstStyle/>
@@ -29304,7 +28703,6 @@
           <a:lstStyle/>
           <a:p>
             <a:pPr algn="ctr"/>
-            <a:endParaRPr/>
           </a:p>
         </p:txBody>
       </p:sp>
@@ -29351,7 +28749,6 @@
           <a:lstStyle/>
           <a:p>
             <a:pPr algn="ctr"/>
-            <a:endParaRPr/>
           </a:p>
         </p:txBody>
       </p:sp>
@@ -29372,7 +28769,7 @@
           <a:noFill/>
         </p:spPr>
         <p:txBody>
-          <a:bodyPr wrap="square" lIns="0" tIns="0" rIns="0" bIns="0" anchor="ctr">
+          <a:bodyPr wrap="square" anchor="ctr" lIns="0" rIns="0" tIns="0" bIns="0">
             <a:spAutoFit/>
           </a:bodyPr>
           <a:lstStyle/>
@@ -29417,7 +28814,7 @@
           <a:noFill/>
         </p:spPr>
         <p:txBody>
-          <a:bodyPr wrap="square" lIns="0" tIns="0" rIns="0" bIns="0" anchor="t">
+          <a:bodyPr wrap="square" anchor="t" lIns="0" rIns="0" tIns="0" bIns="0">
             <a:spAutoFit/>
           </a:bodyPr>
           <a:lstStyle/>
@@ -29462,7 +28859,7 @@
           <a:noFill/>
         </p:spPr>
         <p:txBody>
-          <a:bodyPr wrap="square" lIns="0" tIns="0" rIns="0" bIns="0" anchor="t">
+          <a:bodyPr wrap="square" anchor="t" lIns="0" rIns="0" tIns="0" bIns="0">
             <a:spAutoFit/>
           </a:bodyPr>
           <a:lstStyle/>
@@ -29535,7 +28932,6 @@
           <a:lstStyle/>
           <a:p>
             <a:pPr algn="ctr"/>
-            <a:endParaRPr/>
           </a:p>
         </p:txBody>
       </p:sp>
@@ -29582,7 +28978,6 @@
           <a:lstStyle/>
           <a:p>
             <a:pPr algn="ctr"/>
-            <a:endParaRPr/>
           </a:p>
         </p:txBody>
       </p:sp>
@@ -29603,7 +28998,7 @@
           <a:noFill/>
         </p:spPr>
         <p:txBody>
-          <a:bodyPr wrap="square" lIns="0" tIns="0" rIns="0" bIns="0" anchor="ctr">
+          <a:bodyPr wrap="square" anchor="ctr" lIns="0" rIns="0" tIns="0" bIns="0">
             <a:spAutoFit/>
           </a:bodyPr>
           <a:lstStyle/>
@@ -29648,7 +29043,7 @@
           <a:noFill/>
         </p:spPr>
         <p:txBody>
-          <a:bodyPr wrap="square" lIns="0" tIns="0" rIns="0" bIns="0" anchor="t">
+          <a:bodyPr wrap="square" anchor="t" lIns="0" rIns="0" tIns="0" bIns="0">
             <a:spAutoFit/>
           </a:bodyPr>
           <a:lstStyle/>
@@ -29693,7 +29088,7 @@
           <a:noFill/>
         </p:spPr>
         <p:txBody>
-          <a:bodyPr wrap="square" lIns="0" tIns="0" rIns="0" bIns="0" anchor="t">
+          <a:bodyPr wrap="square" anchor="t" lIns="0" rIns="0" tIns="0" bIns="0">
             <a:spAutoFit/>
           </a:bodyPr>
           <a:lstStyle/>
@@ -29766,7 +29161,6 @@
           <a:lstStyle/>
           <a:p>
             <a:pPr algn="ctr"/>
-            <a:endParaRPr/>
           </a:p>
         </p:txBody>
       </p:sp>
@@ -29813,7 +29207,6 @@
           <a:lstStyle/>
           <a:p>
             <a:pPr algn="ctr"/>
-            <a:endParaRPr/>
           </a:p>
         </p:txBody>
       </p:sp>
@@ -29834,7 +29227,7 @@
           <a:noFill/>
         </p:spPr>
         <p:txBody>
-          <a:bodyPr wrap="square" lIns="0" tIns="0" rIns="0" bIns="0" anchor="ctr">
+          <a:bodyPr wrap="square" anchor="ctr" lIns="0" rIns="0" tIns="0" bIns="0">
             <a:spAutoFit/>
           </a:bodyPr>
           <a:lstStyle/>

--- a/presentacion/Claude_Code_Presentacion.pptx
+++ b/presentacion/Claude_Code_Presentacion.pptx
@@ -6771,7 +6771,61 @@
       </p:sp>
       <p:sp>
         <p:nvSpPr>
-          <p:cNvPr id="17" name="Rounded Rectangle 16"/>
+          <p:cNvPr id="17" name="TextBox 16"/>
+          <p:cNvSpPr txBox="1"/>
+          <p:nvPr/>
+        </p:nvSpPr>
+        <p:spPr>
+          <a:xfrm>
+            <a:off x="658368" y="5138928"/>
+            <a:ext cx="10881360" cy="457200"/>
+          </a:xfrm>
+          <a:prstGeom prst="rect">
+            <a:avLst/>
+          </a:prstGeom>
+          <a:noFill/>
+        </p:spPr>
+        <p:txBody>
+          <a:bodyPr wrap="square" anchor="t" lIns="0" rIns="0" tIns="0" bIns="0">
+            <a:spAutoFit/>
+          </a:bodyPr>
+          <a:lstStyle/>
+          <a:p>
+            <a:pPr algn="l">
+              <a:lnSpc>
+                <a:spcPct val="103000"/>
+              </a:lnSpc>
+              <a:spcBef>
+                <a:spcPts val="0"/>
+              </a:spcBef>
+              <a:spcAft>
+                <a:spcPts val="400"/>
+              </a:spcAft>
+            </a:pPr>
+            <a:r>
+              <a:rPr sz="1150" b="1">
+                <a:solidFill>
+                  <a:srgbClr val="D97757"/>
+                </a:solidFill>
+                <a:latin typeface="Segoe UI"/>
+              </a:rPr>
+              <a:t>Portable:  </a:t>
+            </a:r>
+            <a:r>
+              <a:rPr sz="1100" b="0">
+                <a:solidFill>
+                  <a:srgbClr val="9AA4B2"/>
+                </a:solidFill>
+                <a:latin typeface="Segoe UI"/>
+              </a:rPr>
+              <a:t>el método se empaqueta como un starter-kit (plantillas + bootstrap) para llevarlo a otro repo o a GitHub Copilot — la disciplina es agnóstica de la herramienta.</a:t>
+            </a:r>
+          </a:p>
+        </p:txBody>
+      </p:sp>
+      <p:sp>
+        <p:nvSpPr>
+          <p:cNvPr id="18" name="Rounded Rectangle 17"/>
           <p:cNvSpPr/>
           <p:nvPr/>
         </p:nvSpPr>
@@ -6819,7 +6873,7 @@
       </p:sp>
       <p:sp>
         <p:nvSpPr>
-          <p:cNvPr id="18" name="Rounded Rectangle 17"/>
+          <p:cNvPr id="19" name="Rounded Rectangle 18"/>
           <p:cNvSpPr/>
           <p:nvPr/>
         </p:nvSpPr>
@@ -6865,7 +6919,7 @@
       </p:sp>
       <p:sp>
         <p:nvSpPr>
-          <p:cNvPr id="19" name="TextBox 18"/>
+          <p:cNvPr id="20" name="TextBox 19"/>
           <p:cNvSpPr txBox="1"/>
           <p:nvPr/>
         </p:nvSpPr>
@@ -8539,7 +8593,7 @@
                 </a:solidFill>
                 <a:latin typeface="Segoe UI"/>
               </a:rPr>
-              <a:t>Verificar + gate outbound (contrato)</a:t>
+              <a:t>Verificar: contrato (wrapper) + imagen desplegada</a:t>
             </a:r>
           </a:p>
         </p:txBody>
@@ -12512,7 +12566,7 @@
                 </a:solidFill>
                 <a:latin typeface="Segoe UI"/>
               </a:rPr>
-              <a:t>Test RED → fix por propiedad estructural (no cliente) → regresión byte-idéntica + contrato local.</a:t>
+              <a:t>Test RED → fix estructural (no cliente) → regresión no-op + contrato local (wrapper) + dentro de la imagen desplegada.</a:t>
             </a:r>
           </a:p>
         </p:txBody>
@@ -13197,7 +13251,7 @@
         <p:spPr>
           <a:xfrm>
             <a:off x="640080" y="1828800"/>
-            <a:ext cx="5349240" cy="2377440"/>
+            <a:ext cx="5349240" cy="2468880"/>
           </a:xfrm>
           <a:prstGeom prst="roundRect">
             <a:avLst>
@@ -13290,7 +13344,7 @@
         <p:spPr>
           <a:xfrm>
             <a:off x="914400" y="2487168"/>
-            <a:ext cx="4846320" cy="1554480"/>
+            <a:ext cx="4846320" cy="1645920"/>
           </a:xfrm>
           <a:prstGeom prst="rect">
             <a:avLst/>
@@ -13393,6 +13447,37 @@
                 <a:latin typeface="Segoe UI"/>
               </a:rPr>
               <a:t>Excluye venvs / node_modules / caches / .codegraph</a:t>
+            </a:r>
+          </a:p>
+          <a:p>
+            <a:pPr algn="l">
+              <a:lnSpc>
+                <a:spcPct val="105000"/>
+              </a:lnSpc>
+              <a:spcBef>
+                <a:spcPts val="0"/>
+              </a:spcBef>
+              <a:spcAft>
+                <a:spcPts val="600"/>
+              </a:spcAft>
+            </a:pPr>
+            <a:r>
+              <a:rPr sz="1150" b="1">
+                <a:solidFill>
+                  <a:srgbClr val="7AA2C7"/>
+                </a:solidFill>
+                <a:latin typeface="Segoe UI"/>
+              </a:rPr>
+              <a:t>▸  </a:t>
+            </a:r>
+            <a:r>
+              <a:rPr sz="1150" b="0">
+                <a:solidFill>
+                  <a:srgbClr val="E8EAED"/>
+                </a:solidFill>
+                <a:latin typeface="Segoe UI"/>
+              </a:rPr>
+              <a:t>USB: mount manual en WSL + verificar byte a byte</a:t>
             </a:r>
           </a:p>
           <a:p>
@@ -13437,7 +13522,7 @@
         <p:spPr>
           <a:xfrm>
             <a:off x="6217920" y="1828800"/>
-            <a:ext cx="5349240" cy="2377440"/>
+            <a:ext cx="5349240" cy="2468880"/>
           </a:xfrm>
           <a:prstGeom prst="roundRect">
             <a:avLst>
@@ -13530,7 +13615,7 @@
         <p:spPr>
           <a:xfrm>
             <a:off x="6492240" y="2487168"/>
-            <a:ext cx="4846320" cy="1554480"/>
+            <a:ext cx="4846320" cy="1645920"/>
           </a:xfrm>
           <a:prstGeom prst="rect">
             <a:avLst/>
@@ -13676,7 +13761,7 @@
         </p:nvSpPr>
         <p:spPr>
           <a:xfrm>
-            <a:off x="640080" y="4343400"/>
+            <a:off x="640080" y="4407408"/>
             <a:ext cx="10927080" cy="1280160"/>
           </a:xfrm>
           <a:prstGeom prst="roundRect">
@@ -13724,7 +13809,7 @@
         </p:nvSpPr>
         <p:spPr>
           <a:xfrm>
-            <a:off x="914400" y="4544568"/>
+            <a:off x="914400" y="4608576"/>
             <a:ext cx="10469880" cy="365760"/>
           </a:xfrm>
           <a:prstGeom prst="rect">
@@ -13769,7 +13854,7 @@
         </p:nvSpPr>
         <p:spPr>
           <a:xfrm>
-            <a:off x="914400" y="5001768"/>
+            <a:off x="914400" y="5065776"/>
             <a:ext cx="10424159" cy="457199"/>
           </a:xfrm>
           <a:prstGeom prst="rect">

--- a/presentacion/Claude_Code_Presentacion.pptx
+++ b/presentacion/Claude_Code_Presentacion.pptx
@@ -38,6 +38,9 @@
     <p:sldId id="286" r:id="rId37"/>
     <p:sldId id="287" r:id="rId38"/>
     <p:sldId id="288" r:id="rId39"/>
+    <p:sldId id="289" r:id="rId40"/>
+    <p:sldId id="290" r:id="rId41"/>
+    <p:sldId id="291" r:id="rId42"/>
   </p:sldIdLst>
   <p:sldSz cx="12191695" cy="6858000" type="screen4x3"/>
   <p:notesSz cx="6858000" cy="9144000"/>
@@ -3426,7 +3429,7 @@
         <p:spPr>
           <a:xfrm>
             <a:off x="914400" y="4069080"/>
-            <a:ext cx="10515600" cy="1097280"/>
+            <a:ext cx="10515600" cy="1554480"/>
           </a:xfrm>
           <a:prstGeom prst="rect">
             <a:avLst/>
@@ -3497,7 +3500,38 @@
                 </a:solidFill>
                 <a:latin typeface="Segoe UI"/>
               </a:rPr>
-              <a:t>La metodología (agnóstica): flujo con gates · CodeGraph / Serena / GSD · grafo de tickets · transferencia · ops</a:t>
+              <a:t>La metodología (agnóstica): flujo con gates · CodeGraph / Serena / GSD · transferencia · ops</a:t>
+            </a:r>
+          </a:p>
+          <a:p>
+            <a:pPr algn="l">
+              <a:lnSpc>
+                <a:spcPct val="100000"/>
+              </a:lnSpc>
+              <a:spcBef>
+                <a:spcPts val="0"/>
+              </a:spcBef>
+              <a:spcAft>
+                <a:spcPts val="800"/>
+              </a:spcAft>
+            </a:pPr>
+            <a:r>
+              <a:rPr sz="1500" b="1">
+                <a:solidFill>
+                  <a:srgbClr val="8CC28C"/>
+                </a:solidFill>
+                <a:latin typeface="Segoe UI"/>
+              </a:rPr>
+              <a:t>PARTE 3 — </a:t>
+            </a:r>
+            <a:r>
+              <a:rPr sz="1350" b="0">
+                <a:solidFill>
+                  <a:srgbClr val="9AA4B2"/>
+                </a:solidFill>
+                <a:latin typeface="Segoe UI"/>
+              </a:rPr>
+              <a:t>El grafo de conocimiento de tickets, construido con graphify: pipeline, comandos /kg y el grafo real</a:t>
             </a:r>
           </a:p>
         </p:txBody>
@@ -17707,7 +17741,7 @@
                 </a:solidFill>
                 <a:latin typeface="Segoe UI"/>
               </a:rPr>
-              <a:t>Un curso, dos partes</a:t>
+              <a:t>Un curso, tres partes</a:t>
             </a:r>
           </a:p>
         </p:txBody>
@@ -18861,7 +18895,7 @@
                 </a:solidFill>
                 <a:latin typeface="Segoe UI"/>
               </a:rPr>
-              <a:t>10  El grafo de conocimiento de tickets</a:t>
+              <a:t>10  Transferir la metodología (Copilot)</a:t>
             </a:r>
           </a:p>
         </p:txBody>
@@ -18954,20 +18988,65 @@
                 </a:solidFill>
                 <a:latin typeface="Segoe UI"/>
               </a:rPr>
-              <a:t>11  Transferir la metodología (Copilot)</a:t>
-            </a:r>
-          </a:p>
-        </p:txBody>
-      </p:sp>
-      <p:sp>
-        <p:nvSpPr>
-          <p:cNvPr id="33" name="Rounded Rectangle 32"/>
+              <a:t>11  Sincronización de máquinas</a:t>
+            </a:r>
+          </a:p>
+        </p:txBody>
+      </p:sp>
+      <p:sp>
+        <p:nvSpPr>
+          <p:cNvPr id="33" name="TextBox 32"/>
+          <p:cNvSpPr txBox="1"/>
+          <p:nvPr/>
+        </p:nvSpPr>
+        <p:spPr>
+          <a:xfrm>
+            <a:off x="6217920" y="4343400"/>
+            <a:ext cx="5349240" cy="365760"/>
+          </a:xfrm>
+          <a:prstGeom prst="rect">
+            <a:avLst/>
+          </a:prstGeom>
+          <a:noFill/>
+        </p:spPr>
+        <p:txBody>
+          <a:bodyPr wrap="square" anchor="t" lIns="0" rIns="0" tIns="0" bIns="0">
+            <a:spAutoFit/>
+          </a:bodyPr>
+          <a:lstStyle/>
+          <a:p>
+            <a:pPr algn="l">
+              <a:lnSpc>
+                <a:spcPct val="100000"/>
+              </a:lnSpc>
+              <a:spcBef>
+                <a:spcPts val="0"/>
+              </a:spcBef>
+              <a:spcAft>
+                <a:spcPts val="400"/>
+              </a:spcAft>
+            </a:pPr>
+            <a:r>
+              <a:rPr sz="1400" b="1">
+                <a:solidFill>
+                  <a:srgbClr val="8CC28C"/>
+                </a:solidFill>
+                <a:latin typeface="Segoe UI"/>
+              </a:rPr>
+              <a:t>PARTE 3 · El grafo de tickets (graphify)</a:t>
+            </a:r>
+          </a:p>
+        </p:txBody>
+      </p:sp>
+      <p:sp>
+        <p:nvSpPr>
+          <p:cNvPr id="34" name="Rounded Rectangle 33"/>
           <p:cNvSpPr/>
           <p:nvPr/>
         </p:nvSpPr>
         <p:spPr>
           <a:xfrm>
-            <a:off x="6217920" y="4242816"/>
+            <a:off x="6217920" y="4754880"/>
             <a:ext cx="5349240" cy="438912"/>
           </a:xfrm>
           <a:prstGeom prst="roundRect">
@@ -19009,13 +19088,13 @@
       </p:sp>
       <p:sp>
         <p:nvSpPr>
-          <p:cNvPr id="34" name="TextBox 33"/>
-          <p:cNvSpPr txBox="1"/>
-          <p:nvPr/>
-        </p:nvSpPr>
-        <p:spPr>
-          <a:xfrm>
-            <a:off x="6446520" y="4279392"/>
+          <p:cNvPr id="35" name="TextBox 34"/>
+          <p:cNvSpPr txBox="1"/>
+          <p:nvPr/>
+        </p:nvSpPr>
+        <p:spPr>
+          <a:xfrm>
+            <a:off x="6446520" y="4791456"/>
             <a:ext cx="5029200" cy="365760"/>
           </a:xfrm>
           <a:prstGeom prst="rect">
@@ -19047,20 +19126,20 @@
                 </a:solidFill>
                 <a:latin typeface="Segoe UI"/>
               </a:rPr>
-              <a:t>12  Sincronización de máquinas</a:t>
-            </a:r>
-          </a:p>
-        </p:txBody>
-      </p:sp>
-      <p:sp>
-        <p:nvSpPr>
-          <p:cNvPr id="35" name="Rounded Rectangle 34"/>
+              <a:t>12  Diseño · pipeline · comandos /kg · el grafo real</a:t>
+            </a:r>
+          </a:p>
+        </p:txBody>
+      </p:sp>
+      <p:sp>
+        <p:nvSpPr>
+          <p:cNvPr id="36" name="Rounded Rectangle 35"/>
           <p:cNvSpPr/>
           <p:nvPr/>
         </p:nvSpPr>
         <p:spPr>
           <a:xfrm>
-            <a:off x="6217920" y="4754880"/>
+            <a:off x="6217920" y="5266944"/>
             <a:ext cx="5349240" cy="438912"/>
           </a:xfrm>
           <a:prstGeom prst="roundRect">
@@ -19102,13 +19181,13 @@
       </p:sp>
       <p:sp>
         <p:nvSpPr>
-          <p:cNvPr id="36" name="TextBox 35"/>
-          <p:cNvSpPr txBox="1"/>
-          <p:nvPr/>
-        </p:nvSpPr>
-        <p:spPr>
-          <a:xfrm>
-            <a:off x="6446520" y="4791456"/>
+          <p:cNvPr id="37" name="TextBox 36"/>
+          <p:cNvSpPr txBox="1"/>
+          <p:nvPr/>
+        </p:nvSpPr>
+        <p:spPr>
+          <a:xfrm>
+            <a:off x="6446520" y="5303520"/>
             <a:ext cx="5029200" cy="365760"/>
           </a:xfrm>
           <a:prstGeom prst="rect">
@@ -19748,7 +19827,7 @@
                 </a:solidFill>
                 <a:latin typeface="Segoe UI"/>
               </a:rPr>
-              <a:t>10 · El grafo de conocimiento de tickets</a:t>
+              <a:t>10 · Transferir a otro agente (Copilot)</a:t>
             </a:r>
           </a:p>
         </p:txBody>
@@ -19841,200 +19920,14 @@
                 </a:solidFill>
                 <a:latin typeface="Segoe UI"/>
               </a:rPr>
-              <a:t>11 · Transferir a otro agente (Copilot)</a:t>
-            </a:r>
-          </a:p>
-        </p:txBody>
-      </p:sp>
-      <p:sp>
-        <p:nvSpPr>
-          <p:cNvPr id="17" name="Rounded Rectangle 16"/>
-          <p:cNvSpPr/>
-          <p:nvPr/>
-        </p:nvSpPr>
-        <p:spPr>
-          <a:xfrm>
-            <a:off x="914400" y="4654296"/>
-            <a:ext cx="5212080" cy="475488"/>
-          </a:xfrm>
-          <a:prstGeom prst="roundRect">
-            <a:avLst>
-              <a:gd name="adj" fmla="val 16000"/>
-            </a:avLst>
-          </a:prstGeom>
-          <a:solidFill>
-            <a:srgbClr val="1A212B"/>
-          </a:solidFill>
-          <a:ln w="9525">
-            <a:solidFill>
-              <a:srgbClr val="2E3948"/>
-            </a:solidFill>
-          </a:ln>
-          <a:effectLst/>
-        </p:spPr>
-        <p:style>
-          <a:lnRef idx="1">
-            <a:schemeClr val="accent1"/>
-          </a:lnRef>
-          <a:fillRef idx="3">
-            <a:schemeClr val="accent1"/>
-          </a:fillRef>
-          <a:effectRef idx="2">
-            <a:schemeClr val="accent1"/>
-          </a:effectRef>
-          <a:fontRef idx="minor">
-            <a:schemeClr val="lt1"/>
-          </a:fontRef>
-        </p:style>
-        <p:txBody>
-          <a:bodyPr rtlCol="0" anchor="ctr"/>
-          <a:lstStyle/>
-          <a:p>
-            <a:pPr algn="ctr"/>
-          </a:p>
-        </p:txBody>
-      </p:sp>
-      <p:sp>
-        <p:nvSpPr>
-          <p:cNvPr id="18" name="TextBox 17"/>
-          <p:cNvSpPr txBox="1"/>
-          <p:nvPr/>
-        </p:nvSpPr>
-        <p:spPr>
-          <a:xfrm>
-            <a:off x="1143000" y="4700016"/>
-            <a:ext cx="4846320" cy="384048"/>
-          </a:xfrm>
-          <a:prstGeom prst="rect">
-            <a:avLst/>
-          </a:prstGeom>
-          <a:noFill/>
-        </p:spPr>
-        <p:txBody>
-          <a:bodyPr wrap="square" anchor="ctr" lIns="0" rIns="0" tIns="0" bIns="0">
-            <a:spAutoFit/>
-          </a:bodyPr>
-          <a:lstStyle/>
-          <a:p>
-            <a:pPr algn="l">
-              <a:lnSpc>
-                <a:spcPct val="100000"/>
-              </a:lnSpc>
-              <a:spcBef>
-                <a:spcPts val="0"/>
-              </a:spcBef>
-              <a:spcAft>
-                <a:spcPts val="400"/>
-              </a:spcAft>
-            </a:pPr>
-            <a:r>
-              <a:rPr sz="1250" b="0">
-                <a:solidFill>
-                  <a:srgbClr val="E8EAED"/>
-                </a:solidFill>
-                <a:latin typeface="Segoe UI"/>
-              </a:rPr>
-              <a:t>12 · Sincronización de máquinas</a:t>
-            </a:r>
-          </a:p>
-        </p:txBody>
-      </p:sp>
-      <p:sp>
-        <p:nvSpPr>
-          <p:cNvPr id="19" name="Rounded Rectangle 18"/>
-          <p:cNvSpPr/>
-          <p:nvPr/>
-        </p:nvSpPr>
-        <p:spPr>
-          <a:xfrm>
-            <a:off x="6400800" y="4654296"/>
-            <a:ext cx="5212080" cy="475488"/>
-          </a:xfrm>
-          <a:prstGeom prst="roundRect">
-            <a:avLst>
-              <a:gd name="adj" fmla="val 16000"/>
-            </a:avLst>
-          </a:prstGeom>
-          <a:solidFill>
-            <a:srgbClr val="1A212B"/>
-          </a:solidFill>
-          <a:ln w="9525">
-            <a:solidFill>
-              <a:srgbClr val="2E3948"/>
-            </a:solidFill>
-          </a:ln>
-          <a:effectLst/>
-        </p:spPr>
-        <p:style>
-          <a:lnRef idx="1">
-            <a:schemeClr val="accent1"/>
-          </a:lnRef>
-          <a:fillRef idx="3">
-            <a:schemeClr val="accent1"/>
-          </a:fillRef>
-          <a:effectRef idx="2">
-            <a:schemeClr val="accent1"/>
-          </a:effectRef>
-          <a:fontRef idx="minor">
-            <a:schemeClr val="lt1"/>
-          </a:fontRef>
-        </p:style>
-        <p:txBody>
-          <a:bodyPr rtlCol="0" anchor="ctr"/>
-          <a:lstStyle/>
-          <a:p>
-            <a:pPr algn="ctr"/>
-          </a:p>
-        </p:txBody>
-      </p:sp>
-      <p:sp>
-        <p:nvSpPr>
-          <p:cNvPr id="20" name="TextBox 19"/>
-          <p:cNvSpPr txBox="1"/>
-          <p:nvPr/>
-        </p:nvSpPr>
-        <p:spPr>
-          <a:xfrm>
-            <a:off x="6629400" y="4700016"/>
-            <a:ext cx="4846320" cy="384048"/>
-          </a:xfrm>
-          <a:prstGeom prst="rect">
-            <a:avLst/>
-          </a:prstGeom>
-          <a:noFill/>
-        </p:spPr>
-        <p:txBody>
-          <a:bodyPr wrap="square" anchor="ctr" lIns="0" rIns="0" tIns="0" bIns="0">
-            <a:spAutoFit/>
-          </a:bodyPr>
-          <a:lstStyle/>
-          <a:p>
-            <a:pPr algn="l">
-              <a:lnSpc>
-                <a:spcPct val="100000"/>
-              </a:lnSpc>
-              <a:spcBef>
-                <a:spcPts val="0"/>
-              </a:spcBef>
-              <a:spcAft>
-                <a:spcPts val="400"/>
-              </a:spcAft>
-            </a:pPr>
-            <a:r>
-              <a:rPr sz="1250" b="0">
-                <a:solidFill>
-                  <a:srgbClr val="E8EAED"/>
-                </a:solidFill>
-                <a:latin typeface="Segoe UI"/>
-              </a:rPr>
-              <a:t>13 · Cierre</a:t>
-            </a:r>
-          </a:p>
-        </p:txBody>
-      </p:sp>
-      <p:sp>
-        <p:nvSpPr>
-          <p:cNvPr id="21" name="TextBox 20"/>
+              <a:t>11 · Sincronización de máquinas</a:t>
+            </a:r>
+          </a:p>
+        </p:txBody>
+      </p:sp>
+      <p:sp>
+        <p:nvSpPr>
+          <p:cNvPr id="17" name="TextBox 16"/>
           <p:cNvSpPr txBox="1"/>
           <p:nvPr/>
         </p:nvSpPr>
@@ -28302,7 +28195,7 @@
                 </a:solidFill>
                 <a:latin typeface="Segoe UI"/>
               </a:rPr>
-              <a:t>Grafo de la MEMORIA del proyecto: tickets + sharp edges. History-first sin LLM (sección 10).</a:t>
+              <a:t>Grafo de la MEMORIA del proyecto (con graphify): tickets + sharp edges. History-first sin LLM (Parte 3).</a:t>
             </a:r>
           </a:p>
         </p:txBody>
@@ -32368,7 +32261,7 @@
                 </a:solidFill>
                 <a:latin typeface="Segoe UI"/>
               </a:rPr>
-              <a:t>PARTE 2 · 10 · GRAFO DE TICKETS</a:t>
+              <a:t>PARTE 2 · 10 · TRANSFERENCIA</a:t>
             </a:r>
           </a:p>
         </p:txBody>
@@ -32413,7 +32306,7 @@
                 </a:solidFill>
                 <a:latin typeface="Segoe UI"/>
               </a:rPr>
-              <a:t>CodeGraph, pero para tickets y lecciones</a:t>
+              <a:t>La prueba de que es agnóstica: llevarla a Copilot</a:t>
             </a:r>
           </a:p>
         </p:txBody>
@@ -32561,7 +32454,7 @@
         <p:spPr>
           <a:xfrm>
             <a:off x="640080" y="1828800"/>
-            <a:ext cx="5349240" cy="2194560"/>
+            <a:ext cx="5349240" cy="2514600"/>
           </a:xfrm>
           <a:prstGeom prst="roundRect">
             <a:avLst>
@@ -32636,11 +32529,11 @@
             <a:r>
               <a:rPr sz="1400" b="1">
                 <a:solidFill>
-                  <a:srgbClr val="7AA2C7"/>
-                </a:solidFill>
-                <a:latin typeface="Segoe UI"/>
-              </a:rPr>
-              <a:t>Grafo sobre los .md del proyecto (data/, interno)</a:t>
+                  <a:srgbClr val="8CC28C"/>
+                </a:solidFill>
+                <a:latin typeface="Segoe UI"/>
+              </a:rPr>
+              <a:t>Viaja SIN cambios (las 5 reglas)</a:t>
             </a:r>
           </a:p>
         </p:txBody>
@@ -32654,7 +32547,7 @@
         <p:spPr>
           <a:xfrm>
             <a:off x="914400" y="2487168"/>
-            <a:ext cx="4846320" cy="1371600"/>
+            <a:ext cx="4846320" cy="1691640"/>
           </a:xfrm>
           <a:prstGeom prst="rect">
             <a:avLst/>
@@ -32681,7 +32574,7 @@
             <a:r>
               <a:rPr sz="1150" b="1">
                 <a:solidFill>
-                  <a:srgbClr val="7AA2C7"/>
+                  <a:srgbClr val="8CC28C"/>
                 </a:solidFill>
                 <a:latin typeface="Segoe UI"/>
               </a:rPr>
@@ -32694,7 +32587,7 @@
                 </a:solidFill>
                 <a:latin typeface="Segoe UI"/>
               </a:rPr>
-              <a:t>Nodos: tickets + símbolos + invariantes + lecciones</a:t>
+              <a:t>Plan → acuerdo → implementar</a:t>
             </a:r>
           </a:p>
           <a:p>
@@ -32712,7 +32605,7 @@
             <a:r>
               <a:rPr sz="1150" b="1">
                 <a:solidFill>
-                  <a:srgbClr val="7AA2C7"/>
+                  <a:srgbClr val="8CC28C"/>
                 </a:solidFill>
                 <a:latin typeface="Segoe UI"/>
               </a:rPr>
@@ -32725,7 +32618,7 @@
                 </a:solidFill>
                 <a:latin typeface="Segoe UI"/>
               </a:rPr>
-              <a:t>Aristas tipadas: references / supersedes / relacionado</a:t>
+              <a:t>Verificar en el contrato del CONSUMIDOR</a:t>
             </a:r>
           </a:p>
           <a:p>
@@ -32743,7 +32636,7 @@
             <a:r>
               <a:rPr sz="1150" b="1">
                 <a:solidFill>
-                  <a:srgbClr val="7AA2C7"/>
+                  <a:srgbClr val="8CC28C"/>
                 </a:solidFill>
                 <a:latin typeface="Segoe UI"/>
               </a:rPr>
@@ -32756,7 +32649,7 @@
                 </a:solidFill>
                 <a:latin typeface="Segoe UI"/>
               </a:rPr>
-              <a:t>Comunidades = zonas de peligro (fin-de-carta, títulos…)</a:t>
+              <a:t>Resolver la clase general, no un input</a:t>
             </a:r>
           </a:p>
           <a:p>
@@ -32774,7 +32667,7 @@
             <a:r>
               <a:rPr sz="1150" b="1">
                 <a:solidFill>
-                  <a:srgbClr val="7AA2C7"/>
+                  <a:srgbClr val="8CC28C"/>
                 </a:solidFill>
                 <a:latin typeface="Segoe UI"/>
               </a:rPr>
@@ -32787,225 +32680,52 @@
                 </a:solidFill>
                 <a:latin typeface="Segoe UI"/>
               </a:rPr>
-              <a:t>Determinista, sin LLM en la consulta (lee graph.json)</a:t>
-            </a:r>
-          </a:p>
-        </p:txBody>
-      </p:sp>
-      <p:sp>
-        <p:nvSpPr>
-          <p:cNvPr id="12" name="TextBox 11"/>
-          <p:cNvSpPr txBox="1"/>
-          <p:nvPr/>
-        </p:nvSpPr>
-        <p:spPr>
-          <a:xfrm>
-            <a:off x="6217920" y="1700784"/>
-            <a:ext cx="5349240" cy="274320"/>
-          </a:xfrm>
-          <a:prstGeom prst="rect">
-            <a:avLst/>
-          </a:prstGeom>
-          <a:noFill/>
-        </p:spPr>
-        <p:txBody>
-          <a:bodyPr wrap="square" anchor="t" lIns="0" rIns="0" tIns="0" bIns="0">
-            <a:spAutoFit/>
-          </a:bodyPr>
-          <a:lstStyle/>
-          <a:p>
-            <a:pPr algn="l">
-              <a:lnSpc>
-                <a:spcPct val="100000"/>
-              </a:lnSpc>
-              <a:spcBef>
-                <a:spcPts val="0"/>
-              </a:spcBef>
-              <a:spcAft>
-                <a:spcPts val="400"/>
-              </a:spcAft>
-            </a:pPr>
-            <a:r>
-              <a:rPr sz="1100" b="1">
-                <a:solidFill>
-                  <a:srgbClr val="7AA2C7"/>
-                </a:solidFill>
-                <a:latin typeface="Segoe UI"/>
-              </a:rPr>
-              <a:t>Skill /kg  (envuelve graphify explain/path)</a:t>
-            </a:r>
-          </a:p>
-        </p:txBody>
-      </p:sp>
-      <p:sp>
-        <p:nvSpPr>
-          <p:cNvPr id="13" name="Rounded Rectangle 12"/>
+              <a:t>Rastro durable: porqué, qué, cómo se verificó</a:t>
+            </a:r>
+          </a:p>
+          <a:p>
+            <a:pPr algn="l">
+              <a:lnSpc>
+                <a:spcPct val="105000"/>
+              </a:lnSpc>
+              <a:spcBef>
+                <a:spcPts val="0"/>
+              </a:spcBef>
+              <a:spcAft>
+                <a:spcPts val="600"/>
+              </a:spcAft>
+            </a:pPr>
+            <a:r>
+              <a:rPr sz="1150" b="1">
+                <a:solidFill>
+                  <a:srgbClr val="8CC28C"/>
+                </a:solidFill>
+                <a:latin typeface="Segoe UI"/>
+              </a:rPr>
+              <a:t>▸  </a:t>
+            </a:r>
+            <a:r>
+              <a:rPr sz="1150" b="0">
+                <a:solidFill>
+                  <a:srgbClr val="E8EAED"/>
+                </a:solidFill>
+                <a:latin typeface="Segoe UI"/>
+              </a:rPr>
+              <a:t>El humano posee lo externo (merge, deploy)</a:t>
+            </a:r>
+          </a:p>
+        </p:txBody>
+      </p:sp>
+      <p:sp>
+        <p:nvSpPr>
+          <p:cNvPr id="12" name="Rounded Rectangle 11"/>
           <p:cNvSpPr/>
           <p:nvPr/>
         </p:nvSpPr>
         <p:spPr>
           <a:xfrm>
-            <a:off x="6217920" y="2011680"/>
-            <a:ext cx="5349240" cy="1737360"/>
-          </a:xfrm>
-          <a:prstGeom prst="roundRect">
-            <a:avLst>
-              <a:gd name="adj" fmla="val 5000"/>
-            </a:avLst>
-          </a:prstGeom>
-          <a:solidFill>
-            <a:srgbClr val="0A0E13"/>
-          </a:solidFill>
-          <a:ln w="9525">
-            <a:solidFill>
-              <a:srgbClr val="2E3948"/>
-            </a:solidFill>
-          </a:ln>
-          <a:effectLst/>
-        </p:spPr>
-        <p:style>
-          <a:lnRef idx="1">
-            <a:schemeClr val="accent1"/>
-          </a:lnRef>
-          <a:fillRef idx="3">
-            <a:schemeClr val="accent1"/>
-          </a:fillRef>
-          <a:effectRef idx="2">
-            <a:schemeClr val="accent1"/>
-          </a:effectRef>
-          <a:fontRef idx="minor">
-            <a:schemeClr val="lt1"/>
-          </a:fontRef>
-        </p:style>
-        <p:txBody>
-          <a:bodyPr rtlCol="0" anchor="ctr"/>
-          <a:lstStyle/>
-          <a:p>
-            <a:pPr algn="ctr"/>
-          </a:p>
-        </p:txBody>
-      </p:sp>
-      <p:sp>
-        <p:nvSpPr>
-          <p:cNvPr id="14" name="TextBox 13"/>
-          <p:cNvSpPr txBox="1"/>
-          <p:nvPr/>
-        </p:nvSpPr>
-        <p:spPr>
-          <a:xfrm>
-            <a:off x="6473952" y="2194560"/>
-            <a:ext cx="4892040" cy="1417319"/>
-          </a:xfrm>
-          <a:prstGeom prst="rect">
-            <a:avLst/>
-          </a:prstGeom>
-          <a:noFill/>
-        </p:spPr>
-        <p:txBody>
-          <a:bodyPr wrap="square" anchor="t" lIns="0" rIns="0" tIns="0" bIns="0">
-            <a:spAutoFit/>
-          </a:bodyPr>
-          <a:lstStyle/>
-          <a:p>
-            <a:pPr algn="l">
-              <a:lnSpc>
-                <a:spcPct val="112000"/>
-              </a:lnSpc>
-              <a:spcBef>
-                <a:spcPts val="0"/>
-              </a:spcBef>
-              <a:spcAft>
-                <a:spcPts val="200"/>
-              </a:spcAft>
-            </a:pPr>
-            <a:r>
-              <a:rPr sz="1150" b="0">
-                <a:solidFill>
-                  <a:srgbClr val="E8EAED"/>
-                </a:solidFill>
-                <a:latin typeface="Consolas"/>
-              </a:rPr>
-              <a:t>/kg &lt;ticket|tema&gt;   # vecinos  (explain)</a:t>
-            </a:r>
-          </a:p>
-          <a:p>
-            <a:pPr algn="l">
-              <a:lnSpc>
-                <a:spcPct val="112000"/>
-              </a:lnSpc>
-              <a:spcBef>
-                <a:spcPts val="0"/>
-              </a:spcBef>
-              <a:spcAft>
-                <a:spcPts val="200"/>
-              </a:spcAft>
-            </a:pPr>
-            <a:r>
-              <a:rPr sz="1150" b="0">
-                <a:solidFill>
-                  <a:srgbClr val="E8EAED"/>
-                </a:solidFill>
-                <a:latin typeface="Consolas"/>
-              </a:rPr>
-              <a:t>/kg &lt;A&gt; &lt;B&gt;         # camino    (path)</a:t>
-            </a:r>
-          </a:p>
-          <a:p>
-            <a:pPr algn="l">
-              <a:lnSpc>
-                <a:spcPct val="112000"/>
-              </a:lnSpc>
-              <a:spcBef>
-                <a:spcPts val="0"/>
-              </a:spcBef>
-              <a:spcAft>
-                <a:spcPts val="200"/>
-              </a:spcAft>
-            </a:pPr>
-            <a:r>
-              <a:rPr sz="1150" b="0">
-                <a:solidFill>
-                  <a:srgbClr val="E8EAED"/>
-                </a:solidFill>
-                <a:latin typeface="Consolas"/>
-              </a:rPr>
-              <a:t>/kg find &lt;substr&gt;   # nombre de nodo</a:t>
-            </a:r>
-          </a:p>
-          <a:p>
-            <a:pPr algn="l">
-              <a:lnSpc>
-                <a:spcPct val="112000"/>
-              </a:lnSpc>
-              <a:spcBef>
-                <a:spcPts val="0"/>
-              </a:spcBef>
-              <a:spcAft>
-                <a:spcPts val="200"/>
-              </a:spcAft>
-            </a:pPr>
-            <a:r>
-              <a:rPr sz="1150" b="0">
-                <a:solidFill>
-                  <a:srgbClr val="E8EAED"/>
-                </a:solidFill>
-                <a:latin typeface="Consolas"/>
-              </a:rPr>
-              <a:t>/kg-refresh         # reconstruir el grafo</a:t>
-            </a:r>
-          </a:p>
-        </p:txBody>
-      </p:sp>
-      <p:sp>
-        <p:nvSpPr>
-          <p:cNvPr id="15" name="Rounded Rectangle 14"/>
-          <p:cNvSpPr/>
-          <p:nvPr/>
-        </p:nvSpPr>
-        <p:spPr>
-          <a:xfrm>
-            <a:off x="6217920" y="3913632"/>
-            <a:ext cx="5349240" cy="1024128"/>
+            <a:off x="6217920" y="1828800"/>
+            <a:ext cx="5349240" cy="2514600"/>
           </a:xfrm>
           <a:prstGeom prst="roundRect">
             <a:avLst>
@@ -33046,14 +32766,285 @@
       </p:sp>
       <p:sp>
         <p:nvSpPr>
+          <p:cNvPr id="13" name="TextBox 12"/>
+          <p:cNvSpPr txBox="1"/>
+          <p:nvPr/>
+        </p:nvSpPr>
+        <p:spPr>
+          <a:xfrm>
+            <a:off x="6492240" y="2029968"/>
+            <a:ext cx="4892040" cy="365760"/>
+          </a:xfrm>
+          <a:prstGeom prst="rect">
+            <a:avLst/>
+          </a:prstGeom>
+          <a:noFill/>
+        </p:spPr>
+        <p:txBody>
+          <a:bodyPr wrap="square" anchor="t" lIns="0" rIns="0" tIns="0" bIns="0">
+            <a:spAutoFit/>
+          </a:bodyPr>
+          <a:lstStyle/>
+          <a:p>
+            <a:pPr algn="l">
+              <a:lnSpc>
+                <a:spcPct val="100000"/>
+              </a:lnSpc>
+              <a:spcBef>
+                <a:spcPts val="0"/>
+              </a:spcBef>
+              <a:spcAft>
+                <a:spcPts val="400"/>
+              </a:spcAft>
+            </a:pPr>
+            <a:r>
+              <a:rPr sz="1400" b="1">
+                <a:solidFill>
+                  <a:srgbClr val="7AA2C7"/>
+                </a:solidFill>
+                <a:latin typeface="Segoe UI"/>
+              </a:rPr>
+              <a:t>Se re-mapea por repo</a:t>
+            </a:r>
+          </a:p>
+        </p:txBody>
+      </p:sp>
+      <p:sp>
+        <p:nvSpPr>
+          <p:cNvPr id="14" name="TextBox 13"/>
+          <p:cNvSpPr txBox="1"/>
+          <p:nvPr/>
+        </p:nvSpPr>
+        <p:spPr>
+          <a:xfrm>
+            <a:off x="6492240" y="2487168"/>
+            <a:ext cx="4846320" cy="1691640"/>
+          </a:xfrm>
+          <a:prstGeom prst="rect">
+            <a:avLst/>
+          </a:prstGeom>
+          <a:noFill/>
+        </p:spPr>
+        <p:txBody>
+          <a:bodyPr wrap="square" anchor="t" lIns="0" rIns="0" tIns="0" bIns="0">
+            <a:spAutoFit/>
+          </a:bodyPr>
+          <a:lstStyle/>
+          <a:p>
+            <a:pPr algn="l">
+              <a:lnSpc>
+                <a:spcPct val="105000"/>
+              </a:lnSpc>
+              <a:spcBef>
+                <a:spcPts val="0"/>
+              </a:spcBef>
+              <a:spcAft>
+                <a:spcPts val="600"/>
+              </a:spcAft>
+            </a:pPr>
+            <a:r>
+              <a:rPr sz="1150" b="1">
+                <a:solidFill>
+                  <a:srgbClr val="7AA2C7"/>
+                </a:solidFill>
+                <a:latin typeface="Segoe UI"/>
+              </a:rPr>
+              <a:t>▸  </a:t>
+            </a:r>
+            <a:r>
+              <a:rPr sz="1150" b="0">
+                <a:solidFill>
+                  <a:srgbClr val="E8EAED"/>
+                </a:solidFill>
+                <a:latin typeface="Segoe UI"/>
+              </a:rPr>
+              <a:t>El contrato: HTTP / DB / evento / artefacto</a:t>
+            </a:r>
+          </a:p>
+          <a:p>
+            <a:pPr algn="l">
+              <a:lnSpc>
+                <a:spcPct val="105000"/>
+              </a:lnSpc>
+              <a:spcBef>
+                <a:spcPts val="0"/>
+              </a:spcBef>
+              <a:spcAft>
+                <a:spcPts val="600"/>
+              </a:spcAft>
+            </a:pPr>
+            <a:r>
+              <a:rPr sz="1150" b="1">
+                <a:solidFill>
+                  <a:srgbClr val="7AA2C7"/>
+                </a:solidFill>
+                <a:latin typeface="Segoe UI"/>
+              </a:rPr>
+              <a:t>▸  </a:t>
+            </a:r>
+            <a:r>
+              <a:rPr sz="1150" b="0">
+                <a:solidFill>
+                  <a:srgbClr val="E8EAED"/>
+                </a:solidFill>
+                <a:latin typeface="Segoe UI"/>
+              </a:rPr>
+              <a:t>El tracker: Jira · Azure Boards · Issues</a:t>
+            </a:r>
+          </a:p>
+          <a:p>
+            <a:pPr algn="l">
+              <a:lnSpc>
+                <a:spcPct val="105000"/>
+              </a:lnSpc>
+              <a:spcBef>
+                <a:spcPts val="0"/>
+              </a:spcBef>
+              <a:spcAft>
+                <a:spcPts val="600"/>
+              </a:spcAft>
+            </a:pPr>
+            <a:r>
+              <a:rPr sz="1150" b="1">
+                <a:solidFill>
+                  <a:srgbClr val="7AA2C7"/>
+                </a:solidFill>
+                <a:latin typeface="Segoe UI"/>
+              </a:rPr>
+              <a:t>▸  </a:t>
+            </a:r>
+            <a:r>
+              <a:rPr sz="1150" b="0">
+                <a:solidFill>
+                  <a:srgbClr val="E8EAED"/>
+                </a:solidFill>
+                <a:latin typeface="Segoe UI"/>
+              </a:rPr>
+              <a:t>La pirámide de tests y el runtime desplegado</a:t>
+            </a:r>
+          </a:p>
+          <a:p>
+            <a:pPr algn="l">
+              <a:lnSpc>
+                <a:spcPct val="105000"/>
+              </a:lnSpc>
+              <a:spcBef>
+                <a:spcPts val="0"/>
+              </a:spcBef>
+              <a:spcAft>
+                <a:spcPts val="600"/>
+              </a:spcAft>
+            </a:pPr>
+            <a:r>
+              <a:rPr sz="1150" b="1">
+                <a:solidFill>
+                  <a:srgbClr val="7AA2C7"/>
+                </a:solidFill>
+                <a:latin typeface="Segoe UI"/>
+              </a:rPr>
+              <a:t>▸  </a:t>
+            </a:r>
+            <a:r>
+              <a:rPr sz="1150" b="0">
+                <a:solidFill>
+                  <a:srgbClr val="E8EAED"/>
+                </a:solidFill>
+                <a:latin typeface="Segoe UI"/>
+              </a:rPr>
+              <a:t>Las reglas de sanitización locales</a:t>
+            </a:r>
+          </a:p>
+          <a:p>
+            <a:pPr algn="l">
+              <a:lnSpc>
+                <a:spcPct val="105000"/>
+              </a:lnSpc>
+              <a:spcBef>
+                <a:spcPts val="0"/>
+              </a:spcBef>
+              <a:spcAft>
+                <a:spcPts val="600"/>
+              </a:spcAft>
+            </a:pPr>
+            <a:r>
+              <a:rPr sz="1150" b="1">
+                <a:solidFill>
+                  <a:srgbClr val="7AA2C7"/>
+                </a:solidFill>
+                <a:latin typeface="Segoe UI"/>
+              </a:rPr>
+              <a:t>▸  </a:t>
+            </a:r>
+            <a:r>
+              <a:rPr sz="1150" b="0">
+                <a:solidFill>
+                  <a:srgbClr val="E8EAED"/>
+                </a:solidFill>
+                <a:latin typeface="Segoe UI"/>
+              </a:rPr>
+              <a:t>Las tools: Serena/CodeGraph//kg son fungibles</a:t>
+            </a:r>
+          </a:p>
+        </p:txBody>
+      </p:sp>
+      <p:sp>
+        <p:nvSpPr>
+          <p:cNvPr id="15" name="Rounded Rectangle 14"/>
+          <p:cNvSpPr/>
+          <p:nvPr/>
+        </p:nvSpPr>
+        <p:spPr>
+          <a:xfrm>
+            <a:off x="640080" y="4526280"/>
+            <a:ext cx="10927080" cy="1143000"/>
+          </a:xfrm>
+          <a:prstGeom prst="roundRect">
+            <a:avLst>
+              <a:gd name="adj" fmla="val 6000"/>
+            </a:avLst>
+          </a:prstGeom>
+          <a:solidFill>
+            <a:srgbClr val="1A212B"/>
+          </a:solidFill>
+          <a:ln w="9525">
+            <a:solidFill>
+              <a:srgbClr val="2E3948"/>
+            </a:solidFill>
+          </a:ln>
+          <a:effectLst/>
+        </p:spPr>
+        <p:style>
+          <a:lnRef idx="1">
+            <a:schemeClr val="accent1"/>
+          </a:lnRef>
+          <a:fillRef idx="3">
+            <a:schemeClr val="accent1"/>
+          </a:fillRef>
+          <a:effectRef idx="2">
+            <a:schemeClr val="accent1"/>
+          </a:effectRef>
+          <a:fontRef idx="minor">
+            <a:schemeClr val="lt1"/>
+          </a:fontRef>
+        </p:style>
+        <p:txBody>
+          <a:bodyPr rtlCol="0" anchor="ctr"/>
+          <a:lstStyle/>
+          <a:p>
+            <a:pPr algn="ctr"/>
+          </a:p>
+        </p:txBody>
+      </p:sp>
+      <p:sp>
+        <p:nvSpPr>
           <p:cNvPr id="16" name="TextBox 15"/>
           <p:cNvSpPr txBox="1"/>
           <p:nvPr/>
         </p:nvSpPr>
         <p:spPr>
           <a:xfrm>
-            <a:off x="6446520" y="4023360"/>
-            <a:ext cx="4937760" cy="868680"/>
+            <a:off x="914400" y="4727448"/>
+            <a:ext cx="10469880" cy="365760"/>
           </a:xfrm>
           <a:prstGeom prst="rect">
             <a:avLst/>
@@ -33068,7 +33059,7 @@
           <a:p>
             <a:pPr algn="l">
               <a:lnSpc>
-                <a:spcPct val="103000"/>
+                <a:spcPct val="100000"/>
               </a:lnSpc>
               <a:spcBef>
                 <a:spcPts val="0"/>
@@ -33078,89 +33069,98 @@
               </a:spcAft>
             </a:pPr>
             <a:r>
-              <a:rPr sz="1100" b="1">
+              <a:rPr sz="1400" b="1">
                 <a:solidFill>
                   <a:srgbClr val="D97757"/>
                 </a:solidFill>
                 <a:latin typeface="Segoe UI"/>
               </a:rPr>
-              <a:t>Primero la historia:  </a:t>
-            </a:r>
-            <a:r>
-              <a:rPr sz="1100" b="0">
+              <a:t>El starter-kit (docs/ai-agents-code-methodology/)</a:t>
+            </a:r>
+          </a:p>
+        </p:txBody>
+      </p:sp>
+      <p:sp>
+        <p:nvSpPr>
+          <p:cNvPr id="17" name="TextBox 16"/>
+          <p:cNvSpPr txBox="1"/>
+          <p:nvPr/>
+        </p:nvSpPr>
+        <p:spPr>
+          <a:xfrm>
+            <a:off x="914400" y="5184648"/>
+            <a:ext cx="10424159" cy="320040"/>
+          </a:xfrm>
+          <a:prstGeom prst="rect">
+            <a:avLst/>
+          </a:prstGeom>
+          <a:noFill/>
+        </p:spPr>
+        <p:txBody>
+          <a:bodyPr wrap="square" anchor="t" lIns="0" rIns="0" tIns="0" bIns="0">
+            <a:spAutoFit/>
+          </a:bodyPr>
+          <a:lstStyle/>
+          <a:p>
+            <a:pPr algn="l">
+              <a:lnSpc>
+                <a:spcPct val="105000"/>
+              </a:lnSpc>
+              <a:spcBef>
+                <a:spcPts val="0"/>
+              </a:spcBef>
+              <a:spcAft>
+                <a:spcPts val="600"/>
+              </a:spcAft>
+            </a:pPr>
+            <a:r>
+              <a:rPr sz="1150" b="1">
+                <a:solidFill>
+                  <a:srgbClr val="D97757"/>
+                </a:solidFill>
+                <a:latin typeface="Segoe UI"/>
+              </a:rPr>
+              <a:t>▸  </a:t>
+            </a:r>
+            <a:r>
+              <a:rPr sz="1150" b="0">
                 <a:solidFill>
                   <a:srgbClr val="E8EAED"/>
                 </a:solidFill>
                 <a:latin typeface="Segoe UI"/>
               </a:rPr>
-              <a:t>corre /kg &lt;ticket|tema&gt; ANTES de grep — saca los tickets relacionados + la zona de peligro a leer. Apunta a qué leer, no lo sustituye.</a:t>
-            </a:r>
-          </a:p>
-        </p:txBody>
-      </p:sp>
-      <p:sp>
-        <p:nvSpPr>
-          <p:cNvPr id="17" name="TextBox 16"/>
-          <p:cNvSpPr txBox="1"/>
-          <p:nvPr/>
-        </p:nvSpPr>
-        <p:spPr>
-          <a:xfrm>
-            <a:off x="640080" y="4206240"/>
-            <a:ext cx="5349240" cy="1280160"/>
-          </a:xfrm>
-          <a:prstGeom prst="rect">
-            <a:avLst/>
-          </a:prstGeom>
-          <a:noFill/>
-        </p:spPr>
-        <p:txBody>
-          <a:bodyPr wrap="square" anchor="t" lIns="0" rIns="0" tIns="0" bIns="0">
-            <a:spAutoFit/>
-          </a:bodyPr>
-          <a:lstStyle/>
-          <a:p>
-            <a:pPr algn="l">
-              <a:lnSpc>
-                <a:spcPct val="100000"/>
-              </a:lnSpc>
-              <a:spcBef>
-                <a:spcPts val="0"/>
-              </a:spcBef>
-              <a:spcAft>
-                <a:spcPts val="400"/>
-              </a:spcAft>
-            </a:pPr>
-            <a:r>
-              <a:rPr sz="1300" b="1">
-                <a:solidFill>
-                  <a:srgbClr val="8CC28C"/>
-                </a:solidFill>
-                <a:latin typeface="Segoe UI"/>
-              </a:rPr>
-              <a:t>Ejemplo real: /kg get_letter_end</a:t>
-            </a:r>
-          </a:p>
-          <a:p>
-            <a:pPr algn="l">
-              <a:lnSpc>
-                <a:spcPct val="100000"/>
-              </a:lnSpc>
-              <a:spcBef>
-                <a:spcPts val="0"/>
-              </a:spcBef>
-              <a:spcAft>
-                <a:spcPts val="400"/>
-              </a:spcAft>
-            </a:pPr>
-            <a:r>
-              <a:rPr sz="1050" b="0">
-                <a:solidFill>
-                  <a:srgbClr val="9AA4B2"/>
-                </a:solidFill>
-                <a:latin typeface="Segoe UI"/>
-              </a:rPr>
-              <a:t>devuelve al instante los 5-6 tickets que comparten ese código — la zona de peligro completa.</a:t>
+              <a:t>Plantillas STATUS · SHARP_EDGES · handover · QA + bootstrap-new-repo.ps1 → estructura en el repo destino</a:t>
+            </a:r>
+          </a:p>
+          <a:p>
+            <a:pPr algn="l">
+              <a:lnSpc>
+                <a:spcPct val="105000"/>
+              </a:lnSpc>
+              <a:spcBef>
+                <a:spcPts val="0"/>
+              </a:spcBef>
+              <a:spcAft>
+                <a:spcPts val="600"/>
+              </a:spcAft>
+            </a:pPr>
+            <a:r>
+              <a:rPr sz="1150" b="1">
+                <a:solidFill>
+                  <a:srgbClr val="D97757"/>
+                </a:solidFill>
+                <a:latin typeface="Segoe UI"/>
+              </a:rPr>
+              <a:t>▸  </a:t>
+            </a:r>
+            <a:r>
+              <a:rPr sz="1150" b="0">
+                <a:solidFill>
+                  <a:srgbClr val="E8EAED"/>
+                </a:solidFill>
+                <a:latin typeface="Segoe UI"/>
+              </a:rPr>
+              <a:t>Sin grafo de tickets: fallback determinista (STATUS newest-first + búsqueda léxica + historia de commits) = 80% del valor</a:t>
             </a:r>
           </a:p>
         </p:txBody>
@@ -33308,7 +33308,7 @@
                 </a:solidFill>
                 <a:latin typeface="Segoe UI"/>
               </a:rPr>
-              <a:t>El grafo es el mapa; el agente, el guía. Recall de zonas de peligro que si no tendrías que recordar.</a:t>
+              <a:t>Si solo conservas cinco reglas, conserva esas cinco. Las tools se sustituyen; la disciplina viaja.</a:t>
             </a:r>
             <a:r>
               <a:rPr sz="1300" b="1">
@@ -34493,7 +34493,7 @@
                 </a:solidFill>
                 <a:latin typeface="Segoe UI"/>
               </a:rPr>
-              <a:t>PARTE 2 · 10 · GRAFO DE TICKETS</a:t>
+              <a:t>PARTE 2 · 11 · OPS</a:t>
             </a:r>
           </a:p>
         </p:txBody>
@@ -34538,7 +34538,7 @@
                 </a:solidFill>
                 <a:latin typeface="Segoe UI"/>
               </a:rPr>
-              <a:t>Cómo se construye — y dónde se engancha</a:t>
+              <a:t>Un runbook real: sincronizar máquinas</a:t>
             </a:r>
           </a:p>
         </p:txBody>
@@ -34686,11 +34686,11 @@
         <p:spPr>
           <a:xfrm>
             <a:off x="640080" y="1828800"/>
-            <a:ext cx="10927080" cy="658368"/>
+            <a:ext cx="5349240" cy="2468880"/>
           </a:xfrm>
           <a:prstGeom prst="roundRect">
             <a:avLst>
-              <a:gd name="adj" fmla="val 9000"/>
+              <a:gd name="adj" fmla="val 6000"/>
             </a:avLst>
           </a:prstGeom>
           <a:solidFill>
@@ -34727,199 +34727,241 @@
       </p:sp>
       <p:sp>
         <p:nvSpPr>
-          <p:cNvPr id="10" name="Rounded Rectangle 9"/>
+          <p:cNvPr id="10" name="TextBox 9"/>
+          <p:cNvSpPr txBox="1"/>
+          <p:nvPr/>
+        </p:nvSpPr>
+        <p:spPr>
+          <a:xfrm>
+            <a:off x="914400" y="2029968"/>
+            <a:ext cx="4892040" cy="365760"/>
+          </a:xfrm>
+          <a:prstGeom prst="rect">
+            <a:avLst/>
+          </a:prstGeom>
+          <a:noFill/>
+        </p:spPr>
+        <p:txBody>
+          <a:bodyPr wrap="square" anchor="t" lIns="0" rIns="0" tIns="0" bIns="0">
+            <a:spAutoFit/>
+          </a:bodyPr>
+          <a:lstStyle/>
+          <a:p>
+            <a:pPr algn="l">
+              <a:lnSpc>
+                <a:spcPct val="100000"/>
+              </a:lnSpc>
+              <a:spcBef>
+                <a:spcPts val="0"/>
+              </a:spcBef>
+              <a:spcAft>
+                <a:spcPts val="400"/>
+              </a:spcAft>
+            </a:pPr>
+            <a:r>
+              <a:rPr sz="1400" b="1">
+                <a:solidFill>
+                  <a:srgbClr val="7AA2C7"/>
+                </a:solidFill>
+                <a:latin typeface="Segoe UI"/>
+              </a:rPr>
+              <a:t>Outbound — copia completa</a:t>
+            </a:r>
+          </a:p>
+        </p:txBody>
+      </p:sp>
+      <p:sp>
+        <p:nvSpPr>
+          <p:cNvPr id="11" name="TextBox 10"/>
+          <p:cNvSpPr txBox="1"/>
+          <p:nvPr/>
+        </p:nvSpPr>
+        <p:spPr>
+          <a:xfrm>
+            <a:off x="914400" y="2487168"/>
+            <a:ext cx="4846320" cy="1645920"/>
+          </a:xfrm>
+          <a:prstGeom prst="rect">
+            <a:avLst/>
+          </a:prstGeom>
+          <a:noFill/>
+        </p:spPr>
+        <p:txBody>
+          <a:bodyPr wrap="square" anchor="t" lIns="0" rIns="0" tIns="0" bIns="0">
+            <a:spAutoFit/>
+          </a:bodyPr>
+          <a:lstStyle/>
+          <a:p>
+            <a:pPr algn="l">
+              <a:lnSpc>
+                <a:spcPct val="105000"/>
+              </a:lnSpc>
+              <a:spcBef>
+                <a:spcPts val="0"/>
+              </a:spcBef>
+              <a:spcAft>
+                <a:spcPts val="600"/>
+              </a:spcAft>
+            </a:pPr>
+            <a:r>
+              <a:rPr sz="1150" b="1">
+                <a:solidFill>
+                  <a:srgbClr val="7AA2C7"/>
+                </a:solidFill>
+                <a:latin typeface="Segoe UI"/>
+              </a:rPr>
+              <a:t>▸  </a:t>
+            </a:r>
+            <a:r>
+              <a:rPr sz="1150" b="0">
+                <a:solidFill>
+                  <a:srgbClr val="E8EAED"/>
+                </a:solidFill>
+                <a:latin typeface="Segoe UI"/>
+              </a:rPr>
+              <a:t>Un tarball: workspace + ~/.claude · .aws · .ssh</a:t>
+            </a:r>
+          </a:p>
+          <a:p>
+            <a:pPr algn="l">
+              <a:lnSpc>
+                <a:spcPct val="105000"/>
+              </a:lnSpc>
+              <a:spcBef>
+                <a:spcPts val="0"/>
+              </a:spcBef>
+              <a:spcAft>
+                <a:spcPts val="600"/>
+              </a:spcAft>
+            </a:pPr>
+            <a:r>
+              <a:rPr sz="1150" b="1">
+                <a:solidFill>
+                  <a:srgbClr val="7AA2C7"/>
+                </a:solidFill>
+                <a:latin typeface="Segoe UI"/>
+              </a:rPr>
+              <a:t>▸  </a:t>
+            </a:r>
+            <a:r>
+              <a:rPr sz="1150" b="0">
+                <a:solidFill>
+                  <a:srgbClr val="E8EAED"/>
+                </a:solidFill>
+                <a:latin typeface="Segoe UI"/>
+              </a:rPr>
+              <a:t>-h dereferencia el symlink de .aws (crítico)</a:t>
+            </a:r>
+          </a:p>
+          <a:p>
+            <a:pPr algn="l">
+              <a:lnSpc>
+                <a:spcPct val="105000"/>
+              </a:lnSpc>
+              <a:spcBef>
+                <a:spcPts val="0"/>
+              </a:spcBef>
+              <a:spcAft>
+                <a:spcPts val="600"/>
+              </a:spcAft>
+            </a:pPr>
+            <a:r>
+              <a:rPr sz="1150" b="1">
+                <a:solidFill>
+                  <a:srgbClr val="7AA2C7"/>
+                </a:solidFill>
+                <a:latin typeface="Segoe UI"/>
+              </a:rPr>
+              <a:t>▸  </a:t>
+            </a:r>
+            <a:r>
+              <a:rPr sz="1150" b="0">
+                <a:solidFill>
+                  <a:srgbClr val="E8EAED"/>
+                </a:solidFill>
+                <a:latin typeface="Segoe UI"/>
+              </a:rPr>
+              <a:t>Excluye venvs / node_modules / caches / .codegraph</a:t>
+            </a:r>
+          </a:p>
+          <a:p>
+            <a:pPr algn="l">
+              <a:lnSpc>
+                <a:spcPct val="105000"/>
+              </a:lnSpc>
+              <a:spcBef>
+                <a:spcPts val="0"/>
+              </a:spcBef>
+              <a:spcAft>
+                <a:spcPts val="600"/>
+              </a:spcAft>
+            </a:pPr>
+            <a:r>
+              <a:rPr sz="1150" b="1">
+                <a:solidFill>
+                  <a:srgbClr val="7AA2C7"/>
+                </a:solidFill>
+                <a:latin typeface="Segoe UI"/>
+              </a:rPr>
+              <a:t>▸  </a:t>
+            </a:r>
+            <a:r>
+              <a:rPr sz="1150" b="0">
+                <a:solidFill>
+                  <a:srgbClr val="E8EAED"/>
+                </a:solidFill>
+                <a:latin typeface="Segoe UI"/>
+              </a:rPr>
+              <a:t>USB: mount manual en WSL + verificar byte a byte</a:t>
+            </a:r>
+          </a:p>
+          <a:p>
+            <a:pPr algn="l">
+              <a:lnSpc>
+                <a:spcPct val="105000"/>
+              </a:lnSpc>
+              <a:spcBef>
+                <a:spcPts val="0"/>
+              </a:spcBef>
+              <a:spcAft>
+                <a:spcPts val="600"/>
+              </a:spcAft>
+            </a:pPr>
+            <a:r>
+              <a:rPr sz="1150" b="1">
+                <a:solidFill>
+                  <a:srgbClr val="7AA2C7"/>
+                </a:solidFill>
+                <a:latin typeface="Segoe UI"/>
+              </a:rPr>
+              <a:t>▸  </a:t>
+            </a:r>
+            <a:r>
+              <a:rPr sz="1150" b="0">
+                <a:solidFill>
+                  <a:srgbClr val="E8EAED"/>
+                </a:solidFill>
+                <a:latin typeface="Segoe UI"/>
+              </a:rPr>
+              <a:t>En destino: bootstrap (/kg) + target-setup.sh rehacen el tooling</a:t>
+            </a:r>
+          </a:p>
+        </p:txBody>
+      </p:sp>
+      <p:sp>
+        <p:nvSpPr>
+          <p:cNvPr id="12" name="Rounded Rectangle 11"/>
           <p:cNvSpPr/>
           <p:nvPr/>
         </p:nvSpPr>
         <p:spPr>
           <a:xfrm>
-            <a:off x="786384" y="1956816"/>
-            <a:ext cx="402336" cy="402336"/>
+            <a:off x="6217920" y="1828800"/>
+            <a:ext cx="5349240" cy="2468880"/>
           </a:xfrm>
           <a:prstGeom prst="roundRect">
             <a:avLst>
-              <a:gd name="adj" fmla="val 35000"/>
-            </a:avLst>
-          </a:prstGeom>
-          <a:solidFill>
-            <a:srgbClr val="D97757"/>
-          </a:solidFill>
-          <a:ln>
-            <a:noFill/>
-          </a:ln>
-          <a:effectLst/>
-        </p:spPr>
-        <p:style>
-          <a:lnRef idx="1">
-            <a:schemeClr val="accent1"/>
-          </a:lnRef>
-          <a:fillRef idx="3">
-            <a:schemeClr val="accent1"/>
-          </a:fillRef>
-          <a:effectRef idx="2">
-            <a:schemeClr val="accent1"/>
-          </a:effectRef>
-          <a:fontRef idx="minor">
-            <a:schemeClr val="lt1"/>
-          </a:fontRef>
-        </p:style>
-        <p:txBody>
-          <a:bodyPr rtlCol="0" anchor="ctr"/>
-          <a:lstStyle/>
-          <a:p>
-            <a:pPr algn="ctr"/>
-          </a:p>
-        </p:txBody>
-      </p:sp>
-      <p:sp>
-        <p:nvSpPr>
-          <p:cNvPr id="11" name="TextBox 10"/>
-          <p:cNvSpPr txBox="1"/>
-          <p:nvPr/>
-        </p:nvSpPr>
-        <p:spPr>
-          <a:xfrm>
-            <a:off x="786384" y="1965960"/>
-            <a:ext cx="402336" cy="384048"/>
-          </a:xfrm>
-          <a:prstGeom prst="rect">
-            <a:avLst/>
-          </a:prstGeom>
-          <a:noFill/>
-        </p:spPr>
-        <p:txBody>
-          <a:bodyPr wrap="square" anchor="ctr" lIns="0" rIns="0" tIns="0" bIns="0">
-            <a:spAutoFit/>
-          </a:bodyPr>
-          <a:lstStyle/>
-          <a:p>
-            <a:pPr algn="ctr">
-              <a:lnSpc>
-                <a:spcPct val="100000"/>
-              </a:lnSpc>
-              <a:spcBef>
-                <a:spcPts val="0"/>
-              </a:spcBef>
-              <a:spcAft>
-                <a:spcPts val="400"/>
-              </a:spcAft>
-            </a:pPr>
-            <a:r>
-              <a:rPr sz="1300" b="1">
-                <a:solidFill>
-                  <a:srgbClr val="0F141A"/>
-                </a:solidFill>
-                <a:latin typeface="Segoe UI"/>
-              </a:rPr>
-              <a:t>1</a:t>
-            </a:r>
-          </a:p>
-        </p:txBody>
-      </p:sp>
-      <p:sp>
-        <p:nvSpPr>
-          <p:cNvPr id="12" name="TextBox 11"/>
-          <p:cNvSpPr txBox="1"/>
-          <p:nvPr/>
-        </p:nvSpPr>
-        <p:spPr>
-          <a:xfrm>
-            <a:off x="1371600" y="1892807"/>
-            <a:ext cx="1737360" cy="530352"/>
-          </a:xfrm>
-          <a:prstGeom prst="rect">
-            <a:avLst/>
-          </a:prstGeom>
-          <a:noFill/>
-        </p:spPr>
-        <p:txBody>
-          <a:bodyPr wrap="square" anchor="ctr" lIns="0" rIns="0" tIns="0" bIns="0">
-            <a:spAutoFit/>
-          </a:bodyPr>
-          <a:lstStyle/>
-          <a:p>
-            <a:pPr algn="l">
-              <a:lnSpc>
-                <a:spcPct val="100000"/>
-              </a:lnSpc>
-              <a:spcBef>
-                <a:spcPts val="0"/>
-              </a:spcBef>
-              <a:spcAft>
-                <a:spcPts val="400"/>
-              </a:spcAft>
-            </a:pPr>
-            <a:r>
-              <a:rPr sz="1250" b="1">
-                <a:solidFill>
-                  <a:srgbClr val="7AA2C7"/>
-                </a:solidFill>
-                <a:latin typeface="Segoe UI"/>
-              </a:rPr>
-              <a:t>Corpus curado</a:t>
-            </a:r>
-          </a:p>
-        </p:txBody>
-      </p:sp>
-      <p:sp>
-        <p:nvSpPr>
-          <p:cNvPr id="13" name="TextBox 12"/>
-          <p:cNvSpPr txBox="1"/>
-          <p:nvPr/>
-        </p:nvSpPr>
-        <p:spPr>
-          <a:xfrm>
-            <a:off x="3200400" y="1892807"/>
-            <a:ext cx="8229600" cy="548640"/>
-          </a:xfrm>
-          <a:prstGeom prst="rect">
-            <a:avLst/>
-          </a:prstGeom>
-          <a:noFill/>
-        </p:spPr>
-        <p:txBody>
-          <a:bodyPr wrap="square" anchor="ctr" lIns="0" rIns="0" tIns="0" bIns="0">
-            <a:spAutoFit/>
-          </a:bodyPr>
-          <a:lstStyle/>
-          <a:p>
-            <a:pPr algn="l">
-              <a:lnSpc>
-                <a:spcPct val="100000"/>
-              </a:lnSpc>
-              <a:spcBef>
-                <a:spcPts val="0"/>
-              </a:spcBef>
-              <a:spcAft>
-                <a:spcPts val="400"/>
-              </a:spcAft>
-            </a:pPr>
-            <a:r>
-              <a:rPr sz="1050" b="0">
-                <a:solidFill>
-                  <a:srgbClr val="E8EAED"/>
-                </a:solidFill>
-                <a:latin typeface="Segoe UI"/>
-              </a:rPr>
-              <a:t>manifest.txt DIFFEABLE: writeups sst-*, hubs (STATUS, SHARP_EDGES), runbooks, memoria. Sin binarios ni copias stale.</a:t>
-            </a:r>
-          </a:p>
-        </p:txBody>
-      </p:sp>
-      <p:sp>
-        <p:nvSpPr>
-          <p:cNvPr id="14" name="Rounded Rectangle 13"/>
-          <p:cNvSpPr/>
-          <p:nvPr/>
-        </p:nvSpPr>
-        <p:spPr>
-          <a:xfrm>
-            <a:off x="640080" y="2578608"/>
-            <a:ext cx="10927080" cy="658368"/>
-          </a:xfrm>
-          <a:prstGeom prst="roundRect">
-            <a:avLst>
-              <a:gd name="adj" fmla="val 9000"/>
+              <a:gd name="adj" fmla="val 6000"/>
             </a:avLst>
           </a:prstGeom>
           <a:solidFill>
@@ -34956,199 +34998,210 @@
       </p:sp>
       <p:sp>
         <p:nvSpPr>
+          <p:cNvPr id="13" name="TextBox 12"/>
+          <p:cNvSpPr txBox="1"/>
+          <p:nvPr/>
+        </p:nvSpPr>
+        <p:spPr>
+          <a:xfrm>
+            <a:off x="6492240" y="2029968"/>
+            <a:ext cx="4892040" cy="365760"/>
+          </a:xfrm>
+          <a:prstGeom prst="rect">
+            <a:avLst/>
+          </a:prstGeom>
+          <a:noFill/>
+        </p:spPr>
+        <p:txBody>
+          <a:bodyPr wrap="square" anchor="t" lIns="0" rIns="0" tIns="0" bIns="0">
+            <a:spAutoFit/>
+          </a:bodyPr>
+          <a:lstStyle/>
+          <a:p>
+            <a:pPr algn="l">
+              <a:lnSpc>
+                <a:spcPct val="100000"/>
+              </a:lnSpc>
+              <a:spcBef>
+                <a:spcPts val="0"/>
+              </a:spcBef>
+              <a:spcAft>
+                <a:spcPts val="400"/>
+              </a:spcAft>
+            </a:pPr>
+            <a:r>
+              <a:rPr sz="1400" b="1">
+                <a:solidFill>
+                  <a:srgbClr val="8CC28C"/>
+                </a:solidFill>
+                <a:latin typeface="Segoe UI"/>
+              </a:rPr>
+              <a:t>Inbound — solo delta</a:t>
+            </a:r>
+          </a:p>
+        </p:txBody>
+      </p:sp>
+      <p:sp>
+        <p:nvSpPr>
+          <p:cNvPr id="14" name="TextBox 13"/>
+          <p:cNvSpPr txBox="1"/>
+          <p:nvPr/>
+        </p:nvSpPr>
+        <p:spPr>
+          <a:xfrm>
+            <a:off x="6492240" y="2487168"/>
+            <a:ext cx="4846320" cy="1645920"/>
+          </a:xfrm>
+          <a:prstGeom prst="rect">
+            <a:avLst/>
+          </a:prstGeom>
+          <a:noFill/>
+        </p:spPr>
+        <p:txBody>
+          <a:bodyPr wrap="square" anchor="t" lIns="0" rIns="0" tIns="0" bIns="0">
+            <a:spAutoFit/>
+          </a:bodyPr>
+          <a:lstStyle/>
+          <a:p>
+            <a:pPr algn="l">
+              <a:lnSpc>
+                <a:spcPct val="105000"/>
+              </a:lnSpc>
+              <a:spcBef>
+                <a:spcPts val="0"/>
+              </a:spcBef>
+              <a:spcAft>
+                <a:spcPts val="600"/>
+              </a:spcAft>
+            </a:pPr>
+            <a:r>
+              <a:rPr sz="1150" b="1">
+                <a:solidFill>
+                  <a:srgbClr val="8CC28C"/>
+                </a:solidFill>
+                <a:latin typeface="Segoe UI"/>
+              </a:rPr>
+              <a:t>▸  </a:t>
+            </a:r>
+            <a:r>
+              <a:rPr sz="1150" b="0">
+                <a:solidFill>
+                  <a:srgbClr val="E8EAED"/>
+                </a:solidFill>
+                <a:latin typeface="Segoe UI"/>
+              </a:rPr>
+              <a:t>El código ya está en GitHub → git fetch</a:t>
+            </a:r>
+          </a:p>
+          <a:p>
+            <a:pPr algn="l">
+              <a:lnSpc>
+                <a:spcPct val="105000"/>
+              </a:lnSpc>
+              <a:spcBef>
+                <a:spcPts val="0"/>
+              </a:spcBef>
+              <a:spcAft>
+                <a:spcPts val="600"/>
+              </a:spcAft>
+            </a:pPr>
+            <a:r>
+              <a:rPr sz="1150" b="1">
+                <a:solidFill>
+                  <a:srgbClr val="8CC28C"/>
+                </a:solidFill>
+                <a:latin typeface="Segoe UI"/>
+              </a:rPr>
+              <a:t>▸  </a:t>
+            </a:r>
+            <a:r>
+              <a:rPr sz="1150" b="0">
+                <a:solidFill>
+                  <a:srgbClr val="E8EAED"/>
+                </a:solidFill>
+                <a:latin typeface="Segoe UI"/>
+              </a:rPr>
+              <a:t>Docs gitignored de data/ + memoria (snapshot-memory) viajan</a:t>
+            </a:r>
+          </a:p>
+          <a:p>
+            <a:pPr algn="l">
+              <a:lnSpc>
+                <a:spcPct val="105000"/>
+              </a:lnSpc>
+              <a:spcBef>
+                <a:spcPts val="0"/>
+              </a:spcBef>
+              <a:spcAft>
+                <a:spcPts val="600"/>
+              </a:spcAft>
+            </a:pPr>
+            <a:r>
+              <a:rPr sz="1150" b="1">
+                <a:solidFill>
+                  <a:srgbClr val="8CC28C"/>
+                </a:solidFill>
+                <a:latin typeface="Segoe UI"/>
+              </a:rPr>
+              <a:t>▸  </a:t>
+            </a:r>
+            <a:r>
+              <a:rPr sz="1150" b="0">
+                <a:solidFill>
+                  <a:srgbClr val="E8EAED"/>
+                </a:solidFill>
+                <a:latin typeface="Segoe UI"/>
+              </a:rPr>
+              <a:t>En la principal: restore-memory → /kg-refresh reconstruye</a:t>
+            </a:r>
+          </a:p>
+          <a:p>
+            <a:pPr algn="l">
+              <a:lnSpc>
+                <a:spcPct val="105000"/>
+              </a:lnSpc>
+              <a:spcBef>
+                <a:spcPts val="0"/>
+              </a:spcBef>
+              <a:spcAft>
+                <a:spcPts val="600"/>
+              </a:spcAft>
+            </a:pPr>
+            <a:r>
+              <a:rPr sz="1150" b="1">
+                <a:solidFill>
+                  <a:srgbClr val="8CC28C"/>
+                </a:solidFill>
+                <a:latin typeface="Segoe UI"/>
+              </a:rPr>
+              <a:t>▸  </a:t>
+            </a:r>
+            <a:r>
+              <a:rPr sz="1150" b="0">
+                <a:solidFill>
+                  <a:srgbClr val="E8EAED"/>
+                </a:solidFill>
+                <a:latin typeface="Segoe UI"/>
+              </a:rPr>
+              <a:t>backup + diff de STATUS.md; STOP si hubo ediciones propias</a:t>
+            </a:r>
+          </a:p>
+        </p:txBody>
+      </p:sp>
+      <p:sp>
+        <p:nvSpPr>
           <p:cNvPr id="15" name="Rounded Rectangle 14"/>
           <p:cNvSpPr/>
           <p:nvPr/>
         </p:nvSpPr>
         <p:spPr>
           <a:xfrm>
-            <a:off x="786384" y="2706624"/>
-            <a:ext cx="402336" cy="402336"/>
+            <a:off x="640080" y="4407408"/>
+            <a:ext cx="10927080" cy="1280160"/>
           </a:xfrm>
           <a:prstGeom prst="roundRect">
             <a:avLst>
-              <a:gd name="adj" fmla="val 35000"/>
-            </a:avLst>
-          </a:prstGeom>
-          <a:solidFill>
-            <a:srgbClr val="D97757"/>
-          </a:solidFill>
-          <a:ln>
-            <a:noFill/>
-          </a:ln>
-          <a:effectLst/>
-        </p:spPr>
-        <p:style>
-          <a:lnRef idx="1">
-            <a:schemeClr val="accent1"/>
-          </a:lnRef>
-          <a:fillRef idx="3">
-            <a:schemeClr val="accent1"/>
-          </a:fillRef>
-          <a:effectRef idx="2">
-            <a:schemeClr val="accent1"/>
-          </a:effectRef>
-          <a:fontRef idx="minor">
-            <a:schemeClr val="lt1"/>
-          </a:fontRef>
-        </p:style>
-        <p:txBody>
-          <a:bodyPr rtlCol="0" anchor="ctr"/>
-          <a:lstStyle/>
-          <a:p>
-            <a:pPr algn="ctr"/>
-          </a:p>
-        </p:txBody>
-      </p:sp>
-      <p:sp>
-        <p:nvSpPr>
-          <p:cNvPr id="16" name="TextBox 15"/>
-          <p:cNvSpPr txBox="1"/>
-          <p:nvPr/>
-        </p:nvSpPr>
-        <p:spPr>
-          <a:xfrm>
-            <a:off x="786384" y="2715768"/>
-            <a:ext cx="402336" cy="384048"/>
-          </a:xfrm>
-          <a:prstGeom prst="rect">
-            <a:avLst/>
-          </a:prstGeom>
-          <a:noFill/>
-        </p:spPr>
-        <p:txBody>
-          <a:bodyPr wrap="square" anchor="ctr" lIns="0" rIns="0" tIns="0" bIns="0">
-            <a:spAutoFit/>
-          </a:bodyPr>
-          <a:lstStyle/>
-          <a:p>
-            <a:pPr algn="ctr">
-              <a:lnSpc>
-                <a:spcPct val="100000"/>
-              </a:lnSpc>
-              <a:spcBef>
-                <a:spcPts val="0"/>
-              </a:spcBef>
-              <a:spcAft>
-                <a:spcPts val="400"/>
-              </a:spcAft>
-            </a:pPr>
-            <a:r>
-              <a:rPr sz="1300" b="1">
-                <a:solidFill>
-                  <a:srgbClr val="0F141A"/>
-                </a:solidFill>
-                <a:latin typeface="Segoe UI"/>
-              </a:rPr>
-              <a:t>2</a:t>
-            </a:r>
-          </a:p>
-        </p:txBody>
-      </p:sp>
-      <p:sp>
-        <p:nvSpPr>
-          <p:cNvPr id="17" name="TextBox 16"/>
-          <p:cNvSpPr txBox="1"/>
-          <p:nvPr/>
-        </p:nvSpPr>
-        <p:spPr>
-          <a:xfrm>
-            <a:off x="1371600" y="2642615"/>
-            <a:ext cx="1737360" cy="530352"/>
-          </a:xfrm>
-          <a:prstGeom prst="rect">
-            <a:avLst/>
-          </a:prstGeom>
-          <a:noFill/>
-        </p:spPr>
-        <p:txBody>
-          <a:bodyPr wrap="square" anchor="ctr" lIns="0" rIns="0" tIns="0" bIns="0">
-            <a:spAutoFit/>
-          </a:bodyPr>
-          <a:lstStyle/>
-          <a:p>
-            <a:pPr algn="l">
-              <a:lnSpc>
-                <a:spcPct val="100000"/>
-              </a:lnSpc>
-              <a:spcBef>
-                <a:spcPts val="0"/>
-              </a:spcBef>
-              <a:spcAft>
-                <a:spcPts val="400"/>
-              </a:spcAft>
-            </a:pPr>
-            <a:r>
-              <a:rPr sz="1250" b="1">
-                <a:solidFill>
-                  <a:srgbClr val="7AA2C7"/>
-                </a:solidFill>
-                <a:latin typeface="Segoe UI"/>
-              </a:rPr>
-              <a:t>prepare</a:t>
-            </a:r>
-          </a:p>
-        </p:txBody>
-      </p:sp>
-      <p:sp>
-        <p:nvSpPr>
-          <p:cNvPr id="18" name="TextBox 17"/>
-          <p:cNvSpPr txBox="1"/>
-          <p:nvPr/>
-        </p:nvSpPr>
-        <p:spPr>
-          <a:xfrm>
-            <a:off x="3200400" y="2642615"/>
-            <a:ext cx="8229600" cy="548640"/>
-          </a:xfrm>
-          <a:prstGeom prst="rect">
-            <a:avLst/>
-          </a:prstGeom>
-          <a:noFill/>
-        </p:spPr>
-        <p:txBody>
-          <a:bodyPr wrap="square" anchor="ctr" lIns="0" rIns="0" tIns="0" bIns="0">
-            <a:spAutoFit/>
-          </a:bodyPr>
-          <a:lstStyle/>
-          <a:p>
-            <a:pPr algn="l">
-              <a:lnSpc>
-                <a:spcPct val="100000"/>
-              </a:lnSpc>
-              <a:spcBef>
-                <a:spcPts val="0"/>
-              </a:spcBef>
-              <a:spcAft>
-                <a:spcPts val="400"/>
-              </a:spcAft>
-            </a:pPr>
-            <a:r>
-              <a:rPr sz="1050" b="0">
-                <a:solidFill>
-                  <a:srgbClr val="E8EAED"/>
-                </a:solidFill>
-                <a:latin typeface="Segoe UI"/>
-              </a:rPr>
-              <a:t>kg_refresh.sh: manifest → stage → copiar a un SCRATCH FUERA del repo (graphify respeta .gitignore y data/ lo está).</a:t>
-            </a:r>
-          </a:p>
-        </p:txBody>
-      </p:sp>
-      <p:sp>
-        <p:nvSpPr>
-          <p:cNvPr id="19" name="Rounded Rectangle 18"/>
-          <p:cNvSpPr/>
-          <p:nvPr/>
-        </p:nvSpPr>
-        <p:spPr>
-          <a:xfrm>
-            <a:off x="640080" y="3328415"/>
-            <a:ext cx="10927080" cy="658368"/>
-          </a:xfrm>
-          <a:prstGeom prst="roundRect">
-            <a:avLst>
-              <a:gd name="adj" fmla="val 9000"/>
+              <a:gd name="adj" fmla="val 6000"/>
             </a:avLst>
           </a:prstGeom>
           <a:solidFill>
@@ -35185,73 +35238,27 @@
       </p:sp>
       <p:sp>
         <p:nvSpPr>
-          <p:cNvPr id="20" name="Rounded Rectangle 19"/>
-          <p:cNvSpPr/>
-          <p:nvPr/>
-        </p:nvSpPr>
-        <p:spPr>
-          <a:xfrm>
-            <a:off x="786384" y="3456432"/>
-            <a:ext cx="402336" cy="402336"/>
-          </a:xfrm>
-          <a:prstGeom prst="roundRect">
-            <a:avLst>
-              <a:gd name="adj" fmla="val 35000"/>
-            </a:avLst>
-          </a:prstGeom>
-          <a:solidFill>
-            <a:srgbClr val="D97757"/>
-          </a:solidFill>
-          <a:ln>
-            <a:noFill/>
-          </a:ln>
-          <a:effectLst/>
-        </p:spPr>
-        <p:style>
-          <a:lnRef idx="1">
-            <a:schemeClr val="accent1"/>
-          </a:lnRef>
-          <a:fillRef idx="3">
-            <a:schemeClr val="accent1"/>
-          </a:fillRef>
-          <a:effectRef idx="2">
-            <a:schemeClr val="accent1"/>
-          </a:effectRef>
-          <a:fontRef idx="minor">
-            <a:schemeClr val="lt1"/>
-          </a:fontRef>
-        </p:style>
-        <p:txBody>
-          <a:bodyPr rtlCol="0" anchor="ctr"/>
-          <a:lstStyle/>
-          <a:p>
-            <a:pPr algn="ctr"/>
-          </a:p>
-        </p:txBody>
-      </p:sp>
-      <p:sp>
-        <p:nvSpPr>
-          <p:cNvPr id="21" name="TextBox 20"/>
-          <p:cNvSpPr txBox="1"/>
-          <p:nvPr/>
-        </p:nvSpPr>
-        <p:spPr>
-          <a:xfrm>
-            <a:off x="786384" y="3465575"/>
-            <a:ext cx="402336" cy="384048"/>
-          </a:xfrm>
-          <a:prstGeom prst="rect">
-            <a:avLst/>
-          </a:prstGeom>
-          <a:noFill/>
-        </p:spPr>
-        <p:txBody>
-          <a:bodyPr wrap="square" anchor="ctr" lIns="0" rIns="0" tIns="0" bIns="0">
-            <a:spAutoFit/>
-          </a:bodyPr>
-          <a:lstStyle/>
-          <a:p>
-            <a:pPr algn="ctr">
+          <p:cNvPr id="16" name="TextBox 15"/>
+          <p:cNvSpPr txBox="1"/>
+          <p:nvPr/>
+        </p:nvSpPr>
+        <p:spPr>
+          <a:xfrm>
+            <a:off x="914400" y="4608576"/>
+            <a:ext cx="10469880" cy="365760"/>
+          </a:xfrm>
+          <a:prstGeom prst="rect">
+            <a:avLst/>
+          </a:prstGeom>
+          <a:noFill/>
+        </p:spPr>
+        <p:txBody>
+          <a:bodyPr wrap="square" anchor="t" lIns="0" rIns="0" tIns="0" bIns="0">
+            <a:spAutoFit/>
+          </a:bodyPr>
+          <a:lstStyle/>
+          <a:p>
+            <a:pPr algn="l">
               <a:lnSpc>
                 <a:spcPct val="100000"/>
               </a:lnSpc>
@@ -35263,393 +35270,105 @@
               </a:spcAft>
             </a:pPr>
             <a:r>
-              <a:rPr sz="1300" b="1">
-                <a:solidFill>
-                  <a:srgbClr val="0F141A"/>
-                </a:solidFill>
-                <a:latin typeface="Segoe UI"/>
-              </a:rPr>
-              <a:t>3</a:t>
-            </a:r>
-          </a:p>
-        </p:txBody>
-      </p:sp>
-      <p:sp>
-        <p:nvSpPr>
-          <p:cNvPr id="22" name="TextBox 21"/>
-          <p:cNvSpPr txBox="1"/>
-          <p:nvPr/>
-        </p:nvSpPr>
-        <p:spPr>
-          <a:xfrm>
-            <a:off x="1371600" y="3392423"/>
-            <a:ext cx="1737360" cy="530352"/>
-          </a:xfrm>
-          <a:prstGeom prst="rect">
-            <a:avLst/>
-          </a:prstGeom>
-          <a:noFill/>
-        </p:spPr>
-        <p:txBody>
-          <a:bodyPr wrap="square" anchor="ctr" lIns="0" rIns="0" tIns="0" bIns="0">
-            <a:spAutoFit/>
-          </a:bodyPr>
-          <a:lstStyle/>
-          <a:p>
-            <a:pPr algn="l">
-              <a:lnSpc>
-                <a:spcPct val="100000"/>
-              </a:lnSpc>
-              <a:spcBef>
-                <a:spcPts val="0"/>
-              </a:spcBef>
-              <a:spcAft>
-                <a:spcPts val="400"/>
-              </a:spcAft>
-            </a:pPr>
-            <a:r>
-              <a:rPr sz="1250" b="1">
-                <a:solidFill>
-                  <a:srgbClr val="7AA2C7"/>
-                </a:solidFill>
-                <a:latin typeface="Segoe UI"/>
-              </a:rPr>
-              <a:t>/graphify</a:t>
-            </a:r>
-          </a:p>
-        </p:txBody>
-      </p:sp>
-      <p:sp>
-        <p:nvSpPr>
-          <p:cNvPr id="23" name="TextBox 22"/>
-          <p:cNvSpPr txBox="1"/>
-          <p:nvPr/>
-        </p:nvSpPr>
-        <p:spPr>
-          <a:xfrm>
-            <a:off x="3200400" y="3392423"/>
-            <a:ext cx="8229600" cy="548640"/>
-          </a:xfrm>
-          <a:prstGeom prst="rect">
-            <a:avLst/>
-          </a:prstGeom>
-          <a:noFill/>
-        </p:spPr>
-        <p:txBody>
-          <a:bodyPr wrap="square" anchor="ctr" lIns="0" rIns="0" tIns="0" bIns="0">
-            <a:spAutoFit/>
-          </a:bodyPr>
-          <a:lstStyle/>
-          <a:p>
-            <a:pPr algn="l">
-              <a:lnSpc>
-                <a:spcPct val="100000"/>
-              </a:lnSpc>
-              <a:spcBef>
-                <a:spcPts val="0"/>
-              </a:spcBef>
-              <a:spcAft>
-                <a:spcPts val="400"/>
-              </a:spcAft>
-            </a:pPr>
-            <a:r>
-              <a:rPr sz="1050" b="0">
+              <a:rPr sz="1400" b="1">
+                <a:solidFill>
+                  <a:srgbClr val="D97757"/>
+                </a:solidFill>
+                <a:latin typeface="Segoe UI"/>
+              </a:rPr>
+              <a:t>El landing lo conduce un agente — con guardrails</a:t>
+            </a:r>
+          </a:p>
+        </p:txBody>
+      </p:sp>
+      <p:sp>
+        <p:nvSpPr>
+          <p:cNvPr id="17" name="TextBox 16"/>
+          <p:cNvSpPr txBox="1"/>
+          <p:nvPr/>
+        </p:nvSpPr>
+        <p:spPr>
+          <a:xfrm>
+            <a:off x="914400" y="5065776"/>
+            <a:ext cx="10424159" cy="457199"/>
+          </a:xfrm>
+          <a:prstGeom prst="rect">
+            <a:avLst/>
+          </a:prstGeom>
+          <a:noFill/>
+        </p:spPr>
+        <p:txBody>
+          <a:bodyPr wrap="square" anchor="t" lIns="0" rIns="0" tIns="0" bIns="0">
+            <a:spAutoFit/>
+          </a:bodyPr>
+          <a:lstStyle/>
+          <a:p>
+            <a:pPr algn="l">
+              <a:lnSpc>
+                <a:spcPct val="105000"/>
+              </a:lnSpc>
+              <a:spcBef>
+                <a:spcPts val="0"/>
+              </a:spcBef>
+              <a:spcAft>
+                <a:spcPts val="600"/>
+              </a:spcAft>
+            </a:pPr>
+            <a:r>
+              <a:rPr sz="1150" b="1">
+                <a:solidFill>
+                  <a:srgbClr val="D97757"/>
+                </a:solidFill>
+                <a:latin typeface="Segoe UI"/>
+              </a:rPr>
+              <a:t>▸  </a:t>
+            </a:r>
+            <a:r>
+              <a:rPr sz="1150" b="0">
                 <a:solidFill>
                   <a:srgbClr val="E8EAED"/>
                 </a:solidFill>
                 <a:latin typeface="Segoe UI"/>
               </a:rPr>
-              <a:t>Extracción semántica con ~5 subagentes en paralelo → clustering. El único paso con LLM: en el BUILD, nunca en la consulta.</a:t>
-            </a:r>
-          </a:p>
-        </p:txBody>
-      </p:sp>
-      <p:sp>
-        <p:nvSpPr>
-          <p:cNvPr id="24" name="Rounded Rectangle 23"/>
-          <p:cNvSpPr/>
-          <p:nvPr/>
-        </p:nvSpPr>
-        <p:spPr>
-          <a:xfrm>
-            <a:off x="640080" y="4078224"/>
-            <a:ext cx="10927080" cy="658368"/>
-          </a:xfrm>
-          <a:prstGeom prst="roundRect">
-            <a:avLst>
-              <a:gd name="adj" fmla="val 9000"/>
-            </a:avLst>
-          </a:prstGeom>
-          <a:solidFill>
-            <a:srgbClr val="1A212B"/>
-          </a:solidFill>
-          <a:ln w="9525">
-            <a:solidFill>
-              <a:srgbClr val="2E3948"/>
-            </a:solidFill>
-          </a:ln>
-          <a:effectLst/>
-        </p:spPr>
-        <p:style>
-          <a:lnRef idx="1">
-            <a:schemeClr val="accent1"/>
-          </a:lnRef>
-          <a:fillRef idx="3">
-            <a:schemeClr val="accent1"/>
-          </a:fillRef>
-          <a:effectRef idx="2">
-            <a:schemeClr val="accent1"/>
-          </a:effectRef>
-          <a:fontRef idx="minor">
-            <a:schemeClr val="lt1"/>
-          </a:fontRef>
-        </p:style>
-        <p:txBody>
-          <a:bodyPr rtlCol="0" anchor="ctr"/>
-          <a:lstStyle/>
-          <a:p>
-            <a:pPr algn="ctr"/>
-          </a:p>
-        </p:txBody>
-      </p:sp>
-      <p:sp>
-        <p:nvSpPr>
-          <p:cNvPr id="25" name="Rounded Rectangle 24"/>
-          <p:cNvSpPr/>
-          <p:nvPr/>
-        </p:nvSpPr>
-        <p:spPr>
-          <a:xfrm>
-            <a:off x="786384" y="4206240"/>
-            <a:ext cx="402336" cy="402336"/>
-          </a:xfrm>
-          <a:prstGeom prst="roundRect">
-            <a:avLst>
-              <a:gd name="adj" fmla="val 35000"/>
-            </a:avLst>
-          </a:prstGeom>
-          <a:solidFill>
-            <a:srgbClr val="D97757"/>
-          </a:solidFill>
-          <a:ln>
-            <a:noFill/>
-          </a:ln>
-          <a:effectLst/>
-        </p:spPr>
-        <p:style>
-          <a:lnRef idx="1">
-            <a:schemeClr val="accent1"/>
-          </a:lnRef>
-          <a:fillRef idx="3">
-            <a:schemeClr val="accent1"/>
-          </a:fillRef>
-          <a:effectRef idx="2">
-            <a:schemeClr val="accent1"/>
-          </a:effectRef>
-          <a:fontRef idx="minor">
-            <a:schemeClr val="lt1"/>
-          </a:fontRef>
-        </p:style>
-        <p:txBody>
-          <a:bodyPr rtlCol="0" anchor="ctr"/>
-          <a:lstStyle/>
-          <a:p>
-            <a:pPr algn="ctr"/>
-          </a:p>
-        </p:txBody>
-      </p:sp>
-      <p:sp>
-        <p:nvSpPr>
-          <p:cNvPr id="26" name="TextBox 25"/>
-          <p:cNvSpPr txBox="1"/>
-          <p:nvPr/>
-        </p:nvSpPr>
-        <p:spPr>
-          <a:xfrm>
-            <a:off x="786384" y="4215384"/>
-            <a:ext cx="402336" cy="384048"/>
-          </a:xfrm>
-          <a:prstGeom prst="rect">
-            <a:avLst/>
-          </a:prstGeom>
-          <a:noFill/>
-        </p:spPr>
-        <p:txBody>
-          <a:bodyPr wrap="square" anchor="ctr" lIns="0" rIns="0" tIns="0" bIns="0">
-            <a:spAutoFit/>
-          </a:bodyPr>
-          <a:lstStyle/>
-          <a:p>
-            <a:pPr algn="ctr">
-              <a:lnSpc>
-                <a:spcPct val="100000"/>
-              </a:lnSpc>
-              <a:spcBef>
-                <a:spcPts val="0"/>
-              </a:spcBef>
-              <a:spcAft>
-                <a:spcPts val="400"/>
-              </a:spcAft>
-            </a:pPr>
-            <a:r>
-              <a:rPr sz="1300" b="1">
-                <a:solidFill>
-                  <a:srgbClr val="0F141A"/>
-                </a:solidFill>
-                <a:latin typeface="Segoe UI"/>
-              </a:rPr>
-              <a:t>4</a:t>
-            </a:r>
-          </a:p>
-        </p:txBody>
-      </p:sp>
-      <p:sp>
-        <p:nvSpPr>
-          <p:cNvPr id="27" name="TextBox 26"/>
-          <p:cNvSpPr txBox="1"/>
-          <p:nvPr/>
-        </p:nvSpPr>
-        <p:spPr>
-          <a:xfrm>
-            <a:off x="1371600" y="4142232"/>
-            <a:ext cx="1737360" cy="530352"/>
-          </a:xfrm>
-          <a:prstGeom prst="rect">
-            <a:avLst/>
-          </a:prstGeom>
-          <a:noFill/>
-        </p:spPr>
-        <p:txBody>
-          <a:bodyPr wrap="square" anchor="ctr" lIns="0" rIns="0" tIns="0" bIns="0">
-            <a:spAutoFit/>
-          </a:bodyPr>
-          <a:lstStyle/>
-          <a:p>
-            <a:pPr algn="l">
-              <a:lnSpc>
-                <a:spcPct val="100000"/>
-              </a:lnSpc>
-              <a:spcBef>
-                <a:spcPts val="0"/>
-              </a:spcBef>
-              <a:spcAft>
-                <a:spcPts val="400"/>
-              </a:spcAft>
-            </a:pPr>
-            <a:r>
-              <a:rPr sz="1250" b="1">
-                <a:solidFill>
-                  <a:srgbClr val="7AA2C7"/>
-                </a:solidFill>
-                <a:latin typeface="Segoe UI"/>
-              </a:rPr>
-              <a:t>finalize</a:t>
-            </a:r>
-          </a:p>
-        </p:txBody>
-      </p:sp>
-      <p:sp>
-        <p:nvSpPr>
-          <p:cNvPr id="28" name="TextBox 27"/>
-          <p:cNvSpPr txBox="1"/>
-          <p:nvPr/>
-        </p:nvSpPr>
-        <p:spPr>
-          <a:xfrm>
-            <a:off x="3200400" y="4142232"/>
-            <a:ext cx="8229600" cy="548640"/>
-          </a:xfrm>
-          <a:prstGeom prst="rect">
-            <a:avLst/>
-          </a:prstGeom>
-          <a:noFill/>
-        </p:spPr>
-        <p:txBody>
-          <a:bodyPr wrap="square" anchor="ctr" lIns="0" rIns="0" tIns="0" bIns="0">
-            <a:spAutoFit/>
-          </a:bodyPr>
-          <a:lstStyle/>
-          <a:p>
-            <a:pPr algn="l">
-              <a:lnSpc>
-                <a:spcPct val="100000"/>
-              </a:lnSpc>
-              <a:spcBef>
-                <a:spcPts val="0"/>
-              </a:spcBef>
-              <a:spcAft>
-                <a:spcPts val="400"/>
-              </a:spcAft>
-            </a:pPr>
-            <a:r>
-              <a:rPr sz="1050" b="0">
+              <a:t>Solo no-destructivo (renombrar, no borrar) · git fetch = única op de red</a:t>
+            </a:r>
+          </a:p>
+          <a:p>
+            <a:pPr algn="l">
+              <a:lnSpc>
+                <a:spcPct val="105000"/>
+              </a:lnSpc>
+              <a:spcBef>
+                <a:spcPts val="0"/>
+              </a:spcBef>
+              <a:spcAft>
+                <a:spcPts val="600"/>
+              </a:spcAft>
+            </a:pPr>
+            <a:r>
+              <a:rPr sz="1150" b="1">
+                <a:solidFill>
+                  <a:srgbClr val="D97757"/>
+                </a:solidFill>
+                <a:latin typeface="Segoe UI"/>
+              </a:rPr>
+              <a:t>▸  </a:t>
+            </a:r>
+            <a:r>
+              <a:rPr sz="1150" b="0">
                 <a:solidFill>
                   <a:srgbClr val="E8EAED"/>
                 </a:solidFill>
                 <a:latin typeface="Segoe UI"/>
               </a:rPr>
-              <a:t>Copiar artefactos (graph.json tipado + graph.html + GRAPH_REPORT.md) + leak-check: nada fuera de data/.</a:t>
-            </a:r>
-          </a:p>
-        </p:txBody>
-      </p:sp>
-      <p:sp>
-        <p:nvSpPr>
-          <p:cNvPr id="29" name="TextBox 28"/>
-          <p:cNvSpPr txBox="1"/>
-          <p:nvPr/>
-        </p:nvSpPr>
-        <p:spPr>
-          <a:xfrm>
-            <a:off x="640080" y="4937760"/>
-            <a:ext cx="10927080" cy="731520"/>
-          </a:xfrm>
-          <a:prstGeom prst="rect">
-            <a:avLst/>
-          </a:prstGeom>
-          <a:noFill/>
-        </p:spPr>
-        <p:txBody>
-          <a:bodyPr wrap="square" anchor="t" lIns="0" rIns="0" tIns="0" bIns="0">
-            <a:spAutoFit/>
-          </a:bodyPr>
-          <a:lstStyle/>
-          <a:p>
-            <a:pPr algn="l">
-              <a:lnSpc>
-                <a:spcPct val="110000"/>
-              </a:lnSpc>
-              <a:spcBef>
-                <a:spcPts val="0"/>
-              </a:spcBef>
-              <a:spcAft>
-                <a:spcPts val="400"/>
-              </a:spcAft>
-            </a:pPr>
-            <a:r>
-              <a:rPr sz="1200" b="1">
-                <a:solidFill>
-                  <a:srgbClr val="8CC28C"/>
-                </a:solidFill>
-                <a:latin typeface="Segoe UI"/>
-              </a:rPr>
-              <a:t>Dónde se engancha: </a:t>
-            </a:r>
-            <a:r>
-              <a:rPr sz="1150" b="0">
-                <a:solidFill>
-                  <a:srgbClr val="9AA4B2"/>
-                </a:solidFill>
-                <a:latin typeface="Segoe UI"/>
-              </a:rPr>
-              <a:t>etapa 1 (Orientar) — la regla history-first del CLAUDE.md. Honestidad: la ganancia es recall en zonas densas; EXTRACTED = fiable, INFERRED = pista. Artefacto derivado: nunca viaja, se reconstruye (sección 12).</a:t>
-            </a:r>
-          </a:p>
-        </p:txBody>
-      </p:sp>
-      <p:sp>
-        <p:nvSpPr>
-          <p:cNvPr id="30" name="Rounded Rectangle 29"/>
+              <a:t>El humano hace push / merge; el agente prepara y reporta con evidencia (conteos, PRs)</a:t>
+            </a:r>
+          </a:p>
+        </p:txBody>
+      </p:sp>
+      <p:sp>
+        <p:nvSpPr>
+          <p:cNvPr id="18" name="Rounded Rectangle 17"/>
           <p:cNvSpPr/>
           <p:nvPr/>
         </p:nvSpPr>
@@ -35697,7 +35416,7 @@
       </p:sp>
       <p:sp>
         <p:nvSpPr>
-          <p:cNvPr id="31" name="Rounded Rectangle 30"/>
+          <p:cNvPr id="19" name="Rounded Rectangle 18"/>
           <p:cNvSpPr/>
           <p:nvPr/>
         </p:nvSpPr>
@@ -35743,7 +35462,7 @@
       </p:sp>
       <p:sp>
         <p:nvSpPr>
-          <p:cNvPr id="32" name="TextBox 31"/>
+          <p:cNvPr id="20" name="TextBox 19"/>
           <p:cNvSpPr txBox="1"/>
           <p:nvPr/>
         </p:nvSpPr>
@@ -35790,7 +35509,7 @@
                 </a:solidFill>
                 <a:latin typeface="Segoe UI"/>
               </a:rPr>
-              <a:t>Un paso semántico en el build; cero LLM en la consulta. Por eso es un skill, no un script.</a:t>
+              <a:t>La metodología no es solo para código: memoria durable, guardrails y 'el humano hace lo externo' también en ops.</a:t>
             </a:r>
             <a:r>
               <a:rPr sz="1300" b="1">
@@ -35875,7 +35594,7 @@
         <p:spPr>
           <a:xfrm>
             <a:off x="0" y="0"/>
-            <a:ext cx="201168" cy="6858000"/>
+            <a:ext cx="12191695" cy="146304"/>
           </a:xfrm>
           <a:prstGeom prst="rect">
             <a:avLst/>
@@ -35912,104 +35631,14 @@
       </p:sp>
       <p:sp>
         <p:nvSpPr>
-          <p:cNvPr id="4" name="TextBox 3"/>
-          <p:cNvSpPr txBox="1"/>
-          <p:nvPr/>
-        </p:nvSpPr>
-        <p:spPr>
-          <a:xfrm>
-            <a:off x="640080" y="502920"/>
-            <a:ext cx="10058400" cy="365760"/>
-          </a:xfrm>
-          <a:prstGeom prst="rect">
-            <a:avLst/>
-          </a:prstGeom>
-          <a:noFill/>
-        </p:spPr>
-        <p:txBody>
-          <a:bodyPr wrap="square" anchor="t" lIns="0" rIns="0" tIns="0" bIns="0">
-            <a:spAutoFit/>
-          </a:bodyPr>
-          <a:lstStyle/>
-          <a:p>
-            <a:pPr algn="l">
-              <a:lnSpc>
-                <a:spcPct val="100000"/>
-              </a:lnSpc>
-              <a:spcBef>
-                <a:spcPts val="0"/>
-              </a:spcBef>
-              <a:spcAft>
-                <a:spcPts val="400"/>
-              </a:spcAft>
-            </a:pPr>
-            <a:r>
-              <a:rPr sz="1200" b="1">
-                <a:solidFill>
-                  <a:srgbClr val="D97757"/>
-                </a:solidFill>
-                <a:latin typeface="Segoe UI"/>
-              </a:rPr>
-              <a:t>PARTE 2 · 11 · TRANSFERENCIA</a:t>
-            </a:r>
-          </a:p>
-        </p:txBody>
-      </p:sp>
-      <p:sp>
-        <p:nvSpPr>
-          <p:cNvPr id="5" name="TextBox 4"/>
-          <p:cNvSpPr txBox="1"/>
-          <p:nvPr/>
-        </p:nvSpPr>
-        <p:spPr>
-          <a:xfrm>
-            <a:off x="621792" y="841248"/>
-            <a:ext cx="10972800" cy="1005840"/>
-          </a:xfrm>
-          <a:prstGeom prst="rect">
-            <a:avLst/>
-          </a:prstGeom>
-          <a:noFill/>
-        </p:spPr>
-        <p:txBody>
-          <a:bodyPr wrap="square" anchor="t" lIns="0" rIns="0" tIns="0" bIns="0">
-            <a:spAutoFit/>
-          </a:bodyPr>
-          <a:lstStyle/>
-          <a:p>
-            <a:pPr algn="l">
-              <a:lnSpc>
-                <a:spcPct val="100000"/>
-              </a:lnSpc>
-              <a:spcBef>
-                <a:spcPts val="0"/>
-              </a:spcBef>
-              <a:spcAft>
-                <a:spcPts val="400"/>
-              </a:spcAft>
-            </a:pPr>
-            <a:r>
-              <a:rPr sz="3000" b="1">
-                <a:solidFill>
-                  <a:srgbClr val="E8EAED"/>
-                </a:solidFill>
-                <a:latin typeface="Segoe UI"/>
-              </a:rPr>
-              <a:t>La prueba de que es agnóstica: llevarla a Copilot</a:t>
-            </a:r>
-          </a:p>
-        </p:txBody>
-      </p:sp>
-      <p:sp>
-        <p:nvSpPr>
-          <p:cNvPr id="6" name="Rectangle 5"/>
+          <p:cNvPr id="4" name="Rectangle 3"/>
           <p:cNvSpPr/>
           <p:nvPr/>
         </p:nvSpPr>
         <p:spPr>
           <a:xfrm>
-            <a:off x="658368" y="1572768"/>
-            <a:ext cx="1005840" cy="41148"/>
+            <a:off x="0" y="6711696"/>
+            <a:ext cx="12191695" cy="146304"/>
           </a:xfrm>
           <a:prstGeom prst="rect">
             <a:avLst/>
@@ -36046,14 +35675,14 @@
       </p:sp>
       <p:sp>
         <p:nvSpPr>
-          <p:cNvPr id="7" name="TextBox 6"/>
-          <p:cNvSpPr txBox="1"/>
-          <p:nvPr/>
-        </p:nvSpPr>
-        <p:spPr>
-          <a:xfrm>
-            <a:off x="640080" y="6419088"/>
-            <a:ext cx="7315200" cy="320040"/>
+          <p:cNvPr id="5" name="TextBox 4"/>
+          <p:cNvSpPr txBox="1"/>
+          <p:nvPr/>
+        </p:nvSpPr>
+        <p:spPr>
+          <a:xfrm>
+            <a:off x="914400" y="1188720"/>
+            <a:ext cx="10058400" cy="457200"/>
           </a:xfrm>
           <a:prstGeom prst="rect">
             <a:avLst/>
@@ -36078,14 +35707,103 @@
               </a:spcAft>
             </a:pPr>
             <a:r>
-              <a:rPr sz="950" b="0">
-                <a:solidFill>
-                  <a:srgbClr val="66707E"/>
-                </a:solidFill>
-                <a:latin typeface="Segoe UI"/>
-              </a:rPr>
-              <a:t>Claude Code · Curso / Workshop</a:t>
-            </a:r>
+              <a:rPr sz="1600" b="1">
+                <a:solidFill>
+                  <a:srgbClr val="D97757"/>
+                </a:solidFill>
+                <a:latin typeface="Segoe UI"/>
+              </a:rPr>
+              <a:t>PARTE 3</a:t>
+            </a:r>
+          </a:p>
+        </p:txBody>
+      </p:sp>
+      <p:sp>
+        <p:nvSpPr>
+          <p:cNvPr id="6" name="TextBox 5"/>
+          <p:cNvSpPr txBox="1"/>
+          <p:nvPr/>
+        </p:nvSpPr>
+        <p:spPr>
+          <a:xfrm>
+            <a:off x="868680" y="1645920"/>
+            <a:ext cx="10515600" cy="1097280"/>
+          </a:xfrm>
+          <a:prstGeom prst="rect">
+            <a:avLst/>
+          </a:prstGeom>
+          <a:noFill/>
+        </p:spPr>
+        <p:txBody>
+          <a:bodyPr wrap="square" anchor="t" lIns="0" rIns="0" tIns="0" bIns="0">
+            <a:spAutoFit/>
+          </a:bodyPr>
+          <a:lstStyle/>
+          <a:p>
+            <a:pPr algn="l">
+              <a:lnSpc>
+                <a:spcPct val="100000"/>
+              </a:lnSpc>
+              <a:spcBef>
+                <a:spcPts val="0"/>
+              </a:spcBef>
+              <a:spcAft>
+                <a:spcPts val="400"/>
+              </a:spcAft>
+            </a:pPr>
+            <a:r>
+              <a:rPr sz="4400" b="1">
+                <a:solidFill>
+                  <a:srgbClr val="E8EAED"/>
+                </a:solidFill>
+                <a:latin typeface="Segoe UI"/>
+              </a:rPr>
+              <a:t>El grafo de tickets</a:t>
+            </a:r>
+          </a:p>
+        </p:txBody>
+      </p:sp>
+      <p:sp>
+        <p:nvSpPr>
+          <p:cNvPr id="7" name="Rectangle 6"/>
+          <p:cNvSpPr/>
+          <p:nvPr/>
+        </p:nvSpPr>
+        <p:spPr>
+          <a:xfrm>
+            <a:off x="932688" y="2606040"/>
+            <a:ext cx="1280160" cy="45720"/>
+          </a:xfrm>
+          <a:prstGeom prst="rect">
+            <a:avLst/>
+          </a:prstGeom>
+          <a:solidFill>
+            <a:srgbClr val="D97757"/>
+          </a:solidFill>
+          <a:ln>
+            <a:noFill/>
+          </a:ln>
+          <a:effectLst/>
+        </p:spPr>
+        <p:style>
+          <a:lnRef idx="1">
+            <a:schemeClr val="accent1"/>
+          </a:lnRef>
+          <a:fillRef idx="3">
+            <a:schemeClr val="accent1"/>
+          </a:fillRef>
+          <a:effectRef idx="2">
+            <a:schemeClr val="accent1"/>
+          </a:effectRef>
+          <a:fontRef idx="minor">
+            <a:schemeClr val="lt1"/>
+          </a:fontRef>
+        </p:style>
+        <p:txBody>
+          <a:bodyPr rtlCol="0" anchor="ctr"/>
+          <a:lstStyle/>
+          <a:p>
+            <a:pPr algn="ctr"/>
           </a:p>
         </p:txBody>
       </p:sp>
@@ -36097,8 +35815,8 @@
         </p:nvSpPr>
         <p:spPr>
           <a:xfrm>
-            <a:off x="10789920" y="6419088"/>
-            <a:ext cx="1097280" cy="320040"/>
+            <a:off x="914400" y="2788920"/>
+            <a:ext cx="10332720" cy="548640"/>
           </a:xfrm>
           <a:prstGeom prst="rect">
             <a:avLst/>
@@ -36111,9 +35829,9 @@
           </a:bodyPr>
           <a:lstStyle/>
           <a:p>
-            <a:pPr algn="r">
-              <a:lnSpc>
-                <a:spcPct val="100000"/>
+            <a:pPr algn="l">
+              <a:lnSpc>
+                <a:spcPct val="110000"/>
               </a:lnSpc>
               <a:spcBef>
                 <a:spcPts val="0"/>
@@ -36123,13 +35841,13 @@
               </a:spcAft>
             </a:pPr>
             <a:r>
-              <a:rPr sz="950" b="1">
-                <a:solidFill>
-                  <a:srgbClr val="66707E"/>
-                </a:solidFill>
-                <a:latin typeface="Segoe UI"/>
-              </a:rPr>
-              <a:t>31</a:t>
+              <a:rPr sz="1500" b="0">
+                <a:solidFill>
+                  <a:srgbClr val="9AA4B2"/>
+                </a:solidFill>
+                <a:latin typeface="Segoe UI"/>
+              </a:rPr>
+              <a:t>Un caso completo construido con graphify — no con CodeGraph: la memoria del proyecto, navegable.</a:t>
             </a:r>
           </a:p>
         </p:txBody>
@@ -36142,12 +35860,12 @@
         </p:nvSpPr>
         <p:spPr>
           <a:xfrm>
-            <a:off x="640080" y="1828800"/>
-            <a:ext cx="5349240" cy="2514600"/>
+            <a:off x="914400" y="3520440"/>
+            <a:ext cx="5212080" cy="475488"/>
           </a:xfrm>
           <a:prstGeom prst="roundRect">
             <a:avLst>
-              <a:gd name="adj" fmla="val 6000"/>
+              <a:gd name="adj" fmla="val 16000"/>
             </a:avLst>
           </a:prstGeom>
           <a:solidFill>
@@ -36190,16 +35908,16 @@
         </p:nvSpPr>
         <p:spPr>
           <a:xfrm>
-            <a:off x="914400" y="2029968"/>
-            <a:ext cx="4892040" cy="365760"/>
-          </a:xfrm>
-          <a:prstGeom prst="rect">
-            <a:avLst/>
-          </a:prstGeom>
-          <a:noFill/>
-        </p:spPr>
-        <p:txBody>
-          <a:bodyPr wrap="square" anchor="t" lIns="0" rIns="0" tIns="0" bIns="0">
+            <a:off x="1143000" y="3566160"/>
+            <a:ext cx="4846320" cy="384048"/>
+          </a:xfrm>
+          <a:prstGeom prst="rect">
+            <a:avLst/>
+          </a:prstGeom>
+          <a:noFill/>
+        </p:spPr>
+        <p:txBody>
+          <a:bodyPr wrap="square" anchor="ctr" lIns="0" rIns="0" tIns="0" bIns="0">
             <a:spAutoFit/>
           </a:bodyPr>
           <a:lstStyle/>
@@ -36216,209 +35934,31 @@
               </a:spcAft>
             </a:pPr>
             <a:r>
-              <a:rPr sz="1400" b="1">
-                <a:solidFill>
-                  <a:srgbClr val="8CC28C"/>
-                </a:solidFill>
-                <a:latin typeface="Segoe UI"/>
-              </a:rPr>
-              <a:t>Viaja SIN cambios (las 5 reglas)</a:t>
-            </a:r>
-          </a:p>
-        </p:txBody>
-      </p:sp>
-      <p:sp>
-        <p:nvSpPr>
-          <p:cNvPr id="11" name="TextBox 10"/>
-          <p:cNvSpPr txBox="1"/>
-          <p:nvPr/>
-        </p:nvSpPr>
-        <p:spPr>
-          <a:xfrm>
-            <a:off x="914400" y="2487168"/>
-            <a:ext cx="4846320" cy="1691640"/>
-          </a:xfrm>
-          <a:prstGeom prst="rect">
-            <a:avLst/>
-          </a:prstGeom>
-          <a:noFill/>
-        </p:spPr>
-        <p:txBody>
-          <a:bodyPr wrap="square" anchor="t" lIns="0" rIns="0" tIns="0" bIns="0">
-            <a:spAutoFit/>
-          </a:bodyPr>
-          <a:lstStyle/>
-          <a:p>
-            <a:pPr algn="l">
-              <a:lnSpc>
-                <a:spcPct val="105000"/>
-              </a:lnSpc>
-              <a:spcBef>
-                <a:spcPts val="0"/>
-              </a:spcBef>
-              <a:spcAft>
-                <a:spcPts val="600"/>
-              </a:spcAft>
-            </a:pPr>
-            <a:r>
-              <a:rPr sz="1150" b="1">
-                <a:solidFill>
-                  <a:srgbClr val="8CC28C"/>
-                </a:solidFill>
-                <a:latin typeface="Segoe UI"/>
-              </a:rPr>
-              <a:t>▸  </a:t>
-            </a:r>
-            <a:r>
-              <a:rPr sz="1150" b="0">
+              <a:rPr sz="1250" b="0">
                 <a:solidFill>
                   <a:srgbClr val="E8EAED"/>
                 </a:solidFill>
                 <a:latin typeface="Segoe UI"/>
               </a:rPr>
-              <a:t>Plan → acuerdo → implementar</a:t>
-            </a:r>
-          </a:p>
-          <a:p>
-            <a:pPr algn="l">
-              <a:lnSpc>
-                <a:spcPct val="105000"/>
-              </a:lnSpc>
-              <a:spcBef>
-                <a:spcPts val="0"/>
-              </a:spcBef>
-              <a:spcAft>
-                <a:spcPts val="600"/>
-              </a:spcAft>
-            </a:pPr>
-            <a:r>
-              <a:rPr sz="1150" b="1">
-                <a:solidFill>
-                  <a:srgbClr val="8CC28C"/>
-                </a:solidFill>
-                <a:latin typeface="Segoe UI"/>
-              </a:rPr>
-              <a:t>▸  </a:t>
-            </a:r>
-            <a:r>
-              <a:rPr sz="1150" b="0">
-                <a:solidFill>
-                  <a:srgbClr val="E8EAED"/>
-                </a:solidFill>
-                <a:latin typeface="Segoe UI"/>
-              </a:rPr>
-              <a:t>Verificar en el contrato del CONSUMIDOR</a:t>
-            </a:r>
-          </a:p>
-          <a:p>
-            <a:pPr algn="l">
-              <a:lnSpc>
-                <a:spcPct val="105000"/>
-              </a:lnSpc>
-              <a:spcBef>
-                <a:spcPts val="0"/>
-              </a:spcBef>
-              <a:spcAft>
-                <a:spcPts val="600"/>
-              </a:spcAft>
-            </a:pPr>
-            <a:r>
-              <a:rPr sz="1150" b="1">
-                <a:solidFill>
-                  <a:srgbClr val="8CC28C"/>
-                </a:solidFill>
-                <a:latin typeface="Segoe UI"/>
-              </a:rPr>
-              <a:t>▸  </a:t>
-            </a:r>
-            <a:r>
-              <a:rPr sz="1150" b="0">
-                <a:solidFill>
-                  <a:srgbClr val="E8EAED"/>
-                </a:solidFill>
-                <a:latin typeface="Segoe UI"/>
-              </a:rPr>
-              <a:t>Resolver la clase general, no un input</a:t>
-            </a:r>
-          </a:p>
-          <a:p>
-            <a:pPr algn="l">
-              <a:lnSpc>
-                <a:spcPct val="105000"/>
-              </a:lnSpc>
-              <a:spcBef>
-                <a:spcPts val="0"/>
-              </a:spcBef>
-              <a:spcAft>
-                <a:spcPts val="600"/>
-              </a:spcAft>
-            </a:pPr>
-            <a:r>
-              <a:rPr sz="1150" b="1">
-                <a:solidFill>
-                  <a:srgbClr val="8CC28C"/>
-                </a:solidFill>
-                <a:latin typeface="Segoe UI"/>
-              </a:rPr>
-              <a:t>▸  </a:t>
-            </a:r>
-            <a:r>
-              <a:rPr sz="1150" b="0">
-                <a:solidFill>
-                  <a:srgbClr val="E8EAED"/>
-                </a:solidFill>
-                <a:latin typeface="Segoe UI"/>
-              </a:rPr>
-              <a:t>Rastro durable: porqué, qué, cómo se verificó</a:t>
-            </a:r>
-          </a:p>
-          <a:p>
-            <a:pPr algn="l">
-              <a:lnSpc>
-                <a:spcPct val="105000"/>
-              </a:lnSpc>
-              <a:spcBef>
-                <a:spcPts val="0"/>
-              </a:spcBef>
-              <a:spcAft>
-                <a:spcPts val="600"/>
-              </a:spcAft>
-            </a:pPr>
-            <a:r>
-              <a:rPr sz="1150" b="1">
-                <a:solidFill>
-                  <a:srgbClr val="8CC28C"/>
-                </a:solidFill>
-                <a:latin typeface="Segoe UI"/>
-              </a:rPr>
-              <a:t>▸  </a:t>
-            </a:r>
-            <a:r>
-              <a:rPr sz="1150" b="0">
-                <a:solidFill>
-                  <a:srgbClr val="E8EAED"/>
-                </a:solidFill>
-                <a:latin typeface="Segoe UI"/>
-              </a:rPr>
-              <a:t>El humano posee lo externo (merge, deploy)</a:t>
-            </a:r>
-          </a:p>
-        </p:txBody>
-      </p:sp>
-      <p:sp>
-        <p:nvSpPr>
-          <p:cNvPr id="12" name="Rounded Rectangle 11"/>
+              <a:t>12a · El problema y el diseño (spike)</a:t>
+            </a:r>
+          </a:p>
+        </p:txBody>
+      </p:sp>
+      <p:sp>
+        <p:nvSpPr>
+          <p:cNvPr id="11" name="Rounded Rectangle 10"/>
           <p:cNvSpPr/>
           <p:nvPr/>
         </p:nvSpPr>
         <p:spPr>
           <a:xfrm>
-            <a:off x="6217920" y="1828800"/>
-            <a:ext cx="5349240" cy="2514600"/>
+            <a:off x="6400800" y="3520440"/>
+            <a:ext cx="5212080" cy="475488"/>
           </a:xfrm>
           <a:prstGeom prst="roundRect">
             <a:avLst>
-              <a:gd name="adj" fmla="val 6000"/>
+              <a:gd name="adj" fmla="val 16000"/>
             </a:avLst>
           </a:prstGeom>
           <a:solidFill>
@@ -36455,22 +35995,22 @@
       </p:sp>
       <p:sp>
         <p:nvSpPr>
-          <p:cNvPr id="13" name="TextBox 12"/>
-          <p:cNvSpPr txBox="1"/>
-          <p:nvPr/>
-        </p:nvSpPr>
-        <p:spPr>
-          <a:xfrm>
-            <a:off x="6492240" y="2029968"/>
-            <a:ext cx="4892040" cy="365760"/>
-          </a:xfrm>
-          <a:prstGeom prst="rect">
-            <a:avLst/>
-          </a:prstGeom>
-          <a:noFill/>
-        </p:spPr>
-        <p:txBody>
-          <a:bodyPr wrap="square" anchor="t" lIns="0" rIns="0" tIns="0" bIns="0">
+          <p:cNvPr id="12" name="TextBox 11"/>
+          <p:cNvSpPr txBox="1"/>
+          <p:nvPr/>
+        </p:nvSpPr>
+        <p:spPr>
+          <a:xfrm>
+            <a:off x="6629400" y="3566160"/>
+            <a:ext cx="4846320" cy="384048"/>
+          </a:xfrm>
+          <a:prstGeom prst="rect">
+            <a:avLst/>
+          </a:prstGeom>
+          <a:noFill/>
+        </p:spPr>
+        <p:txBody>
+          <a:bodyPr wrap="square" anchor="ctr" lIns="0" rIns="0" tIns="0" bIns="0">
             <a:spAutoFit/>
           </a:bodyPr>
           <a:lstStyle/>
@@ -36487,209 +36027,31 @@
               </a:spcAft>
             </a:pPr>
             <a:r>
-              <a:rPr sz="1400" b="1">
-                <a:solidFill>
-                  <a:srgbClr val="7AA2C7"/>
-                </a:solidFill>
-                <a:latin typeface="Segoe UI"/>
-              </a:rPr>
-              <a:t>Se re-mapea por repo</a:t>
-            </a:r>
-          </a:p>
-        </p:txBody>
-      </p:sp>
-      <p:sp>
-        <p:nvSpPr>
-          <p:cNvPr id="14" name="TextBox 13"/>
-          <p:cNvSpPr txBox="1"/>
-          <p:nvPr/>
-        </p:nvSpPr>
-        <p:spPr>
-          <a:xfrm>
-            <a:off x="6492240" y="2487168"/>
-            <a:ext cx="4846320" cy="1691640"/>
-          </a:xfrm>
-          <a:prstGeom prst="rect">
-            <a:avLst/>
-          </a:prstGeom>
-          <a:noFill/>
-        </p:spPr>
-        <p:txBody>
-          <a:bodyPr wrap="square" anchor="t" lIns="0" rIns="0" tIns="0" bIns="0">
-            <a:spAutoFit/>
-          </a:bodyPr>
-          <a:lstStyle/>
-          <a:p>
-            <a:pPr algn="l">
-              <a:lnSpc>
-                <a:spcPct val="105000"/>
-              </a:lnSpc>
-              <a:spcBef>
-                <a:spcPts val="0"/>
-              </a:spcBef>
-              <a:spcAft>
-                <a:spcPts val="600"/>
-              </a:spcAft>
-            </a:pPr>
-            <a:r>
-              <a:rPr sz="1150" b="1">
-                <a:solidFill>
-                  <a:srgbClr val="7AA2C7"/>
-                </a:solidFill>
-                <a:latin typeface="Segoe UI"/>
-              </a:rPr>
-              <a:t>▸  </a:t>
-            </a:r>
-            <a:r>
-              <a:rPr sz="1150" b="0">
+              <a:rPr sz="1250" b="0">
                 <a:solidFill>
                   <a:srgbClr val="E8EAED"/>
                 </a:solidFill>
                 <a:latin typeface="Segoe UI"/>
               </a:rPr>
-              <a:t>El contrato: HTTP / DB / evento / artefacto</a:t>
-            </a:r>
-          </a:p>
-          <a:p>
-            <a:pPr algn="l">
-              <a:lnSpc>
-                <a:spcPct val="105000"/>
-              </a:lnSpc>
-              <a:spcBef>
-                <a:spcPts val="0"/>
-              </a:spcBef>
-              <a:spcAft>
-                <a:spcPts val="600"/>
-              </a:spcAft>
-            </a:pPr>
-            <a:r>
-              <a:rPr sz="1150" b="1">
-                <a:solidFill>
-                  <a:srgbClr val="7AA2C7"/>
-                </a:solidFill>
-                <a:latin typeface="Segoe UI"/>
-              </a:rPr>
-              <a:t>▸  </a:t>
-            </a:r>
-            <a:r>
-              <a:rPr sz="1150" b="0">
-                <a:solidFill>
-                  <a:srgbClr val="E8EAED"/>
-                </a:solidFill>
-                <a:latin typeface="Segoe UI"/>
-              </a:rPr>
-              <a:t>El tracker: Jira · Azure Boards · Issues</a:t>
-            </a:r>
-          </a:p>
-          <a:p>
-            <a:pPr algn="l">
-              <a:lnSpc>
-                <a:spcPct val="105000"/>
-              </a:lnSpc>
-              <a:spcBef>
-                <a:spcPts val="0"/>
-              </a:spcBef>
-              <a:spcAft>
-                <a:spcPts val="600"/>
-              </a:spcAft>
-            </a:pPr>
-            <a:r>
-              <a:rPr sz="1150" b="1">
-                <a:solidFill>
-                  <a:srgbClr val="7AA2C7"/>
-                </a:solidFill>
-                <a:latin typeface="Segoe UI"/>
-              </a:rPr>
-              <a:t>▸  </a:t>
-            </a:r>
-            <a:r>
-              <a:rPr sz="1150" b="0">
-                <a:solidFill>
-                  <a:srgbClr val="E8EAED"/>
-                </a:solidFill>
-                <a:latin typeface="Segoe UI"/>
-              </a:rPr>
-              <a:t>La pirámide de tests y el runtime desplegado</a:t>
-            </a:r>
-          </a:p>
-          <a:p>
-            <a:pPr algn="l">
-              <a:lnSpc>
-                <a:spcPct val="105000"/>
-              </a:lnSpc>
-              <a:spcBef>
-                <a:spcPts val="0"/>
-              </a:spcBef>
-              <a:spcAft>
-                <a:spcPts val="600"/>
-              </a:spcAft>
-            </a:pPr>
-            <a:r>
-              <a:rPr sz="1150" b="1">
-                <a:solidFill>
-                  <a:srgbClr val="7AA2C7"/>
-                </a:solidFill>
-                <a:latin typeface="Segoe UI"/>
-              </a:rPr>
-              <a:t>▸  </a:t>
-            </a:r>
-            <a:r>
-              <a:rPr sz="1150" b="0">
-                <a:solidFill>
-                  <a:srgbClr val="E8EAED"/>
-                </a:solidFill>
-                <a:latin typeface="Segoe UI"/>
-              </a:rPr>
-              <a:t>Las reglas de sanitización locales</a:t>
-            </a:r>
-          </a:p>
-          <a:p>
-            <a:pPr algn="l">
-              <a:lnSpc>
-                <a:spcPct val="105000"/>
-              </a:lnSpc>
-              <a:spcBef>
-                <a:spcPts val="0"/>
-              </a:spcBef>
-              <a:spcAft>
-                <a:spcPts val="600"/>
-              </a:spcAft>
-            </a:pPr>
-            <a:r>
-              <a:rPr sz="1150" b="1">
-                <a:solidFill>
-                  <a:srgbClr val="7AA2C7"/>
-                </a:solidFill>
-                <a:latin typeface="Segoe UI"/>
-              </a:rPr>
-              <a:t>▸  </a:t>
-            </a:r>
-            <a:r>
-              <a:rPr sz="1150" b="0">
-                <a:solidFill>
-                  <a:srgbClr val="E8EAED"/>
-                </a:solidFill>
-                <a:latin typeface="Segoe UI"/>
-              </a:rPr>
-              <a:t>Las tools: Serena/CodeGraph//kg son fungibles</a:t>
-            </a:r>
-          </a:p>
-        </p:txBody>
-      </p:sp>
-      <p:sp>
-        <p:nvSpPr>
-          <p:cNvPr id="15" name="Rounded Rectangle 14"/>
+              <a:t>12b · Pipeline y comandos (/kg, /kg-refresh)</a:t>
+            </a:r>
+          </a:p>
+        </p:txBody>
+      </p:sp>
+      <p:sp>
+        <p:nvSpPr>
+          <p:cNvPr id="13" name="Rounded Rectangle 12"/>
           <p:cNvSpPr/>
           <p:nvPr/>
         </p:nvSpPr>
         <p:spPr>
           <a:xfrm>
-            <a:off x="640080" y="4526280"/>
-            <a:ext cx="10927080" cy="1143000"/>
+            <a:off x="914400" y="4087368"/>
+            <a:ext cx="5212080" cy="475488"/>
           </a:xfrm>
           <a:prstGeom prst="roundRect">
             <a:avLst>
-              <a:gd name="adj" fmla="val 6000"/>
+              <a:gd name="adj" fmla="val 16000"/>
             </a:avLst>
           </a:prstGeom>
           <a:solidFill>
@@ -36726,22 +36088,22 @@
       </p:sp>
       <p:sp>
         <p:nvSpPr>
-          <p:cNvPr id="16" name="TextBox 15"/>
-          <p:cNvSpPr txBox="1"/>
-          <p:nvPr/>
-        </p:nvSpPr>
-        <p:spPr>
-          <a:xfrm>
-            <a:off x="914400" y="4727448"/>
-            <a:ext cx="10469880" cy="365760"/>
-          </a:xfrm>
-          <a:prstGeom prst="rect">
-            <a:avLst/>
-          </a:prstGeom>
-          <a:noFill/>
-        </p:spPr>
-        <p:txBody>
-          <a:bodyPr wrap="square" anchor="t" lIns="0" rIns="0" tIns="0" bIns="0">
+          <p:cNvPr id="14" name="TextBox 13"/>
+          <p:cNvSpPr txBox="1"/>
+          <p:nvPr/>
+        </p:nvSpPr>
+        <p:spPr>
+          <a:xfrm>
+            <a:off x="1143000" y="4133087"/>
+            <a:ext cx="4846320" cy="384048"/>
+          </a:xfrm>
+          <a:prstGeom prst="rect">
+            <a:avLst/>
+          </a:prstGeom>
+          <a:noFill/>
+        </p:spPr>
+        <p:txBody>
+          <a:bodyPr wrap="square" anchor="ctr" lIns="0" rIns="0" tIns="0" bIns="0">
             <a:spAutoFit/>
           </a:bodyPr>
           <a:lstStyle/>
@@ -36758,120 +36120,35 @@
               </a:spcAft>
             </a:pPr>
             <a:r>
-              <a:rPr sz="1400" b="1">
-                <a:solidFill>
-                  <a:srgbClr val="D97757"/>
-                </a:solidFill>
-                <a:latin typeface="Segoe UI"/>
-              </a:rPr>
-              <a:t>El starter-kit (docs/ai-agents-code-methodology/)</a:t>
-            </a:r>
-          </a:p>
-        </p:txBody>
-      </p:sp>
-      <p:sp>
-        <p:nvSpPr>
-          <p:cNvPr id="17" name="TextBox 16"/>
-          <p:cNvSpPr txBox="1"/>
-          <p:nvPr/>
-        </p:nvSpPr>
-        <p:spPr>
-          <a:xfrm>
-            <a:off x="914400" y="5184648"/>
-            <a:ext cx="10424159" cy="320040"/>
-          </a:xfrm>
-          <a:prstGeom prst="rect">
-            <a:avLst/>
-          </a:prstGeom>
-          <a:noFill/>
-        </p:spPr>
-        <p:txBody>
-          <a:bodyPr wrap="square" anchor="t" lIns="0" rIns="0" tIns="0" bIns="0">
-            <a:spAutoFit/>
-          </a:bodyPr>
-          <a:lstStyle/>
-          <a:p>
-            <a:pPr algn="l">
-              <a:lnSpc>
-                <a:spcPct val="105000"/>
-              </a:lnSpc>
-              <a:spcBef>
-                <a:spcPts val="0"/>
-              </a:spcBef>
-              <a:spcAft>
-                <a:spcPts val="600"/>
-              </a:spcAft>
-            </a:pPr>
-            <a:r>
-              <a:rPr sz="1150" b="1">
-                <a:solidFill>
-                  <a:srgbClr val="D97757"/>
-                </a:solidFill>
-                <a:latin typeface="Segoe UI"/>
-              </a:rPr>
-              <a:t>▸  </a:t>
-            </a:r>
-            <a:r>
-              <a:rPr sz="1150" b="0">
+              <a:rPr sz="1250" b="0">
                 <a:solidFill>
                   <a:srgbClr val="E8EAED"/>
                 </a:solidFill>
                 <a:latin typeface="Segoe UI"/>
               </a:rPr>
-              <a:t>Plantillas STATUS · SHARP_EDGES · handover · QA + bootstrap-new-repo.ps1 → estructura en el repo destino</a:t>
-            </a:r>
-          </a:p>
-          <a:p>
-            <a:pPr algn="l">
-              <a:lnSpc>
-                <a:spcPct val="105000"/>
-              </a:lnSpc>
-              <a:spcBef>
-                <a:spcPts val="0"/>
-              </a:spcBef>
-              <a:spcAft>
-                <a:spcPts val="600"/>
-              </a:spcAft>
-            </a:pPr>
-            <a:r>
-              <a:rPr sz="1150" b="1">
-                <a:solidFill>
-                  <a:srgbClr val="D97757"/>
-                </a:solidFill>
-                <a:latin typeface="Segoe UI"/>
-              </a:rPr>
-              <a:t>▸  </a:t>
-            </a:r>
-            <a:r>
-              <a:rPr sz="1150" b="0">
-                <a:solidFill>
-                  <a:srgbClr val="E8EAED"/>
-                </a:solidFill>
-                <a:latin typeface="Segoe UI"/>
-              </a:rPr>
-              <a:t>Sin grafo de tickets: fallback determinista (STATUS newest-first + búsqueda léxica + historia de commits) = 80% del valor</a:t>
-            </a:r>
-          </a:p>
-        </p:txBody>
-      </p:sp>
-      <p:sp>
-        <p:nvSpPr>
-          <p:cNvPr id="18" name="Rounded Rectangle 17"/>
+              <a:t>12c · El grafo real, visualizado</a:t>
+            </a:r>
+          </a:p>
+        </p:txBody>
+      </p:sp>
+      <p:sp>
+        <p:nvSpPr>
+          <p:cNvPr id="15" name="Rounded Rectangle 14"/>
           <p:cNvSpPr/>
           <p:nvPr/>
         </p:nvSpPr>
         <p:spPr>
           <a:xfrm>
-            <a:off x="640080" y="5806440"/>
-            <a:ext cx="10927080" cy="475488"/>
+            <a:off x="6400800" y="4087368"/>
+            <a:ext cx="5212080" cy="475488"/>
           </a:xfrm>
           <a:prstGeom prst="roundRect">
             <a:avLst>
-              <a:gd name="adj" fmla="val 28000"/>
+              <a:gd name="adj" fmla="val 16000"/>
             </a:avLst>
           </a:prstGeom>
           <a:solidFill>
-            <a:srgbClr val="222B38"/>
+            <a:srgbClr val="1A212B"/>
           </a:solidFill>
           <a:ln w="9525">
             <a:solidFill>
@@ -36904,60 +36181,14 @@
       </p:sp>
       <p:sp>
         <p:nvSpPr>
-          <p:cNvPr id="19" name="Rounded Rectangle 18"/>
-          <p:cNvSpPr/>
-          <p:nvPr/>
-        </p:nvSpPr>
-        <p:spPr>
-          <a:xfrm>
-            <a:off x="640080" y="5806440"/>
-            <a:ext cx="82296" cy="475488"/>
-          </a:xfrm>
-          <a:prstGeom prst="roundRect">
-            <a:avLst>
-              <a:gd name="adj" fmla="val 50000"/>
-            </a:avLst>
-          </a:prstGeom>
-          <a:solidFill>
-            <a:srgbClr val="D97757"/>
-          </a:solidFill>
-          <a:ln>
-            <a:noFill/>
-          </a:ln>
-          <a:effectLst/>
-        </p:spPr>
-        <p:style>
-          <a:lnRef idx="1">
-            <a:schemeClr val="accent1"/>
-          </a:lnRef>
-          <a:fillRef idx="3">
-            <a:schemeClr val="accent1"/>
-          </a:fillRef>
-          <a:effectRef idx="2">
-            <a:schemeClr val="accent1"/>
-          </a:effectRef>
-          <a:fontRef idx="minor">
-            <a:schemeClr val="lt1"/>
-          </a:fontRef>
-        </p:style>
-        <p:txBody>
-          <a:bodyPr rtlCol="0" anchor="ctr"/>
-          <a:lstStyle/>
-          <a:p>
-            <a:pPr algn="ctr"/>
-          </a:p>
-        </p:txBody>
-      </p:sp>
-      <p:sp>
-        <p:nvSpPr>
-          <p:cNvPr id="20" name="TextBox 19"/>
-          <p:cNvSpPr txBox="1"/>
-          <p:nvPr/>
-        </p:nvSpPr>
-        <p:spPr>
-          <a:xfrm>
-            <a:off x="868680" y="5833872"/>
-            <a:ext cx="10607040" cy="420624"/>
+          <p:cNvPr id="16" name="TextBox 15"/>
+          <p:cNvSpPr txBox="1"/>
+          <p:nvPr/>
+        </p:nvSpPr>
+        <p:spPr>
+          <a:xfrm>
+            <a:off x="6629400" y="4133087"/>
+            <a:ext cx="4846320" cy="384048"/>
           </a:xfrm>
           <a:prstGeom prst="rect">
             <a:avLst/>
@@ -36982,31 +36213,58 @@
               </a:spcAft>
             </a:pPr>
             <a:r>
-              <a:rPr sz="1300" b="1">
-                <a:solidFill>
-                  <a:srgbClr val="D97757"/>
-                </a:solidFill>
-                <a:latin typeface="Segoe UI"/>
-              </a:rPr>
-              <a:t>“ </a:t>
-            </a:r>
-            <a:r>
               <a:rPr sz="1250" b="0">
                 <a:solidFill>
                   <a:srgbClr val="E8EAED"/>
                 </a:solidFill>
                 <a:latin typeface="Segoe UI"/>
               </a:rPr>
-              <a:t>Si solo conservas cinco reglas, conserva esas cinco. Las tools se sustituyen; la disciplina viaja.</a:t>
-            </a:r>
-            <a:r>
-              <a:rPr sz="1300" b="1">
-                <a:solidFill>
-                  <a:srgbClr val="D97757"/>
-                </a:solidFill>
-                <a:latin typeface="Segoe UI"/>
-              </a:rPr>
-              <a:t> ”</a:t>
+              <a:t>12d · Uso y enganche en la metodología</a:t>
+            </a:r>
+          </a:p>
+        </p:txBody>
+      </p:sp>
+      <p:sp>
+        <p:nvSpPr>
+          <p:cNvPr id="17" name="TextBox 16"/>
+          <p:cNvSpPr txBox="1"/>
+          <p:nvPr/>
+        </p:nvSpPr>
+        <p:spPr>
+          <a:xfrm>
+            <a:off x="10789920" y="6419088"/>
+            <a:ext cx="1097280" cy="320040"/>
+          </a:xfrm>
+          <a:prstGeom prst="rect">
+            <a:avLst/>
+          </a:prstGeom>
+          <a:noFill/>
+        </p:spPr>
+        <p:txBody>
+          <a:bodyPr wrap="square" anchor="t" lIns="0" rIns="0" tIns="0" bIns="0">
+            <a:spAutoFit/>
+          </a:bodyPr>
+          <a:lstStyle/>
+          <a:p>
+            <a:pPr algn="r">
+              <a:lnSpc>
+                <a:spcPct val="100000"/>
+              </a:lnSpc>
+              <a:spcBef>
+                <a:spcPts val="0"/>
+              </a:spcBef>
+              <a:spcAft>
+                <a:spcPts val="400"/>
+              </a:spcAft>
+            </a:pPr>
+            <a:r>
+              <a:rPr sz="950" b="1">
+                <a:solidFill>
+                  <a:srgbClr val="66707E"/>
+                </a:solidFill>
+                <a:latin typeface="Segoe UI"/>
+              </a:rPr>
+              <a:t>31</a:t>
             </a:r>
           </a:p>
         </p:txBody>
@@ -37157,7 +36415,7 @@
                 </a:solidFill>
                 <a:latin typeface="Segoe UI"/>
               </a:rPr>
-              <a:t>PARTE 2 · 12 · OPS</a:t>
+              <a:t>PARTE 3 · 12A · GRAFO DE TICKETS</a:t>
             </a:r>
           </a:p>
         </p:txBody>
@@ -37202,7 +36460,7 @@
                 </a:solidFill>
                 <a:latin typeface="Segoe UI"/>
               </a:rPr>
-              <a:t>Un runbook real: sincronizar máquinas</a:t>
+              <a:t>El problema, y por qué graphify</a:t>
             </a:r>
           </a:p>
         </p:txBody>
@@ -37350,7 +36608,7 @@
         <p:spPr>
           <a:xfrm>
             <a:off x="640080" y="1828800"/>
-            <a:ext cx="5349240" cy="2468880"/>
+            <a:ext cx="5349240" cy="2286000"/>
           </a:xfrm>
           <a:prstGeom prst="roundRect">
             <a:avLst>
@@ -37425,11 +36683,11 @@
             <a:r>
               <a:rPr sz="1400" b="1">
                 <a:solidFill>
-                  <a:srgbClr val="7AA2C7"/>
-                </a:solidFill>
-                <a:latin typeface="Segoe UI"/>
-              </a:rPr>
-              <a:t>Outbound — copia completa</a:t>
+                  <a:srgbClr val="D97757"/>
+                </a:solidFill>
+                <a:latin typeface="Segoe UI"/>
+              </a:rPr>
+              <a:t>El problema</a:t>
             </a:r>
           </a:p>
         </p:txBody>
@@ -37443,7 +36701,7 @@
         <p:spPr>
           <a:xfrm>
             <a:off x="914400" y="2487168"/>
-            <a:ext cx="4846320" cy="1645920"/>
+            <a:ext cx="4846320" cy="1463040"/>
           </a:xfrm>
           <a:prstGeom prst="rect">
             <a:avLst/>
@@ -37470,7 +36728,7 @@
             <a:r>
               <a:rPr sz="1150" b="1">
                 <a:solidFill>
-                  <a:srgbClr val="7AA2C7"/>
+                  <a:srgbClr val="D97757"/>
                 </a:solidFill>
                 <a:latin typeface="Segoe UI"/>
               </a:rPr>
@@ -37483,7 +36741,7 @@
                 </a:solidFill>
                 <a:latin typeface="Segoe UI"/>
               </a:rPr>
-              <a:t>Un tarball: workspace + ~/.claude · .aws · .ssh</a:t>
+              <a:t>~540 ficheros de writeups, sharp edges, runbooks, memoria</a:t>
             </a:r>
           </a:p>
           <a:p>
@@ -37501,7 +36759,7 @@
             <a:r>
               <a:rPr sz="1150" b="1">
                 <a:solidFill>
-                  <a:srgbClr val="7AA2C7"/>
+                  <a:srgbClr val="D97757"/>
                 </a:solidFill>
                 <a:latin typeface="Segoe UI"/>
               </a:rPr>
@@ -37514,7 +36772,7 @@
                 </a:solidFill>
                 <a:latin typeface="Segoe UI"/>
               </a:rPr>
-              <a:t>-h dereferencia el symlink de .aws (crítico)</a:t>
+              <a:t>Un bug 'nuevo' casi siempre tiene contexto previo que restringe el fix</a:t>
             </a:r>
           </a:p>
           <a:p>
@@ -37532,7 +36790,7 @@
             <a:r>
               <a:rPr sz="1150" b="1">
                 <a:solidFill>
-                  <a:srgbClr val="7AA2C7"/>
+                  <a:srgbClr val="D97757"/>
                 </a:solidFill>
                 <a:latin typeface="Segoe UI"/>
               </a:rPr>
@@ -37545,7 +36803,7 @@
                 </a:solidFill>
                 <a:latin typeface="Segoe UI"/>
               </a:rPr>
-              <a:t>Excluye venvs / node_modules / caches / .codegraph</a:t>
+              <a:t>Encontrarlo a mano = recordar que existe + grep</a:t>
             </a:r>
           </a:p>
           <a:p>
@@ -37563,7 +36821,7 @@
             <a:r>
               <a:rPr sz="1150" b="1">
                 <a:solidFill>
-                  <a:srgbClr val="7AA2C7"/>
+                  <a:srgbClr val="D97757"/>
                 </a:solidFill>
                 <a:latin typeface="Segoe UI"/>
               </a:rPr>
@@ -37576,38 +36834,7 @@
                 </a:solidFill>
                 <a:latin typeface="Segoe UI"/>
               </a:rPr>
-              <a:t>USB: mount manual en WSL + verificar byte a byte</a:t>
-            </a:r>
-          </a:p>
-          <a:p>
-            <a:pPr algn="l">
-              <a:lnSpc>
-                <a:spcPct val="105000"/>
-              </a:lnSpc>
-              <a:spcBef>
-                <a:spcPts val="0"/>
-              </a:spcBef>
-              <a:spcAft>
-                <a:spcPts val="600"/>
-              </a:spcAft>
-            </a:pPr>
-            <a:r>
-              <a:rPr sz="1150" b="1">
-                <a:solidFill>
-                  <a:srgbClr val="7AA2C7"/>
-                </a:solidFill>
-                <a:latin typeface="Segoe UI"/>
-              </a:rPr>
-              <a:t>▸  </a:t>
-            </a:r>
-            <a:r>
-              <a:rPr sz="1150" b="0">
-                <a:solidFill>
-                  <a:srgbClr val="E8EAED"/>
-                </a:solidFill>
-                <a:latin typeface="Segoe UI"/>
-              </a:rPr>
-              <a:t>En destino: bootstrap (/kg) + target-setup.sh rehacen el tooling</a:t>
+              <a:t>El grafo lo hace EXPLÍCITO y consultable en 1 llamada</a:t>
             </a:r>
           </a:p>
         </p:txBody>
@@ -37621,7 +36848,7 @@
         <p:spPr>
           <a:xfrm>
             <a:off x="6217920" y="1828800"/>
-            <a:ext cx="5349240" cy="2468880"/>
+            <a:ext cx="5349240" cy="2286000"/>
           </a:xfrm>
           <a:prstGeom prst="roundRect">
             <a:avLst>
@@ -37696,11 +36923,11 @@
             <a:r>
               <a:rPr sz="1400" b="1">
                 <a:solidFill>
-                  <a:srgbClr val="8CC28C"/>
-                </a:solidFill>
-                <a:latin typeface="Segoe UI"/>
-              </a:rPr>
-              <a:t>Inbound — solo delta</a:t>
+                  <a:srgbClr val="7AA2C7"/>
+                </a:solidFill>
+                <a:latin typeface="Segoe UI"/>
+              </a:rPr>
+              <a:t>El corpus: manifest, no glob</a:t>
             </a:r>
           </a:p>
         </p:txBody>
@@ -37714,7 +36941,7 @@
         <p:spPr>
           <a:xfrm>
             <a:off x="6492240" y="2487168"/>
-            <a:ext cx="4846320" cy="1645920"/>
+            <a:ext cx="4846320" cy="1463040"/>
           </a:xfrm>
           <a:prstGeom prst="rect">
             <a:avLst/>
@@ -37741,7 +36968,7 @@
             <a:r>
               <a:rPr sz="1150" b="1">
                 <a:solidFill>
-                  <a:srgbClr val="8CC28C"/>
+                  <a:srgbClr val="7AA2C7"/>
                 </a:solidFill>
                 <a:latin typeface="Segoe UI"/>
               </a:rPr>
@@ -37754,7 +36981,7 @@
                 </a:solidFill>
                 <a:latin typeface="Segoe UI"/>
               </a:rPr>
-              <a:t>El código ya está en GitHub → git fetch</a:t>
+              <a:t>manifest.txt DIFFEABLE: ~116 ficheros, ~196k palabras</a:t>
             </a:r>
           </a:p>
           <a:p>
@@ -37772,7 +36999,7 @@
             <a:r>
               <a:rPr sz="1150" b="1">
                 <a:solidFill>
-                  <a:srgbClr val="8CC28C"/>
+                  <a:srgbClr val="7AA2C7"/>
                 </a:solidFill>
                 <a:latin typeface="Segoe UI"/>
               </a:rPr>
@@ -37785,7 +37012,7 @@
                 </a:solidFill>
                 <a:latin typeface="Segoe UI"/>
               </a:rPr>
-              <a:t>Docs gitignored de data/ + memoria (snapshot-memory) viajan</a:t>
+              <a:t>Writeups sst-* (+ fallback determinista) · hubs · runbooks · memoria</a:t>
             </a:r>
           </a:p>
           <a:p>
@@ -37803,7 +37030,7 @@
             <a:r>
               <a:rPr sz="1150" b="1">
                 <a:solidFill>
-                  <a:srgbClr val="8CC28C"/>
+                  <a:srgbClr val="7AA2C7"/>
                 </a:solidFill>
                 <a:latin typeface="Segoe UI"/>
               </a:rPr>
@@ -37816,7 +37043,7 @@
                 </a:solidFill>
                 <a:latin typeface="Segoe UI"/>
               </a:rPr>
-              <a:t>En la principal: restore-memory → /kg-refresh reconstruye</a:t>
+              <a:t>Exclusiones duras: binarios, handovers repetidos, copias stale (payload/)</a:t>
             </a:r>
           </a:p>
           <a:p>
@@ -37834,7 +37061,7 @@
             <a:r>
               <a:rPr sz="1150" b="1">
                 <a:solidFill>
-                  <a:srgbClr val="8CC28C"/>
+                  <a:srgbClr val="7AA2C7"/>
                 </a:solidFill>
                 <a:latin typeface="Segoe UI"/>
               </a:rPr>
@@ -37847,7 +37074,7 @@
                 </a:solidFill>
                 <a:latin typeface="Segoe UI"/>
               </a:rPr>
-              <a:t>backup + diff de STATUS.md; STOP si hubo ediciones propias</a:t>
+              <a:t>Densidad sin conocimiento nuevo = ruido</a:t>
             </a:r>
           </a:p>
         </p:txBody>
@@ -37860,20 +37087,20 @@
         </p:nvSpPr>
         <p:spPr>
           <a:xfrm>
-            <a:off x="640080" y="4407408"/>
-            <a:ext cx="10927080" cy="1280160"/>
+            <a:off x="640080" y="4343400"/>
+            <a:ext cx="10927080" cy="1234440"/>
           </a:xfrm>
           <a:prstGeom prst="roundRect">
             <a:avLst>
-              <a:gd name="adj" fmla="val 6000"/>
+              <a:gd name="adj" fmla="val 8000"/>
             </a:avLst>
           </a:prstGeom>
           <a:solidFill>
-            <a:srgbClr val="1A212B"/>
+            <a:srgbClr val="222B38"/>
           </a:solidFill>
           <a:ln w="9525">
             <a:solidFill>
-              <a:srgbClr val="2E3948"/>
+              <a:srgbClr val="8CC28C"/>
             </a:solidFill>
           </a:ln>
           <a:effectLst/>
@@ -37908,8 +37135,8 @@
         </p:nvSpPr>
         <p:spPr>
           <a:xfrm>
-            <a:off x="914400" y="4608576"/>
-            <a:ext cx="10469880" cy="365760"/>
+            <a:off x="914400" y="4498848"/>
+            <a:ext cx="10424160" cy="960120"/>
           </a:xfrm>
           <a:prstGeom prst="rect">
             <a:avLst/>
@@ -37924,7 +37151,7 @@
           <a:p>
             <a:pPr algn="l">
               <a:lnSpc>
-                <a:spcPct val="100000"/>
+                <a:spcPct val="112000"/>
               </a:lnSpc>
               <a:spcBef>
                 <a:spcPts val="0"/>
@@ -37934,58 +37161,13 @@
               </a:spcAft>
             </a:pPr>
             <a:r>
-              <a:rPr sz="1400" b="1">
-                <a:solidFill>
-                  <a:srgbClr val="D97757"/>
-                </a:solidFill>
-                <a:latin typeface="Segoe UI"/>
-              </a:rPr>
-              <a:t>El landing lo conduce un agente — con guardrails</a:t>
-            </a:r>
-          </a:p>
-        </p:txBody>
-      </p:sp>
-      <p:sp>
-        <p:nvSpPr>
-          <p:cNvPr id="17" name="TextBox 16"/>
-          <p:cNvSpPr txBox="1"/>
-          <p:nvPr/>
-        </p:nvSpPr>
-        <p:spPr>
-          <a:xfrm>
-            <a:off x="914400" y="5065776"/>
-            <a:ext cx="10424159" cy="457199"/>
-          </a:xfrm>
-          <a:prstGeom prst="rect">
-            <a:avLst/>
-          </a:prstGeom>
-          <a:noFill/>
-        </p:spPr>
-        <p:txBody>
-          <a:bodyPr wrap="square" anchor="t" lIns="0" rIns="0" tIns="0" bIns="0">
-            <a:spAutoFit/>
-          </a:bodyPr>
-          <a:lstStyle/>
-          <a:p>
-            <a:pPr algn="l">
-              <a:lnSpc>
-                <a:spcPct val="105000"/>
-              </a:lnSpc>
-              <a:spcBef>
-                <a:spcPts val="0"/>
-              </a:spcBef>
-              <a:spcAft>
-                <a:spcPts val="600"/>
-              </a:spcAft>
-            </a:pPr>
-            <a:r>
-              <a:rPr sz="1150" b="1">
-                <a:solidFill>
-                  <a:srgbClr val="D97757"/>
-                </a:solidFill>
-                <a:latin typeface="Segoe UI"/>
-              </a:rPr>
-              <a:t>▸  </a:t>
+              <a:rPr sz="1250" b="1">
+                <a:solidFill>
+                  <a:srgbClr val="8CC28C"/>
+                </a:solidFill>
+                <a:latin typeface="Segoe UI"/>
+              </a:rPr>
+              <a:t>La tecnología es graphify — CodeGraph es solo la analogía.  </a:t>
             </a:r>
             <a:r>
               <a:rPr sz="1150" b="0">
@@ -37994,45 +37176,14 @@
                 </a:solidFill>
                 <a:latin typeface="Segoe UI"/>
               </a:rPr>
-              <a:t>Solo no-destructivo (renombrar, no borrar) · git fetch = única op de red</a:t>
-            </a:r>
-          </a:p>
-          <a:p>
-            <a:pPr algn="l">
-              <a:lnSpc>
-                <a:spcPct val="105000"/>
-              </a:lnSpc>
-              <a:spcBef>
-                <a:spcPts val="0"/>
-              </a:spcBef>
-              <a:spcAft>
-                <a:spcPts val="600"/>
-              </a:spcAft>
-            </a:pPr>
-            <a:r>
-              <a:rPr sz="1150" b="1">
-                <a:solidFill>
-                  <a:srgbClr val="D97757"/>
-                </a:solidFill>
-                <a:latin typeface="Segoe UI"/>
-              </a:rPr>
-              <a:t>▸  </a:t>
-            </a:r>
-            <a:r>
-              <a:rPr sz="1150" b="0">
-                <a:solidFill>
-                  <a:srgbClr val="E8EAED"/>
-                </a:solidFill>
-                <a:latin typeface="Segoe UI"/>
-              </a:rPr>
-              <a:t>El humano hace push / merge; el agente prepara y reporta con evidencia (conteos, PRs)</a:t>
-            </a:r>
-          </a:p>
-        </p:txBody>
-      </p:sp>
-      <p:sp>
-        <p:nvSpPr>
-          <p:cNvPr id="18" name="Rounded Rectangle 17"/>
+              <a:t>Mismo rol (grafo consultable antes de tocar nada), otro dominio (tickets, no código), otra herramienta. La Fase 1 fue un SPIKE con decisión keep/extend/replace: validar graphify off-the-shelf antes de invertir en extracción custom. Bastó — y se quedó.</a:t>
+            </a:r>
+          </a:p>
+        </p:txBody>
+      </p:sp>
+      <p:sp>
+        <p:nvSpPr>
+          <p:cNvPr id="17" name="Rounded Rectangle 16"/>
           <p:cNvSpPr/>
           <p:nvPr/>
         </p:nvSpPr>
@@ -38080,7 +37231,7 @@
       </p:sp>
       <p:sp>
         <p:nvSpPr>
-          <p:cNvPr id="19" name="Rounded Rectangle 18"/>
+          <p:cNvPr id="18" name="Rounded Rectangle 17"/>
           <p:cNvSpPr/>
           <p:nvPr/>
         </p:nvSpPr>
@@ -38126,7 +37277,7 @@
       </p:sp>
       <p:sp>
         <p:nvSpPr>
-          <p:cNvPr id="20" name="TextBox 19"/>
+          <p:cNvPr id="19" name="TextBox 18"/>
           <p:cNvSpPr txBox="1"/>
           <p:nvPr/>
         </p:nvSpPr>
@@ -38173,7 +37324,7 @@
                 </a:solidFill>
                 <a:latin typeface="Segoe UI"/>
               </a:rPr>
-              <a:t>La metodología no es solo para código: memoria durable, guardrails y 'el humano hace lo externo' también en ops.</a:t>
+              <a:t>Material completo (diseño, scripts, tests, salida real): docs/knowledge-graph/.</a:t>
             </a:r>
             <a:r>
               <a:rPr sz="1300" b="1">
@@ -38333,7 +37484,7 @@
                 </a:solidFill>
                 <a:latin typeface="Segoe UI"/>
               </a:rPr>
-              <a:t>CIERRE</a:t>
+              <a:t>PARTE 3 · 12B · GRAFO DE TICKETS</a:t>
             </a:r>
           </a:p>
         </p:txBody>
@@ -38378,7 +37529,7 @@
                 </a:solidFill>
                 <a:latin typeface="Segoe UI"/>
               </a:rPr>
-              <a:t>De asistente a sistema</a:t>
+              <a:t>Pipeline y comandos creados en Claude Code</a:t>
             </a:r>
           </a:p>
         </p:txBody>
@@ -38525,8 +37676,8 @@
         </p:nvSpPr>
         <p:spPr>
           <a:xfrm>
-            <a:off x="640080" y="1783080"/>
-            <a:ext cx="5349240" cy="365760"/>
+            <a:off x="640080" y="1746504"/>
+            <a:ext cx="5806440" cy="274320"/>
           </a:xfrm>
           <a:prstGeom prst="rect">
             <a:avLst/>
@@ -38551,13 +37702,13 @@
               </a:spcAft>
             </a:pPr>
             <a:r>
-              <a:rPr sz="1300" b="1">
-                <a:solidFill>
-                  <a:srgbClr val="D97757"/>
-                </a:solidFill>
-                <a:latin typeface="Segoe UI"/>
-              </a:rPr>
-              <a:t>PARTE 1 · la herramienta</a:t>
+              <a:rPr sz="1100" b="1">
+                <a:solidFill>
+                  <a:srgbClr val="7AA2C7"/>
+                </a:solidFill>
+                <a:latin typeface="Segoe UI"/>
+              </a:rPr>
+              <a:t>Build (skill /kg-refresh)</a:t>
             </a:r>
           </a:p>
         </p:txBody>
@@ -38570,12 +37721,193 @@
         </p:nvSpPr>
         <p:spPr>
           <a:xfrm>
-            <a:off x="640080" y="2148840"/>
-            <a:ext cx="5349240" cy="777240"/>
+            <a:off x="640080" y="2057400"/>
+            <a:ext cx="5806440" cy="1965960"/>
           </a:xfrm>
           <a:prstGeom prst="roundRect">
             <a:avLst>
-              <a:gd name="adj" fmla="val 9000"/>
+              <a:gd name="adj" fmla="val 5000"/>
+            </a:avLst>
+          </a:prstGeom>
+          <a:solidFill>
+            <a:srgbClr val="0A0E13"/>
+          </a:solidFill>
+          <a:ln w="9525">
+            <a:solidFill>
+              <a:srgbClr val="2E3948"/>
+            </a:solidFill>
+          </a:ln>
+          <a:effectLst/>
+        </p:spPr>
+        <p:style>
+          <a:lnRef idx="1">
+            <a:schemeClr val="accent1"/>
+          </a:lnRef>
+          <a:fillRef idx="3">
+            <a:schemeClr val="accent1"/>
+          </a:fillRef>
+          <a:effectRef idx="2">
+            <a:schemeClr val="accent1"/>
+          </a:effectRef>
+          <a:fontRef idx="minor">
+            <a:schemeClr val="lt1"/>
+          </a:fontRef>
+        </p:style>
+        <p:txBody>
+          <a:bodyPr rtlCol="0" anchor="ctr"/>
+          <a:lstStyle/>
+          <a:p>
+            <a:pPr algn="ctr"/>
+          </a:p>
+        </p:txBody>
+      </p:sp>
+      <p:sp>
+        <p:nvSpPr>
+          <p:cNvPr id="11" name="TextBox 10"/>
+          <p:cNvSpPr txBox="1"/>
+          <p:nvPr/>
+        </p:nvSpPr>
+        <p:spPr>
+          <a:xfrm>
+            <a:off x="896112" y="2240280"/>
+            <a:ext cx="5349240" cy="1645919"/>
+          </a:xfrm>
+          <a:prstGeom prst="rect">
+            <a:avLst/>
+          </a:prstGeom>
+          <a:noFill/>
+        </p:spPr>
+        <p:txBody>
+          <a:bodyPr wrap="square" anchor="t" lIns="0" rIns="0" tIns="0" bIns="0">
+            <a:spAutoFit/>
+          </a:bodyPr>
+          <a:lstStyle/>
+          <a:p>
+            <a:pPr algn="l">
+              <a:lnSpc>
+                <a:spcPct val="112000"/>
+              </a:lnSpc>
+              <a:spcBef>
+                <a:spcPts val="0"/>
+              </a:spcBef>
+              <a:spcAft>
+                <a:spcPts val="200"/>
+              </a:spcAft>
+            </a:pPr>
+            <a:r>
+              <a:rPr sz="1150" b="0">
+                <a:solidFill>
+                  <a:srgbClr val="E8EAED"/>
+                </a:solidFill>
+                <a:latin typeface="Consolas"/>
+              </a:rPr>
+              <a:t>kg_refresh.sh prepare   # manifest -&gt; stage</a:t>
+            </a:r>
+          </a:p>
+          <a:p>
+            <a:pPr algn="l">
+              <a:lnSpc>
+                <a:spcPct val="112000"/>
+              </a:lnSpc>
+              <a:spcBef>
+                <a:spcPts val="0"/>
+              </a:spcBef>
+              <a:spcAft>
+                <a:spcPts val="200"/>
+              </a:spcAft>
+            </a:pPr>
+            <a:r>
+              <a:rPr sz="1150" b="0">
+                <a:solidFill>
+                  <a:srgbClr val="E8EAED"/>
+                </a:solidFill>
+                <a:latin typeface="Consolas"/>
+              </a:rPr>
+              <a:t>                        # -&gt; scratch FUERA del repo</a:t>
+            </a:r>
+          </a:p>
+          <a:p>
+            <a:pPr algn="l">
+              <a:lnSpc>
+                <a:spcPct val="112000"/>
+              </a:lnSpc>
+              <a:spcBef>
+                <a:spcPts val="0"/>
+              </a:spcBef>
+              <a:spcAft>
+                <a:spcPts val="200"/>
+              </a:spcAft>
+            </a:pPr>
+            <a:r>
+              <a:rPr sz="1150" b="0">
+                <a:solidFill>
+                  <a:srgbClr val="E8EAED"/>
+                </a:solidFill>
+                <a:latin typeface="Consolas"/>
+              </a:rPr>
+              <a:t>/graphify &lt;scratch&gt;     # ÚNICO paso con LLM:</a:t>
+            </a:r>
+          </a:p>
+          <a:p>
+            <a:pPr algn="l">
+              <a:lnSpc>
+                <a:spcPct val="112000"/>
+              </a:lnSpc>
+              <a:spcBef>
+                <a:spcPts val="0"/>
+              </a:spcBef>
+              <a:spcAft>
+                <a:spcPts val="200"/>
+              </a:spcAft>
+            </a:pPr>
+            <a:r>
+              <a:rPr sz="1150" b="0">
+                <a:solidFill>
+                  <a:srgbClr val="E8EAED"/>
+                </a:solidFill>
+                <a:latin typeface="Consolas"/>
+              </a:rPr>
+              <a:t>                        # nodos+aristas+clustering</a:t>
+            </a:r>
+          </a:p>
+          <a:p>
+            <a:pPr algn="l">
+              <a:lnSpc>
+                <a:spcPct val="112000"/>
+              </a:lnSpc>
+              <a:spcBef>
+                <a:spcPts val="0"/>
+              </a:spcBef>
+              <a:spcAft>
+                <a:spcPts val="200"/>
+              </a:spcAft>
+            </a:pPr>
+            <a:r>
+              <a:rPr sz="1150" b="0">
+                <a:solidFill>
+                  <a:srgbClr val="E8EAED"/>
+                </a:solidFill>
+                <a:latin typeface="Consolas"/>
+              </a:rPr>
+              <a:t>kg_refresh.sh finalize  # output/ + leak-check</a:t>
+            </a:r>
+          </a:p>
+        </p:txBody>
+      </p:sp>
+      <p:sp>
+        <p:nvSpPr>
+          <p:cNvPr id="12" name="Rounded Rectangle 11"/>
+          <p:cNvSpPr/>
+          <p:nvPr/>
+        </p:nvSpPr>
+        <p:spPr>
+          <a:xfrm>
+            <a:off x="6720840" y="1755648"/>
+            <a:ext cx="4846320" cy="2286000"/>
+          </a:xfrm>
+          <a:prstGeom prst="roundRect">
+            <a:avLst>
+              <a:gd name="adj" fmla="val 6000"/>
             </a:avLst>
           </a:prstGeom>
           <a:solidFill>
@@ -38612,199 +37944,241 @@
       </p:sp>
       <p:sp>
         <p:nvSpPr>
-          <p:cNvPr id="11" name="Rounded Rectangle 10"/>
+          <p:cNvPr id="13" name="TextBox 12"/>
+          <p:cNvSpPr txBox="1"/>
+          <p:nvPr/>
+        </p:nvSpPr>
+        <p:spPr>
+          <a:xfrm>
+            <a:off x="6995159" y="1956816"/>
+            <a:ext cx="4389120" cy="365760"/>
+          </a:xfrm>
+          <a:prstGeom prst="rect">
+            <a:avLst/>
+          </a:prstGeom>
+          <a:noFill/>
+        </p:spPr>
+        <p:txBody>
+          <a:bodyPr wrap="square" anchor="t" lIns="0" rIns="0" tIns="0" bIns="0">
+            <a:spAutoFit/>
+          </a:bodyPr>
+          <a:lstStyle/>
+          <a:p>
+            <a:pPr algn="l">
+              <a:lnSpc>
+                <a:spcPct val="100000"/>
+              </a:lnSpc>
+              <a:spcBef>
+                <a:spcPts val="0"/>
+              </a:spcBef>
+              <a:spcAft>
+                <a:spcPts val="400"/>
+              </a:spcAft>
+            </a:pPr>
+            <a:r>
+              <a:rPr sz="1400" b="1">
+                <a:solidFill>
+                  <a:srgbClr val="7AA2C7"/>
+                </a:solidFill>
+                <a:latin typeface="Segoe UI"/>
+              </a:rPr>
+              <a:t>Las piezas</a:t>
+            </a:r>
+          </a:p>
+        </p:txBody>
+      </p:sp>
+      <p:sp>
+        <p:nvSpPr>
+          <p:cNvPr id="14" name="TextBox 13"/>
+          <p:cNvSpPr txBox="1"/>
+          <p:nvPr/>
+        </p:nvSpPr>
+        <p:spPr>
+          <a:xfrm>
+            <a:off x="6995159" y="2414015"/>
+            <a:ext cx="4343400" cy="1463040"/>
+          </a:xfrm>
+          <a:prstGeom prst="rect">
+            <a:avLst/>
+          </a:prstGeom>
+          <a:noFill/>
+        </p:spPr>
+        <p:txBody>
+          <a:bodyPr wrap="square" anchor="t" lIns="0" rIns="0" tIns="0" bIns="0">
+            <a:spAutoFit/>
+          </a:bodyPr>
+          <a:lstStyle/>
+          <a:p>
+            <a:pPr algn="l">
+              <a:lnSpc>
+                <a:spcPct val="105000"/>
+              </a:lnSpc>
+              <a:spcBef>
+                <a:spcPts val="0"/>
+              </a:spcBef>
+              <a:spcAft>
+                <a:spcPts val="600"/>
+              </a:spcAft>
+            </a:pPr>
+            <a:r>
+              <a:rPr sz="1150" b="1">
+                <a:solidFill>
+                  <a:srgbClr val="7AA2C7"/>
+                </a:solidFill>
+                <a:latin typeface="Segoe UI"/>
+              </a:rPr>
+              <a:t>▸  </a:t>
+            </a:r>
+            <a:r>
+              <a:rPr sz="1150" b="0">
+                <a:solidFill>
+                  <a:srgbClr val="E8EAED"/>
+                </a:solidFill>
+                <a:latin typeface="Segoe UI"/>
+              </a:rPr>
+              <a:t>/kg y /kg-refresh — skills de Claude Code</a:t>
+            </a:r>
+          </a:p>
+          <a:p>
+            <a:pPr algn="l">
+              <a:lnSpc>
+                <a:spcPct val="105000"/>
+              </a:lnSpc>
+              <a:spcBef>
+                <a:spcPts val="0"/>
+              </a:spcBef>
+              <a:spcAft>
+                <a:spcPts val="600"/>
+              </a:spcAft>
+            </a:pPr>
+            <a:r>
+              <a:rPr sz="1150" b="1">
+                <a:solidFill>
+                  <a:srgbClr val="7AA2C7"/>
+                </a:solidFill>
+                <a:latin typeface="Segoe UI"/>
+              </a:rPr>
+              <a:t>▸  </a:t>
+            </a:r>
+            <a:r>
+              <a:rPr sz="1150" b="0">
+                <a:solidFill>
+                  <a:srgbClr val="E8EAED"/>
+                </a:solidFill>
+                <a:latin typeface="Segoe UI"/>
+              </a:rPr>
+              <a:t>kg_query.sh — envuelve graphify explain/path + find</a:t>
+            </a:r>
+          </a:p>
+          <a:p>
+            <a:pPr algn="l">
+              <a:lnSpc>
+                <a:spcPct val="105000"/>
+              </a:lnSpc>
+              <a:spcBef>
+                <a:spcPts val="0"/>
+              </a:spcBef>
+              <a:spcAft>
+                <a:spcPts val="600"/>
+              </a:spcAft>
+            </a:pPr>
+            <a:r>
+              <a:rPr sz="1150" b="1">
+                <a:solidFill>
+                  <a:srgbClr val="7AA2C7"/>
+                </a:solidFill>
+                <a:latin typeface="Segoe UI"/>
+              </a:rPr>
+              <a:t>▸  </a:t>
+            </a:r>
+            <a:r>
+              <a:rPr sz="1150" b="0">
+                <a:solidFill>
+                  <a:srgbClr val="E8EAED"/>
+                </a:solidFill>
+                <a:latin typeface="Segoe UI"/>
+              </a:rPr>
+              <a:t>kg_refresh.sh — prepare · finalize · bootstrap · snapshot/restore-memory</a:t>
+            </a:r>
+          </a:p>
+          <a:p>
+            <a:pPr algn="l">
+              <a:lnSpc>
+                <a:spcPct val="105000"/>
+              </a:lnSpc>
+              <a:spcBef>
+                <a:spcPts val="0"/>
+              </a:spcBef>
+              <a:spcAft>
+                <a:spcPts val="600"/>
+              </a:spcAft>
+            </a:pPr>
+            <a:r>
+              <a:rPr sz="1150" b="1">
+                <a:solidFill>
+                  <a:srgbClr val="7AA2C7"/>
+                </a:solidFill>
+                <a:latin typeface="Segoe UI"/>
+              </a:rPr>
+              <a:t>▸  </a:t>
+            </a:r>
+            <a:r>
+              <a:rPr sz="1150" b="0">
+                <a:solidFill>
+                  <a:srgbClr val="E8EAED"/>
+                </a:solidFill>
+                <a:latin typeface="Segoe UI"/>
+              </a:rPr>
+              <a:t>build_manifest.py + stage_corpus.py — el corpus</a:t>
+            </a:r>
+          </a:p>
+          <a:p>
+            <a:pPr algn="l">
+              <a:lnSpc>
+                <a:spcPct val="105000"/>
+              </a:lnSpc>
+              <a:spcBef>
+                <a:spcPts val="0"/>
+              </a:spcBef>
+              <a:spcAft>
+                <a:spcPts val="600"/>
+              </a:spcAft>
+            </a:pPr>
+            <a:r>
+              <a:rPr sz="1150" b="1">
+                <a:solidFill>
+                  <a:srgbClr val="7AA2C7"/>
+                </a:solidFill>
+                <a:latin typeface="Segoe UI"/>
+              </a:rPr>
+              <a:t>▸  </a:t>
+            </a:r>
+            <a:r>
+              <a:rPr sz="1150" b="0">
+                <a:solidFill>
+                  <a:srgbClr val="E8EAED"/>
+                </a:solidFill>
+                <a:latin typeface="Segoe UI"/>
+              </a:rPr>
+              <a:t>test_kg_*.py — los bookends, TESTEADOS</a:t>
+            </a:r>
+          </a:p>
+        </p:txBody>
+      </p:sp>
+      <p:sp>
+        <p:nvSpPr>
+          <p:cNvPr id="15" name="Rounded Rectangle 14"/>
           <p:cNvSpPr/>
           <p:nvPr/>
         </p:nvSpPr>
         <p:spPr>
           <a:xfrm>
-            <a:off x="822960" y="2313432"/>
-            <a:ext cx="402336" cy="402336"/>
+            <a:off x="640080" y="4224528"/>
+            <a:ext cx="10927080" cy="1371600"/>
           </a:xfrm>
           <a:prstGeom prst="roundRect">
             <a:avLst>
-              <a:gd name="adj" fmla="val 35000"/>
-            </a:avLst>
-          </a:prstGeom>
-          <a:solidFill>
-            <a:srgbClr val="D97757"/>
-          </a:solidFill>
-          <a:ln>
-            <a:noFill/>
-          </a:ln>
-          <a:effectLst/>
-        </p:spPr>
-        <p:style>
-          <a:lnRef idx="1">
-            <a:schemeClr val="accent1"/>
-          </a:lnRef>
-          <a:fillRef idx="3">
-            <a:schemeClr val="accent1"/>
-          </a:fillRef>
-          <a:effectRef idx="2">
-            <a:schemeClr val="accent1"/>
-          </a:effectRef>
-          <a:fontRef idx="minor">
-            <a:schemeClr val="lt1"/>
-          </a:fontRef>
-        </p:style>
-        <p:txBody>
-          <a:bodyPr rtlCol="0" anchor="ctr"/>
-          <a:lstStyle/>
-          <a:p>
-            <a:pPr algn="ctr"/>
-          </a:p>
-        </p:txBody>
-      </p:sp>
-      <p:sp>
-        <p:nvSpPr>
-          <p:cNvPr id="12" name="TextBox 11"/>
-          <p:cNvSpPr txBox="1"/>
-          <p:nvPr/>
-        </p:nvSpPr>
-        <p:spPr>
-          <a:xfrm>
-            <a:off x="822960" y="2322576"/>
-            <a:ext cx="402336" cy="384048"/>
-          </a:xfrm>
-          <a:prstGeom prst="rect">
-            <a:avLst/>
-          </a:prstGeom>
-          <a:noFill/>
-        </p:spPr>
-        <p:txBody>
-          <a:bodyPr wrap="square" anchor="ctr" lIns="0" rIns="0" tIns="0" bIns="0">
-            <a:spAutoFit/>
-          </a:bodyPr>
-          <a:lstStyle/>
-          <a:p>
-            <a:pPr algn="ctr">
-              <a:lnSpc>
-                <a:spcPct val="100000"/>
-              </a:lnSpc>
-              <a:spcBef>
-                <a:spcPts val="0"/>
-              </a:spcBef>
-              <a:spcAft>
-                <a:spcPts val="400"/>
-              </a:spcAft>
-            </a:pPr>
-            <a:r>
-              <a:rPr sz="1300" b="1">
-                <a:solidFill>
-                  <a:srgbClr val="0F141A"/>
-                </a:solidFill>
-                <a:latin typeface="Segoe UI"/>
-              </a:rPr>
-              <a:t>1</a:t>
-            </a:r>
-          </a:p>
-        </p:txBody>
-      </p:sp>
-      <p:sp>
-        <p:nvSpPr>
-          <p:cNvPr id="13" name="TextBox 12"/>
-          <p:cNvSpPr txBox="1"/>
-          <p:nvPr/>
-        </p:nvSpPr>
-        <p:spPr>
-          <a:xfrm>
-            <a:off x="1371600" y="2240280"/>
-            <a:ext cx="4572000" cy="320040"/>
-          </a:xfrm>
-          <a:prstGeom prst="rect">
-            <a:avLst/>
-          </a:prstGeom>
-          <a:noFill/>
-        </p:spPr>
-        <p:txBody>
-          <a:bodyPr wrap="square" anchor="t" lIns="0" rIns="0" tIns="0" bIns="0">
-            <a:spAutoFit/>
-          </a:bodyPr>
-          <a:lstStyle/>
-          <a:p>
-            <a:pPr algn="l">
-              <a:lnSpc>
-                <a:spcPct val="100000"/>
-              </a:lnSpc>
-              <a:spcBef>
-                <a:spcPts val="0"/>
-              </a:spcBef>
-              <a:spcAft>
-                <a:spcPts val="400"/>
-              </a:spcAft>
-            </a:pPr>
-            <a:r>
-              <a:rPr sz="1250" b="1">
-                <a:solidFill>
-                  <a:srgbClr val="E8EAED"/>
-                </a:solidFill>
-                <a:latin typeface="Segoe UI"/>
-              </a:rPr>
-              <a:t>Instalar + memoria</a:t>
-            </a:r>
-          </a:p>
-        </p:txBody>
-      </p:sp>
-      <p:sp>
-        <p:nvSpPr>
-          <p:cNvPr id="14" name="TextBox 13"/>
-          <p:cNvSpPr txBox="1"/>
-          <p:nvPr/>
-        </p:nvSpPr>
-        <p:spPr>
-          <a:xfrm>
-            <a:off x="1371600" y="2542032"/>
-            <a:ext cx="4572000" cy="347472"/>
-          </a:xfrm>
-          <a:prstGeom prst="rect">
-            <a:avLst/>
-          </a:prstGeom>
-          <a:noFill/>
-        </p:spPr>
-        <p:txBody>
-          <a:bodyPr wrap="square" anchor="t" lIns="0" rIns="0" tIns="0" bIns="0">
-            <a:spAutoFit/>
-          </a:bodyPr>
-          <a:lstStyle/>
-          <a:p>
-            <a:pPr algn="l">
-              <a:lnSpc>
-                <a:spcPct val="100000"/>
-              </a:lnSpc>
-              <a:spcBef>
-                <a:spcPts val="0"/>
-              </a:spcBef>
-              <a:spcAft>
-                <a:spcPts val="400"/>
-              </a:spcAft>
-            </a:pPr>
-            <a:r>
-              <a:rPr sz="1000" b="0">
-                <a:solidFill>
-                  <a:srgbClr val="9AA4B2"/>
-                </a:solidFill>
-                <a:latin typeface="Segoe UI"/>
-              </a:rPr>
-              <a:t>Una línea; CLAUDE.md de dos niveles; sesiones que viajan.</a:t>
-            </a:r>
-          </a:p>
-        </p:txBody>
-      </p:sp>
-      <p:sp>
-        <p:nvSpPr>
-          <p:cNvPr id="15" name="Rounded Rectangle 14"/>
-          <p:cNvSpPr/>
-          <p:nvPr/>
-        </p:nvSpPr>
-        <p:spPr>
-          <a:xfrm>
-            <a:off x="640080" y="3017520"/>
-            <a:ext cx="5349240" cy="777240"/>
-          </a:xfrm>
-          <a:prstGeom prst="roundRect">
-            <a:avLst>
-              <a:gd name="adj" fmla="val 9000"/>
+              <a:gd name="adj" fmla="val 8000"/>
             </a:avLst>
           </a:prstGeom>
           <a:solidFill>
@@ -38841,18 +38215,151 @@
       </p:sp>
       <p:sp>
         <p:nvSpPr>
-          <p:cNvPr id="16" name="Rounded Rectangle 15"/>
+          <p:cNvPr id="16" name="TextBox 15"/>
+          <p:cNvSpPr txBox="1"/>
+          <p:nvPr/>
+        </p:nvSpPr>
+        <p:spPr>
+          <a:xfrm>
+            <a:off x="914400" y="4370832"/>
+            <a:ext cx="10424160" cy="1097280"/>
+          </a:xfrm>
+          <a:prstGeom prst="rect">
+            <a:avLst/>
+          </a:prstGeom>
+          <a:noFill/>
+        </p:spPr>
+        <p:txBody>
+          <a:bodyPr wrap="square" anchor="t" lIns="0" rIns="0" tIns="0" bIns="0">
+            <a:spAutoFit/>
+          </a:bodyPr>
+          <a:lstStyle/>
+          <a:p>
+            <a:pPr algn="l">
+              <a:lnSpc>
+                <a:spcPct val="112000"/>
+              </a:lnSpc>
+              <a:spcBef>
+                <a:spcPts val="0"/>
+              </a:spcBef>
+              <a:spcAft>
+                <a:spcPts val="800"/>
+              </a:spcAft>
+            </a:pPr>
+            <a:r>
+              <a:rPr sz="1200" b="1">
+                <a:solidFill>
+                  <a:srgbClr val="D97757"/>
+                </a:solidFill>
+                <a:latin typeface="Segoe UI"/>
+              </a:rPr>
+              <a:t>El gotcha que lo sostiene:  </a:t>
+            </a:r>
+            <a:r>
+              <a:rPr sz="1150" b="0">
+                <a:solidFill>
+                  <a:srgbClr val="E8EAED"/>
+                </a:solidFill>
+                <a:latin typeface="Segoe UI"/>
+              </a:rPr>
+              <a:t>graphify respeta .gitignore y todo data/ lo está → correr el detector in situ encuentra 0 ficheros. Por eso el corpus se monta en un scratch fuera del repo y los artefactos se copian de vuelta.</a:t>
+            </a:r>
+          </a:p>
+          <a:p>
+            <a:pPr algn="l">
+              <a:lnSpc>
+                <a:spcPct val="112000"/>
+              </a:lnSpc>
+              <a:spcBef>
+                <a:spcPts val="0"/>
+              </a:spcBef>
+              <a:spcAft>
+                <a:spcPts val="800"/>
+              </a:spcAft>
+            </a:pPr>
+            <a:r>
+              <a:rPr sz="1200" b="1">
+                <a:solidFill>
+                  <a:srgbClr val="8CC28C"/>
+                </a:solidFill>
+                <a:latin typeface="Segoe UI"/>
+              </a:rPr>
+              <a:t>Por eso /kg-refresh es un skill, no un script:  </a:t>
+            </a:r>
+            <a:r>
+              <a:rPr sz="1150" b="0">
+                <a:solidFill>
+                  <a:srgbClr val="E8EAED"/>
+                </a:solidFill>
+                <a:latin typeface="Segoe UI"/>
+              </a:rPr>
+              <a:t>el paso semántico (/graphify, subagentes en paralelo) es un paso de Claude; los bookends son deterministas.</a:t>
+            </a:r>
+          </a:p>
+        </p:txBody>
+      </p:sp>
+      <p:sp>
+        <p:nvSpPr>
+          <p:cNvPr id="17" name="Rounded Rectangle 16"/>
           <p:cNvSpPr/>
           <p:nvPr/>
         </p:nvSpPr>
         <p:spPr>
           <a:xfrm>
-            <a:off x="822960" y="3182112"/>
-            <a:ext cx="402336" cy="402336"/>
+            <a:off x="640080" y="5806440"/>
+            <a:ext cx="10927080" cy="475488"/>
           </a:xfrm>
           <a:prstGeom prst="roundRect">
             <a:avLst>
-              <a:gd name="adj" fmla="val 35000"/>
+              <a:gd name="adj" fmla="val 28000"/>
+            </a:avLst>
+          </a:prstGeom>
+          <a:solidFill>
+            <a:srgbClr val="222B38"/>
+          </a:solidFill>
+          <a:ln w="9525">
+            <a:solidFill>
+              <a:srgbClr val="2E3948"/>
+            </a:solidFill>
+          </a:ln>
+          <a:effectLst/>
+        </p:spPr>
+        <p:style>
+          <a:lnRef idx="1">
+            <a:schemeClr val="accent1"/>
+          </a:lnRef>
+          <a:fillRef idx="3">
+            <a:schemeClr val="accent1"/>
+          </a:fillRef>
+          <a:effectRef idx="2">
+            <a:schemeClr val="accent1"/>
+          </a:effectRef>
+          <a:fontRef idx="minor">
+            <a:schemeClr val="lt1"/>
+          </a:fontRef>
+        </p:style>
+        <p:txBody>
+          <a:bodyPr rtlCol="0" anchor="ctr"/>
+          <a:lstStyle/>
+          <a:p>
+            <a:pPr algn="ctr"/>
+          </a:p>
+        </p:txBody>
+      </p:sp>
+      <p:sp>
+        <p:nvSpPr>
+          <p:cNvPr id="18" name="Rounded Rectangle 17"/>
+          <p:cNvSpPr/>
+          <p:nvPr/>
+        </p:nvSpPr>
+        <p:spPr>
+          <a:xfrm>
+            <a:off x="640080" y="5806440"/>
+            <a:ext cx="82296" cy="475488"/>
+          </a:xfrm>
+          <a:prstGeom prst="roundRect">
+            <a:avLst>
+              <a:gd name="adj" fmla="val 50000"/>
             </a:avLst>
           </a:prstGeom>
           <a:solidFill>
@@ -38887,14 +38394,14 @@
       </p:sp>
       <p:sp>
         <p:nvSpPr>
-          <p:cNvPr id="17" name="TextBox 16"/>
-          <p:cNvSpPr txBox="1"/>
-          <p:nvPr/>
-        </p:nvSpPr>
-        <p:spPr>
-          <a:xfrm>
-            <a:off x="822960" y="3191256"/>
-            <a:ext cx="402336" cy="384048"/>
+          <p:cNvPr id="19" name="TextBox 18"/>
+          <p:cNvSpPr txBox="1"/>
+          <p:nvPr/>
+        </p:nvSpPr>
+        <p:spPr>
+          <a:xfrm>
+            <a:off x="868680" y="5833872"/>
+            <a:ext cx="10607040" cy="420624"/>
           </a:xfrm>
           <a:prstGeom prst="rect">
             <a:avLst/>
@@ -38907,7 +38414,7 @@
           </a:bodyPr>
           <a:lstStyle/>
           <a:p>
-            <a:pPr algn="ctr">
+            <a:pPr algn="l">
               <a:lnSpc>
                 <a:spcPct val="100000"/>
               </a:lnSpc>
@@ -38921,25 +38428,149 @@
             <a:r>
               <a:rPr sz="1300" b="1">
                 <a:solidFill>
-                  <a:srgbClr val="0F141A"/>
-                </a:solidFill>
-                <a:latin typeface="Segoe UI"/>
-              </a:rPr>
-              <a:t>2</a:t>
-            </a:r>
-          </a:p>
-        </p:txBody>
-      </p:sp>
-      <p:sp>
-        <p:nvSpPr>
-          <p:cNvPr id="18" name="TextBox 17"/>
-          <p:cNvSpPr txBox="1"/>
-          <p:nvPr/>
-        </p:nvSpPr>
-        <p:spPr>
-          <a:xfrm>
-            <a:off x="1371600" y="3108960"/>
-            <a:ext cx="4572000" cy="320040"/>
+                  <a:srgbClr val="D97757"/>
+                </a:solidFill>
+                <a:latin typeface="Segoe UI"/>
+              </a:rPr>
+              <a:t>“ </a:t>
+            </a:r>
+            <a:r>
+              <a:rPr sz="1250" b="0">
+                <a:solidFill>
+                  <a:srgbClr val="E8EAED"/>
+                </a:solidFill>
+                <a:latin typeface="Segoe UI"/>
+              </a:rPr>
+              <a:t>Staging con provenance: sst-5468__sst-5468.md, hub__STATUS.md, memory__x.md — cada nodo traza a su fuente.</a:t>
+            </a:r>
+            <a:r>
+              <a:rPr sz="1300" b="1">
+                <a:solidFill>
+                  <a:srgbClr val="D97757"/>
+                </a:solidFill>
+                <a:latin typeface="Segoe UI"/>
+              </a:rPr>
+              <a:t> ”</a:t>
+            </a:r>
+          </a:p>
+        </p:txBody>
+      </p:sp>
+    </p:spTree>
+  </p:cSld>
+  <p:clrMapOvr>
+    <a:masterClrMapping/>
+  </p:clrMapOvr>
+</p:sld>
+</file>
+
+<file path=ppt/slides/slide34.xml><?xml version="1.0" encoding="utf-8"?>
+<p:sld xmlns:a="http://schemas.openxmlformats.org/drawingml/2006/main" xmlns:p="http://schemas.openxmlformats.org/presentationml/2006/main" xmlns:r="http://schemas.openxmlformats.org/officeDocument/2006/relationships">
+  <p:cSld>
+    <p:spTree>
+      <p:nvGrpSpPr>
+        <p:cNvPr id="1" name=""/>
+        <p:cNvGrpSpPr/>
+        <p:nvPr/>
+      </p:nvGrpSpPr>
+      <p:grpSpPr/>
+      <p:sp>
+        <p:nvSpPr>
+          <p:cNvPr id="2" name="Rectangle 1"/>
+          <p:cNvSpPr/>
+          <p:nvPr/>
+        </p:nvSpPr>
+        <p:spPr>
+          <a:xfrm>
+            <a:off x="-91440" y="-91440"/>
+            <a:ext cx="12371832" cy="7040880"/>
+          </a:xfrm>
+          <a:prstGeom prst="rect">
+            <a:avLst/>
+          </a:prstGeom>
+          <a:solidFill>
+            <a:srgbClr val="0F141A"/>
+          </a:solidFill>
+          <a:ln>
+            <a:noFill/>
+          </a:ln>
+          <a:effectLst/>
+        </p:spPr>
+        <p:style>
+          <a:lnRef idx="1">
+            <a:schemeClr val="accent1"/>
+          </a:lnRef>
+          <a:fillRef idx="3">
+            <a:schemeClr val="accent1"/>
+          </a:fillRef>
+          <a:effectRef idx="2">
+            <a:schemeClr val="accent1"/>
+          </a:effectRef>
+          <a:fontRef idx="minor">
+            <a:schemeClr val="lt1"/>
+          </a:fontRef>
+        </p:style>
+        <p:txBody>
+          <a:bodyPr rtlCol="0" anchor="ctr"/>
+          <a:lstStyle/>
+          <a:p>
+            <a:pPr algn="ctr"/>
+          </a:p>
+        </p:txBody>
+      </p:sp>
+      <p:sp>
+        <p:nvSpPr>
+          <p:cNvPr id="3" name="Rectangle 2"/>
+          <p:cNvSpPr/>
+          <p:nvPr/>
+        </p:nvSpPr>
+        <p:spPr>
+          <a:xfrm>
+            <a:off x="0" y="0"/>
+            <a:ext cx="201168" cy="6858000"/>
+          </a:xfrm>
+          <a:prstGeom prst="rect">
+            <a:avLst/>
+          </a:prstGeom>
+          <a:solidFill>
+            <a:srgbClr val="D97757"/>
+          </a:solidFill>
+          <a:ln>
+            <a:noFill/>
+          </a:ln>
+          <a:effectLst/>
+        </p:spPr>
+        <p:style>
+          <a:lnRef idx="1">
+            <a:schemeClr val="accent1"/>
+          </a:lnRef>
+          <a:fillRef idx="3">
+            <a:schemeClr val="accent1"/>
+          </a:fillRef>
+          <a:effectRef idx="2">
+            <a:schemeClr val="accent1"/>
+          </a:effectRef>
+          <a:fontRef idx="minor">
+            <a:schemeClr val="lt1"/>
+          </a:fontRef>
+        </p:style>
+        <p:txBody>
+          <a:bodyPr rtlCol="0" anchor="ctr"/>
+          <a:lstStyle/>
+          <a:p>
+            <a:pPr algn="ctr"/>
+          </a:p>
+        </p:txBody>
+      </p:sp>
+      <p:sp>
+        <p:nvSpPr>
+          <p:cNvPr id="4" name="TextBox 3"/>
+          <p:cNvSpPr txBox="1"/>
+          <p:nvPr/>
+        </p:nvSpPr>
+        <p:spPr>
+          <a:xfrm>
+            <a:off x="640080" y="502920"/>
+            <a:ext cx="10058400" cy="365760"/>
           </a:xfrm>
           <a:prstGeom prst="rect">
             <a:avLst/>
@@ -38964,27 +38595,116 @@
               </a:spcAft>
             </a:pPr>
             <a:r>
-              <a:rPr sz="1250" b="1">
+              <a:rPr sz="1200" b="1">
+                <a:solidFill>
+                  <a:srgbClr val="D97757"/>
+                </a:solidFill>
+                <a:latin typeface="Segoe UI"/>
+              </a:rPr>
+              <a:t>PARTE 3 · 12C · GRAFO DE TICKETS</a:t>
+            </a:r>
+          </a:p>
+        </p:txBody>
+      </p:sp>
+      <p:sp>
+        <p:nvSpPr>
+          <p:cNvPr id="5" name="TextBox 4"/>
+          <p:cNvSpPr txBox="1"/>
+          <p:nvPr/>
+        </p:nvSpPr>
+        <p:spPr>
+          <a:xfrm>
+            <a:off x="621792" y="841248"/>
+            <a:ext cx="10972800" cy="1005840"/>
+          </a:xfrm>
+          <a:prstGeom prst="rect">
+            <a:avLst/>
+          </a:prstGeom>
+          <a:noFill/>
+        </p:spPr>
+        <p:txBody>
+          <a:bodyPr wrap="square" anchor="t" lIns="0" rIns="0" tIns="0" bIns="0">
+            <a:spAutoFit/>
+          </a:bodyPr>
+          <a:lstStyle/>
+          <a:p>
+            <a:pPr algn="l">
+              <a:lnSpc>
+                <a:spcPct val="100000"/>
+              </a:lnSpc>
+              <a:spcBef>
+                <a:spcPts val="0"/>
+              </a:spcBef>
+              <a:spcAft>
+                <a:spcPts val="400"/>
+              </a:spcAft>
+            </a:pPr>
+            <a:r>
+              <a:rPr sz="3000" b="1">
                 <a:solidFill>
                   <a:srgbClr val="E8EAED"/>
                 </a:solidFill>
                 <a:latin typeface="Segoe UI"/>
               </a:rPr>
-              <a:t>Contexto &amp; caching</a:t>
-            </a:r>
-          </a:p>
-        </p:txBody>
-      </p:sp>
-      <p:sp>
-        <p:nvSpPr>
-          <p:cNvPr id="19" name="TextBox 18"/>
-          <p:cNvSpPr txBox="1"/>
-          <p:nvPr/>
-        </p:nvSpPr>
-        <p:spPr>
-          <a:xfrm>
-            <a:off x="1371600" y="3410712"/>
-            <a:ext cx="4572000" cy="347472"/>
+              <a:t>El grafo real: 507 nodos, 35 comunidades</a:t>
+            </a:r>
+          </a:p>
+        </p:txBody>
+      </p:sp>
+      <p:sp>
+        <p:nvSpPr>
+          <p:cNvPr id="6" name="Rectangle 5"/>
+          <p:cNvSpPr/>
+          <p:nvPr/>
+        </p:nvSpPr>
+        <p:spPr>
+          <a:xfrm>
+            <a:off x="658368" y="1572768"/>
+            <a:ext cx="1005840" cy="41148"/>
+          </a:xfrm>
+          <a:prstGeom prst="rect">
+            <a:avLst/>
+          </a:prstGeom>
+          <a:solidFill>
+            <a:srgbClr val="D97757"/>
+          </a:solidFill>
+          <a:ln>
+            <a:noFill/>
+          </a:ln>
+          <a:effectLst/>
+        </p:spPr>
+        <p:style>
+          <a:lnRef idx="1">
+            <a:schemeClr val="accent1"/>
+          </a:lnRef>
+          <a:fillRef idx="3">
+            <a:schemeClr val="accent1"/>
+          </a:fillRef>
+          <a:effectRef idx="2">
+            <a:schemeClr val="accent1"/>
+          </a:effectRef>
+          <a:fontRef idx="minor">
+            <a:schemeClr val="lt1"/>
+          </a:fontRef>
+        </p:style>
+        <p:txBody>
+          <a:bodyPr rtlCol="0" anchor="ctr"/>
+          <a:lstStyle/>
+          <a:p>
+            <a:pPr algn="ctr"/>
+          </a:p>
+        </p:txBody>
+      </p:sp>
+      <p:sp>
+        <p:nvSpPr>
+          <p:cNvPr id="7" name="TextBox 6"/>
+          <p:cNvSpPr txBox="1"/>
+          <p:nvPr/>
+        </p:nvSpPr>
+        <p:spPr>
+          <a:xfrm>
+            <a:off x="640080" y="6419088"/>
+            <a:ext cx="7315200" cy="320040"/>
           </a:xfrm>
           <a:prstGeom prst="rect">
             <a:avLst/>
@@ -39009,31 +38729,144 @@
               </a:spcAft>
             </a:pPr>
             <a:r>
-              <a:rPr sz="1000" b="0">
-                <a:solidFill>
-                  <a:srgbClr val="9AA4B2"/>
-                </a:solidFill>
-                <a:latin typeface="Segoe UI"/>
-              </a:rPr>
-              <a:t>El presupuesto y el descuento: lean y estable gana en ambos.</a:t>
-            </a:r>
-          </a:p>
-        </p:txBody>
-      </p:sp>
-      <p:sp>
-        <p:nvSpPr>
-          <p:cNvPr id="20" name="Rounded Rectangle 19"/>
+              <a:rPr sz="950" b="0">
+                <a:solidFill>
+                  <a:srgbClr val="66707E"/>
+                </a:solidFill>
+                <a:latin typeface="Segoe UI"/>
+              </a:rPr>
+              <a:t>Claude Code · Curso / Workshop</a:t>
+            </a:r>
+          </a:p>
+        </p:txBody>
+      </p:sp>
+      <p:sp>
+        <p:nvSpPr>
+          <p:cNvPr id="8" name="TextBox 7"/>
+          <p:cNvSpPr txBox="1"/>
+          <p:nvPr/>
+        </p:nvSpPr>
+        <p:spPr>
+          <a:xfrm>
+            <a:off x="10789920" y="6419088"/>
+            <a:ext cx="1097280" cy="320040"/>
+          </a:xfrm>
+          <a:prstGeom prst="rect">
+            <a:avLst/>
+          </a:prstGeom>
+          <a:noFill/>
+        </p:spPr>
+        <p:txBody>
+          <a:bodyPr wrap="square" anchor="t" lIns="0" rIns="0" tIns="0" bIns="0">
+            <a:spAutoFit/>
+          </a:bodyPr>
+          <a:lstStyle/>
+          <a:p>
+            <a:pPr algn="r">
+              <a:lnSpc>
+                <a:spcPct val="100000"/>
+              </a:lnSpc>
+              <a:spcBef>
+                <a:spcPts val="0"/>
+              </a:spcBef>
+              <a:spcAft>
+                <a:spcPts val="400"/>
+              </a:spcAft>
+            </a:pPr>
+            <a:r>
+              <a:rPr sz="950" b="1">
+                <a:solidFill>
+                  <a:srgbClr val="66707E"/>
+                </a:solidFill>
+                <a:latin typeface="Segoe UI"/>
+              </a:rPr>
+              <a:t>34</a:t>
+            </a:r>
+          </a:p>
+        </p:txBody>
+      </p:sp>
+      <p:sp>
+        <p:nvSpPr>
+          <p:cNvPr id="9" name="Rectangle 8"/>
           <p:cNvSpPr/>
           <p:nvPr/>
         </p:nvSpPr>
         <p:spPr>
           <a:xfrm>
-            <a:off x="640080" y="3886200"/>
-            <a:ext cx="5349240" cy="777240"/>
+            <a:off x="621792" y="1764792"/>
+            <a:ext cx="8083296" cy="4562856"/>
+          </a:xfrm>
+          <a:prstGeom prst="rect">
+            <a:avLst/>
+          </a:prstGeom>
+          <a:noFill/>
+          <a:ln w="12700">
+            <a:solidFill>
+              <a:srgbClr val="2E3948"/>
+            </a:solidFill>
+          </a:ln>
+          <a:effectLst/>
+        </p:spPr>
+        <p:style>
+          <a:lnRef idx="1">
+            <a:schemeClr val="accent1"/>
+          </a:lnRef>
+          <a:fillRef idx="3">
+            <a:schemeClr val="accent1"/>
+          </a:fillRef>
+          <a:effectRef idx="2">
+            <a:schemeClr val="accent1"/>
+          </a:effectRef>
+          <a:fontRef idx="minor">
+            <a:schemeClr val="lt1"/>
+          </a:fontRef>
+        </p:style>
+        <p:txBody>
+          <a:bodyPr rtlCol="0" anchor="ctr"/>
+          <a:lstStyle/>
+          <a:p>
+            <a:pPr algn="ctr"/>
+          </a:p>
+        </p:txBody>
+      </p:sp>
+      <p:pic>
+        <p:nvPicPr>
+          <p:cNvPr id="10" name="Picture 9" descr="kg_graph.png"/>
+          <p:cNvPicPr>
+            <a:picLocks noChangeAspect="1"/>
+          </p:cNvPicPr>
+          <p:nvPr/>
+        </p:nvPicPr>
+        <p:blipFill>
+          <a:blip r:embed="rId2"/>
+          <a:stretch>
+            <a:fillRect/>
+          </a:stretch>
+        </p:blipFill>
+        <p:spPr>
+          <a:xfrm>
+            <a:off x="640080" y="1783080"/>
+            <a:ext cx="8046720" cy="4526280"/>
+          </a:xfrm>
+          <a:prstGeom prst="rect">
+            <a:avLst/>
+          </a:prstGeom>
+        </p:spPr>
+      </p:pic>
+      <p:sp>
+        <p:nvSpPr>
+          <p:cNvPr id="11" name="Rounded Rectangle 10"/>
+          <p:cNvSpPr/>
+          <p:nvPr/>
+        </p:nvSpPr>
+        <p:spPr>
+          <a:xfrm>
+            <a:off x="8869680" y="1783080"/>
+            <a:ext cx="2697480" cy="3108960"/>
           </a:xfrm>
           <a:prstGeom prst="roundRect">
             <a:avLst>
-              <a:gd name="adj" fmla="val 9000"/>
+              <a:gd name="adj" fmla="val 6000"/>
             </a:avLst>
           </a:prstGeom>
           <a:solidFill>
@@ -39070,18 +38903,356 @@
       </p:sp>
       <p:sp>
         <p:nvSpPr>
-          <p:cNvPr id="21" name="Rounded Rectangle 20"/>
+          <p:cNvPr id="12" name="TextBox 11"/>
+          <p:cNvSpPr txBox="1"/>
+          <p:nvPr/>
+        </p:nvSpPr>
+        <p:spPr>
+          <a:xfrm>
+            <a:off x="9144000" y="1984248"/>
+            <a:ext cx="2240280" cy="365760"/>
+          </a:xfrm>
+          <a:prstGeom prst="rect">
+            <a:avLst/>
+          </a:prstGeom>
+          <a:noFill/>
+        </p:spPr>
+        <p:txBody>
+          <a:bodyPr wrap="square" anchor="t" lIns="0" rIns="0" tIns="0" bIns="0">
+            <a:spAutoFit/>
+          </a:bodyPr>
+          <a:lstStyle/>
+          <a:p>
+            <a:pPr algn="l">
+              <a:lnSpc>
+                <a:spcPct val="100000"/>
+              </a:lnSpc>
+              <a:spcBef>
+                <a:spcPts val="0"/>
+              </a:spcBef>
+              <a:spcAft>
+                <a:spcPts val="400"/>
+              </a:spcAft>
+            </a:pPr>
+            <a:r>
+              <a:rPr sz="1400" b="1">
+                <a:solidFill>
+                  <a:srgbClr val="8CC28C"/>
+                </a:solidFill>
+                <a:latin typeface="Segoe UI"/>
+              </a:rPr>
+              <a:t>La salida real</a:t>
+            </a:r>
+          </a:p>
+        </p:txBody>
+      </p:sp>
+      <p:sp>
+        <p:nvSpPr>
+          <p:cNvPr id="13" name="TextBox 12"/>
+          <p:cNvSpPr txBox="1"/>
+          <p:nvPr/>
+        </p:nvSpPr>
+        <p:spPr>
+          <a:xfrm>
+            <a:off x="9144000" y="2441448"/>
+            <a:ext cx="2194560" cy="2286000"/>
+          </a:xfrm>
+          <a:prstGeom prst="rect">
+            <a:avLst/>
+          </a:prstGeom>
+          <a:noFill/>
+        </p:spPr>
+        <p:txBody>
+          <a:bodyPr wrap="square" anchor="t" lIns="0" rIns="0" tIns="0" bIns="0">
+            <a:spAutoFit/>
+          </a:bodyPr>
+          <a:lstStyle/>
+          <a:p>
+            <a:pPr algn="l">
+              <a:lnSpc>
+                <a:spcPct val="105000"/>
+              </a:lnSpc>
+              <a:spcBef>
+                <a:spcPts val="0"/>
+              </a:spcBef>
+              <a:spcAft>
+                <a:spcPts val="600"/>
+              </a:spcAft>
+            </a:pPr>
+            <a:r>
+              <a:rPr sz="1150" b="1">
+                <a:solidFill>
+                  <a:srgbClr val="8CC28C"/>
+                </a:solidFill>
+                <a:latin typeface="Segoe UI"/>
+              </a:rPr>
+              <a:t>▸  </a:t>
+            </a:r>
+            <a:r>
+              <a:rPr sz="1150" b="0">
+                <a:solidFill>
+                  <a:srgbClr val="E8EAED"/>
+                </a:solidFill>
+                <a:latin typeface="Segoe UI"/>
+              </a:rPr>
+              <a:t>507 nodos · 672 aristas</a:t>
+            </a:r>
+          </a:p>
+          <a:p>
+            <a:pPr algn="l">
+              <a:lnSpc>
+                <a:spcPct val="105000"/>
+              </a:lnSpc>
+              <a:spcBef>
+                <a:spcPts val="0"/>
+              </a:spcBef>
+              <a:spcAft>
+                <a:spcPts val="600"/>
+              </a:spcAft>
+            </a:pPr>
+            <a:r>
+              <a:rPr sz="1150" b="1">
+                <a:solidFill>
+                  <a:srgbClr val="8CC28C"/>
+                </a:solidFill>
+                <a:latin typeface="Segoe UI"/>
+              </a:rPr>
+              <a:t>▸  </a:t>
+            </a:r>
+            <a:r>
+              <a:rPr sz="1150" b="0">
+                <a:solidFill>
+                  <a:srgbClr val="E8EAED"/>
+                </a:solidFill>
+                <a:latin typeface="Segoe UI"/>
+              </a:rPr>
+              <a:t>35 comunidades</a:t>
+            </a:r>
+          </a:p>
+          <a:p>
+            <a:pPr algn="l">
+              <a:lnSpc>
+                <a:spcPct val="105000"/>
+              </a:lnSpc>
+              <a:spcBef>
+                <a:spcPts val="0"/>
+              </a:spcBef>
+              <a:spcAft>
+                <a:spcPts val="600"/>
+              </a:spcAft>
+            </a:pPr>
+            <a:r>
+              <a:rPr sz="1150" b="1">
+                <a:solidFill>
+                  <a:srgbClr val="8CC28C"/>
+                </a:solidFill>
+                <a:latin typeface="Segoe UI"/>
+              </a:rPr>
+              <a:t>▸  </a:t>
+            </a:r>
+            <a:r>
+              <a:rPr sz="1150" b="0">
+                <a:solidFill>
+                  <a:srgbClr val="E8EAED"/>
+                </a:solidFill>
+                <a:latin typeface="Segoe UI"/>
+              </a:rPr>
+              <a:t>92% EXTRACTED (fiable)</a:t>
+            </a:r>
+          </a:p>
+          <a:p>
+            <a:pPr algn="l">
+              <a:lnSpc>
+                <a:spcPct val="105000"/>
+              </a:lnSpc>
+              <a:spcBef>
+                <a:spcPts val="0"/>
+              </a:spcBef>
+              <a:spcAft>
+                <a:spcPts val="600"/>
+              </a:spcAft>
+            </a:pPr>
+            <a:r>
+              <a:rPr sz="1150" b="1">
+                <a:solidFill>
+                  <a:srgbClr val="8CC28C"/>
+                </a:solidFill>
+                <a:latin typeface="Segoe UI"/>
+              </a:rPr>
+              <a:t>▸  </a:t>
+            </a:r>
+            <a:r>
+              <a:rPr sz="1150" b="0">
+                <a:solidFill>
+                  <a:srgbClr val="E8EAED"/>
+                </a:solidFill>
+                <a:latin typeface="Segoe UI"/>
+              </a:rPr>
+              <a:t>7% INFERRED (conf. 0.7)</a:t>
+            </a:r>
+          </a:p>
+          <a:p>
+            <a:pPr algn="l">
+              <a:lnSpc>
+                <a:spcPct val="105000"/>
+              </a:lnSpc>
+              <a:spcBef>
+                <a:spcPts val="0"/>
+              </a:spcBef>
+              <a:spcAft>
+                <a:spcPts val="600"/>
+              </a:spcAft>
+            </a:pPr>
+            <a:r>
+              <a:rPr sz="1150" b="1">
+                <a:solidFill>
+                  <a:srgbClr val="8CC28C"/>
+                </a:solidFill>
+                <a:latin typeface="Segoe UI"/>
+              </a:rPr>
+              <a:t>▸  </a:t>
+            </a:r>
+            <a:r>
+              <a:rPr sz="1150" b="0">
+                <a:solidFill>
+                  <a:srgbClr val="E8EAED"/>
+                </a:solidFill>
+                <a:latin typeface="Segoe UI"/>
+              </a:rPr>
+              <a:t>116 ficheros, ~196k palabras</a:t>
+            </a:r>
+          </a:p>
+        </p:txBody>
+      </p:sp>
+      <p:sp>
+        <p:nvSpPr>
+          <p:cNvPr id="14" name="TextBox 13"/>
+          <p:cNvSpPr txBox="1"/>
+          <p:nvPr/>
+        </p:nvSpPr>
+        <p:spPr>
+          <a:xfrm>
+            <a:off x="8869680" y="5029200"/>
+            <a:ext cx="2697480" cy="1280160"/>
+          </a:xfrm>
+          <a:prstGeom prst="rect">
+            <a:avLst/>
+          </a:prstGeom>
+          <a:noFill/>
+        </p:spPr>
+        <p:txBody>
+          <a:bodyPr wrap="square" anchor="t" lIns="0" rIns="0" tIns="0" bIns="0">
+            <a:spAutoFit/>
+          </a:bodyPr>
+          <a:lstStyle/>
+          <a:p>
+            <a:pPr algn="l">
+              <a:lnSpc>
+                <a:spcPct val="105000"/>
+              </a:lnSpc>
+              <a:spcBef>
+                <a:spcPts val="0"/>
+              </a:spcBef>
+              <a:spcAft>
+                <a:spcPts val="400"/>
+              </a:spcAft>
+            </a:pPr>
+            <a:r>
+              <a:rPr sz="1100" b="1">
+                <a:solidFill>
+                  <a:srgbClr val="7AA2C7"/>
+                </a:solidFill>
+                <a:latin typeface="Segoe UI"/>
+              </a:rPr>
+              <a:t>graph.html interactivo:</a:t>
+            </a:r>
+          </a:p>
+          <a:p>
+            <a:pPr algn="l">
+              <a:lnSpc>
+                <a:spcPct val="105000"/>
+              </a:lnSpc>
+              <a:spcBef>
+                <a:spcPts val="0"/>
+              </a:spcBef>
+              <a:spcAft>
+                <a:spcPts val="400"/>
+              </a:spcAft>
+            </a:pPr>
+            <a:r>
+              <a:rPr sz="1000" b="0">
+                <a:solidFill>
+                  <a:srgbClr val="9AA4B2"/>
+                </a:solidFill>
+                <a:latin typeface="Segoe UI"/>
+              </a:rPr>
+              <a:t>búsqueda de nodos, panel de info, filtro por comunidad (vis-network).</a:t>
+            </a:r>
+          </a:p>
+        </p:txBody>
+      </p:sp>
+      <p:sp>
+        <p:nvSpPr>
+          <p:cNvPr id="15" name="Rounded Rectangle 14"/>
           <p:cNvSpPr/>
           <p:nvPr/>
         </p:nvSpPr>
         <p:spPr>
           <a:xfrm>
-            <a:off x="822960" y="4050791"/>
-            <a:ext cx="402336" cy="402336"/>
+            <a:off x="640080" y="5806440"/>
+            <a:ext cx="10927080" cy="475488"/>
           </a:xfrm>
           <a:prstGeom prst="roundRect">
             <a:avLst>
-              <a:gd name="adj" fmla="val 35000"/>
+              <a:gd name="adj" fmla="val 28000"/>
+            </a:avLst>
+          </a:prstGeom>
+          <a:solidFill>
+            <a:srgbClr val="222B38"/>
+          </a:solidFill>
+          <a:ln w="9525">
+            <a:solidFill>
+              <a:srgbClr val="2E3948"/>
+            </a:solidFill>
+          </a:ln>
+          <a:effectLst/>
+        </p:spPr>
+        <p:style>
+          <a:lnRef idx="1">
+            <a:schemeClr val="accent1"/>
+          </a:lnRef>
+          <a:fillRef idx="3">
+            <a:schemeClr val="accent1"/>
+          </a:fillRef>
+          <a:effectRef idx="2">
+            <a:schemeClr val="accent1"/>
+          </a:effectRef>
+          <a:fontRef idx="minor">
+            <a:schemeClr val="lt1"/>
+          </a:fontRef>
+        </p:style>
+        <p:txBody>
+          <a:bodyPr rtlCol="0" anchor="ctr"/>
+          <a:lstStyle/>
+          <a:p>
+            <a:pPr algn="ctr"/>
+          </a:p>
+        </p:txBody>
+      </p:sp>
+      <p:sp>
+        <p:nvSpPr>
+          <p:cNvPr id="16" name="Rounded Rectangle 15"/>
+          <p:cNvSpPr/>
+          <p:nvPr/>
+        </p:nvSpPr>
+        <p:spPr>
+          <a:xfrm>
+            <a:off x="640080" y="5806440"/>
+            <a:ext cx="82296" cy="475488"/>
+          </a:xfrm>
+          <a:prstGeom prst="roundRect">
+            <a:avLst>
+              <a:gd name="adj" fmla="val 50000"/>
             </a:avLst>
           </a:prstGeom>
           <a:solidFill>
@@ -39116,14 +39287,14 @@
       </p:sp>
       <p:sp>
         <p:nvSpPr>
-          <p:cNvPr id="22" name="TextBox 21"/>
-          <p:cNvSpPr txBox="1"/>
-          <p:nvPr/>
-        </p:nvSpPr>
-        <p:spPr>
-          <a:xfrm>
-            <a:off x="822960" y="4059936"/>
-            <a:ext cx="402336" cy="384048"/>
+          <p:cNvPr id="17" name="TextBox 16"/>
+          <p:cNvSpPr txBox="1"/>
+          <p:nvPr/>
+        </p:nvSpPr>
+        <p:spPr>
+          <a:xfrm>
+            <a:off x="868680" y="5833872"/>
+            <a:ext cx="10607040" cy="420624"/>
           </a:xfrm>
           <a:prstGeom prst="rect">
             <a:avLst/>
@@ -39136,7 +39307,7 @@
           </a:bodyPr>
           <a:lstStyle/>
           <a:p>
-            <a:pPr algn="ctr">
+            <a:pPr algn="l">
               <a:lnSpc>
                 <a:spcPct val="100000"/>
               </a:lnSpc>
@@ -39150,25 +39321,149 @@
             <a:r>
               <a:rPr sz="1300" b="1">
                 <a:solidFill>
-                  <a:srgbClr val="0F141A"/>
-                </a:solidFill>
-                <a:latin typeface="Segoe UI"/>
-              </a:rPr>
-              <a:t>3</a:t>
-            </a:r>
-          </a:p>
-        </p:txBody>
-      </p:sp>
-      <p:sp>
-        <p:nvSpPr>
-          <p:cNvPr id="23" name="TextBox 22"/>
-          <p:cNvSpPr txBox="1"/>
-          <p:nvPr/>
-        </p:nvSpPr>
-        <p:spPr>
-          <a:xfrm>
-            <a:off x="1371600" y="3977639"/>
-            <a:ext cx="4572000" cy="320040"/>
+                  <a:srgbClr val="D97757"/>
+                </a:solidFill>
+                <a:latin typeface="Segoe UI"/>
+              </a:rPr>
+              <a:t>“ </a:t>
+            </a:r>
+            <a:r>
+              <a:rPr sz="1250" b="0">
+                <a:solidFill>
+                  <a:srgbClr val="E8EAED"/>
+                </a:solidFill>
+                <a:latin typeface="Segoe UI"/>
+              </a:rPr>
+              <a:t>Las comunidades mapean a zonas de peligro reales; los god-nodes son la lista de onboarding gratis.</a:t>
+            </a:r>
+            <a:r>
+              <a:rPr sz="1300" b="1">
+                <a:solidFill>
+                  <a:srgbClr val="D97757"/>
+                </a:solidFill>
+                <a:latin typeface="Segoe UI"/>
+              </a:rPr>
+              <a:t> ”</a:t>
+            </a:r>
+          </a:p>
+        </p:txBody>
+      </p:sp>
+    </p:spTree>
+  </p:cSld>
+  <p:clrMapOvr>
+    <a:masterClrMapping/>
+  </p:clrMapOvr>
+</p:sld>
+</file>
+
+<file path=ppt/slides/slide35.xml><?xml version="1.0" encoding="utf-8"?>
+<p:sld xmlns:a="http://schemas.openxmlformats.org/drawingml/2006/main" xmlns:p="http://schemas.openxmlformats.org/presentationml/2006/main" xmlns:r="http://schemas.openxmlformats.org/officeDocument/2006/relationships">
+  <p:cSld>
+    <p:spTree>
+      <p:nvGrpSpPr>
+        <p:cNvPr id="1" name=""/>
+        <p:cNvGrpSpPr/>
+        <p:nvPr/>
+      </p:nvGrpSpPr>
+      <p:grpSpPr/>
+      <p:sp>
+        <p:nvSpPr>
+          <p:cNvPr id="2" name="Rectangle 1"/>
+          <p:cNvSpPr/>
+          <p:nvPr/>
+        </p:nvSpPr>
+        <p:spPr>
+          <a:xfrm>
+            <a:off x="-91440" y="-91440"/>
+            <a:ext cx="12371832" cy="7040880"/>
+          </a:xfrm>
+          <a:prstGeom prst="rect">
+            <a:avLst/>
+          </a:prstGeom>
+          <a:solidFill>
+            <a:srgbClr val="0F141A"/>
+          </a:solidFill>
+          <a:ln>
+            <a:noFill/>
+          </a:ln>
+          <a:effectLst/>
+        </p:spPr>
+        <p:style>
+          <a:lnRef idx="1">
+            <a:schemeClr val="accent1"/>
+          </a:lnRef>
+          <a:fillRef idx="3">
+            <a:schemeClr val="accent1"/>
+          </a:fillRef>
+          <a:effectRef idx="2">
+            <a:schemeClr val="accent1"/>
+          </a:effectRef>
+          <a:fontRef idx="minor">
+            <a:schemeClr val="lt1"/>
+          </a:fontRef>
+        </p:style>
+        <p:txBody>
+          <a:bodyPr rtlCol="0" anchor="ctr"/>
+          <a:lstStyle/>
+          <a:p>
+            <a:pPr algn="ctr"/>
+          </a:p>
+        </p:txBody>
+      </p:sp>
+      <p:sp>
+        <p:nvSpPr>
+          <p:cNvPr id="3" name="Rectangle 2"/>
+          <p:cNvSpPr/>
+          <p:nvPr/>
+        </p:nvSpPr>
+        <p:spPr>
+          <a:xfrm>
+            <a:off x="0" y="0"/>
+            <a:ext cx="201168" cy="6858000"/>
+          </a:xfrm>
+          <a:prstGeom prst="rect">
+            <a:avLst/>
+          </a:prstGeom>
+          <a:solidFill>
+            <a:srgbClr val="D97757"/>
+          </a:solidFill>
+          <a:ln>
+            <a:noFill/>
+          </a:ln>
+          <a:effectLst/>
+        </p:spPr>
+        <p:style>
+          <a:lnRef idx="1">
+            <a:schemeClr val="accent1"/>
+          </a:lnRef>
+          <a:fillRef idx="3">
+            <a:schemeClr val="accent1"/>
+          </a:fillRef>
+          <a:effectRef idx="2">
+            <a:schemeClr val="accent1"/>
+          </a:effectRef>
+          <a:fontRef idx="minor">
+            <a:schemeClr val="lt1"/>
+          </a:fontRef>
+        </p:style>
+        <p:txBody>
+          <a:bodyPr rtlCol="0" anchor="ctr"/>
+          <a:lstStyle/>
+          <a:p>
+            <a:pPr algn="ctr"/>
+          </a:p>
+        </p:txBody>
+      </p:sp>
+      <p:sp>
+        <p:nvSpPr>
+          <p:cNvPr id="4" name="TextBox 3"/>
+          <p:cNvSpPr txBox="1"/>
+          <p:nvPr/>
+        </p:nvSpPr>
+        <p:spPr>
+          <a:xfrm>
+            <a:off x="640080" y="502920"/>
+            <a:ext cx="10058400" cy="365760"/>
           </a:xfrm>
           <a:prstGeom prst="rect">
             <a:avLst/>
@@ -39193,27 +39488,116 @@
               </a:spcAft>
             </a:pPr>
             <a:r>
-              <a:rPr sz="1250" b="1">
+              <a:rPr sz="1200" b="1">
+                <a:solidFill>
+                  <a:srgbClr val="D97757"/>
+                </a:solidFill>
+                <a:latin typeface="Segoe UI"/>
+              </a:rPr>
+              <a:t>PARTE 3 · 12D · GRAFO DE TICKETS</a:t>
+            </a:r>
+          </a:p>
+        </p:txBody>
+      </p:sp>
+      <p:sp>
+        <p:nvSpPr>
+          <p:cNvPr id="5" name="TextBox 4"/>
+          <p:cNvSpPr txBox="1"/>
+          <p:nvPr/>
+        </p:nvSpPr>
+        <p:spPr>
+          <a:xfrm>
+            <a:off x="621792" y="841248"/>
+            <a:ext cx="10972800" cy="1005840"/>
+          </a:xfrm>
+          <a:prstGeom prst="rect">
+            <a:avLst/>
+          </a:prstGeom>
+          <a:noFill/>
+        </p:spPr>
+        <p:txBody>
+          <a:bodyPr wrap="square" anchor="t" lIns="0" rIns="0" tIns="0" bIns="0">
+            <a:spAutoFit/>
+          </a:bodyPr>
+          <a:lstStyle/>
+          <a:p>
+            <a:pPr algn="l">
+              <a:lnSpc>
+                <a:spcPct val="100000"/>
+              </a:lnSpc>
+              <a:spcBef>
+                <a:spcPts val="0"/>
+              </a:spcBef>
+              <a:spcAft>
+                <a:spcPts val="400"/>
+              </a:spcAft>
+            </a:pPr>
+            <a:r>
+              <a:rPr sz="3000" b="1">
                 <a:solidFill>
                   <a:srgbClr val="E8EAED"/>
                 </a:solidFill>
                 <a:latin typeface="Segoe UI"/>
               </a:rPr>
-              <a:t>MCP + skills + plugins</a:t>
-            </a:r>
-          </a:p>
-        </p:txBody>
-      </p:sp>
-      <p:sp>
-        <p:nvSpPr>
-          <p:cNvPr id="24" name="TextBox 23"/>
-          <p:cNvSpPr txBox="1"/>
-          <p:nvPr/>
-        </p:nvSpPr>
-        <p:spPr>
-          <a:xfrm>
-            <a:off x="1371600" y="4279392"/>
-            <a:ext cx="4572000" cy="347472"/>
+              <a:t>Cómo se usa — y dónde se engancha</a:t>
+            </a:r>
+          </a:p>
+        </p:txBody>
+      </p:sp>
+      <p:sp>
+        <p:nvSpPr>
+          <p:cNvPr id="6" name="Rectangle 5"/>
+          <p:cNvSpPr/>
+          <p:nvPr/>
+        </p:nvSpPr>
+        <p:spPr>
+          <a:xfrm>
+            <a:off x="658368" y="1572768"/>
+            <a:ext cx="1005840" cy="41148"/>
+          </a:xfrm>
+          <a:prstGeom prst="rect">
+            <a:avLst/>
+          </a:prstGeom>
+          <a:solidFill>
+            <a:srgbClr val="D97757"/>
+          </a:solidFill>
+          <a:ln>
+            <a:noFill/>
+          </a:ln>
+          <a:effectLst/>
+        </p:spPr>
+        <p:style>
+          <a:lnRef idx="1">
+            <a:schemeClr val="accent1"/>
+          </a:lnRef>
+          <a:fillRef idx="3">
+            <a:schemeClr val="accent1"/>
+          </a:fillRef>
+          <a:effectRef idx="2">
+            <a:schemeClr val="accent1"/>
+          </a:effectRef>
+          <a:fontRef idx="minor">
+            <a:schemeClr val="lt1"/>
+          </a:fontRef>
+        </p:style>
+        <p:txBody>
+          <a:bodyPr rtlCol="0" anchor="ctr"/>
+          <a:lstStyle/>
+          <a:p>
+            <a:pPr algn="ctr"/>
+          </a:p>
+        </p:txBody>
+      </p:sp>
+      <p:sp>
+        <p:nvSpPr>
+          <p:cNvPr id="7" name="TextBox 6"/>
+          <p:cNvSpPr txBox="1"/>
+          <p:nvPr/>
+        </p:nvSpPr>
+        <p:spPr>
+          <a:xfrm>
+            <a:off x="640080" y="6419088"/>
+            <a:ext cx="7315200" cy="320040"/>
           </a:xfrm>
           <a:prstGeom prst="rect">
             <a:avLst/>
@@ -39238,31 +39622,280 @@
               </a:spcAft>
             </a:pPr>
             <a:r>
-              <a:rPr sz="1000" b="0">
-                <a:solidFill>
-                  <a:srgbClr val="9AA4B2"/>
-                </a:solidFill>
-                <a:latin typeface="Segoe UI"/>
-              </a:rPr>
-              <a:t>Conecta tu mundo; empaqueta y distribuye flujos.</a:t>
-            </a:r>
-          </a:p>
-        </p:txBody>
-      </p:sp>
-      <p:sp>
-        <p:nvSpPr>
-          <p:cNvPr id="25" name="Rounded Rectangle 24"/>
+              <a:rPr sz="950" b="0">
+                <a:solidFill>
+                  <a:srgbClr val="66707E"/>
+                </a:solidFill>
+                <a:latin typeface="Segoe UI"/>
+              </a:rPr>
+              <a:t>Claude Code · Curso / Workshop</a:t>
+            </a:r>
+          </a:p>
+        </p:txBody>
+      </p:sp>
+      <p:sp>
+        <p:nvSpPr>
+          <p:cNvPr id="8" name="TextBox 7"/>
+          <p:cNvSpPr txBox="1"/>
+          <p:nvPr/>
+        </p:nvSpPr>
+        <p:spPr>
+          <a:xfrm>
+            <a:off x="10789920" y="6419088"/>
+            <a:ext cx="1097280" cy="320040"/>
+          </a:xfrm>
+          <a:prstGeom prst="rect">
+            <a:avLst/>
+          </a:prstGeom>
+          <a:noFill/>
+        </p:spPr>
+        <p:txBody>
+          <a:bodyPr wrap="square" anchor="t" lIns="0" rIns="0" tIns="0" bIns="0">
+            <a:spAutoFit/>
+          </a:bodyPr>
+          <a:lstStyle/>
+          <a:p>
+            <a:pPr algn="r">
+              <a:lnSpc>
+                <a:spcPct val="100000"/>
+              </a:lnSpc>
+              <a:spcBef>
+                <a:spcPts val="0"/>
+              </a:spcBef>
+              <a:spcAft>
+                <a:spcPts val="400"/>
+              </a:spcAft>
+            </a:pPr>
+            <a:r>
+              <a:rPr sz="950" b="1">
+                <a:solidFill>
+                  <a:srgbClr val="66707E"/>
+                </a:solidFill>
+                <a:latin typeface="Segoe UI"/>
+              </a:rPr>
+              <a:t>35</a:t>
+            </a:r>
+          </a:p>
+        </p:txBody>
+      </p:sp>
+      <p:sp>
+        <p:nvSpPr>
+          <p:cNvPr id="9" name="TextBox 8"/>
+          <p:cNvSpPr txBox="1"/>
+          <p:nvPr/>
+        </p:nvSpPr>
+        <p:spPr>
+          <a:xfrm>
+            <a:off x="640080" y="1746504"/>
+            <a:ext cx="5806440" cy="274320"/>
+          </a:xfrm>
+          <a:prstGeom prst="rect">
+            <a:avLst/>
+          </a:prstGeom>
+          <a:noFill/>
+        </p:spPr>
+        <p:txBody>
+          <a:bodyPr wrap="square" anchor="t" lIns="0" rIns="0" tIns="0" bIns="0">
+            <a:spAutoFit/>
+          </a:bodyPr>
+          <a:lstStyle/>
+          <a:p>
+            <a:pPr algn="l">
+              <a:lnSpc>
+                <a:spcPct val="100000"/>
+              </a:lnSpc>
+              <a:spcBef>
+                <a:spcPts val="0"/>
+              </a:spcBef>
+              <a:spcAft>
+                <a:spcPts val="400"/>
+              </a:spcAft>
+            </a:pPr>
+            <a:r>
+              <a:rPr sz="1100" b="1">
+                <a:solidFill>
+                  <a:srgbClr val="7AA2C7"/>
+                </a:solidFill>
+                <a:latin typeface="Segoe UI"/>
+              </a:rPr>
+              <a:t>Consulta: CERO LLM (kg_query.sh lee graph.json)</a:t>
+            </a:r>
+          </a:p>
+        </p:txBody>
+      </p:sp>
+      <p:sp>
+        <p:nvSpPr>
+          <p:cNvPr id="10" name="Rounded Rectangle 9"/>
           <p:cNvSpPr/>
           <p:nvPr/>
         </p:nvSpPr>
         <p:spPr>
           <a:xfrm>
-            <a:off x="640080" y="4754879"/>
-            <a:ext cx="5349240" cy="777240"/>
+            <a:off x="640080" y="2057400"/>
+            <a:ext cx="5806440" cy="1828800"/>
           </a:xfrm>
           <a:prstGeom prst="roundRect">
             <a:avLst>
-              <a:gd name="adj" fmla="val 9000"/>
+              <a:gd name="adj" fmla="val 5000"/>
+            </a:avLst>
+          </a:prstGeom>
+          <a:solidFill>
+            <a:srgbClr val="0A0E13"/>
+          </a:solidFill>
+          <a:ln w="9525">
+            <a:solidFill>
+              <a:srgbClr val="2E3948"/>
+            </a:solidFill>
+          </a:ln>
+          <a:effectLst/>
+        </p:spPr>
+        <p:style>
+          <a:lnRef idx="1">
+            <a:schemeClr val="accent1"/>
+          </a:lnRef>
+          <a:fillRef idx="3">
+            <a:schemeClr val="accent1"/>
+          </a:fillRef>
+          <a:effectRef idx="2">
+            <a:schemeClr val="accent1"/>
+          </a:effectRef>
+          <a:fontRef idx="minor">
+            <a:schemeClr val="lt1"/>
+          </a:fontRef>
+        </p:style>
+        <p:txBody>
+          <a:bodyPr rtlCol="0" anchor="ctr"/>
+          <a:lstStyle/>
+          <a:p>
+            <a:pPr algn="ctr"/>
+          </a:p>
+        </p:txBody>
+      </p:sp>
+      <p:sp>
+        <p:nvSpPr>
+          <p:cNvPr id="11" name="TextBox 10"/>
+          <p:cNvSpPr txBox="1"/>
+          <p:nvPr/>
+        </p:nvSpPr>
+        <p:spPr>
+          <a:xfrm>
+            <a:off x="896112" y="2240280"/>
+            <a:ext cx="5349240" cy="1508760"/>
+          </a:xfrm>
+          <a:prstGeom prst="rect">
+            <a:avLst/>
+          </a:prstGeom>
+          <a:noFill/>
+        </p:spPr>
+        <p:txBody>
+          <a:bodyPr wrap="square" anchor="t" lIns="0" rIns="0" tIns="0" bIns="0">
+            <a:spAutoFit/>
+          </a:bodyPr>
+          <a:lstStyle/>
+          <a:p>
+            <a:pPr algn="l">
+              <a:lnSpc>
+                <a:spcPct val="112000"/>
+              </a:lnSpc>
+              <a:spcBef>
+                <a:spcPts val="0"/>
+              </a:spcBef>
+              <a:spcAft>
+                <a:spcPts val="200"/>
+              </a:spcAft>
+            </a:pPr>
+            <a:r>
+              <a:rPr sz="1150" b="0">
+                <a:solidFill>
+                  <a:srgbClr val="E8EAED"/>
+                </a:solidFill>
+                <a:latin typeface="Consolas"/>
+              </a:rPr>
+              <a:t>/kg &lt;ticket|tema&gt;  # vecinos   (explain)</a:t>
+            </a:r>
+          </a:p>
+          <a:p>
+            <a:pPr algn="l">
+              <a:lnSpc>
+                <a:spcPct val="112000"/>
+              </a:lnSpc>
+              <a:spcBef>
+                <a:spcPts val="0"/>
+              </a:spcBef>
+              <a:spcAft>
+                <a:spcPts val="200"/>
+              </a:spcAft>
+            </a:pPr>
+            <a:r>
+              <a:rPr sz="1150" b="0">
+                <a:solidFill>
+                  <a:srgbClr val="E8EAED"/>
+                </a:solidFill>
+                <a:latin typeface="Consolas"/>
+              </a:rPr>
+              <a:t>/kg &lt;A&gt; &lt;B&gt;        # camino    (path)</a:t>
+            </a:r>
+          </a:p>
+          <a:p>
+            <a:pPr algn="l">
+              <a:lnSpc>
+                <a:spcPct val="112000"/>
+              </a:lnSpc>
+              <a:spcBef>
+                <a:spcPts val="0"/>
+              </a:spcBef>
+              <a:spcAft>
+                <a:spcPts val="200"/>
+              </a:spcAft>
+            </a:pPr>
+            <a:r>
+              <a:rPr sz="1150" b="0">
+                <a:solidFill>
+                  <a:srgbClr val="E8EAED"/>
+                </a:solidFill>
+                <a:latin typeface="Consolas"/>
+              </a:rPr>
+              <a:t>/kg find &lt;substr&gt;  # nombre exacto de nodo</a:t>
+            </a:r>
+          </a:p>
+          <a:p>
+            <a:pPr algn="l">
+              <a:lnSpc>
+                <a:spcPct val="112000"/>
+              </a:lnSpc>
+              <a:spcBef>
+                <a:spcPts val="0"/>
+              </a:spcBef>
+              <a:spcAft>
+                <a:spcPts val="200"/>
+              </a:spcAft>
+            </a:pPr>
+            <a:r>
+              <a:rPr sz="1150" b="0">
+                <a:solidFill>
+                  <a:srgbClr val="E8EAED"/>
+                </a:solidFill>
+                <a:latin typeface="Consolas"/>
+              </a:rPr>
+              <a:t>/kg-refresh        # reconstruir (barato)</a:t>
+            </a:r>
+          </a:p>
+        </p:txBody>
+      </p:sp>
+      <p:sp>
+        <p:nvSpPr>
+          <p:cNvPr id="12" name="Rounded Rectangle 11"/>
+          <p:cNvSpPr/>
+          <p:nvPr/>
+        </p:nvSpPr>
+        <p:spPr>
+          <a:xfrm>
+            <a:off x="6720840" y="1755648"/>
+            <a:ext cx="4846320" cy="2286000"/>
+          </a:xfrm>
+          <a:prstGeom prst="roundRect">
+            <a:avLst>
+              <a:gd name="adj" fmla="val 6000"/>
             </a:avLst>
           </a:prstGeom>
           <a:solidFill>
@@ -39299,244 +39932,264 @@
       </p:sp>
       <p:sp>
         <p:nvSpPr>
-          <p:cNvPr id="26" name="Rounded Rectangle 25"/>
+          <p:cNvPr id="13" name="TextBox 12"/>
+          <p:cNvSpPr txBox="1"/>
+          <p:nvPr/>
+        </p:nvSpPr>
+        <p:spPr>
+          <a:xfrm>
+            <a:off x="6995159" y="1956816"/>
+            <a:ext cx="4389120" cy="365760"/>
+          </a:xfrm>
+          <a:prstGeom prst="rect">
+            <a:avLst/>
+          </a:prstGeom>
+          <a:noFill/>
+        </p:spPr>
+        <p:txBody>
+          <a:bodyPr wrap="square" anchor="t" lIns="0" rIns="0" tIns="0" bIns="0">
+            <a:spAutoFit/>
+          </a:bodyPr>
+          <a:lstStyle/>
+          <a:p>
+            <a:pPr algn="l">
+              <a:lnSpc>
+                <a:spcPct val="100000"/>
+              </a:lnSpc>
+              <a:spcBef>
+                <a:spcPts val="0"/>
+              </a:spcBef>
+              <a:spcAft>
+                <a:spcPts val="400"/>
+              </a:spcAft>
+            </a:pPr>
+            <a:r>
+              <a:rPr sz="1400" b="1">
+                <a:solidFill>
+                  <a:srgbClr val="D97757"/>
+                </a:solidFill>
+                <a:latin typeface="Segoe UI"/>
+              </a:rPr>
+              <a:t>Dónde se engancha</a:t>
+            </a:r>
+          </a:p>
+        </p:txBody>
+      </p:sp>
+      <p:sp>
+        <p:nvSpPr>
+          <p:cNvPr id="14" name="TextBox 13"/>
+          <p:cNvSpPr txBox="1"/>
+          <p:nvPr/>
+        </p:nvSpPr>
+        <p:spPr>
+          <a:xfrm>
+            <a:off x="6995159" y="2414015"/>
+            <a:ext cx="4343400" cy="1463040"/>
+          </a:xfrm>
+          <a:prstGeom prst="rect">
+            <a:avLst/>
+          </a:prstGeom>
+          <a:noFill/>
+        </p:spPr>
+        <p:txBody>
+          <a:bodyPr wrap="square" anchor="t" lIns="0" rIns="0" tIns="0" bIns="0">
+            <a:spAutoFit/>
+          </a:bodyPr>
+          <a:lstStyle/>
+          <a:p>
+            <a:pPr algn="l">
+              <a:lnSpc>
+                <a:spcPct val="105000"/>
+              </a:lnSpc>
+              <a:spcBef>
+                <a:spcPts val="0"/>
+              </a:spcBef>
+              <a:spcAft>
+                <a:spcPts val="600"/>
+              </a:spcAft>
+            </a:pPr>
+            <a:r>
+              <a:rPr sz="1150" b="1">
+                <a:solidFill>
+                  <a:srgbClr val="D97757"/>
+                </a:solidFill>
+                <a:latin typeface="Segoe UI"/>
+              </a:rPr>
+              <a:t>▸  </a:t>
+            </a:r>
+            <a:r>
+              <a:rPr sz="1150" b="0">
+                <a:solidFill>
+                  <a:srgbClr val="E8EAED"/>
+                </a:solidFill>
+                <a:latin typeface="Segoe UI"/>
+              </a:rPr>
+              <a:t>Etapa 1 (Orientar) del flujo de 11 etapas</a:t>
+            </a:r>
+          </a:p>
+          <a:p>
+            <a:pPr algn="l">
+              <a:lnSpc>
+                <a:spcPct val="105000"/>
+              </a:lnSpc>
+              <a:spcBef>
+                <a:spcPts val="0"/>
+              </a:spcBef>
+              <a:spcAft>
+                <a:spcPts val="600"/>
+              </a:spcAft>
+            </a:pPr>
+            <a:r>
+              <a:rPr sz="1150" b="1">
+                <a:solidFill>
+                  <a:srgbClr val="D97757"/>
+                </a:solidFill>
+                <a:latin typeface="Segoe UI"/>
+              </a:rPr>
+              <a:t>▸  </a:t>
+            </a:r>
+            <a:r>
+              <a:rPr sz="1150" b="0">
+                <a:solidFill>
+                  <a:srgbClr val="E8EAED"/>
+                </a:solidFill>
+                <a:latin typeface="Segoe UI"/>
+              </a:rPr>
+              <a:t>Regla history-first del CLAUDE.md:</a:t>
+            </a:r>
+          </a:p>
+          <a:p>
+            <a:pPr algn="l">
+              <a:lnSpc>
+                <a:spcPct val="105000"/>
+              </a:lnSpc>
+              <a:spcBef>
+                <a:spcPts val="0"/>
+              </a:spcBef>
+              <a:spcAft>
+                <a:spcPts val="600"/>
+              </a:spcAft>
+            </a:pPr>
+            <a:r>
+              <a:rPr sz="1150" b="1">
+                <a:solidFill>
+                  <a:srgbClr val="D97757"/>
+                </a:solidFill>
+                <a:latin typeface="Segoe UI"/>
+              </a:rPr>
+              <a:t>▸  </a:t>
+            </a:r>
+            <a:r>
+              <a:rPr sz="1150" b="0">
+                <a:solidFill>
+                  <a:srgbClr val="E8EAED"/>
+                </a:solidFill>
+                <a:latin typeface="Segoe UI"/>
+              </a:rPr>
+              <a:t>/kg &lt;ticket|tema&gt; ANTES de grep</a:t>
+            </a:r>
+          </a:p>
+          <a:p>
+            <a:pPr algn="l">
+              <a:lnSpc>
+                <a:spcPct val="105000"/>
+              </a:lnSpc>
+              <a:spcBef>
+                <a:spcPts val="0"/>
+              </a:spcBef>
+              <a:spcAft>
+                <a:spcPts val="600"/>
+              </a:spcAft>
+            </a:pPr>
+            <a:r>
+              <a:rPr sz="1150" b="1">
+                <a:solidFill>
+                  <a:srgbClr val="D97757"/>
+                </a:solidFill>
+                <a:latin typeface="Segoe UI"/>
+              </a:rPr>
+              <a:t>▸  </a:t>
+            </a:r>
+            <a:r>
+              <a:rPr sz="1150" b="0">
+                <a:solidFill>
+                  <a:srgbClr val="E8EAED"/>
+                </a:solidFill>
+                <a:latin typeface="Segoe UI"/>
+              </a:rPr>
+              <a:t>Apunta a QUÉ leer; no lo sustituye</a:t>
+            </a:r>
+          </a:p>
+        </p:txBody>
+      </p:sp>
+      <p:sp>
+        <p:nvSpPr>
+          <p:cNvPr id="15" name="TextBox 14"/>
+          <p:cNvSpPr txBox="1"/>
+          <p:nvPr/>
+        </p:nvSpPr>
+        <p:spPr>
+          <a:xfrm>
+            <a:off x="640080" y="4069080"/>
+            <a:ext cx="5806440" cy="822960"/>
+          </a:xfrm>
+          <a:prstGeom prst="rect">
+            <a:avLst/>
+          </a:prstGeom>
+          <a:noFill/>
+        </p:spPr>
+        <p:txBody>
+          <a:bodyPr wrap="square" anchor="t" lIns="0" rIns="0" tIns="0" bIns="0">
+            <a:spAutoFit/>
+          </a:bodyPr>
+          <a:lstStyle/>
+          <a:p>
+            <a:pPr algn="l">
+              <a:lnSpc>
+                <a:spcPct val="110000"/>
+              </a:lnSpc>
+              <a:spcBef>
+                <a:spcPts val="0"/>
+              </a:spcBef>
+              <a:spcAft>
+                <a:spcPts val="400"/>
+              </a:spcAft>
+            </a:pPr>
+            <a:r>
+              <a:rPr sz="1200" b="1">
+                <a:solidFill>
+                  <a:srgbClr val="8CC28C"/>
+                </a:solidFill>
+                <a:latin typeface="Segoe UI"/>
+              </a:rPr>
+              <a:t>Ejemplo real: /kg get_letter_end </a:t>
+            </a:r>
+            <a:r>
+              <a:rPr sz="1150" b="0">
+                <a:solidFill>
+                  <a:srgbClr val="9AA4B2"/>
+                </a:solidFill>
+                <a:latin typeface="Segoe UI"/>
+              </a:rPr>
+              <a:t>→ la zona de peligro completa al instante: los 5-6 tickets que comparten ese código.</a:t>
+            </a:r>
+          </a:p>
+        </p:txBody>
+      </p:sp>
+      <p:sp>
+        <p:nvSpPr>
+          <p:cNvPr id="16" name="Rounded Rectangle 15"/>
           <p:cNvSpPr/>
           <p:nvPr/>
         </p:nvSpPr>
         <p:spPr>
           <a:xfrm>
-            <a:off x="822960" y="4919471"/>
-            <a:ext cx="402336" cy="402336"/>
+            <a:off x="640080" y="4754880"/>
+            <a:ext cx="10927080" cy="914400"/>
           </a:xfrm>
           <a:prstGeom prst="roundRect">
             <a:avLst>
-              <a:gd name="adj" fmla="val 35000"/>
-            </a:avLst>
-          </a:prstGeom>
-          <a:solidFill>
-            <a:srgbClr val="D97757"/>
-          </a:solidFill>
-          <a:ln>
-            <a:noFill/>
-          </a:ln>
-          <a:effectLst/>
-        </p:spPr>
-        <p:style>
-          <a:lnRef idx="1">
-            <a:schemeClr val="accent1"/>
-          </a:lnRef>
-          <a:fillRef idx="3">
-            <a:schemeClr val="accent1"/>
-          </a:fillRef>
-          <a:effectRef idx="2">
-            <a:schemeClr val="accent1"/>
-          </a:effectRef>
-          <a:fontRef idx="minor">
-            <a:schemeClr val="lt1"/>
-          </a:fontRef>
-        </p:style>
-        <p:txBody>
-          <a:bodyPr rtlCol="0" anchor="ctr"/>
-          <a:lstStyle/>
-          <a:p>
-            <a:pPr algn="ctr"/>
-          </a:p>
-        </p:txBody>
-      </p:sp>
-      <p:sp>
-        <p:nvSpPr>
-          <p:cNvPr id="27" name="TextBox 26"/>
-          <p:cNvSpPr txBox="1"/>
-          <p:nvPr/>
-        </p:nvSpPr>
-        <p:spPr>
-          <a:xfrm>
-            <a:off x="822960" y="4928616"/>
-            <a:ext cx="402336" cy="384048"/>
-          </a:xfrm>
-          <a:prstGeom prst="rect">
-            <a:avLst/>
-          </a:prstGeom>
-          <a:noFill/>
-        </p:spPr>
-        <p:txBody>
-          <a:bodyPr wrap="square" anchor="ctr" lIns="0" rIns="0" tIns="0" bIns="0">
-            <a:spAutoFit/>
-          </a:bodyPr>
-          <a:lstStyle/>
-          <a:p>
-            <a:pPr algn="ctr">
-              <a:lnSpc>
-                <a:spcPct val="100000"/>
-              </a:lnSpc>
-              <a:spcBef>
-                <a:spcPts val="0"/>
-              </a:spcBef>
-              <a:spcAft>
-                <a:spcPts val="400"/>
-              </a:spcAft>
-            </a:pPr>
-            <a:r>
-              <a:rPr sz="1300" b="1">
-                <a:solidFill>
-                  <a:srgbClr val="0F141A"/>
-                </a:solidFill>
-                <a:latin typeface="Segoe UI"/>
-              </a:rPr>
-              <a:t>4</a:t>
-            </a:r>
-          </a:p>
-        </p:txBody>
-      </p:sp>
-      <p:sp>
-        <p:nvSpPr>
-          <p:cNvPr id="28" name="TextBox 27"/>
-          <p:cNvSpPr txBox="1"/>
-          <p:nvPr/>
-        </p:nvSpPr>
-        <p:spPr>
-          <a:xfrm>
-            <a:off x="1371600" y="4846319"/>
-            <a:ext cx="4572000" cy="320040"/>
-          </a:xfrm>
-          <a:prstGeom prst="rect">
-            <a:avLst/>
-          </a:prstGeom>
-          <a:noFill/>
-        </p:spPr>
-        <p:txBody>
-          <a:bodyPr wrap="square" anchor="t" lIns="0" rIns="0" tIns="0" bIns="0">
-            <a:spAutoFit/>
-          </a:bodyPr>
-          <a:lstStyle/>
-          <a:p>
-            <a:pPr algn="l">
-              <a:lnSpc>
-                <a:spcPct val="100000"/>
-              </a:lnSpc>
-              <a:spcBef>
-                <a:spcPts val="0"/>
-              </a:spcBef>
-              <a:spcAft>
-                <a:spcPts val="400"/>
-              </a:spcAft>
-            </a:pPr>
-            <a:r>
-              <a:rPr sz="1250" b="1">
-                <a:solidFill>
-                  <a:srgbClr val="E8EAED"/>
-                </a:solidFill>
-                <a:latin typeface="Segoe UI"/>
-              </a:rPr>
-              <a:t>Subagents &amp; teams + automatización</a:t>
-            </a:r>
-          </a:p>
-        </p:txBody>
-      </p:sp>
-      <p:sp>
-        <p:nvSpPr>
-          <p:cNvPr id="29" name="TextBox 28"/>
-          <p:cNvSpPr txBox="1"/>
-          <p:nvPr/>
-        </p:nvSpPr>
-        <p:spPr>
-          <a:xfrm>
-            <a:off x="1371600" y="5148071"/>
-            <a:ext cx="4572000" cy="347472"/>
-          </a:xfrm>
-          <a:prstGeom prst="rect">
-            <a:avLst/>
-          </a:prstGeom>
-          <a:noFill/>
-        </p:spPr>
-        <p:txBody>
-          <a:bodyPr wrap="square" anchor="t" lIns="0" rIns="0" tIns="0" bIns="0">
-            <a:spAutoFit/>
-          </a:bodyPr>
-          <a:lstStyle/>
-          <a:p>
-            <a:pPr algn="l">
-              <a:lnSpc>
-                <a:spcPct val="100000"/>
-              </a:lnSpc>
-              <a:spcBef>
-                <a:spcPts val="0"/>
-              </a:spcBef>
-              <a:spcAft>
-                <a:spcPts val="400"/>
-              </a:spcAft>
-            </a:pPr>
-            <a:r>
-              <a:rPr sz="1000" b="0">
-                <a:solidFill>
-                  <a:srgbClr val="9AA4B2"/>
-                </a:solidFill>
-                <a:latin typeface="Segoe UI"/>
-              </a:rPr>
-              <a:t>Escala el trabajo; hooks que garantizan calidad.</a:t>
-            </a:r>
-          </a:p>
-        </p:txBody>
-      </p:sp>
-      <p:sp>
-        <p:nvSpPr>
-          <p:cNvPr id="30" name="TextBox 29"/>
-          <p:cNvSpPr txBox="1"/>
-          <p:nvPr/>
-        </p:nvSpPr>
-        <p:spPr>
-          <a:xfrm>
-            <a:off x="6217920" y="1783080"/>
-            <a:ext cx="5349240" cy="365760"/>
-          </a:xfrm>
-          <a:prstGeom prst="rect">
-            <a:avLst/>
-          </a:prstGeom>
-          <a:noFill/>
-        </p:spPr>
-        <p:txBody>
-          <a:bodyPr wrap="square" anchor="t" lIns="0" rIns="0" tIns="0" bIns="0">
-            <a:spAutoFit/>
-          </a:bodyPr>
-          <a:lstStyle/>
-          <a:p>
-            <a:pPr algn="l">
-              <a:lnSpc>
-                <a:spcPct val="100000"/>
-              </a:lnSpc>
-              <a:spcBef>
-                <a:spcPts val="0"/>
-              </a:spcBef>
-              <a:spcAft>
-                <a:spcPts val="400"/>
-              </a:spcAft>
-            </a:pPr>
-            <a:r>
-              <a:rPr sz="1300" b="1">
-                <a:solidFill>
-                  <a:srgbClr val="7AA2C7"/>
-                </a:solidFill>
-                <a:latin typeface="Segoe UI"/>
-              </a:rPr>
-              <a:t>PARTE 2 · el método</a:t>
-            </a:r>
-          </a:p>
-        </p:txBody>
-      </p:sp>
-      <p:sp>
-        <p:nvSpPr>
-          <p:cNvPr id="31" name="Rounded Rectangle 30"/>
-          <p:cNvSpPr/>
-          <p:nvPr/>
-        </p:nvSpPr>
-        <p:spPr>
-          <a:xfrm>
-            <a:off x="6217920" y="2148840"/>
-            <a:ext cx="5349240" cy="777240"/>
-          </a:xfrm>
-          <a:prstGeom prst="roundRect">
-            <a:avLst>
-              <a:gd name="adj" fmla="val 9000"/>
+              <a:gd name="adj" fmla="val 6000"/>
             </a:avLst>
           </a:prstGeom>
           <a:solidFill>
@@ -39573,22 +40226,169 @@
       </p:sp>
       <p:sp>
         <p:nvSpPr>
-          <p:cNvPr id="32" name="Rounded Rectangle 31"/>
+          <p:cNvPr id="17" name="TextBox 16"/>
+          <p:cNvSpPr txBox="1"/>
+          <p:nvPr/>
+        </p:nvSpPr>
+        <p:spPr>
+          <a:xfrm>
+            <a:off x="914400" y="4956048"/>
+            <a:ext cx="10469880" cy="365760"/>
+          </a:xfrm>
+          <a:prstGeom prst="rect">
+            <a:avLst/>
+          </a:prstGeom>
+          <a:noFill/>
+        </p:spPr>
+        <p:txBody>
+          <a:bodyPr wrap="square" anchor="t" lIns="0" rIns="0" tIns="0" bIns="0">
+            <a:spAutoFit/>
+          </a:bodyPr>
+          <a:lstStyle/>
+          <a:p>
+            <a:pPr algn="l">
+              <a:lnSpc>
+                <a:spcPct val="100000"/>
+              </a:lnSpc>
+              <a:spcBef>
+                <a:spcPts val="0"/>
+              </a:spcBef>
+              <a:spcAft>
+                <a:spcPts val="400"/>
+              </a:spcAft>
+            </a:pPr>
+            <a:r>
+              <a:rPr sz="1400" b="1">
+                <a:solidFill>
+                  <a:srgbClr val="7AA2C7"/>
+                </a:solidFill>
+                <a:latin typeface="Segoe UI"/>
+              </a:rPr>
+              <a:t>Honestidad y ciclo de vida</a:t>
+            </a:r>
+          </a:p>
+        </p:txBody>
+      </p:sp>
+      <p:sp>
+        <p:nvSpPr>
+          <p:cNvPr id="18" name="TextBox 17"/>
+          <p:cNvSpPr txBox="1"/>
+          <p:nvPr/>
+        </p:nvSpPr>
+        <p:spPr>
+          <a:xfrm>
+            <a:off x="914400" y="5413248"/>
+            <a:ext cx="10424159" cy="91439"/>
+          </a:xfrm>
+          <a:prstGeom prst="rect">
+            <a:avLst/>
+          </a:prstGeom>
+          <a:noFill/>
+        </p:spPr>
+        <p:txBody>
+          <a:bodyPr wrap="square" anchor="t" lIns="0" rIns="0" tIns="0" bIns="0">
+            <a:spAutoFit/>
+          </a:bodyPr>
+          <a:lstStyle/>
+          <a:p>
+            <a:pPr algn="l">
+              <a:lnSpc>
+                <a:spcPct val="105000"/>
+              </a:lnSpc>
+              <a:spcBef>
+                <a:spcPts val="0"/>
+              </a:spcBef>
+              <a:spcAft>
+                <a:spcPts val="600"/>
+              </a:spcAft>
+            </a:pPr>
+            <a:r>
+              <a:rPr sz="1150" b="1">
+                <a:solidFill>
+                  <a:srgbClr val="7AA2C7"/>
+                </a:solidFill>
+                <a:latin typeface="Segoe UI"/>
+              </a:rPr>
+              <a:t>▸  </a:t>
+            </a:r>
+            <a:r>
+              <a:rPr sz="1150" b="0">
+                <a:solidFill>
+                  <a:srgbClr val="E8EAED"/>
+                </a:solidFill>
+                <a:latin typeface="Segoe UI"/>
+              </a:rPr>
+              <a:t>Recall en zonas densas · EXTRACTED = fiable, INFERRED = pista · interno (data/) · derivado: nunca viaja, se reconstruye</a:t>
+            </a:r>
+          </a:p>
+        </p:txBody>
+      </p:sp>
+      <p:sp>
+        <p:nvSpPr>
+          <p:cNvPr id="19" name="Rounded Rectangle 18"/>
           <p:cNvSpPr/>
           <p:nvPr/>
         </p:nvSpPr>
         <p:spPr>
           <a:xfrm>
-            <a:off x="6400800" y="2313432"/>
-            <a:ext cx="402336" cy="402336"/>
+            <a:off x="640080" y="5806440"/>
+            <a:ext cx="10927080" cy="475488"/>
           </a:xfrm>
           <a:prstGeom prst="roundRect">
             <a:avLst>
-              <a:gd name="adj" fmla="val 35000"/>
+              <a:gd name="adj" fmla="val 28000"/>
             </a:avLst>
           </a:prstGeom>
           <a:solidFill>
-            <a:srgbClr val="7AA2C7"/>
+            <a:srgbClr val="222B38"/>
+          </a:solidFill>
+          <a:ln w="9525">
+            <a:solidFill>
+              <a:srgbClr val="2E3948"/>
+            </a:solidFill>
+          </a:ln>
+          <a:effectLst/>
+        </p:spPr>
+        <p:style>
+          <a:lnRef idx="1">
+            <a:schemeClr val="accent1"/>
+          </a:lnRef>
+          <a:fillRef idx="3">
+            <a:schemeClr val="accent1"/>
+          </a:fillRef>
+          <a:effectRef idx="2">
+            <a:schemeClr val="accent1"/>
+          </a:effectRef>
+          <a:fontRef idx="minor">
+            <a:schemeClr val="lt1"/>
+          </a:fontRef>
+        </p:style>
+        <p:txBody>
+          <a:bodyPr rtlCol="0" anchor="ctr"/>
+          <a:lstStyle/>
+          <a:p>
+            <a:pPr algn="ctr"/>
+          </a:p>
+        </p:txBody>
+      </p:sp>
+      <p:sp>
+        <p:nvSpPr>
+          <p:cNvPr id="20" name="Rounded Rectangle 19"/>
+          <p:cNvSpPr/>
+          <p:nvPr/>
+        </p:nvSpPr>
+        <p:spPr>
+          <a:xfrm>
+            <a:off x="640080" y="5806440"/>
+            <a:ext cx="82296" cy="475488"/>
+          </a:xfrm>
+          <a:prstGeom prst="roundRect">
+            <a:avLst>
+              <a:gd name="adj" fmla="val 50000"/>
+            </a:avLst>
+          </a:prstGeom>
+          <a:solidFill>
+            <a:srgbClr val="D97757"/>
           </a:solidFill>
           <a:ln>
             <a:noFill/>
@@ -39619,14 +40419,14 @@
       </p:sp>
       <p:sp>
         <p:nvSpPr>
-          <p:cNvPr id="33" name="TextBox 32"/>
-          <p:cNvSpPr txBox="1"/>
-          <p:nvPr/>
-        </p:nvSpPr>
-        <p:spPr>
-          <a:xfrm>
-            <a:off x="6400800" y="2322576"/>
-            <a:ext cx="402336" cy="384048"/>
+          <p:cNvPr id="21" name="TextBox 20"/>
+          <p:cNvSpPr txBox="1"/>
+          <p:nvPr/>
+        </p:nvSpPr>
+        <p:spPr>
+          <a:xfrm>
+            <a:off x="868680" y="5833872"/>
+            <a:ext cx="10607040" cy="420624"/>
           </a:xfrm>
           <a:prstGeom prst="rect">
             <a:avLst/>
@@ -39639,7 +40439,7 @@
           </a:bodyPr>
           <a:lstStyle/>
           <a:p>
-            <a:pPr algn="ctr">
+            <a:pPr algn="l">
               <a:lnSpc>
                 <a:spcPct val="100000"/>
               </a:lnSpc>
@@ -39653,25 +40453,149 @@
             <a:r>
               <a:rPr sz="1300" b="1">
                 <a:solidFill>
-                  <a:srgbClr val="0F141A"/>
-                </a:solidFill>
-                <a:latin typeface="Segoe UI"/>
-              </a:rPr>
-              <a:t>5</a:t>
-            </a:r>
-          </a:p>
-        </p:txBody>
-      </p:sp>
-      <p:sp>
-        <p:nvSpPr>
-          <p:cNvPr id="34" name="TextBox 33"/>
-          <p:cNvSpPr txBox="1"/>
-          <p:nvPr/>
-        </p:nvSpPr>
-        <p:spPr>
-          <a:xfrm>
-            <a:off x="6949440" y="2240280"/>
-            <a:ext cx="4572000" cy="320040"/>
+                  <a:srgbClr val="D97757"/>
+                </a:solidFill>
+                <a:latin typeface="Segoe UI"/>
+              </a:rPr>
+              <a:t>“ </a:t>
+            </a:r>
+            <a:r>
+              <a:rPr sz="1250" b="0">
+                <a:solidFill>
+                  <a:srgbClr val="E8EAED"/>
+                </a:solidFill>
+                <a:latin typeface="Segoe UI"/>
+              </a:rPr>
+              <a:t>Un paso semántico en el build, cero LLM en la consulta. El grafo es el mapa; el agente, el guía.</a:t>
+            </a:r>
+            <a:r>
+              <a:rPr sz="1300" b="1">
+                <a:solidFill>
+                  <a:srgbClr val="D97757"/>
+                </a:solidFill>
+                <a:latin typeface="Segoe UI"/>
+              </a:rPr>
+              <a:t> ”</a:t>
+            </a:r>
+          </a:p>
+        </p:txBody>
+      </p:sp>
+    </p:spTree>
+  </p:cSld>
+  <p:clrMapOvr>
+    <a:masterClrMapping/>
+  </p:clrMapOvr>
+</p:sld>
+</file>
+
+<file path=ppt/slides/slide36.xml><?xml version="1.0" encoding="utf-8"?>
+<p:sld xmlns:a="http://schemas.openxmlformats.org/drawingml/2006/main" xmlns:p="http://schemas.openxmlformats.org/presentationml/2006/main" xmlns:r="http://schemas.openxmlformats.org/officeDocument/2006/relationships">
+  <p:cSld>
+    <p:spTree>
+      <p:nvGrpSpPr>
+        <p:cNvPr id="1" name=""/>
+        <p:cNvGrpSpPr/>
+        <p:nvPr/>
+      </p:nvGrpSpPr>
+      <p:grpSpPr/>
+      <p:sp>
+        <p:nvSpPr>
+          <p:cNvPr id="2" name="Rectangle 1"/>
+          <p:cNvSpPr/>
+          <p:nvPr/>
+        </p:nvSpPr>
+        <p:spPr>
+          <a:xfrm>
+            <a:off x="-91440" y="-91440"/>
+            <a:ext cx="12371832" cy="7040880"/>
+          </a:xfrm>
+          <a:prstGeom prst="rect">
+            <a:avLst/>
+          </a:prstGeom>
+          <a:solidFill>
+            <a:srgbClr val="0F141A"/>
+          </a:solidFill>
+          <a:ln>
+            <a:noFill/>
+          </a:ln>
+          <a:effectLst/>
+        </p:spPr>
+        <p:style>
+          <a:lnRef idx="1">
+            <a:schemeClr val="accent1"/>
+          </a:lnRef>
+          <a:fillRef idx="3">
+            <a:schemeClr val="accent1"/>
+          </a:fillRef>
+          <a:effectRef idx="2">
+            <a:schemeClr val="accent1"/>
+          </a:effectRef>
+          <a:fontRef idx="minor">
+            <a:schemeClr val="lt1"/>
+          </a:fontRef>
+        </p:style>
+        <p:txBody>
+          <a:bodyPr rtlCol="0" anchor="ctr"/>
+          <a:lstStyle/>
+          <a:p>
+            <a:pPr algn="ctr"/>
+          </a:p>
+        </p:txBody>
+      </p:sp>
+      <p:sp>
+        <p:nvSpPr>
+          <p:cNvPr id="3" name="Rectangle 2"/>
+          <p:cNvSpPr/>
+          <p:nvPr/>
+        </p:nvSpPr>
+        <p:spPr>
+          <a:xfrm>
+            <a:off x="0" y="0"/>
+            <a:ext cx="201168" cy="6858000"/>
+          </a:xfrm>
+          <a:prstGeom prst="rect">
+            <a:avLst/>
+          </a:prstGeom>
+          <a:solidFill>
+            <a:srgbClr val="D97757"/>
+          </a:solidFill>
+          <a:ln>
+            <a:noFill/>
+          </a:ln>
+          <a:effectLst/>
+        </p:spPr>
+        <p:style>
+          <a:lnRef idx="1">
+            <a:schemeClr val="accent1"/>
+          </a:lnRef>
+          <a:fillRef idx="3">
+            <a:schemeClr val="accent1"/>
+          </a:fillRef>
+          <a:effectRef idx="2">
+            <a:schemeClr val="accent1"/>
+          </a:effectRef>
+          <a:fontRef idx="minor">
+            <a:schemeClr val="lt1"/>
+          </a:fontRef>
+        </p:style>
+        <p:txBody>
+          <a:bodyPr rtlCol="0" anchor="ctr"/>
+          <a:lstStyle/>
+          <a:p>
+            <a:pPr algn="ctr"/>
+          </a:p>
+        </p:txBody>
+      </p:sp>
+      <p:sp>
+        <p:nvSpPr>
+          <p:cNvPr id="4" name="TextBox 3"/>
+          <p:cNvSpPr txBox="1"/>
+          <p:nvPr/>
+        </p:nvSpPr>
+        <p:spPr>
+          <a:xfrm>
+            <a:off x="640080" y="502920"/>
+            <a:ext cx="10058400" cy="365760"/>
           </a:xfrm>
           <a:prstGeom prst="rect">
             <a:avLst/>
@@ -39696,27 +40620,116 @@
               </a:spcAft>
             </a:pPr>
             <a:r>
-              <a:rPr sz="1250" b="1">
+              <a:rPr sz="1200" b="1">
+                <a:solidFill>
+                  <a:srgbClr val="D97757"/>
+                </a:solidFill>
+                <a:latin typeface="Segoe UI"/>
+              </a:rPr>
+              <a:t>CIERRE</a:t>
+            </a:r>
+          </a:p>
+        </p:txBody>
+      </p:sp>
+      <p:sp>
+        <p:nvSpPr>
+          <p:cNvPr id="5" name="TextBox 4"/>
+          <p:cNvSpPr txBox="1"/>
+          <p:nvPr/>
+        </p:nvSpPr>
+        <p:spPr>
+          <a:xfrm>
+            <a:off x="621792" y="841248"/>
+            <a:ext cx="10972800" cy="1005840"/>
+          </a:xfrm>
+          <a:prstGeom prst="rect">
+            <a:avLst/>
+          </a:prstGeom>
+          <a:noFill/>
+        </p:spPr>
+        <p:txBody>
+          <a:bodyPr wrap="square" anchor="t" lIns="0" rIns="0" tIns="0" bIns="0">
+            <a:spAutoFit/>
+          </a:bodyPr>
+          <a:lstStyle/>
+          <a:p>
+            <a:pPr algn="l">
+              <a:lnSpc>
+                <a:spcPct val="100000"/>
+              </a:lnSpc>
+              <a:spcBef>
+                <a:spcPts val="0"/>
+              </a:spcBef>
+              <a:spcAft>
+                <a:spcPts val="400"/>
+              </a:spcAft>
+            </a:pPr>
+            <a:r>
+              <a:rPr sz="3000" b="1">
                 <a:solidFill>
                   <a:srgbClr val="E8EAED"/>
                 </a:solidFill>
                 <a:latin typeface="Segoe UI"/>
               </a:rPr>
-              <a:t>El flujo de 11 etapas</a:t>
-            </a:r>
-          </a:p>
-        </p:txBody>
-      </p:sp>
-      <p:sp>
-        <p:nvSpPr>
-          <p:cNvPr id="35" name="TextBox 34"/>
-          <p:cNvSpPr txBox="1"/>
-          <p:nvPr/>
-        </p:nvSpPr>
-        <p:spPr>
-          <a:xfrm>
-            <a:off x="6949440" y="2542032"/>
-            <a:ext cx="4572000" cy="347472"/>
+              <a:t>De asistente a sistema</a:t>
+            </a:r>
+          </a:p>
+        </p:txBody>
+      </p:sp>
+      <p:sp>
+        <p:nvSpPr>
+          <p:cNvPr id="6" name="Rectangle 5"/>
+          <p:cNvSpPr/>
+          <p:nvPr/>
+        </p:nvSpPr>
+        <p:spPr>
+          <a:xfrm>
+            <a:off x="658368" y="1572768"/>
+            <a:ext cx="1005840" cy="41148"/>
+          </a:xfrm>
+          <a:prstGeom prst="rect">
+            <a:avLst/>
+          </a:prstGeom>
+          <a:solidFill>
+            <a:srgbClr val="D97757"/>
+          </a:solidFill>
+          <a:ln>
+            <a:noFill/>
+          </a:ln>
+          <a:effectLst/>
+        </p:spPr>
+        <p:style>
+          <a:lnRef idx="1">
+            <a:schemeClr val="accent1"/>
+          </a:lnRef>
+          <a:fillRef idx="3">
+            <a:schemeClr val="accent1"/>
+          </a:fillRef>
+          <a:effectRef idx="2">
+            <a:schemeClr val="accent1"/>
+          </a:effectRef>
+          <a:fontRef idx="minor">
+            <a:schemeClr val="lt1"/>
+          </a:fontRef>
+        </p:style>
+        <p:txBody>
+          <a:bodyPr rtlCol="0" anchor="ctr"/>
+          <a:lstStyle/>
+          <a:p>
+            <a:pPr algn="ctr"/>
+          </a:p>
+        </p:txBody>
+      </p:sp>
+      <p:sp>
+        <p:nvSpPr>
+          <p:cNvPr id="7" name="TextBox 6"/>
+          <p:cNvSpPr txBox="1"/>
+          <p:nvPr/>
+        </p:nvSpPr>
+        <p:spPr>
+          <a:xfrm>
+            <a:off x="640080" y="6419088"/>
+            <a:ext cx="7315200" cy="320040"/>
           </a:xfrm>
           <a:prstGeom prst="rect">
             <a:avLst/>
@@ -39741,26 +40754,116 @@
               </a:spcAft>
             </a:pPr>
             <a:r>
-              <a:rPr sz="1000" b="0">
-                <a:solidFill>
-                  <a:srgbClr val="9AA4B2"/>
-                </a:solidFill>
-                <a:latin typeface="Segoe UI"/>
-              </a:rPr>
-              <a:t>Gates deterministas; el humano posee las decisiones.</a:t>
-            </a:r>
-          </a:p>
-        </p:txBody>
-      </p:sp>
-      <p:sp>
-        <p:nvSpPr>
-          <p:cNvPr id="36" name="Rounded Rectangle 35"/>
+              <a:rPr sz="950" b="0">
+                <a:solidFill>
+                  <a:srgbClr val="66707E"/>
+                </a:solidFill>
+                <a:latin typeface="Segoe UI"/>
+              </a:rPr>
+              <a:t>Claude Code · Curso / Workshop</a:t>
+            </a:r>
+          </a:p>
+        </p:txBody>
+      </p:sp>
+      <p:sp>
+        <p:nvSpPr>
+          <p:cNvPr id="8" name="TextBox 7"/>
+          <p:cNvSpPr txBox="1"/>
+          <p:nvPr/>
+        </p:nvSpPr>
+        <p:spPr>
+          <a:xfrm>
+            <a:off x="10789920" y="6419088"/>
+            <a:ext cx="1097280" cy="320040"/>
+          </a:xfrm>
+          <a:prstGeom prst="rect">
+            <a:avLst/>
+          </a:prstGeom>
+          <a:noFill/>
+        </p:spPr>
+        <p:txBody>
+          <a:bodyPr wrap="square" anchor="t" lIns="0" rIns="0" tIns="0" bIns="0">
+            <a:spAutoFit/>
+          </a:bodyPr>
+          <a:lstStyle/>
+          <a:p>
+            <a:pPr algn="r">
+              <a:lnSpc>
+                <a:spcPct val="100000"/>
+              </a:lnSpc>
+              <a:spcBef>
+                <a:spcPts val="0"/>
+              </a:spcBef>
+              <a:spcAft>
+                <a:spcPts val="400"/>
+              </a:spcAft>
+            </a:pPr>
+            <a:r>
+              <a:rPr sz="950" b="1">
+                <a:solidFill>
+                  <a:srgbClr val="66707E"/>
+                </a:solidFill>
+                <a:latin typeface="Segoe UI"/>
+              </a:rPr>
+              <a:t>36</a:t>
+            </a:r>
+          </a:p>
+        </p:txBody>
+      </p:sp>
+      <p:sp>
+        <p:nvSpPr>
+          <p:cNvPr id="9" name="TextBox 8"/>
+          <p:cNvSpPr txBox="1"/>
+          <p:nvPr/>
+        </p:nvSpPr>
+        <p:spPr>
+          <a:xfrm>
+            <a:off x="640080" y="1783080"/>
+            <a:ext cx="5349240" cy="365760"/>
+          </a:xfrm>
+          <a:prstGeom prst="rect">
+            <a:avLst/>
+          </a:prstGeom>
+          <a:noFill/>
+        </p:spPr>
+        <p:txBody>
+          <a:bodyPr wrap="square" anchor="t" lIns="0" rIns="0" tIns="0" bIns="0">
+            <a:spAutoFit/>
+          </a:bodyPr>
+          <a:lstStyle/>
+          <a:p>
+            <a:pPr algn="l">
+              <a:lnSpc>
+                <a:spcPct val="100000"/>
+              </a:lnSpc>
+              <a:spcBef>
+                <a:spcPts val="0"/>
+              </a:spcBef>
+              <a:spcAft>
+                <a:spcPts val="400"/>
+              </a:spcAft>
+            </a:pPr>
+            <a:r>
+              <a:rPr sz="1300" b="1">
+                <a:solidFill>
+                  <a:srgbClr val="D97757"/>
+                </a:solidFill>
+                <a:latin typeface="Segoe UI"/>
+              </a:rPr>
+              <a:t>PARTE 1 · la herramienta</a:t>
+            </a:r>
+          </a:p>
+        </p:txBody>
+      </p:sp>
+      <p:sp>
+        <p:nvSpPr>
+          <p:cNvPr id="10" name="Rounded Rectangle 9"/>
           <p:cNvSpPr/>
           <p:nvPr/>
         </p:nvSpPr>
         <p:spPr>
           <a:xfrm>
-            <a:off x="6217920" y="3017520"/>
+            <a:off x="640080" y="2148840"/>
             <a:ext cx="5349240" cy="777240"/>
           </a:xfrm>
           <a:prstGeom prst="roundRect">
@@ -39802,13 +40905,13 @@
       </p:sp>
       <p:sp>
         <p:nvSpPr>
-          <p:cNvPr id="37" name="Rounded Rectangle 36"/>
+          <p:cNvPr id="11" name="Rounded Rectangle 10"/>
           <p:cNvSpPr/>
           <p:nvPr/>
         </p:nvSpPr>
         <p:spPr>
           <a:xfrm>
-            <a:off x="6400800" y="3182112"/>
+            <a:off x="822960" y="2313432"/>
             <a:ext cx="402336" cy="402336"/>
           </a:xfrm>
           <a:prstGeom prst="roundRect">
@@ -39817,7 +40920,7 @@
             </a:avLst>
           </a:prstGeom>
           <a:solidFill>
-            <a:srgbClr val="7AA2C7"/>
+            <a:srgbClr val="D97757"/>
           </a:solidFill>
           <a:ln>
             <a:noFill/>
@@ -39848,13 +40951,13 @@
       </p:sp>
       <p:sp>
         <p:nvSpPr>
-          <p:cNvPr id="38" name="TextBox 37"/>
-          <p:cNvSpPr txBox="1"/>
-          <p:nvPr/>
-        </p:nvSpPr>
-        <p:spPr>
-          <a:xfrm>
-            <a:off x="6400800" y="3191256"/>
+          <p:cNvPr id="12" name="TextBox 11"/>
+          <p:cNvSpPr txBox="1"/>
+          <p:nvPr/>
+        </p:nvSpPr>
+        <p:spPr>
+          <a:xfrm>
+            <a:off x="822960" y="2322576"/>
             <a:ext cx="402336" cy="384048"/>
           </a:xfrm>
           <a:prstGeom prst="rect">
@@ -39886,20 +40989,20 @@
                 </a:solidFill>
                 <a:latin typeface="Segoe UI"/>
               </a:rPr>
-              <a:t>6</a:t>
-            </a:r>
-          </a:p>
-        </p:txBody>
-      </p:sp>
-      <p:sp>
-        <p:nvSpPr>
-          <p:cNvPr id="39" name="TextBox 38"/>
-          <p:cNvSpPr txBox="1"/>
-          <p:nvPr/>
-        </p:nvSpPr>
-        <p:spPr>
-          <a:xfrm>
-            <a:off x="6949440" y="3108960"/>
+              <a:t>1</a:t>
+            </a:r>
+          </a:p>
+        </p:txBody>
+      </p:sp>
+      <p:sp>
+        <p:nvSpPr>
+          <p:cNvPr id="13" name="TextBox 12"/>
+          <p:cNvSpPr txBox="1"/>
+          <p:nvPr/>
+        </p:nvSpPr>
+        <p:spPr>
+          <a:xfrm>
+            <a:off x="1371600" y="2240280"/>
             <a:ext cx="4572000" cy="320040"/>
           </a:xfrm>
           <a:prstGeom prst="rect">
@@ -39931,20 +41034,20 @@
                 </a:solidFill>
                 <a:latin typeface="Segoe UI"/>
               </a:rPr>
-              <a:t>Las tools del método</a:t>
-            </a:r>
-          </a:p>
-        </p:txBody>
-      </p:sp>
-      <p:sp>
-        <p:nvSpPr>
-          <p:cNvPr id="40" name="TextBox 39"/>
-          <p:cNvSpPr txBox="1"/>
-          <p:nvPr/>
-        </p:nvSpPr>
-        <p:spPr>
-          <a:xfrm>
-            <a:off x="6949440" y="3410712"/>
+              <a:t>Instalar + memoria</a:t>
+            </a:r>
+          </a:p>
+        </p:txBody>
+      </p:sp>
+      <p:sp>
+        <p:nvSpPr>
+          <p:cNvPr id="14" name="TextBox 13"/>
+          <p:cNvSpPr txBox="1"/>
+          <p:nvPr/>
+        </p:nvSpPr>
+        <p:spPr>
+          <a:xfrm>
+            <a:off x="1371600" y="2542032"/>
             <a:ext cx="4572000" cy="347472"/>
           </a:xfrm>
           <a:prstGeom prst="rect">
@@ -39976,20 +41079,20 @@
                 </a:solidFill>
                 <a:latin typeface="Segoe UI"/>
               </a:rPr>
-              <a:t>CodeGraph · Serena · GSD · /kg: barato→caro, determinista→LLM.</a:t>
-            </a:r>
-          </a:p>
-        </p:txBody>
-      </p:sp>
-      <p:sp>
-        <p:nvSpPr>
-          <p:cNvPr id="41" name="Rounded Rectangle 40"/>
+              <a:t>Una línea; CLAUDE.md de dos niveles; sesiones que viajan.</a:t>
+            </a:r>
+          </a:p>
+        </p:txBody>
+      </p:sp>
+      <p:sp>
+        <p:nvSpPr>
+          <p:cNvPr id="15" name="Rounded Rectangle 14"/>
           <p:cNvSpPr/>
           <p:nvPr/>
         </p:nvSpPr>
         <p:spPr>
           <a:xfrm>
-            <a:off x="6217920" y="3886200"/>
+            <a:off x="640080" y="3017520"/>
             <a:ext cx="5349240" cy="777240"/>
           </a:xfrm>
           <a:prstGeom prst="roundRect">
@@ -40031,13 +41134,13 @@
       </p:sp>
       <p:sp>
         <p:nvSpPr>
-          <p:cNvPr id="42" name="Rounded Rectangle 41"/>
+          <p:cNvPr id="16" name="Rounded Rectangle 15"/>
           <p:cNvSpPr/>
           <p:nvPr/>
         </p:nvSpPr>
         <p:spPr>
           <a:xfrm>
-            <a:off x="6400800" y="4050791"/>
+            <a:off x="822960" y="3182112"/>
             <a:ext cx="402336" cy="402336"/>
           </a:xfrm>
           <a:prstGeom prst="roundRect">
@@ -40046,7 +41149,7 @@
             </a:avLst>
           </a:prstGeom>
           <a:solidFill>
-            <a:srgbClr val="7AA2C7"/>
+            <a:srgbClr val="D97757"/>
           </a:solidFill>
           <a:ln>
             <a:noFill/>
@@ -40077,13 +41180,13 @@
       </p:sp>
       <p:sp>
         <p:nvSpPr>
-          <p:cNvPr id="43" name="TextBox 42"/>
-          <p:cNvSpPr txBox="1"/>
-          <p:nvPr/>
-        </p:nvSpPr>
-        <p:spPr>
-          <a:xfrm>
-            <a:off x="6400800" y="4059936"/>
+          <p:cNvPr id="17" name="TextBox 16"/>
+          <p:cNvSpPr txBox="1"/>
+          <p:nvPr/>
+        </p:nvSpPr>
+        <p:spPr>
+          <a:xfrm>
+            <a:off x="822960" y="3191256"/>
             <a:ext cx="402336" cy="384048"/>
           </a:xfrm>
           <a:prstGeom prst="rect">
@@ -40115,20 +41218,20 @@
                 </a:solidFill>
                 <a:latin typeface="Segoe UI"/>
               </a:rPr>
-              <a:t>7</a:t>
-            </a:r>
-          </a:p>
-        </p:txBody>
-      </p:sp>
-      <p:sp>
-        <p:nvSpPr>
-          <p:cNvPr id="44" name="TextBox 43"/>
-          <p:cNvSpPr txBox="1"/>
-          <p:nvPr/>
-        </p:nvSpPr>
-        <p:spPr>
-          <a:xfrm>
-            <a:off x="6949440" y="3977639"/>
+              <a:t>2</a:t>
+            </a:r>
+          </a:p>
+        </p:txBody>
+      </p:sp>
+      <p:sp>
+        <p:nvSpPr>
+          <p:cNvPr id="18" name="TextBox 17"/>
+          <p:cNvSpPr txBox="1"/>
+          <p:nvPr/>
+        </p:nvSpPr>
+        <p:spPr>
+          <a:xfrm>
+            <a:off x="1371600" y="3108960"/>
             <a:ext cx="4572000" cy="320040"/>
           </a:xfrm>
           <a:prstGeom prst="rect">
@@ -40160,20 +41263,20 @@
                 </a:solidFill>
                 <a:latin typeface="Segoe UI"/>
               </a:rPr>
-              <a:t>Transferible</a:t>
-            </a:r>
-          </a:p>
-        </p:txBody>
-      </p:sp>
-      <p:sp>
-        <p:nvSpPr>
-          <p:cNvPr id="45" name="TextBox 44"/>
-          <p:cNvSpPr txBox="1"/>
-          <p:nvPr/>
-        </p:nvSpPr>
-        <p:spPr>
-          <a:xfrm>
-            <a:off x="6949440" y="4279392"/>
+              <a:t>Contexto &amp; caching</a:t>
+            </a:r>
+          </a:p>
+        </p:txBody>
+      </p:sp>
+      <p:sp>
+        <p:nvSpPr>
+          <p:cNvPr id="19" name="TextBox 18"/>
+          <p:cNvSpPr txBox="1"/>
+          <p:nvPr/>
+        </p:nvSpPr>
+        <p:spPr>
+          <a:xfrm>
+            <a:off x="1371600" y="3410712"/>
             <a:ext cx="4572000" cy="347472"/>
           </a:xfrm>
           <a:prstGeom prst="rect">
@@ -40205,20 +41308,20 @@
                 </a:solidFill>
                 <a:latin typeface="Segoe UI"/>
               </a:rPr>
-              <a:t>Starter-kit probado en GitHub Copilot: la disciplina viaja.</a:t>
-            </a:r>
-          </a:p>
-        </p:txBody>
-      </p:sp>
-      <p:sp>
-        <p:nvSpPr>
-          <p:cNvPr id="46" name="Rounded Rectangle 45"/>
+              <a:t>El presupuesto y el descuento: lean y estable gana en ambos.</a:t>
+            </a:r>
+          </a:p>
+        </p:txBody>
+      </p:sp>
+      <p:sp>
+        <p:nvSpPr>
+          <p:cNvPr id="20" name="Rounded Rectangle 19"/>
           <p:cNvSpPr/>
           <p:nvPr/>
         </p:nvSpPr>
         <p:spPr>
           <a:xfrm>
-            <a:off x="6217920" y="4754879"/>
+            <a:off x="640080" y="3886200"/>
             <a:ext cx="5349240" cy="777240"/>
           </a:xfrm>
           <a:prstGeom prst="roundRect">
@@ -40260,13 +41363,516 @@
       </p:sp>
       <p:sp>
         <p:nvSpPr>
-          <p:cNvPr id="47" name="Rounded Rectangle 46"/>
+          <p:cNvPr id="21" name="Rounded Rectangle 20"/>
           <p:cNvSpPr/>
           <p:nvPr/>
         </p:nvSpPr>
         <p:spPr>
           <a:xfrm>
-            <a:off x="6400800" y="4919471"/>
+            <a:off x="822960" y="4050791"/>
+            <a:ext cx="402336" cy="402336"/>
+          </a:xfrm>
+          <a:prstGeom prst="roundRect">
+            <a:avLst>
+              <a:gd name="adj" fmla="val 35000"/>
+            </a:avLst>
+          </a:prstGeom>
+          <a:solidFill>
+            <a:srgbClr val="D97757"/>
+          </a:solidFill>
+          <a:ln>
+            <a:noFill/>
+          </a:ln>
+          <a:effectLst/>
+        </p:spPr>
+        <p:style>
+          <a:lnRef idx="1">
+            <a:schemeClr val="accent1"/>
+          </a:lnRef>
+          <a:fillRef idx="3">
+            <a:schemeClr val="accent1"/>
+          </a:fillRef>
+          <a:effectRef idx="2">
+            <a:schemeClr val="accent1"/>
+          </a:effectRef>
+          <a:fontRef idx="minor">
+            <a:schemeClr val="lt1"/>
+          </a:fontRef>
+        </p:style>
+        <p:txBody>
+          <a:bodyPr rtlCol="0" anchor="ctr"/>
+          <a:lstStyle/>
+          <a:p>
+            <a:pPr algn="ctr"/>
+          </a:p>
+        </p:txBody>
+      </p:sp>
+      <p:sp>
+        <p:nvSpPr>
+          <p:cNvPr id="22" name="TextBox 21"/>
+          <p:cNvSpPr txBox="1"/>
+          <p:nvPr/>
+        </p:nvSpPr>
+        <p:spPr>
+          <a:xfrm>
+            <a:off x="822960" y="4059936"/>
+            <a:ext cx="402336" cy="384048"/>
+          </a:xfrm>
+          <a:prstGeom prst="rect">
+            <a:avLst/>
+          </a:prstGeom>
+          <a:noFill/>
+        </p:spPr>
+        <p:txBody>
+          <a:bodyPr wrap="square" anchor="ctr" lIns="0" rIns="0" tIns="0" bIns="0">
+            <a:spAutoFit/>
+          </a:bodyPr>
+          <a:lstStyle/>
+          <a:p>
+            <a:pPr algn="ctr">
+              <a:lnSpc>
+                <a:spcPct val="100000"/>
+              </a:lnSpc>
+              <a:spcBef>
+                <a:spcPts val="0"/>
+              </a:spcBef>
+              <a:spcAft>
+                <a:spcPts val="400"/>
+              </a:spcAft>
+            </a:pPr>
+            <a:r>
+              <a:rPr sz="1300" b="1">
+                <a:solidFill>
+                  <a:srgbClr val="0F141A"/>
+                </a:solidFill>
+                <a:latin typeface="Segoe UI"/>
+              </a:rPr>
+              <a:t>3</a:t>
+            </a:r>
+          </a:p>
+        </p:txBody>
+      </p:sp>
+      <p:sp>
+        <p:nvSpPr>
+          <p:cNvPr id="23" name="TextBox 22"/>
+          <p:cNvSpPr txBox="1"/>
+          <p:nvPr/>
+        </p:nvSpPr>
+        <p:spPr>
+          <a:xfrm>
+            <a:off x="1371600" y="3977639"/>
+            <a:ext cx="4572000" cy="320040"/>
+          </a:xfrm>
+          <a:prstGeom prst="rect">
+            <a:avLst/>
+          </a:prstGeom>
+          <a:noFill/>
+        </p:spPr>
+        <p:txBody>
+          <a:bodyPr wrap="square" anchor="t" lIns="0" rIns="0" tIns="0" bIns="0">
+            <a:spAutoFit/>
+          </a:bodyPr>
+          <a:lstStyle/>
+          <a:p>
+            <a:pPr algn="l">
+              <a:lnSpc>
+                <a:spcPct val="100000"/>
+              </a:lnSpc>
+              <a:spcBef>
+                <a:spcPts val="0"/>
+              </a:spcBef>
+              <a:spcAft>
+                <a:spcPts val="400"/>
+              </a:spcAft>
+            </a:pPr>
+            <a:r>
+              <a:rPr sz="1250" b="1">
+                <a:solidFill>
+                  <a:srgbClr val="E8EAED"/>
+                </a:solidFill>
+                <a:latin typeface="Segoe UI"/>
+              </a:rPr>
+              <a:t>MCP + skills + plugins</a:t>
+            </a:r>
+          </a:p>
+        </p:txBody>
+      </p:sp>
+      <p:sp>
+        <p:nvSpPr>
+          <p:cNvPr id="24" name="TextBox 23"/>
+          <p:cNvSpPr txBox="1"/>
+          <p:nvPr/>
+        </p:nvSpPr>
+        <p:spPr>
+          <a:xfrm>
+            <a:off x="1371600" y="4279392"/>
+            <a:ext cx="4572000" cy="347472"/>
+          </a:xfrm>
+          <a:prstGeom prst="rect">
+            <a:avLst/>
+          </a:prstGeom>
+          <a:noFill/>
+        </p:spPr>
+        <p:txBody>
+          <a:bodyPr wrap="square" anchor="t" lIns="0" rIns="0" tIns="0" bIns="0">
+            <a:spAutoFit/>
+          </a:bodyPr>
+          <a:lstStyle/>
+          <a:p>
+            <a:pPr algn="l">
+              <a:lnSpc>
+                <a:spcPct val="100000"/>
+              </a:lnSpc>
+              <a:spcBef>
+                <a:spcPts val="0"/>
+              </a:spcBef>
+              <a:spcAft>
+                <a:spcPts val="400"/>
+              </a:spcAft>
+            </a:pPr>
+            <a:r>
+              <a:rPr sz="1000" b="0">
+                <a:solidFill>
+                  <a:srgbClr val="9AA4B2"/>
+                </a:solidFill>
+                <a:latin typeface="Segoe UI"/>
+              </a:rPr>
+              <a:t>Conecta tu mundo; empaqueta y distribuye flujos.</a:t>
+            </a:r>
+          </a:p>
+        </p:txBody>
+      </p:sp>
+      <p:sp>
+        <p:nvSpPr>
+          <p:cNvPr id="25" name="Rounded Rectangle 24"/>
+          <p:cNvSpPr/>
+          <p:nvPr/>
+        </p:nvSpPr>
+        <p:spPr>
+          <a:xfrm>
+            <a:off x="640080" y="4754879"/>
+            <a:ext cx="5349240" cy="777240"/>
+          </a:xfrm>
+          <a:prstGeom prst="roundRect">
+            <a:avLst>
+              <a:gd name="adj" fmla="val 9000"/>
+            </a:avLst>
+          </a:prstGeom>
+          <a:solidFill>
+            <a:srgbClr val="1A212B"/>
+          </a:solidFill>
+          <a:ln w="9525">
+            <a:solidFill>
+              <a:srgbClr val="2E3948"/>
+            </a:solidFill>
+          </a:ln>
+          <a:effectLst/>
+        </p:spPr>
+        <p:style>
+          <a:lnRef idx="1">
+            <a:schemeClr val="accent1"/>
+          </a:lnRef>
+          <a:fillRef idx="3">
+            <a:schemeClr val="accent1"/>
+          </a:fillRef>
+          <a:effectRef idx="2">
+            <a:schemeClr val="accent1"/>
+          </a:effectRef>
+          <a:fontRef idx="minor">
+            <a:schemeClr val="lt1"/>
+          </a:fontRef>
+        </p:style>
+        <p:txBody>
+          <a:bodyPr rtlCol="0" anchor="ctr"/>
+          <a:lstStyle/>
+          <a:p>
+            <a:pPr algn="ctr"/>
+          </a:p>
+        </p:txBody>
+      </p:sp>
+      <p:sp>
+        <p:nvSpPr>
+          <p:cNvPr id="26" name="Rounded Rectangle 25"/>
+          <p:cNvSpPr/>
+          <p:nvPr/>
+        </p:nvSpPr>
+        <p:spPr>
+          <a:xfrm>
+            <a:off x="822960" y="4919471"/>
+            <a:ext cx="402336" cy="402336"/>
+          </a:xfrm>
+          <a:prstGeom prst="roundRect">
+            <a:avLst>
+              <a:gd name="adj" fmla="val 35000"/>
+            </a:avLst>
+          </a:prstGeom>
+          <a:solidFill>
+            <a:srgbClr val="D97757"/>
+          </a:solidFill>
+          <a:ln>
+            <a:noFill/>
+          </a:ln>
+          <a:effectLst/>
+        </p:spPr>
+        <p:style>
+          <a:lnRef idx="1">
+            <a:schemeClr val="accent1"/>
+          </a:lnRef>
+          <a:fillRef idx="3">
+            <a:schemeClr val="accent1"/>
+          </a:fillRef>
+          <a:effectRef idx="2">
+            <a:schemeClr val="accent1"/>
+          </a:effectRef>
+          <a:fontRef idx="minor">
+            <a:schemeClr val="lt1"/>
+          </a:fontRef>
+        </p:style>
+        <p:txBody>
+          <a:bodyPr rtlCol="0" anchor="ctr"/>
+          <a:lstStyle/>
+          <a:p>
+            <a:pPr algn="ctr"/>
+          </a:p>
+        </p:txBody>
+      </p:sp>
+      <p:sp>
+        <p:nvSpPr>
+          <p:cNvPr id="27" name="TextBox 26"/>
+          <p:cNvSpPr txBox="1"/>
+          <p:nvPr/>
+        </p:nvSpPr>
+        <p:spPr>
+          <a:xfrm>
+            <a:off x="822960" y="4928616"/>
+            <a:ext cx="402336" cy="384048"/>
+          </a:xfrm>
+          <a:prstGeom prst="rect">
+            <a:avLst/>
+          </a:prstGeom>
+          <a:noFill/>
+        </p:spPr>
+        <p:txBody>
+          <a:bodyPr wrap="square" anchor="ctr" lIns="0" rIns="0" tIns="0" bIns="0">
+            <a:spAutoFit/>
+          </a:bodyPr>
+          <a:lstStyle/>
+          <a:p>
+            <a:pPr algn="ctr">
+              <a:lnSpc>
+                <a:spcPct val="100000"/>
+              </a:lnSpc>
+              <a:spcBef>
+                <a:spcPts val="0"/>
+              </a:spcBef>
+              <a:spcAft>
+                <a:spcPts val="400"/>
+              </a:spcAft>
+            </a:pPr>
+            <a:r>
+              <a:rPr sz="1300" b="1">
+                <a:solidFill>
+                  <a:srgbClr val="0F141A"/>
+                </a:solidFill>
+                <a:latin typeface="Segoe UI"/>
+              </a:rPr>
+              <a:t>4</a:t>
+            </a:r>
+          </a:p>
+        </p:txBody>
+      </p:sp>
+      <p:sp>
+        <p:nvSpPr>
+          <p:cNvPr id="28" name="TextBox 27"/>
+          <p:cNvSpPr txBox="1"/>
+          <p:nvPr/>
+        </p:nvSpPr>
+        <p:spPr>
+          <a:xfrm>
+            <a:off x="1371600" y="4846319"/>
+            <a:ext cx="4572000" cy="320040"/>
+          </a:xfrm>
+          <a:prstGeom prst="rect">
+            <a:avLst/>
+          </a:prstGeom>
+          <a:noFill/>
+        </p:spPr>
+        <p:txBody>
+          <a:bodyPr wrap="square" anchor="t" lIns="0" rIns="0" tIns="0" bIns="0">
+            <a:spAutoFit/>
+          </a:bodyPr>
+          <a:lstStyle/>
+          <a:p>
+            <a:pPr algn="l">
+              <a:lnSpc>
+                <a:spcPct val="100000"/>
+              </a:lnSpc>
+              <a:spcBef>
+                <a:spcPts val="0"/>
+              </a:spcBef>
+              <a:spcAft>
+                <a:spcPts val="400"/>
+              </a:spcAft>
+            </a:pPr>
+            <a:r>
+              <a:rPr sz="1250" b="1">
+                <a:solidFill>
+                  <a:srgbClr val="E8EAED"/>
+                </a:solidFill>
+                <a:latin typeface="Segoe UI"/>
+              </a:rPr>
+              <a:t>Subagents &amp; teams + automatización</a:t>
+            </a:r>
+          </a:p>
+        </p:txBody>
+      </p:sp>
+      <p:sp>
+        <p:nvSpPr>
+          <p:cNvPr id="29" name="TextBox 28"/>
+          <p:cNvSpPr txBox="1"/>
+          <p:nvPr/>
+        </p:nvSpPr>
+        <p:spPr>
+          <a:xfrm>
+            <a:off x="1371600" y="5148071"/>
+            <a:ext cx="4572000" cy="347472"/>
+          </a:xfrm>
+          <a:prstGeom prst="rect">
+            <a:avLst/>
+          </a:prstGeom>
+          <a:noFill/>
+        </p:spPr>
+        <p:txBody>
+          <a:bodyPr wrap="square" anchor="t" lIns="0" rIns="0" tIns="0" bIns="0">
+            <a:spAutoFit/>
+          </a:bodyPr>
+          <a:lstStyle/>
+          <a:p>
+            <a:pPr algn="l">
+              <a:lnSpc>
+                <a:spcPct val="100000"/>
+              </a:lnSpc>
+              <a:spcBef>
+                <a:spcPts val="0"/>
+              </a:spcBef>
+              <a:spcAft>
+                <a:spcPts val="400"/>
+              </a:spcAft>
+            </a:pPr>
+            <a:r>
+              <a:rPr sz="1000" b="0">
+                <a:solidFill>
+                  <a:srgbClr val="9AA4B2"/>
+                </a:solidFill>
+                <a:latin typeface="Segoe UI"/>
+              </a:rPr>
+              <a:t>Escala el trabajo; hooks que garantizan calidad.</a:t>
+            </a:r>
+          </a:p>
+        </p:txBody>
+      </p:sp>
+      <p:sp>
+        <p:nvSpPr>
+          <p:cNvPr id="30" name="TextBox 29"/>
+          <p:cNvSpPr txBox="1"/>
+          <p:nvPr/>
+        </p:nvSpPr>
+        <p:spPr>
+          <a:xfrm>
+            <a:off x="6217920" y="1783080"/>
+            <a:ext cx="5349240" cy="365760"/>
+          </a:xfrm>
+          <a:prstGeom prst="rect">
+            <a:avLst/>
+          </a:prstGeom>
+          <a:noFill/>
+        </p:spPr>
+        <p:txBody>
+          <a:bodyPr wrap="square" anchor="t" lIns="0" rIns="0" tIns="0" bIns="0">
+            <a:spAutoFit/>
+          </a:bodyPr>
+          <a:lstStyle/>
+          <a:p>
+            <a:pPr algn="l">
+              <a:lnSpc>
+                <a:spcPct val="100000"/>
+              </a:lnSpc>
+              <a:spcBef>
+                <a:spcPts val="0"/>
+              </a:spcBef>
+              <a:spcAft>
+                <a:spcPts val="400"/>
+              </a:spcAft>
+            </a:pPr>
+            <a:r>
+              <a:rPr sz="1300" b="1">
+                <a:solidFill>
+                  <a:srgbClr val="7AA2C7"/>
+                </a:solidFill>
+                <a:latin typeface="Segoe UI"/>
+              </a:rPr>
+              <a:t>PARTE 2 + 3 · el método y el grafo</a:t>
+            </a:r>
+          </a:p>
+        </p:txBody>
+      </p:sp>
+      <p:sp>
+        <p:nvSpPr>
+          <p:cNvPr id="31" name="Rounded Rectangle 30"/>
+          <p:cNvSpPr/>
+          <p:nvPr/>
+        </p:nvSpPr>
+        <p:spPr>
+          <a:xfrm>
+            <a:off x="6217920" y="2148840"/>
+            <a:ext cx="5349240" cy="777240"/>
+          </a:xfrm>
+          <a:prstGeom prst="roundRect">
+            <a:avLst>
+              <a:gd name="adj" fmla="val 9000"/>
+            </a:avLst>
+          </a:prstGeom>
+          <a:solidFill>
+            <a:srgbClr val="1A212B"/>
+          </a:solidFill>
+          <a:ln w="9525">
+            <a:solidFill>
+              <a:srgbClr val="2E3948"/>
+            </a:solidFill>
+          </a:ln>
+          <a:effectLst/>
+        </p:spPr>
+        <p:style>
+          <a:lnRef idx="1">
+            <a:schemeClr val="accent1"/>
+          </a:lnRef>
+          <a:fillRef idx="3">
+            <a:schemeClr val="accent1"/>
+          </a:fillRef>
+          <a:effectRef idx="2">
+            <a:schemeClr val="accent1"/>
+          </a:effectRef>
+          <a:fontRef idx="minor">
+            <a:schemeClr val="lt1"/>
+          </a:fontRef>
+        </p:style>
+        <p:txBody>
+          <a:bodyPr rtlCol="0" anchor="ctr"/>
+          <a:lstStyle/>
+          <a:p>
+            <a:pPr algn="ctr"/>
+          </a:p>
+        </p:txBody>
+      </p:sp>
+      <p:sp>
+        <p:nvSpPr>
+          <p:cNvPr id="32" name="Rounded Rectangle 31"/>
+          <p:cNvSpPr/>
+          <p:nvPr/>
+        </p:nvSpPr>
+        <p:spPr>
+          <a:xfrm>
+            <a:off x="6400800" y="2313432"/>
             <a:ext cx="402336" cy="402336"/>
           </a:xfrm>
           <a:prstGeom prst="roundRect">
@@ -40306,6 +41912,693 @@
       </p:sp>
       <p:sp>
         <p:nvSpPr>
+          <p:cNvPr id="33" name="TextBox 32"/>
+          <p:cNvSpPr txBox="1"/>
+          <p:nvPr/>
+        </p:nvSpPr>
+        <p:spPr>
+          <a:xfrm>
+            <a:off x="6400800" y="2322576"/>
+            <a:ext cx="402336" cy="384048"/>
+          </a:xfrm>
+          <a:prstGeom prst="rect">
+            <a:avLst/>
+          </a:prstGeom>
+          <a:noFill/>
+        </p:spPr>
+        <p:txBody>
+          <a:bodyPr wrap="square" anchor="ctr" lIns="0" rIns="0" tIns="0" bIns="0">
+            <a:spAutoFit/>
+          </a:bodyPr>
+          <a:lstStyle/>
+          <a:p>
+            <a:pPr algn="ctr">
+              <a:lnSpc>
+                <a:spcPct val="100000"/>
+              </a:lnSpc>
+              <a:spcBef>
+                <a:spcPts val="0"/>
+              </a:spcBef>
+              <a:spcAft>
+                <a:spcPts val="400"/>
+              </a:spcAft>
+            </a:pPr>
+            <a:r>
+              <a:rPr sz="1300" b="1">
+                <a:solidFill>
+                  <a:srgbClr val="0F141A"/>
+                </a:solidFill>
+                <a:latin typeface="Segoe UI"/>
+              </a:rPr>
+              <a:t>5</a:t>
+            </a:r>
+          </a:p>
+        </p:txBody>
+      </p:sp>
+      <p:sp>
+        <p:nvSpPr>
+          <p:cNvPr id="34" name="TextBox 33"/>
+          <p:cNvSpPr txBox="1"/>
+          <p:nvPr/>
+        </p:nvSpPr>
+        <p:spPr>
+          <a:xfrm>
+            <a:off x="6949440" y="2240280"/>
+            <a:ext cx="4572000" cy="320040"/>
+          </a:xfrm>
+          <a:prstGeom prst="rect">
+            <a:avLst/>
+          </a:prstGeom>
+          <a:noFill/>
+        </p:spPr>
+        <p:txBody>
+          <a:bodyPr wrap="square" anchor="t" lIns="0" rIns="0" tIns="0" bIns="0">
+            <a:spAutoFit/>
+          </a:bodyPr>
+          <a:lstStyle/>
+          <a:p>
+            <a:pPr algn="l">
+              <a:lnSpc>
+                <a:spcPct val="100000"/>
+              </a:lnSpc>
+              <a:spcBef>
+                <a:spcPts val="0"/>
+              </a:spcBef>
+              <a:spcAft>
+                <a:spcPts val="400"/>
+              </a:spcAft>
+            </a:pPr>
+            <a:r>
+              <a:rPr sz="1250" b="1">
+                <a:solidFill>
+                  <a:srgbClr val="E8EAED"/>
+                </a:solidFill>
+                <a:latin typeface="Segoe UI"/>
+              </a:rPr>
+              <a:t>El flujo de 11 etapas</a:t>
+            </a:r>
+          </a:p>
+        </p:txBody>
+      </p:sp>
+      <p:sp>
+        <p:nvSpPr>
+          <p:cNvPr id="35" name="TextBox 34"/>
+          <p:cNvSpPr txBox="1"/>
+          <p:nvPr/>
+        </p:nvSpPr>
+        <p:spPr>
+          <a:xfrm>
+            <a:off x="6949440" y="2542032"/>
+            <a:ext cx="4572000" cy="347472"/>
+          </a:xfrm>
+          <a:prstGeom prst="rect">
+            <a:avLst/>
+          </a:prstGeom>
+          <a:noFill/>
+        </p:spPr>
+        <p:txBody>
+          <a:bodyPr wrap="square" anchor="t" lIns="0" rIns="0" tIns="0" bIns="0">
+            <a:spAutoFit/>
+          </a:bodyPr>
+          <a:lstStyle/>
+          <a:p>
+            <a:pPr algn="l">
+              <a:lnSpc>
+                <a:spcPct val="100000"/>
+              </a:lnSpc>
+              <a:spcBef>
+                <a:spcPts val="0"/>
+              </a:spcBef>
+              <a:spcAft>
+                <a:spcPts val="400"/>
+              </a:spcAft>
+            </a:pPr>
+            <a:r>
+              <a:rPr sz="1000" b="0">
+                <a:solidFill>
+                  <a:srgbClr val="9AA4B2"/>
+                </a:solidFill>
+                <a:latin typeface="Segoe UI"/>
+              </a:rPr>
+              <a:t>Gates deterministas; el humano posee las decisiones.</a:t>
+            </a:r>
+          </a:p>
+        </p:txBody>
+      </p:sp>
+      <p:sp>
+        <p:nvSpPr>
+          <p:cNvPr id="36" name="Rounded Rectangle 35"/>
+          <p:cNvSpPr/>
+          <p:nvPr/>
+        </p:nvSpPr>
+        <p:spPr>
+          <a:xfrm>
+            <a:off x="6217920" y="3017520"/>
+            <a:ext cx="5349240" cy="777240"/>
+          </a:xfrm>
+          <a:prstGeom prst="roundRect">
+            <a:avLst>
+              <a:gd name="adj" fmla="val 9000"/>
+            </a:avLst>
+          </a:prstGeom>
+          <a:solidFill>
+            <a:srgbClr val="1A212B"/>
+          </a:solidFill>
+          <a:ln w="9525">
+            <a:solidFill>
+              <a:srgbClr val="2E3948"/>
+            </a:solidFill>
+          </a:ln>
+          <a:effectLst/>
+        </p:spPr>
+        <p:style>
+          <a:lnRef idx="1">
+            <a:schemeClr val="accent1"/>
+          </a:lnRef>
+          <a:fillRef idx="3">
+            <a:schemeClr val="accent1"/>
+          </a:fillRef>
+          <a:effectRef idx="2">
+            <a:schemeClr val="accent1"/>
+          </a:effectRef>
+          <a:fontRef idx="minor">
+            <a:schemeClr val="lt1"/>
+          </a:fontRef>
+        </p:style>
+        <p:txBody>
+          <a:bodyPr rtlCol="0" anchor="ctr"/>
+          <a:lstStyle/>
+          <a:p>
+            <a:pPr algn="ctr"/>
+          </a:p>
+        </p:txBody>
+      </p:sp>
+      <p:sp>
+        <p:nvSpPr>
+          <p:cNvPr id="37" name="Rounded Rectangle 36"/>
+          <p:cNvSpPr/>
+          <p:nvPr/>
+        </p:nvSpPr>
+        <p:spPr>
+          <a:xfrm>
+            <a:off x="6400800" y="3182112"/>
+            <a:ext cx="402336" cy="402336"/>
+          </a:xfrm>
+          <a:prstGeom prst="roundRect">
+            <a:avLst>
+              <a:gd name="adj" fmla="val 35000"/>
+            </a:avLst>
+          </a:prstGeom>
+          <a:solidFill>
+            <a:srgbClr val="7AA2C7"/>
+          </a:solidFill>
+          <a:ln>
+            <a:noFill/>
+          </a:ln>
+          <a:effectLst/>
+        </p:spPr>
+        <p:style>
+          <a:lnRef idx="1">
+            <a:schemeClr val="accent1"/>
+          </a:lnRef>
+          <a:fillRef idx="3">
+            <a:schemeClr val="accent1"/>
+          </a:fillRef>
+          <a:effectRef idx="2">
+            <a:schemeClr val="accent1"/>
+          </a:effectRef>
+          <a:fontRef idx="minor">
+            <a:schemeClr val="lt1"/>
+          </a:fontRef>
+        </p:style>
+        <p:txBody>
+          <a:bodyPr rtlCol="0" anchor="ctr"/>
+          <a:lstStyle/>
+          <a:p>
+            <a:pPr algn="ctr"/>
+          </a:p>
+        </p:txBody>
+      </p:sp>
+      <p:sp>
+        <p:nvSpPr>
+          <p:cNvPr id="38" name="TextBox 37"/>
+          <p:cNvSpPr txBox="1"/>
+          <p:nvPr/>
+        </p:nvSpPr>
+        <p:spPr>
+          <a:xfrm>
+            <a:off x="6400800" y="3191256"/>
+            <a:ext cx="402336" cy="384048"/>
+          </a:xfrm>
+          <a:prstGeom prst="rect">
+            <a:avLst/>
+          </a:prstGeom>
+          <a:noFill/>
+        </p:spPr>
+        <p:txBody>
+          <a:bodyPr wrap="square" anchor="ctr" lIns="0" rIns="0" tIns="0" bIns="0">
+            <a:spAutoFit/>
+          </a:bodyPr>
+          <a:lstStyle/>
+          <a:p>
+            <a:pPr algn="ctr">
+              <a:lnSpc>
+                <a:spcPct val="100000"/>
+              </a:lnSpc>
+              <a:spcBef>
+                <a:spcPts val="0"/>
+              </a:spcBef>
+              <a:spcAft>
+                <a:spcPts val="400"/>
+              </a:spcAft>
+            </a:pPr>
+            <a:r>
+              <a:rPr sz="1300" b="1">
+                <a:solidFill>
+                  <a:srgbClr val="0F141A"/>
+                </a:solidFill>
+                <a:latin typeface="Segoe UI"/>
+              </a:rPr>
+              <a:t>6</a:t>
+            </a:r>
+          </a:p>
+        </p:txBody>
+      </p:sp>
+      <p:sp>
+        <p:nvSpPr>
+          <p:cNvPr id="39" name="TextBox 38"/>
+          <p:cNvSpPr txBox="1"/>
+          <p:nvPr/>
+        </p:nvSpPr>
+        <p:spPr>
+          <a:xfrm>
+            <a:off x="6949440" y="3108960"/>
+            <a:ext cx="4572000" cy="320040"/>
+          </a:xfrm>
+          <a:prstGeom prst="rect">
+            <a:avLst/>
+          </a:prstGeom>
+          <a:noFill/>
+        </p:spPr>
+        <p:txBody>
+          <a:bodyPr wrap="square" anchor="t" lIns="0" rIns="0" tIns="0" bIns="0">
+            <a:spAutoFit/>
+          </a:bodyPr>
+          <a:lstStyle/>
+          <a:p>
+            <a:pPr algn="l">
+              <a:lnSpc>
+                <a:spcPct val="100000"/>
+              </a:lnSpc>
+              <a:spcBef>
+                <a:spcPts val="0"/>
+              </a:spcBef>
+              <a:spcAft>
+                <a:spcPts val="400"/>
+              </a:spcAft>
+            </a:pPr>
+            <a:r>
+              <a:rPr sz="1250" b="1">
+                <a:solidFill>
+                  <a:srgbClr val="E8EAED"/>
+                </a:solidFill>
+                <a:latin typeface="Segoe UI"/>
+              </a:rPr>
+              <a:t>Las tools del método</a:t>
+            </a:r>
+          </a:p>
+        </p:txBody>
+      </p:sp>
+      <p:sp>
+        <p:nvSpPr>
+          <p:cNvPr id="40" name="TextBox 39"/>
+          <p:cNvSpPr txBox="1"/>
+          <p:nvPr/>
+        </p:nvSpPr>
+        <p:spPr>
+          <a:xfrm>
+            <a:off x="6949440" y="3410712"/>
+            <a:ext cx="4572000" cy="347472"/>
+          </a:xfrm>
+          <a:prstGeom prst="rect">
+            <a:avLst/>
+          </a:prstGeom>
+          <a:noFill/>
+        </p:spPr>
+        <p:txBody>
+          <a:bodyPr wrap="square" anchor="t" lIns="0" rIns="0" tIns="0" bIns="0">
+            <a:spAutoFit/>
+          </a:bodyPr>
+          <a:lstStyle/>
+          <a:p>
+            <a:pPr algn="l">
+              <a:lnSpc>
+                <a:spcPct val="100000"/>
+              </a:lnSpc>
+              <a:spcBef>
+                <a:spcPts val="0"/>
+              </a:spcBef>
+              <a:spcAft>
+                <a:spcPts val="400"/>
+              </a:spcAft>
+            </a:pPr>
+            <a:r>
+              <a:rPr sz="1000" b="0">
+                <a:solidFill>
+                  <a:srgbClr val="9AA4B2"/>
+                </a:solidFill>
+                <a:latin typeface="Segoe UI"/>
+              </a:rPr>
+              <a:t>CodeGraph · Serena · GSD: barato→caro, determinista→LLM.</a:t>
+            </a:r>
+          </a:p>
+        </p:txBody>
+      </p:sp>
+      <p:sp>
+        <p:nvSpPr>
+          <p:cNvPr id="41" name="Rounded Rectangle 40"/>
+          <p:cNvSpPr/>
+          <p:nvPr/>
+        </p:nvSpPr>
+        <p:spPr>
+          <a:xfrm>
+            <a:off x="6217920" y="3886200"/>
+            <a:ext cx="5349240" cy="777240"/>
+          </a:xfrm>
+          <a:prstGeom prst="roundRect">
+            <a:avLst>
+              <a:gd name="adj" fmla="val 9000"/>
+            </a:avLst>
+          </a:prstGeom>
+          <a:solidFill>
+            <a:srgbClr val="1A212B"/>
+          </a:solidFill>
+          <a:ln w="9525">
+            <a:solidFill>
+              <a:srgbClr val="2E3948"/>
+            </a:solidFill>
+          </a:ln>
+          <a:effectLst/>
+        </p:spPr>
+        <p:style>
+          <a:lnRef idx="1">
+            <a:schemeClr val="accent1"/>
+          </a:lnRef>
+          <a:fillRef idx="3">
+            <a:schemeClr val="accent1"/>
+          </a:fillRef>
+          <a:effectRef idx="2">
+            <a:schemeClr val="accent1"/>
+          </a:effectRef>
+          <a:fontRef idx="minor">
+            <a:schemeClr val="lt1"/>
+          </a:fontRef>
+        </p:style>
+        <p:txBody>
+          <a:bodyPr rtlCol="0" anchor="ctr"/>
+          <a:lstStyle/>
+          <a:p>
+            <a:pPr algn="ctr"/>
+          </a:p>
+        </p:txBody>
+      </p:sp>
+      <p:sp>
+        <p:nvSpPr>
+          <p:cNvPr id="42" name="Rounded Rectangle 41"/>
+          <p:cNvSpPr/>
+          <p:nvPr/>
+        </p:nvSpPr>
+        <p:spPr>
+          <a:xfrm>
+            <a:off x="6400800" y="4050791"/>
+            <a:ext cx="402336" cy="402336"/>
+          </a:xfrm>
+          <a:prstGeom prst="roundRect">
+            <a:avLst>
+              <a:gd name="adj" fmla="val 35000"/>
+            </a:avLst>
+          </a:prstGeom>
+          <a:solidFill>
+            <a:srgbClr val="7AA2C7"/>
+          </a:solidFill>
+          <a:ln>
+            <a:noFill/>
+          </a:ln>
+          <a:effectLst/>
+        </p:spPr>
+        <p:style>
+          <a:lnRef idx="1">
+            <a:schemeClr val="accent1"/>
+          </a:lnRef>
+          <a:fillRef idx="3">
+            <a:schemeClr val="accent1"/>
+          </a:fillRef>
+          <a:effectRef idx="2">
+            <a:schemeClr val="accent1"/>
+          </a:effectRef>
+          <a:fontRef idx="minor">
+            <a:schemeClr val="lt1"/>
+          </a:fontRef>
+        </p:style>
+        <p:txBody>
+          <a:bodyPr rtlCol="0" anchor="ctr"/>
+          <a:lstStyle/>
+          <a:p>
+            <a:pPr algn="ctr"/>
+          </a:p>
+        </p:txBody>
+      </p:sp>
+      <p:sp>
+        <p:nvSpPr>
+          <p:cNvPr id="43" name="TextBox 42"/>
+          <p:cNvSpPr txBox="1"/>
+          <p:nvPr/>
+        </p:nvSpPr>
+        <p:spPr>
+          <a:xfrm>
+            <a:off x="6400800" y="4059936"/>
+            <a:ext cx="402336" cy="384048"/>
+          </a:xfrm>
+          <a:prstGeom prst="rect">
+            <a:avLst/>
+          </a:prstGeom>
+          <a:noFill/>
+        </p:spPr>
+        <p:txBody>
+          <a:bodyPr wrap="square" anchor="ctr" lIns="0" rIns="0" tIns="0" bIns="0">
+            <a:spAutoFit/>
+          </a:bodyPr>
+          <a:lstStyle/>
+          <a:p>
+            <a:pPr algn="ctr">
+              <a:lnSpc>
+                <a:spcPct val="100000"/>
+              </a:lnSpc>
+              <a:spcBef>
+                <a:spcPts val="0"/>
+              </a:spcBef>
+              <a:spcAft>
+                <a:spcPts val="400"/>
+              </a:spcAft>
+            </a:pPr>
+            <a:r>
+              <a:rPr sz="1300" b="1">
+                <a:solidFill>
+                  <a:srgbClr val="0F141A"/>
+                </a:solidFill>
+                <a:latin typeface="Segoe UI"/>
+              </a:rPr>
+              <a:t>7</a:t>
+            </a:r>
+          </a:p>
+        </p:txBody>
+      </p:sp>
+      <p:sp>
+        <p:nvSpPr>
+          <p:cNvPr id="44" name="TextBox 43"/>
+          <p:cNvSpPr txBox="1"/>
+          <p:nvPr/>
+        </p:nvSpPr>
+        <p:spPr>
+          <a:xfrm>
+            <a:off x="6949440" y="3977639"/>
+            <a:ext cx="4572000" cy="320040"/>
+          </a:xfrm>
+          <a:prstGeom prst="rect">
+            <a:avLst/>
+          </a:prstGeom>
+          <a:noFill/>
+        </p:spPr>
+        <p:txBody>
+          <a:bodyPr wrap="square" anchor="t" lIns="0" rIns="0" tIns="0" bIns="0">
+            <a:spAutoFit/>
+          </a:bodyPr>
+          <a:lstStyle/>
+          <a:p>
+            <a:pPr algn="l">
+              <a:lnSpc>
+                <a:spcPct val="100000"/>
+              </a:lnSpc>
+              <a:spcBef>
+                <a:spcPts val="0"/>
+              </a:spcBef>
+              <a:spcAft>
+                <a:spcPts val="400"/>
+              </a:spcAft>
+            </a:pPr>
+            <a:r>
+              <a:rPr sz="1250" b="1">
+                <a:solidFill>
+                  <a:srgbClr val="E8EAED"/>
+                </a:solidFill>
+                <a:latin typeface="Segoe UI"/>
+              </a:rPr>
+              <a:t>Transferible y hasta en ops</a:t>
+            </a:r>
+          </a:p>
+        </p:txBody>
+      </p:sp>
+      <p:sp>
+        <p:nvSpPr>
+          <p:cNvPr id="45" name="TextBox 44"/>
+          <p:cNvSpPr txBox="1"/>
+          <p:nvPr/>
+        </p:nvSpPr>
+        <p:spPr>
+          <a:xfrm>
+            <a:off x="6949440" y="4279392"/>
+            <a:ext cx="4572000" cy="347472"/>
+          </a:xfrm>
+          <a:prstGeom prst="rect">
+            <a:avLst/>
+          </a:prstGeom>
+          <a:noFill/>
+        </p:spPr>
+        <p:txBody>
+          <a:bodyPr wrap="square" anchor="t" lIns="0" rIns="0" tIns="0" bIns="0">
+            <a:spAutoFit/>
+          </a:bodyPr>
+          <a:lstStyle/>
+          <a:p>
+            <a:pPr algn="l">
+              <a:lnSpc>
+                <a:spcPct val="100000"/>
+              </a:lnSpc>
+              <a:spcBef>
+                <a:spcPts val="0"/>
+              </a:spcBef>
+              <a:spcAft>
+                <a:spcPts val="400"/>
+              </a:spcAft>
+            </a:pPr>
+            <a:r>
+              <a:rPr sz="1000" b="0">
+                <a:solidFill>
+                  <a:srgbClr val="9AA4B2"/>
+                </a:solidFill>
+                <a:latin typeface="Segoe UI"/>
+              </a:rPr>
+              <a:t>Starter-kit probado en Copilot; machine-sync con guardrails.</a:t>
+            </a:r>
+          </a:p>
+        </p:txBody>
+      </p:sp>
+      <p:sp>
+        <p:nvSpPr>
+          <p:cNvPr id="46" name="Rounded Rectangle 45"/>
+          <p:cNvSpPr/>
+          <p:nvPr/>
+        </p:nvSpPr>
+        <p:spPr>
+          <a:xfrm>
+            <a:off x="6217920" y="4754879"/>
+            <a:ext cx="5349240" cy="777240"/>
+          </a:xfrm>
+          <a:prstGeom prst="roundRect">
+            <a:avLst>
+              <a:gd name="adj" fmla="val 9000"/>
+            </a:avLst>
+          </a:prstGeom>
+          <a:solidFill>
+            <a:srgbClr val="1A212B"/>
+          </a:solidFill>
+          <a:ln w="9525">
+            <a:solidFill>
+              <a:srgbClr val="2E3948"/>
+            </a:solidFill>
+          </a:ln>
+          <a:effectLst/>
+        </p:spPr>
+        <p:style>
+          <a:lnRef idx="1">
+            <a:schemeClr val="accent1"/>
+          </a:lnRef>
+          <a:fillRef idx="3">
+            <a:schemeClr val="accent1"/>
+          </a:fillRef>
+          <a:effectRef idx="2">
+            <a:schemeClr val="accent1"/>
+          </a:effectRef>
+          <a:fontRef idx="minor">
+            <a:schemeClr val="lt1"/>
+          </a:fontRef>
+        </p:style>
+        <p:txBody>
+          <a:bodyPr rtlCol="0" anchor="ctr"/>
+          <a:lstStyle/>
+          <a:p>
+            <a:pPr algn="ctr"/>
+          </a:p>
+        </p:txBody>
+      </p:sp>
+      <p:sp>
+        <p:nvSpPr>
+          <p:cNvPr id="47" name="Rounded Rectangle 46"/>
+          <p:cNvSpPr/>
+          <p:nvPr/>
+        </p:nvSpPr>
+        <p:spPr>
+          <a:xfrm>
+            <a:off x="6400800" y="4919471"/>
+            <a:ext cx="402336" cy="402336"/>
+          </a:xfrm>
+          <a:prstGeom prst="roundRect">
+            <a:avLst>
+              <a:gd name="adj" fmla="val 35000"/>
+            </a:avLst>
+          </a:prstGeom>
+          <a:solidFill>
+            <a:srgbClr val="7AA2C7"/>
+          </a:solidFill>
+          <a:ln>
+            <a:noFill/>
+          </a:ln>
+          <a:effectLst/>
+        </p:spPr>
+        <p:style>
+          <a:lnRef idx="1">
+            <a:schemeClr val="accent1"/>
+          </a:lnRef>
+          <a:fillRef idx="3">
+            <a:schemeClr val="accent1"/>
+          </a:fillRef>
+          <a:effectRef idx="2">
+            <a:schemeClr val="accent1"/>
+          </a:effectRef>
+          <a:fontRef idx="minor">
+            <a:schemeClr val="lt1"/>
+          </a:fontRef>
+        </p:style>
+        <p:txBody>
+          <a:bodyPr rtlCol="0" anchor="ctr"/>
+          <a:lstStyle/>
+          <a:p>
+            <a:pPr algn="ctr"/>
+          </a:p>
+        </p:txBody>
+      </p:sp>
+      <p:sp>
+        <p:nvSpPr>
           <p:cNvPr id="48" name="TextBox 47"/>
           <p:cNvSpPr txBox="1"/>
           <p:nvPr/>
@@ -40389,7 +42682,7 @@
                 </a:solidFill>
                 <a:latin typeface="Segoe UI"/>
               </a:rPr>
-              <a:t>Hasta en ops</a:t>
+              <a:t>El grafo de tickets (graphify)</a:t>
             </a:r>
           </a:p>
         </p:txBody>
@@ -40434,7 +42727,7 @@
                 </a:solidFill>
                 <a:latin typeface="Segoe UI"/>
               </a:rPr>
-              <a:t>Machine-sync con guardrails: el mismo método fuera del código.</a:t>
+              <a:t>507 nodos · 35 comunidades: history-first sin LLM.</a:t>
             </a:r>
           </a:p>
         </p:txBody>

--- a/presentacion/Claude_Code_Presentacion.pptx
+++ b/presentacion/Claude_Code_Presentacion.pptx
@@ -23573,7 +23573,7 @@
                 </a:solidFill>
                 <a:latin typeface="Segoe UI"/>
               </a:rPr>
-              <a:t>Ninguna etapa dice 'pídele al LLM que lo arregle': la potencia se canaliza por gates.</a:t>
+              <a:t>El agente orquesta y es donde vive la inferencia; lo caro se concentra en plan/código/verify, no en buscar.</a:t>
             </a:r>
             <a:r>
               <a:rPr sz="1300" b="1">
@@ -25851,7 +25851,7 @@
                 </a:solidFill>
                 <a:latin typeface="Segoe UI"/>
               </a:rPr>
-              <a:t>coste 0</a:t>
+              <a:t>sin inferencia</a:t>
             </a:r>
           </a:p>
         </p:txBody>
@@ -26400,7 +26400,7 @@
                 </a:solidFill>
                 <a:latin typeface="Segoe UI"/>
               </a:rPr>
-              <a:t>coste 0</a:t>
+              <a:t>sin inferencia</a:t>
             </a:r>
           </a:p>
         </p:txBody>
@@ -27966,7 +27966,7 @@
                 </a:solidFill>
                 <a:latin typeface="Segoe UI"/>
               </a:rPr>
-              <a:t>El método hecho tooling: subagentes gsd-* + estado en .planning/. Automatiza los gates 5-7.</a:t>
+              <a:t>El método productizado (subagentes gsd-* + .planning/). Para greenfield multi-fase; este proyecto usa data/changes/, no GSD.</a:t>
             </a:r>
           </a:p>
         </p:txBody>
@@ -29716,8 +29716,8 @@
         </p:nvSpPr>
         <p:spPr>
           <a:xfrm>
-            <a:off x="640080" y="5074920"/>
-            <a:ext cx="10927080" cy="457200"/>
+            <a:off x="640080" y="5029200"/>
+            <a:ext cx="10927080" cy="658368"/>
           </a:xfrm>
           <a:prstGeom prst="rect">
             <a:avLst/>
@@ -29732,7 +29732,7 @@
           <a:p>
             <a:pPr algn="l">
               <a:lnSpc>
-                <a:spcPct val="100000"/>
+                <a:spcPct val="105000"/>
               </a:lnSpc>
               <a:spcBef>
                 <a:spcPts val="0"/>
@@ -29748,7 +29748,7 @@
                 </a:solidFill>
                 <a:latin typeface="Segoe UI"/>
               </a:rPr>
-              <a:t>Es la Parte 1 aplicada: </a:t>
+              <a:t>¿Lo usamos aquí? No: </a:t>
             </a:r>
             <a:r>
               <a:rPr sz="1150" b="0">
@@ -29757,7 +29757,7 @@
                 </a:solidFill>
                 <a:latin typeface="Segoe UI"/>
               </a:rPr>
-              <a:t>subagentes custom (sección 06) + skills, distribuidos como plugin (sección 05).</a:t>
+              <a:t>este proyecto corre el flujo de 11 etapas + data/changes/, más depurado para fixes por ticket. GSD encaja en un greenfield multi-componente (roadmap → fases). Aquí ilustra la Parte 1: subagentes custom + skills como plugin.</a:t>
             </a:r>
           </a:p>
         </p:txBody>
@@ -29905,7 +29905,7 @@
                 </a:solidFill>
                 <a:latin typeface="Segoe UI"/>
               </a:rPr>
-              <a:t>GSD automatiza los gates que la metodología aplica a mano: plan, verificación, rastro durable.</a:t>
+              <a:t>Mismo método, productizado: GSD brilla en greenfield multi-fase; este proyecto usa el flujo data/changes/, más afinado a fixes por ticket.</a:t>
             </a:r>
             <a:r>
               <a:rPr sz="1300" b="1">

--- a/presentacion/Claude_Code_Presentacion.pptx
+++ b/presentacion/Claude_Code_Presentacion.pptx
@@ -14954,7 +14954,7 @@
                 </a:solidFill>
                 <a:latin typeface="Segoe UI"/>
               </a:rPr>
-              <a:t>GSD es esto en producción — gsd-planner, gsd-executor, gsd-verifier son subagentes custom distribuidos como plugin.</a:t>
+              <a:t>GSD empaqueta exactamente esto — gsd-planner, gsd-executor, gsd-verifier son subagentes custom como plugin (este proyecto usa el flujo data/changes/, no GSD — ver Parte 2).</a:t>
             </a:r>
           </a:p>
         </p:txBody>
@@ -20860,7 +20860,7 @@
                 </a:solidFill>
                 <a:latin typeface="Segoe UI"/>
               </a:rPr>
-              <a:t>no es un flujo de Claude Code — es una forma de trabajar con CUALQUIER agente. La sección 11 lo demuestra transfiriéndola a GitHub Copilot.</a:t>
+              <a:t>no es un flujo de Claude Code — es una forma de trabajar con CUALQUIER agente. La sección 10 lo demuestra transfiriéndola a GitHub Copilot.</a:t>
             </a:r>
           </a:p>
         </p:txBody>
@@ -29905,7 +29905,7 @@
                 </a:solidFill>
                 <a:latin typeface="Segoe UI"/>
               </a:rPr>
-              <a:t>Mismo método, productizado: GSD brilla en greenfield multi-fase; este proyecto usa el flujo data/changes/, más afinado a fixes por ticket.</a:t>
+              <a:t>Mismo método, productizado: GSD para greenfield multi-fase; aquí, data/changes/ afinado a fixes por ticket.</a:t>
             </a:r>
             <a:r>
               <a:rPr sz="1300" b="1">
@@ -42269,7 +42269,7 @@
                 </a:solidFill>
                 <a:latin typeface="Segoe UI"/>
               </a:rPr>
-              <a:t>CodeGraph · Serena · GSD: barato→caro, determinista→LLM.</a:t>
+              <a:t>CodeGraph · Serena · oráculos: barato→caro; GSD = el método productizado.</a:t>
             </a:r>
           </a:p>
         </p:txBody>
